--- a/docs/competition/9月22日路演-社区先知.pptx
+++ b/docs/competition/9月22日路演-社区先知.pptx
@@ -3149,8 +3149,8 @@
         </p:nvSpPr>
         <p:spPr>
           <a:xfrm>
-            <a:off x="1005840" y="1828800"/>
-            <a:ext cx="10058400" cy="1188720"/>
+            <a:off x="1005840" y="1737360"/>
+            <a:ext cx="6035040" cy="868680"/>
           </a:xfrm>
           <a:prstGeom prst="rect">
             <a:avLst/>
@@ -3169,7 +3169,7 @@
               </a:lnSpc>
             </a:pPr>
             <a:r>
-              <a:rPr sz="5400" b="1">
+              <a:rPr sz="5200" b="1">
                 <a:solidFill>
                   <a:srgbClr val="FFFFFF"/>
                 </a:solidFill>
@@ -3177,7 +3177,7 @@
                 <a:ea typeface="微软雅黑"/>
                 <a:cs typeface="微软雅黑"/>
               </a:rPr>
-              <a:t>社区先知 CommunityInsight</a:t>
+              <a:t>社区先知</a:t>
             </a:r>
           </a:p>
         </p:txBody>
@@ -3190,8 +3190,8 @@
         </p:nvSpPr>
         <p:spPr>
           <a:xfrm>
-            <a:off x="1005840" y="3108960"/>
-            <a:ext cx="10058400" cy="731520"/>
+            <a:off x="1005840" y="2697480"/>
+            <a:ext cx="6035040" cy="685800"/>
           </a:xfrm>
           <a:prstGeom prst="rect">
             <a:avLst/>
@@ -3210,7 +3210,48 @@
               </a:lnSpc>
             </a:pPr>
             <a:r>
-              <a:rPr sz="3000" b="0">
+              <a:rPr sz="3600" b="1">
+                <a:solidFill>
+                  <a:srgbClr val="FFFFFF"/>
+                </a:solidFill>
+                <a:latin typeface="微软雅黑"/>
+                <a:ea typeface="微软雅黑"/>
+                <a:cs typeface="微软雅黑"/>
+              </a:rPr>
+              <a:t>CommunityInsight</a:t>
+            </a:r>
+          </a:p>
+        </p:txBody>
+      </p:sp>
+      <p:sp>
+        <p:nvSpPr>
+          <p:cNvPr id="5" name="TextBox 4"/>
+          <p:cNvSpPr txBox="1"/>
+          <p:nvPr/>
+        </p:nvSpPr>
+        <p:spPr>
+          <a:xfrm>
+            <a:off x="1005840" y="3611880"/>
+            <a:ext cx="6035040" cy="640080"/>
+          </a:xfrm>
+          <a:prstGeom prst="rect">
+            <a:avLst/>
+          </a:prstGeom>
+          <a:noFill/>
+        </p:spPr>
+        <p:txBody>
+          <a:bodyPr wrap="square">
+            <a:spAutoFit/>
+          </a:bodyPr>
+          <a:lstStyle/>
+          <a:p>
+            <a:pPr algn="l">
+              <a:lnSpc>
+                <a:spcPct val="125000"/>
+              </a:lnSpc>
+            </a:pPr>
+            <a:r>
+              <a:rPr sz="2600" b="0">
                 <a:solidFill>
                   <a:srgbClr val="FF8C42"/>
                 </a:solidFill>
@@ -3225,14 +3266,14 @@
       </p:sp>
       <p:sp>
         <p:nvSpPr>
-          <p:cNvPr id="5" name="TextBox 4"/>
+          <p:cNvPr id="6" name="TextBox 5"/>
           <p:cNvSpPr txBox="1"/>
           <p:nvPr/>
         </p:nvSpPr>
         <p:spPr>
           <a:xfrm>
-            <a:off x="1005840" y="4023360"/>
-            <a:ext cx="10058400" cy="731520"/>
+            <a:off x="1005840" y="4389120"/>
+            <a:ext cx="6035040" cy="640080"/>
           </a:xfrm>
           <a:prstGeom prst="rect">
             <a:avLst/>
@@ -3251,7 +3292,7 @@
               </a:lnSpc>
             </a:pPr>
             <a:r>
-              <a:rPr sz="2400" b="0">
+              <a:rPr sz="2200" b="0">
                 <a:solidFill>
                   <a:srgbClr val="FFFFFF"/>
                 </a:solidFill>
@@ -3266,7 +3307,7 @@
       </p:sp>
       <p:pic>
         <p:nvPicPr>
-          <p:cNvPr id="6" name="Picture 5" descr="01-登录页.png"/>
+          <p:cNvPr id="7" name="Picture 6" descr="01-登录页.png"/>
           <p:cNvPicPr>
             <a:picLocks noChangeAspect="1"/>
           </p:cNvPicPr>
@@ -3280,8 +3321,8 @@
         </p:blipFill>
         <p:spPr>
           <a:xfrm>
-            <a:off x="7589520" y="1188720"/>
-            <a:ext cx="3931920" cy="2457450"/>
+            <a:off x="7315200" y="1463040"/>
+            <a:ext cx="4206240" cy="2628900"/>
           </a:xfrm>
           <a:prstGeom prst="rect">
             <a:avLst/>
@@ -5012,7 +5053,7 @@
         <p:spPr>
           <a:xfrm>
             <a:off x="868680" y="1600200"/>
-            <a:ext cx="5852160" cy="2194560"/>
+            <a:ext cx="5852160" cy="2377440"/>
           </a:xfrm>
           <a:prstGeom prst="rect">
             <a:avLst/>
@@ -5027,11 +5068,11 @@
           <a:p>
             <a:pPr algn="l">
               <a:lnSpc>
-                <a:spcPct val="150000"/>
+                <a:spcPct val="145000"/>
               </a:lnSpc>
             </a:pPr>
             <a:r>
-              <a:rPr sz="2400" b="0">
+              <a:rPr sz="2200" b="0">
                 <a:solidFill>
                   <a:srgbClr val="1B2233"/>
                 </a:solidFill>
@@ -5045,11 +5086,11 @@
           <a:p>
             <a:pPr algn="l">
               <a:lnSpc>
-                <a:spcPct val="150000"/>
+                <a:spcPct val="145000"/>
               </a:lnSpc>
             </a:pPr>
             <a:r>
-              <a:rPr sz="2400" b="0">
+              <a:rPr sz="2200" b="0">
                 <a:solidFill>
                   <a:srgbClr val="1B2233"/>
                 </a:solidFill>
@@ -5057,17 +5098,35 @@
                 <a:ea typeface="微软雅黑"/>
                 <a:cs typeface="微软雅黑"/>
               </a:rPr>
-              <a:t>5 种消息：请求 / 响应 / 通知 / 错误 / 转交</a:t>
+              <a:t>5 种消息：请求 / 响应 / 通知 /</a:t>
             </a:r>
           </a:p>
           <a:p>
             <a:pPr algn="l">
               <a:lnSpc>
-                <a:spcPct val="150000"/>
+                <a:spcPct val="145000"/>
               </a:lnSpc>
             </a:pPr>
             <a:r>
-              <a:rPr sz="2400" b="0">
+              <a:rPr sz="2200" b="0">
+                <a:solidFill>
+                  <a:srgbClr val="1B2233"/>
+                </a:solidFill>
+                <a:latin typeface="微软雅黑"/>
+                <a:ea typeface="微软雅黑"/>
+                <a:cs typeface="微软雅黑"/>
+              </a:rPr>
+              <a:t>错误 / 转交</a:t>
+            </a:r>
+          </a:p>
+          <a:p>
+            <a:pPr algn="l">
+              <a:lnSpc>
+                <a:spcPct val="145000"/>
+              </a:lnSpc>
+            </a:pPr>
+            <a:r>
+              <a:rPr sz="2200" b="0">
                 <a:solidFill>
                   <a:srgbClr val="1B2233"/>
                 </a:solidFill>

--- a/docs/competition/9月22日路演-社区先知.pptx
+++ b/docs/competition/9月22日路演-社区先知.pptx
@@ -15,6 +15,8 @@
     <p:sldId id="263" r:id="rId14"/>
     <p:sldId id="264" r:id="rId15"/>
     <p:sldId id="265" r:id="rId16"/>
+    <p:sldId id="266" r:id="rId17"/>
+    <p:sldId id="267" r:id="rId18"/>
   </p:sldIdLst>
   <p:sldSz cx="12191695" cy="6858000" type="screen4x3"/>
   <p:notesSz cx="6858000" cy="9144000"/>
@@ -114,6 +116,986 @@
     </a:lvl9pPr>
   </p:defaultTextStyle>
 </p:presentation>
+</file>
+
+<file path=ppt/notesMasters/notesMaster1.xml><?xml version="1.0" encoding="utf-8"?>
+<p:notesMaster xmlns:a="http://schemas.openxmlformats.org/drawingml/2006/main" xmlns:p="http://schemas.openxmlformats.org/presentationml/2006/main" xmlns:r="http://schemas.openxmlformats.org/officeDocument/2006/relationships">
+  <p:cSld>
+    <p:bg>
+      <p:bgRef idx="1001">
+        <a:schemeClr val="bg1"/>
+      </p:bgRef>
+    </p:bg>
+    <p:spTree>
+      <p:nvGrpSpPr>
+        <p:cNvPr id="1" name=""/>
+        <p:cNvGrpSpPr/>
+        <p:nvPr/>
+      </p:nvGrpSpPr>
+      <p:grpSpPr>
+        <a:xfrm>
+          <a:off x="0" y="0"/>
+          <a:ext cx="0" cy="0"/>
+          <a:chOff x="0" y="0"/>
+          <a:chExt cx="0" cy="0"/>
+        </a:xfrm>
+      </p:grpSpPr>
+      <p:sp>
+        <p:nvSpPr>
+          <p:cNvPr id="2" name="Header Placeholder 1"/>
+          <p:cNvSpPr>
+            <a:spLocks noGrp="1"/>
+          </p:cNvSpPr>
+          <p:nvPr>
+            <p:ph type="hdr" sz="quarter"/>
+          </p:nvPr>
+        </p:nvSpPr>
+        <p:spPr>
+          <a:xfrm>
+            <a:off x="0" y="0"/>
+            <a:ext cx="2971800" cy="457200"/>
+          </a:xfrm>
+          <a:prstGeom prst="rect">
+            <a:avLst/>
+          </a:prstGeom>
+        </p:spPr>
+        <p:txBody>
+          <a:bodyPr vert="horz" lIns="91440" tIns="45720" rIns="91440" bIns="45720" rtlCol="0"/>
+          <a:lstStyle>
+            <a:lvl1pPr algn="l">
+              <a:defRPr sz="1200"/>
+            </a:lvl1pPr>
+          </a:lstStyle>
+          <a:p>
+            <a:endParaRPr lang="en-US"/>
+          </a:p>
+        </p:txBody>
+      </p:sp>
+      <p:sp>
+        <p:nvSpPr>
+          <p:cNvPr id="3" name="Date Placeholder 2"/>
+          <p:cNvSpPr>
+            <a:spLocks noGrp="1"/>
+          </p:cNvSpPr>
+          <p:nvPr>
+            <p:ph type="dt" idx="1"/>
+          </p:nvPr>
+        </p:nvSpPr>
+        <p:spPr>
+          <a:xfrm>
+            <a:off x="3884613" y="0"/>
+            <a:ext cx="2971800" cy="457200"/>
+          </a:xfrm>
+          <a:prstGeom prst="rect">
+            <a:avLst/>
+          </a:prstGeom>
+        </p:spPr>
+        <p:txBody>
+          <a:bodyPr vert="horz" lIns="91440" tIns="45720" rIns="91440" bIns="45720" rtlCol="0"/>
+          <a:lstStyle>
+            <a:lvl1pPr algn="r">
+              <a:defRPr sz="1200"/>
+            </a:lvl1pPr>
+          </a:lstStyle>
+          <a:p>
+            <a:fld id="{0F89C1C7-3DCD-1040-A9CF-14679D8B5DDD}" type="datetimeFigureOut">
+              <a:rPr lang="en-US" smtClean="0"/>
+              <a:t>10/17/16</a:t>
+            </a:fld>
+            <a:endParaRPr lang="en-US"/>
+          </a:p>
+        </p:txBody>
+      </p:sp>
+      <p:sp>
+        <p:nvSpPr>
+          <p:cNvPr id="4" name="Slide Image Placeholder 3"/>
+          <p:cNvSpPr>
+            <a:spLocks noGrp="1" noRot="1" noChangeAspect="1"/>
+          </p:cNvSpPr>
+          <p:nvPr>
+            <p:ph type="sldImg" idx="2"/>
+          </p:nvPr>
+        </p:nvSpPr>
+        <p:spPr>
+          <a:xfrm>
+            <a:off x="1143000" y="685800"/>
+            <a:ext cx="4572000" cy="3429000"/>
+          </a:xfrm>
+          <a:prstGeom prst="rect">
+            <a:avLst/>
+          </a:prstGeom>
+          <a:noFill/>
+          <a:ln w="12700">
+            <a:solidFill>
+              <a:prstClr val="black"/>
+            </a:solidFill>
+          </a:ln>
+        </p:spPr>
+        <p:txBody>
+          <a:bodyPr vert="horz" lIns="91440" tIns="45720" rIns="91440" bIns="45720" rtlCol="0" anchor="ctr"/>
+          <a:lstStyle/>
+          <a:p>
+            <a:endParaRPr lang="en-US"/>
+          </a:p>
+        </p:txBody>
+      </p:sp>
+      <p:sp>
+        <p:nvSpPr>
+          <p:cNvPr id="5" name="Notes Placeholder 4"/>
+          <p:cNvSpPr>
+            <a:spLocks noGrp="1"/>
+          </p:cNvSpPr>
+          <p:nvPr>
+            <p:ph type="body" sz="quarter" idx="3"/>
+          </p:nvPr>
+        </p:nvSpPr>
+        <p:spPr>
+          <a:xfrm>
+            <a:off x="685800" y="4343400"/>
+            <a:ext cx="5486400" cy="4114800"/>
+          </a:xfrm>
+          <a:prstGeom prst="rect">
+            <a:avLst/>
+          </a:prstGeom>
+        </p:spPr>
+        <p:txBody>
+          <a:bodyPr vert="horz" lIns="91440" tIns="45720" rIns="91440" bIns="45720" rtlCol="0"/>
+          <a:lstStyle/>
+          <a:p>
+            <a:pPr lvl="0"/>
+            <a:r>
+              <a:rPr lang="en-US" smtClean="0"/>
+              <a:t>Click to edit Master text styles</a:t>
+            </a:r>
+          </a:p>
+          <a:p>
+            <a:pPr lvl="1"/>
+            <a:r>
+              <a:rPr lang="en-US" smtClean="0"/>
+              <a:t>Second level</a:t>
+            </a:r>
+          </a:p>
+          <a:p>
+            <a:pPr lvl="2"/>
+            <a:r>
+              <a:rPr lang="en-US" smtClean="0"/>
+              <a:t>Third level</a:t>
+            </a:r>
+          </a:p>
+          <a:p>
+            <a:pPr lvl="3"/>
+            <a:r>
+              <a:rPr lang="en-US" smtClean="0"/>
+              <a:t>Fourth level</a:t>
+            </a:r>
+          </a:p>
+          <a:p>
+            <a:pPr lvl="4"/>
+            <a:r>
+              <a:rPr lang="en-US" smtClean="0"/>
+              <a:t>Fifth level</a:t>
+            </a:r>
+            <a:endParaRPr lang="en-US"/>
+          </a:p>
+        </p:txBody>
+      </p:sp>
+      <p:sp>
+        <p:nvSpPr>
+          <p:cNvPr id="6" name="Footer Placeholder 5"/>
+          <p:cNvSpPr>
+            <a:spLocks noGrp="1"/>
+          </p:cNvSpPr>
+          <p:nvPr>
+            <p:ph type="ftr" sz="quarter" idx="4"/>
+          </p:nvPr>
+        </p:nvSpPr>
+        <p:spPr>
+          <a:xfrm>
+            <a:off x="0" y="8685213"/>
+            <a:ext cx="2971800" cy="457200"/>
+          </a:xfrm>
+          <a:prstGeom prst="rect">
+            <a:avLst/>
+          </a:prstGeom>
+        </p:spPr>
+        <p:txBody>
+          <a:bodyPr vert="horz" lIns="91440" tIns="45720" rIns="91440" bIns="45720" rtlCol="0" anchor="b"/>
+          <a:lstStyle>
+            <a:lvl1pPr algn="l">
+              <a:defRPr sz="1200"/>
+            </a:lvl1pPr>
+          </a:lstStyle>
+          <a:p>
+            <a:endParaRPr lang="en-US"/>
+          </a:p>
+        </p:txBody>
+      </p:sp>
+      <p:sp>
+        <p:nvSpPr>
+          <p:cNvPr id="7" name="Slide Number Placeholder 6"/>
+          <p:cNvSpPr>
+            <a:spLocks noGrp="1"/>
+          </p:cNvSpPr>
+          <p:nvPr>
+            <p:ph type="sldNum" sz="quarter" idx="5"/>
+          </p:nvPr>
+        </p:nvSpPr>
+        <p:spPr>
+          <a:xfrm>
+            <a:off x="3884613" y="8685213"/>
+            <a:ext cx="2971800" cy="457200"/>
+          </a:xfrm>
+          <a:prstGeom prst="rect">
+            <a:avLst/>
+          </a:prstGeom>
+        </p:spPr>
+        <p:txBody>
+          <a:bodyPr vert="horz" lIns="91440" tIns="45720" rIns="91440" bIns="45720" rtlCol="0" anchor="b"/>
+          <a:lstStyle>
+            <a:lvl1pPr algn="r">
+              <a:defRPr sz="1200"/>
+            </a:lvl1pPr>
+          </a:lstStyle>
+          <a:p>
+            <a:fld id="{BB5E49A5-4136-284D-997B-48E1D791AD67}" type="slidenum">
+              <a:rPr lang="en-US" smtClean="0"/>
+              <a:t>‹#›</a:t>
+            </a:fld>
+            <a:endParaRPr lang="en-US"/>
+          </a:p>
+        </p:txBody>
+      </p:sp>
+    </p:spTree>
+    <p:extLst>
+      <p:ext uri="{BB962C8B-B14F-4D97-AF65-F5344CB8AC3E}">
+        <p14:creationId xmlns:p14="http://schemas.microsoft.com/office/powerpoint/2010/main" val="2623252185"/>
+      </p:ext>
+    </p:extLst>
+  </p:cSld>
+  <p:clrMap bg1="lt1" tx1="dk1" bg2="lt2" tx2="dk2" accent1="accent1" accent2="accent2" accent3="accent3" accent4="accent4" accent5="accent5" accent6="accent6" hlink="hlink" folHlink="folHlink"/>
+  <p:notesStyle>
+    <a:lvl1pPr marL="0" algn="l" defTabSz="457200" rtl="0" eaLnBrk="1" latinLnBrk="0" hangingPunct="1">
+      <a:defRPr sz="1200" kern="1200">
+        <a:solidFill>
+          <a:schemeClr val="tx1"/>
+        </a:solidFill>
+        <a:latin typeface="+mn-lt"/>
+        <a:ea typeface="+mn-ea"/>
+        <a:cs typeface="+mn-cs"/>
+      </a:defRPr>
+    </a:lvl1pPr>
+    <a:lvl2pPr marL="457200" algn="l" defTabSz="457200" rtl="0" eaLnBrk="1" latinLnBrk="0" hangingPunct="1">
+      <a:defRPr sz="1200" kern="1200">
+        <a:solidFill>
+          <a:schemeClr val="tx1"/>
+        </a:solidFill>
+        <a:latin typeface="+mn-lt"/>
+        <a:ea typeface="+mn-ea"/>
+        <a:cs typeface="+mn-cs"/>
+      </a:defRPr>
+    </a:lvl2pPr>
+    <a:lvl3pPr marL="914400" algn="l" defTabSz="457200" rtl="0" eaLnBrk="1" latinLnBrk="0" hangingPunct="1">
+      <a:defRPr sz="1200" kern="1200">
+        <a:solidFill>
+          <a:schemeClr val="tx1"/>
+        </a:solidFill>
+        <a:latin typeface="+mn-lt"/>
+        <a:ea typeface="+mn-ea"/>
+        <a:cs typeface="+mn-cs"/>
+      </a:defRPr>
+    </a:lvl3pPr>
+    <a:lvl4pPr marL="1371600" algn="l" defTabSz="457200" rtl="0" eaLnBrk="1" latinLnBrk="0" hangingPunct="1">
+      <a:defRPr sz="1200" kern="1200">
+        <a:solidFill>
+          <a:schemeClr val="tx1"/>
+        </a:solidFill>
+        <a:latin typeface="+mn-lt"/>
+        <a:ea typeface="+mn-ea"/>
+        <a:cs typeface="+mn-cs"/>
+      </a:defRPr>
+    </a:lvl4pPr>
+    <a:lvl5pPr marL="1828800" algn="l" defTabSz="457200" rtl="0" eaLnBrk="1" latinLnBrk="0" hangingPunct="1">
+      <a:defRPr sz="1200" kern="1200">
+        <a:solidFill>
+          <a:schemeClr val="tx1"/>
+        </a:solidFill>
+        <a:latin typeface="+mn-lt"/>
+        <a:ea typeface="+mn-ea"/>
+        <a:cs typeface="+mn-cs"/>
+      </a:defRPr>
+    </a:lvl5pPr>
+    <a:lvl6pPr marL="2286000" algn="l" defTabSz="457200" rtl="0" eaLnBrk="1" latinLnBrk="0" hangingPunct="1">
+      <a:defRPr sz="1200" kern="1200">
+        <a:solidFill>
+          <a:schemeClr val="tx1"/>
+        </a:solidFill>
+        <a:latin typeface="+mn-lt"/>
+        <a:ea typeface="+mn-ea"/>
+        <a:cs typeface="+mn-cs"/>
+      </a:defRPr>
+    </a:lvl6pPr>
+    <a:lvl7pPr marL="2743200" algn="l" defTabSz="457200" rtl="0" eaLnBrk="1" latinLnBrk="0" hangingPunct="1">
+      <a:defRPr sz="1200" kern="1200">
+        <a:solidFill>
+          <a:schemeClr val="tx1"/>
+        </a:solidFill>
+        <a:latin typeface="+mn-lt"/>
+        <a:ea typeface="+mn-ea"/>
+        <a:cs typeface="+mn-cs"/>
+      </a:defRPr>
+    </a:lvl7pPr>
+    <a:lvl8pPr marL="3200400" algn="l" defTabSz="457200" rtl="0" eaLnBrk="1" latinLnBrk="0" hangingPunct="1">
+      <a:defRPr sz="1200" kern="1200">
+        <a:solidFill>
+          <a:schemeClr val="tx1"/>
+        </a:solidFill>
+        <a:latin typeface="+mn-lt"/>
+        <a:ea typeface="+mn-ea"/>
+        <a:cs typeface="+mn-cs"/>
+      </a:defRPr>
+    </a:lvl8pPr>
+    <a:lvl9pPr marL="3657600" algn="l" defTabSz="457200" rtl="0" eaLnBrk="1" latinLnBrk="0" hangingPunct="1">
+      <a:defRPr sz="1200" kern="1200">
+        <a:solidFill>
+          <a:schemeClr val="tx1"/>
+        </a:solidFill>
+        <a:latin typeface="+mn-lt"/>
+        <a:ea typeface="+mn-ea"/>
+        <a:cs typeface="+mn-cs"/>
+      </a:defRPr>
+    </a:lvl9pPr>
+  </p:notesStyle>
+</p:notesMaster>
+</file>
+
+<file path=ppt/notesSlides/notesSlide1.xml><?xml version="1.0" encoding="utf-8"?>
+<p:notes xmlns:a="http://schemas.openxmlformats.org/drawingml/2006/main" xmlns:p="http://schemas.openxmlformats.org/presentationml/2006/main" xmlns:r="http://schemas.openxmlformats.org/officeDocument/2006/relationships">
+  <p:cSld>
+    <p:spTree>
+      <p:nvGrpSpPr>
+        <p:cNvPr id="1" name=""/>
+        <p:cNvGrpSpPr/>
+        <p:nvPr/>
+      </p:nvGrpSpPr>
+      <p:grpSpPr>
+        <a:xfrm>
+          <a:off x="0" y="0"/>
+          <a:ext cx="0" cy="0"/>
+          <a:chOff x="0" y="0"/>
+          <a:chExt cx="0" cy="0"/>
+        </a:xfrm>
+      </p:grpSpPr>
+      <p:sp>
+        <p:nvSpPr>
+          <p:cNvPr id="2" name="Slide Image Placeholder 1"/>
+          <p:cNvSpPr>
+            <a:spLocks noGrp="1"/>
+          </p:cNvSpPr>
+          <p:nvPr>
+            <p:ph type="sldImg" idx="2"/>
+          </p:nvPr>
+        </p:nvSpPr>
+        <p:spPr/>
+      </p:sp>
+      <p:sp>
+        <p:nvSpPr>
+          <p:cNvPr id="3" name="Notes Placeholder 2"/>
+          <p:cNvSpPr>
+            <a:spLocks noGrp="1"/>
+          </p:cNvSpPr>
+          <p:nvPr>
+            <p:ph type="body" idx="3" sz="quarter"/>
+          </p:nvPr>
+        </p:nvSpPr>
+        <p:spPr/>
+        <p:txBody>
+          <a:bodyPr/>
+          <a:lstStyle/>
+          <a:p>
+            <a:r>
+              <a:t>开场（30 秒，不念 PPT）：上周，我家楼下张奶奶摔了一跤。她想找人帮忙，手机却只会打给外地的儿子。等社区知道这件事，天已经黑了。——这一晚没有人做错什么，是这条路太长了。我想把它缩短成一句话，这就是社区先知。</a:t>
+            </a:r>
+          </a:p>
+        </p:txBody>
+      </p:sp>
+      <p:sp>
+        <p:nvSpPr>
+          <p:cNvPr id="4" name="Slide Number Placeholder 3"/>
+          <p:cNvSpPr>
+            <a:spLocks noGrp="1"/>
+          </p:cNvSpPr>
+          <p:nvPr>
+            <p:ph type="sldNum" idx="5" sz="quarter"/>
+          </p:nvPr>
+        </p:nvSpPr>
+        <p:spPr/>
+      </p:sp>
+    </p:spTree>
+  </p:cSld>
+  <p:clrMapOvr>
+    <a:masterClrMapping/>
+  </p:clrMapOvr>
+</p:notes>
+</file>
+
+<file path=ppt/notesSlides/notesSlide2.xml><?xml version="1.0" encoding="utf-8"?>
+<p:notes xmlns:a="http://schemas.openxmlformats.org/drawingml/2006/main" xmlns:p="http://schemas.openxmlformats.org/presentationml/2006/main" xmlns:r="http://schemas.openxmlformats.org/officeDocument/2006/relationships">
+  <p:cSld>
+    <p:spTree>
+      <p:nvGrpSpPr>
+        <p:cNvPr id="1" name=""/>
+        <p:cNvGrpSpPr/>
+        <p:nvPr/>
+      </p:nvGrpSpPr>
+      <p:grpSpPr>
+        <a:xfrm>
+          <a:off x="0" y="0"/>
+          <a:ext cx="0" cy="0"/>
+          <a:chOff x="0" y="0"/>
+          <a:chExt cx="0" cy="0"/>
+        </a:xfrm>
+      </p:grpSpPr>
+      <p:sp>
+        <p:nvSpPr>
+          <p:cNvPr id="2" name="Slide Image Placeholder 1"/>
+          <p:cNvSpPr>
+            <a:spLocks noGrp="1"/>
+          </p:cNvSpPr>
+          <p:nvPr>
+            <p:ph type="sldImg" idx="2"/>
+          </p:nvPr>
+        </p:nvSpPr>
+        <p:spPr/>
+      </p:sp>
+      <p:sp>
+        <p:nvSpPr>
+          <p:cNvPr id="3" name="Notes Placeholder 2"/>
+          <p:cNvSpPr>
+            <a:spLocks noGrp="1"/>
+          </p:cNvSpPr>
+          <p:nvPr>
+            <p:ph type="body" idx="3" sz="quarter"/>
+          </p:nvPr>
+        </p:nvSpPr>
+        <p:spPr/>
+        <p:txBody>
+          <a:bodyPr/>
+          <a:lstStyle/>
+          <a:p>
+            <a:r>
+              <a:t>各位专家好，我是北京工商大学大二学生。这个项目我一个人做。它服务三种人：居民、网格员、老人。今天六分钟，我讲三件事：怎么做、能干什么、我卡在哪。</a:t>
+            </a:r>
+          </a:p>
+        </p:txBody>
+      </p:sp>
+      <p:sp>
+        <p:nvSpPr>
+          <p:cNvPr id="4" name="Slide Number Placeholder 3"/>
+          <p:cNvSpPr>
+            <a:spLocks noGrp="1"/>
+          </p:cNvSpPr>
+          <p:nvPr>
+            <p:ph type="sldNum" idx="5" sz="quarter"/>
+          </p:nvPr>
+        </p:nvSpPr>
+        <p:spPr/>
+      </p:sp>
+    </p:spTree>
+  </p:cSld>
+  <p:clrMapOvr>
+    <a:masterClrMapping/>
+  </p:clrMapOvr>
+</p:notes>
+</file>
+
+<file path=ppt/notesSlides/notesSlide3.xml><?xml version="1.0" encoding="utf-8"?>
+<p:notes xmlns:a="http://schemas.openxmlformats.org/drawingml/2006/main" xmlns:p="http://schemas.openxmlformats.org/presentationml/2006/main" xmlns:r="http://schemas.openxmlformats.org/officeDocument/2006/relationships">
+  <p:cSld>
+    <p:spTree>
+      <p:nvGrpSpPr>
+        <p:cNvPr id="1" name=""/>
+        <p:cNvGrpSpPr/>
+        <p:nvPr/>
+      </p:nvGrpSpPr>
+      <p:grpSpPr>
+        <a:xfrm>
+          <a:off x="0" y="0"/>
+          <a:ext cx="0" cy="0"/>
+          <a:chOff x="0" y="0"/>
+          <a:chExt cx="0" cy="0"/>
+        </a:xfrm>
+      </p:grpSpPr>
+      <p:sp>
+        <p:nvSpPr>
+          <p:cNvPr id="2" name="Slide Image Placeholder 1"/>
+          <p:cNvSpPr>
+            <a:spLocks noGrp="1"/>
+          </p:cNvSpPr>
+          <p:nvPr>
+            <p:ph type="sldImg" idx="2"/>
+          </p:nvPr>
+        </p:nvSpPr>
+        <p:spPr/>
+      </p:sp>
+      <p:sp>
+        <p:nvSpPr>
+          <p:cNvPr id="3" name="Notes Placeholder 2"/>
+          <p:cNvSpPr>
+            <a:spLocks noGrp="1"/>
+          </p:cNvSpPr>
+          <p:nvPr>
+            <p:ph type="body" idx="3" sz="quarter"/>
+          </p:nvPr>
+        </p:nvSpPr>
+        <p:spPr/>
+        <p:txBody>
+          <a:bodyPr/>
+          <a:lstStyle/>
+          <a:p>
+            <a:r>
+              <a:t>四个痛点：网格员一半时间在重复派单；老人不会用手机、报修太难；网上政策没出处不敢信；天气/健康/通知分属不同部门，出事没人主动联动。主动说明：还没在真实街道试点，这是下一步。</a:t>
+            </a:r>
+          </a:p>
+        </p:txBody>
+      </p:sp>
+      <p:sp>
+        <p:nvSpPr>
+          <p:cNvPr id="4" name="Slide Number Placeholder 3"/>
+          <p:cNvSpPr>
+            <a:spLocks noGrp="1"/>
+          </p:cNvSpPr>
+          <p:nvPr>
+            <p:ph type="sldNum" idx="5" sz="quarter"/>
+          </p:nvPr>
+        </p:nvSpPr>
+        <p:spPr/>
+      </p:sp>
+    </p:spTree>
+  </p:cSld>
+  <p:clrMapOvr>
+    <a:masterClrMapping/>
+  </p:clrMapOvr>
+</p:notes>
+</file>
+
+<file path=ppt/notesSlides/notesSlide4.xml><?xml version="1.0" encoding="utf-8"?>
+<p:notes xmlns:a="http://schemas.openxmlformats.org/drawingml/2006/main" xmlns:p="http://schemas.openxmlformats.org/presentationml/2006/main" xmlns:r="http://schemas.openxmlformats.org/officeDocument/2006/relationships">
+  <p:cSld>
+    <p:spTree>
+      <p:nvGrpSpPr>
+        <p:cNvPr id="1" name=""/>
+        <p:cNvGrpSpPr/>
+        <p:nvPr/>
+      </p:nvGrpSpPr>
+      <p:grpSpPr>
+        <a:xfrm>
+          <a:off x="0" y="0"/>
+          <a:ext cx="0" cy="0"/>
+          <a:chOff x="0" y="0"/>
+          <a:chExt cx="0" cy="0"/>
+        </a:xfrm>
+      </p:grpSpPr>
+      <p:sp>
+        <p:nvSpPr>
+          <p:cNvPr id="2" name="Slide Image Placeholder 1"/>
+          <p:cNvSpPr>
+            <a:spLocks noGrp="1"/>
+          </p:cNvSpPr>
+          <p:nvPr>
+            <p:ph type="sldImg" idx="2"/>
+          </p:nvPr>
+        </p:nvSpPr>
+        <p:spPr/>
+      </p:sp>
+      <p:sp>
+        <p:nvSpPr>
+          <p:cNvPr id="3" name="Notes Placeholder 2"/>
+          <p:cNvSpPr>
+            <a:spLocks noGrp="1"/>
+          </p:cNvSpPr>
+          <p:nvPr>
+            <p:ph type="body" idx="3" sz="quarter"/>
+          </p:nvPr>
+        </p:nvSpPr>
+        <p:spPr/>
+        <p:txBody>
+          <a:bodyPr/>
+          <a:lstStyle/>
+          <a:p>
+            <a:r>
+              <a:t>把社区里的事拆开交给 9 个角色。三端各 14 / 9 / 8 页。数据放在本地一个库里，不用搭服务器。</a:t>
+            </a:r>
+          </a:p>
+        </p:txBody>
+      </p:sp>
+      <p:sp>
+        <p:nvSpPr>
+          <p:cNvPr id="4" name="Slide Number Placeholder 3"/>
+          <p:cNvSpPr>
+            <a:spLocks noGrp="1"/>
+          </p:cNvSpPr>
+          <p:nvPr>
+            <p:ph type="sldNum" idx="5" sz="quarter"/>
+          </p:nvPr>
+        </p:nvSpPr>
+        <p:spPr/>
+      </p:sp>
+    </p:spTree>
+  </p:cSld>
+  <p:clrMapOvr>
+    <a:masterClrMapping/>
+  </p:clrMapOvr>
+</p:notes>
+</file>
+
+<file path=ppt/notesSlides/notesSlide5.xml><?xml version="1.0" encoding="utf-8"?>
+<p:notes xmlns:a="http://schemas.openxmlformats.org/drawingml/2006/main" xmlns:p="http://schemas.openxmlformats.org/presentationml/2006/main" xmlns:r="http://schemas.openxmlformats.org/officeDocument/2006/relationships">
+  <p:cSld>
+    <p:spTree>
+      <p:nvGrpSpPr>
+        <p:cNvPr id="1" name=""/>
+        <p:cNvGrpSpPr/>
+        <p:nvPr/>
+      </p:nvGrpSpPr>
+      <p:grpSpPr>
+        <a:xfrm>
+          <a:off x="0" y="0"/>
+          <a:ext cx="0" cy="0"/>
+          <a:chOff x="0" y="0"/>
+          <a:chExt cx="0" cy="0"/>
+        </a:xfrm>
+      </p:grpSpPr>
+      <p:sp>
+        <p:nvSpPr>
+          <p:cNvPr id="2" name="Slide Image Placeholder 1"/>
+          <p:cNvSpPr>
+            <a:spLocks noGrp="1"/>
+          </p:cNvSpPr>
+          <p:nvPr>
+            <p:ph type="sldImg" idx="2"/>
+          </p:nvPr>
+        </p:nvSpPr>
+        <p:spPr/>
+      </p:sp>
+      <p:sp>
+        <p:nvSpPr>
+          <p:cNvPr id="3" name="Notes Placeholder 2"/>
+          <p:cNvSpPr>
+            <a:spLocks noGrp="1"/>
+          </p:cNvSpPr>
+          <p:nvPr>
+            <p:ph type="body" idx="3" sz="quarter"/>
+          </p:nvPr>
+        </p:nvSpPr>
+        <p:spPr/>
+        <p:txBody>
+          <a:bodyPr/>
+          <a:lstStyle/>
+          <a:p>
+            <a:r>
+              <a:t>重点页（90 秒）：9 个角色不写死流程，靠黑板 + 5 种消息真来往；每轮过校验员与仲裁器，合规审计一票否决。大模型只做意图/追问/政策生成，状态机、派单、权限、加密永远走规则；四个开关默认关。防编造三招：强制出处、回查数据库、敏感词与权限审计。实话：这是按规则分工协作，不是完全自主的大模型智能体。</a:t>
+            </a:r>
+          </a:p>
+        </p:txBody>
+      </p:sp>
+      <p:sp>
+        <p:nvSpPr>
+          <p:cNvPr id="4" name="Slide Number Placeholder 3"/>
+          <p:cNvSpPr>
+            <a:spLocks noGrp="1"/>
+          </p:cNvSpPr>
+          <p:nvPr>
+            <p:ph type="sldNum" idx="5" sz="quarter"/>
+          </p:nvPr>
+        </p:nvSpPr>
+        <p:spPr/>
+      </p:sp>
+    </p:spTree>
+  </p:cSld>
+  <p:clrMapOvr>
+    <a:masterClrMapping/>
+  </p:clrMapOvr>
+</p:notes>
+</file>
+
+<file path=ppt/notesSlides/notesSlide6.xml><?xml version="1.0" encoding="utf-8"?>
+<p:notes xmlns:a="http://schemas.openxmlformats.org/drawingml/2006/main" xmlns:p="http://schemas.openxmlformats.org/presentationml/2006/main" xmlns:r="http://schemas.openxmlformats.org/officeDocument/2006/relationships">
+  <p:cSld>
+    <p:spTree>
+      <p:nvGrpSpPr>
+        <p:cNvPr id="1" name=""/>
+        <p:cNvGrpSpPr/>
+        <p:nvPr/>
+      </p:nvGrpSpPr>
+      <p:grpSpPr>
+        <a:xfrm>
+          <a:off x="0" y="0"/>
+          <a:ext cx="0" cy="0"/>
+          <a:chOff x="0" y="0"/>
+          <a:chExt cx="0" cy="0"/>
+        </a:xfrm>
+      </p:grpSpPr>
+      <p:sp>
+        <p:nvSpPr>
+          <p:cNvPr id="2" name="Slide Image Placeholder 1"/>
+          <p:cNvSpPr>
+            <a:spLocks noGrp="1"/>
+          </p:cNvSpPr>
+          <p:nvPr>
+            <p:ph type="sldImg" idx="2"/>
+          </p:nvPr>
+        </p:nvSpPr>
+        <p:spPr/>
+      </p:sp>
+      <p:sp>
+        <p:nvSpPr>
+          <p:cNvPr id="3" name="Notes Placeholder 2"/>
+          <p:cNvSpPr>
+            <a:spLocks noGrp="1"/>
+          </p:cNvSpPr>
+          <p:nvPr>
+            <p:ph type="body" idx="3" sz="quarter"/>
+          </p:nvPr>
+        </p:nvSpPr>
+        <p:spPr/>
+        <p:txBody>
+          <a:bodyPr/>
+          <a:lstStyle/>
+          <a:p>
+            <a:r>
+              <a:t>老人端是单独重做的：大字大按钮、免登录、语音报修、用药提醒点一下。紧急求助要长按 3 秒再确认——我怕老人放兜里误触。</a:t>
+            </a:r>
+          </a:p>
+        </p:txBody>
+      </p:sp>
+      <p:sp>
+        <p:nvSpPr>
+          <p:cNvPr id="4" name="Slide Number Placeholder 3"/>
+          <p:cNvSpPr>
+            <a:spLocks noGrp="1"/>
+          </p:cNvSpPr>
+          <p:nvPr>
+            <p:ph type="sldNum" idx="5" sz="quarter"/>
+          </p:nvPr>
+        </p:nvSpPr>
+        <p:spPr/>
+      </p:sp>
+    </p:spTree>
+  </p:cSld>
+  <p:clrMapOvr>
+    <a:masterClrMapping/>
+  </p:clrMapOvr>
+</p:notes>
+</file>
+
+<file path=ppt/notesSlides/notesSlide7.xml><?xml version="1.0" encoding="utf-8"?>
+<p:notes xmlns:a="http://schemas.openxmlformats.org/drawingml/2006/main" xmlns:p="http://schemas.openxmlformats.org/presentationml/2006/main" xmlns:r="http://schemas.openxmlformats.org/officeDocument/2006/relationships">
+  <p:cSld>
+    <p:spTree>
+      <p:nvGrpSpPr>
+        <p:cNvPr id="1" name=""/>
+        <p:cNvGrpSpPr/>
+        <p:nvPr/>
+      </p:nvGrpSpPr>
+      <p:grpSpPr>
+        <a:xfrm>
+          <a:off x="0" y="0"/>
+          <a:ext cx="0" cy="0"/>
+          <a:chOff x="0" y="0"/>
+          <a:chExt cx="0" cy="0"/>
+        </a:xfrm>
+      </p:grpSpPr>
+      <p:sp>
+        <p:nvSpPr>
+          <p:cNvPr id="2" name="Slide Image Placeholder 1"/>
+          <p:cNvSpPr>
+            <a:spLocks noGrp="1"/>
+          </p:cNvSpPr>
+          <p:nvPr>
+            <p:ph type="sldImg" idx="2"/>
+          </p:nvPr>
+        </p:nvSpPr>
+        <p:spPr/>
+      </p:sp>
+      <p:sp>
+        <p:nvSpPr>
+          <p:cNvPr id="3" name="Notes Placeholder 2"/>
+          <p:cNvSpPr>
+            <a:spLocks noGrp="1"/>
+          </p:cNvSpPr>
+          <p:nvPr>
+            <p:ph type="body" idx="3" sz="quarter"/>
+          </p:nvPr>
+        </p:nvSpPr>
+        <p:spPr/>
+        <p:txBody>
+          <a:bodyPr/>
+          <a:lstStyle/>
+          <a:p>
+            <a:r>
+              <a:t>现场演示五步：居民报修 → 政策问答（看依据）→ 天气联动（看执行链）→ 老人端长按求助 → 网格员工作台。</a:t>
+            </a:r>
+          </a:p>
+        </p:txBody>
+      </p:sp>
+      <p:sp>
+        <p:nvSpPr>
+          <p:cNvPr id="4" name="Slide Number Placeholder 3"/>
+          <p:cNvSpPr>
+            <a:spLocks noGrp="1"/>
+          </p:cNvSpPr>
+          <p:nvPr>
+            <p:ph type="sldNum" idx="5" sz="quarter"/>
+          </p:nvPr>
+        </p:nvSpPr>
+        <p:spPr/>
+      </p:sp>
+    </p:spTree>
+  </p:cSld>
+  <p:clrMapOvr>
+    <a:masterClrMapping/>
+  </p:clrMapOvr>
+</p:notes>
+</file>
+
+<file path=ppt/notesSlides/notesSlide8.xml><?xml version="1.0" encoding="utf-8"?>
+<p:notes xmlns:a="http://schemas.openxmlformats.org/drawingml/2006/main" xmlns:p="http://schemas.openxmlformats.org/presentationml/2006/main" xmlns:r="http://schemas.openxmlformats.org/officeDocument/2006/relationships">
+  <p:cSld>
+    <p:spTree>
+      <p:nvGrpSpPr>
+        <p:cNvPr id="1" name=""/>
+        <p:cNvGrpSpPr/>
+        <p:nvPr/>
+      </p:nvGrpSpPr>
+      <p:grpSpPr>
+        <a:xfrm>
+          <a:off x="0" y="0"/>
+          <a:ext cx="0" cy="0"/>
+          <a:chOff x="0" y="0"/>
+          <a:chExt cx="0" cy="0"/>
+        </a:xfrm>
+      </p:grpSpPr>
+      <p:sp>
+        <p:nvSpPr>
+          <p:cNvPr id="2" name="Slide Image Placeholder 1"/>
+          <p:cNvSpPr>
+            <a:spLocks noGrp="1"/>
+          </p:cNvSpPr>
+          <p:nvPr>
+            <p:ph type="sldImg" idx="2"/>
+          </p:nvPr>
+        </p:nvSpPr>
+        <p:spPr/>
+      </p:sp>
+      <p:sp>
+        <p:nvSpPr>
+          <p:cNvPr id="3" name="Notes Placeholder 2"/>
+          <p:cNvSpPr>
+            <a:spLocks noGrp="1"/>
+          </p:cNvSpPr>
+          <p:nvPr>
+            <p:ph type="body" idx="3" sz="quarter"/>
+          </p:nvPr>
+        </p:nvSpPr>
+        <p:spPr/>
+        <p:txBody>
+          <a:bodyPr/>
+          <a:lstStyle/>
+          <a:p>
+            <a:r>
+              <a:t>几个能复算的数字：638 项测试全绿、550 并发零失败、48 条金标第一位命中 100%、ruff 0；数据库 v46、约 50 张表。都是本机自测，不是第三方测评。</a:t>
+            </a:r>
+          </a:p>
+        </p:txBody>
+      </p:sp>
+      <p:sp>
+        <p:nvSpPr>
+          <p:cNvPr id="4" name="Slide Number Placeholder 3"/>
+          <p:cNvSpPr>
+            <a:spLocks noGrp="1"/>
+          </p:cNvSpPr>
+          <p:nvPr>
+            <p:ph type="sldNum" idx="5" sz="quarter"/>
+          </p:nvPr>
+        </p:nvSpPr>
+        <p:spPr/>
+      </p:sp>
+    </p:spTree>
+  </p:cSld>
+  <p:clrMapOvr>
+    <a:masterClrMapping/>
+  </p:clrMapOvr>
+</p:notes>
+</file>
+
+<file path=ppt/notesSlides/notesSlide9.xml><?xml version="1.0" encoding="utf-8"?>
+<p:notes xmlns:a="http://schemas.openxmlformats.org/drawingml/2006/main" xmlns:p="http://schemas.openxmlformats.org/presentationml/2006/main" xmlns:r="http://schemas.openxmlformats.org/officeDocument/2006/relationships">
+  <p:cSld>
+    <p:spTree>
+      <p:nvGrpSpPr>
+        <p:cNvPr id="1" name=""/>
+        <p:cNvGrpSpPr/>
+        <p:nvPr/>
+      </p:nvGrpSpPr>
+      <p:grpSpPr>
+        <a:xfrm>
+          <a:off x="0" y="0"/>
+          <a:ext cx="0" cy="0"/>
+          <a:chOff x="0" y="0"/>
+          <a:chExt cx="0" cy="0"/>
+        </a:xfrm>
+      </p:grpSpPr>
+      <p:sp>
+        <p:nvSpPr>
+          <p:cNvPr id="2" name="Slide Image Placeholder 1"/>
+          <p:cNvSpPr>
+            <a:spLocks noGrp="1"/>
+          </p:cNvSpPr>
+          <p:nvPr>
+            <p:ph type="sldImg" idx="2"/>
+          </p:nvPr>
+        </p:nvSpPr>
+        <p:spPr/>
+      </p:sp>
+      <p:sp>
+        <p:nvSpPr>
+          <p:cNvPr id="3" name="Notes Placeholder 2"/>
+          <p:cNvSpPr>
+            <a:spLocks noGrp="1"/>
+          </p:cNvSpPr>
+          <p:nvPr>
+            <p:ph type="body" idx="3" sz="quarter"/>
+          </p:nvPr>
+        </p:nvSpPr>
+        <p:spPr/>
+        <p:txBody>
+          <a:bodyPr/>
+          <a:lstStyle/>
+          <a:p>
+            <a:r>
+              <a:t>它现在的位置：工程原型，没在真实街道试点，没有运营数据，商业模式在探索。今天不是来要投资，是来请教三个问题：多智能体的自动边界怎么划、第一个试点社区怎么谈、没有历史数据怎么冷启动。张奶奶那条路，现在是一句话。</a:t>
+            </a:r>
+          </a:p>
+        </p:txBody>
+      </p:sp>
+      <p:sp>
+        <p:nvSpPr>
+          <p:cNvPr id="4" name="Slide Number Placeholder 3"/>
+          <p:cNvSpPr>
+            <a:spLocks noGrp="1"/>
+          </p:cNvSpPr>
+          <p:nvPr>
+            <p:ph type="sldNum" idx="5" sz="quarter"/>
+          </p:nvPr>
+        </p:nvSpPr>
+        <p:spPr/>
+      </p:sp>
+    </p:spTree>
+  </p:cSld>
+  <p:clrMapOvr>
+    <a:masterClrMapping/>
+  </p:clrMapOvr>
+</p:notes>
 </file>
 
 <file path=ppt/slideLayouts/slideLayout1.xml><?xml version="1.0" encoding="utf-8"?>
@@ -3535,6 +4517,605 @@
 </p:sld>
 </file>
 
+<file path=ppt/slides/slide11.xml><?xml version="1.0" encoding="utf-8"?>
+<p:sld xmlns:a="http://schemas.openxmlformats.org/drawingml/2006/main" xmlns:p="http://schemas.openxmlformats.org/presentationml/2006/main" xmlns:r="http://schemas.openxmlformats.org/officeDocument/2006/relationships">
+  <p:cSld>
+    <p:spTree>
+      <p:nvGrpSpPr>
+        <p:cNvPr id="1" name=""/>
+        <p:cNvGrpSpPr/>
+        <p:nvPr/>
+      </p:nvGrpSpPr>
+      <p:grpSpPr/>
+      <p:sp>
+        <p:nvSpPr>
+          <p:cNvPr id="2" name="Rounded Rectangle 1"/>
+          <p:cNvSpPr/>
+          <p:nvPr/>
+        </p:nvSpPr>
+        <p:spPr>
+          <a:xfrm>
+            <a:off x="548640" y="502920"/>
+            <a:ext cx="128016" cy="566928"/>
+          </a:xfrm>
+          <a:prstGeom prst="roundRect">
+            <a:avLst/>
+          </a:prstGeom>
+          <a:solidFill>
+            <a:srgbClr val="FF8C42"/>
+          </a:solidFill>
+          <a:ln>
+            <a:noFill/>
+          </a:ln>
+          <a:effectLst/>
+        </p:spPr>
+        <p:style>
+          <a:lnRef idx="1">
+            <a:schemeClr val="accent1"/>
+          </a:lnRef>
+          <a:fillRef idx="3">
+            <a:schemeClr val="accent1"/>
+          </a:fillRef>
+          <a:effectRef idx="2">
+            <a:schemeClr val="accent1"/>
+          </a:effectRef>
+          <a:fontRef idx="minor">
+            <a:schemeClr val="lt1"/>
+          </a:fontRef>
+        </p:style>
+        <p:txBody>
+          <a:bodyPr rtlCol="0" anchor="ctr"/>
+          <a:lstStyle/>
+          <a:p>
+            <a:pPr algn="ctr"/>
+          </a:p>
+        </p:txBody>
+      </p:sp>
+      <p:sp>
+        <p:nvSpPr>
+          <p:cNvPr id="3" name="TextBox 2"/>
+          <p:cNvSpPr txBox="1"/>
+          <p:nvPr/>
+        </p:nvSpPr>
+        <p:spPr>
+          <a:xfrm>
+            <a:off x="868680" y="457200"/>
+            <a:ext cx="10789920" cy="822960"/>
+          </a:xfrm>
+          <a:prstGeom prst="rect">
+            <a:avLst/>
+          </a:prstGeom>
+          <a:noFill/>
+        </p:spPr>
+        <p:txBody>
+          <a:bodyPr wrap="square">
+            <a:spAutoFit/>
+          </a:bodyPr>
+          <a:lstStyle/>
+          <a:p>
+            <a:pPr algn="l">
+              <a:lnSpc>
+                <a:spcPct val="125000"/>
+              </a:lnSpc>
+            </a:pPr>
+            <a:r>
+              <a:rPr sz="4000" b="1">
+                <a:solidFill>
+                  <a:srgbClr val="122A51"/>
+                </a:solidFill>
+                <a:latin typeface="微软雅黑"/>
+                <a:ea typeface="微软雅黑"/>
+                <a:cs typeface="微软雅黑"/>
+              </a:rPr>
+              <a:t>附录 · 界面一览（真实截图，未做美化）</a:t>
+            </a:r>
+          </a:p>
+        </p:txBody>
+      </p:sp>
+      <p:pic>
+        <p:nvPicPr>
+          <p:cNvPr id="4" name="Picture 3" descr="03-政策问答带依据与属地.png"/>
+          <p:cNvPicPr>
+            <a:picLocks noChangeAspect="1"/>
+          </p:cNvPicPr>
+          <p:nvPr/>
+        </p:nvPicPr>
+        <p:blipFill>
+          <a:blip r:embed="rId2"/>
+          <a:stretch>
+            <a:fillRect/>
+          </a:stretch>
+        </p:blipFill>
+        <p:spPr>
+          <a:xfrm>
+            <a:off x="868680" y="1645920"/>
+            <a:ext cx="3291840" cy="2057400"/>
+          </a:xfrm>
+          <a:prstGeom prst="rect">
+            <a:avLst/>
+          </a:prstGeom>
+        </p:spPr>
+      </p:pic>
+      <p:sp>
+        <p:nvSpPr>
+          <p:cNvPr id="5" name="TextBox 4"/>
+          <p:cNvSpPr txBox="1"/>
+          <p:nvPr/>
+        </p:nvSpPr>
+        <p:spPr>
+          <a:xfrm>
+            <a:off x="868680" y="3840480"/>
+            <a:ext cx="3291840" cy="822960"/>
+          </a:xfrm>
+          <a:prstGeom prst="rect">
+            <a:avLst/>
+          </a:prstGeom>
+          <a:noFill/>
+        </p:spPr>
+        <p:txBody>
+          <a:bodyPr wrap="square">
+            <a:spAutoFit/>
+          </a:bodyPr>
+          <a:lstStyle/>
+          <a:p>
+            <a:pPr algn="l">
+              <a:lnSpc>
+                <a:spcPct val="125000"/>
+              </a:lnSpc>
+            </a:pPr>
+            <a:r>
+              <a:rPr sz="1400" b="0">
+                <a:solidFill>
+                  <a:srgbClr val="6B7485"/>
+                </a:solidFill>
+                <a:latin typeface="微软雅黑"/>
+                <a:ea typeface="微软雅黑"/>
+                <a:cs typeface="微软雅黑"/>
+              </a:rPr>
+              <a:t>政策问答：带知识库依据 + 适用地区</a:t>
+            </a:r>
+          </a:p>
+        </p:txBody>
+      </p:sp>
+      <p:pic>
+        <p:nvPicPr>
+          <p:cNvPr id="6" name="Picture 5" descr="05-工单详情与处理留痕.png"/>
+          <p:cNvPicPr>
+            <a:picLocks noChangeAspect="1"/>
+          </p:cNvPicPr>
+          <p:nvPr/>
+        </p:nvPicPr>
+        <p:blipFill>
+          <a:blip r:embed="rId3"/>
+          <a:stretch>
+            <a:fillRect/>
+          </a:stretch>
+        </p:blipFill>
+        <p:spPr>
+          <a:xfrm>
+            <a:off x="4434840" y="1645920"/>
+            <a:ext cx="3291840" cy="2057400"/>
+          </a:xfrm>
+          <a:prstGeom prst="rect">
+            <a:avLst/>
+          </a:prstGeom>
+        </p:spPr>
+      </p:pic>
+      <p:sp>
+        <p:nvSpPr>
+          <p:cNvPr id="7" name="TextBox 6"/>
+          <p:cNvSpPr txBox="1"/>
+          <p:nvPr/>
+        </p:nvSpPr>
+        <p:spPr>
+          <a:xfrm>
+            <a:off x="4434840" y="3840480"/>
+            <a:ext cx="3291840" cy="822960"/>
+          </a:xfrm>
+          <a:prstGeom prst="rect">
+            <a:avLst/>
+          </a:prstGeom>
+          <a:noFill/>
+        </p:spPr>
+        <p:txBody>
+          <a:bodyPr wrap="square">
+            <a:spAutoFit/>
+          </a:bodyPr>
+          <a:lstStyle/>
+          <a:p>
+            <a:pPr algn="l">
+              <a:lnSpc>
+                <a:spcPct val="125000"/>
+              </a:lnSpc>
+            </a:pPr>
+            <a:r>
+              <a:rPr sz="1400" b="0">
+                <a:solidFill>
+                  <a:srgbClr val="6B7485"/>
+                </a:solidFill>
+                <a:latin typeface="微软雅黑"/>
+                <a:ea typeface="微软雅黑"/>
+                <a:cs typeface="微软雅黑"/>
+              </a:rPr>
+              <a:t>工单详情：处理留痕时间线</a:t>
+            </a:r>
+          </a:p>
+        </p:txBody>
+      </p:sp>
+      <p:pic>
+        <p:nvPicPr>
+          <p:cNvPr id="8" name="Picture 7" descr="08-老年端长按求助确认框.png"/>
+          <p:cNvPicPr>
+            <a:picLocks noChangeAspect="1"/>
+          </p:cNvPicPr>
+          <p:nvPr/>
+        </p:nvPicPr>
+        <p:blipFill>
+          <a:blip r:embed="rId4"/>
+          <a:stretch>
+            <a:fillRect/>
+          </a:stretch>
+        </p:blipFill>
+        <p:spPr>
+          <a:xfrm>
+            <a:off x="8229600" y="1645920"/>
+            <a:ext cx="1816882" cy="3931920"/>
+          </a:xfrm>
+          <a:prstGeom prst="rect">
+            <a:avLst/>
+          </a:prstGeom>
+        </p:spPr>
+      </p:pic>
+      <p:sp>
+        <p:nvSpPr>
+          <p:cNvPr id="9" name="TextBox 8"/>
+          <p:cNvSpPr txBox="1"/>
+          <p:nvPr/>
+        </p:nvSpPr>
+        <p:spPr>
+          <a:xfrm>
+            <a:off x="8046720" y="5715000"/>
+            <a:ext cx="3474720" cy="640080"/>
+          </a:xfrm>
+          <a:prstGeom prst="rect">
+            <a:avLst/>
+          </a:prstGeom>
+          <a:noFill/>
+        </p:spPr>
+        <p:txBody>
+          <a:bodyPr wrap="square">
+            <a:spAutoFit/>
+          </a:bodyPr>
+          <a:lstStyle/>
+          <a:p>
+            <a:pPr algn="l">
+              <a:lnSpc>
+                <a:spcPct val="125000"/>
+              </a:lnSpc>
+            </a:pPr>
+            <a:r>
+              <a:rPr sz="1400" b="0">
+                <a:solidFill>
+                  <a:srgbClr val="6B7485"/>
+                </a:solidFill>
+                <a:latin typeface="微软雅黑"/>
+                <a:ea typeface="微软雅黑"/>
+                <a:cs typeface="微软雅黑"/>
+              </a:rPr>
+              <a:t>老年端：长按 3 秒后的确认框</a:t>
+            </a:r>
+          </a:p>
+        </p:txBody>
+      </p:sp>
+    </p:spTree>
+  </p:cSld>
+  <p:clrMapOvr>
+    <a:masterClrMapping/>
+  </p:clrMapOvr>
+</p:sld>
+</file>
+
+<file path=ppt/slides/slide12.xml><?xml version="1.0" encoding="utf-8"?>
+<p:sld xmlns:a="http://schemas.openxmlformats.org/drawingml/2006/main" xmlns:p="http://schemas.openxmlformats.org/presentationml/2006/main" xmlns:r="http://schemas.openxmlformats.org/officeDocument/2006/relationships">
+  <p:cSld>
+    <p:spTree>
+      <p:nvGrpSpPr>
+        <p:cNvPr id="1" name=""/>
+        <p:cNvGrpSpPr/>
+        <p:nvPr/>
+      </p:nvGrpSpPr>
+      <p:grpSpPr/>
+      <p:sp>
+        <p:nvSpPr>
+          <p:cNvPr id="2" name="Rounded Rectangle 1"/>
+          <p:cNvSpPr/>
+          <p:nvPr/>
+        </p:nvSpPr>
+        <p:spPr>
+          <a:xfrm>
+            <a:off x="548640" y="502920"/>
+            <a:ext cx="128016" cy="566928"/>
+          </a:xfrm>
+          <a:prstGeom prst="roundRect">
+            <a:avLst/>
+          </a:prstGeom>
+          <a:solidFill>
+            <a:srgbClr val="FF8C42"/>
+          </a:solidFill>
+          <a:ln>
+            <a:noFill/>
+          </a:ln>
+          <a:effectLst/>
+        </p:spPr>
+        <p:style>
+          <a:lnRef idx="1">
+            <a:schemeClr val="accent1"/>
+          </a:lnRef>
+          <a:fillRef idx="3">
+            <a:schemeClr val="accent1"/>
+          </a:fillRef>
+          <a:effectRef idx="2">
+            <a:schemeClr val="accent1"/>
+          </a:effectRef>
+          <a:fontRef idx="minor">
+            <a:schemeClr val="lt1"/>
+          </a:fontRef>
+        </p:style>
+        <p:txBody>
+          <a:bodyPr rtlCol="0" anchor="ctr"/>
+          <a:lstStyle/>
+          <a:p>
+            <a:pPr algn="ctr"/>
+          </a:p>
+        </p:txBody>
+      </p:sp>
+      <p:sp>
+        <p:nvSpPr>
+          <p:cNvPr id="3" name="TextBox 2"/>
+          <p:cNvSpPr txBox="1"/>
+          <p:nvPr/>
+        </p:nvSpPr>
+        <p:spPr>
+          <a:xfrm>
+            <a:off x="868680" y="457200"/>
+            <a:ext cx="10789920" cy="822960"/>
+          </a:xfrm>
+          <a:prstGeom prst="rect">
+            <a:avLst/>
+          </a:prstGeom>
+          <a:noFill/>
+        </p:spPr>
+        <p:txBody>
+          <a:bodyPr wrap="square">
+            <a:spAutoFit/>
+          </a:bodyPr>
+          <a:lstStyle/>
+          <a:p>
+            <a:pPr algn="l">
+              <a:lnSpc>
+                <a:spcPct val="125000"/>
+              </a:lnSpc>
+            </a:pPr>
+            <a:r>
+              <a:rPr sz="4000" b="1">
+                <a:solidFill>
+                  <a:srgbClr val="122A51"/>
+                </a:solidFill>
+                <a:latin typeface="微软雅黑"/>
+                <a:ea typeface="微软雅黑"/>
+                <a:cs typeface="微软雅黑"/>
+              </a:rPr>
+              <a:t>附录 · 如需看实物：三步跑起来</a:t>
+            </a:r>
+          </a:p>
+        </p:txBody>
+      </p:sp>
+      <p:sp>
+        <p:nvSpPr>
+          <p:cNvPr id="4" name="TextBox 3"/>
+          <p:cNvSpPr txBox="1"/>
+          <p:nvPr/>
+        </p:nvSpPr>
+        <p:spPr>
+          <a:xfrm>
+            <a:off x="868680" y="1737360"/>
+            <a:ext cx="10424160" cy="2377440"/>
+          </a:xfrm>
+          <a:prstGeom prst="rect">
+            <a:avLst/>
+          </a:prstGeom>
+          <a:noFill/>
+        </p:spPr>
+        <p:txBody>
+          <a:bodyPr wrap="square">
+            <a:spAutoFit/>
+          </a:bodyPr>
+          <a:lstStyle/>
+          <a:p>
+            <a:pPr algn="l">
+              <a:lnSpc>
+                <a:spcPct val="150000"/>
+              </a:lnSpc>
+            </a:pPr>
+            <a:r>
+              <a:rPr sz="2600" b="0">
+                <a:solidFill>
+                  <a:srgbClr val="1B2233"/>
+                </a:solidFill>
+                <a:latin typeface="微软雅黑"/>
+                <a:ea typeface="微软雅黑"/>
+                <a:cs typeface="微软雅黑"/>
+              </a:rPr>
+              <a:t>1) 双击项目文件夹里的「启动演示.bat」</a:t>
+            </a:r>
+          </a:p>
+          <a:p>
+            <a:pPr algn="l">
+              <a:lnSpc>
+                <a:spcPct val="150000"/>
+              </a:lnSpc>
+            </a:pPr>
+            <a:r>
+              <a:rPr sz="2600" b="0">
+                <a:solidFill>
+                  <a:srgbClr val="1B2233"/>
+                </a:solidFill>
+                <a:latin typeface="微软雅黑"/>
+                <a:ea typeface="微软雅黑"/>
+                <a:cs typeface="微软雅黑"/>
+              </a:rPr>
+              <a:t>2) 等它提示「服务已就绪」（首次约 10–20 秒，会自动建库）</a:t>
+            </a:r>
+          </a:p>
+          <a:p>
+            <a:pPr algn="l">
+              <a:lnSpc>
+                <a:spcPct val="150000"/>
+              </a:lnSpc>
+            </a:pPr>
+            <a:r>
+              <a:rPr sz="2600" b="0">
+                <a:solidFill>
+                  <a:srgbClr val="1B2233"/>
+                </a:solidFill>
+                <a:latin typeface="微软雅黑"/>
+                <a:ea typeface="微软雅黑"/>
+                <a:cs typeface="微软雅黑"/>
+              </a:rPr>
+              <a:t>3) 浏览器会自动打开登录页</a:t>
+            </a:r>
+          </a:p>
+        </p:txBody>
+      </p:sp>
+      <p:sp>
+        <p:nvSpPr>
+          <p:cNvPr id="5" name="Rounded Rectangle 4"/>
+          <p:cNvSpPr/>
+          <p:nvPr/>
+        </p:nvSpPr>
+        <p:spPr>
+          <a:xfrm>
+            <a:off x="868680" y="4023360"/>
+            <a:ext cx="10424160" cy="1737360"/>
+          </a:xfrm>
+          <a:prstGeom prst="roundRect">
+            <a:avLst/>
+          </a:prstGeom>
+          <a:solidFill>
+            <a:srgbClr val="F2F5FB"/>
+          </a:solidFill>
+          <a:ln>
+            <a:noFill/>
+          </a:ln>
+          <a:effectLst/>
+        </p:spPr>
+        <p:style>
+          <a:lnRef idx="1">
+            <a:schemeClr val="accent1"/>
+          </a:lnRef>
+          <a:fillRef idx="3">
+            <a:schemeClr val="accent1"/>
+          </a:fillRef>
+          <a:effectRef idx="2">
+            <a:schemeClr val="accent1"/>
+          </a:effectRef>
+          <a:fontRef idx="minor">
+            <a:schemeClr val="lt1"/>
+          </a:fontRef>
+        </p:style>
+        <p:txBody>
+          <a:bodyPr rtlCol="0" anchor="ctr"/>
+          <a:lstStyle/>
+          <a:p>
+            <a:pPr algn="ctr"/>
+          </a:p>
+        </p:txBody>
+      </p:sp>
+      <p:sp>
+        <p:nvSpPr>
+          <p:cNvPr id="6" name="TextBox 5"/>
+          <p:cNvSpPr txBox="1"/>
+          <p:nvPr/>
+        </p:nvSpPr>
+        <p:spPr>
+          <a:xfrm>
+            <a:off x="1143000" y="4206240"/>
+            <a:ext cx="9875520" cy="1463040"/>
+          </a:xfrm>
+          <a:prstGeom prst="rect">
+            <a:avLst/>
+          </a:prstGeom>
+          <a:noFill/>
+        </p:spPr>
+        <p:txBody>
+          <a:bodyPr wrap="square">
+            <a:spAutoFit/>
+          </a:bodyPr>
+          <a:lstStyle/>
+          <a:p>
+            <a:pPr algn="l">
+              <a:lnSpc>
+                <a:spcPct val="135000"/>
+              </a:lnSpc>
+            </a:pPr>
+            <a:r>
+              <a:rPr sz="1800" b="0">
+                <a:solidFill>
+                  <a:srgbClr val="1B2233"/>
+                </a:solidFill>
+                <a:latin typeface="微软雅黑"/>
+                <a:ea typeface="微软雅黑"/>
+                <a:cs typeface="微软雅黑"/>
+              </a:rPr>
+              <a:t>演示账号：居民点「居民」免密 · 老年点「老年」免密 · 网格员 demo_grid / demo123</a:t>
+            </a:r>
+          </a:p>
+          <a:p>
+            <a:pPr algn="l">
+              <a:lnSpc>
+                <a:spcPct val="135000"/>
+              </a:lnSpc>
+            </a:pPr>
+            <a:r>
+              <a:rPr sz="1800" b="0">
+                <a:solidFill>
+                  <a:srgbClr val="1B2233"/>
+                </a:solidFill>
+                <a:latin typeface="微软雅黑"/>
+                <a:ea typeface="微软雅黑"/>
+                <a:cs typeface="微软雅黑"/>
+              </a:rPr>
+              <a:t>环境：Windows + Python 3.10+（其余依赖脚本自动装）</a:t>
+            </a:r>
+          </a:p>
+          <a:p>
+            <a:pPr algn="l">
+              <a:lnSpc>
+                <a:spcPct val="135000"/>
+              </a:lnSpc>
+            </a:pPr>
+            <a:r>
+              <a:rPr sz="1800" b="0">
+                <a:solidFill>
+                  <a:srgbClr val="1B2233"/>
+                </a:solidFill>
+                <a:latin typeface="微软雅黑"/>
+                <a:ea typeface="微软雅黑"/>
+                <a:cs typeface="微软雅黑"/>
+              </a:rPr>
+              <a:t>不联网也能演示：大模型与真实天气会自动回落规则与模拟数据</a:t>
+            </a:r>
+          </a:p>
+        </p:txBody>
+      </p:sp>
+    </p:spTree>
+  </p:cSld>
+  <p:clrMapOvr>
+    <a:masterClrMapping/>
+  </p:clrMapOvr>
+</p:sld>
+</file>
+
 <file path=ppt/slides/slide2.xml><?xml version="1.0" encoding="utf-8"?>
 <p:sld xmlns:a="http://schemas.openxmlformats.org/drawingml/2006/main" xmlns:p="http://schemas.openxmlformats.org/presentationml/2006/main" xmlns:r="http://schemas.openxmlformats.org/officeDocument/2006/relationships">
   <p:cSld>
@@ -4102,8 +5683,8 @@
         </p:nvSpPr>
         <p:spPr>
           <a:xfrm>
-            <a:off x="868680" y="1783080"/>
-            <a:ext cx="2103120" cy="914400"/>
+            <a:off x="868680" y="1691640"/>
+            <a:ext cx="2103120" cy="841248"/>
           </a:xfrm>
           <a:prstGeom prst="roundRect">
             <a:avLst/>
@@ -4146,7 +5727,7 @@
         </p:nvSpPr>
         <p:spPr>
           <a:xfrm>
-            <a:off x="914400" y="2011680"/>
+            <a:off x="914400" y="1892807"/>
             <a:ext cx="2011680" cy="548640"/>
           </a:xfrm>
           <a:prstGeom prst="rect">
@@ -4166,7 +5747,7 @@
               </a:lnSpc>
             </a:pPr>
             <a:r>
-              <a:rPr sz="2200" b="0">
+              <a:rPr sz="2000" b="0">
                 <a:solidFill>
                   <a:srgbClr val="1B2233"/>
                 </a:solidFill>
@@ -4187,8 +5768,8 @@
         </p:nvSpPr>
         <p:spPr>
           <a:xfrm>
-            <a:off x="3200400" y="1783080"/>
-            <a:ext cx="2103120" cy="914400"/>
+            <a:off x="3200400" y="1691640"/>
+            <a:ext cx="2103120" cy="841248"/>
           </a:xfrm>
           <a:prstGeom prst="roundRect">
             <a:avLst/>
@@ -4231,7 +5812,7 @@
         </p:nvSpPr>
         <p:spPr>
           <a:xfrm>
-            <a:off x="3246120" y="2011680"/>
+            <a:off x="3246120" y="1892807"/>
             <a:ext cx="2011680" cy="548640"/>
           </a:xfrm>
           <a:prstGeom prst="rect">
@@ -4251,7 +5832,7 @@
               </a:lnSpc>
             </a:pPr>
             <a:r>
-              <a:rPr sz="2200" b="0">
+              <a:rPr sz="2000" b="0">
                 <a:solidFill>
                   <a:srgbClr val="1B2233"/>
                 </a:solidFill>
@@ -4272,8 +5853,8 @@
         </p:nvSpPr>
         <p:spPr>
           <a:xfrm>
-            <a:off x="5532120" y="1783080"/>
-            <a:ext cx="2103120" cy="914400"/>
+            <a:off x="5532120" y="1691640"/>
+            <a:ext cx="2103120" cy="841248"/>
           </a:xfrm>
           <a:prstGeom prst="roundRect">
             <a:avLst/>
@@ -4316,7 +5897,7 @@
         </p:nvSpPr>
         <p:spPr>
           <a:xfrm>
-            <a:off x="5577840" y="2011680"/>
+            <a:off x="5577840" y="1892807"/>
             <a:ext cx="2011680" cy="548640"/>
           </a:xfrm>
           <a:prstGeom prst="rect">
@@ -4336,7 +5917,7 @@
               </a:lnSpc>
             </a:pPr>
             <a:r>
-              <a:rPr sz="2200" b="0">
+              <a:rPr sz="2000" b="0">
                 <a:solidFill>
                   <a:srgbClr val="1B2233"/>
                 </a:solidFill>
@@ -4357,8 +5938,8 @@
         </p:nvSpPr>
         <p:spPr>
           <a:xfrm>
-            <a:off x="868680" y="2926080"/>
-            <a:ext cx="2103120" cy="914400"/>
+            <a:off x="868680" y="2715768"/>
+            <a:ext cx="2103120" cy="841248"/>
           </a:xfrm>
           <a:prstGeom prst="roundRect">
             <a:avLst/>
@@ -4401,7 +5982,7 @@
         </p:nvSpPr>
         <p:spPr>
           <a:xfrm>
-            <a:off x="914400" y="3154680"/>
+            <a:off x="914400" y="2916936"/>
             <a:ext cx="2011680" cy="548640"/>
           </a:xfrm>
           <a:prstGeom prst="rect">
@@ -4421,7 +6002,7 @@
               </a:lnSpc>
             </a:pPr>
             <a:r>
-              <a:rPr sz="2200" b="0">
+              <a:rPr sz="2000" b="0">
                 <a:solidFill>
                   <a:srgbClr val="1B2233"/>
                 </a:solidFill>
@@ -4442,8 +6023,8 @@
         </p:nvSpPr>
         <p:spPr>
           <a:xfrm>
-            <a:off x="3200400" y="2926080"/>
-            <a:ext cx="2103120" cy="914400"/>
+            <a:off x="3200400" y="2715768"/>
+            <a:ext cx="2103120" cy="841248"/>
           </a:xfrm>
           <a:prstGeom prst="roundRect">
             <a:avLst/>
@@ -4486,7 +6067,7 @@
         </p:nvSpPr>
         <p:spPr>
           <a:xfrm>
-            <a:off x="3246120" y="3154680"/>
+            <a:off x="3246120" y="2916936"/>
             <a:ext cx="2011680" cy="548640"/>
           </a:xfrm>
           <a:prstGeom prst="rect">
@@ -4506,7 +6087,7 @@
               </a:lnSpc>
             </a:pPr>
             <a:r>
-              <a:rPr sz="2200" b="0">
+              <a:rPr sz="2000" b="0">
                 <a:solidFill>
                   <a:srgbClr val="1B2233"/>
                 </a:solidFill>
@@ -4527,8 +6108,8 @@
         </p:nvSpPr>
         <p:spPr>
           <a:xfrm>
-            <a:off x="5532120" y="2926080"/>
-            <a:ext cx="2103120" cy="914400"/>
+            <a:off x="5532120" y="2715768"/>
+            <a:ext cx="2103120" cy="841248"/>
           </a:xfrm>
           <a:prstGeom prst="roundRect">
             <a:avLst/>
@@ -4571,7 +6152,7 @@
         </p:nvSpPr>
         <p:spPr>
           <a:xfrm>
-            <a:off x="5577840" y="3154680"/>
+            <a:off x="5577840" y="2916936"/>
             <a:ext cx="2011680" cy="548640"/>
           </a:xfrm>
           <a:prstGeom prst="rect">
@@ -4591,7 +6172,7 @@
               </a:lnSpc>
             </a:pPr>
             <a:r>
-              <a:rPr sz="2200" b="0">
+              <a:rPr sz="2000" b="0">
                 <a:solidFill>
                   <a:srgbClr val="1B2233"/>
                 </a:solidFill>
@@ -4612,8 +6193,8 @@
         </p:nvSpPr>
         <p:spPr>
           <a:xfrm>
-            <a:off x="868680" y="4069080"/>
-            <a:ext cx="2103120" cy="914400"/>
+            <a:off x="868680" y="3739896"/>
+            <a:ext cx="2103120" cy="841248"/>
           </a:xfrm>
           <a:prstGeom prst="roundRect">
             <a:avLst/>
@@ -4656,7 +6237,7 @@
         </p:nvSpPr>
         <p:spPr>
           <a:xfrm>
-            <a:off x="914400" y="4297680"/>
+            <a:off x="914400" y="3941064"/>
             <a:ext cx="2011680" cy="548640"/>
           </a:xfrm>
           <a:prstGeom prst="rect">
@@ -4676,7 +6257,7 @@
               </a:lnSpc>
             </a:pPr>
             <a:r>
-              <a:rPr sz="2200" b="0">
+              <a:rPr sz="2000" b="0">
                 <a:solidFill>
                   <a:srgbClr val="1B2233"/>
                 </a:solidFill>
@@ -4697,8 +6278,8 @@
         </p:nvSpPr>
         <p:spPr>
           <a:xfrm>
-            <a:off x="3200400" y="4069080"/>
-            <a:ext cx="2103120" cy="914400"/>
+            <a:off x="3200400" y="3739896"/>
+            <a:ext cx="2103120" cy="841248"/>
           </a:xfrm>
           <a:prstGeom prst="roundRect">
             <a:avLst/>
@@ -4741,7 +6322,7 @@
         </p:nvSpPr>
         <p:spPr>
           <a:xfrm>
-            <a:off x="3246120" y="4297680"/>
+            <a:off x="3246120" y="3941064"/>
             <a:ext cx="2011680" cy="548640"/>
           </a:xfrm>
           <a:prstGeom prst="rect">
@@ -4761,7 +6342,7 @@
               </a:lnSpc>
             </a:pPr>
             <a:r>
-              <a:rPr sz="2200" b="0">
+              <a:rPr sz="2000" b="0">
                 <a:solidFill>
                   <a:srgbClr val="1B2233"/>
                 </a:solidFill>
@@ -4782,8 +6363,8 @@
         </p:nvSpPr>
         <p:spPr>
           <a:xfrm>
-            <a:off x="5532120" y="4069080"/>
-            <a:ext cx="2103120" cy="914400"/>
+            <a:off x="5532120" y="3739896"/>
+            <a:ext cx="2103120" cy="841248"/>
           </a:xfrm>
           <a:prstGeom prst="roundRect">
             <a:avLst/>
@@ -4826,7 +6407,7 @@
         </p:nvSpPr>
         <p:spPr>
           <a:xfrm>
-            <a:off x="5577840" y="4297680"/>
+            <a:off x="5577840" y="3941064"/>
             <a:ext cx="2011680" cy="548640"/>
           </a:xfrm>
           <a:prstGeom prst="rect">
@@ -4846,7 +6427,7 @@
               </a:lnSpc>
             </a:pPr>
             <a:r>
-              <a:rPr sz="2200" b="1">
+              <a:rPr sz="2000" b="1">
                 <a:solidFill>
                   <a:srgbClr val="FFFFFF"/>
                 </a:solidFill>
@@ -4867,8 +6448,8 @@
         </p:nvSpPr>
         <p:spPr>
           <a:xfrm>
-            <a:off x="868680" y="5486400"/>
-            <a:ext cx="10058400" cy="640080"/>
+            <a:off x="7589520" y="1737360"/>
+            <a:ext cx="4023360" cy="2560320"/>
           </a:xfrm>
           <a:prstGeom prst="rect">
             <a:avLst/>
@@ -4882,27 +6463,276 @@
           <a:lstStyle/>
           <a:p>
             <a:pPr algn="l">
+              <a:lnSpc>
+                <a:spcPct val="140000"/>
+              </a:lnSpc>
+            </a:pPr>
+            <a:r>
+              <a:rPr sz="1800" b="0">
+                <a:solidFill>
+                  <a:srgbClr val="1B2233"/>
+                </a:solidFill>
+                <a:latin typeface="微软雅黑"/>
+                <a:ea typeface="微软雅黑"/>
+                <a:cs typeface="微软雅黑"/>
+              </a:rPr>
+              <a:t>三端各 14 / 9 / 8 页：</a:t>
+            </a:r>
+          </a:p>
+          <a:p>
+            <a:pPr algn="l">
+              <a:lnSpc>
+                <a:spcPct val="140000"/>
+              </a:lnSpc>
+            </a:pPr>
+            <a:r>
+              <a:rPr sz="1800" b="0">
+                <a:solidFill>
+                  <a:srgbClr val="1B2233"/>
+                </a:solidFill>
+                <a:latin typeface="微软雅黑"/>
+                <a:ea typeface="微软雅黑"/>
+                <a:cs typeface="微软雅黑"/>
+              </a:rPr>
+              <a:t>居民端：一句话报修、提问</a:t>
+            </a:r>
+          </a:p>
+          <a:p>
+            <a:pPr algn="l">
+              <a:lnSpc>
+                <a:spcPct val="140000"/>
+              </a:lnSpc>
+            </a:pPr>
+            <a:r>
+              <a:rPr sz="1800" b="0">
+                <a:solidFill>
+                  <a:srgbClr val="1B2233"/>
+                </a:solidFill>
+                <a:latin typeface="微软雅黑"/>
+                <a:ea typeface="微软雅黑"/>
+                <a:cs typeface="微软雅黑"/>
+              </a:rPr>
+              <a:t>网格员端：工单、提案、导数据</a:t>
+            </a:r>
+          </a:p>
+          <a:p>
+            <a:pPr algn="l">
+              <a:lnSpc>
+                <a:spcPct val="140000"/>
+              </a:lnSpc>
+            </a:pPr>
+            <a:r>
+              <a:rPr sz="1800" b="0">
+                <a:solidFill>
+                  <a:srgbClr val="1B2233"/>
+                </a:solidFill>
+                <a:latin typeface="微软雅黑"/>
+                <a:ea typeface="微软雅黑"/>
+                <a:cs typeface="微软雅黑"/>
+              </a:rPr>
+              <a:t>老人端：大字、语音、长按求助</a:t>
+            </a:r>
+          </a:p>
+        </p:txBody>
+      </p:sp>
+      <p:pic>
+        <p:nvPicPr>
+          <p:cNvPr id="23" name="Picture 22" descr="02-居民首页与社区小助手.png"/>
+          <p:cNvPicPr>
+            <a:picLocks noChangeAspect="1"/>
+          </p:cNvPicPr>
+          <p:nvPr/>
+        </p:nvPicPr>
+        <p:blipFill>
+          <a:blip r:embed="rId2"/>
+          <a:stretch>
+            <a:fillRect/>
+          </a:stretch>
+        </p:blipFill>
+        <p:spPr>
+          <a:xfrm>
+            <a:off x="868680" y="4526280"/>
+            <a:ext cx="2926080" cy="1828800"/>
+          </a:xfrm>
+          <a:prstGeom prst="rect">
+            <a:avLst/>
+          </a:prstGeom>
+        </p:spPr>
+      </p:pic>
+      <p:pic>
+        <p:nvPicPr>
+          <p:cNvPr id="24" name="Picture 23" descr="06-网格员工作台.png"/>
+          <p:cNvPicPr>
+            <a:picLocks noChangeAspect="1"/>
+          </p:cNvPicPr>
+          <p:nvPr/>
+        </p:nvPicPr>
+        <p:blipFill>
+          <a:blip r:embed="rId3"/>
+          <a:stretch>
+            <a:fillRect/>
+          </a:stretch>
+        </p:blipFill>
+        <p:spPr>
+          <a:xfrm>
+            <a:off x="4114800" y="4526280"/>
+            <a:ext cx="2926080" cy="1828800"/>
+          </a:xfrm>
+          <a:prstGeom prst="rect">
+            <a:avLst/>
+          </a:prstGeom>
+        </p:spPr>
+      </p:pic>
+      <p:pic>
+        <p:nvPicPr>
+          <p:cNvPr id="25" name="Picture 24" descr="07-老年端大字首页.png"/>
+          <p:cNvPicPr>
+            <a:picLocks noChangeAspect="1"/>
+          </p:cNvPicPr>
+          <p:nvPr/>
+        </p:nvPicPr>
+        <p:blipFill>
+          <a:blip r:embed="rId4"/>
+          <a:stretch>
+            <a:fillRect/>
+          </a:stretch>
+        </p:blipFill>
+        <p:spPr>
+          <a:xfrm>
+            <a:off x="8595360" y="4526280"/>
+            <a:ext cx="845062" cy="1828800"/>
+          </a:xfrm>
+          <a:prstGeom prst="rect">
+            <a:avLst/>
+          </a:prstGeom>
+        </p:spPr>
+      </p:pic>
+      <p:sp>
+        <p:nvSpPr>
+          <p:cNvPr id="26" name="TextBox 25"/>
+          <p:cNvSpPr txBox="1"/>
+          <p:nvPr/>
+        </p:nvSpPr>
+        <p:spPr>
+          <a:xfrm>
+            <a:off x="868680" y="6446520"/>
+            <a:ext cx="2926080" cy="320040"/>
+          </a:xfrm>
+          <a:prstGeom prst="rect">
+            <a:avLst/>
+          </a:prstGeom>
+          <a:noFill/>
+        </p:spPr>
+        <p:txBody>
+          <a:bodyPr wrap="square">
+            <a:spAutoFit/>
+          </a:bodyPr>
+          <a:lstStyle/>
+          <a:p>
+            <a:pPr algn="ctr">
               <a:lnSpc>
                 <a:spcPct val="125000"/>
               </a:lnSpc>
             </a:pPr>
             <a:r>
-              <a:rPr sz="2400" b="0">
-                <a:solidFill>
-                  <a:srgbClr val="122A51"/>
+              <a:rPr sz="1400" b="0">
+                <a:solidFill>
+                  <a:srgbClr val="6B7485"/>
                 </a:solidFill>
                 <a:latin typeface="微软雅黑"/>
                 <a:ea typeface="微软雅黑"/>
                 <a:cs typeface="微软雅黑"/>
               </a:rPr>
-              <a:t>三端：居民 14 页 / 网格员 9 页 / 老人 8 页</a:t>
-            </a:r>
-          </a:p>
-        </p:txBody>
-      </p:sp>
-      <p:sp>
-        <p:nvSpPr>
-          <p:cNvPr id="23" name="TextBox 22"/>
+              <a:t>居民端</a:t>
+            </a:r>
+          </a:p>
+        </p:txBody>
+      </p:sp>
+      <p:sp>
+        <p:nvSpPr>
+          <p:cNvPr id="27" name="TextBox 26"/>
+          <p:cNvSpPr txBox="1"/>
+          <p:nvPr/>
+        </p:nvSpPr>
+        <p:spPr>
+          <a:xfrm>
+            <a:off x="4114800" y="6446520"/>
+            <a:ext cx="2926080" cy="320040"/>
+          </a:xfrm>
+          <a:prstGeom prst="rect">
+            <a:avLst/>
+          </a:prstGeom>
+          <a:noFill/>
+        </p:spPr>
+        <p:txBody>
+          <a:bodyPr wrap="square">
+            <a:spAutoFit/>
+          </a:bodyPr>
+          <a:lstStyle/>
+          <a:p>
+            <a:pPr algn="ctr">
+              <a:lnSpc>
+                <a:spcPct val="125000"/>
+              </a:lnSpc>
+            </a:pPr>
+            <a:r>
+              <a:rPr sz="1400" b="0">
+                <a:solidFill>
+                  <a:srgbClr val="6B7485"/>
+                </a:solidFill>
+                <a:latin typeface="微软雅黑"/>
+                <a:ea typeface="微软雅黑"/>
+                <a:cs typeface="微软雅黑"/>
+              </a:rPr>
+              <a:t>网格员端</a:t>
+            </a:r>
+          </a:p>
+        </p:txBody>
+      </p:sp>
+      <p:sp>
+        <p:nvSpPr>
+          <p:cNvPr id="28" name="TextBox 27"/>
+          <p:cNvSpPr txBox="1"/>
+          <p:nvPr/>
+        </p:nvSpPr>
+        <p:spPr>
+          <a:xfrm>
+            <a:off x="7589520" y="6446520"/>
+            <a:ext cx="3017520" cy="320040"/>
+          </a:xfrm>
+          <a:prstGeom prst="rect">
+            <a:avLst/>
+          </a:prstGeom>
+          <a:noFill/>
+        </p:spPr>
+        <p:txBody>
+          <a:bodyPr wrap="square">
+            <a:spAutoFit/>
+          </a:bodyPr>
+          <a:lstStyle/>
+          <a:p>
+            <a:pPr algn="ctr">
+              <a:lnSpc>
+                <a:spcPct val="125000"/>
+              </a:lnSpc>
+            </a:pPr>
+            <a:r>
+              <a:rPr sz="1400" b="0">
+                <a:solidFill>
+                  <a:srgbClr val="6B7485"/>
+                </a:solidFill>
+                <a:latin typeface="微软雅黑"/>
+                <a:ea typeface="微软雅黑"/>
+                <a:cs typeface="微软雅黑"/>
+              </a:rPr>
+              <a:t>老年端</a:t>
+            </a:r>
+          </a:p>
+        </p:txBody>
+      </p:sp>
+      <p:sp>
+        <p:nvSpPr>
+          <p:cNvPr id="29" name="TextBox 28"/>
           <p:cNvSpPr txBox="1"/>
           <p:nvPr/>
         </p:nvSpPr>
@@ -7883,4 +9713,324 @@
   </a:objectDefaults>
   <a:extraClrSchemeLst/>
 </a:theme>
+</file>
+
+<file path=ppt/theme/theme2.xml><?xml version="1.0" encoding="utf-8"?>
+<a:theme xmlns:a="http://schemas.openxmlformats.org/drawingml/2006/main" name="Office Theme">
+  <a:themeElements>
+    <a:clrScheme name="Office">
+      <a:dk1>
+        <a:sysClr val="windowText" lastClr="000000"/>
+      </a:dk1>
+      <a:lt1>
+        <a:sysClr val="window" lastClr="FFFFFF"/>
+      </a:lt1>
+      <a:dk2>
+        <a:srgbClr val="1F497D"/>
+      </a:dk2>
+      <a:lt2>
+        <a:srgbClr val="EEECE1"/>
+      </a:lt2>
+      <a:accent1>
+        <a:srgbClr val="4F81BD"/>
+      </a:accent1>
+      <a:accent2>
+        <a:srgbClr val="C0504D"/>
+      </a:accent2>
+      <a:accent3>
+        <a:srgbClr val="9BBB59"/>
+      </a:accent3>
+      <a:accent4>
+        <a:srgbClr val="8064A2"/>
+      </a:accent4>
+      <a:accent5>
+        <a:srgbClr val="4BACC6"/>
+      </a:accent5>
+      <a:accent6>
+        <a:srgbClr val="F79646"/>
+      </a:accent6>
+      <a:hlink>
+        <a:srgbClr val="0000FF"/>
+      </a:hlink>
+      <a:folHlink>
+        <a:srgbClr val="800080"/>
+      </a:folHlink>
+    </a:clrScheme>
+    <a:fontScheme name="Office">
+      <a:majorFont>
+        <a:latin typeface="Calibri"/>
+        <a:ea typeface=""/>
+        <a:cs typeface=""/>
+        <a:font script="Jpan" typeface="ＭＳ Ｐゴシック"/>
+        <a:font script="Hang" typeface="맑은 고딕"/>
+        <a:font script="Hans" typeface="宋体"/>
+        <a:font script="Hant" typeface="新細明體"/>
+        <a:font script="Arab" typeface="Times New Roman"/>
+        <a:font script="Hebr" typeface="Times New Roman"/>
+        <a:font script="Thai" typeface="Angsana New"/>
+        <a:font script="Ethi" typeface="Nyala"/>
+        <a:font script="Beng" typeface="Vrinda"/>
+        <a:font script="Gujr" typeface="Shruti"/>
+        <a:font script="Khmr" typeface="MoolBoran"/>
+        <a:font script="Knda" typeface="Tunga"/>
+        <a:font script="Guru" typeface="Raavi"/>
+        <a:font script="Cans" typeface="Euphemia"/>
+        <a:font script="Cher" typeface="Plantagenet Cherokee"/>
+        <a:font script="Yiii" typeface="Microsoft Yi Baiti"/>
+        <a:font script="Tibt" typeface="Microsoft Himalaya"/>
+        <a:font script="Thaa" typeface="MV Boli"/>
+        <a:font script="Deva" typeface="Mangal"/>
+        <a:font script="Telu" typeface="Gautami"/>
+        <a:font script="Taml" typeface="Latha"/>
+        <a:font script="Syrc" typeface="Estrangelo Edessa"/>
+        <a:font script="Orya" typeface="Kalinga"/>
+        <a:font script="Mlym" typeface="Kartika"/>
+        <a:font script="Laoo" typeface="DokChampa"/>
+        <a:font script="Sinh" typeface="Iskoola Pota"/>
+        <a:font script="Mong" typeface="Mongolian Baiti"/>
+        <a:font script="Viet" typeface="Times New Roman"/>
+        <a:font script="Uigh" typeface="Microsoft Uighur"/>
+        <a:font script="Geor" typeface="Sylfaen"/>
+      </a:majorFont>
+      <a:minorFont>
+        <a:latin typeface="Calibri"/>
+        <a:ea typeface=""/>
+        <a:cs typeface=""/>
+        <a:font script="Jpan" typeface="ＭＳ Ｐゴシック"/>
+        <a:font script="Hang" typeface="맑은 고딕"/>
+        <a:font script="Hans" typeface="宋体"/>
+        <a:font script="Hant" typeface="新細明體"/>
+        <a:font script="Arab" typeface="Arial"/>
+        <a:font script="Hebr" typeface="Arial"/>
+        <a:font script="Thai" typeface="Cordia New"/>
+        <a:font script="Ethi" typeface="Nyala"/>
+        <a:font script="Beng" typeface="Vrinda"/>
+        <a:font script="Gujr" typeface="Shruti"/>
+        <a:font script="Khmr" typeface="DaunPenh"/>
+        <a:font script="Knda" typeface="Tunga"/>
+        <a:font script="Guru" typeface="Raavi"/>
+        <a:font script="Cans" typeface="Euphemia"/>
+        <a:font script="Cher" typeface="Plantagenet Cherokee"/>
+        <a:font script="Yiii" typeface="Microsoft Yi Baiti"/>
+        <a:font script="Tibt" typeface="Microsoft Himalaya"/>
+        <a:font script="Thaa" typeface="MV Boli"/>
+        <a:font script="Deva" typeface="Mangal"/>
+        <a:font script="Telu" typeface="Gautami"/>
+        <a:font script="Taml" typeface="Latha"/>
+        <a:font script="Syrc" typeface="Estrangelo Edessa"/>
+        <a:font script="Orya" typeface="Kalinga"/>
+        <a:font script="Mlym" typeface="Kartika"/>
+        <a:font script="Laoo" typeface="DokChampa"/>
+        <a:font script="Sinh" typeface="Iskoola Pota"/>
+        <a:font script="Mong" typeface="Mongolian Baiti"/>
+        <a:font script="Viet" typeface="Arial"/>
+        <a:font script="Uigh" typeface="Microsoft Uighur"/>
+        <a:font script="Geor" typeface="Sylfaen"/>
+      </a:minorFont>
+    </a:fontScheme>
+    <a:fmtScheme name="Office">
+      <a:fillStyleLst>
+        <a:solidFill>
+          <a:schemeClr val="phClr"/>
+        </a:solidFill>
+        <a:gradFill rotWithShape="1">
+          <a:gsLst>
+            <a:gs pos="0">
+              <a:schemeClr val="phClr">
+                <a:tint val="50000"/>
+                <a:satMod val="300000"/>
+              </a:schemeClr>
+            </a:gs>
+            <a:gs pos="35000">
+              <a:schemeClr val="phClr">
+                <a:tint val="37000"/>
+                <a:satMod val="300000"/>
+              </a:schemeClr>
+            </a:gs>
+            <a:gs pos="100000">
+              <a:schemeClr val="phClr">
+                <a:tint val="15000"/>
+                <a:satMod val="350000"/>
+              </a:schemeClr>
+            </a:gs>
+          </a:gsLst>
+          <a:lin ang="16200000" scaled="1"/>
+        </a:gradFill>
+        <a:gradFill rotWithShape="1">
+          <a:gsLst>
+            <a:gs pos="0">
+              <a:schemeClr val="phClr">
+                <a:tint val="100000"/>
+                <a:shade val="100000"/>
+                <a:satMod val="130000"/>
+              </a:schemeClr>
+            </a:gs>
+            <a:gs pos="100000">
+              <a:schemeClr val="phClr">
+                <a:tint val="50000"/>
+                <a:shade val="100000"/>
+                <a:satMod val="350000"/>
+              </a:schemeClr>
+            </a:gs>
+          </a:gsLst>
+          <a:lin ang="16200000" scaled="0"/>
+        </a:gradFill>
+      </a:fillStyleLst>
+      <a:lnStyleLst>
+        <a:ln w="9525" cap="flat" cmpd="sng" algn="ctr">
+          <a:solidFill>
+            <a:schemeClr val="phClr">
+              <a:shade val="95000"/>
+              <a:satMod val="105000"/>
+            </a:schemeClr>
+          </a:solidFill>
+          <a:prstDash val="solid"/>
+        </a:ln>
+        <a:ln w="25400" cap="flat" cmpd="sng" algn="ctr">
+          <a:solidFill>
+            <a:schemeClr val="phClr"/>
+          </a:solidFill>
+          <a:prstDash val="solid"/>
+        </a:ln>
+        <a:ln w="38100" cap="flat" cmpd="sng" algn="ctr">
+          <a:solidFill>
+            <a:schemeClr val="phClr"/>
+          </a:solidFill>
+          <a:prstDash val="solid"/>
+        </a:ln>
+      </a:lnStyleLst>
+      <a:effectStyleLst>
+        <a:effectStyle>
+          <a:effectLst>
+            <a:outerShdw blurRad="40000" dist="20000" dir="5400000" rotWithShape="0">
+              <a:srgbClr val="000000">
+                <a:alpha val="38000"/>
+              </a:srgbClr>
+            </a:outerShdw>
+          </a:effectLst>
+        </a:effectStyle>
+        <a:effectStyle>
+          <a:effectLst>
+            <a:outerShdw blurRad="40000" dist="23000" dir="5400000" rotWithShape="0">
+              <a:srgbClr val="000000">
+                <a:alpha val="35000"/>
+              </a:srgbClr>
+            </a:outerShdw>
+          </a:effectLst>
+        </a:effectStyle>
+        <a:effectStyle>
+          <a:effectLst>
+            <a:outerShdw blurRad="40000" dist="23000" dir="5400000" rotWithShape="0">
+              <a:srgbClr val="000000">
+                <a:alpha val="35000"/>
+              </a:srgbClr>
+            </a:outerShdw>
+          </a:effectLst>
+          <a:scene3d>
+            <a:camera prst="orthographicFront">
+              <a:rot lat="0" lon="0" rev="0"/>
+            </a:camera>
+            <a:lightRig rig="threePt" dir="t">
+              <a:rot lat="0" lon="0" rev="1200000"/>
+            </a:lightRig>
+          </a:scene3d>
+          <a:sp3d>
+            <a:bevelT w="63500" h="25400"/>
+          </a:sp3d>
+        </a:effectStyle>
+      </a:effectStyleLst>
+      <a:bgFillStyleLst>
+        <a:solidFill>
+          <a:schemeClr val="phClr"/>
+        </a:solidFill>
+        <a:gradFill rotWithShape="1">
+          <a:gsLst>
+            <a:gs pos="0">
+              <a:schemeClr val="phClr">
+                <a:tint val="40000"/>
+                <a:satMod val="350000"/>
+              </a:schemeClr>
+            </a:gs>
+            <a:gs pos="40000">
+              <a:schemeClr val="phClr">
+                <a:tint val="45000"/>
+                <a:shade val="99000"/>
+                <a:satMod val="350000"/>
+              </a:schemeClr>
+            </a:gs>
+            <a:gs pos="100000">
+              <a:schemeClr val="phClr">
+                <a:shade val="20000"/>
+                <a:satMod val="255000"/>
+              </a:schemeClr>
+            </a:gs>
+          </a:gsLst>
+          <a:path path="circle">
+            <a:fillToRect l="50000" t="-80000" r="50000" b="180000"/>
+          </a:path>
+        </a:gradFill>
+        <a:gradFill rotWithShape="1">
+          <a:gsLst>
+            <a:gs pos="0">
+              <a:schemeClr val="phClr">
+                <a:tint val="80000"/>
+                <a:satMod val="300000"/>
+              </a:schemeClr>
+            </a:gs>
+            <a:gs pos="100000">
+              <a:schemeClr val="phClr">
+                <a:shade val="30000"/>
+                <a:satMod val="200000"/>
+              </a:schemeClr>
+            </a:gs>
+          </a:gsLst>
+          <a:path path="circle">
+            <a:fillToRect l="50000" t="50000" r="50000" b="50000"/>
+          </a:path>
+        </a:gradFill>
+      </a:bgFillStyleLst>
+    </a:fmtScheme>
+  </a:themeElements>
+  <a:objectDefaults>
+    <a:spDef>
+      <a:spPr/>
+      <a:bodyPr/>
+      <a:lstStyle/>
+      <a:style>
+        <a:lnRef idx="1">
+          <a:schemeClr val="accent1"/>
+        </a:lnRef>
+        <a:fillRef idx="3">
+          <a:schemeClr val="accent1"/>
+        </a:fillRef>
+        <a:effectRef idx="2">
+          <a:schemeClr val="accent1"/>
+        </a:effectRef>
+        <a:fontRef idx="minor">
+          <a:schemeClr val="lt1"/>
+        </a:fontRef>
+      </a:style>
+    </a:spDef>
+    <a:lnDef>
+      <a:spPr/>
+      <a:bodyPr/>
+      <a:lstStyle/>
+      <a:style>
+        <a:lnRef idx="2">
+          <a:schemeClr val="accent1"/>
+        </a:lnRef>
+        <a:fillRef idx="0">
+          <a:schemeClr val="accent1"/>
+        </a:fillRef>
+        <a:effectRef idx="1">
+          <a:schemeClr val="accent1"/>
+        </a:effectRef>
+        <a:fontRef idx="minor">
+          <a:schemeClr val="tx1"/>
+        </a:fontRef>
+      </a:style>
+    </a:lnDef>
+  </a:objectDefaults>
+  <a:extraClrSchemeLst/>
+</a:theme>
 </file>
--- a/docs/competition/9月22日路演-社区先知.pptx
+++ b/docs/competition/9月22日路演-社区先知.pptx
@@ -933,7 +933,7 @@
           <a:lstStyle/>
           <a:p>
             <a:r>
-              <a:t>现场演示五步：居民报修 → 政策问答（看依据）→ 天气联动（看执行链）→ 老人端长按求助 → 网格员工作台。</a:t>
+              <a:t>现场演示五步（本场不需要实操，全靠 PPT 内截图）：① 居民一句话报修 → ② 政策问答带依据与属地 → ③ 天气联动点开执行链 → ④ 老人端长按求助出确认框 → ⑤ 网格员工作台看待办。讲的时候按图说：这一步居民做了什么、系统回了什么。</a:t>
             </a:r>
           </a:p>
         </p:txBody>
@@ -4644,7 +4644,7 @@
         </p:nvSpPr>
         <p:spPr>
           <a:xfrm>
-            <a:off x="868680" y="3840480"/>
+            <a:off x="868680" y="3886200"/>
             <a:ext cx="3291840" cy="822960"/>
           </a:xfrm>
           <a:prstGeom prst="rect">
@@ -4672,7 +4672,7 @@
                 <a:ea typeface="微软雅黑"/>
                 <a:cs typeface="微软雅黑"/>
               </a:rPr>
-              <a:t>政策问答：带知识库依据 + 适用地区</a:t>
+              <a:t>政策问答：答案下方给知识库依据，并标注适用地区</a:t>
             </a:r>
           </a:p>
         </p:txBody>
@@ -4709,7 +4709,7 @@
         </p:nvSpPr>
         <p:spPr>
           <a:xfrm>
-            <a:off x="4434840" y="3840480"/>
+            <a:off x="4434840" y="3886200"/>
             <a:ext cx="3291840" cy="822960"/>
           </a:xfrm>
           <a:prstGeom prst="rect">
@@ -4737,29 +4737,29 @@
                 <a:ea typeface="微软雅黑"/>
                 <a:cs typeface="微软雅黑"/>
               </a:rPr>
-              <a:t>工单详情：处理留痕时间线</a:t>
+              <a:t>工单详情：谁在什么时候处理，全有留痕</a:t>
             </a:r>
           </a:p>
         </p:txBody>
       </p:sp>
       <p:pic>
         <p:nvPicPr>
-          <p:cNvPr id="8" name="Picture 7" descr="08-老年端长按求助确认框.png"/>
+          <p:cNvPr id="8" name="Picture 7" descr="05-工单详情与处理留痕.png"/>
           <p:cNvPicPr>
             <a:picLocks noChangeAspect="1"/>
           </p:cNvPicPr>
           <p:nvPr/>
         </p:nvPicPr>
         <p:blipFill>
-          <a:blip r:embed="rId4"/>
+          <a:blip r:embed="rId3"/>
           <a:stretch>
             <a:fillRect/>
           </a:stretch>
         </p:blipFill>
         <p:spPr>
           <a:xfrm>
-            <a:off x="8229600" y="1645920"/>
-            <a:ext cx="1816882" cy="3931920"/>
+            <a:off x="8001000" y="1645920"/>
+            <a:ext cx="3291840" cy="2057400"/>
           </a:xfrm>
           <a:prstGeom prst="rect">
             <a:avLst/>
@@ -4774,8 +4774,8 @@
         </p:nvSpPr>
         <p:spPr>
           <a:xfrm>
-            <a:off x="8046720" y="5715000"/>
-            <a:ext cx="3474720" cy="640080"/>
+            <a:off x="8001000" y="3886200"/>
+            <a:ext cx="3291840" cy="822960"/>
           </a:xfrm>
           <a:prstGeom prst="rect">
             <a:avLst/>
@@ -4802,7 +4802,7 @@
                 <a:ea typeface="微软雅黑"/>
                 <a:cs typeface="微软雅黑"/>
               </a:rPr>
-              <a:t>老年端：长按 3 秒后的确认框</a:t>
+              <a:t>居民端报修列表：状态一目了然</a:t>
             </a:r>
           </a:p>
         </p:txBody>
@@ -5219,8 +5219,8 @@
         </p:nvSpPr>
         <p:spPr>
           <a:xfrm>
-            <a:off x="868680" y="1737360"/>
-            <a:ext cx="6766560" cy="960120"/>
+            <a:off x="868680" y="1600200"/>
+            <a:ext cx="6766560" cy="868680"/>
           </a:xfrm>
           <a:prstGeom prst="roundRect">
             <a:avLst/>
@@ -5263,7 +5263,7 @@
         </p:nvSpPr>
         <p:spPr>
           <a:xfrm>
-            <a:off x="1143000" y="1874519"/>
+            <a:off x="1097280" y="1719072"/>
             <a:ext cx="6309360" cy="731520"/>
           </a:xfrm>
           <a:prstGeom prst="rect">
@@ -5283,7 +5283,7 @@
               </a:lnSpc>
             </a:pPr>
             <a:r>
-              <a:rPr sz="2800" b="0">
+              <a:rPr sz="2200" b="0">
                 <a:solidFill>
                   <a:srgbClr val="1B2233"/>
                 </a:solidFill>
@@ -5304,8 +5304,8 @@
         </p:nvSpPr>
         <p:spPr>
           <a:xfrm>
-            <a:off x="868680" y="2971800"/>
-            <a:ext cx="6766560" cy="960120"/>
+            <a:off x="868680" y="2651760"/>
+            <a:ext cx="6766560" cy="868680"/>
           </a:xfrm>
           <a:prstGeom prst="roundRect">
             <a:avLst/>
@@ -5348,7 +5348,7 @@
         </p:nvSpPr>
         <p:spPr>
           <a:xfrm>
-            <a:off x="1143000" y="3108960"/>
+            <a:off x="1097280" y="2770632"/>
             <a:ext cx="6309360" cy="731520"/>
           </a:xfrm>
           <a:prstGeom prst="rect">
@@ -5368,7 +5368,7 @@
               </a:lnSpc>
             </a:pPr>
             <a:r>
-              <a:rPr sz="2800" b="0">
+              <a:rPr sz="2200" b="0">
                 <a:solidFill>
                   <a:srgbClr val="1B2233"/>
                 </a:solidFill>
@@ -5389,8 +5389,8 @@
         </p:nvSpPr>
         <p:spPr>
           <a:xfrm>
-            <a:off x="868680" y="4206240"/>
-            <a:ext cx="6766560" cy="960120"/>
+            <a:off x="868680" y="3703320"/>
+            <a:ext cx="6766560" cy="868680"/>
           </a:xfrm>
           <a:prstGeom prst="roundRect">
             <a:avLst/>
@@ -5433,7 +5433,7 @@
         </p:nvSpPr>
         <p:spPr>
           <a:xfrm>
-            <a:off x="1143000" y="4343400"/>
+            <a:off x="1097280" y="3822191"/>
             <a:ext cx="6309360" cy="731520"/>
           </a:xfrm>
           <a:prstGeom prst="rect">
@@ -5453,7 +5453,7 @@
               </a:lnSpc>
             </a:pPr>
             <a:r>
-              <a:rPr sz="2800" b="0">
+              <a:rPr sz="2200" b="0">
                 <a:solidFill>
                   <a:srgbClr val="1B2233"/>
                 </a:solidFill>
@@ -5468,14 +5468,58 @@
       </p:sp>
       <p:sp>
         <p:nvSpPr>
-          <p:cNvPr id="10" name="TextBox 9"/>
+          <p:cNvPr id="10" name="Rounded Rectangle 9"/>
+          <p:cNvSpPr/>
+          <p:nvPr/>
+        </p:nvSpPr>
+        <p:spPr>
+          <a:xfrm>
+            <a:off x="868680" y="4754879"/>
+            <a:ext cx="6766560" cy="868680"/>
+          </a:xfrm>
+          <a:prstGeom prst="roundRect">
+            <a:avLst/>
+          </a:prstGeom>
+          <a:solidFill>
+            <a:srgbClr val="F2F5FB"/>
+          </a:solidFill>
+          <a:ln>
+            <a:noFill/>
+          </a:ln>
+          <a:effectLst/>
+        </p:spPr>
+        <p:style>
+          <a:lnRef idx="1">
+            <a:schemeClr val="accent1"/>
+          </a:lnRef>
+          <a:fillRef idx="3">
+            <a:schemeClr val="accent1"/>
+          </a:fillRef>
+          <a:effectRef idx="2">
+            <a:schemeClr val="accent1"/>
+          </a:effectRef>
+          <a:fontRef idx="minor">
+            <a:schemeClr val="lt1"/>
+          </a:fontRef>
+        </p:style>
+        <p:txBody>
+          <a:bodyPr rtlCol="0" anchor="ctr"/>
+          <a:lstStyle/>
+          <a:p>
+            <a:pPr algn="ctr"/>
+          </a:p>
+        </p:txBody>
+      </p:sp>
+      <p:sp>
+        <p:nvSpPr>
+          <p:cNvPr id="11" name="TextBox 10"/>
           <p:cNvSpPr txBox="1"/>
           <p:nvPr/>
         </p:nvSpPr>
         <p:spPr>
           <a:xfrm>
-            <a:off x="868680" y="5486400"/>
-            <a:ext cx="10058400" cy="548640"/>
+            <a:off x="1097280" y="4873752"/>
+            <a:ext cx="6309360" cy="731520"/>
           </a:xfrm>
           <a:prstGeom prst="rect">
             <a:avLst/>
@@ -5494,22 +5538,63 @@
               </a:lnSpc>
             </a:pPr>
             <a:r>
-              <a:rPr sz="1600" b="0">
-                <a:solidFill>
-                  <a:srgbClr val="6B7485"/>
+              <a:rPr sz="2200" b="0">
+                <a:solidFill>
+                  <a:srgbClr val="1B2233"/>
                 </a:solidFill>
                 <a:latin typeface="微软雅黑"/>
                 <a:ea typeface="微软雅黑"/>
                 <a:cs typeface="微软雅黑"/>
               </a:rPr>
-              <a:t>（第四点口述：天气、健康、通知分属不同部门，出事没人主动联动）</a:t>
+              <a:t>天气 / 健康 / 通知：分属不同部门，出事没人主动联动</a:t>
+            </a:r>
+          </a:p>
+        </p:txBody>
+      </p:sp>
+      <p:sp>
+        <p:nvSpPr>
+          <p:cNvPr id="12" name="TextBox 11"/>
+          <p:cNvSpPr txBox="1"/>
+          <p:nvPr/>
+        </p:nvSpPr>
+        <p:spPr>
+          <a:xfrm>
+            <a:off x="868680" y="5943600"/>
+            <a:ext cx="10881360" cy="548640"/>
+          </a:xfrm>
+          <a:prstGeom prst="rect">
+            <a:avLst/>
+          </a:prstGeom>
+          <a:noFill/>
+        </p:spPr>
+        <p:txBody>
+          <a:bodyPr wrap="square">
+            <a:spAutoFit/>
+          </a:bodyPr>
+          <a:lstStyle/>
+          <a:p>
+            <a:pPr algn="l">
+              <a:lnSpc>
+                <a:spcPct val="125000"/>
+              </a:lnSpc>
+            </a:pPr>
+            <a:r>
+              <a:rPr sz="1500" b="0">
+                <a:solidFill>
+                  <a:srgbClr val="6B7485"/>
+                </a:solidFill>
+                <a:latin typeface="微软雅黑"/>
+                <a:ea typeface="微软雅黑"/>
+                <a:cs typeface="微软雅黑"/>
+              </a:rPr>
+              <a:t>（这一页之后我会主动说明：还没在真实街道试点，这是下一步）</a:t>
             </a:r>
           </a:p>
         </p:txBody>
       </p:sp>
       <p:pic>
         <p:nvPicPr>
-          <p:cNvPr id="11" name="Picture 10" descr="06-网格员工作台.png"/>
+          <p:cNvPr id="13" name="Picture 12" descr="06-网格员工作台.png"/>
           <p:cNvPicPr>
             <a:picLocks noChangeAspect="1"/>
           </p:cNvPicPr>
@@ -5533,7 +5618,7 @@
       </p:pic>
       <p:sp>
         <p:nvSpPr>
-          <p:cNvPr id="12" name="TextBox 11"/>
+          <p:cNvPr id="14" name="TextBox 13"/>
           <p:cNvSpPr txBox="1"/>
           <p:nvPr/>
         </p:nvSpPr>
@@ -7604,21 +7689,45 @@
                 <a:ea typeface="微软雅黑"/>
                 <a:cs typeface="微软雅黑"/>
               </a:rPr>
-              <a:t>现在看它真的能跑</a:t>
-            </a:r>
-          </a:p>
-        </p:txBody>
-      </p:sp>
-      <p:sp>
-        <p:nvSpPr>
-          <p:cNvPr id="4" name="Rounded Rectangle 3"/>
+              <a:t>五步走完一套流程（真实截图）</a:t>
+            </a:r>
+          </a:p>
+        </p:txBody>
+      </p:sp>
+      <p:pic>
+        <p:nvPicPr>
+          <p:cNvPr id="4" name="Picture 3" descr="10-提交报修表单.png"/>
+          <p:cNvPicPr>
+            <a:picLocks noChangeAspect="1"/>
+          </p:cNvPicPr>
+          <p:nvPr/>
+        </p:nvPicPr>
+        <p:blipFill>
+          <a:blip r:embed="rId2"/>
+          <a:stretch>
+            <a:fillRect/>
+          </a:stretch>
+        </p:blipFill>
+        <p:spPr>
+          <a:xfrm>
+            <a:off x="658368" y="2017395"/>
+            <a:ext cx="2103120" cy="1314450"/>
+          </a:xfrm>
+          <a:prstGeom prst="rect">
+            <a:avLst/>
+          </a:prstGeom>
+        </p:spPr>
+      </p:pic>
+      <p:sp>
+        <p:nvSpPr>
+          <p:cNvPr id="5" name="Rounded Rectangle 4"/>
           <p:cNvSpPr/>
           <p:nvPr/>
         </p:nvSpPr>
         <p:spPr>
           <a:xfrm>
-            <a:off x="868680" y="1783080"/>
-            <a:ext cx="10424160" cy="749808"/>
+            <a:off x="658368" y="3977639"/>
+            <a:ext cx="2103120" cy="1325880"/>
           </a:xfrm>
           <a:prstGeom prst="roundRect">
             <a:avLst/>
@@ -7655,14 +7764,14 @@
       </p:sp>
       <p:sp>
         <p:nvSpPr>
-          <p:cNvPr id="5" name="TextBox 4"/>
+          <p:cNvPr id="6" name="TextBox 5"/>
           <p:cNvSpPr txBox="1"/>
           <p:nvPr/>
         </p:nvSpPr>
         <p:spPr>
           <a:xfrm>
-            <a:off x="1188720" y="1901952"/>
-            <a:ext cx="9692640" cy="548640"/>
+            <a:off x="658368" y="4078224"/>
+            <a:ext cx="2103120" cy="457200"/>
           </a:xfrm>
           <a:prstGeom prst="rect">
             <a:avLst/>
@@ -7675,41 +7784,106 @@
           </a:bodyPr>
           <a:lstStyle/>
           <a:p>
-            <a:pPr algn="l">
+            <a:pPr algn="ctr">
               <a:lnSpc>
                 <a:spcPct val="125000"/>
               </a:lnSpc>
             </a:pPr>
             <a:r>
-              <a:rPr sz="2600" b="0">
-                <a:solidFill>
-                  <a:srgbClr val="1B2233"/>
+              <a:rPr sz="2000" b="1">
+                <a:solidFill>
+                  <a:srgbClr val="122A51"/>
                 </a:solidFill>
                 <a:latin typeface="微软雅黑"/>
                 <a:ea typeface="微软雅黑"/>
                 <a:cs typeface="微软雅黑"/>
               </a:rPr>
-              <a:t>① 居民报修</a:t>
-            </a:r>
-          </a:p>
-        </p:txBody>
-      </p:sp>
-      <p:sp>
-        <p:nvSpPr>
-          <p:cNvPr id="6" name="Rounded Rectangle 5"/>
+              <a:t>① 报修</a:t>
+            </a:r>
+          </a:p>
+        </p:txBody>
+      </p:sp>
+      <p:sp>
+        <p:nvSpPr>
+          <p:cNvPr id="7" name="TextBox 6"/>
+          <p:cNvSpPr txBox="1"/>
+          <p:nvPr/>
+        </p:nvSpPr>
+        <p:spPr>
+          <a:xfrm>
+            <a:off x="658368" y="4590288"/>
+            <a:ext cx="2103120" cy="640080"/>
+          </a:xfrm>
+          <a:prstGeom prst="rect">
+            <a:avLst/>
+          </a:prstGeom>
+          <a:noFill/>
+        </p:spPr>
+        <p:txBody>
+          <a:bodyPr wrap="square">
+            <a:spAutoFit/>
+          </a:bodyPr>
+          <a:lstStyle/>
+          <a:p>
+            <a:pPr algn="ctr">
+              <a:lnSpc>
+                <a:spcPct val="125000"/>
+              </a:lnSpc>
+            </a:pPr>
+            <a:r>
+              <a:rPr sz="1400" b="0">
+                <a:solidFill>
+                  <a:srgbClr val="6B7485"/>
+                </a:solidFill>
+                <a:latin typeface="微软雅黑"/>
+                <a:ea typeface="微软雅黑"/>
+                <a:cs typeface="微软雅黑"/>
+              </a:rPr>
+              <a:t>一句话提交</a:t>
+            </a:r>
+          </a:p>
+        </p:txBody>
+      </p:sp>
+      <p:pic>
+        <p:nvPicPr>
+          <p:cNvPr id="8" name="Picture 7" descr="03-政策问答带依据与属地.png"/>
+          <p:cNvPicPr>
+            <a:picLocks noChangeAspect="1"/>
+          </p:cNvPicPr>
+          <p:nvPr/>
+        </p:nvPicPr>
+        <p:blipFill>
+          <a:blip r:embed="rId3"/>
+          <a:stretch>
+            <a:fillRect/>
+          </a:stretch>
+        </p:blipFill>
+        <p:spPr>
+          <a:xfrm>
+            <a:off x="2907791" y="2017395"/>
+            <a:ext cx="2103120" cy="1314450"/>
+          </a:xfrm>
+          <a:prstGeom prst="rect">
+            <a:avLst/>
+          </a:prstGeom>
+        </p:spPr>
+      </p:pic>
+      <p:sp>
+        <p:nvSpPr>
+          <p:cNvPr id="9" name="Rounded Rectangle 8"/>
           <p:cNvSpPr/>
           <p:nvPr/>
         </p:nvSpPr>
         <p:spPr>
           <a:xfrm>
-            <a:off x="868680" y="2697480"/>
-            <a:ext cx="10424160" cy="749808"/>
+            <a:off x="2907791" y="3977639"/>
+            <a:ext cx="2103120" cy="1325880"/>
           </a:xfrm>
           <a:prstGeom prst="roundRect">
             <a:avLst/>
           </a:prstGeom>
           <a:solidFill>
-            <a:srgbClr val="FFFFFF"/>
+            <a:srgbClr val="F2F5FB"/>
           </a:solidFill>
           <a:ln>
             <a:noFill/>
@@ -7740,14 +7914,14 @@
       </p:sp>
       <p:sp>
         <p:nvSpPr>
-          <p:cNvPr id="7" name="TextBox 6"/>
+          <p:cNvPr id="10" name="TextBox 9"/>
           <p:cNvSpPr txBox="1"/>
           <p:nvPr/>
         </p:nvSpPr>
         <p:spPr>
           <a:xfrm>
-            <a:off x="1188720" y="2816352"/>
-            <a:ext cx="9692640" cy="548640"/>
+            <a:off x="2907791" y="4078224"/>
+            <a:ext cx="2103120" cy="457200"/>
           </a:xfrm>
           <a:prstGeom prst="rect">
             <a:avLst/>
@@ -7760,35 +7934,100 @@
           </a:bodyPr>
           <a:lstStyle/>
           <a:p>
-            <a:pPr algn="l">
+            <a:pPr algn="ctr">
               <a:lnSpc>
                 <a:spcPct val="125000"/>
               </a:lnSpc>
             </a:pPr>
             <a:r>
-              <a:rPr sz="2600" b="0">
-                <a:solidFill>
-                  <a:srgbClr val="1B2233"/>
+              <a:rPr sz="2000" b="1">
+                <a:solidFill>
+                  <a:srgbClr val="122A51"/>
                 </a:solidFill>
                 <a:latin typeface="微软雅黑"/>
                 <a:ea typeface="微软雅黑"/>
                 <a:cs typeface="微软雅黑"/>
               </a:rPr>
-              <a:t>② 政策问答（看依据）</a:t>
-            </a:r>
-          </a:p>
-        </p:txBody>
-      </p:sp>
-      <p:sp>
-        <p:nvSpPr>
-          <p:cNvPr id="8" name="Rounded Rectangle 7"/>
+              <a:t>② 政策问答</a:t>
+            </a:r>
+          </a:p>
+        </p:txBody>
+      </p:sp>
+      <p:sp>
+        <p:nvSpPr>
+          <p:cNvPr id="11" name="TextBox 10"/>
+          <p:cNvSpPr txBox="1"/>
+          <p:nvPr/>
+        </p:nvSpPr>
+        <p:spPr>
+          <a:xfrm>
+            <a:off x="2907791" y="4590288"/>
+            <a:ext cx="2103120" cy="640080"/>
+          </a:xfrm>
+          <a:prstGeom prst="rect">
+            <a:avLst/>
+          </a:prstGeom>
+          <a:noFill/>
+        </p:spPr>
+        <p:txBody>
+          <a:bodyPr wrap="square">
+            <a:spAutoFit/>
+          </a:bodyPr>
+          <a:lstStyle/>
+          <a:p>
+            <a:pPr algn="ctr">
+              <a:lnSpc>
+                <a:spcPct val="125000"/>
+              </a:lnSpc>
+            </a:pPr>
+            <a:r>
+              <a:rPr sz="1400" b="0">
+                <a:solidFill>
+                  <a:srgbClr val="6B7485"/>
+                </a:solidFill>
+                <a:latin typeface="微软雅黑"/>
+                <a:ea typeface="微软雅黑"/>
+                <a:cs typeface="微软雅黑"/>
+              </a:rPr>
+              <a:t>带依据与属地</a:t>
+            </a:r>
+          </a:p>
+        </p:txBody>
+      </p:sp>
+      <p:pic>
+        <p:nvPicPr>
+          <p:cNvPr id="12" name="Picture 11" descr="04-多智能体执行链.png"/>
+          <p:cNvPicPr>
+            <a:picLocks noChangeAspect="1"/>
+          </p:cNvPicPr>
+          <p:nvPr/>
+        </p:nvPicPr>
+        <p:blipFill>
+          <a:blip r:embed="rId4"/>
+          <a:stretch>
+            <a:fillRect/>
+          </a:stretch>
+        </p:blipFill>
+        <p:spPr>
+          <a:xfrm>
+            <a:off x="5157216" y="2017395"/>
+            <a:ext cx="2103120" cy="1314450"/>
+          </a:xfrm>
+          <a:prstGeom prst="rect">
+            <a:avLst/>
+          </a:prstGeom>
+        </p:spPr>
+      </p:pic>
+      <p:sp>
+        <p:nvSpPr>
+          <p:cNvPr id="13" name="Rounded Rectangle 12"/>
           <p:cNvSpPr/>
           <p:nvPr/>
         </p:nvSpPr>
         <p:spPr>
           <a:xfrm>
-            <a:off x="868680" y="3611880"/>
-            <a:ext cx="10424160" cy="749808"/>
+            <a:off x="5157216" y="3977639"/>
+            <a:ext cx="2103120" cy="1325880"/>
           </a:xfrm>
           <a:prstGeom prst="roundRect">
             <a:avLst/>
@@ -7825,14 +8064,14 @@
       </p:sp>
       <p:sp>
         <p:nvSpPr>
-          <p:cNvPr id="9" name="TextBox 8"/>
+          <p:cNvPr id="14" name="TextBox 13"/>
           <p:cNvSpPr txBox="1"/>
           <p:nvPr/>
         </p:nvSpPr>
         <p:spPr>
           <a:xfrm>
-            <a:off x="1188720" y="3730752"/>
-            <a:ext cx="9692640" cy="548640"/>
+            <a:off x="5157216" y="4078224"/>
+            <a:ext cx="2103120" cy="457200"/>
           </a:xfrm>
           <a:prstGeom prst="rect">
             <a:avLst/>
@@ -7845,41 +8084,106 @@
           </a:bodyPr>
           <a:lstStyle/>
           <a:p>
-            <a:pPr algn="l">
+            <a:pPr algn="ctr">
               <a:lnSpc>
                 <a:spcPct val="125000"/>
               </a:lnSpc>
             </a:pPr>
             <a:r>
-              <a:rPr sz="2600" b="0">
-                <a:solidFill>
-                  <a:srgbClr val="1B2233"/>
+              <a:rPr sz="2000" b="1">
+                <a:solidFill>
+                  <a:srgbClr val="122A51"/>
                 </a:solidFill>
                 <a:latin typeface="微软雅黑"/>
                 <a:ea typeface="微软雅黑"/>
                 <a:cs typeface="微软雅黑"/>
               </a:rPr>
-              <a:t>③ 天气联动（看执行链）</a:t>
-            </a:r>
-          </a:p>
-        </p:txBody>
-      </p:sp>
-      <p:sp>
-        <p:nvSpPr>
-          <p:cNvPr id="10" name="Rounded Rectangle 9"/>
+              <a:t>③ 天气联动</a:t>
+            </a:r>
+          </a:p>
+        </p:txBody>
+      </p:sp>
+      <p:sp>
+        <p:nvSpPr>
+          <p:cNvPr id="15" name="TextBox 14"/>
+          <p:cNvSpPr txBox="1"/>
+          <p:nvPr/>
+        </p:nvSpPr>
+        <p:spPr>
+          <a:xfrm>
+            <a:off x="5157216" y="4590288"/>
+            <a:ext cx="2103120" cy="640080"/>
+          </a:xfrm>
+          <a:prstGeom prst="rect">
+            <a:avLst/>
+          </a:prstGeom>
+          <a:noFill/>
+        </p:spPr>
+        <p:txBody>
+          <a:bodyPr wrap="square">
+            <a:spAutoFit/>
+          </a:bodyPr>
+          <a:lstStyle/>
+          <a:p>
+            <a:pPr algn="ctr">
+              <a:lnSpc>
+                <a:spcPct val="125000"/>
+              </a:lnSpc>
+            </a:pPr>
+            <a:r>
+              <a:rPr sz="1400" b="0">
+                <a:solidFill>
+                  <a:srgbClr val="6B7485"/>
+                </a:solidFill>
+                <a:latin typeface="微软雅黑"/>
+                <a:ea typeface="微软雅黑"/>
+                <a:cs typeface="微软雅黑"/>
+              </a:rPr>
+              <a:t>看执行链</a:t>
+            </a:r>
+          </a:p>
+        </p:txBody>
+      </p:sp>
+      <p:pic>
+        <p:nvPicPr>
+          <p:cNvPr id="16" name="Picture 15" descr="08-老年端长按求助确认框.png"/>
+          <p:cNvPicPr>
+            <a:picLocks noChangeAspect="1"/>
+          </p:cNvPicPr>
+          <p:nvPr/>
+        </p:nvPicPr>
+        <p:blipFill>
+          <a:blip r:embed="rId5"/>
+          <a:stretch>
+            <a:fillRect/>
+          </a:stretch>
+        </p:blipFill>
+        <p:spPr>
+          <a:xfrm>
+            <a:off x="7961726" y="1600200"/>
+            <a:ext cx="992947" cy="2148839"/>
+          </a:xfrm>
+          <a:prstGeom prst="rect">
+            <a:avLst/>
+          </a:prstGeom>
+        </p:spPr>
+      </p:pic>
+      <p:sp>
+        <p:nvSpPr>
+          <p:cNvPr id="17" name="Rounded Rectangle 16"/>
           <p:cNvSpPr/>
           <p:nvPr/>
         </p:nvSpPr>
         <p:spPr>
           <a:xfrm>
-            <a:off x="868680" y="4526280"/>
-            <a:ext cx="10424160" cy="749808"/>
+            <a:off x="7406640" y="3977639"/>
+            <a:ext cx="2103120" cy="1325880"/>
           </a:xfrm>
           <a:prstGeom prst="roundRect">
             <a:avLst/>
           </a:prstGeom>
           <a:solidFill>
-            <a:srgbClr val="FFFFFF"/>
+            <a:srgbClr val="F2F5FB"/>
           </a:solidFill>
           <a:ln>
             <a:noFill/>
@@ -7910,14 +8214,14 @@
       </p:sp>
       <p:sp>
         <p:nvSpPr>
-          <p:cNvPr id="11" name="TextBox 10"/>
+          <p:cNvPr id="18" name="TextBox 17"/>
           <p:cNvSpPr txBox="1"/>
           <p:nvPr/>
         </p:nvSpPr>
         <p:spPr>
           <a:xfrm>
-            <a:off x="1188720" y="4645152"/>
-            <a:ext cx="9692640" cy="548640"/>
+            <a:off x="7406640" y="4078224"/>
+            <a:ext cx="2103120" cy="457200"/>
           </a:xfrm>
           <a:prstGeom prst="rect">
             <a:avLst/>
@@ -7930,35 +8234,100 @@
           </a:bodyPr>
           <a:lstStyle/>
           <a:p>
-            <a:pPr algn="l">
+            <a:pPr algn="ctr">
               <a:lnSpc>
                 <a:spcPct val="125000"/>
               </a:lnSpc>
             </a:pPr>
             <a:r>
-              <a:rPr sz="2600" b="0">
-                <a:solidFill>
-                  <a:srgbClr val="1B2233"/>
+              <a:rPr sz="2000" b="1">
+                <a:solidFill>
+                  <a:srgbClr val="122A51"/>
                 </a:solidFill>
                 <a:latin typeface="微软雅黑"/>
                 <a:ea typeface="微软雅黑"/>
                 <a:cs typeface="微软雅黑"/>
               </a:rPr>
-              <a:t>④ 老人端长按求助</a:t>
-            </a:r>
-          </a:p>
-        </p:txBody>
-      </p:sp>
-      <p:sp>
-        <p:nvSpPr>
-          <p:cNvPr id="12" name="Rounded Rectangle 11"/>
+              <a:t>④ 老人端</a:t>
+            </a:r>
+          </a:p>
+        </p:txBody>
+      </p:sp>
+      <p:sp>
+        <p:nvSpPr>
+          <p:cNvPr id="19" name="TextBox 18"/>
+          <p:cNvSpPr txBox="1"/>
+          <p:nvPr/>
+        </p:nvSpPr>
+        <p:spPr>
+          <a:xfrm>
+            <a:off x="7406640" y="4590288"/>
+            <a:ext cx="2103120" cy="640080"/>
+          </a:xfrm>
+          <a:prstGeom prst="rect">
+            <a:avLst/>
+          </a:prstGeom>
+          <a:noFill/>
+        </p:spPr>
+        <p:txBody>
+          <a:bodyPr wrap="square">
+            <a:spAutoFit/>
+          </a:bodyPr>
+          <a:lstStyle/>
+          <a:p>
+            <a:pPr algn="ctr">
+              <a:lnSpc>
+                <a:spcPct val="125000"/>
+              </a:lnSpc>
+            </a:pPr>
+            <a:r>
+              <a:rPr sz="1400" b="0">
+                <a:solidFill>
+                  <a:srgbClr val="6B7485"/>
+                </a:solidFill>
+                <a:latin typeface="微软雅黑"/>
+                <a:ea typeface="微软雅黑"/>
+                <a:cs typeface="微软雅黑"/>
+              </a:rPr>
+              <a:t>长按 3 秒再确认</a:t>
+            </a:r>
+          </a:p>
+        </p:txBody>
+      </p:sp>
+      <p:pic>
+        <p:nvPicPr>
+          <p:cNvPr id="20" name="Picture 19" descr="06-网格员工作台.png"/>
+          <p:cNvPicPr>
+            <a:picLocks noChangeAspect="1"/>
+          </p:cNvPicPr>
+          <p:nvPr/>
+        </p:nvPicPr>
+        <p:blipFill>
+          <a:blip r:embed="rId6"/>
+          <a:stretch>
+            <a:fillRect/>
+          </a:stretch>
+        </p:blipFill>
+        <p:spPr>
+          <a:xfrm>
+            <a:off x="9656063" y="2017395"/>
+            <a:ext cx="2103120" cy="1314450"/>
+          </a:xfrm>
+          <a:prstGeom prst="rect">
+            <a:avLst/>
+          </a:prstGeom>
+        </p:spPr>
+      </p:pic>
+      <p:sp>
+        <p:nvSpPr>
+          <p:cNvPr id="21" name="Rounded Rectangle 20"/>
           <p:cNvSpPr/>
           <p:nvPr/>
         </p:nvSpPr>
         <p:spPr>
           <a:xfrm>
-            <a:off x="868680" y="5440680"/>
-            <a:ext cx="10424160" cy="749808"/>
+            <a:off x="9656063" y="3977639"/>
+            <a:ext cx="2103120" cy="1325880"/>
           </a:xfrm>
           <a:prstGeom prst="roundRect">
             <a:avLst/>
@@ -7995,14 +8364,96 @@
       </p:sp>
       <p:sp>
         <p:nvSpPr>
-          <p:cNvPr id="13" name="TextBox 12"/>
+          <p:cNvPr id="22" name="TextBox 21"/>
           <p:cNvSpPr txBox="1"/>
           <p:nvPr/>
         </p:nvSpPr>
         <p:spPr>
           <a:xfrm>
-            <a:off x="1188720" y="5559552"/>
-            <a:ext cx="9692640" cy="548640"/>
+            <a:off x="9656063" y="4078224"/>
+            <a:ext cx="2103120" cy="457200"/>
+          </a:xfrm>
+          <a:prstGeom prst="rect">
+            <a:avLst/>
+          </a:prstGeom>
+          <a:noFill/>
+        </p:spPr>
+        <p:txBody>
+          <a:bodyPr wrap="square">
+            <a:spAutoFit/>
+          </a:bodyPr>
+          <a:lstStyle/>
+          <a:p>
+            <a:pPr algn="ctr">
+              <a:lnSpc>
+                <a:spcPct val="125000"/>
+              </a:lnSpc>
+            </a:pPr>
+            <a:r>
+              <a:rPr sz="2000" b="1">
+                <a:solidFill>
+                  <a:srgbClr val="122A51"/>
+                </a:solidFill>
+                <a:latin typeface="微软雅黑"/>
+                <a:ea typeface="微软雅黑"/>
+                <a:cs typeface="微软雅黑"/>
+              </a:rPr>
+              <a:t>⑤ 网格端</a:t>
+            </a:r>
+          </a:p>
+        </p:txBody>
+      </p:sp>
+      <p:sp>
+        <p:nvSpPr>
+          <p:cNvPr id="23" name="TextBox 22"/>
+          <p:cNvSpPr txBox="1"/>
+          <p:nvPr/>
+        </p:nvSpPr>
+        <p:spPr>
+          <a:xfrm>
+            <a:off x="9656063" y="4590288"/>
+            <a:ext cx="2103120" cy="640080"/>
+          </a:xfrm>
+          <a:prstGeom prst="rect">
+            <a:avLst/>
+          </a:prstGeom>
+          <a:noFill/>
+        </p:spPr>
+        <p:txBody>
+          <a:bodyPr wrap="square">
+            <a:spAutoFit/>
+          </a:bodyPr>
+          <a:lstStyle/>
+          <a:p>
+            <a:pPr algn="ctr">
+              <a:lnSpc>
+                <a:spcPct val="125000"/>
+              </a:lnSpc>
+            </a:pPr>
+            <a:r>
+              <a:rPr sz="1400" b="0">
+                <a:solidFill>
+                  <a:srgbClr val="6B7485"/>
+                </a:solidFill>
+                <a:latin typeface="微软雅黑"/>
+                <a:ea typeface="微软雅黑"/>
+                <a:cs typeface="微软雅黑"/>
+              </a:rPr>
+              <a:t>待办与处理</a:t>
+            </a:r>
+          </a:p>
+        </p:txBody>
+      </p:sp>
+      <p:sp>
+        <p:nvSpPr>
+          <p:cNvPr id="24" name="TextBox 23"/>
+          <p:cNvSpPr txBox="1"/>
+          <p:nvPr/>
+        </p:nvSpPr>
+        <p:spPr>
+          <a:xfrm>
+            <a:off x="658368" y="5623560"/>
+            <a:ext cx="10881360" cy="640080"/>
           </a:xfrm>
           <a:prstGeom prst="rect">
             <a:avLst/>
@@ -8021,22 +8472,22 @@
               </a:lnSpc>
             </a:pPr>
             <a:r>
-              <a:rPr sz="2600" b="0">
-                <a:solidFill>
-                  <a:srgbClr val="1B2233"/>
+              <a:rPr sz="1500" b="0">
+                <a:solidFill>
+                  <a:srgbClr val="6B7485"/>
                 </a:solidFill>
                 <a:latin typeface="微软雅黑"/>
                 <a:ea typeface="微软雅黑"/>
                 <a:cs typeface="微软雅黑"/>
               </a:rPr>
-              <a:t>⑤ 网格员工作台</a:t>
-            </a:r>
-          </a:p>
-        </p:txBody>
-      </p:sp>
-      <p:sp>
-        <p:nvSpPr>
-          <p:cNvPr id="14" name="TextBox 13"/>
+              <a:t>均为系统实际界面截图，未做美化；这套流程在本地双击启动脚本即可复现</a:t>
+            </a:r>
+          </a:p>
+        </p:txBody>
+      </p:sp>
+      <p:sp>
+        <p:nvSpPr>
+          <p:cNvPr id="25" name="TextBox 24"/>
           <p:cNvSpPr txBox="1"/>
           <p:nvPr/>
         </p:nvSpPr>

--- a/docs/competition/9月22日路演-社区先知.pptx
+++ b/docs/competition/9月22日路演-社区先知.pptx
@@ -17,6 +17,9 @@
     <p:sldId id="265" r:id="rId16"/>
     <p:sldId id="266" r:id="rId17"/>
     <p:sldId id="267" r:id="rId18"/>
+    <p:sldId id="268" r:id="rId19"/>
+    <p:sldId id="269" r:id="rId20"/>
+    <p:sldId id="270" r:id="rId21"/>
   </p:sldIdLst>
   <p:sldSz cx="12191695" cy="6858000" type="screen4x3"/>
   <p:notesSz cx="6858000" cy="9144000"/>
@@ -538,6 +541,426 @@
 </p:notes>
 </file>
 
+<file path=ppt/notesSlides/notesSlide10.xml><?xml version="1.0" encoding="utf-8"?>
+<p:notes xmlns:a="http://schemas.openxmlformats.org/drawingml/2006/main" xmlns:p="http://schemas.openxmlformats.org/presentationml/2006/main" xmlns:r="http://schemas.openxmlformats.org/officeDocument/2006/relationships">
+  <p:cSld>
+    <p:spTree>
+      <p:nvGrpSpPr>
+        <p:cNvPr id="1" name=""/>
+        <p:cNvGrpSpPr/>
+        <p:nvPr/>
+      </p:nvGrpSpPr>
+      <p:grpSpPr>
+        <a:xfrm>
+          <a:off x="0" y="0"/>
+          <a:ext cx="0" cy="0"/>
+          <a:chOff x="0" y="0"/>
+          <a:chExt cx="0" cy="0"/>
+        </a:xfrm>
+      </p:grpSpPr>
+      <p:sp>
+        <p:nvSpPr>
+          <p:cNvPr id="2" name="Slide Image Placeholder 1"/>
+          <p:cNvSpPr>
+            <a:spLocks noGrp="1"/>
+          </p:cNvSpPr>
+          <p:nvPr>
+            <p:ph type="sldImg" idx="2"/>
+          </p:nvPr>
+        </p:nvSpPr>
+        <p:spPr/>
+      </p:sp>
+      <p:sp>
+        <p:nvSpPr>
+          <p:cNvPr id="3" name="Notes Placeholder 2"/>
+          <p:cNvSpPr>
+            <a:spLocks noGrp="1"/>
+          </p:cNvSpPr>
+          <p:nvPr>
+            <p:ph type="body" idx="3" sz="quarter"/>
+          </p:nvPr>
+        </p:nvSpPr>
+        <p:spPr/>
+        <p:txBody>
+          <a:bodyPr/>
+          <a:lstStyle/>
+          <a:p>
+            <a:r>
+              <a:t>备用页：被追问「为什么不全用大模型」时翻到这页。</a:t>
+            </a:r>
+          </a:p>
+        </p:txBody>
+      </p:sp>
+      <p:sp>
+        <p:nvSpPr>
+          <p:cNvPr id="4" name="Slide Number Placeholder 3"/>
+          <p:cNvSpPr>
+            <a:spLocks noGrp="1"/>
+          </p:cNvSpPr>
+          <p:nvPr>
+            <p:ph type="sldNum" idx="5" sz="quarter"/>
+          </p:nvPr>
+        </p:nvSpPr>
+        <p:spPr/>
+      </p:sp>
+    </p:spTree>
+  </p:cSld>
+  <p:clrMapOvr>
+    <a:masterClrMapping/>
+  </p:clrMapOvr>
+</p:notes>
+</file>
+
+<file path=ppt/notesSlides/notesSlide11.xml><?xml version="1.0" encoding="utf-8"?>
+<p:notes xmlns:a="http://schemas.openxmlformats.org/drawingml/2006/main" xmlns:p="http://schemas.openxmlformats.org/presentationml/2006/main" xmlns:r="http://schemas.openxmlformats.org/officeDocument/2006/relationships">
+  <p:cSld>
+    <p:spTree>
+      <p:nvGrpSpPr>
+        <p:cNvPr id="1" name=""/>
+        <p:cNvGrpSpPr/>
+        <p:nvPr/>
+      </p:nvGrpSpPr>
+      <p:grpSpPr>
+        <a:xfrm>
+          <a:off x="0" y="0"/>
+          <a:ext cx="0" cy="0"/>
+          <a:chOff x="0" y="0"/>
+          <a:chExt cx="0" cy="0"/>
+        </a:xfrm>
+      </p:grpSpPr>
+      <p:sp>
+        <p:nvSpPr>
+          <p:cNvPr id="2" name="Slide Image Placeholder 1"/>
+          <p:cNvSpPr>
+            <a:spLocks noGrp="1"/>
+          </p:cNvSpPr>
+          <p:nvPr>
+            <p:ph type="sldImg" idx="2"/>
+          </p:nvPr>
+        </p:nvSpPr>
+        <p:spPr/>
+      </p:sp>
+      <p:sp>
+        <p:nvSpPr>
+          <p:cNvPr id="3" name="Notes Placeholder 2"/>
+          <p:cNvSpPr>
+            <a:spLocks noGrp="1"/>
+          </p:cNvSpPr>
+          <p:nvPr>
+            <p:ph type="body" idx="3" sz="quarter"/>
+          </p:nvPr>
+        </p:nvSpPr>
+        <p:spPr/>
+        <p:txBody>
+          <a:bodyPr/>
+          <a:lstStyle/>
+          <a:p>
+            <a:r>
+              <a:t>备用页：被追问「会不会编造、数据安全吗」时翻到这页。</a:t>
+            </a:r>
+          </a:p>
+        </p:txBody>
+      </p:sp>
+      <p:sp>
+        <p:nvSpPr>
+          <p:cNvPr id="4" name="Slide Number Placeholder 3"/>
+          <p:cNvSpPr>
+            <a:spLocks noGrp="1"/>
+          </p:cNvSpPr>
+          <p:nvPr>
+            <p:ph type="sldNum" idx="5" sz="quarter"/>
+          </p:nvPr>
+        </p:nvSpPr>
+        <p:spPr/>
+      </p:sp>
+    </p:spTree>
+  </p:cSld>
+  <p:clrMapOvr>
+    <a:masterClrMapping/>
+  </p:clrMapOvr>
+</p:notes>
+</file>
+
+<file path=ppt/notesSlides/notesSlide12.xml><?xml version="1.0" encoding="utf-8"?>
+<p:notes xmlns:a="http://schemas.openxmlformats.org/drawingml/2006/main" xmlns:p="http://schemas.openxmlformats.org/presentationml/2006/main" xmlns:r="http://schemas.openxmlformats.org/officeDocument/2006/relationships">
+  <p:cSld>
+    <p:spTree>
+      <p:nvGrpSpPr>
+        <p:cNvPr id="1" name=""/>
+        <p:cNvGrpSpPr/>
+        <p:nvPr/>
+      </p:nvGrpSpPr>
+      <p:grpSpPr>
+        <a:xfrm>
+          <a:off x="0" y="0"/>
+          <a:ext cx="0" cy="0"/>
+          <a:chOff x="0" y="0"/>
+          <a:chExt cx="0" cy="0"/>
+        </a:xfrm>
+      </p:grpSpPr>
+      <p:sp>
+        <p:nvSpPr>
+          <p:cNvPr id="2" name="Slide Image Placeholder 1"/>
+          <p:cNvSpPr>
+            <a:spLocks noGrp="1"/>
+          </p:cNvSpPr>
+          <p:nvPr>
+            <p:ph type="sldImg" idx="2"/>
+          </p:nvPr>
+        </p:nvSpPr>
+        <p:spPr/>
+      </p:sp>
+      <p:sp>
+        <p:nvSpPr>
+          <p:cNvPr id="3" name="Notes Placeholder 2"/>
+          <p:cNvSpPr>
+            <a:spLocks noGrp="1"/>
+          </p:cNvSpPr>
+          <p:nvPr>
+            <p:ph type="body" idx="3" sz="quarter"/>
+          </p:nvPr>
+        </p:nvSpPr>
+        <p:spPr/>
+        <p:txBody>
+          <a:bodyPr/>
+          <a:lstStyle/>
+          <a:p>
+            <a:r>
+              <a:t>附录：若对方想看更多界面细节，翻到这页（政策问答依据、工单留痕、报修列表）。</a:t>
+            </a:r>
+          </a:p>
+        </p:txBody>
+      </p:sp>
+      <p:sp>
+        <p:nvSpPr>
+          <p:cNvPr id="4" name="Slide Number Placeholder 3"/>
+          <p:cNvSpPr>
+            <a:spLocks noGrp="1"/>
+          </p:cNvSpPr>
+          <p:nvPr>
+            <p:ph type="sldNum" idx="5" sz="quarter"/>
+          </p:nvPr>
+        </p:nvSpPr>
+        <p:spPr/>
+      </p:sp>
+    </p:spTree>
+  </p:cSld>
+  <p:clrMapOvr>
+    <a:masterClrMapping/>
+  </p:clrMapOvr>
+</p:notes>
+</file>
+
+<file path=ppt/notesSlides/notesSlide13.xml><?xml version="1.0" encoding="utf-8"?>
+<p:notes xmlns:a="http://schemas.openxmlformats.org/drawingml/2006/main" xmlns:p="http://schemas.openxmlformats.org/presentationml/2006/main" xmlns:r="http://schemas.openxmlformats.org/officeDocument/2006/relationships">
+  <p:cSld>
+    <p:spTree>
+      <p:nvGrpSpPr>
+        <p:cNvPr id="1" name=""/>
+        <p:cNvGrpSpPr/>
+        <p:nvPr/>
+      </p:nvGrpSpPr>
+      <p:grpSpPr>
+        <a:xfrm>
+          <a:off x="0" y="0"/>
+          <a:ext cx="0" cy="0"/>
+          <a:chOff x="0" y="0"/>
+          <a:chExt cx="0" cy="0"/>
+        </a:xfrm>
+      </p:grpSpPr>
+      <p:sp>
+        <p:nvSpPr>
+          <p:cNvPr id="2" name="Slide Image Placeholder 1"/>
+          <p:cNvSpPr>
+            <a:spLocks noGrp="1"/>
+          </p:cNvSpPr>
+          <p:nvPr>
+            <p:ph type="sldImg" idx="2"/>
+          </p:nvPr>
+        </p:nvSpPr>
+        <p:spPr/>
+      </p:sp>
+      <p:sp>
+        <p:nvSpPr>
+          <p:cNvPr id="3" name="Notes Placeholder 2"/>
+          <p:cNvSpPr>
+            <a:spLocks noGrp="1"/>
+          </p:cNvSpPr>
+          <p:nvPr>
+            <p:ph type="body" idx="3" sz="quarter"/>
+          </p:nvPr>
+        </p:nvSpPr>
+        <p:spPr/>
+        <p:txBody>
+          <a:bodyPr/>
+          <a:lstStyle/>
+          <a:p>
+            <a:r>
+              <a:t>附录：若对方想知道怎么在电脑上看实物，翻到这页。</a:t>
+            </a:r>
+          </a:p>
+        </p:txBody>
+      </p:sp>
+      <p:sp>
+        <p:nvSpPr>
+          <p:cNvPr id="4" name="Slide Number Placeholder 3"/>
+          <p:cNvSpPr>
+            <a:spLocks noGrp="1"/>
+          </p:cNvSpPr>
+          <p:nvPr>
+            <p:ph type="sldNum" idx="5" sz="quarter"/>
+          </p:nvPr>
+        </p:nvSpPr>
+        <p:spPr/>
+      </p:sp>
+    </p:spTree>
+  </p:cSld>
+  <p:clrMapOvr>
+    <a:masterClrMapping/>
+  </p:clrMapOvr>
+</p:notes>
+</file>
+
+<file path=ppt/notesSlides/notesSlide14.xml><?xml version="1.0" encoding="utf-8"?>
+<p:notes xmlns:a="http://schemas.openxmlformats.org/drawingml/2006/main" xmlns:p="http://schemas.openxmlformats.org/presentationml/2006/main" xmlns:r="http://schemas.openxmlformats.org/officeDocument/2006/relationships">
+  <p:cSld>
+    <p:spTree>
+      <p:nvGrpSpPr>
+        <p:cNvPr id="1" name=""/>
+        <p:cNvGrpSpPr/>
+        <p:nvPr/>
+      </p:nvGrpSpPr>
+      <p:grpSpPr>
+        <a:xfrm>
+          <a:off x="0" y="0"/>
+          <a:ext cx="0" cy="0"/>
+          <a:chOff x="0" y="0"/>
+          <a:chExt cx="0" cy="0"/>
+        </a:xfrm>
+      </p:grpSpPr>
+      <p:sp>
+        <p:nvSpPr>
+          <p:cNvPr id="2" name="Slide Image Placeholder 1"/>
+          <p:cNvSpPr>
+            <a:spLocks noGrp="1"/>
+          </p:cNvSpPr>
+          <p:nvPr>
+            <p:ph type="sldImg" idx="2"/>
+          </p:nvPr>
+        </p:nvSpPr>
+        <p:spPr/>
+      </p:sp>
+      <p:sp>
+        <p:nvSpPr>
+          <p:cNvPr id="3" name="Notes Placeholder 2"/>
+          <p:cNvSpPr>
+            <a:spLocks noGrp="1"/>
+          </p:cNvSpPr>
+          <p:nvPr>
+            <p:ph type="body" idx="3" sz="quarter"/>
+          </p:nvPr>
+        </p:nvSpPr>
+        <p:spPr/>
+        <p:txBody>
+          <a:bodyPr/>
+          <a:lstStyle/>
+          <a:p>
+            <a:r>
+              <a:t>附录：功能全景，方便独立阅读的人核对「到底能做什么」。</a:t>
+            </a:r>
+          </a:p>
+        </p:txBody>
+      </p:sp>
+      <p:sp>
+        <p:nvSpPr>
+          <p:cNvPr id="4" name="Slide Number Placeholder 3"/>
+          <p:cNvSpPr>
+            <a:spLocks noGrp="1"/>
+          </p:cNvSpPr>
+          <p:nvPr>
+            <p:ph type="sldNum" idx="5" sz="quarter"/>
+          </p:nvPr>
+        </p:nvSpPr>
+        <p:spPr/>
+      </p:sp>
+    </p:spTree>
+  </p:cSld>
+  <p:clrMapOvr>
+    <a:masterClrMapping/>
+  </p:clrMapOvr>
+</p:notes>
+</file>
+
+<file path=ppt/notesSlides/notesSlide15.xml><?xml version="1.0" encoding="utf-8"?>
+<p:notes xmlns:a="http://schemas.openxmlformats.org/drawingml/2006/main" xmlns:p="http://schemas.openxmlformats.org/presentationml/2006/main" xmlns:r="http://schemas.openxmlformats.org/officeDocument/2006/relationships">
+  <p:cSld>
+    <p:spTree>
+      <p:nvGrpSpPr>
+        <p:cNvPr id="1" name=""/>
+        <p:cNvGrpSpPr/>
+        <p:nvPr/>
+      </p:nvGrpSpPr>
+      <p:grpSpPr>
+        <a:xfrm>
+          <a:off x="0" y="0"/>
+          <a:ext cx="0" cy="0"/>
+          <a:chOff x="0" y="0"/>
+          <a:chExt cx="0" cy="0"/>
+        </a:xfrm>
+      </p:grpSpPr>
+      <p:sp>
+        <p:nvSpPr>
+          <p:cNvPr id="2" name="Slide Image Placeholder 1"/>
+          <p:cNvSpPr>
+            <a:spLocks noGrp="1"/>
+          </p:cNvSpPr>
+          <p:nvPr>
+            <p:ph type="sldImg" idx="2"/>
+          </p:nvPr>
+        </p:nvSpPr>
+        <p:spPr/>
+      </p:sp>
+      <p:sp>
+        <p:nvSpPr>
+          <p:cNvPr id="3" name="Notes Placeholder 2"/>
+          <p:cNvSpPr>
+            <a:spLocks noGrp="1"/>
+          </p:cNvSpPr>
+          <p:nvPr>
+            <p:ph type="body" idx="3" sz="quarter"/>
+          </p:nvPr>
+        </p:nvSpPr>
+        <p:spPr/>
+        <p:txBody>
+          <a:bodyPr/>
+          <a:lstStyle/>
+          <a:p>
+            <a:r>
+              <a:t>附录：架构与数据流，用一张图讲清三端、主服务、9 个角色、本地数据库的关系。</a:t>
+            </a:r>
+          </a:p>
+        </p:txBody>
+      </p:sp>
+      <p:sp>
+        <p:nvSpPr>
+          <p:cNvPr id="4" name="Slide Number Placeholder 3"/>
+          <p:cNvSpPr>
+            <a:spLocks noGrp="1"/>
+          </p:cNvSpPr>
+          <p:nvPr>
+            <p:ph type="sldNum" idx="5" sz="quarter"/>
+          </p:nvPr>
+        </p:nvSpPr>
+        <p:spPr/>
+      </p:sp>
+    </p:spTree>
+  </p:cSld>
+  <p:clrMapOvr>
+    <a:masterClrMapping/>
+  </p:clrMapOvr>
+</p:notes>
+</file>
+
 <file path=ppt/notesSlides/notesSlide2.xml><?xml version="1.0" encoding="utf-8"?>
 <p:notes xmlns:a="http://schemas.openxmlformats.org/drawingml/2006/main" xmlns:p="http://schemas.openxmlformats.org/presentationml/2006/main" xmlns:r="http://schemas.openxmlformats.org/officeDocument/2006/relationships">
   <p:cSld>
@@ -933,7 +1356,7 @@
           <a:lstStyle/>
           <a:p>
             <a:r>
-              <a:t>现场演示五步（本场不需要实操，全靠 PPT 内截图）：① 居民一句话报修 → ② 政策问答带依据与属地 → ③ 天气联动点开执行链 → ④ 老人端长按求助出确认框 → ⑤ 网格员工作台看待办。讲的时候按图说：这一步居民做了什么、系统回了什么。</a:t>
+              <a:t>五步走查（本场不需要实操，全靠 PPT 里的截图）：① 居民一句话报修 → ② 政策问答带依据与属地 → ③ 天气联动点开执行链 → ④ 老人端长按求助出确认框 → ⑤ 网格员工作台看待办。讲的时候按图说：这一步居民做了什么、系统回了什么。</a:t>
             </a:r>
           </a:p>
         </p:txBody>
@@ -4131,7 +4554,7 @@
         </p:nvSpPr>
         <p:spPr>
           <a:xfrm>
-            <a:off x="1005840" y="1737360"/>
+            <a:off x="1005840" y="1417320"/>
             <a:ext cx="6035040" cy="868680"/>
           </a:xfrm>
           <a:prstGeom prst="rect">
@@ -4172,7 +4595,7 @@
         </p:nvSpPr>
         <p:spPr>
           <a:xfrm>
-            <a:off x="1005840" y="2697480"/>
+            <a:off x="1005840" y="2377440"/>
             <a:ext cx="6035040" cy="685800"/>
           </a:xfrm>
           <a:prstGeom prst="rect">
@@ -4213,7 +4636,7 @@
         </p:nvSpPr>
         <p:spPr>
           <a:xfrm>
-            <a:off x="1005840" y="3611880"/>
+            <a:off x="1005840" y="3291840"/>
             <a:ext cx="6035040" cy="640080"/>
           </a:xfrm>
           <a:prstGeom prst="rect">
@@ -4254,7 +4677,7 @@
         </p:nvSpPr>
         <p:spPr>
           <a:xfrm>
-            <a:off x="1005840" y="4389120"/>
+            <a:off x="1005840" y="4023360"/>
             <a:ext cx="6035040" cy="640080"/>
           </a:xfrm>
           <a:prstGeom prst="rect">
@@ -4287,9 +4710,91 @@
           </a:p>
         </p:txBody>
       </p:sp>
+      <p:sp>
+        <p:nvSpPr>
+          <p:cNvPr id="7" name="TextBox 6"/>
+          <p:cNvSpPr txBox="1"/>
+          <p:nvPr/>
+        </p:nvSpPr>
+        <p:spPr>
+          <a:xfrm>
+            <a:off x="1005840" y="4709160"/>
+            <a:ext cx="6035040" cy="548640"/>
+          </a:xfrm>
+          <a:prstGeom prst="rect">
+            <a:avLst/>
+          </a:prstGeom>
+          <a:noFill/>
+        </p:spPr>
+        <p:txBody>
+          <a:bodyPr wrap="square">
+            <a:spAutoFit/>
+          </a:bodyPr>
+          <a:lstStyle/>
+          <a:p>
+            <a:pPr algn="l">
+              <a:lnSpc>
+                <a:spcPct val="125000"/>
+              </a:lnSpc>
+            </a:pPr>
+            <a:r>
+              <a:rPr sz="1600" b="0">
+                <a:solidFill>
+                  <a:srgbClr val="9FB4D8"/>
+                </a:solidFill>
+                <a:latin typeface="微软雅黑"/>
+                <a:ea typeface="微软雅黑"/>
+                <a:cs typeface="微软雅黑"/>
+              </a:rPr>
+              <a:t>9·22 中关村软件园 OPC 沙龙</a:t>
+            </a:r>
+          </a:p>
+        </p:txBody>
+      </p:sp>
+      <p:sp>
+        <p:nvSpPr>
+          <p:cNvPr id="8" name="TextBox 7"/>
+          <p:cNvSpPr txBox="1"/>
+          <p:nvPr/>
+        </p:nvSpPr>
+        <p:spPr>
+          <a:xfrm>
+            <a:off x="1005840" y="5486400"/>
+            <a:ext cx="10424160" cy="457200"/>
+          </a:xfrm>
+          <a:prstGeom prst="rect">
+            <a:avLst/>
+          </a:prstGeom>
+          <a:noFill/>
+        </p:spPr>
+        <p:txBody>
+          <a:bodyPr wrap="square">
+            <a:spAutoFit/>
+          </a:bodyPr>
+          <a:lstStyle/>
+          <a:p>
+            <a:pPr algn="l">
+              <a:lnSpc>
+                <a:spcPct val="125000"/>
+              </a:lnSpc>
+            </a:pPr>
+            <a:r>
+              <a:rPr sz="1800" b="0">
+                <a:solidFill>
+                  <a:srgbClr val="FF8C42"/>
+                </a:solidFill>
+                <a:latin typeface="微软雅黑"/>
+                <a:ea typeface="微软雅黑"/>
+                <a:cs typeface="微软雅黑"/>
+              </a:rPr>
+              <a:t>痛点  →  方案  →  五步流程  →  数字与诉求</a:t>
+            </a:r>
+          </a:p>
+        </p:txBody>
+      </p:sp>
       <p:pic>
         <p:nvPicPr>
-          <p:cNvPr id="7" name="Picture 6" descr="01-登录页.png"/>
+          <p:cNvPr id="9" name="Picture 8" descr="01-登录页.png"/>
           <p:cNvPicPr>
             <a:picLocks noChangeAspect="1"/>
           </p:cNvPicPr>
@@ -4303,7 +4808,7 @@
         </p:blipFill>
         <p:spPr>
           <a:xfrm>
-            <a:off x="7315200" y="1463040"/>
+            <a:off x="7315200" y="1371600"/>
             <a:ext cx="4206240" cy="2628900"/>
           </a:xfrm>
           <a:prstGeom prst="rect">
@@ -5116,6 +5621,3372 @@
 </p:sld>
 </file>
 
+<file path=ppt/slides/slide13.xml><?xml version="1.0" encoding="utf-8"?>
+<p:sld xmlns:a="http://schemas.openxmlformats.org/drawingml/2006/main" xmlns:p="http://schemas.openxmlformats.org/presentationml/2006/main" xmlns:r="http://schemas.openxmlformats.org/officeDocument/2006/relationships">
+  <p:cSld>
+    <p:spTree>
+      <p:nvGrpSpPr>
+        <p:cNvPr id="1" name=""/>
+        <p:cNvGrpSpPr/>
+        <p:nvPr/>
+      </p:nvGrpSpPr>
+      <p:grpSpPr/>
+      <p:sp>
+        <p:nvSpPr>
+          <p:cNvPr id="2" name="Rounded Rectangle 1"/>
+          <p:cNvSpPr/>
+          <p:nvPr/>
+        </p:nvSpPr>
+        <p:spPr>
+          <a:xfrm>
+            <a:off x="548640" y="502920"/>
+            <a:ext cx="128016" cy="566928"/>
+          </a:xfrm>
+          <a:prstGeom prst="roundRect">
+            <a:avLst/>
+          </a:prstGeom>
+          <a:solidFill>
+            <a:srgbClr val="FF8C42"/>
+          </a:solidFill>
+          <a:ln>
+            <a:noFill/>
+          </a:ln>
+          <a:effectLst/>
+        </p:spPr>
+        <p:style>
+          <a:lnRef idx="1">
+            <a:schemeClr val="accent1"/>
+          </a:lnRef>
+          <a:fillRef idx="3">
+            <a:schemeClr val="accent1"/>
+          </a:fillRef>
+          <a:effectRef idx="2">
+            <a:schemeClr val="accent1"/>
+          </a:effectRef>
+          <a:fontRef idx="minor">
+            <a:schemeClr val="lt1"/>
+          </a:fontRef>
+        </p:style>
+        <p:txBody>
+          <a:bodyPr rtlCol="0" anchor="ctr"/>
+          <a:lstStyle/>
+          <a:p>
+            <a:pPr algn="ctr"/>
+          </a:p>
+        </p:txBody>
+      </p:sp>
+      <p:sp>
+        <p:nvSpPr>
+          <p:cNvPr id="3" name="TextBox 2"/>
+          <p:cNvSpPr txBox="1"/>
+          <p:nvPr/>
+        </p:nvSpPr>
+        <p:spPr>
+          <a:xfrm>
+            <a:off x="868680" y="457200"/>
+            <a:ext cx="10789920" cy="822960"/>
+          </a:xfrm>
+          <a:prstGeom prst="rect">
+            <a:avLst/>
+          </a:prstGeom>
+          <a:noFill/>
+        </p:spPr>
+        <p:txBody>
+          <a:bodyPr wrap="square">
+            <a:spAutoFit/>
+          </a:bodyPr>
+          <a:lstStyle/>
+          <a:p>
+            <a:pPr algn="l">
+              <a:lnSpc>
+                <a:spcPct val="125000"/>
+              </a:lnSpc>
+            </a:pPr>
+            <a:r>
+              <a:rPr sz="4000" b="1">
+                <a:solidFill>
+                  <a:srgbClr val="122A51"/>
+                </a:solidFill>
+                <a:latin typeface="微软雅黑"/>
+                <a:ea typeface="微软雅黑"/>
+                <a:cs typeface="微软雅黑"/>
+              </a:rPr>
+              <a:t>附录 · 现在能用的功能</a:t>
+            </a:r>
+          </a:p>
+        </p:txBody>
+      </p:sp>
+      <p:sp>
+        <p:nvSpPr>
+          <p:cNvPr id="4" name="Rounded Rectangle 3"/>
+          <p:cNvSpPr/>
+          <p:nvPr/>
+        </p:nvSpPr>
+        <p:spPr>
+          <a:xfrm>
+            <a:off x="868680" y="1737360"/>
+            <a:ext cx="5120640" cy="960120"/>
+          </a:xfrm>
+          <a:prstGeom prst="roundRect">
+            <a:avLst/>
+          </a:prstGeom>
+          <a:solidFill>
+            <a:srgbClr val="F2F5FB"/>
+          </a:solidFill>
+          <a:ln>
+            <a:noFill/>
+          </a:ln>
+          <a:effectLst/>
+        </p:spPr>
+        <p:style>
+          <a:lnRef idx="1">
+            <a:schemeClr val="accent1"/>
+          </a:lnRef>
+          <a:fillRef idx="3">
+            <a:schemeClr val="accent1"/>
+          </a:fillRef>
+          <a:effectRef idx="2">
+            <a:schemeClr val="accent1"/>
+          </a:effectRef>
+          <a:fontRef idx="minor">
+            <a:schemeClr val="lt1"/>
+          </a:fontRef>
+        </p:style>
+        <p:txBody>
+          <a:bodyPr rtlCol="0" anchor="ctr"/>
+          <a:lstStyle/>
+          <a:p>
+            <a:pPr algn="ctr"/>
+          </a:p>
+        </p:txBody>
+      </p:sp>
+      <p:sp>
+        <p:nvSpPr>
+          <p:cNvPr id="5" name="TextBox 4"/>
+          <p:cNvSpPr txBox="1"/>
+          <p:nvPr/>
+        </p:nvSpPr>
+        <p:spPr>
+          <a:xfrm>
+            <a:off x="1097280" y="1847088"/>
+            <a:ext cx="1463040" cy="731520"/>
+          </a:xfrm>
+          <a:prstGeom prst="rect">
+            <a:avLst/>
+          </a:prstGeom>
+          <a:noFill/>
+        </p:spPr>
+        <p:txBody>
+          <a:bodyPr wrap="square">
+            <a:spAutoFit/>
+          </a:bodyPr>
+          <a:lstStyle/>
+          <a:p>
+            <a:pPr algn="l">
+              <a:lnSpc>
+                <a:spcPct val="125000"/>
+              </a:lnSpc>
+            </a:pPr>
+            <a:r>
+              <a:rPr sz="2000" b="1">
+                <a:solidFill>
+                  <a:srgbClr val="122A51"/>
+                </a:solidFill>
+                <a:latin typeface="微软雅黑"/>
+                <a:ea typeface="微软雅黑"/>
+                <a:cs typeface="微软雅黑"/>
+              </a:rPr>
+              <a:t>报修</a:t>
+            </a:r>
+          </a:p>
+        </p:txBody>
+      </p:sp>
+      <p:sp>
+        <p:nvSpPr>
+          <p:cNvPr id="6" name="TextBox 5"/>
+          <p:cNvSpPr txBox="1"/>
+          <p:nvPr/>
+        </p:nvSpPr>
+        <p:spPr>
+          <a:xfrm>
+            <a:off x="2606039" y="1901952"/>
+            <a:ext cx="3200400" cy="731520"/>
+          </a:xfrm>
+          <a:prstGeom prst="rect">
+            <a:avLst/>
+          </a:prstGeom>
+          <a:noFill/>
+        </p:spPr>
+        <p:txBody>
+          <a:bodyPr wrap="square">
+            <a:spAutoFit/>
+          </a:bodyPr>
+          <a:lstStyle/>
+          <a:p>
+            <a:pPr algn="l">
+              <a:lnSpc>
+                <a:spcPct val="125000"/>
+              </a:lnSpc>
+            </a:pPr>
+            <a:r>
+              <a:rPr sz="1500" b="0">
+                <a:solidFill>
+                  <a:srgbClr val="1B2233"/>
+                </a:solidFill>
+                <a:latin typeface="微软雅黑"/>
+                <a:ea typeface="微软雅黑"/>
+                <a:cs typeface="微软雅黑"/>
+              </a:rPr>
+              <a:t>全状态机：提交 → 审核 → 派单 → 处理 → 办结 → 回访</a:t>
+            </a:r>
+          </a:p>
+        </p:txBody>
+      </p:sp>
+      <p:sp>
+        <p:nvSpPr>
+          <p:cNvPr id="7" name="Rounded Rectangle 6"/>
+          <p:cNvSpPr/>
+          <p:nvPr/>
+        </p:nvSpPr>
+        <p:spPr>
+          <a:xfrm>
+            <a:off x="6355080" y="1737360"/>
+            <a:ext cx="5120640" cy="960120"/>
+          </a:xfrm>
+          <a:prstGeom prst="roundRect">
+            <a:avLst/>
+          </a:prstGeom>
+          <a:solidFill>
+            <a:srgbClr val="F2F5FB"/>
+          </a:solidFill>
+          <a:ln>
+            <a:noFill/>
+          </a:ln>
+          <a:effectLst/>
+        </p:spPr>
+        <p:style>
+          <a:lnRef idx="1">
+            <a:schemeClr val="accent1"/>
+          </a:lnRef>
+          <a:fillRef idx="3">
+            <a:schemeClr val="accent1"/>
+          </a:fillRef>
+          <a:effectRef idx="2">
+            <a:schemeClr val="accent1"/>
+          </a:effectRef>
+          <a:fontRef idx="minor">
+            <a:schemeClr val="lt1"/>
+          </a:fontRef>
+        </p:style>
+        <p:txBody>
+          <a:bodyPr rtlCol="0" anchor="ctr"/>
+          <a:lstStyle/>
+          <a:p>
+            <a:pPr algn="ctr"/>
+          </a:p>
+        </p:txBody>
+      </p:sp>
+      <p:sp>
+        <p:nvSpPr>
+          <p:cNvPr id="8" name="TextBox 7"/>
+          <p:cNvSpPr txBox="1"/>
+          <p:nvPr/>
+        </p:nvSpPr>
+        <p:spPr>
+          <a:xfrm>
+            <a:off x="6583680" y="1847088"/>
+            <a:ext cx="1463040" cy="731520"/>
+          </a:xfrm>
+          <a:prstGeom prst="rect">
+            <a:avLst/>
+          </a:prstGeom>
+          <a:noFill/>
+        </p:spPr>
+        <p:txBody>
+          <a:bodyPr wrap="square">
+            <a:spAutoFit/>
+          </a:bodyPr>
+          <a:lstStyle/>
+          <a:p>
+            <a:pPr algn="l">
+              <a:lnSpc>
+                <a:spcPct val="125000"/>
+              </a:lnSpc>
+            </a:pPr>
+            <a:r>
+              <a:rPr sz="2000" b="1">
+                <a:solidFill>
+                  <a:srgbClr val="122A51"/>
+                </a:solidFill>
+                <a:latin typeface="微软雅黑"/>
+                <a:ea typeface="微软雅黑"/>
+                <a:cs typeface="微软雅黑"/>
+              </a:rPr>
+              <a:t>提案</a:t>
+            </a:r>
+          </a:p>
+        </p:txBody>
+      </p:sp>
+      <p:sp>
+        <p:nvSpPr>
+          <p:cNvPr id="9" name="TextBox 8"/>
+          <p:cNvSpPr txBox="1"/>
+          <p:nvPr/>
+        </p:nvSpPr>
+        <p:spPr>
+          <a:xfrm>
+            <a:off x="8092440" y="1901952"/>
+            <a:ext cx="3200400" cy="731520"/>
+          </a:xfrm>
+          <a:prstGeom prst="rect">
+            <a:avLst/>
+          </a:prstGeom>
+          <a:noFill/>
+        </p:spPr>
+        <p:txBody>
+          <a:bodyPr wrap="square">
+            <a:spAutoFit/>
+          </a:bodyPr>
+          <a:lstStyle/>
+          <a:p>
+            <a:pPr algn="l">
+              <a:lnSpc>
+                <a:spcPct val="125000"/>
+              </a:lnSpc>
+            </a:pPr>
+            <a:r>
+              <a:rPr sz="1500" b="0">
+                <a:solidFill>
+                  <a:srgbClr val="1B2233"/>
+                </a:solidFill>
+                <a:latin typeface="微软雅黑"/>
+                <a:ea typeface="微软雅黑"/>
+                <a:cs typeface="微软雅黑"/>
+              </a:rPr>
+              <a:t>全生命周期：提交 → 附议 → 回应 → 采纳 → 实施</a:t>
+            </a:r>
+          </a:p>
+        </p:txBody>
+      </p:sp>
+      <p:sp>
+        <p:nvSpPr>
+          <p:cNvPr id="10" name="Rounded Rectangle 9"/>
+          <p:cNvSpPr/>
+          <p:nvPr/>
+        </p:nvSpPr>
+        <p:spPr>
+          <a:xfrm>
+            <a:off x="868680" y="2880360"/>
+            <a:ext cx="5120640" cy="960120"/>
+          </a:xfrm>
+          <a:prstGeom prst="roundRect">
+            <a:avLst/>
+          </a:prstGeom>
+          <a:solidFill>
+            <a:srgbClr val="F2F5FB"/>
+          </a:solidFill>
+          <a:ln>
+            <a:noFill/>
+          </a:ln>
+          <a:effectLst/>
+        </p:spPr>
+        <p:style>
+          <a:lnRef idx="1">
+            <a:schemeClr val="accent1"/>
+          </a:lnRef>
+          <a:fillRef idx="3">
+            <a:schemeClr val="accent1"/>
+          </a:fillRef>
+          <a:effectRef idx="2">
+            <a:schemeClr val="accent1"/>
+          </a:effectRef>
+          <a:fontRef idx="minor">
+            <a:schemeClr val="lt1"/>
+          </a:fontRef>
+        </p:style>
+        <p:txBody>
+          <a:bodyPr rtlCol="0" anchor="ctr"/>
+          <a:lstStyle/>
+          <a:p>
+            <a:pPr algn="ctr"/>
+          </a:p>
+        </p:txBody>
+      </p:sp>
+      <p:sp>
+        <p:nvSpPr>
+          <p:cNvPr id="11" name="TextBox 10"/>
+          <p:cNvSpPr txBox="1"/>
+          <p:nvPr/>
+        </p:nvSpPr>
+        <p:spPr>
+          <a:xfrm>
+            <a:off x="1097280" y="2990088"/>
+            <a:ext cx="1463040" cy="731520"/>
+          </a:xfrm>
+          <a:prstGeom prst="rect">
+            <a:avLst/>
+          </a:prstGeom>
+          <a:noFill/>
+        </p:spPr>
+        <p:txBody>
+          <a:bodyPr wrap="square">
+            <a:spAutoFit/>
+          </a:bodyPr>
+          <a:lstStyle/>
+          <a:p>
+            <a:pPr algn="l">
+              <a:lnSpc>
+                <a:spcPct val="125000"/>
+              </a:lnSpc>
+            </a:pPr>
+            <a:r>
+              <a:rPr sz="2000" b="1">
+                <a:solidFill>
+                  <a:srgbClr val="122A51"/>
+                </a:solidFill>
+                <a:latin typeface="微软雅黑"/>
+                <a:ea typeface="微软雅黑"/>
+                <a:cs typeface="微软雅黑"/>
+              </a:rPr>
+              <a:t>通知</a:t>
+            </a:r>
+          </a:p>
+        </p:txBody>
+      </p:sp>
+      <p:sp>
+        <p:nvSpPr>
+          <p:cNvPr id="12" name="TextBox 11"/>
+          <p:cNvSpPr txBox="1"/>
+          <p:nvPr/>
+        </p:nvSpPr>
+        <p:spPr>
+          <a:xfrm>
+            <a:off x="2606039" y="3044952"/>
+            <a:ext cx="3200400" cy="731520"/>
+          </a:xfrm>
+          <a:prstGeom prst="rect">
+            <a:avLst/>
+          </a:prstGeom>
+          <a:noFill/>
+        </p:spPr>
+        <p:txBody>
+          <a:bodyPr wrap="square">
+            <a:spAutoFit/>
+          </a:bodyPr>
+          <a:lstStyle/>
+          <a:p>
+            <a:pPr algn="l">
+              <a:lnSpc>
+                <a:spcPct val="125000"/>
+              </a:lnSpc>
+            </a:pPr>
+            <a:r>
+              <a:rPr sz="1500" b="0">
+                <a:solidFill>
+                  <a:srgbClr val="1B2233"/>
+                </a:solidFill>
+                <a:latin typeface="微软雅黑"/>
+                <a:ea typeface="微软雅黑"/>
+                <a:cs typeface="微软雅黑"/>
+              </a:rPr>
+              <a:t>普通 / 紧急 / 定时 / 已读回执</a:t>
+            </a:r>
+          </a:p>
+        </p:txBody>
+      </p:sp>
+      <p:sp>
+        <p:nvSpPr>
+          <p:cNvPr id="13" name="Rounded Rectangle 12"/>
+          <p:cNvSpPr/>
+          <p:nvPr/>
+        </p:nvSpPr>
+        <p:spPr>
+          <a:xfrm>
+            <a:off x="6355080" y="2880360"/>
+            <a:ext cx="5120640" cy="960120"/>
+          </a:xfrm>
+          <a:prstGeom prst="roundRect">
+            <a:avLst/>
+          </a:prstGeom>
+          <a:solidFill>
+            <a:srgbClr val="F2F5FB"/>
+          </a:solidFill>
+          <a:ln>
+            <a:noFill/>
+          </a:ln>
+          <a:effectLst/>
+        </p:spPr>
+        <p:style>
+          <a:lnRef idx="1">
+            <a:schemeClr val="accent1"/>
+          </a:lnRef>
+          <a:fillRef idx="3">
+            <a:schemeClr val="accent1"/>
+          </a:fillRef>
+          <a:effectRef idx="2">
+            <a:schemeClr val="accent1"/>
+          </a:effectRef>
+          <a:fontRef idx="minor">
+            <a:schemeClr val="lt1"/>
+          </a:fontRef>
+        </p:style>
+        <p:txBody>
+          <a:bodyPr rtlCol="0" anchor="ctr"/>
+          <a:lstStyle/>
+          <a:p>
+            <a:pPr algn="ctr"/>
+          </a:p>
+        </p:txBody>
+      </p:sp>
+      <p:sp>
+        <p:nvSpPr>
+          <p:cNvPr id="14" name="TextBox 13"/>
+          <p:cNvSpPr txBox="1"/>
+          <p:nvPr/>
+        </p:nvSpPr>
+        <p:spPr>
+          <a:xfrm>
+            <a:off x="6583680" y="2990088"/>
+            <a:ext cx="1463040" cy="731520"/>
+          </a:xfrm>
+          <a:prstGeom prst="rect">
+            <a:avLst/>
+          </a:prstGeom>
+          <a:noFill/>
+        </p:spPr>
+        <p:txBody>
+          <a:bodyPr wrap="square">
+            <a:spAutoFit/>
+          </a:bodyPr>
+          <a:lstStyle/>
+          <a:p>
+            <a:pPr algn="l">
+              <a:lnSpc>
+                <a:spcPct val="125000"/>
+              </a:lnSpc>
+            </a:pPr>
+            <a:r>
+              <a:rPr sz="2000" b="1">
+                <a:solidFill>
+                  <a:srgbClr val="122A51"/>
+                </a:solidFill>
+                <a:latin typeface="微软雅黑"/>
+                <a:ea typeface="微软雅黑"/>
+                <a:cs typeface="微软雅黑"/>
+              </a:rPr>
+              <a:t>政策问答</a:t>
+            </a:r>
+          </a:p>
+        </p:txBody>
+      </p:sp>
+      <p:sp>
+        <p:nvSpPr>
+          <p:cNvPr id="15" name="TextBox 14"/>
+          <p:cNvSpPr txBox="1"/>
+          <p:nvPr/>
+        </p:nvSpPr>
+        <p:spPr>
+          <a:xfrm>
+            <a:off x="8092440" y="3044952"/>
+            <a:ext cx="3200400" cy="731520"/>
+          </a:xfrm>
+          <a:prstGeom prst="rect">
+            <a:avLst/>
+          </a:prstGeom>
+          <a:noFill/>
+        </p:spPr>
+        <p:txBody>
+          <a:bodyPr wrap="square">
+            <a:spAutoFit/>
+          </a:bodyPr>
+          <a:lstStyle/>
+          <a:p>
+            <a:pPr algn="l">
+              <a:lnSpc>
+                <a:spcPct val="125000"/>
+              </a:lnSpc>
+            </a:pPr>
+            <a:r>
+              <a:rPr sz="1500" b="0">
+                <a:solidFill>
+                  <a:srgbClr val="1B2233"/>
+                </a:solidFill>
+                <a:latin typeface="微软雅黑"/>
+                <a:ea typeface="微软雅黑"/>
+                <a:cs typeface="微软雅黑"/>
+              </a:rPr>
+              <a:t>答案带出处；检索无结果就转人工</a:t>
+            </a:r>
+          </a:p>
+        </p:txBody>
+      </p:sp>
+      <p:sp>
+        <p:nvSpPr>
+          <p:cNvPr id="16" name="Rounded Rectangle 15"/>
+          <p:cNvSpPr/>
+          <p:nvPr/>
+        </p:nvSpPr>
+        <p:spPr>
+          <a:xfrm>
+            <a:off x="868680" y="4023360"/>
+            <a:ext cx="5120640" cy="960120"/>
+          </a:xfrm>
+          <a:prstGeom prst="roundRect">
+            <a:avLst/>
+          </a:prstGeom>
+          <a:solidFill>
+            <a:srgbClr val="F2F5FB"/>
+          </a:solidFill>
+          <a:ln>
+            <a:noFill/>
+          </a:ln>
+          <a:effectLst/>
+        </p:spPr>
+        <p:style>
+          <a:lnRef idx="1">
+            <a:schemeClr val="accent1"/>
+          </a:lnRef>
+          <a:fillRef idx="3">
+            <a:schemeClr val="accent1"/>
+          </a:fillRef>
+          <a:effectRef idx="2">
+            <a:schemeClr val="accent1"/>
+          </a:effectRef>
+          <a:fontRef idx="minor">
+            <a:schemeClr val="lt1"/>
+          </a:fontRef>
+        </p:style>
+        <p:txBody>
+          <a:bodyPr rtlCol="0" anchor="ctr"/>
+          <a:lstStyle/>
+          <a:p>
+            <a:pPr algn="ctr"/>
+          </a:p>
+        </p:txBody>
+      </p:sp>
+      <p:sp>
+        <p:nvSpPr>
+          <p:cNvPr id="17" name="TextBox 16"/>
+          <p:cNvSpPr txBox="1"/>
+          <p:nvPr/>
+        </p:nvSpPr>
+        <p:spPr>
+          <a:xfrm>
+            <a:off x="1097280" y="4133088"/>
+            <a:ext cx="1463040" cy="731520"/>
+          </a:xfrm>
+          <a:prstGeom prst="rect">
+            <a:avLst/>
+          </a:prstGeom>
+          <a:noFill/>
+        </p:spPr>
+        <p:txBody>
+          <a:bodyPr wrap="square">
+            <a:spAutoFit/>
+          </a:bodyPr>
+          <a:lstStyle/>
+          <a:p>
+            <a:pPr algn="l">
+              <a:lnSpc>
+                <a:spcPct val="125000"/>
+              </a:lnSpc>
+            </a:pPr>
+            <a:r>
+              <a:rPr sz="2000" b="1">
+                <a:solidFill>
+                  <a:srgbClr val="122A51"/>
+                </a:solidFill>
+                <a:latin typeface="微软雅黑"/>
+                <a:ea typeface="微软雅黑"/>
+                <a:cs typeface="微软雅黑"/>
+              </a:rPr>
+              <a:t>健康咨询</a:t>
+            </a:r>
+          </a:p>
+        </p:txBody>
+      </p:sp>
+      <p:sp>
+        <p:nvSpPr>
+          <p:cNvPr id="18" name="TextBox 17"/>
+          <p:cNvSpPr txBox="1"/>
+          <p:nvPr/>
+        </p:nvSpPr>
+        <p:spPr>
+          <a:xfrm>
+            <a:off x="2606039" y="4187952"/>
+            <a:ext cx="3200400" cy="731520"/>
+          </a:xfrm>
+          <a:prstGeom prst="rect">
+            <a:avLst/>
+          </a:prstGeom>
+          <a:noFill/>
+        </p:spPr>
+        <p:txBody>
+          <a:bodyPr wrap="square">
+            <a:spAutoFit/>
+          </a:bodyPr>
+          <a:lstStyle/>
+          <a:p>
+            <a:pPr algn="l">
+              <a:lnSpc>
+                <a:spcPct val="125000"/>
+              </a:lnSpc>
+            </a:pPr>
+            <a:r>
+              <a:rPr sz="1500" b="0">
+                <a:solidFill>
+                  <a:srgbClr val="1B2233"/>
+                </a:solidFill>
+                <a:latin typeface="微软雅黑"/>
+                <a:ea typeface="微软雅黑"/>
+                <a:cs typeface="微软雅黑"/>
+              </a:rPr>
+              <a:t>只给建议，紧急情况转人工（不做诊断）</a:t>
+            </a:r>
+          </a:p>
+        </p:txBody>
+      </p:sp>
+      <p:sp>
+        <p:nvSpPr>
+          <p:cNvPr id="19" name="Rounded Rectangle 18"/>
+          <p:cNvSpPr/>
+          <p:nvPr/>
+        </p:nvSpPr>
+        <p:spPr>
+          <a:xfrm>
+            <a:off x="6355080" y="4023360"/>
+            <a:ext cx="5120640" cy="960120"/>
+          </a:xfrm>
+          <a:prstGeom prst="roundRect">
+            <a:avLst/>
+          </a:prstGeom>
+          <a:solidFill>
+            <a:srgbClr val="F2F5FB"/>
+          </a:solidFill>
+          <a:ln>
+            <a:noFill/>
+          </a:ln>
+          <a:effectLst/>
+        </p:spPr>
+        <p:style>
+          <a:lnRef idx="1">
+            <a:schemeClr val="accent1"/>
+          </a:lnRef>
+          <a:fillRef idx="3">
+            <a:schemeClr val="accent1"/>
+          </a:fillRef>
+          <a:effectRef idx="2">
+            <a:schemeClr val="accent1"/>
+          </a:effectRef>
+          <a:fontRef idx="minor">
+            <a:schemeClr val="lt1"/>
+          </a:fontRef>
+        </p:style>
+        <p:txBody>
+          <a:bodyPr rtlCol="0" anchor="ctr"/>
+          <a:lstStyle/>
+          <a:p>
+            <a:pPr algn="ctr"/>
+          </a:p>
+        </p:txBody>
+      </p:sp>
+      <p:sp>
+        <p:nvSpPr>
+          <p:cNvPr id="20" name="TextBox 19"/>
+          <p:cNvSpPr txBox="1"/>
+          <p:nvPr/>
+        </p:nvSpPr>
+        <p:spPr>
+          <a:xfrm>
+            <a:off x="6583680" y="4133088"/>
+            <a:ext cx="1463040" cy="731520"/>
+          </a:xfrm>
+          <a:prstGeom prst="rect">
+            <a:avLst/>
+          </a:prstGeom>
+          <a:noFill/>
+        </p:spPr>
+        <p:txBody>
+          <a:bodyPr wrap="square">
+            <a:spAutoFit/>
+          </a:bodyPr>
+          <a:lstStyle/>
+          <a:p>
+            <a:pPr algn="l">
+              <a:lnSpc>
+                <a:spcPct val="125000"/>
+              </a:lnSpc>
+            </a:pPr>
+            <a:r>
+              <a:rPr sz="2000" b="1">
+                <a:solidFill>
+                  <a:srgbClr val="122A51"/>
+                </a:solidFill>
+                <a:latin typeface="微软雅黑"/>
+                <a:ea typeface="微软雅黑"/>
+                <a:cs typeface="微软雅黑"/>
+              </a:rPr>
+              <a:t>天气联动</a:t>
+            </a:r>
+          </a:p>
+        </p:txBody>
+      </p:sp>
+      <p:sp>
+        <p:nvSpPr>
+          <p:cNvPr id="21" name="TextBox 20"/>
+          <p:cNvSpPr txBox="1"/>
+          <p:nvPr/>
+        </p:nvSpPr>
+        <p:spPr>
+          <a:xfrm>
+            <a:off x="8092440" y="4187952"/>
+            <a:ext cx="3200400" cy="731520"/>
+          </a:xfrm>
+          <a:prstGeom prst="rect">
+            <a:avLst/>
+          </a:prstGeom>
+          <a:noFill/>
+        </p:spPr>
+        <p:txBody>
+          <a:bodyPr wrap="square">
+            <a:spAutoFit/>
+          </a:bodyPr>
+          <a:lstStyle/>
+          <a:p>
+            <a:pPr algn="l">
+              <a:lnSpc>
+                <a:spcPct val="125000"/>
+              </a:lnSpc>
+            </a:pPr>
+            <a:r>
+              <a:rPr sz="1500" b="0">
+                <a:solidFill>
+                  <a:srgbClr val="1B2233"/>
+                </a:solidFill>
+                <a:latin typeface="微软雅黑"/>
+                <a:ea typeface="微软雅黑"/>
+                <a:cs typeface="微软雅黑"/>
+              </a:rPr>
+              <a:t>极端天气 → 健康防护建议 → 自动发通知</a:t>
+            </a:r>
+          </a:p>
+        </p:txBody>
+      </p:sp>
+      <p:sp>
+        <p:nvSpPr>
+          <p:cNvPr id="22" name="Rounded Rectangle 21"/>
+          <p:cNvSpPr/>
+          <p:nvPr/>
+        </p:nvSpPr>
+        <p:spPr>
+          <a:xfrm>
+            <a:off x="868680" y="5166360"/>
+            <a:ext cx="5120640" cy="960120"/>
+          </a:xfrm>
+          <a:prstGeom prst="roundRect">
+            <a:avLst/>
+          </a:prstGeom>
+          <a:solidFill>
+            <a:srgbClr val="F2F5FB"/>
+          </a:solidFill>
+          <a:ln>
+            <a:noFill/>
+          </a:ln>
+          <a:effectLst/>
+        </p:spPr>
+        <p:style>
+          <a:lnRef idx="1">
+            <a:schemeClr val="accent1"/>
+          </a:lnRef>
+          <a:fillRef idx="3">
+            <a:schemeClr val="accent1"/>
+          </a:fillRef>
+          <a:effectRef idx="2">
+            <a:schemeClr val="accent1"/>
+          </a:effectRef>
+          <a:fontRef idx="minor">
+            <a:schemeClr val="lt1"/>
+          </a:fontRef>
+        </p:style>
+        <p:txBody>
+          <a:bodyPr rtlCol="0" anchor="ctr"/>
+          <a:lstStyle/>
+          <a:p>
+            <a:pPr algn="ctr"/>
+          </a:p>
+        </p:txBody>
+      </p:sp>
+      <p:sp>
+        <p:nvSpPr>
+          <p:cNvPr id="23" name="TextBox 22"/>
+          <p:cNvSpPr txBox="1"/>
+          <p:nvPr/>
+        </p:nvSpPr>
+        <p:spPr>
+          <a:xfrm>
+            <a:off x="1097280" y="5276088"/>
+            <a:ext cx="1463040" cy="731520"/>
+          </a:xfrm>
+          <a:prstGeom prst="rect">
+            <a:avLst/>
+          </a:prstGeom>
+          <a:noFill/>
+        </p:spPr>
+        <p:txBody>
+          <a:bodyPr wrap="square">
+            <a:spAutoFit/>
+          </a:bodyPr>
+          <a:lstStyle/>
+          <a:p>
+            <a:pPr algn="l">
+              <a:lnSpc>
+                <a:spcPct val="125000"/>
+              </a:lnSpc>
+            </a:pPr>
+            <a:r>
+              <a:rPr sz="2000" b="1">
+                <a:solidFill>
+                  <a:srgbClr val="122A51"/>
+                </a:solidFill>
+                <a:latin typeface="微软雅黑"/>
+                <a:ea typeface="微软雅黑"/>
+                <a:cs typeface="微软雅黑"/>
+              </a:rPr>
+              <a:t>网格员工作台</a:t>
+            </a:r>
+          </a:p>
+        </p:txBody>
+      </p:sp>
+      <p:sp>
+        <p:nvSpPr>
+          <p:cNvPr id="24" name="TextBox 23"/>
+          <p:cNvSpPr txBox="1"/>
+          <p:nvPr/>
+        </p:nvSpPr>
+        <p:spPr>
+          <a:xfrm>
+            <a:off x="2606039" y="5330952"/>
+            <a:ext cx="3200400" cy="731520"/>
+          </a:xfrm>
+          <a:prstGeom prst="rect">
+            <a:avLst/>
+          </a:prstGeom>
+          <a:noFill/>
+        </p:spPr>
+        <p:txBody>
+          <a:bodyPr wrap="square">
+            <a:spAutoFit/>
+          </a:bodyPr>
+          <a:lstStyle/>
+          <a:p>
+            <a:pPr algn="l">
+              <a:lnSpc>
+                <a:spcPct val="125000"/>
+              </a:lnSpc>
+            </a:pPr>
+            <a:r>
+              <a:rPr sz="1500" b="0">
+                <a:solidFill>
+                  <a:srgbClr val="1B2233"/>
+                </a:solidFill>
+                <a:latin typeface="微软雅黑"/>
+                <a:ea typeface="微软雅黑"/>
+                <a:cs typeface="微软雅黑"/>
+              </a:rPr>
+              <a:t>AI 助手、待办、统计导出</a:t>
+            </a:r>
+          </a:p>
+        </p:txBody>
+      </p:sp>
+      <p:sp>
+        <p:nvSpPr>
+          <p:cNvPr id="25" name="Rounded Rectangle 24"/>
+          <p:cNvSpPr/>
+          <p:nvPr/>
+        </p:nvSpPr>
+        <p:spPr>
+          <a:xfrm>
+            <a:off x="6355080" y="5166360"/>
+            <a:ext cx="5120640" cy="960120"/>
+          </a:xfrm>
+          <a:prstGeom prst="roundRect">
+            <a:avLst/>
+          </a:prstGeom>
+          <a:solidFill>
+            <a:srgbClr val="F2F5FB"/>
+          </a:solidFill>
+          <a:ln>
+            <a:noFill/>
+          </a:ln>
+          <a:effectLst/>
+        </p:spPr>
+        <p:style>
+          <a:lnRef idx="1">
+            <a:schemeClr val="accent1"/>
+          </a:lnRef>
+          <a:fillRef idx="3">
+            <a:schemeClr val="accent1"/>
+          </a:fillRef>
+          <a:effectRef idx="2">
+            <a:schemeClr val="accent1"/>
+          </a:effectRef>
+          <a:fontRef idx="minor">
+            <a:schemeClr val="lt1"/>
+          </a:fontRef>
+        </p:style>
+        <p:txBody>
+          <a:bodyPr rtlCol="0" anchor="ctr"/>
+          <a:lstStyle/>
+          <a:p>
+            <a:pPr algn="ctr"/>
+          </a:p>
+        </p:txBody>
+      </p:sp>
+      <p:sp>
+        <p:nvSpPr>
+          <p:cNvPr id="26" name="TextBox 25"/>
+          <p:cNvSpPr txBox="1"/>
+          <p:nvPr/>
+        </p:nvSpPr>
+        <p:spPr>
+          <a:xfrm>
+            <a:off x="6583680" y="5276088"/>
+            <a:ext cx="1463040" cy="731520"/>
+          </a:xfrm>
+          <a:prstGeom prst="rect">
+            <a:avLst/>
+          </a:prstGeom>
+          <a:noFill/>
+        </p:spPr>
+        <p:txBody>
+          <a:bodyPr wrap="square">
+            <a:spAutoFit/>
+          </a:bodyPr>
+          <a:lstStyle/>
+          <a:p>
+            <a:pPr algn="l">
+              <a:lnSpc>
+                <a:spcPct val="125000"/>
+              </a:lnSpc>
+            </a:pPr>
+            <a:r>
+              <a:rPr sz="2000" b="1">
+                <a:solidFill>
+                  <a:srgbClr val="122A51"/>
+                </a:solidFill>
+                <a:latin typeface="微软雅黑"/>
+                <a:ea typeface="微软雅黑"/>
+                <a:cs typeface="微软雅黑"/>
+              </a:rPr>
+              <a:t>转人工</a:t>
+            </a:r>
+          </a:p>
+        </p:txBody>
+      </p:sp>
+      <p:sp>
+        <p:nvSpPr>
+          <p:cNvPr id="27" name="TextBox 26"/>
+          <p:cNvSpPr txBox="1"/>
+          <p:nvPr/>
+        </p:nvSpPr>
+        <p:spPr>
+          <a:xfrm>
+            <a:off x="8092440" y="5330952"/>
+            <a:ext cx="3200400" cy="731520"/>
+          </a:xfrm>
+          <a:prstGeom prst="rect">
+            <a:avLst/>
+          </a:prstGeom>
+          <a:noFill/>
+        </p:spPr>
+        <p:txBody>
+          <a:bodyPr wrap="square">
+            <a:spAutoFit/>
+          </a:bodyPr>
+          <a:lstStyle/>
+          <a:p>
+            <a:pPr algn="l">
+              <a:lnSpc>
+                <a:spcPct val="125000"/>
+              </a:lnSpc>
+            </a:pPr>
+            <a:r>
+              <a:rPr sz="1500" b="0">
+                <a:solidFill>
+                  <a:srgbClr val="1B2233"/>
+                </a:solidFill>
+                <a:latin typeface="微软雅黑"/>
+                <a:ea typeface="微软雅黑"/>
+                <a:cs typeface="微软雅黑"/>
+              </a:rPr>
+              <a:t>带「处理包」：用户信息 + 执行链 + 待确认事项</a:t>
+            </a:r>
+          </a:p>
+        </p:txBody>
+      </p:sp>
+      <p:sp>
+        <p:nvSpPr>
+          <p:cNvPr id="28" name="Rectangle 27"/>
+          <p:cNvSpPr/>
+          <p:nvPr/>
+        </p:nvSpPr>
+        <p:spPr>
+          <a:xfrm>
+            <a:off x="548640" y="6510528"/>
+            <a:ext cx="10881360" cy="9525"/>
+          </a:xfrm>
+          <a:prstGeom prst="rect">
+            <a:avLst/>
+          </a:prstGeom>
+          <a:solidFill>
+            <a:srgbClr val="DDE3EE"/>
+          </a:solidFill>
+          <a:ln>
+            <a:noFill/>
+          </a:ln>
+          <a:effectLst/>
+        </p:spPr>
+        <p:style>
+          <a:lnRef idx="1">
+            <a:schemeClr val="accent1"/>
+          </a:lnRef>
+          <a:fillRef idx="3">
+            <a:schemeClr val="accent1"/>
+          </a:fillRef>
+          <a:effectRef idx="2">
+            <a:schemeClr val="accent1"/>
+          </a:effectRef>
+          <a:fontRef idx="minor">
+            <a:schemeClr val="lt1"/>
+          </a:fontRef>
+        </p:style>
+        <p:txBody>
+          <a:bodyPr rtlCol="0" anchor="ctr"/>
+          <a:lstStyle/>
+          <a:p>
+            <a:pPr algn="ctr"/>
+          </a:p>
+        </p:txBody>
+      </p:sp>
+      <p:sp>
+        <p:nvSpPr>
+          <p:cNvPr id="29" name="TextBox 28"/>
+          <p:cNvSpPr txBox="1"/>
+          <p:nvPr/>
+        </p:nvSpPr>
+        <p:spPr>
+          <a:xfrm>
+            <a:off x="10607040" y="6565392"/>
+            <a:ext cx="822960" cy="274320"/>
+          </a:xfrm>
+          <a:prstGeom prst="rect">
+            <a:avLst/>
+          </a:prstGeom>
+          <a:noFill/>
+        </p:spPr>
+        <p:txBody>
+          <a:bodyPr wrap="square">
+            <a:spAutoFit/>
+          </a:bodyPr>
+          <a:lstStyle/>
+          <a:p>
+            <a:pPr algn="r">
+              <a:lnSpc>
+                <a:spcPct val="125000"/>
+              </a:lnSpc>
+            </a:pPr>
+            <a:r>
+              <a:rPr sz="1100" b="0">
+                <a:solidFill>
+                  <a:srgbClr val="6B7485"/>
+                </a:solidFill>
+                <a:latin typeface="微软雅黑"/>
+                <a:ea typeface="微软雅黑"/>
+                <a:cs typeface="微软雅黑"/>
+              </a:rPr>
+              <a:t>13 / 15</a:t>
+            </a:r>
+          </a:p>
+        </p:txBody>
+      </p:sp>
+    </p:spTree>
+  </p:cSld>
+  <p:clrMapOvr>
+    <a:masterClrMapping/>
+  </p:clrMapOvr>
+</p:sld>
+</file>
+
+<file path=ppt/slides/slide14.xml><?xml version="1.0" encoding="utf-8"?>
+<p:sld xmlns:a="http://schemas.openxmlformats.org/drawingml/2006/main" xmlns:p="http://schemas.openxmlformats.org/presentationml/2006/main" xmlns:r="http://schemas.openxmlformats.org/officeDocument/2006/relationships">
+  <p:cSld>
+    <p:spTree>
+      <p:nvGrpSpPr>
+        <p:cNvPr id="1" name=""/>
+        <p:cNvGrpSpPr/>
+        <p:nvPr/>
+      </p:nvGrpSpPr>
+      <p:grpSpPr/>
+      <p:sp>
+        <p:nvSpPr>
+          <p:cNvPr id="2" name="Rounded Rectangle 1"/>
+          <p:cNvSpPr/>
+          <p:nvPr/>
+        </p:nvSpPr>
+        <p:spPr>
+          <a:xfrm>
+            <a:off x="548640" y="502920"/>
+            <a:ext cx="128016" cy="566928"/>
+          </a:xfrm>
+          <a:prstGeom prst="roundRect">
+            <a:avLst/>
+          </a:prstGeom>
+          <a:solidFill>
+            <a:srgbClr val="FF8C42"/>
+          </a:solidFill>
+          <a:ln>
+            <a:noFill/>
+          </a:ln>
+          <a:effectLst/>
+        </p:spPr>
+        <p:style>
+          <a:lnRef idx="1">
+            <a:schemeClr val="accent1"/>
+          </a:lnRef>
+          <a:fillRef idx="3">
+            <a:schemeClr val="accent1"/>
+          </a:fillRef>
+          <a:effectRef idx="2">
+            <a:schemeClr val="accent1"/>
+          </a:effectRef>
+          <a:fontRef idx="minor">
+            <a:schemeClr val="lt1"/>
+          </a:fontRef>
+        </p:style>
+        <p:txBody>
+          <a:bodyPr rtlCol="0" anchor="ctr"/>
+          <a:lstStyle/>
+          <a:p>
+            <a:pPr algn="ctr"/>
+          </a:p>
+        </p:txBody>
+      </p:sp>
+      <p:sp>
+        <p:nvSpPr>
+          <p:cNvPr id="3" name="TextBox 2"/>
+          <p:cNvSpPr txBox="1"/>
+          <p:nvPr/>
+        </p:nvSpPr>
+        <p:spPr>
+          <a:xfrm>
+            <a:off x="868680" y="457200"/>
+            <a:ext cx="10789920" cy="822960"/>
+          </a:xfrm>
+          <a:prstGeom prst="rect">
+            <a:avLst/>
+          </a:prstGeom>
+          <a:noFill/>
+        </p:spPr>
+        <p:txBody>
+          <a:bodyPr wrap="square">
+            <a:spAutoFit/>
+          </a:bodyPr>
+          <a:lstStyle/>
+          <a:p>
+            <a:pPr algn="l">
+              <a:lnSpc>
+                <a:spcPct val="125000"/>
+              </a:lnSpc>
+            </a:pPr>
+            <a:r>
+              <a:rPr sz="4000" b="1">
+                <a:solidFill>
+                  <a:srgbClr val="122A51"/>
+                </a:solidFill>
+                <a:latin typeface="微软雅黑"/>
+                <a:ea typeface="微软雅黑"/>
+                <a:cs typeface="微软雅黑"/>
+              </a:rPr>
+              <a:t>附录 · 它是怎么搭起来的</a:t>
+            </a:r>
+          </a:p>
+        </p:txBody>
+      </p:sp>
+      <p:sp>
+        <p:nvSpPr>
+          <p:cNvPr id="4" name="Rounded Rectangle 3"/>
+          <p:cNvSpPr/>
+          <p:nvPr/>
+        </p:nvSpPr>
+        <p:spPr>
+          <a:xfrm>
+            <a:off x="868680" y="1737360"/>
+            <a:ext cx="1828800" cy="868680"/>
+          </a:xfrm>
+          <a:prstGeom prst="roundRect">
+            <a:avLst/>
+          </a:prstGeom>
+          <a:solidFill>
+            <a:srgbClr val="F2F5FB"/>
+          </a:solidFill>
+          <a:ln>
+            <a:noFill/>
+          </a:ln>
+          <a:effectLst/>
+        </p:spPr>
+        <p:style>
+          <a:lnRef idx="1">
+            <a:schemeClr val="accent1"/>
+          </a:lnRef>
+          <a:fillRef idx="3">
+            <a:schemeClr val="accent1"/>
+          </a:fillRef>
+          <a:effectRef idx="2">
+            <a:schemeClr val="accent1"/>
+          </a:effectRef>
+          <a:fontRef idx="minor">
+            <a:schemeClr val="lt1"/>
+          </a:fontRef>
+        </p:style>
+        <p:txBody>
+          <a:bodyPr rtlCol="0" anchor="ctr"/>
+          <a:lstStyle/>
+          <a:p>
+            <a:pPr algn="ctr"/>
+          </a:p>
+        </p:txBody>
+      </p:sp>
+      <p:sp>
+        <p:nvSpPr>
+          <p:cNvPr id="5" name="TextBox 4"/>
+          <p:cNvSpPr txBox="1"/>
+          <p:nvPr/>
+        </p:nvSpPr>
+        <p:spPr>
+          <a:xfrm>
+            <a:off x="868680" y="1947672"/>
+            <a:ext cx="1828800" cy="457200"/>
+          </a:xfrm>
+          <a:prstGeom prst="rect">
+            <a:avLst/>
+          </a:prstGeom>
+          <a:noFill/>
+        </p:spPr>
+        <p:txBody>
+          <a:bodyPr wrap="square">
+            <a:spAutoFit/>
+          </a:bodyPr>
+          <a:lstStyle/>
+          <a:p>
+            <a:pPr algn="ctr">
+              <a:lnSpc>
+                <a:spcPct val="125000"/>
+              </a:lnSpc>
+            </a:pPr>
+            <a:r>
+              <a:rPr sz="2000" b="0">
+                <a:solidFill>
+                  <a:srgbClr val="1B2233"/>
+                </a:solidFill>
+                <a:latin typeface="微软雅黑"/>
+                <a:ea typeface="微软雅黑"/>
+                <a:cs typeface="微软雅黑"/>
+              </a:rPr>
+              <a:t>居民端</a:t>
+            </a:r>
+          </a:p>
+        </p:txBody>
+      </p:sp>
+      <p:sp>
+        <p:nvSpPr>
+          <p:cNvPr id="6" name="Rounded Rectangle 5"/>
+          <p:cNvSpPr/>
+          <p:nvPr/>
+        </p:nvSpPr>
+        <p:spPr>
+          <a:xfrm>
+            <a:off x="2834640" y="1737360"/>
+            <a:ext cx="1828800" cy="868680"/>
+          </a:xfrm>
+          <a:prstGeom prst="roundRect">
+            <a:avLst/>
+          </a:prstGeom>
+          <a:solidFill>
+            <a:srgbClr val="F2F5FB"/>
+          </a:solidFill>
+          <a:ln>
+            <a:noFill/>
+          </a:ln>
+          <a:effectLst/>
+        </p:spPr>
+        <p:style>
+          <a:lnRef idx="1">
+            <a:schemeClr val="accent1"/>
+          </a:lnRef>
+          <a:fillRef idx="3">
+            <a:schemeClr val="accent1"/>
+          </a:fillRef>
+          <a:effectRef idx="2">
+            <a:schemeClr val="accent1"/>
+          </a:effectRef>
+          <a:fontRef idx="minor">
+            <a:schemeClr val="lt1"/>
+          </a:fontRef>
+        </p:style>
+        <p:txBody>
+          <a:bodyPr rtlCol="0" anchor="ctr"/>
+          <a:lstStyle/>
+          <a:p>
+            <a:pPr algn="ctr"/>
+          </a:p>
+        </p:txBody>
+      </p:sp>
+      <p:sp>
+        <p:nvSpPr>
+          <p:cNvPr id="7" name="TextBox 6"/>
+          <p:cNvSpPr txBox="1"/>
+          <p:nvPr/>
+        </p:nvSpPr>
+        <p:spPr>
+          <a:xfrm>
+            <a:off x="2834640" y="1947672"/>
+            <a:ext cx="1828800" cy="457200"/>
+          </a:xfrm>
+          <a:prstGeom prst="rect">
+            <a:avLst/>
+          </a:prstGeom>
+          <a:noFill/>
+        </p:spPr>
+        <p:txBody>
+          <a:bodyPr wrap="square">
+            <a:spAutoFit/>
+          </a:bodyPr>
+          <a:lstStyle/>
+          <a:p>
+            <a:pPr algn="ctr">
+              <a:lnSpc>
+                <a:spcPct val="125000"/>
+              </a:lnSpc>
+            </a:pPr>
+            <a:r>
+              <a:rPr sz="2000" b="0">
+                <a:solidFill>
+                  <a:srgbClr val="1B2233"/>
+                </a:solidFill>
+                <a:latin typeface="微软雅黑"/>
+                <a:ea typeface="微软雅黑"/>
+                <a:cs typeface="微软雅黑"/>
+              </a:rPr>
+              <a:t>网格员端</a:t>
+            </a:r>
+          </a:p>
+        </p:txBody>
+      </p:sp>
+      <p:sp>
+        <p:nvSpPr>
+          <p:cNvPr id="8" name="Rounded Rectangle 7"/>
+          <p:cNvSpPr/>
+          <p:nvPr/>
+        </p:nvSpPr>
+        <p:spPr>
+          <a:xfrm>
+            <a:off x="4800600" y="1737360"/>
+            <a:ext cx="1828800" cy="868680"/>
+          </a:xfrm>
+          <a:prstGeom prst="roundRect">
+            <a:avLst/>
+          </a:prstGeom>
+          <a:solidFill>
+            <a:srgbClr val="F2F5FB"/>
+          </a:solidFill>
+          <a:ln>
+            <a:noFill/>
+          </a:ln>
+          <a:effectLst/>
+        </p:spPr>
+        <p:style>
+          <a:lnRef idx="1">
+            <a:schemeClr val="accent1"/>
+          </a:lnRef>
+          <a:fillRef idx="3">
+            <a:schemeClr val="accent1"/>
+          </a:fillRef>
+          <a:effectRef idx="2">
+            <a:schemeClr val="accent1"/>
+          </a:effectRef>
+          <a:fontRef idx="minor">
+            <a:schemeClr val="lt1"/>
+          </a:fontRef>
+        </p:style>
+        <p:txBody>
+          <a:bodyPr rtlCol="0" anchor="ctr"/>
+          <a:lstStyle/>
+          <a:p>
+            <a:pPr algn="ctr"/>
+          </a:p>
+        </p:txBody>
+      </p:sp>
+      <p:sp>
+        <p:nvSpPr>
+          <p:cNvPr id="9" name="TextBox 8"/>
+          <p:cNvSpPr txBox="1"/>
+          <p:nvPr/>
+        </p:nvSpPr>
+        <p:spPr>
+          <a:xfrm>
+            <a:off x="4800600" y="1947672"/>
+            <a:ext cx="1828800" cy="457200"/>
+          </a:xfrm>
+          <a:prstGeom prst="rect">
+            <a:avLst/>
+          </a:prstGeom>
+          <a:noFill/>
+        </p:spPr>
+        <p:txBody>
+          <a:bodyPr wrap="square">
+            <a:spAutoFit/>
+          </a:bodyPr>
+          <a:lstStyle/>
+          <a:p>
+            <a:pPr algn="ctr">
+              <a:lnSpc>
+                <a:spcPct val="125000"/>
+              </a:lnSpc>
+            </a:pPr>
+            <a:r>
+              <a:rPr sz="2000" b="0">
+                <a:solidFill>
+                  <a:srgbClr val="1B2233"/>
+                </a:solidFill>
+                <a:latin typeface="微软雅黑"/>
+                <a:ea typeface="微软雅黑"/>
+                <a:cs typeface="微软雅黑"/>
+              </a:rPr>
+              <a:t>老年端</a:t>
+            </a:r>
+          </a:p>
+        </p:txBody>
+      </p:sp>
+      <p:sp>
+        <p:nvSpPr>
+          <p:cNvPr id="10" name="TextBox 9"/>
+          <p:cNvSpPr txBox="1"/>
+          <p:nvPr/>
+        </p:nvSpPr>
+        <p:spPr>
+          <a:xfrm>
+            <a:off x="6949440" y="1737360"/>
+            <a:ext cx="4480560" cy="914400"/>
+          </a:xfrm>
+          <a:prstGeom prst="rect">
+            <a:avLst/>
+          </a:prstGeom>
+          <a:noFill/>
+        </p:spPr>
+        <p:txBody>
+          <a:bodyPr wrap="square">
+            <a:spAutoFit/>
+          </a:bodyPr>
+          <a:lstStyle/>
+          <a:p>
+            <a:pPr algn="l">
+              <a:lnSpc>
+                <a:spcPct val="125000"/>
+              </a:lnSpc>
+            </a:pPr>
+            <a:r>
+              <a:rPr sz="1600" b="0">
+                <a:solidFill>
+                  <a:srgbClr val="6B7485"/>
+                </a:solidFill>
+                <a:latin typeface="微软雅黑"/>
+                <a:ea typeface="微软雅黑"/>
+                <a:cs typeface="微软雅黑"/>
+              </a:rPr>
+              <a:t>三端共用一个后端</a:t>
+            </a:r>
+          </a:p>
+          <a:p>
+            <a:pPr algn="l">
+              <a:lnSpc>
+                <a:spcPct val="125000"/>
+              </a:lnSpc>
+            </a:pPr>
+            <a:r>
+              <a:rPr sz="1600" b="0">
+                <a:solidFill>
+                  <a:srgbClr val="6B7485"/>
+                </a:solidFill>
+                <a:latin typeface="微软雅黑"/>
+                <a:ea typeface="微软雅黑"/>
+                <a:cs typeface="微软雅黑"/>
+              </a:rPr>
+              <a:t>（Vue3 + Naive UI，已构建为静态文件）</a:t>
+            </a:r>
+          </a:p>
+        </p:txBody>
+      </p:sp>
+      <p:sp>
+        <p:nvSpPr>
+          <p:cNvPr id="11" name="Rounded Rectangle 10"/>
+          <p:cNvSpPr/>
+          <p:nvPr/>
+        </p:nvSpPr>
+        <p:spPr>
+          <a:xfrm>
+            <a:off x="868680" y="2880360"/>
+            <a:ext cx="10424160" cy="914400"/>
+          </a:xfrm>
+          <a:prstGeom prst="roundRect">
+            <a:avLst/>
+          </a:prstGeom>
+          <a:solidFill>
+            <a:srgbClr val="2D5BFF"/>
+          </a:solidFill>
+          <a:ln>
+            <a:noFill/>
+          </a:ln>
+          <a:effectLst/>
+        </p:spPr>
+        <p:style>
+          <a:lnRef idx="1">
+            <a:schemeClr val="accent1"/>
+          </a:lnRef>
+          <a:fillRef idx="3">
+            <a:schemeClr val="accent1"/>
+          </a:fillRef>
+          <a:effectRef idx="2">
+            <a:schemeClr val="accent1"/>
+          </a:effectRef>
+          <a:fontRef idx="minor">
+            <a:schemeClr val="lt1"/>
+          </a:fontRef>
+        </p:style>
+        <p:txBody>
+          <a:bodyPr rtlCol="0" anchor="ctr"/>
+          <a:lstStyle/>
+          <a:p>
+            <a:pPr algn="ctr"/>
+          </a:p>
+        </p:txBody>
+      </p:sp>
+      <p:sp>
+        <p:nvSpPr>
+          <p:cNvPr id="12" name="TextBox 11"/>
+          <p:cNvSpPr txBox="1"/>
+          <p:nvPr/>
+        </p:nvSpPr>
+        <p:spPr>
+          <a:xfrm>
+            <a:off x="1097280" y="3090672"/>
+            <a:ext cx="10058400" cy="548640"/>
+          </a:xfrm>
+          <a:prstGeom prst="rect">
+            <a:avLst/>
+          </a:prstGeom>
+          <a:noFill/>
+        </p:spPr>
+        <p:txBody>
+          <a:bodyPr wrap="square">
+            <a:spAutoFit/>
+          </a:bodyPr>
+          <a:lstStyle/>
+          <a:p>
+            <a:pPr algn="ctr">
+              <a:lnSpc>
+                <a:spcPct val="125000"/>
+              </a:lnSpc>
+            </a:pPr>
+            <a:r>
+              <a:rPr sz="2000" b="1">
+                <a:solidFill>
+                  <a:srgbClr val="FFFFFF"/>
+                </a:solidFill>
+                <a:latin typeface="微软雅黑"/>
+                <a:ea typeface="微软雅黑"/>
+                <a:cs typeface="微软雅黑"/>
+              </a:rPr>
+              <a:t>主服务 FastAPI：接口 · 鉴权 · 安全响应头 · 实时通知</a:t>
+            </a:r>
+          </a:p>
+        </p:txBody>
+      </p:sp>
+      <p:sp>
+        <p:nvSpPr>
+          <p:cNvPr id="13" name="TextBox 12"/>
+          <p:cNvSpPr txBox="1"/>
+          <p:nvPr/>
+        </p:nvSpPr>
+        <p:spPr>
+          <a:xfrm>
+            <a:off x="868680" y="4023360"/>
+            <a:ext cx="10424160" cy="457200"/>
+          </a:xfrm>
+          <a:prstGeom prst="rect">
+            <a:avLst/>
+          </a:prstGeom>
+          <a:noFill/>
+        </p:spPr>
+        <p:txBody>
+          <a:bodyPr wrap="square">
+            <a:spAutoFit/>
+          </a:bodyPr>
+          <a:lstStyle/>
+          <a:p>
+            <a:pPr algn="l">
+              <a:lnSpc>
+                <a:spcPct val="125000"/>
+              </a:lnSpc>
+            </a:pPr>
+            <a:r>
+              <a:rPr sz="1800" b="1">
+                <a:solidFill>
+                  <a:srgbClr val="122A51"/>
+                </a:solidFill>
+                <a:latin typeface="微软雅黑"/>
+                <a:ea typeface="微软雅黑"/>
+                <a:cs typeface="微软雅黑"/>
+              </a:rPr>
+              <a:t>9 个智能体角色（黑板协作）</a:t>
+            </a:r>
+          </a:p>
+        </p:txBody>
+      </p:sp>
+      <p:sp>
+        <p:nvSpPr>
+          <p:cNvPr id="14" name="Rounded Rectangle 13"/>
+          <p:cNvSpPr/>
+          <p:nvPr/>
+        </p:nvSpPr>
+        <p:spPr>
+          <a:xfrm>
+            <a:off x="868680" y="4480560"/>
+            <a:ext cx="1097280" cy="566928"/>
+          </a:xfrm>
+          <a:prstGeom prst="roundRect">
+            <a:avLst/>
+          </a:prstGeom>
+          <a:solidFill>
+            <a:srgbClr val="F2F5FB"/>
+          </a:solidFill>
+          <a:ln>
+            <a:noFill/>
+          </a:ln>
+          <a:effectLst/>
+        </p:spPr>
+        <p:style>
+          <a:lnRef idx="1">
+            <a:schemeClr val="accent1"/>
+          </a:lnRef>
+          <a:fillRef idx="3">
+            <a:schemeClr val="accent1"/>
+          </a:fillRef>
+          <a:effectRef idx="2">
+            <a:schemeClr val="accent1"/>
+          </a:effectRef>
+          <a:fontRef idx="minor">
+            <a:schemeClr val="lt1"/>
+          </a:fontRef>
+        </p:style>
+        <p:txBody>
+          <a:bodyPr rtlCol="0" anchor="ctr"/>
+          <a:lstStyle/>
+          <a:p>
+            <a:pPr algn="ctr"/>
+          </a:p>
+        </p:txBody>
+      </p:sp>
+      <p:sp>
+        <p:nvSpPr>
+          <p:cNvPr id="15" name="TextBox 14"/>
+          <p:cNvSpPr txBox="1"/>
+          <p:nvPr/>
+        </p:nvSpPr>
+        <p:spPr>
+          <a:xfrm>
+            <a:off x="868680" y="4599432"/>
+            <a:ext cx="1097280" cy="365760"/>
+          </a:xfrm>
+          <a:prstGeom prst="rect">
+            <a:avLst/>
+          </a:prstGeom>
+          <a:noFill/>
+        </p:spPr>
+        <p:txBody>
+          <a:bodyPr wrap="square">
+            <a:spAutoFit/>
+          </a:bodyPr>
+          <a:lstStyle/>
+          <a:p>
+            <a:pPr algn="ctr">
+              <a:lnSpc>
+                <a:spcPct val="125000"/>
+              </a:lnSpc>
+            </a:pPr>
+            <a:r>
+              <a:rPr sz="1200" b="0">
+                <a:solidFill>
+                  <a:srgbClr val="1B2233"/>
+                </a:solidFill>
+                <a:latin typeface="微软雅黑"/>
+                <a:ea typeface="微软雅黑"/>
+                <a:cs typeface="微软雅黑"/>
+              </a:rPr>
+              <a:t>接待员</a:t>
+            </a:r>
+          </a:p>
+        </p:txBody>
+      </p:sp>
+      <p:sp>
+        <p:nvSpPr>
+          <p:cNvPr id="16" name="Rounded Rectangle 15"/>
+          <p:cNvSpPr/>
+          <p:nvPr/>
+        </p:nvSpPr>
+        <p:spPr>
+          <a:xfrm>
+            <a:off x="2048256" y="4480560"/>
+            <a:ext cx="1097280" cy="566928"/>
+          </a:xfrm>
+          <a:prstGeom prst="roundRect">
+            <a:avLst/>
+          </a:prstGeom>
+          <a:solidFill>
+            <a:srgbClr val="F2F5FB"/>
+          </a:solidFill>
+          <a:ln>
+            <a:noFill/>
+          </a:ln>
+          <a:effectLst/>
+        </p:spPr>
+        <p:style>
+          <a:lnRef idx="1">
+            <a:schemeClr val="accent1"/>
+          </a:lnRef>
+          <a:fillRef idx="3">
+            <a:schemeClr val="accent1"/>
+          </a:fillRef>
+          <a:effectRef idx="2">
+            <a:schemeClr val="accent1"/>
+          </a:effectRef>
+          <a:fontRef idx="minor">
+            <a:schemeClr val="lt1"/>
+          </a:fontRef>
+        </p:style>
+        <p:txBody>
+          <a:bodyPr rtlCol="0" anchor="ctr"/>
+          <a:lstStyle/>
+          <a:p>
+            <a:pPr algn="ctr"/>
+          </a:p>
+        </p:txBody>
+      </p:sp>
+      <p:sp>
+        <p:nvSpPr>
+          <p:cNvPr id="17" name="TextBox 16"/>
+          <p:cNvSpPr txBox="1"/>
+          <p:nvPr/>
+        </p:nvSpPr>
+        <p:spPr>
+          <a:xfrm>
+            <a:off x="2048256" y="4599432"/>
+            <a:ext cx="1097280" cy="365760"/>
+          </a:xfrm>
+          <a:prstGeom prst="rect">
+            <a:avLst/>
+          </a:prstGeom>
+          <a:noFill/>
+        </p:spPr>
+        <p:txBody>
+          <a:bodyPr wrap="square">
+            <a:spAutoFit/>
+          </a:bodyPr>
+          <a:lstStyle/>
+          <a:p>
+            <a:pPr algn="ctr">
+              <a:lnSpc>
+                <a:spcPct val="125000"/>
+              </a:lnSpc>
+            </a:pPr>
+            <a:r>
+              <a:rPr sz="1200" b="0">
+                <a:solidFill>
+                  <a:srgbClr val="1B2233"/>
+                </a:solidFill>
+                <a:latin typeface="微软雅黑"/>
+                <a:ea typeface="微软雅黑"/>
+                <a:cs typeface="微软雅黑"/>
+              </a:rPr>
+              <a:t>报修调度</a:t>
+            </a:r>
+          </a:p>
+        </p:txBody>
+      </p:sp>
+      <p:sp>
+        <p:nvSpPr>
+          <p:cNvPr id="18" name="Rounded Rectangle 17"/>
+          <p:cNvSpPr/>
+          <p:nvPr/>
+        </p:nvSpPr>
+        <p:spPr>
+          <a:xfrm>
+            <a:off x="3227832" y="4480560"/>
+            <a:ext cx="1097280" cy="566928"/>
+          </a:xfrm>
+          <a:prstGeom prst="roundRect">
+            <a:avLst/>
+          </a:prstGeom>
+          <a:solidFill>
+            <a:srgbClr val="F2F5FB"/>
+          </a:solidFill>
+          <a:ln>
+            <a:noFill/>
+          </a:ln>
+          <a:effectLst/>
+        </p:spPr>
+        <p:style>
+          <a:lnRef idx="1">
+            <a:schemeClr val="accent1"/>
+          </a:lnRef>
+          <a:fillRef idx="3">
+            <a:schemeClr val="accent1"/>
+          </a:fillRef>
+          <a:effectRef idx="2">
+            <a:schemeClr val="accent1"/>
+          </a:effectRef>
+          <a:fontRef idx="minor">
+            <a:schemeClr val="lt1"/>
+          </a:fontRef>
+        </p:style>
+        <p:txBody>
+          <a:bodyPr rtlCol="0" anchor="ctr"/>
+          <a:lstStyle/>
+          <a:p>
+            <a:pPr algn="ctr"/>
+          </a:p>
+        </p:txBody>
+      </p:sp>
+      <p:sp>
+        <p:nvSpPr>
+          <p:cNvPr id="19" name="TextBox 18"/>
+          <p:cNvSpPr txBox="1"/>
+          <p:nvPr/>
+        </p:nvSpPr>
+        <p:spPr>
+          <a:xfrm>
+            <a:off x="3227832" y="4599432"/>
+            <a:ext cx="1097280" cy="365760"/>
+          </a:xfrm>
+          <a:prstGeom prst="rect">
+            <a:avLst/>
+          </a:prstGeom>
+          <a:noFill/>
+        </p:spPr>
+        <p:txBody>
+          <a:bodyPr wrap="square">
+            <a:spAutoFit/>
+          </a:bodyPr>
+          <a:lstStyle/>
+          <a:p>
+            <a:pPr algn="ctr">
+              <a:lnSpc>
+                <a:spcPct val="125000"/>
+              </a:lnSpc>
+            </a:pPr>
+            <a:r>
+              <a:rPr sz="1200" b="0">
+                <a:solidFill>
+                  <a:srgbClr val="1B2233"/>
+                </a:solidFill>
+                <a:latin typeface="微软雅黑"/>
+                <a:ea typeface="微软雅黑"/>
+                <a:cs typeface="微软雅黑"/>
+              </a:rPr>
+              <a:t>提案协商</a:t>
+            </a:r>
+          </a:p>
+        </p:txBody>
+      </p:sp>
+      <p:sp>
+        <p:nvSpPr>
+          <p:cNvPr id="20" name="Rounded Rectangle 19"/>
+          <p:cNvSpPr/>
+          <p:nvPr/>
+        </p:nvSpPr>
+        <p:spPr>
+          <a:xfrm>
+            <a:off x="4407408" y="4480560"/>
+            <a:ext cx="1097280" cy="566928"/>
+          </a:xfrm>
+          <a:prstGeom prst="roundRect">
+            <a:avLst/>
+          </a:prstGeom>
+          <a:solidFill>
+            <a:srgbClr val="F2F5FB"/>
+          </a:solidFill>
+          <a:ln>
+            <a:noFill/>
+          </a:ln>
+          <a:effectLst/>
+        </p:spPr>
+        <p:style>
+          <a:lnRef idx="1">
+            <a:schemeClr val="accent1"/>
+          </a:lnRef>
+          <a:fillRef idx="3">
+            <a:schemeClr val="accent1"/>
+          </a:fillRef>
+          <a:effectRef idx="2">
+            <a:schemeClr val="accent1"/>
+          </a:effectRef>
+          <a:fontRef idx="minor">
+            <a:schemeClr val="lt1"/>
+          </a:fontRef>
+        </p:style>
+        <p:txBody>
+          <a:bodyPr rtlCol="0" anchor="ctr"/>
+          <a:lstStyle/>
+          <a:p>
+            <a:pPr algn="ctr"/>
+          </a:p>
+        </p:txBody>
+      </p:sp>
+      <p:sp>
+        <p:nvSpPr>
+          <p:cNvPr id="21" name="TextBox 20"/>
+          <p:cNvSpPr txBox="1"/>
+          <p:nvPr/>
+        </p:nvSpPr>
+        <p:spPr>
+          <a:xfrm>
+            <a:off x="4407408" y="4599432"/>
+            <a:ext cx="1097280" cy="365760"/>
+          </a:xfrm>
+          <a:prstGeom prst="rect">
+            <a:avLst/>
+          </a:prstGeom>
+          <a:noFill/>
+        </p:spPr>
+        <p:txBody>
+          <a:bodyPr wrap="square">
+            <a:spAutoFit/>
+          </a:bodyPr>
+          <a:lstStyle/>
+          <a:p>
+            <a:pPr algn="ctr">
+              <a:lnSpc>
+                <a:spcPct val="125000"/>
+              </a:lnSpc>
+            </a:pPr>
+            <a:r>
+              <a:rPr sz="1200" b="0">
+                <a:solidFill>
+                  <a:srgbClr val="1B2233"/>
+                </a:solidFill>
+                <a:latin typeface="微软雅黑"/>
+                <a:ea typeface="微软雅黑"/>
+                <a:cs typeface="微软雅黑"/>
+              </a:rPr>
+              <a:t>政策专员</a:t>
+            </a:r>
+          </a:p>
+        </p:txBody>
+      </p:sp>
+      <p:sp>
+        <p:nvSpPr>
+          <p:cNvPr id="22" name="Rounded Rectangle 21"/>
+          <p:cNvSpPr/>
+          <p:nvPr/>
+        </p:nvSpPr>
+        <p:spPr>
+          <a:xfrm>
+            <a:off x="5586984" y="4480560"/>
+            <a:ext cx="1097280" cy="566928"/>
+          </a:xfrm>
+          <a:prstGeom prst="roundRect">
+            <a:avLst/>
+          </a:prstGeom>
+          <a:solidFill>
+            <a:srgbClr val="F2F5FB"/>
+          </a:solidFill>
+          <a:ln>
+            <a:noFill/>
+          </a:ln>
+          <a:effectLst/>
+        </p:spPr>
+        <p:style>
+          <a:lnRef idx="1">
+            <a:schemeClr val="accent1"/>
+          </a:lnRef>
+          <a:fillRef idx="3">
+            <a:schemeClr val="accent1"/>
+          </a:fillRef>
+          <a:effectRef idx="2">
+            <a:schemeClr val="accent1"/>
+          </a:effectRef>
+          <a:fontRef idx="minor">
+            <a:schemeClr val="lt1"/>
+          </a:fontRef>
+        </p:style>
+        <p:txBody>
+          <a:bodyPr rtlCol="0" anchor="ctr"/>
+          <a:lstStyle/>
+          <a:p>
+            <a:pPr algn="ctr"/>
+          </a:p>
+        </p:txBody>
+      </p:sp>
+      <p:sp>
+        <p:nvSpPr>
+          <p:cNvPr id="23" name="TextBox 22"/>
+          <p:cNvSpPr txBox="1"/>
+          <p:nvPr/>
+        </p:nvSpPr>
+        <p:spPr>
+          <a:xfrm>
+            <a:off x="5586984" y="4599432"/>
+            <a:ext cx="1097280" cy="365760"/>
+          </a:xfrm>
+          <a:prstGeom prst="rect">
+            <a:avLst/>
+          </a:prstGeom>
+          <a:noFill/>
+        </p:spPr>
+        <p:txBody>
+          <a:bodyPr wrap="square">
+            <a:spAutoFit/>
+          </a:bodyPr>
+          <a:lstStyle/>
+          <a:p>
+            <a:pPr algn="ctr">
+              <a:lnSpc>
+                <a:spcPct val="125000"/>
+              </a:lnSpc>
+            </a:pPr>
+            <a:r>
+              <a:rPr sz="1200" b="0">
+                <a:solidFill>
+                  <a:srgbClr val="1B2233"/>
+                </a:solidFill>
+                <a:latin typeface="微软雅黑"/>
+                <a:ea typeface="微软雅黑"/>
+                <a:cs typeface="微软雅黑"/>
+              </a:rPr>
+              <a:t>健康顾问</a:t>
+            </a:r>
+          </a:p>
+        </p:txBody>
+      </p:sp>
+      <p:sp>
+        <p:nvSpPr>
+          <p:cNvPr id="24" name="Rounded Rectangle 23"/>
+          <p:cNvSpPr/>
+          <p:nvPr/>
+        </p:nvSpPr>
+        <p:spPr>
+          <a:xfrm>
+            <a:off x="6766560" y="4480560"/>
+            <a:ext cx="1097280" cy="566928"/>
+          </a:xfrm>
+          <a:prstGeom prst="roundRect">
+            <a:avLst/>
+          </a:prstGeom>
+          <a:solidFill>
+            <a:srgbClr val="F2F5FB"/>
+          </a:solidFill>
+          <a:ln>
+            <a:noFill/>
+          </a:ln>
+          <a:effectLst/>
+        </p:spPr>
+        <p:style>
+          <a:lnRef idx="1">
+            <a:schemeClr val="accent1"/>
+          </a:lnRef>
+          <a:fillRef idx="3">
+            <a:schemeClr val="accent1"/>
+          </a:fillRef>
+          <a:effectRef idx="2">
+            <a:schemeClr val="accent1"/>
+          </a:effectRef>
+          <a:fontRef idx="minor">
+            <a:schemeClr val="lt1"/>
+          </a:fontRef>
+        </p:style>
+        <p:txBody>
+          <a:bodyPr rtlCol="0" anchor="ctr"/>
+          <a:lstStyle/>
+          <a:p>
+            <a:pPr algn="ctr"/>
+          </a:p>
+        </p:txBody>
+      </p:sp>
+      <p:sp>
+        <p:nvSpPr>
+          <p:cNvPr id="25" name="TextBox 24"/>
+          <p:cNvSpPr txBox="1"/>
+          <p:nvPr/>
+        </p:nvSpPr>
+        <p:spPr>
+          <a:xfrm>
+            <a:off x="6766560" y="4599432"/>
+            <a:ext cx="1097280" cy="365760"/>
+          </a:xfrm>
+          <a:prstGeom prst="rect">
+            <a:avLst/>
+          </a:prstGeom>
+          <a:noFill/>
+        </p:spPr>
+        <p:txBody>
+          <a:bodyPr wrap="square">
+            <a:spAutoFit/>
+          </a:bodyPr>
+          <a:lstStyle/>
+          <a:p>
+            <a:pPr algn="ctr">
+              <a:lnSpc>
+                <a:spcPct val="125000"/>
+              </a:lnSpc>
+            </a:pPr>
+            <a:r>
+              <a:rPr sz="1200" b="0">
+                <a:solidFill>
+                  <a:srgbClr val="1B2233"/>
+                </a:solidFill>
+                <a:latin typeface="微软雅黑"/>
+                <a:ea typeface="微软雅黑"/>
+                <a:cs typeface="微软雅黑"/>
+              </a:rPr>
+              <a:t>天气守护</a:t>
+            </a:r>
+          </a:p>
+        </p:txBody>
+      </p:sp>
+      <p:sp>
+        <p:nvSpPr>
+          <p:cNvPr id="26" name="Rounded Rectangle 25"/>
+          <p:cNvSpPr/>
+          <p:nvPr/>
+        </p:nvSpPr>
+        <p:spPr>
+          <a:xfrm>
+            <a:off x="7946136" y="4480560"/>
+            <a:ext cx="1097280" cy="566928"/>
+          </a:xfrm>
+          <a:prstGeom prst="roundRect">
+            <a:avLst/>
+          </a:prstGeom>
+          <a:solidFill>
+            <a:srgbClr val="F2F5FB"/>
+          </a:solidFill>
+          <a:ln>
+            <a:noFill/>
+          </a:ln>
+          <a:effectLst/>
+        </p:spPr>
+        <p:style>
+          <a:lnRef idx="1">
+            <a:schemeClr val="accent1"/>
+          </a:lnRef>
+          <a:fillRef idx="3">
+            <a:schemeClr val="accent1"/>
+          </a:fillRef>
+          <a:effectRef idx="2">
+            <a:schemeClr val="accent1"/>
+          </a:effectRef>
+          <a:fontRef idx="minor">
+            <a:schemeClr val="lt1"/>
+          </a:fontRef>
+        </p:style>
+        <p:txBody>
+          <a:bodyPr rtlCol="0" anchor="ctr"/>
+          <a:lstStyle/>
+          <a:p>
+            <a:pPr algn="ctr"/>
+          </a:p>
+        </p:txBody>
+      </p:sp>
+      <p:sp>
+        <p:nvSpPr>
+          <p:cNvPr id="27" name="TextBox 26"/>
+          <p:cNvSpPr txBox="1"/>
+          <p:nvPr/>
+        </p:nvSpPr>
+        <p:spPr>
+          <a:xfrm>
+            <a:off x="7946136" y="4599432"/>
+            <a:ext cx="1097280" cy="365760"/>
+          </a:xfrm>
+          <a:prstGeom prst="rect">
+            <a:avLst/>
+          </a:prstGeom>
+          <a:noFill/>
+        </p:spPr>
+        <p:txBody>
+          <a:bodyPr wrap="square">
+            <a:spAutoFit/>
+          </a:bodyPr>
+          <a:lstStyle/>
+          <a:p>
+            <a:pPr algn="ctr">
+              <a:lnSpc>
+                <a:spcPct val="125000"/>
+              </a:lnSpc>
+            </a:pPr>
+            <a:r>
+              <a:rPr sz="1200" b="0">
+                <a:solidFill>
+                  <a:srgbClr val="1B2233"/>
+                </a:solidFill>
+                <a:latin typeface="微软雅黑"/>
+                <a:ea typeface="微软雅黑"/>
+                <a:cs typeface="微软雅黑"/>
+              </a:rPr>
+              <a:t>通知管理</a:t>
+            </a:r>
+          </a:p>
+        </p:txBody>
+      </p:sp>
+      <p:sp>
+        <p:nvSpPr>
+          <p:cNvPr id="28" name="Rounded Rectangle 27"/>
+          <p:cNvSpPr/>
+          <p:nvPr/>
+        </p:nvSpPr>
+        <p:spPr>
+          <a:xfrm>
+            <a:off x="9125712" y="4480560"/>
+            <a:ext cx="1097280" cy="566928"/>
+          </a:xfrm>
+          <a:prstGeom prst="roundRect">
+            <a:avLst/>
+          </a:prstGeom>
+          <a:solidFill>
+            <a:srgbClr val="F2F5FB"/>
+          </a:solidFill>
+          <a:ln>
+            <a:noFill/>
+          </a:ln>
+          <a:effectLst/>
+        </p:spPr>
+        <p:style>
+          <a:lnRef idx="1">
+            <a:schemeClr val="accent1"/>
+          </a:lnRef>
+          <a:fillRef idx="3">
+            <a:schemeClr val="accent1"/>
+          </a:fillRef>
+          <a:effectRef idx="2">
+            <a:schemeClr val="accent1"/>
+          </a:effectRef>
+          <a:fontRef idx="minor">
+            <a:schemeClr val="lt1"/>
+          </a:fontRef>
+        </p:style>
+        <p:txBody>
+          <a:bodyPr rtlCol="0" anchor="ctr"/>
+          <a:lstStyle/>
+          <a:p>
+            <a:pPr algn="ctr"/>
+          </a:p>
+        </p:txBody>
+      </p:sp>
+      <p:sp>
+        <p:nvSpPr>
+          <p:cNvPr id="29" name="TextBox 28"/>
+          <p:cNvSpPr txBox="1"/>
+          <p:nvPr/>
+        </p:nvSpPr>
+        <p:spPr>
+          <a:xfrm>
+            <a:off x="9125712" y="4599432"/>
+            <a:ext cx="1097280" cy="365760"/>
+          </a:xfrm>
+          <a:prstGeom prst="rect">
+            <a:avLst/>
+          </a:prstGeom>
+          <a:noFill/>
+        </p:spPr>
+        <p:txBody>
+          <a:bodyPr wrap="square">
+            <a:spAutoFit/>
+          </a:bodyPr>
+          <a:lstStyle/>
+          <a:p>
+            <a:pPr algn="ctr">
+              <a:lnSpc>
+                <a:spcPct val="125000"/>
+              </a:lnSpc>
+            </a:pPr>
+            <a:r>
+              <a:rPr sz="1200" b="0">
+                <a:solidFill>
+                  <a:srgbClr val="1B2233"/>
+                </a:solidFill>
+                <a:latin typeface="微软雅黑"/>
+                <a:ea typeface="微软雅黑"/>
+                <a:cs typeface="微软雅黑"/>
+              </a:rPr>
+              <a:t>网格助手</a:t>
+            </a:r>
+          </a:p>
+        </p:txBody>
+      </p:sp>
+      <p:sp>
+        <p:nvSpPr>
+          <p:cNvPr id="30" name="Rounded Rectangle 29"/>
+          <p:cNvSpPr/>
+          <p:nvPr/>
+        </p:nvSpPr>
+        <p:spPr>
+          <a:xfrm>
+            <a:off x="10305288" y="4480560"/>
+            <a:ext cx="1097280" cy="566928"/>
+          </a:xfrm>
+          <a:prstGeom prst="roundRect">
+            <a:avLst/>
+          </a:prstGeom>
+          <a:solidFill>
+            <a:srgbClr val="FF8C42"/>
+          </a:solidFill>
+          <a:ln>
+            <a:noFill/>
+          </a:ln>
+          <a:effectLst/>
+        </p:spPr>
+        <p:style>
+          <a:lnRef idx="1">
+            <a:schemeClr val="accent1"/>
+          </a:lnRef>
+          <a:fillRef idx="3">
+            <a:schemeClr val="accent1"/>
+          </a:fillRef>
+          <a:effectRef idx="2">
+            <a:schemeClr val="accent1"/>
+          </a:effectRef>
+          <a:fontRef idx="minor">
+            <a:schemeClr val="lt1"/>
+          </a:fontRef>
+        </p:style>
+        <p:txBody>
+          <a:bodyPr rtlCol="0" anchor="ctr"/>
+          <a:lstStyle/>
+          <a:p>
+            <a:pPr algn="ctr"/>
+          </a:p>
+        </p:txBody>
+      </p:sp>
+      <p:sp>
+        <p:nvSpPr>
+          <p:cNvPr id="31" name="TextBox 30"/>
+          <p:cNvSpPr txBox="1"/>
+          <p:nvPr/>
+        </p:nvSpPr>
+        <p:spPr>
+          <a:xfrm>
+            <a:off x="10305288" y="4599432"/>
+            <a:ext cx="1097280" cy="365760"/>
+          </a:xfrm>
+          <a:prstGeom prst="rect">
+            <a:avLst/>
+          </a:prstGeom>
+          <a:noFill/>
+        </p:spPr>
+        <p:txBody>
+          <a:bodyPr wrap="square">
+            <a:spAutoFit/>
+          </a:bodyPr>
+          <a:lstStyle/>
+          <a:p>
+            <a:pPr algn="ctr">
+              <a:lnSpc>
+                <a:spcPct val="125000"/>
+              </a:lnSpc>
+            </a:pPr>
+            <a:r>
+              <a:rPr sz="1200" b="0">
+                <a:solidFill>
+                  <a:srgbClr val="FFFFFF"/>
+                </a:solidFill>
+                <a:latin typeface="微软雅黑"/>
+                <a:ea typeface="微软雅黑"/>
+                <a:cs typeface="微软雅黑"/>
+              </a:rPr>
+              <a:t>合规审计</a:t>
+            </a:r>
+          </a:p>
+        </p:txBody>
+      </p:sp>
+      <p:sp>
+        <p:nvSpPr>
+          <p:cNvPr id="32" name="Rounded Rectangle 31"/>
+          <p:cNvSpPr/>
+          <p:nvPr/>
+        </p:nvSpPr>
+        <p:spPr>
+          <a:xfrm>
+            <a:off x="868680" y="5349240"/>
+            <a:ext cx="10424160" cy="914400"/>
+          </a:xfrm>
+          <a:prstGeom prst="roundRect">
+            <a:avLst/>
+          </a:prstGeom>
+          <a:solidFill>
+            <a:srgbClr val="E8EEF9"/>
+          </a:solidFill>
+          <a:ln>
+            <a:noFill/>
+          </a:ln>
+          <a:effectLst/>
+        </p:spPr>
+        <p:style>
+          <a:lnRef idx="1">
+            <a:schemeClr val="accent1"/>
+          </a:lnRef>
+          <a:fillRef idx="3">
+            <a:schemeClr val="accent1"/>
+          </a:fillRef>
+          <a:effectRef idx="2">
+            <a:schemeClr val="accent1"/>
+          </a:effectRef>
+          <a:fontRef idx="minor">
+            <a:schemeClr val="lt1"/>
+          </a:fontRef>
+        </p:style>
+        <p:txBody>
+          <a:bodyPr rtlCol="0" anchor="ctr"/>
+          <a:lstStyle/>
+          <a:p>
+            <a:pPr algn="ctr"/>
+          </a:p>
+        </p:txBody>
+      </p:sp>
+      <p:sp>
+        <p:nvSpPr>
+          <p:cNvPr id="33" name="TextBox 32"/>
+          <p:cNvSpPr txBox="1"/>
+          <p:nvPr/>
+        </p:nvSpPr>
+        <p:spPr>
+          <a:xfrm>
+            <a:off x="1097280" y="5504688"/>
+            <a:ext cx="10058400" cy="640080"/>
+          </a:xfrm>
+          <a:prstGeom prst="rect">
+            <a:avLst/>
+          </a:prstGeom>
+          <a:noFill/>
+        </p:spPr>
+        <p:txBody>
+          <a:bodyPr wrap="square">
+            <a:spAutoFit/>
+          </a:bodyPr>
+          <a:lstStyle/>
+          <a:p>
+            <a:pPr algn="ctr">
+              <a:lnSpc>
+                <a:spcPct val="125000"/>
+              </a:lnSpc>
+            </a:pPr>
+            <a:r>
+              <a:rPr sz="1800" b="0">
+                <a:solidFill>
+                  <a:srgbClr val="1B2233"/>
+                </a:solidFill>
+                <a:latin typeface="微软雅黑"/>
+                <a:ea typeface="微软雅黑"/>
+                <a:cs typeface="微软雅黑"/>
+              </a:rPr>
+              <a:t>本地数据库 SQLite：约 50 张表 · 手机号 AES-256-GCM 加密 · 全流程留痕</a:t>
+            </a:r>
+          </a:p>
+        </p:txBody>
+      </p:sp>
+      <p:sp>
+        <p:nvSpPr>
+          <p:cNvPr id="34" name="Rectangle 33"/>
+          <p:cNvSpPr/>
+          <p:nvPr/>
+        </p:nvSpPr>
+        <p:spPr>
+          <a:xfrm>
+            <a:off x="548640" y="6510528"/>
+            <a:ext cx="10881360" cy="9525"/>
+          </a:xfrm>
+          <a:prstGeom prst="rect">
+            <a:avLst/>
+          </a:prstGeom>
+          <a:solidFill>
+            <a:srgbClr val="DDE3EE"/>
+          </a:solidFill>
+          <a:ln>
+            <a:noFill/>
+          </a:ln>
+          <a:effectLst/>
+        </p:spPr>
+        <p:style>
+          <a:lnRef idx="1">
+            <a:schemeClr val="accent1"/>
+          </a:lnRef>
+          <a:fillRef idx="3">
+            <a:schemeClr val="accent1"/>
+          </a:fillRef>
+          <a:effectRef idx="2">
+            <a:schemeClr val="accent1"/>
+          </a:effectRef>
+          <a:fontRef idx="minor">
+            <a:schemeClr val="lt1"/>
+          </a:fontRef>
+        </p:style>
+        <p:txBody>
+          <a:bodyPr rtlCol="0" anchor="ctr"/>
+          <a:lstStyle/>
+          <a:p>
+            <a:pPr algn="ctr"/>
+          </a:p>
+        </p:txBody>
+      </p:sp>
+      <p:sp>
+        <p:nvSpPr>
+          <p:cNvPr id="35" name="TextBox 34"/>
+          <p:cNvSpPr txBox="1"/>
+          <p:nvPr/>
+        </p:nvSpPr>
+        <p:spPr>
+          <a:xfrm>
+            <a:off x="10607040" y="6565392"/>
+            <a:ext cx="822960" cy="274320"/>
+          </a:xfrm>
+          <a:prstGeom prst="rect">
+            <a:avLst/>
+          </a:prstGeom>
+          <a:noFill/>
+        </p:spPr>
+        <p:txBody>
+          <a:bodyPr wrap="square">
+            <a:spAutoFit/>
+          </a:bodyPr>
+          <a:lstStyle/>
+          <a:p>
+            <a:pPr algn="r">
+              <a:lnSpc>
+                <a:spcPct val="125000"/>
+              </a:lnSpc>
+            </a:pPr>
+            <a:r>
+              <a:rPr sz="1100" b="0">
+                <a:solidFill>
+                  <a:srgbClr val="6B7485"/>
+                </a:solidFill>
+                <a:latin typeface="微软雅黑"/>
+                <a:ea typeface="微软雅黑"/>
+                <a:cs typeface="微软雅黑"/>
+              </a:rPr>
+              <a:t>14 / 15</a:t>
+            </a:r>
+          </a:p>
+        </p:txBody>
+      </p:sp>
+    </p:spTree>
+  </p:cSld>
+  <p:clrMapOvr>
+    <a:masterClrMapping/>
+  </p:clrMapOvr>
+</p:sld>
+</file>
+
+<file path=ppt/slides/slide15.xml><?xml version="1.0" encoding="utf-8"?>
+<p:sld xmlns:a="http://schemas.openxmlformats.org/drawingml/2006/main" xmlns:p="http://schemas.openxmlformats.org/presentationml/2006/main" xmlns:r="http://schemas.openxmlformats.org/officeDocument/2006/relationships">
+  <p:cSld>
+    <p:spTree>
+      <p:nvGrpSpPr>
+        <p:cNvPr id="1" name=""/>
+        <p:cNvGrpSpPr/>
+        <p:nvPr/>
+      </p:nvGrpSpPr>
+      <p:grpSpPr/>
+      <p:sp>
+        <p:nvSpPr>
+          <p:cNvPr id="2" name="Rounded Rectangle 1"/>
+          <p:cNvSpPr/>
+          <p:nvPr/>
+        </p:nvSpPr>
+        <p:spPr>
+          <a:xfrm>
+            <a:off x="548640" y="502920"/>
+            <a:ext cx="128016" cy="566928"/>
+          </a:xfrm>
+          <a:prstGeom prst="roundRect">
+            <a:avLst/>
+          </a:prstGeom>
+          <a:solidFill>
+            <a:srgbClr val="FF8C42"/>
+          </a:solidFill>
+          <a:ln>
+            <a:noFill/>
+          </a:ln>
+          <a:effectLst/>
+        </p:spPr>
+        <p:style>
+          <a:lnRef idx="1">
+            <a:schemeClr val="accent1"/>
+          </a:lnRef>
+          <a:fillRef idx="3">
+            <a:schemeClr val="accent1"/>
+          </a:fillRef>
+          <a:effectRef idx="2">
+            <a:schemeClr val="accent1"/>
+          </a:effectRef>
+          <a:fontRef idx="minor">
+            <a:schemeClr val="lt1"/>
+          </a:fontRef>
+        </p:style>
+        <p:txBody>
+          <a:bodyPr rtlCol="0" anchor="ctr"/>
+          <a:lstStyle/>
+          <a:p>
+            <a:pPr algn="ctr"/>
+          </a:p>
+        </p:txBody>
+      </p:sp>
+      <p:sp>
+        <p:nvSpPr>
+          <p:cNvPr id="3" name="TextBox 2"/>
+          <p:cNvSpPr txBox="1"/>
+          <p:nvPr/>
+        </p:nvSpPr>
+        <p:spPr>
+          <a:xfrm>
+            <a:off x="868680" y="457200"/>
+            <a:ext cx="10789920" cy="822960"/>
+          </a:xfrm>
+          <a:prstGeom prst="rect">
+            <a:avLst/>
+          </a:prstGeom>
+          <a:noFill/>
+        </p:spPr>
+        <p:txBody>
+          <a:bodyPr wrap="square">
+            <a:spAutoFit/>
+          </a:bodyPr>
+          <a:lstStyle/>
+          <a:p>
+            <a:pPr algn="l">
+              <a:lnSpc>
+                <a:spcPct val="125000"/>
+              </a:lnSpc>
+            </a:pPr>
+            <a:r>
+              <a:rPr sz="4000" b="1">
+                <a:solidFill>
+                  <a:srgbClr val="122A51"/>
+                </a:solidFill>
+                <a:latin typeface="微软雅黑"/>
+                <a:ea typeface="微软雅黑"/>
+                <a:cs typeface="微软雅黑"/>
+              </a:rPr>
+              <a:t>附录 · 最常被问的四个问题</a:t>
+            </a:r>
+          </a:p>
+        </p:txBody>
+      </p:sp>
+      <p:sp>
+        <p:nvSpPr>
+          <p:cNvPr id="4" name="Rounded Rectangle 3"/>
+          <p:cNvSpPr/>
+          <p:nvPr/>
+        </p:nvSpPr>
+        <p:spPr>
+          <a:xfrm>
+            <a:off x="868680" y="1691640"/>
+            <a:ext cx="10424160" cy="1024128"/>
+          </a:xfrm>
+          <a:prstGeom prst="roundRect">
+            <a:avLst/>
+          </a:prstGeom>
+          <a:solidFill>
+            <a:srgbClr val="F2F5FB"/>
+          </a:solidFill>
+          <a:ln>
+            <a:noFill/>
+          </a:ln>
+          <a:effectLst/>
+        </p:spPr>
+        <p:style>
+          <a:lnRef idx="1">
+            <a:schemeClr val="accent1"/>
+          </a:lnRef>
+          <a:fillRef idx="3">
+            <a:schemeClr val="accent1"/>
+          </a:fillRef>
+          <a:effectRef idx="2">
+            <a:schemeClr val="accent1"/>
+          </a:effectRef>
+          <a:fontRef idx="minor">
+            <a:schemeClr val="lt1"/>
+          </a:fontRef>
+        </p:style>
+        <p:txBody>
+          <a:bodyPr rtlCol="0" anchor="ctr"/>
+          <a:lstStyle/>
+          <a:p>
+            <a:pPr algn="ctr"/>
+          </a:p>
+        </p:txBody>
+      </p:sp>
+      <p:sp>
+        <p:nvSpPr>
+          <p:cNvPr id="5" name="TextBox 4"/>
+          <p:cNvSpPr txBox="1"/>
+          <p:nvPr/>
+        </p:nvSpPr>
+        <p:spPr>
+          <a:xfrm>
+            <a:off x="1097280" y="1783080"/>
+            <a:ext cx="10058400" cy="411480"/>
+          </a:xfrm>
+          <a:prstGeom prst="rect">
+            <a:avLst/>
+          </a:prstGeom>
+          <a:noFill/>
+        </p:spPr>
+        <p:txBody>
+          <a:bodyPr wrap="square">
+            <a:spAutoFit/>
+          </a:bodyPr>
+          <a:lstStyle/>
+          <a:p>
+            <a:pPr algn="l">
+              <a:lnSpc>
+                <a:spcPct val="125000"/>
+              </a:lnSpc>
+            </a:pPr>
+            <a:r>
+              <a:rPr sz="2000" b="1">
+                <a:solidFill>
+                  <a:srgbClr val="122A51"/>
+                </a:solidFill>
+                <a:latin typeface="微软雅黑"/>
+                <a:ea typeface="微软雅黑"/>
+                <a:cs typeface="微软雅黑"/>
+              </a:rPr>
+              <a:t>这算真多智能体吗？</a:t>
+            </a:r>
+          </a:p>
+        </p:txBody>
+      </p:sp>
+      <p:sp>
+        <p:nvSpPr>
+          <p:cNvPr id="6" name="TextBox 5"/>
+          <p:cNvSpPr txBox="1"/>
+          <p:nvPr/>
+        </p:nvSpPr>
+        <p:spPr>
+          <a:xfrm>
+            <a:off x="1097280" y="2221992"/>
+            <a:ext cx="10058400" cy="457200"/>
+          </a:xfrm>
+          <a:prstGeom prst="rect">
+            <a:avLst/>
+          </a:prstGeom>
+          <a:noFill/>
+        </p:spPr>
+        <p:txBody>
+          <a:bodyPr wrap="square">
+            <a:spAutoFit/>
+          </a:bodyPr>
+          <a:lstStyle/>
+          <a:p>
+            <a:pPr algn="l">
+              <a:lnSpc>
+                <a:spcPct val="125000"/>
+              </a:lnSpc>
+            </a:pPr>
+            <a:r>
+              <a:rPr sz="1500" b="0">
+                <a:solidFill>
+                  <a:srgbClr val="1B2233"/>
+                </a:solidFill>
+                <a:latin typeface="微软雅黑"/>
+                <a:ea typeface="微软雅黑"/>
+                <a:cs typeface="微软雅黑"/>
+              </a:rPr>
+              <a:t>角色之间靠黑板消息真来往，联动是运行时决定的；内核是规则驱动，不是全自主大模型智能体。</a:t>
+            </a:r>
+          </a:p>
+        </p:txBody>
+      </p:sp>
+      <p:sp>
+        <p:nvSpPr>
+          <p:cNvPr id="7" name="Rounded Rectangle 6"/>
+          <p:cNvSpPr/>
+          <p:nvPr/>
+        </p:nvSpPr>
+        <p:spPr>
+          <a:xfrm>
+            <a:off x="868680" y="2898648"/>
+            <a:ext cx="10424160" cy="1024128"/>
+          </a:xfrm>
+          <a:prstGeom prst="roundRect">
+            <a:avLst/>
+          </a:prstGeom>
+          <a:solidFill>
+            <a:srgbClr val="FFFFFF"/>
+          </a:solidFill>
+          <a:ln>
+            <a:noFill/>
+          </a:ln>
+          <a:effectLst/>
+        </p:spPr>
+        <p:style>
+          <a:lnRef idx="1">
+            <a:schemeClr val="accent1"/>
+          </a:lnRef>
+          <a:fillRef idx="3">
+            <a:schemeClr val="accent1"/>
+          </a:fillRef>
+          <a:effectRef idx="2">
+            <a:schemeClr val="accent1"/>
+          </a:effectRef>
+          <a:fontRef idx="minor">
+            <a:schemeClr val="lt1"/>
+          </a:fontRef>
+        </p:style>
+        <p:txBody>
+          <a:bodyPr rtlCol="0" anchor="ctr"/>
+          <a:lstStyle/>
+          <a:p>
+            <a:pPr algn="ctr"/>
+          </a:p>
+        </p:txBody>
+      </p:sp>
+      <p:sp>
+        <p:nvSpPr>
+          <p:cNvPr id="8" name="TextBox 7"/>
+          <p:cNvSpPr txBox="1"/>
+          <p:nvPr/>
+        </p:nvSpPr>
+        <p:spPr>
+          <a:xfrm>
+            <a:off x="1097280" y="2990088"/>
+            <a:ext cx="10058400" cy="411480"/>
+          </a:xfrm>
+          <a:prstGeom prst="rect">
+            <a:avLst/>
+          </a:prstGeom>
+          <a:noFill/>
+        </p:spPr>
+        <p:txBody>
+          <a:bodyPr wrap="square">
+            <a:spAutoFit/>
+          </a:bodyPr>
+          <a:lstStyle/>
+          <a:p>
+            <a:pPr algn="l">
+              <a:lnSpc>
+                <a:spcPct val="125000"/>
+              </a:lnSpc>
+            </a:pPr>
+            <a:r>
+              <a:rPr sz="2000" b="1">
+                <a:solidFill>
+                  <a:srgbClr val="122A51"/>
+                </a:solidFill>
+                <a:latin typeface="微软雅黑"/>
+                <a:ea typeface="微软雅黑"/>
+                <a:cs typeface="微软雅黑"/>
+              </a:rPr>
+              <a:t>数据是真的吗？</a:t>
+            </a:r>
+          </a:p>
+        </p:txBody>
+      </p:sp>
+      <p:sp>
+        <p:nvSpPr>
+          <p:cNvPr id="9" name="TextBox 8"/>
+          <p:cNvSpPr txBox="1"/>
+          <p:nvPr/>
+        </p:nvSpPr>
+        <p:spPr>
+          <a:xfrm>
+            <a:off x="1097280" y="3429000"/>
+            <a:ext cx="10058400" cy="457200"/>
+          </a:xfrm>
+          <a:prstGeom prst="rect">
+            <a:avLst/>
+          </a:prstGeom>
+          <a:noFill/>
+        </p:spPr>
+        <p:txBody>
+          <a:bodyPr wrap="square">
+            <a:spAutoFit/>
+          </a:bodyPr>
+          <a:lstStyle/>
+          <a:p>
+            <a:pPr algn="l">
+              <a:lnSpc>
+                <a:spcPct val="125000"/>
+              </a:lnSpc>
+            </a:pPr>
+            <a:r>
+              <a:rPr sz="1500" b="0">
+                <a:solidFill>
+                  <a:srgbClr val="1B2233"/>
+                </a:solidFill>
+                <a:latin typeface="微软雅黑"/>
+                <a:ea typeface="微软雅黑"/>
+                <a:cs typeface="微软雅黑"/>
+              </a:rPr>
+              <a:t>全部是程序生成的演示数据，不含真实居民信息；手机号加密存储、展示脱敏。</a:t>
+            </a:r>
+          </a:p>
+        </p:txBody>
+      </p:sp>
+      <p:sp>
+        <p:nvSpPr>
+          <p:cNvPr id="10" name="Rounded Rectangle 9"/>
+          <p:cNvSpPr/>
+          <p:nvPr/>
+        </p:nvSpPr>
+        <p:spPr>
+          <a:xfrm>
+            <a:off x="868680" y="4105656"/>
+            <a:ext cx="10424160" cy="1024128"/>
+          </a:xfrm>
+          <a:prstGeom prst="roundRect">
+            <a:avLst/>
+          </a:prstGeom>
+          <a:solidFill>
+            <a:srgbClr val="F2F5FB"/>
+          </a:solidFill>
+          <a:ln>
+            <a:noFill/>
+          </a:ln>
+          <a:effectLst/>
+        </p:spPr>
+        <p:style>
+          <a:lnRef idx="1">
+            <a:schemeClr val="accent1"/>
+          </a:lnRef>
+          <a:fillRef idx="3">
+            <a:schemeClr val="accent1"/>
+          </a:fillRef>
+          <a:effectRef idx="2">
+            <a:schemeClr val="accent1"/>
+          </a:effectRef>
+          <a:fontRef idx="minor">
+            <a:schemeClr val="lt1"/>
+          </a:fontRef>
+        </p:style>
+        <p:txBody>
+          <a:bodyPr rtlCol="0" anchor="ctr"/>
+          <a:lstStyle/>
+          <a:p>
+            <a:pPr algn="ctr"/>
+          </a:p>
+        </p:txBody>
+      </p:sp>
+      <p:sp>
+        <p:nvSpPr>
+          <p:cNvPr id="11" name="TextBox 10"/>
+          <p:cNvSpPr txBox="1"/>
+          <p:nvPr/>
+        </p:nvSpPr>
+        <p:spPr>
+          <a:xfrm>
+            <a:off x="1097280" y="4197096"/>
+            <a:ext cx="10058400" cy="411480"/>
+          </a:xfrm>
+          <a:prstGeom prst="rect">
+            <a:avLst/>
+          </a:prstGeom>
+          <a:noFill/>
+        </p:spPr>
+        <p:txBody>
+          <a:bodyPr wrap="square">
+            <a:spAutoFit/>
+          </a:bodyPr>
+          <a:lstStyle/>
+          <a:p>
+            <a:pPr algn="l">
+              <a:lnSpc>
+                <a:spcPct val="125000"/>
+              </a:lnSpc>
+            </a:pPr>
+            <a:r>
+              <a:rPr sz="2000" b="1">
+                <a:solidFill>
+                  <a:srgbClr val="122A51"/>
+                </a:solidFill>
+                <a:latin typeface="微软雅黑"/>
+                <a:ea typeface="微软雅黑"/>
+                <a:cs typeface="微软雅黑"/>
+              </a:rPr>
+              <a:t>有人真的用过吗？</a:t>
+            </a:r>
+          </a:p>
+        </p:txBody>
+      </p:sp>
+      <p:sp>
+        <p:nvSpPr>
+          <p:cNvPr id="12" name="TextBox 11"/>
+          <p:cNvSpPr txBox="1"/>
+          <p:nvPr/>
+        </p:nvSpPr>
+        <p:spPr>
+          <a:xfrm>
+            <a:off x="1097280" y="4636008"/>
+            <a:ext cx="10058400" cy="457200"/>
+          </a:xfrm>
+          <a:prstGeom prst="rect">
+            <a:avLst/>
+          </a:prstGeom>
+          <a:noFill/>
+        </p:spPr>
+        <p:txBody>
+          <a:bodyPr wrap="square">
+            <a:spAutoFit/>
+          </a:bodyPr>
+          <a:lstStyle/>
+          <a:p>
+            <a:pPr algn="l">
+              <a:lnSpc>
+                <a:spcPct val="125000"/>
+              </a:lnSpc>
+            </a:pPr>
+            <a:r>
+              <a:rPr sz="1500" b="0">
+                <a:solidFill>
+                  <a:srgbClr val="1B2233"/>
+                </a:solidFill>
+                <a:latin typeface="微软雅黑"/>
+                <a:ea typeface="微软雅黑"/>
+                <a:cs typeface="微软雅黑"/>
+              </a:rPr>
+              <a:t>没有。还没做真实街道试点，也没有运营数据，这是下一步。</a:t>
+            </a:r>
+          </a:p>
+        </p:txBody>
+      </p:sp>
+      <p:sp>
+        <p:nvSpPr>
+          <p:cNvPr id="13" name="Rounded Rectangle 12"/>
+          <p:cNvSpPr/>
+          <p:nvPr/>
+        </p:nvSpPr>
+        <p:spPr>
+          <a:xfrm>
+            <a:off x="868680" y="5312664"/>
+            <a:ext cx="10424160" cy="1024128"/>
+          </a:xfrm>
+          <a:prstGeom prst="roundRect">
+            <a:avLst/>
+          </a:prstGeom>
+          <a:solidFill>
+            <a:srgbClr val="FFFFFF"/>
+          </a:solidFill>
+          <a:ln>
+            <a:noFill/>
+          </a:ln>
+          <a:effectLst/>
+        </p:spPr>
+        <p:style>
+          <a:lnRef idx="1">
+            <a:schemeClr val="accent1"/>
+          </a:lnRef>
+          <a:fillRef idx="3">
+            <a:schemeClr val="accent1"/>
+          </a:fillRef>
+          <a:effectRef idx="2">
+            <a:schemeClr val="accent1"/>
+          </a:effectRef>
+          <a:fontRef idx="minor">
+            <a:schemeClr val="lt1"/>
+          </a:fontRef>
+        </p:style>
+        <p:txBody>
+          <a:bodyPr rtlCol="0" anchor="ctr"/>
+          <a:lstStyle/>
+          <a:p>
+            <a:pPr algn="ctr"/>
+          </a:p>
+        </p:txBody>
+      </p:sp>
+      <p:sp>
+        <p:nvSpPr>
+          <p:cNvPr id="14" name="TextBox 13"/>
+          <p:cNvSpPr txBox="1"/>
+          <p:nvPr/>
+        </p:nvSpPr>
+        <p:spPr>
+          <a:xfrm>
+            <a:off x="1097280" y="5404104"/>
+            <a:ext cx="10058400" cy="411480"/>
+          </a:xfrm>
+          <a:prstGeom prst="rect">
+            <a:avLst/>
+          </a:prstGeom>
+          <a:noFill/>
+        </p:spPr>
+        <p:txBody>
+          <a:bodyPr wrap="square">
+            <a:spAutoFit/>
+          </a:bodyPr>
+          <a:lstStyle/>
+          <a:p>
+            <a:pPr algn="l">
+              <a:lnSpc>
+                <a:spcPct val="125000"/>
+              </a:lnSpc>
+            </a:pPr>
+            <a:r>
+              <a:rPr sz="2000" b="1">
+                <a:solidFill>
+                  <a:srgbClr val="122A51"/>
+                </a:solidFill>
+                <a:latin typeface="微软雅黑"/>
+                <a:ea typeface="微软雅黑"/>
+                <a:cs typeface="微软雅黑"/>
+              </a:rPr>
+              <a:t>商业模式想清楚了吗？</a:t>
+            </a:r>
+          </a:p>
+        </p:txBody>
+      </p:sp>
+      <p:sp>
+        <p:nvSpPr>
+          <p:cNvPr id="15" name="TextBox 14"/>
+          <p:cNvSpPr txBox="1"/>
+          <p:nvPr/>
+        </p:nvSpPr>
+        <p:spPr>
+          <a:xfrm>
+            <a:off x="1097280" y="5843016"/>
+            <a:ext cx="10058400" cy="457200"/>
+          </a:xfrm>
+          <a:prstGeom prst="rect">
+            <a:avLst/>
+          </a:prstGeom>
+          <a:noFill/>
+        </p:spPr>
+        <p:txBody>
+          <a:bodyPr wrap="square">
+            <a:spAutoFit/>
+          </a:bodyPr>
+          <a:lstStyle/>
+          <a:p>
+            <a:pPr algn="l">
+              <a:lnSpc>
+                <a:spcPct val="125000"/>
+              </a:lnSpc>
+            </a:pPr>
+            <a:r>
+              <a:rPr sz="1500" b="0">
+                <a:solidFill>
+                  <a:srgbClr val="1B2233"/>
+                </a:solidFill>
+                <a:latin typeface="微软雅黑"/>
+                <a:ea typeface="微软雅黑"/>
+                <a:cs typeface="微软雅黑"/>
+              </a:rPr>
+              <a:t>没有。可能是政府购买服务，但付费方和定价完全没有验证过。</a:t>
+            </a:r>
+          </a:p>
+        </p:txBody>
+      </p:sp>
+      <p:sp>
+        <p:nvSpPr>
+          <p:cNvPr id="16" name="Rectangle 15"/>
+          <p:cNvSpPr/>
+          <p:nvPr/>
+        </p:nvSpPr>
+        <p:spPr>
+          <a:xfrm>
+            <a:off x="548640" y="6510528"/>
+            <a:ext cx="10881360" cy="9525"/>
+          </a:xfrm>
+          <a:prstGeom prst="rect">
+            <a:avLst/>
+          </a:prstGeom>
+          <a:solidFill>
+            <a:srgbClr val="DDE3EE"/>
+          </a:solidFill>
+          <a:ln>
+            <a:noFill/>
+          </a:ln>
+          <a:effectLst/>
+        </p:spPr>
+        <p:style>
+          <a:lnRef idx="1">
+            <a:schemeClr val="accent1"/>
+          </a:lnRef>
+          <a:fillRef idx="3">
+            <a:schemeClr val="accent1"/>
+          </a:fillRef>
+          <a:effectRef idx="2">
+            <a:schemeClr val="accent1"/>
+          </a:effectRef>
+          <a:fontRef idx="minor">
+            <a:schemeClr val="lt1"/>
+          </a:fontRef>
+        </p:style>
+        <p:txBody>
+          <a:bodyPr rtlCol="0" anchor="ctr"/>
+          <a:lstStyle/>
+          <a:p>
+            <a:pPr algn="ctr"/>
+          </a:p>
+        </p:txBody>
+      </p:sp>
+      <p:sp>
+        <p:nvSpPr>
+          <p:cNvPr id="17" name="TextBox 16"/>
+          <p:cNvSpPr txBox="1"/>
+          <p:nvPr/>
+        </p:nvSpPr>
+        <p:spPr>
+          <a:xfrm>
+            <a:off x="10607040" y="6565392"/>
+            <a:ext cx="822960" cy="274320"/>
+          </a:xfrm>
+          <a:prstGeom prst="rect">
+            <a:avLst/>
+          </a:prstGeom>
+          <a:noFill/>
+        </p:spPr>
+        <p:txBody>
+          <a:bodyPr wrap="square">
+            <a:spAutoFit/>
+          </a:bodyPr>
+          <a:lstStyle/>
+          <a:p>
+            <a:pPr algn="r">
+              <a:lnSpc>
+                <a:spcPct val="125000"/>
+              </a:lnSpc>
+            </a:pPr>
+            <a:r>
+              <a:rPr sz="1100" b="0">
+                <a:solidFill>
+                  <a:srgbClr val="6B7485"/>
+                </a:solidFill>
+                <a:latin typeface="微软雅黑"/>
+                <a:ea typeface="微软雅黑"/>
+                <a:cs typeface="微软雅黑"/>
+              </a:rPr>
+              <a:t>15 / 15</a:t>
+            </a:r>
+          </a:p>
+        </p:txBody>
+      </p:sp>
+    </p:spTree>
+  </p:cSld>
+  <p:clrMapOvr>
+    <a:masterClrMapping/>
+  </p:clrMapOvr>
+</p:sld>
+</file>
+
 <file path=ppt/slides/slide2.xml><?xml version="1.0" encoding="utf-8"?>
 <p:sld xmlns:a="http://schemas.openxmlformats.org/drawingml/2006/main" xmlns:p="http://schemas.openxmlformats.org/presentationml/2006/main" xmlns:r="http://schemas.openxmlformats.org/officeDocument/2006/relationships">
   <p:cSld>
@@ -5618,14 +9489,58 @@
       </p:pic>
       <p:sp>
         <p:nvSpPr>
-          <p:cNvPr id="14" name="TextBox 13"/>
+          <p:cNvPr id="14" name="Rectangle 13"/>
+          <p:cNvSpPr/>
+          <p:nvPr/>
+        </p:nvSpPr>
+        <p:spPr>
+          <a:xfrm>
+            <a:off x="548640" y="6510528"/>
+            <a:ext cx="10881360" cy="9525"/>
+          </a:xfrm>
+          <a:prstGeom prst="rect">
+            <a:avLst/>
+          </a:prstGeom>
+          <a:solidFill>
+            <a:srgbClr val="DDE3EE"/>
+          </a:solidFill>
+          <a:ln>
+            <a:noFill/>
+          </a:ln>
+          <a:effectLst/>
+        </p:spPr>
+        <p:style>
+          <a:lnRef idx="1">
+            <a:schemeClr val="accent1"/>
+          </a:lnRef>
+          <a:fillRef idx="3">
+            <a:schemeClr val="accent1"/>
+          </a:fillRef>
+          <a:effectRef idx="2">
+            <a:schemeClr val="accent1"/>
+          </a:effectRef>
+          <a:fontRef idx="minor">
+            <a:schemeClr val="lt1"/>
+          </a:fontRef>
+        </p:style>
+        <p:txBody>
+          <a:bodyPr rtlCol="0" anchor="ctr"/>
+          <a:lstStyle/>
+          <a:p>
+            <a:pPr algn="ctr"/>
+          </a:p>
+        </p:txBody>
+      </p:sp>
+      <p:sp>
+        <p:nvSpPr>
+          <p:cNvPr id="15" name="TextBox 14"/>
           <p:cNvSpPr txBox="1"/>
           <p:nvPr/>
         </p:nvSpPr>
         <p:spPr>
           <a:xfrm>
-            <a:off x="11064240" y="6355080"/>
-            <a:ext cx="914400" cy="365760"/>
+            <a:off x="548640" y="6565392"/>
+            <a:ext cx="7315200" cy="274320"/>
           </a:xfrm>
           <a:prstGeom prst="rect">
             <a:avLst/>
@@ -5638,13 +9553,54 @@
           </a:bodyPr>
           <a:lstStyle/>
           <a:p>
+            <a:pPr algn="l">
+              <a:lnSpc>
+                <a:spcPct val="125000"/>
+              </a:lnSpc>
+            </a:pPr>
+            <a:r>
+              <a:rPr sz="1100" b="0">
+                <a:solidFill>
+                  <a:srgbClr val="6B7485"/>
+                </a:solidFill>
+                <a:latin typeface="微软雅黑"/>
+                <a:ea typeface="微软雅黑"/>
+                <a:cs typeface="微软雅黑"/>
+              </a:rPr>
+              <a:t>社区先知 CommunityInsight</a:t>
+            </a:r>
+          </a:p>
+        </p:txBody>
+      </p:sp>
+      <p:sp>
+        <p:nvSpPr>
+          <p:cNvPr id="16" name="TextBox 15"/>
+          <p:cNvSpPr txBox="1"/>
+          <p:nvPr/>
+        </p:nvSpPr>
+        <p:spPr>
+          <a:xfrm>
+            <a:off x="10607040" y="6565392"/>
+            <a:ext cx="822960" cy="274320"/>
+          </a:xfrm>
+          <a:prstGeom prst="rect">
+            <a:avLst/>
+          </a:prstGeom>
+          <a:noFill/>
+        </p:spPr>
+        <p:txBody>
+          <a:bodyPr wrap="square">
+            <a:spAutoFit/>
+          </a:bodyPr>
+          <a:lstStyle/>
+          <a:p>
             <a:pPr algn="r">
               <a:lnSpc>
                 <a:spcPct val="125000"/>
               </a:lnSpc>
             </a:pPr>
             <a:r>
-              <a:rPr sz="1200" b="0">
+              <a:rPr sz="1100" b="0">
                 <a:solidFill>
                   <a:srgbClr val="6B7485"/>
                 </a:solidFill>
@@ -5768,8 +9724,8 @@
         </p:nvSpPr>
         <p:spPr>
           <a:xfrm>
-            <a:off x="868680" y="1691640"/>
-            <a:ext cx="2103120" cy="841248"/>
+            <a:off x="868680" y="1645920"/>
+            <a:ext cx="2103120" cy="786384"/>
           </a:xfrm>
           <a:prstGeom prst="roundRect">
             <a:avLst/>
@@ -5812,8 +9768,8 @@
         </p:nvSpPr>
         <p:spPr>
           <a:xfrm>
-            <a:off x="914400" y="1892807"/>
-            <a:ext cx="2011680" cy="548640"/>
+            <a:off x="914400" y="1810512"/>
+            <a:ext cx="2011680" cy="502920"/>
           </a:xfrm>
           <a:prstGeom prst="rect">
             <a:avLst/>
@@ -5832,7 +9788,7 @@
               </a:lnSpc>
             </a:pPr>
             <a:r>
-              <a:rPr sz="2000" b="0">
+              <a:rPr sz="1800" b="0">
                 <a:solidFill>
                   <a:srgbClr val="1B2233"/>
                 </a:solidFill>
@@ -5853,8 +9809,8 @@
         </p:nvSpPr>
         <p:spPr>
           <a:xfrm>
-            <a:off x="3200400" y="1691640"/>
-            <a:ext cx="2103120" cy="841248"/>
+            <a:off x="3200400" y="1645920"/>
+            <a:ext cx="2103120" cy="786384"/>
           </a:xfrm>
           <a:prstGeom prst="roundRect">
             <a:avLst/>
@@ -5897,8 +9853,8 @@
         </p:nvSpPr>
         <p:spPr>
           <a:xfrm>
-            <a:off x="3246120" y="1892807"/>
-            <a:ext cx="2011680" cy="548640"/>
+            <a:off x="3246120" y="1810512"/>
+            <a:ext cx="2011680" cy="502920"/>
           </a:xfrm>
           <a:prstGeom prst="rect">
             <a:avLst/>
@@ -5917,7 +9873,7 @@
               </a:lnSpc>
             </a:pPr>
             <a:r>
-              <a:rPr sz="2000" b="0">
+              <a:rPr sz="1800" b="0">
                 <a:solidFill>
                   <a:srgbClr val="1B2233"/>
                 </a:solidFill>
@@ -5938,8 +9894,8 @@
         </p:nvSpPr>
         <p:spPr>
           <a:xfrm>
-            <a:off x="5532120" y="1691640"/>
-            <a:ext cx="2103120" cy="841248"/>
+            <a:off x="5532120" y="1645920"/>
+            <a:ext cx="2103120" cy="786384"/>
           </a:xfrm>
           <a:prstGeom prst="roundRect">
             <a:avLst/>
@@ -5982,8 +9938,8 @@
         </p:nvSpPr>
         <p:spPr>
           <a:xfrm>
-            <a:off x="5577840" y="1892807"/>
-            <a:ext cx="2011680" cy="548640"/>
+            <a:off x="5577840" y="1810512"/>
+            <a:ext cx="2011680" cy="502920"/>
           </a:xfrm>
           <a:prstGeom prst="rect">
             <a:avLst/>
@@ -6002,7 +9958,7 @@
               </a:lnSpc>
             </a:pPr>
             <a:r>
-              <a:rPr sz="2000" b="0">
+              <a:rPr sz="1800" b="0">
                 <a:solidFill>
                   <a:srgbClr val="1B2233"/>
                 </a:solidFill>
@@ -6023,8 +9979,8 @@
         </p:nvSpPr>
         <p:spPr>
           <a:xfrm>
-            <a:off x="868680" y="2715768"/>
-            <a:ext cx="2103120" cy="841248"/>
+            <a:off x="868680" y="2578608"/>
+            <a:ext cx="2103120" cy="786384"/>
           </a:xfrm>
           <a:prstGeom prst="roundRect">
             <a:avLst/>
@@ -6067,8 +10023,8 @@
         </p:nvSpPr>
         <p:spPr>
           <a:xfrm>
-            <a:off x="914400" y="2916936"/>
-            <a:ext cx="2011680" cy="548640"/>
+            <a:off x="914400" y="2743200"/>
+            <a:ext cx="2011680" cy="502920"/>
           </a:xfrm>
           <a:prstGeom prst="rect">
             <a:avLst/>
@@ -6087,7 +10043,7 @@
               </a:lnSpc>
             </a:pPr>
             <a:r>
-              <a:rPr sz="2000" b="0">
+              <a:rPr sz="1800" b="0">
                 <a:solidFill>
                   <a:srgbClr val="1B2233"/>
                 </a:solidFill>
@@ -6108,8 +10064,8 @@
         </p:nvSpPr>
         <p:spPr>
           <a:xfrm>
-            <a:off x="3200400" y="2715768"/>
-            <a:ext cx="2103120" cy="841248"/>
+            <a:off x="3200400" y="2578608"/>
+            <a:ext cx="2103120" cy="786384"/>
           </a:xfrm>
           <a:prstGeom prst="roundRect">
             <a:avLst/>
@@ -6152,8 +10108,8 @@
         </p:nvSpPr>
         <p:spPr>
           <a:xfrm>
-            <a:off x="3246120" y="2916936"/>
-            <a:ext cx="2011680" cy="548640"/>
+            <a:off x="3246120" y="2743200"/>
+            <a:ext cx="2011680" cy="502920"/>
           </a:xfrm>
           <a:prstGeom prst="rect">
             <a:avLst/>
@@ -6172,7 +10128,7 @@
               </a:lnSpc>
             </a:pPr>
             <a:r>
-              <a:rPr sz="2000" b="0">
+              <a:rPr sz="1800" b="0">
                 <a:solidFill>
                   <a:srgbClr val="1B2233"/>
                 </a:solidFill>
@@ -6193,8 +10149,8 @@
         </p:nvSpPr>
         <p:spPr>
           <a:xfrm>
-            <a:off x="5532120" y="2715768"/>
-            <a:ext cx="2103120" cy="841248"/>
+            <a:off x="5532120" y="2578608"/>
+            <a:ext cx="2103120" cy="786384"/>
           </a:xfrm>
           <a:prstGeom prst="roundRect">
             <a:avLst/>
@@ -6237,8 +10193,8 @@
         </p:nvSpPr>
         <p:spPr>
           <a:xfrm>
-            <a:off x="5577840" y="2916936"/>
-            <a:ext cx="2011680" cy="548640"/>
+            <a:off x="5577840" y="2743200"/>
+            <a:ext cx="2011680" cy="502920"/>
           </a:xfrm>
           <a:prstGeom prst="rect">
             <a:avLst/>
@@ -6257,7 +10213,7 @@
               </a:lnSpc>
             </a:pPr>
             <a:r>
-              <a:rPr sz="2000" b="0">
+              <a:rPr sz="1800" b="0">
                 <a:solidFill>
                   <a:srgbClr val="1B2233"/>
                 </a:solidFill>
@@ -6278,8 +10234,8 @@
         </p:nvSpPr>
         <p:spPr>
           <a:xfrm>
-            <a:off x="868680" y="3739896"/>
-            <a:ext cx="2103120" cy="841248"/>
+            <a:off x="868680" y="3511296"/>
+            <a:ext cx="2103120" cy="786384"/>
           </a:xfrm>
           <a:prstGeom prst="roundRect">
             <a:avLst/>
@@ -6322,8 +10278,8 @@
         </p:nvSpPr>
         <p:spPr>
           <a:xfrm>
-            <a:off x="914400" y="3941064"/>
-            <a:ext cx="2011680" cy="548640"/>
+            <a:off x="914400" y="3675887"/>
+            <a:ext cx="2011680" cy="502920"/>
           </a:xfrm>
           <a:prstGeom prst="rect">
             <a:avLst/>
@@ -6342,7 +10298,7 @@
               </a:lnSpc>
             </a:pPr>
             <a:r>
-              <a:rPr sz="2000" b="0">
+              <a:rPr sz="1800" b="0">
                 <a:solidFill>
                   <a:srgbClr val="1B2233"/>
                 </a:solidFill>
@@ -6363,8 +10319,8 @@
         </p:nvSpPr>
         <p:spPr>
           <a:xfrm>
-            <a:off x="3200400" y="3739896"/>
-            <a:ext cx="2103120" cy="841248"/>
+            <a:off x="3200400" y="3511296"/>
+            <a:ext cx="2103120" cy="786384"/>
           </a:xfrm>
           <a:prstGeom prst="roundRect">
             <a:avLst/>
@@ -6407,8 +10363,8 @@
         </p:nvSpPr>
         <p:spPr>
           <a:xfrm>
-            <a:off x="3246120" y="3941064"/>
-            <a:ext cx="2011680" cy="548640"/>
+            <a:off x="3246120" y="3675887"/>
+            <a:ext cx="2011680" cy="502920"/>
           </a:xfrm>
           <a:prstGeom prst="rect">
             <a:avLst/>
@@ -6427,7 +10383,7 @@
               </a:lnSpc>
             </a:pPr>
             <a:r>
-              <a:rPr sz="2000" b="0">
+              <a:rPr sz="1800" b="0">
                 <a:solidFill>
                   <a:srgbClr val="1B2233"/>
                 </a:solidFill>
@@ -6448,8 +10404,8 @@
         </p:nvSpPr>
         <p:spPr>
           <a:xfrm>
-            <a:off x="5532120" y="3739896"/>
-            <a:ext cx="2103120" cy="841248"/>
+            <a:off x="5532120" y="3511296"/>
+            <a:ext cx="2103120" cy="786384"/>
           </a:xfrm>
           <a:prstGeom prst="roundRect">
             <a:avLst/>
@@ -6492,8 +10448,8 @@
         </p:nvSpPr>
         <p:spPr>
           <a:xfrm>
-            <a:off x="5577840" y="3941064"/>
-            <a:ext cx="2011680" cy="548640"/>
+            <a:off x="5577840" y="3675887"/>
+            <a:ext cx="2011680" cy="502920"/>
           </a:xfrm>
           <a:prstGeom prst="rect">
             <a:avLst/>
@@ -6512,7 +10468,7 @@
               </a:lnSpc>
             </a:pPr>
             <a:r>
-              <a:rPr sz="2000" b="1">
+              <a:rPr sz="1800" b="1">
                 <a:solidFill>
                   <a:srgbClr val="FFFFFF"/>
                 </a:solidFill>
@@ -6636,7 +10592,7 @@
         </p:blipFill>
         <p:spPr>
           <a:xfrm>
-            <a:off x="868680" y="4526280"/>
+            <a:off x="868680" y="4389120"/>
             <a:ext cx="2926080" cy="1828800"/>
           </a:xfrm>
           <a:prstGeom prst="rect">
@@ -6660,7 +10616,7 @@
         </p:blipFill>
         <p:spPr>
           <a:xfrm>
-            <a:off x="4114800" y="4526280"/>
+            <a:off x="4114800" y="4389120"/>
             <a:ext cx="2926080" cy="1828800"/>
           </a:xfrm>
           <a:prstGeom prst="rect">
@@ -6684,8 +10640,8 @@
         </p:blipFill>
         <p:spPr>
           <a:xfrm>
-            <a:off x="8595360" y="4526280"/>
-            <a:ext cx="845062" cy="1828800"/>
+            <a:off x="8595360" y="4389120"/>
+            <a:ext cx="823935" cy="1783080"/>
           </a:xfrm>
           <a:prstGeom prst="rect">
             <a:avLst/>
@@ -6700,8 +10656,8 @@
         </p:nvSpPr>
         <p:spPr>
           <a:xfrm>
-            <a:off x="868680" y="6446520"/>
-            <a:ext cx="2926080" cy="320040"/>
+            <a:off x="868680" y="6217920"/>
+            <a:ext cx="2926080" cy="274320"/>
           </a:xfrm>
           <a:prstGeom prst="rect">
             <a:avLst/>
@@ -6720,7 +10676,7 @@
               </a:lnSpc>
             </a:pPr>
             <a:r>
-              <a:rPr sz="1400" b="0">
+              <a:rPr sz="1300" b="0">
                 <a:solidFill>
                   <a:srgbClr val="6B7485"/>
                 </a:solidFill>
@@ -6741,8 +10697,8 @@
         </p:nvSpPr>
         <p:spPr>
           <a:xfrm>
-            <a:off x="4114800" y="6446520"/>
-            <a:ext cx="2926080" cy="320040"/>
+            <a:off x="4114800" y="6217920"/>
+            <a:ext cx="2926080" cy="274320"/>
           </a:xfrm>
           <a:prstGeom prst="rect">
             <a:avLst/>
@@ -6761,7 +10717,7 @@
               </a:lnSpc>
             </a:pPr>
             <a:r>
-              <a:rPr sz="1400" b="0">
+              <a:rPr sz="1300" b="0">
                 <a:solidFill>
                   <a:srgbClr val="6B7485"/>
                 </a:solidFill>
@@ -6782,8 +10738,8 @@
         </p:nvSpPr>
         <p:spPr>
           <a:xfrm>
-            <a:off x="7589520" y="6446520"/>
-            <a:ext cx="3017520" cy="320040"/>
+            <a:off x="7589520" y="6217920"/>
+            <a:ext cx="3017520" cy="274320"/>
           </a:xfrm>
           <a:prstGeom prst="rect">
             <a:avLst/>
@@ -6802,7 +10758,7 @@
               </a:lnSpc>
             </a:pPr>
             <a:r>
-              <a:rPr sz="1400" b="0">
+              <a:rPr sz="1300" b="0">
                 <a:solidFill>
                   <a:srgbClr val="6B7485"/>
                 </a:solidFill>
@@ -6817,14 +10773,58 @@
       </p:sp>
       <p:sp>
         <p:nvSpPr>
-          <p:cNvPr id="29" name="TextBox 28"/>
+          <p:cNvPr id="29" name="Rectangle 28"/>
+          <p:cNvSpPr/>
+          <p:nvPr/>
+        </p:nvSpPr>
+        <p:spPr>
+          <a:xfrm>
+            <a:off x="548640" y="6510528"/>
+            <a:ext cx="10881360" cy="9525"/>
+          </a:xfrm>
+          <a:prstGeom prst="rect">
+            <a:avLst/>
+          </a:prstGeom>
+          <a:solidFill>
+            <a:srgbClr val="DDE3EE"/>
+          </a:solidFill>
+          <a:ln>
+            <a:noFill/>
+          </a:ln>
+          <a:effectLst/>
+        </p:spPr>
+        <p:style>
+          <a:lnRef idx="1">
+            <a:schemeClr val="accent1"/>
+          </a:lnRef>
+          <a:fillRef idx="3">
+            <a:schemeClr val="accent1"/>
+          </a:fillRef>
+          <a:effectRef idx="2">
+            <a:schemeClr val="accent1"/>
+          </a:effectRef>
+          <a:fontRef idx="minor">
+            <a:schemeClr val="lt1"/>
+          </a:fontRef>
+        </p:style>
+        <p:txBody>
+          <a:bodyPr rtlCol="0" anchor="ctr"/>
+          <a:lstStyle/>
+          <a:p>
+            <a:pPr algn="ctr"/>
+          </a:p>
+        </p:txBody>
+      </p:sp>
+      <p:sp>
+        <p:nvSpPr>
+          <p:cNvPr id="30" name="TextBox 29"/>
           <p:cNvSpPr txBox="1"/>
           <p:nvPr/>
         </p:nvSpPr>
         <p:spPr>
           <a:xfrm>
-            <a:off x="11064240" y="6355080"/>
-            <a:ext cx="914400" cy="365760"/>
+            <a:off x="548640" y="6565392"/>
+            <a:ext cx="7315200" cy="274320"/>
           </a:xfrm>
           <a:prstGeom prst="rect">
             <a:avLst/>
@@ -6837,13 +10837,54 @@
           </a:bodyPr>
           <a:lstStyle/>
           <a:p>
+            <a:pPr algn="l">
+              <a:lnSpc>
+                <a:spcPct val="125000"/>
+              </a:lnSpc>
+            </a:pPr>
+            <a:r>
+              <a:rPr sz="1100" b="0">
+                <a:solidFill>
+                  <a:srgbClr val="6B7485"/>
+                </a:solidFill>
+                <a:latin typeface="微软雅黑"/>
+                <a:ea typeface="微软雅黑"/>
+                <a:cs typeface="微软雅黑"/>
+              </a:rPr>
+              <a:t>社区先知 CommunityInsight</a:t>
+            </a:r>
+          </a:p>
+        </p:txBody>
+      </p:sp>
+      <p:sp>
+        <p:nvSpPr>
+          <p:cNvPr id="31" name="TextBox 30"/>
+          <p:cNvSpPr txBox="1"/>
+          <p:nvPr/>
+        </p:nvSpPr>
+        <p:spPr>
+          <a:xfrm>
+            <a:off x="10607040" y="6565392"/>
+            <a:ext cx="822960" cy="274320"/>
+          </a:xfrm>
+          <a:prstGeom prst="rect">
+            <a:avLst/>
+          </a:prstGeom>
+          <a:noFill/>
+        </p:spPr>
+        <p:txBody>
+          <a:bodyPr wrap="square">
+            <a:spAutoFit/>
+          </a:bodyPr>
+          <a:lstStyle/>
+          <a:p>
             <a:pPr algn="r">
               <a:lnSpc>
                 <a:spcPct val="125000"/>
               </a:lnSpc>
             </a:pPr>
             <a:r>
-              <a:rPr sz="1200" b="0">
+              <a:rPr sz="1100" b="0">
                 <a:solidFill>
                   <a:srgbClr val="6B7485"/>
                 </a:solidFill>
@@ -7242,14 +11283,58 @@
       </p:sp>
       <p:sp>
         <p:nvSpPr>
-          <p:cNvPr id="9" name="TextBox 8"/>
+          <p:cNvPr id="9" name="Rectangle 8"/>
+          <p:cNvSpPr/>
+          <p:nvPr/>
+        </p:nvSpPr>
+        <p:spPr>
+          <a:xfrm>
+            <a:off x="548640" y="6510528"/>
+            <a:ext cx="10881360" cy="9525"/>
+          </a:xfrm>
+          <a:prstGeom prst="rect">
+            <a:avLst/>
+          </a:prstGeom>
+          <a:solidFill>
+            <a:srgbClr val="DDE3EE"/>
+          </a:solidFill>
+          <a:ln>
+            <a:noFill/>
+          </a:ln>
+          <a:effectLst/>
+        </p:spPr>
+        <p:style>
+          <a:lnRef idx="1">
+            <a:schemeClr val="accent1"/>
+          </a:lnRef>
+          <a:fillRef idx="3">
+            <a:schemeClr val="accent1"/>
+          </a:fillRef>
+          <a:effectRef idx="2">
+            <a:schemeClr val="accent1"/>
+          </a:effectRef>
+          <a:fontRef idx="minor">
+            <a:schemeClr val="lt1"/>
+          </a:fontRef>
+        </p:style>
+        <p:txBody>
+          <a:bodyPr rtlCol="0" anchor="ctr"/>
+          <a:lstStyle/>
+          <a:p>
+            <a:pPr algn="ctr"/>
+          </a:p>
+        </p:txBody>
+      </p:sp>
+      <p:sp>
+        <p:nvSpPr>
+          <p:cNvPr id="10" name="TextBox 9"/>
           <p:cNvSpPr txBox="1"/>
           <p:nvPr/>
         </p:nvSpPr>
         <p:spPr>
           <a:xfrm>
-            <a:off x="11064240" y="6355080"/>
-            <a:ext cx="914400" cy="365760"/>
+            <a:off x="548640" y="6565392"/>
+            <a:ext cx="7315200" cy="274320"/>
           </a:xfrm>
           <a:prstGeom prst="rect">
             <a:avLst/>
@@ -7262,13 +11347,54 @@
           </a:bodyPr>
           <a:lstStyle/>
           <a:p>
+            <a:pPr algn="l">
+              <a:lnSpc>
+                <a:spcPct val="125000"/>
+              </a:lnSpc>
+            </a:pPr>
+            <a:r>
+              <a:rPr sz="1100" b="0">
+                <a:solidFill>
+                  <a:srgbClr val="6B7485"/>
+                </a:solidFill>
+                <a:latin typeface="微软雅黑"/>
+                <a:ea typeface="微软雅黑"/>
+                <a:cs typeface="微软雅黑"/>
+              </a:rPr>
+              <a:t>社区先知 CommunityInsight</a:t>
+            </a:r>
+          </a:p>
+        </p:txBody>
+      </p:sp>
+      <p:sp>
+        <p:nvSpPr>
+          <p:cNvPr id="11" name="TextBox 10"/>
+          <p:cNvSpPr txBox="1"/>
+          <p:nvPr/>
+        </p:nvSpPr>
+        <p:spPr>
+          <a:xfrm>
+            <a:off x="10607040" y="6565392"/>
+            <a:ext cx="822960" cy="274320"/>
+          </a:xfrm>
+          <a:prstGeom prst="rect">
+            <a:avLst/>
+          </a:prstGeom>
+          <a:noFill/>
+        </p:spPr>
+        <p:txBody>
+          <a:bodyPr wrap="square">
+            <a:spAutoFit/>
+          </a:bodyPr>
+          <a:lstStyle/>
+          <a:p>
             <a:pPr algn="r">
               <a:lnSpc>
                 <a:spcPct val="125000"/>
               </a:lnSpc>
             </a:pPr>
             <a:r>
-              <a:rPr sz="1200" b="0">
+              <a:rPr sz="1100" b="0">
                 <a:solidFill>
                   <a:srgbClr val="6B7485"/>
                 </a:solidFill>
@@ -7552,14 +11678,58 @@
       </p:pic>
       <p:sp>
         <p:nvSpPr>
-          <p:cNvPr id="8" name="TextBox 7"/>
+          <p:cNvPr id="8" name="Rectangle 7"/>
+          <p:cNvSpPr/>
+          <p:nvPr/>
+        </p:nvSpPr>
+        <p:spPr>
+          <a:xfrm>
+            <a:off x="548640" y="6510528"/>
+            <a:ext cx="10881360" cy="9525"/>
+          </a:xfrm>
+          <a:prstGeom prst="rect">
+            <a:avLst/>
+          </a:prstGeom>
+          <a:solidFill>
+            <a:srgbClr val="DDE3EE"/>
+          </a:solidFill>
+          <a:ln>
+            <a:noFill/>
+          </a:ln>
+          <a:effectLst/>
+        </p:spPr>
+        <p:style>
+          <a:lnRef idx="1">
+            <a:schemeClr val="accent1"/>
+          </a:lnRef>
+          <a:fillRef idx="3">
+            <a:schemeClr val="accent1"/>
+          </a:fillRef>
+          <a:effectRef idx="2">
+            <a:schemeClr val="accent1"/>
+          </a:effectRef>
+          <a:fontRef idx="minor">
+            <a:schemeClr val="lt1"/>
+          </a:fontRef>
+        </p:style>
+        <p:txBody>
+          <a:bodyPr rtlCol="0" anchor="ctr"/>
+          <a:lstStyle/>
+          <a:p>
+            <a:pPr algn="ctr"/>
+          </a:p>
+        </p:txBody>
+      </p:sp>
+      <p:sp>
+        <p:nvSpPr>
+          <p:cNvPr id="9" name="TextBox 8"/>
           <p:cNvSpPr txBox="1"/>
           <p:nvPr/>
         </p:nvSpPr>
         <p:spPr>
           <a:xfrm>
-            <a:off x="11064240" y="6355080"/>
-            <a:ext cx="914400" cy="365760"/>
+            <a:off x="548640" y="6565392"/>
+            <a:ext cx="7315200" cy="274320"/>
           </a:xfrm>
           <a:prstGeom prst="rect">
             <a:avLst/>
@@ -7572,13 +11742,54 @@
           </a:bodyPr>
           <a:lstStyle/>
           <a:p>
+            <a:pPr algn="l">
+              <a:lnSpc>
+                <a:spcPct val="125000"/>
+              </a:lnSpc>
+            </a:pPr>
+            <a:r>
+              <a:rPr sz="1100" b="0">
+                <a:solidFill>
+                  <a:srgbClr val="6B7485"/>
+                </a:solidFill>
+                <a:latin typeface="微软雅黑"/>
+                <a:ea typeface="微软雅黑"/>
+                <a:cs typeface="微软雅黑"/>
+              </a:rPr>
+              <a:t>社区先知 CommunityInsight</a:t>
+            </a:r>
+          </a:p>
+        </p:txBody>
+      </p:sp>
+      <p:sp>
+        <p:nvSpPr>
+          <p:cNvPr id="10" name="TextBox 9"/>
+          <p:cNvSpPr txBox="1"/>
+          <p:nvPr/>
+        </p:nvSpPr>
+        <p:spPr>
+          <a:xfrm>
+            <a:off x="10607040" y="6565392"/>
+            <a:ext cx="822960" cy="274320"/>
+          </a:xfrm>
+          <a:prstGeom prst="rect">
+            <a:avLst/>
+          </a:prstGeom>
+          <a:noFill/>
+        </p:spPr>
+        <p:txBody>
+          <a:bodyPr wrap="square">
+            <a:spAutoFit/>
+          </a:bodyPr>
+          <a:lstStyle/>
+          <a:p>
             <a:pPr algn="r">
               <a:lnSpc>
                 <a:spcPct val="125000"/>
               </a:lnSpc>
             </a:pPr>
             <a:r>
-              <a:rPr sz="1200" b="0">
+              <a:rPr sz="1100" b="0">
                 <a:solidFill>
                   <a:srgbClr val="6B7485"/>
                 </a:solidFill>
@@ -8487,14 +12698,58 @@
       </p:sp>
       <p:sp>
         <p:nvSpPr>
-          <p:cNvPr id="25" name="TextBox 24"/>
+          <p:cNvPr id="25" name="Rectangle 24"/>
+          <p:cNvSpPr/>
+          <p:nvPr/>
+        </p:nvSpPr>
+        <p:spPr>
+          <a:xfrm>
+            <a:off x="548640" y="6510528"/>
+            <a:ext cx="10881360" cy="9525"/>
+          </a:xfrm>
+          <a:prstGeom prst="rect">
+            <a:avLst/>
+          </a:prstGeom>
+          <a:solidFill>
+            <a:srgbClr val="DDE3EE"/>
+          </a:solidFill>
+          <a:ln>
+            <a:noFill/>
+          </a:ln>
+          <a:effectLst/>
+        </p:spPr>
+        <p:style>
+          <a:lnRef idx="1">
+            <a:schemeClr val="accent1"/>
+          </a:lnRef>
+          <a:fillRef idx="3">
+            <a:schemeClr val="accent1"/>
+          </a:fillRef>
+          <a:effectRef idx="2">
+            <a:schemeClr val="accent1"/>
+          </a:effectRef>
+          <a:fontRef idx="minor">
+            <a:schemeClr val="lt1"/>
+          </a:fontRef>
+        </p:style>
+        <p:txBody>
+          <a:bodyPr rtlCol="0" anchor="ctr"/>
+          <a:lstStyle/>
+          <a:p>
+            <a:pPr algn="ctr"/>
+          </a:p>
+        </p:txBody>
+      </p:sp>
+      <p:sp>
+        <p:nvSpPr>
+          <p:cNvPr id="26" name="TextBox 25"/>
           <p:cNvSpPr txBox="1"/>
           <p:nvPr/>
         </p:nvSpPr>
         <p:spPr>
           <a:xfrm>
-            <a:off x="11064240" y="6355080"/>
-            <a:ext cx="914400" cy="365760"/>
+            <a:off x="548640" y="6565392"/>
+            <a:ext cx="7315200" cy="274320"/>
           </a:xfrm>
           <a:prstGeom prst="rect">
             <a:avLst/>
@@ -8507,13 +12762,54 @@
           </a:bodyPr>
           <a:lstStyle/>
           <a:p>
+            <a:pPr algn="l">
+              <a:lnSpc>
+                <a:spcPct val="125000"/>
+              </a:lnSpc>
+            </a:pPr>
+            <a:r>
+              <a:rPr sz="1100" b="0">
+                <a:solidFill>
+                  <a:srgbClr val="6B7485"/>
+                </a:solidFill>
+                <a:latin typeface="微软雅黑"/>
+                <a:ea typeface="微软雅黑"/>
+                <a:cs typeface="微软雅黑"/>
+              </a:rPr>
+              <a:t>社区先知 CommunityInsight</a:t>
+            </a:r>
+          </a:p>
+        </p:txBody>
+      </p:sp>
+      <p:sp>
+        <p:nvSpPr>
+          <p:cNvPr id="27" name="TextBox 26"/>
+          <p:cNvSpPr txBox="1"/>
+          <p:nvPr/>
+        </p:nvSpPr>
+        <p:spPr>
+          <a:xfrm>
+            <a:off x="10607040" y="6565392"/>
+            <a:ext cx="822960" cy="274320"/>
+          </a:xfrm>
+          <a:prstGeom prst="rect">
+            <a:avLst/>
+          </a:prstGeom>
+          <a:noFill/>
+        </p:spPr>
+        <p:txBody>
+          <a:bodyPr wrap="square">
+            <a:spAutoFit/>
+          </a:bodyPr>
+          <a:lstStyle/>
+          <a:p>
             <a:pPr algn="r">
               <a:lnSpc>
                 <a:spcPct val="125000"/>
               </a:lnSpc>
             </a:pPr>
             <a:r>
-              <a:rPr sz="1200" b="0">
+              <a:rPr sz="1100" b="0">
                 <a:solidFill>
                   <a:srgbClr val="6B7485"/>
                 </a:solidFill>
@@ -9044,14 +13340,58 @@
       </p:sp>
       <p:sp>
         <p:nvSpPr>
-          <p:cNvPr id="14" name="TextBox 13"/>
+          <p:cNvPr id="14" name="Rectangle 13"/>
+          <p:cNvSpPr/>
+          <p:nvPr/>
+        </p:nvSpPr>
+        <p:spPr>
+          <a:xfrm>
+            <a:off x="548640" y="6510528"/>
+            <a:ext cx="10881360" cy="9525"/>
+          </a:xfrm>
+          <a:prstGeom prst="rect">
+            <a:avLst/>
+          </a:prstGeom>
+          <a:solidFill>
+            <a:srgbClr val="DDE3EE"/>
+          </a:solidFill>
+          <a:ln>
+            <a:noFill/>
+          </a:ln>
+          <a:effectLst/>
+        </p:spPr>
+        <p:style>
+          <a:lnRef idx="1">
+            <a:schemeClr val="accent1"/>
+          </a:lnRef>
+          <a:fillRef idx="3">
+            <a:schemeClr val="accent1"/>
+          </a:fillRef>
+          <a:effectRef idx="2">
+            <a:schemeClr val="accent1"/>
+          </a:effectRef>
+          <a:fontRef idx="minor">
+            <a:schemeClr val="lt1"/>
+          </a:fontRef>
+        </p:style>
+        <p:txBody>
+          <a:bodyPr rtlCol="0" anchor="ctr"/>
+          <a:lstStyle/>
+          <a:p>
+            <a:pPr algn="ctr"/>
+          </a:p>
+        </p:txBody>
+      </p:sp>
+      <p:sp>
+        <p:nvSpPr>
+          <p:cNvPr id="15" name="TextBox 14"/>
           <p:cNvSpPr txBox="1"/>
           <p:nvPr/>
         </p:nvSpPr>
         <p:spPr>
           <a:xfrm>
-            <a:off x="11064240" y="6355080"/>
-            <a:ext cx="914400" cy="365760"/>
+            <a:off x="548640" y="6565392"/>
+            <a:ext cx="7315200" cy="274320"/>
           </a:xfrm>
           <a:prstGeom prst="rect">
             <a:avLst/>
@@ -9064,13 +13404,54 @@
           </a:bodyPr>
           <a:lstStyle/>
           <a:p>
+            <a:pPr algn="l">
+              <a:lnSpc>
+                <a:spcPct val="125000"/>
+              </a:lnSpc>
+            </a:pPr>
+            <a:r>
+              <a:rPr sz="1100" b="0">
+                <a:solidFill>
+                  <a:srgbClr val="6B7485"/>
+                </a:solidFill>
+                <a:latin typeface="微软雅黑"/>
+                <a:ea typeface="微软雅黑"/>
+                <a:cs typeface="微软雅黑"/>
+              </a:rPr>
+              <a:t>社区先知 CommunityInsight</a:t>
+            </a:r>
+          </a:p>
+        </p:txBody>
+      </p:sp>
+      <p:sp>
+        <p:nvSpPr>
+          <p:cNvPr id="16" name="TextBox 15"/>
+          <p:cNvSpPr txBox="1"/>
+          <p:nvPr/>
+        </p:nvSpPr>
+        <p:spPr>
+          <a:xfrm>
+            <a:off x="10607040" y="6565392"/>
+            <a:ext cx="822960" cy="274320"/>
+          </a:xfrm>
+          <a:prstGeom prst="rect">
+            <a:avLst/>
+          </a:prstGeom>
+          <a:noFill/>
+        </p:spPr>
+        <p:txBody>
+          <a:bodyPr wrap="square">
+            <a:spAutoFit/>
+          </a:bodyPr>
+          <a:lstStyle/>
+          <a:p>
             <a:pPr algn="r">
               <a:lnSpc>
                 <a:spcPct val="125000"/>
               </a:lnSpc>
             </a:pPr>
             <a:r>
-              <a:rPr sz="1200" b="0">
+              <a:rPr sz="1100" b="0">
                 <a:solidFill>
                   <a:srgbClr val="6B7485"/>
                 </a:solidFill>
@@ -9560,14 +13941,58 @@
       </p:sp>
       <p:sp>
         <p:nvSpPr>
-          <p:cNvPr id="13" name="TextBox 12"/>
+          <p:cNvPr id="13" name="Rectangle 12"/>
+          <p:cNvSpPr/>
+          <p:nvPr/>
+        </p:nvSpPr>
+        <p:spPr>
+          <a:xfrm>
+            <a:off x="548640" y="6510528"/>
+            <a:ext cx="10881360" cy="9525"/>
+          </a:xfrm>
+          <a:prstGeom prst="rect">
+            <a:avLst/>
+          </a:prstGeom>
+          <a:solidFill>
+            <a:srgbClr val="DDE3EE"/>
+          </a:solidFill>
+          <a:ln>
+            <a:noFill/>
+          </a:ln>
+          <a:effectLst/>
+        </p:spPr>
+        <p:style>
+          <a:lnRef idx="1">
+            <a:schemeClr val="accent1"/>
+          </a:lnRef>
+          <a:fillRef idx="3">
+            <a:schemeClr val="accent1"/>
+          </a:fillRef>
+          <a:effectRef idx="2">
+            <a:schemeClr val="accent1"/>
+          </a:effectRef>
+          <a:fontRef idx="minor">
+            <a:schemeClr val="lt1"/>
+          </a:fontRef>
+        </p:style>
+        <p:txBody>
+          <a:bodyPr rtlCol="0" anchor="ctr"/>
+          <a:lstStyle/>
+          <a:p>
+            <a:pPr algn="ctr"/>
+          </a:p>
+        </p:txBody>
+      </p:sp>
+      <p:sp>
+        <p:nvSpPr>
+          <p:cNvPr id="14" name="TextBox 13"/>
           <p:cNvSpPr txBox="1"/>
           <p:nvPr/>
         </p:nvSpPr>
         <p:spPr>
           <a:xfrm>
-            <a:off x="11064240" y="6355080"/>
-            <a:ext cx="914400" cy="365760"/>
+            <a:off x="548640" y="6565392"/>
+            <a:ext cx="7315200" cy="274320"/>
           </a:xfrm>
           <a:prstGeom prst="rect">
             <a:avLst/>
@@ -9580,13 +14005,54 @@
           </a:bodyPr>
           <a:lstStyle/>
           <a:p>
+            <a:pPr algn="l">
+              <a:lnSpc>
+                <a:spcPct val="125000"/>
+              </a:lnSpc>
+            </a:pPr>
+            <a:r>
+              <a:rPr sz="1100" b="0">
+                <a:solidFill>
+                  <a:srgbClr val="6B7485"/>
+                </a:solidFill>
+                <a:latin typeface="微软雅黑"/>
+                <a:ea typeface="微软雅黑"/>
+                <a:cs typeface="微软雅黑"/>
+              </a:rPr>
+              <a:t>社区先知 CommunityInsight</a:t>
+            </a:r>
+          </a:p>
+        </p:txBody>
+      </p:sp>
+      <p:sp>
+        <p:nvSpPr>
+          <p:cNvPr id="15" name="TextBox 14"/>
+          <p:cNvSpPr txBox="1"/>
+          <p:nvPr/>
+        </p:nvSpPr>
+        <p:spPr>
+          <a:xfrm>
+            <a:off x="10607040" y="6565392"/>
+            <a:ext cx="822960" cy="274320"/>
+          </a:xfrm>
+          <a:prstGeom prst="rect">
+            <a:avLst/>
+          </a:prstGeom>
+          <a:noFill/>
+        </p:spPr>
+        <p:txBody>
+          <a:bodyPr wrap="square">
+            <a:spAutoFit/>
+          </a:bodyPr>
+          <a:lstStyle/>
+          <a:p>
             <a:pPr algn="r">
               <a:lnSpc>
                 <a:spcPct val="125000"/>
               </a:lnSpc>
             </a:pPr>
             <a:r>
-              <a:rPr sz="1200" b="0">
+              <a:rPr sz="1100" b="0">
                 <a:solidFill>
                   <a:srgbClr val="6B7485"/>
                 </a:solidFill>

--- a/docs/competition/9月22日路演-社区先知.pptx
+++ b/docs/competition/9月22日路演-社区先知.pptx
@@ -5112,7 +5112,7 @@
                 <a:ea typeface="微软雅黑"/>
                 <a:cs typeface="微软雅黑"/>
               </a:rPr>
-              <a:t>附录 · 界面一览（真实截图，未做美化）</a:t>
+              <a:t>附录 · 更多界面</a:t>
             </a:r>
           </a:p>
         </p:txBody>
@@ -5451,7 +5451,7 @@
                 <a:ea typeface="微软雅黑"/>
                 <a:cs typeface="微软雅黑"/>
               </a:rPr>
-              <a:t>1) 双击项目文件夹里的「启动演示.bat」</a:t>
+              <a:t>1) 双击项目文件夹里的「启动演示」</a:t>
             </a:r>
           </a:p>
           <a:p>
@@ -5469,7 +5469,7 @@
                 <a:ea typeface="微软雅黑"/>
                 <a:cs typeface="微软雅黑"/>
               </a:rPr>
-              <a:t>2) 等它提示「服务已就绪」（首次约 10–20 秒，会自动建库）</a:t>
+              <a:t>2) 等它提示「服务已就绪」（首次约 10–20 秒，会自动建好数据库）</a:t>
             </a:r>
           </a:p>
           <a:p>
@@ -5590,7 +5590,7 @@
                 <a:ea typeface="微软雅黑"/>
                 <a:cs typeface="微软雅黑"/>
               </a:rPr>
-              <a:t>环境：Windows + Python 3.10+（其余依赖脚本自动装）</a:t>
+              <a:t>环境：Windows + Python 3.10 以上；首次启动会自动装依赖</a:t>
             </a:r>
           </a:p>
           <a:p>
@@ -5608,7 +5608,7 @@
                 <a:ea typeface="微软雅黑"/>
                 <a:cs typeface="微软雅黑"/>
               </a:rPr>
-              <a:t>不联网也能演示：大模型与真实天气会自动回落规则与模拟数据</a:t>
+              <a:t>没有网络也能演示：大模型与天气会自动回到规则与本地数据</a:t>
             </a:r>
           </a:p>
         </p:txBody>
@@ -9422,50 +9422,9 @@
           </a:p>
         </p:txBody>
       </p:sp>
-      <p:sp>
-        <p:nvSpPr>
-          <p:cNvPr id="12" name="TextBox 11"/>
-          <p:cNvSpPr txBox="1"/>
-          <p:nvPr/>
-        </p:nvSpPr>
-        <p:spPr>
-          <a:xfrm>
-            <a:off x="868680" y="5943600"/>
-            <a:ext cx="10881360" cy="548640"/>
-          </a:xfrm>
-          <a:prstGeom prst="rect">
-            <a:avLst/>
-          </a:prstGeom>
-          <a:noFill/>
-        </p:spPr>
-        <p:txBody>
-          <a:bodyPr wrap="square">
-            <a:spAutoFit/>
-          </a:bodyPr>
-          <a:lstStyle/>
-          <a:p>
-            <a:pPr algn="l">
-              <a:lnSpc>
-                <a:spcPct val="125000"/>
-              </a:lnSpc>
-            </a:pPr>
-            <a:r>
-              <a:rPr sz="1500" b="0">
-                <a:solidFill>
-                  <a:srgbClr val="6B7485"/>
-                </a:solidFill>
-                <a:latin typeface="微软雅黑"/>
-                <a:ea typeface="微软雅黑"/>
-                <a:cs typeface="微软雅黑"/>
-              </a:rPr>
-              <a:t>（这一页之后我会主动说明：还没在真实街道试点，这是下一步）</a:t>
-            </a:r>
-          </a:p>
-        </p:txBody>
-      </p:sp>
       <p:pic>
         <p:nvPicPr>
-          <p:cNvPr id="13" name="Picture 12" descr="06-网格员工作台.png"/>
+          <p:cNvPr id="12" name="Picture 11" descr="06-网格员工作台.png"/>
           <p:cNvPicPr>
             <a:picLocks noChangeAspect="1"/>
           </p:cNvPicPr>
@@ -9489,7 +9448,7 @@
       </p:pic>
       <p:sp>
         <p:nvSpPr>
-          <p:cNvPr id="14" name="Rectangle 13"/>
+          <p:cNvPr id="13" name="Rectangle 12"/>
           <p:cNvSpPr/>
           <p:nvPr/>
         </p:nvSpPr>
@@ -9533,7 +9492,7 @@
       </p:sp>
       <p:sp>
         <p:nvSpPr>
-          <p:cNvPr id="15" name="TextBox 14"/>
+          <p:cNvPr id="14" name="TextBox 13"/>
           <p:cNvSpPr txBox="1"/>
           <p:nvPr/>
         </p:nvSpPr>
@@ -9574,7 +9533,7 @@
       </p:sp>
       <p:sp>
         <p:nvSpPr>
-          <p:cNvPr id="16" name="TextBox 15"/>
+          <p:cNvPr id="15" name="TextBox 14"/>
           <p:cNvSpPr txBox="1"/>
           <p:nvPr/>
         </p:nvSpPr>
@@ -11900,7 +11859,7 @@
                 <a:ea typeface="微软雅黑"/>
                 <a:cs typeface="微软雅黑"/>
               </a:rPr>
-              <a:t>五步走完一套流程（真实截图）</a:t>
+              <a:t>五步走完一套流程</a:t>
             </a:r>
           </a:p>
         </p:txBody>
@@ -12657,48 +12616,7 @@
       </p:sp>
       <p:sp>
         <p:nvSpPr>
-          <p:cNvPr id="24" name="TextBox 23"/>
-          <p:cNvSpPr txBox="1"/>
-          <p:nvPr/>
-        </p:nvSpPr>
-        <p:spPr>
-          <a:xfrm>
-            <a:off x="658368" y="5623560"/>
-            <a:ext cx="10881360" cy="640080"/>
-          </a:xfrm>
-          <a:prstGeom prst="rect">
-            <a:avLst/>
-          </a:prstGeom>
-          <a:noFill/>
-        </p:spPr>
-        <p:txBody>
-          <a:bodyPr wrap="square">
-            <a:spAutoFit/>
-          </a:bodyPr>
-          <a:lstStyle/>
-          <a:p>
-            <a:pPr algn="l">
-              <a:lnSpc>
-                <a:spcPct val="125000"/>
-              </a:lnSpc>
-            </a:pPr>
-            <a:r>
-              <a:rPr sz="1500" b="0">
-                <a:solidFill>
-                  <a:srgbClr val="6B7485"/>
-                </a:solidFill>
-                <a:latin typeface="微软雅黑"/>
-                <a:ea typeface="微软雅黑"/>
-                <a:cs typeface="微软雅黑"/>
-              </a:rPr>
-              <a:t>均为系统实际界面截图，未做美化；这套流程在本地双击启动脚本即可复现</a:t>
-            </a:r>
-          </a:p>
-        </p:txBody>
-      </p:sp>
-      <p:sp>
-        <p:nvSpPr>
-          <p:cNvPr id="25" name="Rectangle 24"/>
+          <p:cNvPr id="24" name="Rectangle 23"/>
           <p:cNvSpPr/>
           <p:nvPr/>
         </p:nvSpPr>
@@ -12742,7 +12660,7 @@
       </p:sp>
       <p:sp>
         <p:nvSpPr>
-          <p:cNvPr id="26" name="TextBox 25"/>
+          <p:cNvPr id="25" name="TextBox 24"/>
           <p:cNvSpPr txBox="1"/>
           <p:nvPr/>
         </p:nvSpPr>
@@ -12783,7 +12701,7 @@
       </p:sp>
       <p:sp>
         <p:nvSpPr>
-          <p:cNvPr id="27" name="TextBox 26"/>
+          <p:cNvPr id="26" name="TextBox 25"/>
           <p:cNvSpPr txBox="1"/>
           <p:nvPr/>
         </p:nvSpPr>

--- a/docs/competition/9月22日路演-社区先知.pptx
+++ b/docs/competition/9月22日路演-社区先知.pptx
@@ -586,7 +586,7 @@
           <a:lstStyle/>
           <a:p>
             <a:r>
-              <a:t>备用页：被追问「为什么不全用大模型」时翻到这页。</a:t>
+              <a:t>功能全景：报修全状态机、提案全生命周期、通知四类、政策问答带出处、健康咨询不诊断并转人工、天气联动、网格员工作台的 AI 助手与导出、以及转人工的处理包（用户信息 + 执行链 + 待确认事项）。</a:t>
             </a:r>
           </a:p>
         </p:txBody>
@@ -656,7 +656,7 @@
           <a:lstStyle/>
           <a:p>
             <a:r>
-              <a:t>备用页：被追问「会不会编造、数据安全吗」时翻到这页。</a:t>
+              <a:t>几个能复算的数字：638 项测试全绿、550 并发零失败、48 条金标第一位命中 100%、ruff 0；数据库 v46、约 50 张表。都是本机自测，不是第三方测评。</a:t>
             </a:r>
           </a:p>
         </p:txBody>
@@ -726,7 +726,7 @@
           <a:lstStyle/>
           <a:p>
             <a:r>
-              <a:t>附录：若对方想看更多界面细节，翻到这页（政策问答依据、工单留痕、报修列表）。</a:t>
+              <a:t>它现在的位置：工程原型，没在真实街道试点，没有运营数据，商业模式在探索。今天不是来要投资，是来请教三个问题：多智能体的自动边界怎么划、第一个试点社区怎么谈、没有历史数据怎么冷启动。张奶奶那条路，现在是一句话。</a:t>
             </a:r>
           </a:p>
         </p:txBody>
@@ -796,7 +796,7 @@
           <a:lstStyle/>
           <a:p>
             <a:r>
-              <a:t>附录：若对方想知道怎么在电脑上看实物，翻到这页。</a:t>
+              <a:t>备用页：被追问「为什么不全用大模型」时翻到这页。</a:t>
             </a:r>
           </a:p>
         </p:txBody>
@@ -866,7 +866,7 @@
           <a:lstStyle/>
           <a:p>
             <a:r>
-              <a:t>附录：功能全景，方便独立阅读的人核对「到底能做什么」。</a:t>
+              <a:t>备用页：被追问「会不会编造、数据安全吗」时翻到这页。</a:t>
             </a:r>
           </a:p>
         </p:txBody>
@@ -936,7 +936,7 @@
           <a:lstStyle/>
           <a:p>
             <a:r>
-              <a:t>附录：架构与数据流，用一张图讲清三端、主服务、9 个角色、本地数据库的关系。</a:t>
+              <a:t>附录：若对方想知道怎么在电脑上看实物，翻到这页。</a:t>
             </a:r>
           </a:p>
         </p:txBody>
@@ -1216,7 +1216,7 @@
           <a:lstStyle/>
           <a:p>
             <a:r>
-              <a:t>重点页（90 秒）：9 个角色不写死流程，靠黑板 + 5 种消息真来往；每轮过校验员与仲裁器，合规审计一票否决。大模型只做意图/追问/政策生成，状态机、派单、权限、加密永远走规则；四个开关默认关。防编造三招：强制出处、回查数据库、敏感词与权限审计。实话：这是按规则分工协作，不是完全自主的大模型智能体。</a:t>
+              <a:t>它是怎么搭起来的：三端共用一个 FastAPI 后端，中间是 9 个角色在黑板协作，最下面是本地数据库（约 50 张表、手机号加密、全流程留痕）。整条链路不依赖外部服务，一台普通电脑就能跑。</a:t>
             </a:r>
           </a:p>
         </p:txBody>
@@ -1286,7 +1286,7 @@
           <a:lstStyle/>
           <a:p>
             <a:r>
-              <a:t>老人端是单独重做的：大字大按钮、免登录、语音报修、用药提醒点一下。紧急求助要长按 3 秒再确认——我怕老人放兜里误触。</a:t>
+              <a:t>重点页（90 秒）：9 个角色不写死流程，靠黑板 + 5 种消息真来往；每轮过校验员与仲裁器，合规审计一票否决。大模型只做意图/追问/政策生成，状态机、派单、权限、加密永远走规则；四个开关默认关。防编造三招：强制出处、回查数据库、敏感词与权限审计。实话：这是按规则分工协作，不是完全自主的大模型智能体。</a:t>
             </a:r>
           </a:p>
         </p:txBody>
@@ -1356,7 +1356,7 @@
           <a:lstStyle/>
           <a:p>
             <a:r>
-              <a:t>五步走查（本场不需要实操，全靠 PPT 里的截图）：① 居民一句话报修 → ② 政策问答带依据与属地 → ③ 天气联动点开执行链 → ④ 老人端长按求助出确认框 → ⑤ 网格员工作台看待办。讲的时候按图说：这一步居民做了什么、系统回了什么。</a:t>
+              <a:t>老人端是单独重做的：大字大按钮、免登录、语音报修、用药提醒点一下。紧急求助要长按 3 秒再确认——我怕老人放兜里误触。</a:t>
             </a:r>
           </a:p>
         </p:txBody>
@@ -1426,7 +1426,7 @@
           <a:lstStyle/>
           <a:p>
             <a:r>
-              <a:t>几个能复算的数字：638 项测试全绿、550 并发零失败、48 条金标第一位命中 100%、ruff 0；数据库 v46、约 50 张表。都是本机自测，不是第三方测评。</a:t>
+              <a:t>五步走查（本场不需要实操，全靠 PPT 里的截图）：① 居民一句话报修 → ② 政策问答带依据与属地 → ③ 天气联动点开执行链 → ④ 老人端长按求助出确认框 → ⑤ 网格员工作台看待办。讲的时候按图说：这一步居民做了什么、系统回了什么。</a:t>
             </a:r>
           </a:p>
         </p:txBody>
@@ -1496,7 +1496,7 @@
           <a:lstStyle/>
           <a:p>
             <a:r>
-              <a:t>它现在的位置：工程原型，没在真实街道试点，没有运营数据，商业模式在探索。今天不是来要投资，是来请教三个问题：多智能体的自动边界怎么划、第一个试点社区怎么谈、没有历史数据怎么冷启动。张奶奶那条路，现在是一句话。</a:t>
+              <a:t>再看几处细节：政策问答的答案下面有知识库依据和适用地区；工单详情里能看到谁在什么时候处理；居民端报修列表状态一目了然。这三张是五步之外的补充。</a:t>
             </a:r>
           </a:p>
         </p:txBody>
@@ -4787,7 +4787,7 @@
                 <a:ea typeface="微软雅黑"/>
                 <a:cs typeface="微软雅黑"/>
               </a:rPr>
-              <a:t>痛点  →  方案  →  五步流程  →  数字与诉求</a:t>
+              <a:t>痛点 → 方案 → 机制 → 界面 → 数字 → 诉求</a:t>
             </a:r>
           </a:p>
         </p:txBody>
@@ -4836,7 +4836,51 @@
       <p:grpSpPr/>
       <p:sp>
         <p:nvSpPr>
-          <p:cNvPr id="2" name="Rounded Rectangle 1"/>
+          <p:cNvPr id="2" name="Rectangle 1"/>
+          <p:cNvSpPr/>
+          <p:nvPr/>
+        </p:nvSpPr>
+        <p:spPr>
+          <a:xfrm>
+            <a:off x="0" y="0"/>
+            <a:ext cx="12191695" cy="6858000"/>
+          </a:xfrm>
+          <a:prstGeom prst="rect">
+            <a:avLst/>
+          </a:prstGeom>
+          <a:solidFill>
+            <a:srgbClr val="122A51"/>
+          </a:solidFill>
+          <a:ln>
+            <a:noFill/>
+          </a:ln>
+          <a:effectLst/>
+        </p:spPr>
+        <p:style>
+          <a:lnRef idx="1">
+            <a:schemeClr val="accent1"/>
+          </a:lnRef>
+          <a:fillRef idx="3">
+            <a:schemeClr val="accent1"/>
+          </a:fillRef>
+          <a:effectRef idx="2">
+            <a:schemeClr val="accent1"/>
+          </a:effectRef>
+          <a:fontRef idx="minor">
+            <a:schemeClr val="lt1"/>
+          </a:fontRef>
+        </p:style>
+        <p:txBody>
+          <a:bodyPr rtlCol="0" anchor="ctr"/>
+          <a:lstStyle/>
+          <a:p>
+            <a:pPr algn="ctr"/>
+          </a:p>
+        </p:txBody>
+      </p:sp>
+      <p:sp>
+        <p:nvSpPr>
+          <p:cNvPr id="3" name="Rounded Rectangle 2"/>
           <p:cNvSpPr/>
           <p:nvPr/>
         </p:nvSpPr>
@@ -4880,7 +4924,7 @@
       </p:sp>
       <p:sp>
         <p:nvSpPr>
-          <p:cNvPr id="3" name="TextBox 2"/>
+          <p:cNvPr id="4" name="TextBox 3"/>
           <p:cNvSpPr txBox="1"/>
           <p:nvPr/>
         </p:nvSpPr>
@@ -4914,21 +4958,21 @@
                 <a:ea typeface="微软雅黑"/>
                 <a:cs typeface="微软雅黑"/>
               </a:rPr>
-              <a:t>备用：防编造与数据安全</a:t>
-            </a:r>
-          </a:p>
-        </p:txBody>
-      </p:sp>
-      <p:sp>
-        <p:nvSpPr>
-          <p:cNvPr id="4" name="TextBox 3"/>
+              <a:t>几个能复算的数字</a:t>
+            </a:r>
+          </a:p>
+        </p:txBody>
+      </p:sp>
+      <p:sp>
+        <p:nvSpPr>
+          <p:cNvPr id="5" name="TextBox 4"/>
           <p:cNvSpPr txBox="1"/>
           <p:nvPr/>
         </p:nvSpPr>
         <p:spPr>
           <a:xfrm>
-            <a:off x="868680" y="1828800"/>
-            <a:ext cx="10424160" cy="3108960"/>
+            <a:off x="868680" y="1920240"/>
+            <a:ext cx="4937760" cy="1097280"/>
           </a:xfrm>
           <a:prstGeom prst="rect">
             <a:avLst/>
@@ -4943,73 +4987,473 @@
           <a:p>
             <a:pPr algn="l">
               <a:lnSpc>
-                <a:spcPct val="150000"/>
-              </a:lnSpc>
-            </a:pPr>
-            <a:r>
-              <a:rPr sz="2600" b="0">
-                <a:solidFill>
-                  <a:srgbClr val="1B2233"/>
-                </a:solidFill>
-                <a:latin typeface="微软雅黑"/>
-                <a:ea typeface="微软雅黑"/>
-                <a:cs typeface="微软雅黑"/>
-              </a:rPr>
-              <a:t>政策回答强制挂知识库出处，回答完回查数据库</a:t>
-            </a:r>
-          </a:p>
+                <a:spcPct val="125000"/>
+              </a:lnSpc>
+            </a:pPr>
+            <a:r>
+              <a:rPr sz="7200" b="1">
+                <a:solidFill>
+                  <a:srgbClr val="FFFFFF"/>
+                </a:solidFill>
+                <a:latin typeface="微软雅黑"/>
+                <a:ea typeface="微软雅黑"/>
+                <a:cs typeface="微软雅黑"/>
+              </a:rPr>
+              <a:t>638</a:t>
+            </a:r>
+          </a:p>
+        </p:txBody>
+      </p:sp>
+      <p:sp>
+        <p:nvSpPr>
+          <p:cNvPr id="6" name="TextBox 5"/>
+          <p:cNvSpPr txBox="1"/>
+          <p:nvPr/>
+        </p:nvSpPr>
+        <p:spPr>
+          <a:xfrm>
+            <a:off x="868680" y="2971800"/>
+            <a:ext cx="4937760" cy="548640"/>
+          </a:xfrm>
+          <a:prstGeom prst="rect">
+            <a:avLst/>
+          </a:prstGeom>
+          <a:noFill/>
+        </p:spPr>
+        <p:txBody>
+          <a:bodyPr wrap="square">
+            <a:spAutoFit/>
+          </a:bodyPr>
+          <a:lstStyle/>
           <a:p>
             <a:pPr algn="l">
               <a:lnSpc>
-                <a:spcPct val="150000"/>
-              </a:lnSpc>
-            </a:pPr>
-            <a:r>
-              <a:rPr sz="2600" b="0">
-                <a:solidFill>
-                  <a:srgbClr val="1B2233"/>
-                </a:solidFill>
-                <a:latin typeface="微软雅黑"/>
-                <a:ea typeface="微软雅黑"/>
-                <a:cs typeface="微软雅黑"/>
-              </a:rPr>
-              <a:t>敏感词 + 权限再审计一道；查不到就转人工</a:t>
-            </a:r>
-          </a:p>
+                <a:spcPct val="125000"/>
+              </a:lnSpc>
+            </a:pPr>
+            <a:r>
+              <a:rPr sz="2200" b="0">
+                <a:solidFill>
+                  <a:srgbClr val="FF8C42"/>
+                </a:solidFill>
+                <a:latin typeface="微软雅黑"/>
+                <a:ea typeface="微软雅黑"/>
+                <a:cs typeface="微软雅黑"/>
+              </a:rPr>
+              <a:t>项测试 · 全绿</a:t>
+            </a:r>
+          </a:p>
+        </p:txBody>
+      </p:sp>
+      <p:sp>
+        <p:nvSpPr>
+          <p:cNvPr id="7" name="TextBox 6"/>
+          <p:cNvSpPr txBox="1"/>
+          <p:nvPr/>
+        </p:nvSpPr>
+        <p:spPr>
+          <a:xfrm>
+            <a:off x="6355080" y="1920240"/>
+            <a:ext cx="4937760" cy="1097280"/>
+          </a:xfrm>
+          <a:prstGeom prst="rect">
+            <a:avLst/>
+          </a:prstGeom>
+          <a:noFill/>
+        </p:spPr>
+        <p:txBody>
+          <a:bodyPr wrap="square">
+            <a:spAutoFit/>
+          </a:bodyPr>
+          <a:lstStyle/>
           <a:p>
             <a:pPr algn="l">
               <a:lnSpc>
-                <a:spcPct val="150000"/>
-              </a:lnSpc>
-            </a:pPr>
-            <a:r>
-              <a:rPr sz="2600" b="0">
-                <a:solidFill>
-                  <a:srgbClr val="1B2233"/>
-                </a:solidFill>
-                <a:latin typeface="微软雅黑"/>
-                <a:ea typeface="微软雅黑"/>
-                <a:cs typeface="微软雅黑"/>
-              </a:rPr>
-              <a:t>手机号 AES-256-GCM 加密存储，展示导出脱敏</a:t>
-            </a:r>
-          </a:p>
+                <a:spcPct val="125000"/>
+              </a:lnSpc>
+            </a:pPr>
+            <a:r>
+              <a:rPr sz="7200" b="1">
+                <a:solidFill>
+                  <a:srgbClr val="FFFFFF"/>
+                </a:solidFill>
+                <a:latin typeface="微软雅黑"/>
+                <a:ea typeface="微软雅黑"/>
+                <a:cs typeface="微软雅黑"/>
+              </a:rPr>
+              <a:t>550</a:t>
+            </a:r>
+          </a:p>
+        </p:txBody>
+      </p:sp>
+      <p:sp>
+        <p:nvSpPr>
+          <p:cNvPr id="8" name="TextBox 7"/>
+          <p:cNvSpPr txBox="1"/>
+          <p:nvPr/>
+        </p:nvSpPr>
+        <p:spPr>
+          <a:xfrm>
+            <a:off x="6355080" y="2971800"/>
+            <a:ext cx="4937760" cy="548640"/>
+          </a:xfrm>
+          <a:prstGeom prst="rect">
+            <a:avLst/>
+          </a:prstGeom>
+          <a:noFill/>
+        </p:spPr>
+        <p:txBody>
+          <a:bodyPr wrap="square">
+            <a:spAutoFit/>
+          </a:bodyPr>
+          <a:lstStyle/>
           <a:p>
             <a:pPr algn="l">
               <a:lnSpc>
-                <a:spcPct val="150000"/>
-              </a:lnSpc>
-            </a:pPr>
-            <a:r>
-              <a:rPr sz="2600" b="0">
-                <a:solidFill>
-                  <a:srgbClr val="1B2233"/>
-                </a:solidFill>
-                <a:latin typeface="微软雅黑"/>
-                <a:ea typeface="微软雅黑"/>
-                <a:cs typeface="微软雅黑"/>
-              </a:rPr>
-              <a:t>SQL 参数化；合规审计员有一票否决</a:t>
+                <a:spcPct val="125000"/>
+              </a:lnSpc>
+            </a:pPr>
+            <a:r>
+              <a:rPr sz="2200" b="0">
+                <a:solidFill>
+                  <a:srgbClr val="FF8C42"/>
+                </a:solidFill>
+                <a:latin typeface="微软雅黑"/>
+                <a:ea typeface="微软雅黑"/>
+                <a:cs typeface="微软雅黑"/>
+              </a:rPr>
+              <a:t>并发 · 零失败</a:t>
+            </a:r>
+          </a:p>
+        </p:txBody>
+      </p:sp>
+      <p:sp>
+        <p:nvSpPr>
+          <p:cNvPr id="9" name="TextBox 8"/>
+          <p:cNvSpPr txBox="1"/>
+          <p:nvPr/>
+        </p:nvSpPr>
+        <p:spPr>
+          <a:xfrm>
+            <a:off x="868680" y="3840480"/>
+            <a:ext cx="4937760" cy="1097280"/>
+          </a:xfrm>
+          <a:prstGeom prst="rect">
+            <a:avLst/>
+          </a:prstGeom>
+          <a:noFill/>
+        </p:spPr>
+        <p:txBody>
+          <a:bodyPr wrap="square">
+            <a:spAutoFit/>
+          </a:bodyPr>
+          <a:lstStyle/>
+          <a:p>
+            <a:pPr algn="l">
+              <a:lnSpc>
+                <a:spcPct val="125000"/>
+              </a:lnSpc>
+            </a:pPr>
+            <a:r>
+              <a:rPr sz="7200" b="1">
+                <a:solidFill>
+                  <a:srgbClr val="FFFFFF"/>
+                </a:solidFill>
+                <a:latin typeface="微软雅黑"/>
+                <a:ea typeface="微软雅黑"/>
+                <a:cs typeface="微软雅黑"/>
+              </a:rPr>
+              <a:t>48</a:t>
+            </a:r>
+          </a:p>
+        </p:txBody>
+      </p:sp>
+      <p:sp>
+        <p:nvSpPr>
+          <p:cNvPr id="10" name="TextBox 9"/>
+          <p:cNvSpPr txBox="1"/>
+          <p:nvPr/>
+        </p:nvSpPr>
+        <p:spPr>
+          <a:xfrm>
+            <a:off x="868680" y="4892040"/>
+            <a:ext cx="4937760" cy="548640"/>
+          </a:xfrm>
+          <a:prstGeom prst="rect">
+            <a:avLst/>
+          </a:prstGeom>
+          <a:noFill/>
+        </p:spPr>
+        <p:txBody>
+          <a:bodyPr wrap="square">
+            <a:spAutoFit/>
+          </a:bodyPr>
+          <a:lstStyle/>
+          <a:p>
+            <a:pPr algn="l">
+              <a:lnSpc>
+                <a:spcPct val="125000"/>
+              </a:lnSpc>
+            </a:pPr>
+            <a:r>
+              <a:rPr sz="2200" b="0">
+                <a:solidFill>
+                  <a:srgbClr val="FF8C42"/>
+                </a:solidFill>
+                <a:latin typeface="微软雅黑"/>
+                <a:ea typeface="微软雅黑"/>
+                <a:cs typeface="微软雅黑"/>
+              </a:rPr>
+              <a:t>条金标 · 第一位命中 100%</a:t>
+            </a:r>
+          </a:p>
+        </p:txBody>
+      </p:sp>
+      <p:sp>
+        <p:nvSpPr>
+          <p:cNvPr id="11" name="TextBox 10"/>
+          <p:cNvSpPr txBox="1"/>
+          <p:nvPr/>
+        </p:nvSpPr>
+        <p:spPr>
+          <a:xfrm>
+            <a:off x="6355080" y="3840480"/>
+            <a:ext cx="4937760" cy="1097280"/>
+          </a:xfrm>
+          <a:prstGeom prst="rect">
+            <a:avLst/>
+          </a:prstGeom>
+          <a:noFill/>
+        </p:spPr>
+        <p:txBody>
+          <a:bodyPr wrap="square">
+            <a:spAutoFit/>
+          </a:bodyPr>
+          <a:lstStyle/>
+          <a:p>
+            <a:pPr algn="l">
+              <a:lnSpc>
+                <a:spcPct val="125000"/>
+              </a:lnSpc>
+            </a:pPr>
+            <a:r>
+              <a:rPr sz="7200" b="1">
+                <a:solidFill>
+                  <a:srgbClr val="FFFFFF"/>
+                </a:solidFill>
+                <a:latin typeface="微软雅黑"/>
+                <a:ea typeface="微软雅黑"/>
+                <a:cs typeface="微软雅黑"/>
+              </a:rPr>
+              <a:t>0</a:t>
+            </a:r>
+          </a:p>
+        </p:txBody>
+      </p:sp>
+      <p:sp>
+        <p:nvSpPr>
+          <p:cNvPr id="12" name="TextBox 11"/>
+          <p:cNvSpPr txBox="1"/>
+          <p:nvPr/>
+        </p:nvSpPr>
+        <p:spPr>
+          <a:xfrm>
+            <a:off x="6355080" y="4892040"/>
+            <a:ext cx="4937760" cy="548640"/>
+          </a:xfrm>
+          <a:prstGeom prst="rect">
+            <a:avLst/>
+          </a:prstGeom>
+          <a:noFill/>
+        </p:spPr>
+        <p:txBody>
+          <a:bodyPr wrap="square">
+            <a:spAutoFit/>
+          </a:bodyPr>
+          <a:lstStyle/>
+          <a:p>
+            <a:pPr algn="l">
+              <a:lnSpc>
+                <a:spcPct val="125000"/>
+              </a:lnSpc>
+            </a:pPr>
+            <a:r>
+              <a:rPr sz="2200" b="0">
+                <a:solidFill>
+                  <a:srgbClr val="FF8C42"/>
+                </a:solidFill>
+                <a:latin typeface="微软雅黑"/>
+                <a:ea typeface="微软雅黑"/>
+                <a:cs typeface="微软雅黑"/>
+              </a:rPr>
+              <a:t>ruff 问题</a:t>
+            </a:r>
+          </a:p>
+        </p:txBody>
+      </p:sp>
+      <p:sp>
+        <p:nvSpPr>
+          <p:cNvPr id="13" name="TextBox 12"/>
+          <p:cNvSpPr txBox="1"/>
+          <p:nvPr/>
+        </p:nvSpPr>
+        <p:spPr>
+          <a:xfrm>
+            <a:off x="868680" y="5760720"/>
+            <a:ext cx="10058400" cy="640080"/>
+          </a:xfrm>
+          <a:prstGeom prst="rect">
+            <a:avLst/>
+          </a:prstGeom>
+          <a:noFill/>
+        </p:spPr>
+        <p:txBody>
+          <a:bodyPr wrap="square">
+            <a:spAutoFit/>
+          </a:bodyPr>
+          <a:lstStyle/>
+          <a:p>
+            <a:pPr algn="l">
+              <a:lnSpc>
+                <a:spcPct val="125000"/>
+              </a:lnSpc>
+            </a:pPr>
+            <a:r>
+              <a:rPr sz="2000" b="0">
+                <a:solidFill>
+                  <a:srgbClr val="FFFFFF"/>
+                </a:solidFill>
+                <a:latin typeface="微软雅黑"/>
+                <a:ea typeface="微软雅黑"/>
+                <a:cs typeface="微软雅黑"/>
+              </a:rPr>
+              <a:t>数据库 schema v46 · 约 50 张表　｜　本机自测，非第三方测评</a:t>
+            </a:r>
+          </a:p>
+        </p:txBody>
+      </p:sp>
+      <p:sp>
+        <p:nvSpPr>
+          <p:cNvPr id="14" name="Rectangle 13"/>
+          <p:cNvSpPr/>
+          <p:nvPr/>
+        </p:nvSpPr>
+        <p:spPr>
+          <a:xfrm>
+            <a:off x="548640" y="6510528"/>
+            <a:ext cx="10881360" cy="9525"/>
+          </a:xfrm>
+          <a:prstGeom prst="rect">
+            <a:avLst/>
+          </a:prstGeom>
+          <a:solidFill>
+            <a:srgbClr val="DDE3EE"/>
+          </a:solidFill>
+          <a:ln>
+            <a:noFill/>
+          </a:ln>
+          <a:effectLst/>
+        </p:spPr>
+        <p:style>
+          <a:lnRef idx="1">
+            <a:schemeClr val="accent1"/>
+          </a:lnRef>
+          <a:fillRef idx="3">
+            <a:schemeClr val="accent1"/>
+          </a:fillRef>
+          <a:effectRef idx="2">
+            <a:schemeClr val="accent1"/>
+          </a:effectRef>
+          <a:fontRef idx="minor">
+            <a:schemeClr val="lt1"/>
+          </a:fontRef>
+        </p:style>
+        <p:txBody>
+          <a:bodyPr rtlCol="0" anchor="ctr"/>
+          <a:lstStyle/>
+          <a:p>
+            <a:pPr algn="ctr"/>
+          </a:p>
+        </p:txBody>
+      </p:sp>
+      <p:sp>
+        <p:nvSpPr>
+          <p:cNvPr id="15" name="TextBox 14"/>
+          <p:cNvSpPr txBox="1"/>
+          <p:nvPr/>
+        </p:nvSpPr>
+        <p:spPr>
+          <a:xfrm>
+            <a:off x="548640" y="6565392"/>
+            <a:ext cx="7315200" cy="274320"/>
+          </a:xfrm>
+          <a:prstGeom prst="rect">
+            <a:avLst/>
+          </a:prstGeom>
+          <a:noFill/>
+        </p:spPr>
+        <p:txBody>
+          <a:bodyPr wrap="square">
+            <a:spAutoFit/>
+          </a:bodyPr>
+          <a:lstStyle/>
+          <a:p>
+            <a:pPr algn="l">
+              <a:lnSpc>
+                <a:spcPct val="125000"/>
+              </a:lnSpc>
+            </a:pPr>
+            <a:r>
+              <a:rPr sz="1100" b="0">
+                <a:solidFill>
+                  <a:srgbClr val="6B7485"/>
+                </a:solidFill>
+                <a:latin typeface="微软雅黑"/>
+                <a:ea typeface="微软雅黑"/>
+                <a:cs typeface="微软雅黑"/>
+              </a:rPr>
+              <a:t>社区先知 CommunityInsight</a:t>
+            </a:r>
+          </a:p>
+        </p:txBody>
+      </p:sp>
+      <p:sp>
+        <p:nvSpPr>
+          <p:cNvPr id="16" name="TextBox 15"/>
+          <p:cNvSpPr txBox="1"/>
+          <p:nvPr/>
+        </p:nvSpPr>
+        <p:spPr>
+          <a:xfrm>
+            <a:off x="10058400" y="6565392"/>
+            <a:ext cx="1371600" cy="274320"/>
+          </a:xfrm>
+          <a:prstGeom prst="rect">
+            <a:avLst/>
+          </a:prstGeom>
+          <a:noFill/>
+        </p:spPr>
+        <p:txBody>
+          <a:bodyPr wrap="square">
+            <a:spAutoFit/>
+          </a:bodyPr>
+          <a:lstStyle/>
+          <a:p>
+            <a:pPr algn="r">
+              <a:lnSpc>
+                <a:spcPct val="125000"/>
+              </a:lnSpc>
+            </a:pPr>
+            <a:r>
+              <a:rPr sz="1100" b="0">
+                <a:solidFill>
+                  <a:srgbClr val="6B7485"/>
+                </a:solidFill>
+                <a:latin typeface="微软雅黑"/>
+                <a:ea typeface="微软雅黑"/>
+                <a:cs typeface="微软雅黑"/>
+              </a:rPr>
+              <a:t>10 / 11</a:t>
             </a:r>
           </a:p>
         </p:txBody>
@@ -5112,35 +5556,55 @@
                 <a:ea typeface="微软雅黑"/>
                 <a:cs typeface="微软雅黑"/>
               </a:rPr>
-              <a:t>附录 · 更多界面</a:t>
-            </a:r>
-          </a:p>
-        </p:txBody>
-      </p:sp>
-      <p:pic>
-        <p:nvPicPr>
-          <p:cNvPr id="4" name="Picture 3" descr="03-政策问答带依据与属地.png"/>
-          <p:cNvPicPr>
-            <a:picLocks noChangeAspect="1"/>
-          </p:cNvPicPr>
-          <p:nvPr/>
-        </p:nvPicPr>
-        <p:blipFill>
-          <a:blip r:embed="rId2"/>
-          <a:stretch>
-            <a:fillRect/>
-          </a:stretch>
-        </p:blipFill>
-        <p:spPr>
-          <a:xfrm>
-            <a:off x="868680" y="1645920"/>
-            <a:ext cx="3291840" cy="2057400"/>
-          </a:xfrm>
-          <a:prstGeom prst="rect">
-            <a:avLst/>
-          </a:prstGeom>
-        </p:spPr>
-      </p:pic>
+              <a:t>它现在的位置，和我想请教的三件事</a:t>
+            </a:r>
+          </a:p>
+        </p:txBody>
+      </p:sp>
+      <p:sp>
+        <p:nvSpPr>
+          <p:cNvPr id="4" name="Rounded Rectangle 3"/>
+          <p:cNvSpPr/>
+          <p:nvPr/>
+        </p:nvSpPr>
+        <p:spPr>
+          <a:xfrm>
+            <a:off x="868680" y="1691640"/>
+            <a:ext cx="10424160" cy="914400"/>
+          </a:xfrm>
+          <a:prstGeom prst="roundRect">
+            <a:avLst/>
+          </a:prstGeom>
+          <a:solidFill>
+            <a:srgbClr val="F2F5FB"/>
+          </a:solidFill>
+          <a:ln>
+            <a:noFill/>
+          </a:ln>
+          <a:effectLst/>
+        </p:spPr>
+        <p:style>
+          <a:lnRef idx="1">
+            <a:schemeClr val="accent1"/>
+          </a:lnRef>
+          <a:fillRef idx="3">
+            <a:schemeClr val="accent1"/>
+          </a:fillRef>
+          <a:effectRef idx="2">
+            <a:schemeClr val="accent1"/>
+          </a:effectRef>
+          <a:fontRef idx="minor">
+            <a:schemeClr val="lt1"/>
+          </a:fontRef>
+        </p:style>
+        <p:txBody>
+          <a:bodyPr rtlCol="0" anchor="ctr"/>
+          <a:lstStyle/>
+          <a:p>
+            <a:pPr algn="ctr"/>
+          </a:p>
+        </p:txBody>
+      </p:sp>
       <p:sp>
         <p:nvSpPr>
           <p:cNvPr id="5" name="TextBox 4"/>
@@ -5149,8 +5613,8 @@
         </p:nvSpPr>
         <p:spPr>
           <a:xfrm>
-            <a:off x="868680" y="3886200"/>
-            <a:ext cx="3291840" cy="822960"/>
+            <a:off x="1188720" y="1828800"/>
+            <a:ext cx="9875520" cy="640080"/>
           </a:xfrm>
           <a:prstGeom prst="rect">
             <a:avLst/>
@@ -5169,53 +5633,29 @@
               </a:lnSpc>
             </a:pPr>
             <a:r>
-              <a:rPr sz="1400" b="0">
-                <a:solidFill>
-                  <a:srgbClr val="6B7485"/>
-                </a:solidFill>
-                <a:latin typeface="微软雅黑"/>
-                <a:ea typeface="微软雅黑"/>
-                <a:cs typeface="微软雅黑"/>
-              </a:rPr>
-              <a:t>政策问答：答案下方给知识库依据，并标注适用地区</a:t>
-            </a:r>
-          </a:p>
-        </p:txBody>
-      </p:sp>
-      <p:pic>
-        <p:nvPicPr>
-          <p:cNvPr id="6" name="Picture 5" descr="05-工单详情与处理留痕.png"/>
-          <p:cNvPicPr>
-            <a:picLocks noChangeAspect="1"/>
-          </p:cNvPicPr>
-          <p:nvPr/>
-        </p:nvPicPr>
-        <p:blipFill>
-          <a:blip r:embed="rId3"/>
-          <a:stretch>
-            <a:fillRect/>
-          </a:stretch>
-        </p:blipFill>
-        <p:spPr>
-          <a:xfrm>
-            <a:off x="4434840" y="1645920"/>
-            <a:ext cx="3291840" cy="2057400"/>
-          </a:xfrm>
-          <a:prstGeom prst="rect">
-            <a:avLst/>
-          </a:prstGeom>
-        </p:spPr>
-      </p:pic>
-      <p:sp>
-        <p:nvSpPr>
-          <p:cNvPr id="7" name="TextBox 6"/>
+              <a:rPr sz="2400" b="0">
+                <a:solidFill>
+                  <a:srgbClr val="1B2233"/>
+                </a:solidFill>
+                <a:latin typeface="微软雅黑"/>
+                <a:ea typeface="微软雅黑"/>
+                <a:cs typeface="微软雅黑"/>
+              </a:rPr>
+              <a:t>工程原型：还没在真实街道试点，没有运营数据，商业模式在探索</a:t>
+            </a:r>
+          </a:p>
+        </p:txBody>
+      </p:sp>
+      <p:sp>
+        <p:nvSpPr>
+          <p:cNvPr id="6" name="TextBox 5"/>
           <p:cNvSpPr txBox="1"/>
           <p:nvPr/>
         </p:nvSpPr>
         <p:spPr>
           <a:xfrm>
-            <a:off x="4434840" y="3886200"/>
-            <a:ext cx="3291840" cy="822960"/>
+            <a:off x="1097280" y="3063240"/>
+            <a:ext cx="7680960" cy="640080"/>
           </a:xfrm>
           <a:prstGeom prst="rect">
             <a:avLst/>
@@ -5234,53 +5674,29 @@
               </a:lnSpc>
             </a:pPr>
             <a:r>
-              <a:rPr sz="1400" b="0">
-                <a:solidFill>
-                  <a:srgbClr val="6B7485"/>
-                </a:solidFill>
-                <a:latin typeface="微软雅黑"/>
-                <a:ea typeface="微软雅黑"/>
-                <a:cs typeface="微软雅黑"/>
-              </a:rPr>
-              <a:t>工单详情：谁在什么时候处理，全有留痕</a:t>
-            </a:r>
-          </a:p>
-        </p:txBody>
-      </p:sp>
-      <p:pic>
-        <p:nvPicPr>
-          <p:cNvPr id="8" name="Picture 7" descr="05-工单详情与处理留痕.png"/>
-          <p:cNvPicPr>
-            <a:picLocks noChangeAspect="1"/>
-          </p:cNvPicPr>
-          <p:nvPr/>
-        </p:nvPicPr>
-        <p:blipFill>
-          <a:blip r:embed="rId3"/>
-          <a:stretch>
-            <a:fillRect/>
-          </a:stretch>
-        </p:blipFill>
-        <p:spPr>
-          <a:xfrm>
-            <a:off x="8001000" y="1645920"/>
-            <a:ext cx="3291840" cy="2057400"/>
-          </a:xfrm>
-          <a:prstGeom prst="rect">
-            <a:avLst/>
-          </a:prstGeom>
-        </p:spPr>
-      </p:pic>
-      <p:sp>
-        <p:nvSpPr>
-          <p:cNvPr id="9" name="TextBox 8"/>
+              <a:rPr sz="2600" b="0">
+                <a:solidFill>
+                  <a:srgbClr val="1B2233"/>
+                </a:solidFill>
+                <a:latin typeface="微软雅黑"/>
+                <a:ea typeface="微软雅黑"/>
+                <a:cs typeface="微软雅黑"/>
+              </a:rPr>
+              <a:t>① 多智能体的「自动」边界怎么划？</a:t>
+            </a:r>
+          </a:p>
+        </p:txBody>
+      </p:sp>
+      <p:sp>
+        <p:nvSpPr>
+          <p:cNvPr id="7" name="TextBox 6"/>
           <p:cNvSpPr txBox="1"/>
           <p:nvPr/>
         </p:nvSpPr>
         <p:spPr>
           <a:xfrm>
-            <a:off x="8001000" y="3886200"/>
-            <a:ext cx="3291840" cy="822960"/>
+            <a:off x="8961120" y="3154680"/>
+            <a:ext cx="2377440" cy="548640"/>
           </a:xfrm>
           <a:prstGeom prst="rect">
             <a:avLst/>
@@ -5299,7 +5715,7 @@
               </a:lnSpc>
             </a:pPr>
             <a:r>
-              <a:rPr sz="1400" b="0">
+              <a:rPr sz="1500" b="0">
                 <a:solidFill>
                   <a:srgbClr val="6B7485"/>
                 </a:solidFill>
@@ -5307,7 +5723,338 @@
                 <a:ea typeface="微软雅黑"/>
                 <a:cs typeface="微软雅黑"/>
               </a:rPr>
-              <a:t>居民端报修列表：状态一目了然</a:t>
+              <a:t>想请教技术专家</a:t>
+            </a:r>
+          </a:p>
+        </p:txBody>
+      </p:sp>
+      <p:sp>
+        <p:nvSpPr>
+          <p:cNvPr id="8" name="TextBox 7"/>
+          <p:cNvSpPr txBox="1"/>
+          <p:nvPr/>
+        </p:nvSpPr>
+        <p:spPr>
+          <a:xfrm>
+            <a:off x="1097280" y="3931920"/>
+            <a:ext cx="7680960" cy="640080"/>
+          </a:xfrm>
+          <a:prstGeom prst="rect">
+            <a:avLst/>
+          </a:prstGeom>
+          <a:noFill/>
+        </p:spPr>
+        <p:txBody>
+          <a:bodyPr wrap="square">
+            <a:spAutoFit/>
+          </a:bodyPr>
+          <a:lstStyle/>
+          <a:p>
+            <a:pPr algn="l">
+              <a:lnSpc>
+                <a:spcPct val="125000"/>
+              </a:lnSpc>
+            </a:pPr>
+            <a:r>
+              <a:rPr sz="2600" b="0">
+                <a:solidFill>
+                  <a:srgbClr val="1B2233"/>
+                </a:solidFill>
+                <a:latin typeface="微软雅黑"/>
+                <a:ea typeface="微软雅黑"/>
+                <a:cs typeface="微软雅黑"/>
+              </a:rPr>
+              <a:t>② 第一个试点社区怎么找、怎么谈？</a:t>
+            </a:r>
+          </a:p>
+        </p:txBody>
+      </p:sp>
+      <p:sp>
+        <p:nvSpPr>
+          <p:cNvPr id="9" name="TextBox 8"/>
+          <p:cNvSpPr txBox="1"/>
+          <p:nvPr/>
+        </p:nvSpPr>
+        <p:spPr>
+          <a:xfrm>
+            <a:off x="8961120" y="4023360"/>
+            <a:ext cx="2377440" cy="548640"/>
+          </a:xfrm>
+          <a:prstGeom prst="rect">
+            <a:avLst/>
+          </a:prstGeom>
+          <a:noFill/>
+        </p:spPr>
+        <p:txBody>
+          <a:bodyPr wrap="square">
+            <a:spAutoFit/>
+          </a:bodyPr>
+          <a:lstStyle/>
+          <a:p>
+            <a:pPr algn="l">
+              <a:lnSpc>
+                <a:spcPct val="125000"/>
+              </a:lnSpc>
+            </a:pPr>
+            <a:r>
+              <a:rPr sz="1500" b="0">
+                <a:solidFill>
+                  <a:srgbClr val="6B7485"/>
+                </a:solidFill>
+                <a:latin typeface="微软雅黑"/>
+                <a:ea typeface="微软雅黑"/>
+                <a:cs typeface="微软雅黑"/>
+              </a:rPr>
+              <a:t>想请教企业负责人</a:t>
+            </a:r>
+          </a:p>
+        </p:txBody>
+      </p:sp>
+      <p:sp>
+        <p:nvSpPr>
+          <p:cNvPr id="10" name="TextBox 9"/>
+          <p:cNvSpPr txBox="1"/>
+          <p:nvPr/>
+        </p:nvSpPr>
+        <p:spPr>
+          <a:xfrm>
+            <a:off x="1097280" y="4800600"/>
+            <a:ext cx="7680960" cy="640080"/>
+          </a:xfrm>
+          <a:prstGeom prst="rect">
+            <a:avLst/>
+          </a:prstGeom>
+          <a:noFill/>
+        </p:spPr>
+        <p:txBody>
+          <a:bodyPr wrap="square">
+            <a:spAutoFit/>
+          </a:bodyPr>
+          <a:lstStyle/>
+          <a:p>
+            <a:pPr algn="l">
+              <a:lnSpc>
+                <a:spcPct val="125000"/>
+              </a:lnSpc>
+            </a:pPr>
+            <a:r>
+              <a:rPr sz="2600" b="0">
+                <a:solidFill>
+                  <a:srgbClr val="1B2233"/>
+                </a:solidFill>
+                <a:latin typeface="微软雅黑"/>
+                <a:ea typeface="微软雅黑"/>
+                <a:cs typeface="微软雅黑"/>
+              </a:rPr>
+              <a:t>③ 没有历史数据，冷启动怎么破？</a:t>
+            </a:r>
+          </a:p>
+        </p:txBody>
+      </p:sp>
+      <p:sp>
+        <p:nvSpPr>
+          <p:cNvPr id="11" name="TextBox 10"/>
+          <p:cNvSpPr txBox="1"/>
+          <p:nvPr/>
+        </p:nvSpPr>
+        <p:spPr>
+          <a:xfrm>
+            <a:off x="8961120" y="4892040"/>
+            <a:ext cx="2377440" cy="548640"/>
+          </a:xfrm>
+          <a:prstGeom prst="rect">
+            <a:avLst/>
+          </a:prstGeom>
+          <a:noFill/>
+        </p:spPr>
+        <p:txBody>
+          <a:bodyPr wrap="square">
+            <a:spAutoFit/>
+          </a:bodyPr>
+          <a:lstStyle/>
+          <a:p>
+            <a:pPr algn="l">
+              <a:lnSpc>
+                <a:spcPct val="125000"/>
+              </a:lnSpc>
+            </a:pPr>
+            <a:r>
+              <a:rPr sz="1500" b="0">
+                <a:solidFill>
+                  <a:srgbClr val="6B7485"/>
+                </a:solidFill>
+                <a:latin typeface="微软雅黑"/>
+                <a:ea typeface="微软雅黑"/>
+                <a:cs typeface="微软雅黑"/>
+              </a:rPr>
+              <a:t>想请教投资人视角</a:t>
+            </a:r>
+          </a:p>
+        </p:txBody>
+      </p:sp>
+      <p:sp>
+        <p:nvSpPr>
+          <p:cNvPr id="12" name="TextBox 11"/>
+          <p:cNvSpPr txBox="1"/>
+          <p:nvPr/>
+        </p:nvSpPr>
+        <p:spPr>
+          <a:xfrm>
+            <a:off x="1097280" y="5943600"/>
+            <a:ext cx="10058400" cy="548640"/>
+          </a:xfrm>
+          <a:prstGeom prst="rect">
+            <a:avLst/>
+          </a:prstGeom>
+          <a:noFill/>
+        </p:spPr>
+        <p:txBody>
+          <a:bodyPr wrap="square">
+            <a:spAutoFit/>
+          </a:bodyPr>
+          <a:lstStyle/>
+          <a:p>
+            <a:pPr algn="l">
+              <a:lnSpc>
+                <a:spcPct val="125000"/>
+              </a:lnSpc>
+            </a:pPr>
+            <a:r>
+              <a:rPr sz="2000" b="1">
+                <a:solidFill>
+                  <a:srgbClr val="FF8C42"/>
+                </a:solidFill>
+                <a:latin typeface="微软雅黑"/>
+                <a:ea typeface="微软雅黑"/>
+                <a:cs typeface="微软雅黑"/>
+              </a:rPr>
+              <a:t>张奶奶那条路，现在是一句话。</a:t>
+            </a:r>
+          </a:p>
+        </p:txBody>
+      </p:sp>
+      <p:sp>
+        <p:nvSpPr>
+          <p:cNvPr id="13" name="Rectangle 12"/>
+          <p:cNvSpPr/>
+          <p:nvPr/>
+        </p:nvSpPr>
+        <p:spPr>
+          <a:xfrm>
+            <a:off x="548640" y="6510528"/>
+            <a:ext cx="10881360" cy="9525"/>
+          </a:xfrm>
+          <a:prstGeom prst="rect">
+            <a:avLst/>
+          </a:prstGeom>
+          <a:solidFill>
+            <a:srgbClr val="DDE3EE"/>
+          </a:solidFill>
+          <a:ln>
+            <a:noFill/>
+          </a:ln>
+          <a:effectLst/>
+        </p:spPr>
+        <p:style>
+          <a:lnRef idx="1">
+            <a:schemeClr val="accent1"/>
+          </a:lnRef>
+          <a:fillRef idx="3">
+            <a:schemeClr val="accent1"/>
+          </a:fillRef>
+          <a:effectRef idx="2">
+            <a:schemeClr val="accent1"/>
+          </a:effectRef>
+          <a:fontRef idx="minor">
+            <a:schemeClr val="lt1"/>
+          </a:fontRef>
+        </p:style>
+        <p:txBody>
+          <a:bodyPr rtlCol="0" anchor="ctr"/>
+          <a:lstStyle/>
+          <a:p>
+            <a:pPr algn="ctr"/>
+          </a:p>
+        </p:txBody>
+      </p:sp>
+      <p:sp>
+        <p:nvSpPr>
+          <p:cNvPr id="14" name="TextBox 13"/>
+          <p:cNvSpPr txBox="1"/>
+          <p:nvPr/>
+        </p:nvSpPr>
+        <p:spPr>
+          <a:xfrm>
+            <a:off x="548640" y="6565392"/>
+            <a:ext cx="7315200" cy="274320"/>
+          </a:xfrm>
+          <a:prstGeom prst="rect">
+            <a:avLst/>
+          </a:prstGeom>
+          <a:noFill/>
+        </p:spPr>
+        <p:txBody>
+          <a:bodyPr wrap="square">
+            <a:spAutoFit/>
+          </a:bodyPr>
+          <a:lstStyle/>
+          <a:p>
+            <a:pPr algn="l">
+              <a:lnSpc>
+                <a:spcPct val="125000"/>
+              </a:lnSpc>
+            </a:pPr>
+            <a:r>
+              <a:rPr sz="1100" b="0">
+                <a:solidFill>
+                  <a:srgbClr val="6B7485"/>
+                </a:solidFill>
+                <a:latin typeface="微软雅黑"/>
+                <a:ea typeface="微软雅黑"/>
+                <a:cs typeface="微软雅黑"/>
+              </a:rPr>
+              <a:t>社区先知 CommunityInsight</a:t>
+            </a:r>
+          </a:p>
+        </p:txBody>
+      </p:sp>
+      <p:sp>
+        <p:nvSpPr>
+          <p:cNvPr id="15" name="TextBox 14"/>
+          <p:cNvSpPr txBox="1"/>
+          <p:nvPr/>
+        </p:nvSpPr>
+        <p:spPr>
+          <a:xfrm>
+            <a:off x="10058400" y="6565392"/>
+            <a:ext cx="1371600" cy="274320"/>
+          </a:xfrm>
+          <a:prstGeom prst="rect">
+            <a:avLst/>
+          </a:prstGeom>
+          <a:noFill/>
+        </p:spPr>
+        <p:txBody>
+          <a:bodyPr wrap="square">
+            <a:spAutoFit/>
+          </a:bodyPr>
+          <a:lstStyle/>
+          <a:p>
+            <a:pPr algn="r">
+              <a:lnSpc>
+                <a:spcPct val="125000"/>
+              </a:lnSpc>
+            </a:pPr>
+            <a:r>
+              <a:rPr sz="1100" b="0">
+                <a:solidFill>
+                  <a:srgbClr val="6B7485"/>
+                </a:solidFill>
+                <a:latin typeface="微软雅黑"/>
+                <a:ea typeface="微软雅黑"/>
+                <a:cs typeface="微软雅黑"/>
+              </a:rPr>
+              <a:t>11 / 11</a:t>
             </a:r>
           </a:p>
         </p:txBody>
@@ -5410,7 +6157,7 @@
                 <a:ea typeface="微软雅黑"/>
                 <a:cs typeface="微软雅黑"/>
               </a:rPr>
-              <a:t>附录 · 如需看实物：三步跑起来</a:t>
+              <a:t>备用：为什么规则为主、大模型为辅</a:t>
             </a:r>
           </a:p>
         </p:txBody>
@@ -5423,8 +6170,8 @@
         </p:nvSpPr>
         <p:spPr>
           <a:xfrm>
-            <a:off x="868680" y="1737360"/>
-            <a:ext cx="10424160" cy="2377440"/>
+            <a:off x="868680" y="1828800"/>
+            <a:ext cx="10424160" cy="2743200"/>
           </a:xfrm>
           <a:prstGeom prst="rect">
             <a:avLst/>
@@ -5451,7 +6198,7 @@
                 <a:ea typeface="微软雅黑"/>
                 <a:cs typeface="微软雅黑"/>
               </a:rPr>
-              <a:t>1) 双击项目文件夹里的「启动演示」</a:t>
+              <a:t>接了 DeepSeek，但四个 LLM 开关默认关</a:t>
             </a:r>
           </a:p>
           <a:p>
@@ -5469,7 +6216,7 @@
                 <a:ea typeface="微软雅黑"/>
                 <a:cs typeface="微软雅黑"/>
               </a:rPr>
-              <a:t>2) 等它提示「服务已就绪」（首次约 10–20 秒，会自动建好数据库）</a:t>
+              <a:t>意图识别 / 追问补全 / 政策生成 → 大模型</a:t>
             </a:r>
           </a:p>
           <a:p>
@@ -5487,65 +6234,39 @@
                 <a:ea typeface="微软雅黑"/>
                 <a:cs typeface="微软雅黑"/>
               </a:rPr>
-              <a:t>3) 浏览器会自动打开登录页</a:t>
-            </a:r>
-          </a:p>
-        </p:txBody>
-      </p:sp>
-      <p:sp>
-        <p:nvSpPr>
-          <p:cNvPr id="5" name="Rounded Rectangle 4"/>
-          <p:cNvSpPr/>
-          <p:nvPr/>
-        </p:nvSpPr>
-        <p:spPr>
-          <a:xfrm>
-            <a:off x="868680" y="4023360"/>
-            <a:ext cx="10424160" cy="1737360"/>
-          </a:xfrm>
-          <a:prstGeom prst="roundRect">
-            <a:avLst/>
-          </a:prstGeom>
-          <a:solidFill>
-            <a:srgbClr val="F2F5FB"/>
-          </a:solidFill>
-          <a:ln>
-            <a:noFill/>
-          </a:ln>
-          <a:effectLst/>
-        </p:spPr>
-        <p:style>
-          <a:lnRef idx="1">
-            <a:schemeClr val="accent1"/>
-          </a:lnRef>
-          <a:fillRef idx="3">
-            <a:schemeClr val="accent1"/>
-          </a:fillRef>
-          <a:effectRef idx="2">
-            <a:schemeClr val="accent1"/>
-          </a:effectRef>
-          <a:fontRef idx="minor">
-            <a:schemeClr val="lt1"/>
-          </a:fontRef>
-        </p:style>
-        <p:txBody>
-          <a:bodyPr rtlCol="0" anchor="ctr"/>
-          <a:lstStyle/>
-          <a:p>
-            <a:pPr algn="ctr"/>
-          </a:p>
-        </p:txBody>
-      </p:sp>
-      <p:sp>
-        <p:nvSpPr>
-          <p:cNvPr id="6" name="TextBox 5"/>
+              <a:t>状态机 / 派单 / 权限 / 加密 → 永远走规则</a:t>
+            </a:r>
+          </a:p>
+          <a:p>
+            <a:pPr algn="l">
+              <a:lnSpc>
+                <a:spcPct val="150000"/>
+              </a:lnSpc>
+            </a:pPr>
+            <a:r>
+              <a:rPr sz="2600" b="0">
+                <a:solidFill>
+                  <a:srgbClr val="1B2233"/>
+                </a:solidFill>
+                <a:latin typeface="微软雅黑"/>
+                <a:ea typeface="微软雅黑"/>
+                <a:cs typeface="微软雅黑"/>
+              </a:rPr>
+              <a:t>每次调用 3–5 秒超时，自动回落规则</a:t>
+            </a:r>
+          </a:p>
+        </p:txBody>
+      </p:sp>
+      <p:sp>
+        <p:nvSpPr>
+          <p:cNvPr id="5" name="TextBox 4"/>
           <p:cNvSpPr txBox="1"/>
           <p:nvPr/>
         </p:nvSpPr>
         <p:spPr>
           <a:xfrm>
-            <a:off x="1143000" y="4206240"/>
-            <a:ext cx="9875520" cy="1463040"/>
+            <a:off x="868680" y="5760720"/>
+            <a:ext cx="10424160" cy="548640"/>
           </a:xfrm>
           <a:prstGeom prst="rect">
             <a:avLst/>
@@ -5560,55 +6281,19 @@
           <a:p>
             <a:pPr algn="l">
               <a:lnSpc>
-                <a:spcPct val="135000"/>
-              </a:lnSpc>
-            </a:pPr>
-            <a:r>
-              <a:rPr sz="1800" b="0">
-                <a:solidFill>
-                  <a:srgbClr val="1B2233"/>
-                </a:solidFill>
-                <a:latin typeface="微软雅黑"/>
-                <a:ea typeface="微软雅黑"/>
-                <a:cs typeface="微软雅黑"/>
-              </a:rPr>
-              <a:t>演示账号：居民点「居民」免密 · 老年点「老年」免密 · 网格员 demo_grid / demo123</a:t>
-            </a:r>
-          </a:p>
-          <a:p>
-            <a:pPr algn="l">
-              <a:lnSpc>
-                <a:spcPct val="135000"/>
-              </a:lnSpc>
-            </a:pPr>
-            <a:r>
-              <a:rPr sz="1800" b="0">
-                <a:solidFill>
-                  <a:srgbClr val="1B2233"/>
-                </a:solidFill>
-                <a:latin typeface="微软雅黑"/>
-                <a:ea typeface="微软雅黑"/>
-                <a:cs typeface="微软雅黑"/>
-              </a:rPr>
-              <a:t>环境：Windows + Python 3.10 以上；首次启动会自动装依赖</a:t>
-            </a:r>
-          </a:p>
-          <a:p>
-            <a:pPr algn="l">
-              <a:lnSpc>
-                <a:spcPct val="135000"/>
-              </a:lnSpc>
-            </a:pPr>
-            <a:r>
-              <a:rPr sz="1800" b="0">
-                <a:solidFill>
-                  <a:srgbClr val="1B2233"/>
-                </a:solidFill>
-                <a:latin typeface="微软雅黑"/>
-                <a:ea typeface="微软雅黑"/>
-                <a:cs typeface="微软雅黑"/>
-              </a:rPr>
-              <a:t>没有网络也能演示：大模型与天气会自动回到规则与本地数据</a:t>
+                <a:spcPct val="125000"/>
+              </a:lnSpc>
+            </a:pPr>
+            <a:r>
+              <a:rPr sz="2000" b="0">
+                <a:solidFill>
+                  <a:srgbClr val="6B7485"/>
+                </a:solidFill>
+                <a:latin typeface="微软雅黑"/>
+                <a:ea typeface="微软雅黑"/>
+                <a:cs typeface="微软雅黑"/>
+              </a:rPr>
+              <a:t>省成本，也保稳定。</a:t>
             </a:r>
           </a:p>
         </p:txBody>
@@ -5711,65 +6396,21 @@
                 <a:ea typeface="微软雅黑"/>
                 <a:cs typeface="微软雅黑"/>
               </a:rPr>
-              <a:t>附录 · 现在能用的功能</a:t>
-            </a:r>
-          </a:p>
-        </p:txBody>
-      </p:sp>
-      <p:sp>
-        <p:nvSpPr>
-          <p:cNvPr id="4" name="Rounded Rectangle 3"/>
-          <p:cNvSpPr/>
-          <p:nvPr/>
-        </p:nvSpPr>
-        <p:spPr>
-          <a:xfrm>
-            <a:off x="868680" y="1737360"/>
-            <a:ext cx="5120640" cy="960120"/>
-          </a:xfrm>
-          <a:prstGeom prst="roundRect">
-            <a:avLst/>
-          </a:prstGeom>
-          <a:solidFill>
-            <a:srgbClr val="F2F5FB"/>
-          </a:solidFill>
-          <a:ln>
-            <a:noFill/>
-          </a:ln>
-          <a:effectLst/>
-        </p:spPr>
-        <p:style>
-          <a:lnRef idx="1">
-            <a:schemeClr val="accent1"/>
-          </a:lnRef>
-          <a:fillRef idx="3">
-            <a:schemeClr val="accent1"/>
-          </a:fillRef>
-          <a:effectRef idx="2">
-            <a:schemeClr val="accent1"/>
-          </a:effectRef>
-          <a:fontRef idx="minor">
-            <a:schemeClr val="lt1"/>
-          </a:fontRef>
-        </p:style>
-        <p:txBody>
-          <a:bodyPr rtlCol="0" anchor="ctr"/>
-          <a:lstStyle/>
-          <a:p>
-            <a:pPr algn="ctr"/>
-          </a:p>
-        </p:txBody>
-      </p:sp>
-      <p:sp>
-        <p:nvSpPr>
-          <p:cNvPr id="5" name="TextBox 4"/>
+              <a:t>备用：防编造与数据安全</a:t>
+            </a:r>
+          </a:p>
+        </p:txBody>
+      </p:sp>
+      <p:sp>
+        <p:nvSpPr>
+          <p:cNvPr id="4" name="TextBox 3"/>
           <p:cNvSpPr txBox="1"/>
           <p:nvPr/>
         </p:nvSpPr>
         <p:spPr>
           <a:xfrm>
-            <a:off x="1097280" y="1847088"/>
-            <a:ext cx="1463040" cy="731520"/>
+            <a:off x="868680" y="1828800"/>
+            <a:ext cx="10424160" cy="3108960"/>
           </a:xfrm>
           <a:prstGeom prst="rect">
             <a:avLst/>
@@ -5784,52 +6425,29 @@
           <a:p>
             <a:pPr algn="l">
               <a:lnSpc>
-                <a:spcPct val="125000"/>
-              </a:lnSpc>
-            </a:pPr>
-            <a:r>
-              <a:rPr sz="2000" b="1">
-                <a:solidFill>
-                  <a:srgbClr val="122A51"/>
-                </a:solidFill>
-                <a:latin typeface="微软雅黑"/>
-                <a:ea typeface="微软雅黑"/>
-                <a:cs typeface="微软雅黑"/>
-              </a:rPr>
-              <a:t>报修</a:t>
-            </a:r>
-          </a:p>
-        </p:txBody>
-      </p:sp>
-      <p:sp>
-        <p:nvSpPr>
-          <p:cNvPr id="6" name="TextBox 5"/>
-          <p:cNvSpPr txBox="1"/>
-          <p:nvPr/>
-        </p:nvSpPr>
-        <p:spPr>
-          <a:xfrm>
-            <a:off x="2606039" y="1901952"/>
-            <a:ext cx="3200400" cy="731520"/>
-          </a:xfrm>
-          <a:prstGeom prst="rect">
-            <a:avLst/>
-          </a:prstGeom>
-          <a:noFill/>
-        </p:spPr>
-        <p:txBody>
-          <a:bodyPr wrap="square">
-            <a:spAutoFit/>
-          </a:bodyPr>
-          <a:lstStyle/>
+                <a:spcPct val="150000"/>
+              </a:lnSpc>
+            </a:pPr>
+            <a:r>
+              <a:rPr sz="2600" b="0">
+                <a:solidFill>
+                  <a:srgbClr val="1B2233"/>
+                </a:solidFill>
+                <a:latin typeface="微软雅黑"/>
+                <a:ea typeface="微软雅黑"/>
+                <a:cs typeface="微软雅黑"/>
+              </a:rPr>
+              <a:t>政策回答强制挂知识库出处，回答完回查数据库</a:t>
+            </a:r>
+          </a:p>
           <a:p>
             <a:pPr algn="l">
               <a:lnSpc>
-                <a:spcPct val="125000"/>
-              </a:lnSpc>
-            </a:pPr>
-            <a:r>
-              <a:rPr sz="1500" b="0">
+                <a:spcPct val="150000"/>
+              </a:lnSpc>
+            </a:pPr>
+            <a:r>
+              <a:rPr sz="2600" b="0">
                 <a:solidFill>
                   <a:srgbClr val="1B2233"/>
                 </a:solidFill>
@@ -5837,125 +6455,35 @@
                 <a:ea typeface="微软雅黑"/>
                 <a:cs typeface="微软雅黑"/>
               </a:rPr>
-              <a:t>全状态机：提交 → 审核 → 派单 → 处理 → 办结 → 回访</a:t>
-            </a:r>
-          </a:p>
-        </p:txBody>
-      </p:sp>
-      <p:sp>
-        <p:nvSpPr>
-          <p:cNvPr id="7" name="Rounded Rectangle 6"/>
-          <p:cNvSpPr/>
-          <p:nvPr/>
-        </p:nvSpPr>
-        <p:spPr>
-          <a:xfrm>
-            <a:off x="6355080" y="1737360"/>
-            <a:ext cx="5120640" cy="960120"/>
-          </a:xfrm>
-          <a:prstGeom prst="roundRect">
-            <a:avLst/>
-          </a:prstGeom>
-          <a:solidFill>
-            <a:srgbClr val="F2F5FB"/>
-          </a:solidFill>
-          <a:ln>
-            <a:noFill/>
-          </a:ln>
-          <a:effectLst/>
-        </p:spPr>
-        <p:style>
-          <a:lnRef idx="1">
-            <a:schemeClr val="accent1"/>
-          </a:lnRef>
-          <a:fillRef idx="3">
-            <a:schemeClr val="accent1"/>
-          </a:fillRef>
-          <a:effectRef idx="2">
-            <a:schemeClr val="accent1"/>
-          </a:effectRef>
-          <a:fontRef idx="minor">
-            <a:schemeClr val="lt1"/>
-          </a:fontRef>
-        </p:style>
-        <p:txBody>
-          <a:bodyPr rtlCol="0" anchor="ctr"/>
-          <a:lstStyle/>
-          <a:p>
-            <a:pPr algn="ctr"/>
-          </a:p>
-        </p:txBody>
-      </p:sp>
-      <p:sp>
-        <p:nvSpPr>
-          <p:cNvPr id="8" name="TextBox 7"/>
-          <p:cNvSpPr txBox="1"/>
-          <p:nvPr/>
-        </p:nvSpPr>
-        <p:spPr>
-          <a:xfrm>
-            <a:off x="6583680" y="1847088"/>
-            <a:ext cx="1463040" cy="731520"/>
-          </a:xfrm>
-          <a:prstGeom prst="rect">
-            <a:avLst/>
-          </a:prstGeom>
-          <a:noFill/>
-        </p:spPr>
-        <p:txBody>
-          <a:bodyPr wrap="square">
-            <a:spAutoFit/>
-          </a:bodyPr>
-          <a:lstStyle/>
+              <a:t>敏感词 + 权限再审计一道；查不到就转人工</a:t>
+            </a:r>
+          </a:p>
           <a:p>
             <a:pPr algn="l">
               <a:lnSpc>
-                <a:spcPct val="125000"/>
-              </a:lnSpc>
-            </a:pPr>
-            <a:r>
-              <a:rPr sz="2000" b="1">
-                <a:solidFill>
-                  <a:srgbClr val="122A51"/>
-                </a:solidFill>
-                <a:latin typeface="微软雅黑"/>
-                <a:ea typeface="微软雅黑"/>
-                <a:cs typeface="微软雅黑"/>
-              </a:rPr>
-              <a:t>提案</a:t>
-            </a:r>
-          </a:p>
-        </p:txBody>
-      </p:sp>
-      <p:sp>
-        <p:nvSpPr>
-          <p:cNvPr id="9" name="TextBox 8"/>
-          <p:cNvSpPr txBox="1"/>
-          <p:nvPr/>
-        </p:nvSpPr>
-        <p:spPr>
-          <a:xfrm>
-            <a:off x="8092440" y="1901952"/>
-            <a:ext cx="3200400" cy="731520"/>
-          </a:xfrm>
-          <a:prstGeom prst="rect">
-            <a:avLst/>
-          </a:prstGeom>
-          <a:noFill/>
-        </p:spPr>
-        <p:txBody>
-          <a:bodyPr wrap="square">
-            <a:spAutoFit/>
-          </a:bodyPr>
-          <a:lstStyle/>
+                <a:spcPct val="150000"/>
+              </a:lnSpc>
+            </a:pPr>
+            <a:r>
+              <a:rPr sz="2600" b="0">
+                <a:solidFill>
+                  <a:srgbClr val="1B2233"/>
+                </a:solidFill>
+                <a:latin typeface="微软雅黑"/>
+                <a:ea typeface="微软雅黑"/>
+                <a:cs typeface="微软雅黑"/>
+              </a:rPr>
+              <a:t>手机号 AES-256-GCM 加密存储，展示导出脱敏</a:t>
+            </a:r>
+          </a:p>
           <a:p>
             <a:pPr algn="l">
               <a:lnSpc>
-                <a:spcPct val="125000"/>
-              </a:lnSpc>
-            </a:pPr>
-            <a:r>
-              <a:rPr sz="1500" b="0">
+                <a:spcPct val="150000"/>
+              </a:lnSpc>
+            </a:pPr>
+            <a:r>
+              <a:rPr sz="2600" b="0">
                 <a:solidFill>
                   <a:srgbClr val="1B2233"/>
                 </a:solidFill>
@@ -5963,848 +6491,7 @@
                 <a:ea typeface="微软雅黑"/>
                 <a:cs typeface="微软雅黑"/>
               </a:rPr>
-              <a:t>全生命周期：提交 → 附议 → 回应 → 采纳 → 实施</a:t>
-            </a:r>
-          </a:p>
-        </p:txBody>
-      </p:sp>
-      <p:sp>
-        <p:nvSpPr>
-          <p:cNvPr id="10" name="Rounded Rectangle 9"/>
-          <p:cNvSpPr/>
-          <p:nvPr/>
-        </p:nvSpPr>
-        <p:spPr>
-          <a:xfrm>
-            <a:off x="868680" y="2880360"/>
-            <a:ext cx="5120640" cy="960120"/>
-          </a:xfrm>
-          <a:prstGeom prst="roundRect">
-            <a:avLst/>
-          </a:prstGeom>
-          <a:solidFill>
-            <a:srgbClr val="F2F5FB"/>
-          </a:solidFill>
-          <a:ln>
-            <a:noFill/>
-          </a:ln>
-          <a:effectLst/>
-        </p:spPr>
-        <p:style>
-          <a:lnRef idx="1">
-            <a:schemeClr val="accent1"/>
-          </a:lnRef>
-          <a:fillRef idx="3">
-            <a:schemeClr val="accent1"/>
-          </a:fillRef>
-          <a:effectRef idx="2">
-            <a:schemeClr val="accent1"/>
-          </a:effectRef>
-          <a:fontRef idx="minor">
-            <a:schemeClr val="lt1"/>
-          </a:fontRef>
-        </p:style>
-        <p:txBody>
-          <a:bodyPr rtlCol="0" anchor="ctr"/>
-          <a:lstStyle/>
-          <a:p>
-            <a:pPr algn="ctr"/>
-          </a:p>
-        </p:txBody>
-      </p:sp>
-      <p:sp>
-        <p:nvSpPr>
-          <p:cNvPr id="11" name="TextBox 10"/>
-          <p:cNvSpPr txBox="1"/>
-          <p:nvPr/>
-        </p:nvSpPr>
-        <p:spPr>
-          <a:xfrm>
-            <a:off x="1097280" y="2990088"/>
-            <a:ext cx="1463040" cy="731520"/>
-          </a:xfrm>
-          <a:prstGeom prst="rect">
-            <a:avLst/>
-          </a:prstGeom>
-          <a:noFill/>
-        </p:spPr>
-        <p:txBody>
-          <a:bodyPr wrap="square">
-            <a:spAutoFit/>
-          </a:bodyPr>
-          <a:lstStyle/>
-          <a:p>
-            <a:pPr algn="l">
-              <a:lnSpc>
-                <a:spcPct val="125000"/>
-              </a:lnSpc>
-            </a:pPr>
-            <a:r>
-              <a:rPr sz="2000" b="1">
-                <a:solidFill>
-                  <a:srgbClr val="122A51"/>
-                </a:solidFill>
-                <a:latin typeface="微软雅黑"/>
-                <a:ea typeface="微软雅黑"/>
-                <a:cs typeface="微软雅黑"/>
-              </a:rPr>
-              <a:t>通知</a:t>
-            </a:r>
-          </a:p>
-        </p:txBody>
-      </p:sp>
-      <p:sp>
-        <p:nvSpPr>
-          <p:cNvPr id="12" name="TextBox 11"/>
-          <p:cNvSpPr txBox="1"/>
-          <p:nvPr/>
-        </p:nvSpPr>
-        <p:spPr>
-          <a:xfrm>
-            <a:off x="2606039" y="3044952"/>
-            <a:ext cx="3200400" cy="731520"/>
-          </a:xfrm>
-          <a:prstGeom prst="rect">
-            <a:avLst/>
-          </a:prstGeom>
-          <a:noFill/>
-        </p:spPr>
-        <p:txBody>
-          <a:bodyPr wrap="square">
-            <a:spAutoFit/>
-          </a:bodyPr>
-          <a:lstStyle/>
-          <a:p>
-            <a:pPr algn="l">
-              <a:lnSpc>
-                <a:spcPct val="125000"/>
-              </a:lnSpc>
-            </a:pPr>
-            <a:r>
-              <a:rPr sz="1500" b="0">
-                <a:solidFill>
-                  <a:srgbClr val="1B2233"/>
-                </a:solidFill>
-                <a:latin typeface="微软雅黑"/>
-                <a:ea typeface="微软雅黑"/>
-                <a:cs typeface="微软雅黑"/>
-              </a:rPr>
-              <a:t>普通 / 紧急 / 定时 / 已读回执</a:t>
-            </a:r>
-          </a:p>
-        </p:txBody>
-      </p:sp>
-      <p:sp>
-        <p:nvSpPr>
-          <p:cNvPr id="13" name="Rounded Rectangle 12"/>
-          <p:cNvSpPr/>
-          <p:nvPr/>
-        </p:nvSpPr>
-        <p:spPr>
-          <a:xfrm>
-            <a:off x="6355080" y="2880360"/>
-            <a:ext cx="5120640" cy="960120"/>
-          </a:xfrm>
-          <a:prstGeom prst="roundRect">
-            <a:avLst/>
-          </a:prstGeom>
-          <a:solidFill>
-            <a:srgbClr val="F2F5FB"/>
-          </a:solidFill>
-          <a:ln>
-            <a:noFill/>
-          </a:ln>
-          <a:effectLst/>
-        </p:spPr>
-        <p:style>
-          <a:lnRef idx="1">
-            <a:schemeClr val="accent1"/>
-          </a:lnRef>
-          <a:fillRef idx="3">
-            <a:schemeClr val="accent1"/>
-          </a:fillRef>
-          <a:effectRef idx="2">
-            <a:schemeClr val="accent1"/>
-          </a:effectRef>
-          <a:fontRef idx="minor">
-            <a:schemeClr val="lt1"/>
-          </a:fontRef>
-        </p:style>
-        <p:txBody>
-          <a:bodyPr rtlCol="0" anchor="ctr"/>
-          <a:lstStyle/>
-          <a:p>
-            <a:pPr algn="ctr"/>
-          </a:p>
-        </p:txBody>
-      </p:sp>
-      <p:sp>
-        <p:nvSpPr>
-          <p:cNvPr id="14" name="TextBox 13"/>
-          <p:cNvSpPr txBox="1"/>
-          <p:nvPr/>
-        </p:nvSpPr>
-        <p:spPr>
-          <a:xfrm>
-            <a:off x="6583680" y="2990088"/>
-            <a:ext cx="1463040" cy="731520"/>
-          </a:xfrm>
-          <a:prstGeom prst="rect">
-            <a:avLst/>
-          </a:prstGeom>
-          <a:noFill/>
-        </p:spPr>
-        <p:txBody>
-          <a:bodyPr wrap="square">
-            <a:spAutoFit/>
-          </a:bodyPr>
-          <a:lstStyle/>
-          <a:p>
-            <a:pPr algn="l">
-              <a:lnSpc>
-                <a:spcPct val="125000"/>
-              </a:lnSpc>
-            </a:pPr>
-            <a:r>
-              <a:rPr sz="2000" b="1">
-                <a:solidFill>
-                  <a:srgbClr val="122A51"/>
-                </a:solidFill>
-                <a:latin typeface="微软雅黑"/>
-                <a:ea typeface="微软雅黑"/>
-                <a:cs typeface="微软雅黑"/>
-              </a:rPr>
-              <a:t>政策问答</a:t>
-            </a:r>
-          </a:p>
-        </p:txBody>
-      </p:sp>
-      <p:sp>
-        <p:nvSpPr>
-          <p:cNvPr id="15" name="TextBox 14"/>
-          <p:cNvSpPr txBox="1"/>
-          <p:nvPr/>
-        </p:nvSpPr>
-        <p:spPr>
-          <a:xfrm>
-            <a:off x="8092440" y="3044952"/>
-            <a:ext cx="3200400" cy="731520"/>
-          </a:xfrm>
-          <a:prstGeom prst="rect">
-            <a:avLst/>
-          </a:prstGeom>
-          <a:noFill/>
-        </p:spPr>
-        <p:txBody>
-          <a:bodyPr wrap="square">
-            <a:spAutoFit/>
-          </a:bodyPr>
-          <a:lstStyle/>
-          <a:p>
-            <a:pPr algn="l">
-              <a:lnSpc>
-                <a:spcPct val="125000"/>
-              </a:lnSpc>
-            </a:pPr>
-            <a:r>
-              <a:rPr sz="1500" b="0">
-                <a:solidFill>
-                  <a:srgbClr val="1B2233"/>
-                </a:solidFill>
-                <a:latin typeface="微软雅黑"/>
-                <a:ea typeface="微软雅黑"/>
-                <a:cs typeface="微软雅黑"/>
-              </a:rPr>
-              <a:t>答案带出处；检索无结果就转人工</a:t>
-            </a:r>
-          </a:p>
-        </p:txBody>
-      </p:sp>
-      <p:sp>
-        <p:nvSpPr>
-          <p:cNvPr id="16" name="Rounded Rectangle 15"/>
-          <p:cNvSpPr/>
-          <p:nvPr/>
-        </p:nvSpPr>
-        <p:spPr>
-          <a:xfrm>
-            <a:off x="868680" y="4023360"/>
-            <a:ext cx="5120640" cy="960120"/>
-          </a:xfrm>
-          <a:prstGeom prst="roundRect">
-            <a:avLst/>
-          </a:prstGeom>
-          <a:solidFill>
-            <a:srgbClr val="F2F5FB"/>
-          </a:solidFill>
-          <a:ln>
-            <a:noFill/>
-          </a:ln>
-          <a:effectLst/>
-        </p:spPr>
-        <p:style>
-          <a:lnRef idx="1">
-            <a:schemeClr val="accent1"/>
-          </a:lnRef>
-          <a:fillRef idx="3">
-            <a:schemeClr val="accent1"/>
-          </a:fillRef>
-          <a:effectRef idx="2">
-            <a:schemeClr val="accent1"/>
-          </a:effectRef>
-          <a:fontRef idx="minor">
-            <a:schemeClr val="lt1"/>
-          </a:fontRef>
-        </p:style>
-        <p:txBody>
-          <a:bodyPr rtlCol="0" anchor="ctr"/>
-          <a:lstStyle/>
-          <a:p>
-            <a:pPr algn="ctr"/>
-          </a:p>
-        </p:txBody>
-      </p:sp>
-      <p:sp>
-        <p:nvSpPr>
-          <p:cNvPr id="17" name="TextBox 16"/>
-          <p:cNvSpPr txBox="1"/>
-          <p:nvPr/>
-        </p:nvSpPr>
-        <p:spPr>
-          <a:xfrm>
-            <a:off x="1097280" y="4133088"/>
-            <a:ext cx="1463040" cy="731520"/>
-          </a:xfrm>
-          <a:prstGeom prst="rect">
-            <a:avLst/>
-          </a:prstGeom>
-          <a:noFill/>
-        </p:spPr>
-        <p:txBody>
-          <a:bodyPr wrap="square">
-            <a:spAutoFit/>
-          </a:bodyPr>
-          <a:lstStyle/>
-          <a:p>
-            <a:pPr algn="l">
-              <a:lnSpc>
-                <a:spcPct val="125000"/>
-              </a:lnSpc>
-            </a:pPr>
-            <a:r>
-              <a:rPr sz="2000" b="1">
-                <a:solidFill>
-                  <a:srgbClr val="122A51"/>
-                </a:solidFill>
-                <a:latin typeface="微软雅黑"/>
-                <a:ea typeface="微软雅黑"/>
-                <a:cs typeface="微软雅黑"/>
-              </a:rPr>
-              <a:t>健康咨询</a:t>
-            </a:r>
-          </a:p>
-        </p:txBody>
-      </p:sp>
-      <p:sp>
-        <p:nvSpPr>
-          <p:cNvPr id="18" name="TextBox 17"/>
-          <p:cNvSpPr txBox="1"/>
-          <p:nvPr/>
-        </p:nvSpPr>
-        <p:spPr>
-          <a:xfrm>
-            <a:off x="2606039" y="4187952"/>
-            <a:ext cx="3200400" cy="731520"/>
-          </a:xfrm>
-          <a:prstGeom prst="rect">
-            <a:avLst/>
-          </a:prstGeom>
-          <a:noFill/>
-        </p:spPr>
-        <p:txBody>
-          <a:bodyPr wrap="square">
-            <a:spAutoFit/>
-          </a:bodyPr>
-          <a:lstStyle/>
-          <a:p>
-            <a:pPr algn="l">
-              <a:lnSpc>
-                <a:spcPct val="125000"/>
-              </a:lnSpc>
-            </a:pPr>
-            <a:r>
-              <a:rPr sz="1500" b="0">
-                <a:solidFill>
-                  <a:srgbClr val="1B2233"/>
-                </a:solidFill>
-                <a:latin typeface="微软雅黑"/>
-                <a:ea typeface="微软雅黑"/>
-                <a:cs typeface="微软雅黑"/>
-              </a:rPr>
-              <a:t>只给建议，紧急情况转人工（不做诊断）</a:t>
-            </a:r>
-          </a:p>
-        </p:txBody>
-      </p:sp>
-      <p:sp>
-        <p:nvSpPr>
-          <p:cNvPr id="19" name="Rounded Rectangle 18"/>
-          <p:cNvSpPr/>
-          <p:nvPr/>
-        </p:nvSpPr>
-        <p:spPr>
-          <a:xfrm>
-            <a:off x="6355080" y="4023360"/>
-            <a:ext cx="5120640" cy="960120"/>
-          </a:xfrm>
-          <a:prstGeom prst="roundRect">
-            <a:avLst/>
-          </a:prstGeom>
-          <a:solidFill>
-            <a:srgbClr val="F2F5FB"/>
-          </a:solidFill>
-          <a:ln>
-            <a:noFill/>
-          </a:ln>
-          <a:effectLst/>
-        </p:spPr>
-        <p:style>
-          <a:lnRef idx="1">
-            <a:schemeClr val="accent1"/>
-          </a:lnRef>
-          <a:fillRef idx="3">
-            <a:schemeClr val="accent1"/>
-          </a:fillRef>
-          <a:effectRef idx="2">
-            <a:schemeClr val="accent1"/>
-          </a:effectRef>
-          <a:fontRef idx="minor">
-            <a:schemeClr val="lt1"/>
-          </a:fontRef>
-        </p:style>
-        <p:txBody>
-          <a:bodyPr rtlCol="0" anchor="ctr"/>
-          <a:lstStyle/>
-          <a:p>
-            <a:pPr algn="ctr"/>
-          </a:p>
-        </p:txBody>
-      </p:sp>
-      <p:sp>
-        <p:nvSpPr>
-          <p:cNvPr id="20" name="TextBox 19"/>
-          <p:cNvSpPr txBox="1"/>
-          <p:nvPr/>
-        </p:nvSpPr>
-        <p:spPr>
-          <a:xfrm>
-            <a:off x="6583680" y="4133088"/>
-            <a:ext cx="1463040" cy="731520"/>
-          </a:xfrm>
-          <a:prstGeom prst="rect">
-            <a:avLst/>
-          </a:prstGeom>
-          <a:noFill/>
-        </p:spPr>
-        <p:txBody>
-          <a:bodyPr wrap="square">
-            <a:spAutoFit/>
-          </a:bodyPr>
-          <a:lstStyle/>
-          <a:p>
-            <a:pPr algn="l">
-              <a:lnSpc>
-                <a:spcPct val="125000"/>
-              </a:lnSpc>
-            </a:pPr>
-            <a:r>
-              <a:rPr sz="2000" b="1">
-                <a:solidFill>
-                  <a:srgbClr val="122A51"/>
-                </a:solidFill>
-                <a:latin typeface="微软雅黑"/>
-                <a:ea typeface="微软雅黑"/>
-                <a:cs typeface="微软雅黑"/>
-              </a:rPr>
-              <a:t>天气联动</a:t>
-            </a:r>
-          </a:p>
-        </p:txBody>
-      </p:sp>
-      <p:sp>
-        <p:nvSpPr>
-          <p:cNvPr id="21" name="TextBox 20"/>
-          <p:cNvSpPr txBox="1"/>
-          <p:nvPr/>
-        </p:nvSpPr>
-        <p:spPr>
-          <a:xfrm>
-            <a:off x="8092440" y="4187952"/>
-            <a:ext cx="3200400" cy="731520"/>
-          </a:xfrm>
-          <a:prstGeom prst="rect">
-            <a:avLst/>
-          </a:prstGeom>
-          <a:noFill/>
-        </p:spPr>
-        <p:txBody>
-          <a:bodyPr wrap="square">
-            <a:spAutoFit/>
-          </a:bodyPr>
-          <a:lstStyle/>
-          <a:p>
-            <a:pPr algn="l">
-              <a:lnSpc>
-                <a:spcPct val="125000"/>
-              </a:lnSpc>
-            </a:pPr>
-            <a:r>
-              <a:rPr sz="1500" b="0">
-                <a:solidFill>
-                  <a:srgbClr val="1B2233"/>
-                </a:solidFill>
-                <a:latin typeface="微软雅黑"/>
-                <a:ea typeface="微软雅黑"/>
-                <a:cs typeface="微软雅黑"/>
-              </a:rPr>
-              <a:t>极端天气 → 健康防护建议 → 自动发通知</a:t>
-            </a:r>
-          </a:p>
-        </p:txBody>
-      </p:sp>
-      <p:sp>
-        <p:nvSpPr>
-          <p:cNvPr id="22" name="Rounded Rectangle 21"/>
-          <p:cNvSpPr/>
-          <p:nvPr/>
-        </p:nvSpPr>
-        <p:spPr>
-          <a:xfrm>
-            <a:off x="868680" y="5166360"/>
-            <a:ext cx="5120640" cy="960120"/>
-          </a:xfrm>
-          <a:prstGeom prst="roundRect">
-            <a:avLst/>
-          </a:prstGeom>
-          <a:solidFill>
-            <a:srgbClr val="F2F5FB"/>
-          </a:solidFill>
-          <a:ln>
-            <a:noFill/>
-          </a:ln>
-          <a:effectLst/>
-        </p:spPr>
-        <p:style>
-          <a:lnRef idx="1">
-            <a:schemeClr val="accent1"/>
-          </a:lnRef>
-          <a:fillRef idx="3">
-            <a:schemeClr val="accent1"/>
-          </a:fillRef>
-          <a:effectRef idx="2">
-            <a:schemeClr val="accent1"/>
-          </a:effectRef>
-          <a:fontRef idx="minor">
-            <a:schemeClr val="lt1"/>
-          </a:fontRef>
-        </p:style>
-        <p:txBody>
-          <a:bodyPr rtlCol="0" anchor="ctr"/>
-          <a:lstStyle/>
-          <a:p>
-            <a:pPr algn="ctr"/>
-          </a:p>
-        </p:txBody>
-      </p:sp>
-      <p:sp>
-        <p:nvSpPr>
-          <p:cNvPr id="23" name="TextBox 22"/>
-          <p:cNvSpPr txBox="1"/>
-          <p:nvPr/>
-        </p:nvSpPr>
-        <p:spPr>
-          <a:xfrm>
-            <a:off x="1097280" y="5276088"/>
-            <a:ext cx="1463040" cy="731520"/>
-          </a:xfrm>
-          <a:prstGeom prst="rect">
-            <a:avLst/>
-          </a:prstGeom>
-          <a:noFill/>
-        </p:spPr>
-        <p:txBody>
-          <a:bodyPr wrap="square">
-            <a:spAutoFit/>
-          </a:bodyPr>
-          <a:lstStyle/>
-          <a:p>
-            <a:pPr algn="l">
-              <a:lnSpc>
-                <a:spcPct val="125000"/>
-              </a:lnSpc>
-            </a:pPr>
-            <a:r>
-              <a:rPr sz="2000" b="1">
-                <a:solidFill>
-                  <a:srgbClr val="122A51"/>
-                </a:solidFill>
-                <a:latin typeface="微软雅黑"/>
-                <a:ea typeface="微软雅黑"/>
-                <a:cs typeface="微软雅黑"/>
-              </a:rPr>
-              <a:t>网格员工作台</a:t>
-            </a:r>
-          </a:p>
-        </p:txBody>
-      </p:sp>
-      <p:sp>
-        <p:nvSpPr>
-          <p:cNvPr id="24" name="TextBox 23"/>
-          <p:cNvSpPr txBox="1"/>
-          <p:nvPr/>
-        </p:nvSpPr>
-        <p:spPr>
-          <a:xfrm>
-            <a:off x="2606039" y="5330952"/>
-            <a:ext cx="3200400" cy="731520"/>
-          </a:xfrm>
-          <a:prstGeom prst="rect">
-            <a:avLst/>
-          </a:prstGeom>
-          <a:noFill/>
-        </p:spPr>
-        <p:txBody>
-          <a:bodyPr wrap="square">
-            <a:spAutoFit/>
-          </a:bodyPr>
-          <a:lstStyle/>
-          <a:p>
-            <a:pPr algn="l">
-              <a:lnSpc>
-                <a:spcPct val="125000"/>
-              </a:lnSpc>
-            </a:pPr>
-            <a:r>
-              <a:rPr sz="1500" b="0">
-                <a:solidFill>
-                  <a:srgbClr val="1B2233"/>
-                </a:solidFill>
-                <a:latin typeface="微软雅黑"/>
-                <a:ea typeface="微软雅黑"/>
-                <a:cs typeface="微软雅黑"/>
-              </a:rPr>
-              <a:t>AI 助手、待办、统计导出</a:t>
-            </a:r>
-          </a:p>
-        </p:txBody>
-      </p:sp>
-      <p:sp>
-        <p:nvSpPr>
-          <p:cNvPr id="25" name="Rounded Rectangle 24"/>
-          <p:cNvSpPr/>
-          <p:nvPr/>
-        </p:nvSpPr>
-        <p:spPr>
-          <a:xfrm>
-            <a:off x="6355080" y="5166360"/>
-            <a:ext cx="5120640" cy="960120"/>
-          </a:xfrm>
-          <a:prstGeom prst="roundRect">
-            <a:avLst/>
-          </a:prstGeom>
-          <a:solidFill>
-            <a:srgbClr val="F2F5FB"/>
-          </a:solidFill>
-          <a:ln>
-            <a:noFill/>
-          </a:ln>
-          <a:effectLst/>
-        </p:spPr>
-        <p:style>
-          <a:lnRef idx="1">
-            <a:schemeClr val="accent1"/>
-          </a:lnRef>
-          <a:fillRef idx="3">
-            <a:schemeClr val="accent1"/>
-          </a:fillRef>
-          <a:effectRef idx="2">
-            <a:schemeClr val="accent1"/>
-          </a:effectRef>
-          <a:fontRef idx="minor">
-            <a:schemeClr val="lt1"/>
-          </a:fontRef>
-        </p:style>
-        <p:txBody>
-          <a:bodyPr rtlCol="0" anchor="ctr"/>
-          <a:lstStyle/>
-          <a:p>
-            <a:pPr algn="ctr"/>
-          </a:p>
-        </p:txBody>
-      </p:sp>
-      <p:sp>
-        <p:nvSpPr>
-          <p:cNvPr id="26" name="TextBox 25"/>
-          <p:cNvSpPr txBox="1"/>
-          <p:nvPr/>
-        </p:nvSpPr>
-        <p:spPr>
-          <a:xfrm>
-            <a:off x="6583680" y="5276088"/>
-            <a:ext cx="1463040" cy="731520"/>
-          </a:xfrm>
-          <a:prstGeom prst="rect">
-            <a:avLst/>
-          </a:prstGeom>
-          <a:noFill/>
-        </p:spPr>
-        <p:txBody>
-          <a:bodyPr wrap="square">
-            <a:spAutoFit/>
-          </a:bodyPr>
-          <a:lstStyle/>
-          <a:p>
-            <a:pPr algn="l">
-              <a:lnSpc>
-                <a:spcPct val="125000"/>
-              </a:lnSpc>
-            </a:pPr>
-            <a:r>
-              <a:rPr sz="2000" b="1">
-                <a:solidFill>
-                  <a:srgbClr val="122A51"/>
-                </a:solidFill>
-                <a:latin typeface="微软雅黑"/>
-                <a:ea typeface="微软雅黑"/>
-                <a:cs typeface="微软雅黑"/>
-              </a:rPr>
-              <a:t>转人工</a:t>
-            </a:r>
-          </a:p>
-        </p:txBody>
-      </p:sp>
-      <p:sp>
-        <p:nvSpPr>
-          <p:cNvPr id="27" name="TextBox 26"/>
-          <p:cNvSpPr txBox="1"/>
-          <p:nvPr/>
-        </p:nvSpPr>
-        <p:spPr>
-          <a:xfrm>
-            <a:off x="8092440" y="5330952"/>
-            <a:ext cx="3200400" cy="731520"/>
-          </a:xfrm>
-          <a:prstGeom prst="rect">
-            <a:avLst/>
-          </a:prstGeom>
-          <a:noFill/>
-        </p:spPr>
-        <p:txBody>
-          <a:bodyPr wrap="square">
-            <a:spAutoFit/>
-          </a:bodyPr>
-          <a:lstStyle/>
-          <a:p>
-            <a:pPr algn="l">
-              <a:lnSpc>
-                <a:spcPct val="125000"/>
-              </a:lnSpc>
-            </a:pPr>
-            <a:r>
-              <a:rPr sz="1500" b="0">
-                <a:solidFill>
-                  <a:srgbClr val="1B2233"/>
-                </a:solidFill>
-                <a:latin typeface="微软雅黑"/>
-                <a:ea typeface="微软雅黑"/>
-                <a:cs typeface="微软雅黑"/>
-              </a:rPr>
-              <a:t>带「处理包」：用户信息 + 执行链 + 待确认事项</a:t>
-            </a:r>
-          </a:p>
-        </p:txBody>
-      </p:sp>
-      <p:sp>
-        <p:nvSpPr>
-          <p:cNvPr id="28" name="Rectangle 27"/>
-          <p:cNvSpPr/>
-          <p:nvPr/>
-        </p:nvSpPr>
-        <p:spPr>
-          <a:xfrm>
-            <a:off x="548640" y="6510528"/>
-            <a:ext cx="10881360" cy="9525"/>
-          </a:xfrm>
-          <a:prstGeom prst="rect">
-            <a:avLst/>
-          </a:prstGeom>
-          <a:solidFill>
-            <a:srgbClr val="DDE3EE"/>
-          </a:solidFill>
-          <a:ln>
-            <a:noFill/>
-          </a:ln>
-          <a:effectLst/>
-        </p:spPr>
-        <p:style>
-          <a:lnRef idx="1">
-            <a:schemeClr val="accent1"/>
-          </a:lnRef>
-          <a:fillRef idx="3">
-            <a:schemeClr val="accent1"/>
-          </a:fillRef>
-          <a:effectRef idx="2">
-            <a:schemeClr val="accent1"/>
-          </a:effectRef>
-          <a:fontRef idx="minor">
-            <a:schemeClr val="lt1"/>
-          </a:fontRef>
-        </p:style>
-        <p:txBody>
-          <a:bodyPr rtlCol="0" anchor="ctr"/>
-          <a:lstStyle/>
-          <a:p>
-            <a:pPr algn="ctr"/>
-          </a:p>
-        </p:txBody>
-      </p:sp>
-      <p:sp>
-        <p:nvSpPr>
-          <p:cNvPr id="29" name="TextBox 28"/>
-          <p:cNvSpPr txBox="1"/>
-          <p:nvPr/>
-        </p:nvSpPr>
-        <p:spPr>
-          <a:xfrm>
-            <a:off x="10607040" y="6565392"/>
-            <a:ext cx="822960" cy="274320"/>
-          </a:xfrm>
-          <a:prstGeom prst="rect">
-            <a:avLst/>
-          </a:prstGeom>
-          <a:noFill/>
-        </p:spPr>
-        <p:txBody>
-          <a:bodyPr wrap="square">
-            <a:spAutoFit/>
-          </a:bodyPr>
-          <a:lstStyle/>
-          <a:p>
-            <a:pPr algn="r">
-              <a:lnSpc>
-                <a:spcPct val="125000"/>
-              </a:lnSpc>
-            </a:pPr>
-            <a:r>
-              <a:rPr sz="1100" b="0">
-                <a:solidFill>
-                  <a:srgbClr val="6B7485"/>
-                </a:solidFill>
-                <a:latin typeface="微软雅黑"/>
-                <a:ea typeface="微软雅黑"/>
-                <a:cs typeface="微软雅黑"/>
-              </a:rPr>
-              <a:t>13 / 15</a:t>
+              <a:t>SQL 参数化；合规审计员有一票否决</a:t>
             </a:r>
           </a:p>
         </p:txBody>
@@ -6907,21 +6594,98 @@
                 <a:ea typeface="微软雅黑"/>
                 <a:cs typeface="微软雅黑"/>
               </a:rPr>
-              <a:t>附录 · 它是怎么搭起来的</a:t>
-            </a:r>
-          </a:p>
-        </p:txBody>
-      </p:sp>
-      <p:sp>
-        <p:nvSpPr>
-          <p:cNvPr id="4" name="Rounded Rectangle 3"/>
+              <a:t>附录 · 如需看实物</a:t>
+            </a:r>
+          </a:p>
+        </p:txBody>
+      </p:sp>
+      <p:sp>
+        <p:nvSpPr>
+          <p:cNvPr id="4" name="TextBox 3"/>
+          <p:cNvSpPr txBox="1"/>
+          <p:nvPr/>
+        </p:nvSpPr>
+        <p:spPr>
+          <a:xfrm>
+            <a:off x="868680" y="1737360"/>
+            <a:ext cx="10424160" cy="2377440"/>
+          </a:xfrm>
+          <a:prstGeom prst="rect">
+            <a:avLst/>
+          </a:prstGeom>
+          <a:noFill/>
+        </p:spPr>
+        <p:txBody>
+          <a:bodyPr wrap="square">
+            <a:spAutoFit/>
+          </a:bodyPr>
+          <a:lstStyle/>
+          <a:p>
+            <a:pPr algn="l">
+              <a:lnSpc>
+                <a:spcPct val="150000"/>
+              </a:lnSpc>
+            </a:pPr>
+            <a:r>
+              <a:rPr sz="2600" b="0">
+                <a:solidFill>
+                  <a:srgbClr val="1B2233"/>
+                </a:solidFill>
+                <a:latin typeface="微软雅黑"/>
+                <a:ea typeface="微软雅黑"/>
+                <a:cs typeface="微软雅黑"/>
+              </a:rPr>
+              <a:t>1) 双击项目文件夹里的「启动演示」</a:t>
+            </a:r>
+          </a:p>
+          <a:p>
+            <a:pPr algn="l">
+              <a:lnSpc>
+                <a:spcPct val="150000"/>
+              </a:lnSpc>
+            </a:pPr>
+            <a:r>
+              <a:rPr sz="2600" b="0">
+                <a:solidFill>
+                  <a:srgbClr val="1B2233"/>
+                </a:solidFill>
+                <a:latin typeface="微软雅黑"/>
+                <a:ea typeface="微软雅黑"/>
+                <a:cs typeface="微软雅黑"/>
+              </a:rPr>
+              <a:t>2) 等它提示「服务已就绪」（首次约 10–20 秒，会自动建好数据库）</a:t>
+            </a:r>
+          </a:p>
+          <a:p>
+            <a:pPr algn="l">
+              <a:lnSpc>
+                <a:spcPct val="150000"/>
+              </a:lnSpc>
+            </a:pPr>
+            <a:r>
+              <a:rPr sz="2600" b="0">
+                <a:solidFill>
+                  <a:srgbClr val="1B2233"/>
+                </a:solidFill>
+                <a:latin typeface="微软雅黑"/>
+                <a:ea typeface="微软雅黑"/>
+                <a:cs typeface="微软雅黑"/>
+              </a:rPr>
+              <a:t>3) 浏览器会自动打开登录页</a:t>
+            </a:r>
+          </a:p>
+        </p:txBody>
+      </p:sp>
+      <p:sp>
+        <p:nvSpPr>
+          <p:cNvPr id="5" name="Rounded Rectangle 4"/>
           <p:cNvSpPr/>
           <p:nvPr/>
         </p:nvSpPr>
         <p:spPr>
           <a:xfrm>
-            <a:off x="868680" y="1737360"/>
-            <a:ext cx="1828800" cy="868680"/>
+            <a:off x="868680" y="4023360"/>
+            <a:ext cx="10424160" cy="1737360"/>
           </a:xfrm>
           <a:prstGeom prst="roundRect">
             <a:avLst/>
@@ -6958,14 +6722,14 @@
       </p:sp>
       <p:sp>
         <p:nvSpPr>
-          <p:cNvPr id="5" name="TextBox 4"/>
+          <p:cNvPr id="6" name="TextBox 5"/>
           <p:cNvSpPr txBox="1"/>
           <p:nvPr/>
         </p:nvSpPr>
         <p:spPr>
           <a:xfrm>
-            <a:off x="868680" y="1947672"/>
-            <a:ext cx="1828800" cy="457200"/>
+            <a:off x="1143000" y="4206240"/>
+            <a:ext cx="9875520" cy="1463040"/>
           </a:xfrm>
           <a:prstGeom prst="rect">
             <a:avLst/>
@@ -6978,13 +6742,13 @@
           </a:bodyPr>
           <a:lstStyle/>
           <a:p>
-            <a:pPr algn="ctr">
-              <a:lnSpc>
-                <a:spcPct val="125000"/>
-              </a:lnSpc>
-            </a:pPr>
-            <a:r>
-              <a:rPr sz="2000" b="0">
+            <a:pPr algn="l">
+              <a:lnSpc>
+                <a:spcPct val="135000"/>
+              </a:lnSpc>
+            </a:pPr>
+            <a:r>
+              <a:rPr sz="1800" b="0">
                 <a:solidFill>
                   <a:srgbClr val="1B2233"/>
                 </a:solidFill>
@@ -6992,84 +6756,17 @@
                 <a:ea typeface="微软雅黑"/>
                 <a:cs typeface="微软雅黑"/>
               </a:rPr>
-              <a:t>居民端</a:t>
-            </a:r>
-          </a:p>
-        </p:txBody>
-      </p:sp>
-      <p:sp>
-        <p:nvSpPr>
-          <p:cNvPr id="6" name="Rounded Rectangle 5"/>
-          <p:cNvSpPr/>
-          <p:nvPr/>
-        </p:nvSpPr>
-        <p:spPr>
-          <a:xfrm>
-            <a:off x="2834640" y="1737360"/>
-            <a:ext cx="1828800" cy="868680"/>
-          </a:xfrm>
-          <a:prstGeom prst="roundRect">
-            <a:avLst/>
-          </a:prstGeom>
-          <a:solidFill>
-            <a:srgbClr val="F2F5FB"/>
-          </a:solidFill>
-          <a:ln>
-            <a:noFill/>
-          </a:ln>
-          <a:effectLst/>
-        </p:spPr>
-        <p:style>
-          <a:lnRef idx="1">
-            <a:schemeClr val="accent1"/>
-          </a:lnRef>
-          <a:fillRef idx="3">
-            <a:schemeClr val="accent1"/>
-          </a:fillRef>
-          <a:effectRef idx="2">
-            <a:schemeClr val="accent1"/>
-          </a:effectRef>
-          <a:fontRef idx="minor">
-            <a:schemeClr val="lt1"/>
-          </a:fontRef>
-        </p:style>
-        <p:txBody>
-          <a:bodyPr rtlCol="0" anchor="ctr"/>
-          <a:lstStyle/>
-          <a:p>
-            <a:pPr algn="ctr"/>
-          </a:p>
-        </p:txBody>
-      </p:sp>
-      <p:sp>
-        <p:nvSpPr>
-          <p:cNvPr id="7" name="TextBox 6"/>
-          <p:cNvSpPr txBox="1"/>
-          <p:nvPr/>
-        </p:nvSpPr>
-        <p:spPr>
-          <a:xfrm>
-            <a:off x="2834640" y="1947672"/>
-            <a:ext cx="1828800" cy="457200"/>
-          </a:xfrm>
-          <a:prstGeom prst="rect">
-            <a:avLst/>
-          </a:prstGeom>
-          <a:noFill/>
-        </p:spPr>
-        <p:txBody>
-          <a:bodyPr wrap="square">
-            <a:spAutoFit/>
-          </a:bodyPr>
-          <a:lstStyle/>
-          <a:p>
-            <a:pPr algn="ctr">
-              <a:lnSpc>
-                <a:spcPct val="125000"/>
-              </a:lnSpc>
-            </a:pPr>
-            <a:r>
-              <a:rPr sz="2000" b="0">
+              <a:t>演示账号：居民点「居民」免密 · 老年点「老年」免密 · 网格员 demo_grid / demo123</a:t>
+            </a:r>
+          </a:p>
+          <a:p>
+            <a:pPr algn="l">
+              <a:lnSpc>
+                <a:spcPct val="135000"/>
+              </a:lnSpc>
+            </a:pPr>
+            <a:r>
+              <a:rPr sz="1800" b="0">
                 <a:solidFill>
                   <a:srgbClr val="1B2233"/>
                 </a:solidFill>
@@ -7077,84 +6774,17 @@
                 <a:ea typeface="微软雅黑"/>
                 <a:cs typeface="微软雅黑"/>
               </a:rPr>
-              <a:t>网格员端</a:t>
-            </a:r>
-          </a:p>
-        </p:txBody>
-      </p:sp>
-      <p:sp>
-        <p:nvSpPr>
-          <p:cNvPr id="8" name="Rounded Rectangle 7"/>
-          <p:cNvSpPr/>
-          <p:nvPr/>
-        </p:nvSpPr>
-        <p:spPr>
-          <a:xfrm>
-            <a:off x="4800600" y="1737360"/>
-            <a:ext cx="1828800" cy="868680"/>
-          </a:xfrm>
-          <a:prstGeom prst="roundRect">
-            <a:avLst/>
-          </a:prstGeom>
-          <a:solidFill>
-            <a:srgbClr val="F2F5FB"/>
-          </a:solidFill>
-          <a:ln>
-            <a:noFill/>
-          </a:ln>
-          <a:effectLst/>
-        </p:spPr>
-        <p:style>
-          <a:lnRef idx="1">
-            <a:schemeClr val="accent1"/>
-          </a:lnRef>
-          <a:fillRef idx="3">
-            <a:schemeClr val="accent1"/>
-          </a:fillRef>
-          <a:effectRef idx="2">
-            <a:schemeClr val="accent1"/>
-          </a:effectRef>
-          <a:fontRef idx="minor">
-            <a:schemeClr val="lt1"/>
-          </a:fontRef>
-        </p:style>
-        <p:txBody>
-          <a:bodyPr rtlCol="0" anchor="ctr"/>
-          <a:lstStyle/>
-          <a:p>
-            <a:pPr algn="ctr"/>
-          </a:p>
-        </p:txBody>
-      </p:sp>
-      <p:sp>
-        <p:nvSpPr>
-          <p:cNvPr id="9" name="TextBox 8"/>
-          <p:cNvSpPr txBox="1"/>
-          <p:nvPr/>
-        </p:nvSpPr>
-        <p:spPr>
-          <a:xfrm>
-            <a:off x="4800600" y="1947672"/>
-            <a:ext cx="1828800" cy="457200"/>
-          </a:xfrm>
-          <a:prstGeom prst="rect">
-            <a:avLst/>
-          </a:prstGeom>
-          <a:noFill/>
-        </p:spPr>
-        <p:txBody>
-          <a:bodyPr wrap="square">
-            <a:spAutoFit/>
-          </a:bodyPr>
-          <a:lstStyle/>
-          <a:p>
-            <a:pPr algn="ctr">
-              <a:lnSpc>
-                <a:spcPct val="125000"/>
-              </a:lnSpc>
-            </a:pPr>
-            <a:r>
-              <a:rPr sz="2000" b="0">
+              <a:t>环境：Windows + Python 3.10 以上；首次启动会自动装依赖</a:t>
+            </a:r>
+          </a:p>
+          <a:p>
+            <a:pPr algn="l">
+              <a:lnSpc>
+                <a:spcPct val="135000"/>
+              </a:lnSpc>
+            </a:pPr>
+            <a:r>
+              <a:rPr sz="1800" b="0">
                 <a:solidFill>
                   <a:srgbClr val="1B2233"/>
                 </a:solidFill>
@@ -7162,1049 +6792,14 @@
                 <a:ea typeface="微软雅黑"/>
                 <a:cs typeface="微软雅黑"/>
               </a:rPr>
-              <a:t>老年端</a:t>
-            </a:r>
-          </a:p>
-        </p:txBody>
-      </p:sp>
-      <p:sp>
-        <p:nvSpPr>
-          <p:cNvPr id="10" name="TextBox 9"/>
-          <p:cNvSpPr txBox="1"/>
-          <p:nvPr/>
-        </p:nvSpPr>
-        <p:spPr>
-          <a:xfrm>
-            <a:off x="6949440" y="1737360"/>
-            <a:ext cx="4480560" cy="914400"/>
-          </a:xfrm>
-          <a:prstGeom prst="rect">
-            <a:avLst/>
-          </a:prstGeom>
-          <a:noFill/>
-        </p:spPr>
-        <p:txBody>
-          <a:bodyPr wrap="square">
-            <a:spAutoFit/>
-          </a:bodyPr>
-          <a:lstStyle/>
-          <a:p>
-            <a:pPr algn="l">
-              <a:lnSpc>
-                <a:spcPct val="125000"/>
-              </a:lnSpc>
-            </a:pPr>
-            <a:r>
-              <a:rPr sz="1600" b="0">
-                <a:solidFill>
-                  <a:srgbClr val="6B7485"/>
-                </a:solidFill>
-                <a:latin typeface="微软雅黑"/>
-                <a:ea typeface="微软雅黑"/>
-                <a:cs typeface="微软雅黑"/>
-              </a:rPr>
-              <a:t>三端共用一个后端</a:t>
-            </a:r>
-          </a:p>
-          <a:p>
-            <a:pPr algn="l">
-              <a:lnSpc>
-                <a:spcPct val="125000"/>
-              </a:lnSpc>
-            </a:pPr>
-            <a:r>
-              <a:rPr sz="1600" b="0">
-                <a:solidFill>
-                  <a:srgbClr val="6B7485"/>
-                </a:solidFill>
-                <a:latin typeface="微软雅黑"/>
-                <a:ea typeface="微软雅黑"/>
-                <a:cs typeface="微软雅黑"/>
-              </a:rPr>
-              <a:t>（Vue3 + Naive UI，已构建为静态文件）</a:t>
-            </a:r>
-          </a:p>
-        </p:txBody>
-      </p:sp>
-      <p:sp>
-        <p:nvSpPr>
-          <p:cNvPr id="11" name="Rounded Rectangle 10"/>
-          <p:cNvSpPr/>
-          <p:nvPr/>
-        </p:nvSpPr>
-        <p:spPr>
-          <a:xfrm>
-            <a:off x="868680" y="2880360"/>
-            <a:ext cx="10424160" cy="914400"/>
-          </a:xfrm>
-          <a:prstGeom prst="roundRect">
-            <a:avLst/>
-          </a:prstGeom>
-          <a:solidFill>
-            <a:srgbClr val="2D5BFF"/>
-          </a:solidFill>
-          <a:ln>
-            <a:noFill/>
-          </a:ln>
-          <a:effectLst/>
-        </p:spPr>
-        <p:style>
-          <a:lnRef idx="1">
-            <a:schemeClr val="accent1"/>
-          </a:lnRef>
-          <a:fillRef idx="3">
-            <a:schemeClr val="accent1"/>
-          </a:fillRef>
-          <a:effectRef idx="2">
-            <a:schemeClr val="accent1"/>
-          </a:effectRef>
-          <a:fontRef idx="minor">
-            <a:schemeClr val="lt1"/>
-          </a:fontRef>
-        </p:style>
-        <p:txBody>
-          <a:bodyPr rtlCol="0" anchor="ctr"/>
-          <a:lstStyle/>
-          <a:p>
-            <a:pPr algn="ctr"/>
-          </a:p>
-        </p:txBody>
-      </p:sp>
-      <p:sp>
-        <p:nvSpPr>
-          <p:cNvPr id="12" name="TextBox 11"/>
-          <p:cNvSpPr txBox="1"/>
-          <p:nvPr/>
-        </p:nvSpPr>
-        <p:spPr>
-          <a:xfrm>
-            <a:off x="1097280" y="3090672"/>
-            <a:ext cx="10058400" cy="548640"/>
-          </a:xfrm>
-          <a:prstGeom prst="rect">
-            <a:avLst/>
-          </a:prstGeom>
-          <a:noFill/>
-        </p:spPr>
-        <p:txBody>
-          <a:bodyPr wrap="square">
-            <a:spAutoFit/>
-          </a:bodyPr>
-          <a:lstStyle/>
-          <a:p>
-            <a:pPr algn="ctr">
-              <a:lnSpc>
-                <a:spcPct val="125000"/>
-              </a:lnSpc>
-            </a:pPr>
-            <a:r>
-              <a:rPr sz="2000" b="1">
-                <a:solidFill>
-                  <a:srgbClr val="FFFFFF"/>
-                </a:solidFill>
-                <a:latin typeface="微软雅黑"/>
-                <a:ea typeface="微软雅黑"/>
-                <a:cs typeface="微软雅黑"/>
-              </a:rPr>
-              <a:t>主服务 FastAPI：接口 · 鉴权 · 安全响应头 · 实时通知</a:t>
-            </a:r>
-          </a:p>
-        </p:txBody>
-      </p:sp>
-      <p:sp>
-        <p:nvSpPr>
-          <p:cNvPr id="13" name="TextBox 12"/>
-          <p:cNvSpPr txBox="1"/>
-          <p:nvPr/>
-        </p:nvSpPr>
-        <p:spPr>
-          <a:xfrm>
-            <a:off x="868680" y="4023360"/>
-            <a:ext cx="10424160" cy="457200"/>
-          </a:xfrm>
-          <a:prstGeom prst="rect">
-            <a:avLst/>
-          </a:prstGeom>
-          <a:noFill/>
-        </p:spPr>
-        <p:txBody>
-          <a:bodyPr wrap="square">
-            <a:spAutoFit/>
-          </a:bodyPr>
-          <a:lstStyle/>
-          <a:p>
-            <a:pPr algn="l">
-              <a:lnSpc>
-                <a:spcPct val="125000"/>
-              </a:lnSpc>
-            </a:pPr>
-            <a:r>
-              <a:rPr sz="1800" b="1">
-                <a:solidFill>
-                  <a:srgbClr val="122A51"/>
-                </a:solidFill>
-                <a:latin typeface="微软雅黑"/>
-                <a:ea typeface="微软雅黑"/>
-                <a:cs typeface="微软雅黑"/>
-              </a:rPr>
-              <a:t>9 个智能体角色（黑板协作）</a:t>
-            </a:r>
-          </a:p>
-        </p:txBody>
-      </p:sp>
-      <p:sp>
-        <p:nvSpPr>
-          <p:cNvPr id="14" name="Rounded Rectangle 13"/>
-          <p:cNvSpPr/>
-          <p:nvPr/>
-        </p:nvSpPr>
-        <p:spPr>
-          <a:xfrm>
-            <a:off x="868680" y="4480560"/>
-            <a:ext cx="1097280" cy="566928"/>
-          </a:xfrm>
-          <a:prstGeom prst="roundRect">
-            <a:avLst/>
-          </a:prstGeom>
-          <a:solidFill>
-            <a:srgbClr val="F2F5FB"/>
-          </a:solidFill>
-          <a:ln>
-            <a:noFill/>
-          </a:ln>
-          <a:effectLst/>
-        </p:spPr>
-        <p:style>
-          <a:lnRef idx="1">
-            <a:schemeClr val="accent1"/>
-          </a:lnRef>
-          <a:fillRef idx="3">
-            <a:schemeClr val="accent1"/>
-          </a:fillRef>
-          <a:effectRef idx="2">
-            <a:schemeClr val="accent1"/>
-          </a:effectRef>
-          <a:fontRef idx="minor">
-            <a:schemeClr val="lt1"/>
-          </a:fontRef>
-        </p:style>
-        <p:txBody>
-          <a:bodyPr rtlCol="0" anchor="ctr"/>
-          <a:lstStyle/>
-          <a:p>
-            <a:pPr algn="ctr"/>
-          </a:p>
-        </p:txBody>
-      </p:sp>
-      <p:sp>
-        <p:nvSpPr>
-          <p:cNvPr id="15" name="TextBox 14"/>
-          <p:cNvSpPr txBox="1"/>
-          <p:nvPr/>
-        </p:nvSpPr>
-        <p:spPr>
-          <a:xfrm>
-            <a:off x="868680" y="4599432"/>
-            <a:ext cx="1097280" cy="365760"/>
-          </a:xfrm>
-          <a:prstGeom prst="rect">
-            <a:avLst/>
-          </a:prstGeom>
-          <a:noFill/>
-        </p:spPr>
-        <p:txBody>
-          <a:bodyPr wrap="square">
-            <a:spAutoFit/>
-          </a:bodyPr>
-          <a:lstStyle/>
-          <a:p>
-            <a:pPr algn="ctr">
-              <a:lnSpc>
-                <a:spcPct val="125000"/>
-              </a:lnSpc>
-            </a:pPr>
-            <a:r>
-              <a:rPr sz="1200" b="0">
-                <a:solidFill>
-                  <a:srgbClr val="1B2233"/>
-                </a:solidFill>
-                <a:latin typeface="微软雅黑"/>
-                <a:ea typeface="微软雅黑"/>
-                <a:cs typeface="微软雅黑"/>
-              </a:rPr>
-              <a:t>接待员</a:t>
-            </a:r>
-          </a:p>
-        </p:txBody>
-      </p:sp>
-      <p:sp>
-        <p:nvSpPr>
-          <p:cNvPr id="16" name="Rounded Rectangle 15"/>
-          <p:cNvSpPr/>
-          <p:nvPr/>
-        </p:nvSpPr>
-        <p:spPr>
-          <a:xfrm>
-            <a:off x="2048256" y="4480560"/>
-            <a:ext cx="1097280" cy="566928"/>
-          </a:xfrm>
-          <a:prstGeom prst="roundRect">
-            <a:avLst/>
-          </a:prstGeom>
-          <a:solidFill>
-            <a:srgbClr val="F2F5FB"/>
-          </a:solidFill>
-          <a:ln>
-            <a:noFill/>
-          </a:ln>
-          <a:effectLst/>
-        </p:spPr>
-        <p:style>
-          <a:lnRef idx="1">
-            <a:schemeClr val="accent1"/>
-          </a:lnRef>
-          <a:fillRef idx="3">
-            <a:schemeClr val="accent1"/>
-          </a:fillRef>
-          <a:effectRef idx="2">
-            <a:schemeClr val="accent1"/>
-          </a:effectRef>
-          <a:fontRef idx="minor">
-            <a:schemeClr val="lt1"/>
-          </a:fontRef>
-        </p:style>
-        <p:txBody>
-          <a:bodyPr rtlCol="0" anchor="ctr"/>
-          <a:lstStyle/>
-          <a:p>
-            <a:pPr algn="ctr"/>
-          </a:p>
-        </p:txBody>
-      </p:sp>
-      <p:sp>
-        <p:nvSpPr>
-          <p:cNvPr id="17" name="TextBox 16"/>
-          <p:cNvSpPr txBox="1"/>
-          <p:nvPr/>
-        </p:nvSpPr>
-        <p:spPr>
-          <a:xfrm>
-            <a:off x="2048256" y="4599432"/>
-            <a:ext cx="1097280" cy="365760"/>
-          </a:xfrm>
-          <a:prstGeom prst="rect">
-            <a:avLst/>
-          </a:prstGeom>
-          <a:noFill/>
-        </p:spPr>
-        <p:txBody>
-          <a:bodyPr wrap="square">
-            <a:spAutoFit/>
-          </a:bodyPr>
-          <a:lstStyle/>
-          <a:p>
-            <a:pPr algn="ctr">
-              <a:lnSpc>
-                <a:spcPct val="125000"/>
-              </a:lnSpc>
-            </a:pPr>
-            <a:r>
-              <a:rPr sz="1200" b="0">
-                <a:solidFill>
-                  <a:srgbClr val="1B2233"/>
-                </a:solidFill>
-                <a:latin typeface="微软雅黑"/>
-                <a:ea typeface="微软雅黑"/>
-                <a:cs typeface="微软雅黑"/>
-              </a:rPr>
-              <a:t>报修调度</a:t>
-            </a:r>
-          </a:p>
-        </p:txBody>
-      </p:sp>
-      <p:sp>
-        <p:nvSpPr>
-          <p:cNvPr id="18" name="Rounded Rectangle 17"/>
-          <p:cNvSpPr/>
-          <p:nvPr/>
-        </p:nvSpPr>
-        <p:spPr>
-          <a:xfrm>
-            <a:off x="3227832" y="4480560"/>
-            <a:ext cx="1097280" cy="566928"/>
-          </a:xfrm>
-          <a:prstGeom prst="roundRect">
-            <a:avLst/>
-          </a:prstGeom>
-          <a:solidFill>
-            <a:srgbClr val="F2F5FB"/>
-          </a:solidFill>
-          <a:ln>
-            <a:noFill/>
-          </a:ln>
-          <a:effectLst/>
-        </p:spPr>
-        <p:style>
-          <a:lnRef idx="1">
-            <a:schemeClr val="accent1"/>
-          </a:lnRef>
-          <a:fillRef idx="3">
-            <a:schemeClr val="accent1"/>
-          </a:fillRef>
-          <a:effectRef idx="2">
-            <a:schemeClr val="accent1"/>
-          </a:effectRef>
-          <a:fontRef idx="minor">
-            <a:schemeClr val="lt1"/>
-          </a:fontRef>
-        </p:style>
-        <p:txBody>
-          <a:bodyPr rtlCol="0" anchor="ctr"/>
-          <a:lstStyle/>
-          <a:p>
-            <a:pPr algn="ctr"/>
-          </a:p>
-        </p:txBody>
-      </p:sp>
-      <p:sp>
-        <p:nvSpPr>
-          <p:cNvPr id="19" name="TextBox 18"/>
-          <p:cNvSpPr txBox="1"/>
-          <p:nvPr/>
-        </p:nvSpPr>
-        <p:spPr>
-          <a:xfrm>
-            <a:off x="3227832" y="4599432"/>
-            <a:ext cx="1097280" cy="365760"/>
-          </a:xfrm>
-          <a:prstGeom prst="rect">
-            <a:avLst/>
-          </a:prstGeom>
-          <a:noFill/>
-        </p:spPr>
-        <p:txBody>
-          <a:bodyPr wrap="square">
-            <a:spAutoFit/>
-          </a:bodyPr>
-          <a:lstStyle/>
-          <a:p>
-            <a:pPr algn="ctr">
-              <a:lnSpc>
-                <a:spcPct val="125000"/>
-              </a:lnSpc>
-            </a:pPr>
-            <a:r>
-              <a:rPr sz="1200" b="0">
-                <a:solidFill>
-                  <a:srgbClr val="1B2233"/>
-                </a:solidFill>
-                <a:latin typeface="微软雅黑"/>
-                <a:ea typeface="微软雅黑"/>
-                <a:cs typeface="微软雅黑"/>
-              </a:rPr>
-              <a:t>提案协商</a:t>
-            </a:r>
-          </a:p>
-        </p:txBody>
-      </p:sp>
-      <p:sp>
-        <p:nvSpPr>
-          <p:cNvPr id="20" name="Rounded Rectangle 19"/>
-          <p:cNvSpPr/>
-          <p:nvPr/>
-        </p:nvSpPr>
-        <p:spPr>
-          <a:xfrm>
-            <a:off x="4407408" y="4480560"/>
-            <a:ext cx="1097280" cy="566928"/>
-          </a:xfrm>
-          <a:prstGeom prst="roundRect">
-            <a:avLst/>
-          </a:prstGeom>
-          <a:solidFill>
-            <a:srgbClr val="F2F5FB"/>
-          </a:solidFill>
-          <a:ln>
-            <a:noFill/>
-          </a:ln>
-          <a:effectLst/>
-        </p:spPr>
-        <p:style>
-          <a:lnRef idx="1">
-            <a:schemeClr val="accent1"/>
-          </a:lnRef>
-          <a:fillRef idx="3">
-            <a:schemeClr val="accent1"/>
-          </a:fillRef>
-          <a:effectRef idx="2">
-            <a:schemeClr val="accent1"/>
-          </a:effectRef>
-          <a:fontRef idx="minor">
-            <a:schemeClr val="lt1"/>
-          </a:fontRef>
-        </p:style>
-        <p:txBody>
-          <a:bodyPr rtlCol="0" anchor="ctr"/>
-          <a:lstStyle/>
-          <a:p>
-            <a:pPr algn="ctr"/>
-          </a:p>
-        </p:txBody>
-      </p:sp>
-      <p:sp>
-        <p:nvSpPr>
-          <p:cNvPr id="21" name="TextBox 20"/>
-          <p:cNvSpPr txBox="1"/>
-          <p:nvPr/>
-        </p:nvSpPr>
-        <p:spPr>
-          <a:xfrm>
-            <a:off x="4407408" y="4599432"/>
-            <a:ext cx="1097280" cy="365760"/>
-          </a:xfrm>
-          <a:prstGeom prst="rect">
-            <a:avLst/>
-          </a:prstGeom>
-          <a:noFill/>
-        </p:spPr>
-        <p:txBody>
-          <a:bodyPr wrap="square">
-            <a:spAutoFit/>
-          </a:bodyPr>
-          <a:lstStyle/>
-          <a:p>
-            <a:pPr algn="ctr">
-              <a:lnSpc>
-                <a:spcPct val="125000"/>
-              </a:lnSpc>
-            </a:pPr>
-            <a:r>
-              <a:rPr sz="1200" b="0">
-                <a:solidFill>
-                  <a:srgbClr val="1B2233"/>
-                </a:solidFill>
-                <a:latin typeface="微软雅黑"/>
-                <a:ea typeface="微软雅黑"/>
-                <a:cs typeface="微软雅黑"/>
-              </a:rPr>
-              <a:t>政策专员</a:t>
-            </a:r>
-          </a:p>
-        </p:txBody>
-      </p:sp>
-      <p:sp>
-        <p:nvSpPr>
-          <p:cNvPr id="22" name="Rounded Rectangle 21"/>
-          <p:cNvSpPr/>
-          <p:nvPr/>
-        </p:nvSpPr>
-        <p:spPr>
-          <a:xfrm>
-            <a:off x="5586984" y="4480560"/>
-            <a:ext cx="1097280" cy="566928"/>
-          </a:xfrm>
-          <a:prstGeom prst="roundRect">
-            <a:avLst/>
-          </a:prstGeom>
-          <a:solidFill>
-            <a:srgbClr val="F2F5FB"/>
-          </a:solidFill>
-          <a:ln>
-            <a:noFill/>
-          </a:ln>
-          <a:effectLst/>
-        </p:spPr>
-        <p:style>
-          <a:lnRef idx="1">
-            <a:schemeClr val="accent1"/>
-          </a:lnRef>
-          <a:fillRef idx="3">
-            <a:schemeClr val="accent1"/>
-          </a:fillRef>
-          <a:effectRef idx="2">
-            <a:schemeClr val="accent1"/>
-          </a:effectRef>
-          <a:fontRef idx="minor">
-            <a:schemeClr val="lt1"/>
-          </a:fontRef>
-        </p:style>
-        <p:txBody>
-          <a:bodyPr rtlCol="0" anchor="ctr"/>
-          <a:lstStyle/>
-          <a:p>
-            <a:pPr algn="ctr"/>
-          </a:p>
-        </p:txBody>
-      </p:sp>
-      <p:sp>
-        <p:nvSpPr>
-          <p:cNvPr id="23" name="TextBox 22"/>
-          <p:cNvSpPr txBox="1"/>
-          <p:nvPr/>
-        </p:nvSpPr>
-        <p:spPr>
-          <a:xfrm>
-            <a:off x="5586984" y="4599432"/>
-            <a:ext cx="1097280" cy="365760"/>
-          </a:xfrm>
-          <a:prstGeom prst="rect">
-            <a:avLst/>
-          </a:prstGeom>
-          <a:noFill/>
-        </p:spPr>
-        <p:txBody>
-          <a:bodyPr wrap="square">
-            <a:spAutoFit/>
-          </a:bodyPr>
-          <a:lstStyle/>
-          <a:p>
-            <a:pPr algn="ctr">
-              <a:lnSpc>
-                <a:spcPct val="125000"/>
-              </a:lnSpc>
-            </a:pPr>
-            <a:r>
-              <a:rPr sz="1200" b="0">
-                <a:solidFill>
-                  <a:srgbClr val="1B2233"/>
-                </a:solidFill>
-                <a:latin typeface="微软雅黑"/>
-                <a:ea typeface="微软雅黑"/>
-                <a:cs typeface="微软雅黑"/>
-              </a:rPr>
-              <a:t>健康顾问</a:t>
-            </a:r>
-          </a:p>
-        </p:txBody>
-      </p:sp>
-      <p:sp>
-        <p:nvSpPr>
-          <p:cNvPr id="24" name="Rounded Rectangle 23"/>
-          <p:cNvSpPr/>
-          <p:nvPr/>
-        </p:nvSpPr>
-        <p:spPr>
-          <a:xfrm>
-            <a:off x="6766560" y="4480560"/>
-            <a:ext cx="1097280" cy="566928"/>
-          </a:xfrm>
-          <a:prstGeom prst="roundRect">
-            <a:avLst/>
-          </a:prstGeom>
-          <a:solidFill>
-            <a:srgbClr val="F2F5FB"/>
-          </a:solidFill>
-          <a:ln>
-            <a:noFill/>
-          </a:ln>
-          <a:effectLst/>
-        </p:spPr>
-        <p:style>
-          <a:lnRef idx="1">
-            <a:schemeClr val="accent1"/>
-          </a:lnRef>
-          <a:fillRef idx="3">
-            <a:schemeClr val="accent1"/>
-          </a:fillRef>
-          <a:effectRef idx="2">
-            <a:schemeClr val="accent1"/>
-          </a:effectRef>
-          <a:fontRef idx="minor">
-            <a:schemeClr val="lt1"/>
-          </a:fontRef>
-        </p:style>
-        <p:txBody>
-          <a:bodyPr rtlCol="0" anchor="ctr"/>
-          <a:lstStyle/>
-          <a:p>
-            <a:pPr algn="ctr"/>
-          </a:p>
-        </p:txBody>
-      </p:sp>
-      <p:sp>
-        <p:nvSpPr>
-          <p:cNvPr id="25" name="TextBox 24"/>
-          <p:cNvSpPr txBox="1"/>
-          <p:nvPr/>
-        </p:nvSpPr>
-        <p:spPr>
-          <a:xfrm>
-            <a:off x="6766560" y="4599432"/>
-            <a:ext cx="1097280" cy="365760"/>
-          </a:xfrm>
-          <a:prstGeom prst="rect">
-            <a:avLst/>
-          </a:prstGeom>
-          <a:noFill/>
-        </p:spPr>
-        <p:txBody>
-          <a:bodyPr wrap="square">
-            <a:spAutoFit/>
-          </a:bodyPr>
-          <a:lstStyle/>
-          <a:p>
-            <a:pPr algn="ctr">
-              <a:lnSpc>
-                <a:spcPct val="125000"/>
-              </a:lnSpc>
-            </a:pPr>
-            <a:r>
-              <a:rPr sz="1200" b="0">
-                <a:solidFill>
-                  <a:srgbClr val="1B2233"/>
-                </a:solidFill>
-                <a:latin typeface="微软雅黑"/>
-                <a:ea typeface="微软雅黑"/>
-                <a:cs typeface="微软雅黑"/>
-              </a:rPr>
-              <a:t>天气守护</a:t>
-            </a:r>
-          </a:p>
-        </p:txBody>
-      </p:sp>
-      <p:sp>
-        <p:nvSpPr>
-          <p:cNvPr id="26" name="Rounded Rectangle 25"/>
-          <p:cNvSpPr/>
-          <p:nvPr/>
-        </p:nvSpPr>
-        <p:spPr>
-          <a:xfrm>
-            <a:off x="7946136" y="4480560"/>
-            <a:ext cx="1097280" cy="566928"/>
-          </a:xfrm>
-          <a:prstGeom prst="roundRect">
-            <a:avLst/>
-          </a:prstGeom>
-          <a:solidFill>
-            <a:srgbClr val="F2F5FB"/>
-          </a:solidFill>
-          <a:ln>
-            <a:noFill/>
-          </a:ln>
-          <a:effectLst/>
-        </p:spPr>
-        <p:style>
-          <a:lnRef idx="1">
-            <a:schemeClr val="accent1"/>
-          </a:lnRef>
-          <a:fillRef idx="3">
-            <a:schemeClr val="accent1"/>
-          </a:fillRef>
-          <a:effectRef idx="2">
-            <a:schemeClr val="accent1"/>
-          </a:effectRef>
-          <a:fontRef idx="minor">
-            <a:schemeClr val="lt1"/>
-          </a:fontRef>
-        </p:style>
-        <p:txBody>
-          <a:bodyPr rtlCol="0" anchor="ctr"/>
-          <a:lstStyle/>
-          <a:p>
-            <a:pPr algn="ctr"/>
-          </a:p>
-        </p:txBody>
-      </p:sp>
-      <p:sp>
-        <p:nvSpPr>
-          <p:cNvPr id="27" name="TextBox 26"/>
-          <p:cNvSpPr txBox="1"/>
-          <p:nvPr/>
-        </p:nvSpPr>
-        <p:spPr>
-          <a:xfrm>
-            <a:off x="7946136" y="4599432"/>
-            <a:ext cx="1097280" cy="365760"/>
-          </a:xfrm>
-          <a:prstGeom prst="rect">
-            <a:avLst/>
-          </a:prstGeom>
-          <a:noFill/>
-        </p:spPr>
-        <p:txBody>
-          <a:bodyPr wrap="square">
-            <a:spAutoFit/>
-          </a:bodyPr>
-          <a:lstStyle/>
-          <a:p>
-            <a:pPr algn="ctr">
-              <a:lnSpc>
-                <a:spcPct val="125000"/>
-              </a:lnSpc>
-            </a:pPr>
-            <a:r>
-              <a:rPr sz="1200" b="0">
-                <a:solidFill>
-                  <a:srgbClr val="1B2233"/>
-                </a:solidFill>
-                <a:latin typeface="微软雅黑"/>
-                <a:ea typeface="微软雅黑"/>
-                <a:cs typeface="微软雅黑"/>
-              </a:rPr>
-              <a:t>通知管理</a:t>
-            </a:r>
-          </a:p>
-        </p:txBody>
-      </p:sp>
-      <p:sp>
-        <p:nvSpPr>
-          <p:cNvPr id="28" name="Rounded Rectangle 27"/>
-          <p:cNvSpPr/>
-          <p:nvPr/>
-        </p:nvSpPr>
-        <p:spPr>
-          <a:xfrm>
-            <a:off x="9125712" y="4480560"/>
-            <a:ext cx="1097280" cy="566928"/>
-          </a:xfrm>
-          <a:prstGeom prst="roundRect">
-            <a:avLst/>
-          </a:prstGeom>
-          <a:solidFill>
-            <a:srgbClr val="F2F5FB"/>
-          </a:solidFill>
-          <a:ln>
-            <a:noFill/>
-          </a:ln>
-          <a:effectLst/>
-        </p:spPr>
-        <p:style>
-          <a:lnRef idx="1">
-            <a:schemeClr val="accent1"/>
-          </a:lnRef>
-          <a:fillRef idx="3">
-            <a:schemeClr val="accent1"/>
-          </a:fillRef>
-          <a:effectRef idx="2">
-            <a:schemeClr val="accent1"/>
-          </a:effectRef>
-          <a:fontRef idx="minor">
-            <a:schemeClr val="lt1"/>
-          </a:fontRef>
-        </p:style>
-        <p:txBody>
-          <a:bodyPr rtlCol="0" anchor="ctr"/>
-          <a:lstStyle/>
-          <a:p>
-            <a:pPr algn="ctr"/>
-          </a:p>
-        </p:txBody>
-      </p:sp>
-      <p:sp>
-        <p:nvSpPr>
-          <p:cNvPr id="29" name="TextBox 28"/>
-          <p:cNvSpPr txBox="1"/>
-          <p:nvPr/>
-        </p:nvSpPr>
-        <p:spPr>
-          <a:xfrm>
-            <a:off x="9125712" y="4599432"/>
-            <a:ext cx="1097280" cy="365760"/>
-          </a:xfrm>
-          <a:prstGeom prst="rect">
-            <a:avLst/>
-          </a:prstGeom>
-          <a:noFill/>
-        </p:spPr>
-        <p:txBody>
-          <a:bodyPr wrap="square">
-            <a:spAutoFit/>
-          </a:bodyPr>
-          <a:lstStyle/>
-          <a:p>
-            <a:pPr algn="ctr">
-              <a:lnSpc>
-                <a:spcPct val="125000"/>
-              </a:lnSpc>
-            </a:pPr>
-            <a:r>
-              <a:rPr sz="1200" b="0">
-                <a:solidFill>
-                  <a:srgbClr val="1B2233"/>
-                </a:solidFill>
-                <a:latin typeface="微软雅黑"/>
-                <a:ea typeface="微软雅黑"/>
-                <a:cs typeface="微软雅黑"/>
-              </a:rPr>
-              <a:t>网格助手</a:t>
-            </a:r>
-          </a:p>
-        </p:txBody>
-      </p:sp>
-      <p:sp>
-        <p:nvSpPr>
-          <p:cNvPr id="30" name="Rounded Rectangle 29"/>
-          <p:cNvSpPr/>
-          <p:nvPr/>
-        </p:nvSpPr>
-        <p:spPr>
-          <a:xfrm>
-            <a:off x="10305288" y="4480560"/>
-            <a:ext cx="1097280" cy="566928"/>
-          </a:xfrm>
-          <a:prstGeom prst="roundRect">
-            <a:avLst/>
-          </a:prstGeom>
-          <a:solidFill>
-            <a:srgbClr val="FF8C42"/>
-          </a:solidFill>
-          <a:ln>
-            <a:noFill/>
-          </a:ln>
-          <a:effectLst/>
-        </p:spPr>
-        <p:style>
-          <a:lnRef idx="1">
-            <a:schemeClr val="accent1"/>
-          </a:lnRef>
-          <a:fillRef idx="3">
-            <a:schemeClr val="accent1"/>
-          </a:fillRef>
-          <a:effectRef idx="2">
-            <a:schemeClr val="accent1"/>
-          </a:effectRef>
-          <a:fontRef idx="minor">
-            <a:schemeClr val="lt1"/>
-          </a:fontRef>
-        </p:style>
-        <p:txBody>
-          <a:bodyPr rtlCol="0" anchor="ctr"/>
-          <a:lstStyle/>
-          <a:p>
-            <a:pPr algn="ctr"/>
-          </a:p>
-        </p:txBody>
-      </p:sp>
-      <p:sp>
-        <p:nvSpPr>
-          <p:cNvPr id="31" name="TextBox 30"/>
-          <p:cNvSpPr txBox="1"/>
-          <p:nvPr/>
-        </p:nvSpPr>
-        <p:spPr>
-          <a:xfrm>
-            <a:off x="10305288" y="4599432"/>
-            <a:ext cx="1097280" cy="365760"/>
-          </a:xfrm>
-          <a:prstGeom prst="rect">
-            <a:avLst/>
-          </a:prstGeom>
-          <a:noFill/>
-        </p:spPr>
-        <p:txBody>
-          <a:bodyPr wrap="square">
-            <a:spAutoFit/>
-          </a:bodyPr>
-          <a:lstStyle/>
-          <a:p>
-            <a:pPr algn="ctr">
-              <a:lnSpc>
-                <a:spcPct val="125000"/>
-              </a:lnSpc>
-            </a:pPr>
-            <a:r>
-              <a:rPr sz="1200" b="0">
-                <a:solidFill>
-                  <a:srgbClr val="FFFFFF"/>
-                </a:solidFill>
-                <a:latin typeface="微软雅黑"/>
-                <a:ea typeface="微软雅黑"/>
-                <a:cs typeface="微软雅黑"/>
-              </a:rPr>
-              <a:t>合规审计</a:t>
-            </a:r>
-          </a:p>
-        </p:txBody>
-      </p:sp>
-      <p:sp>
-        <p:nvSpPr>
-          <p:cNvPr id="32" name="Rounded Rectangle 31"/>
-          <p:cNvSpPr/>
-          <p:nvPr/>
-        </p:nvSpPr>
-        <p:spPr>
-          <a:xfrm>
-            <a:off x="868680" y="5349240"/>
-            <a:ext cx="10424160" cy="914400"/>
-          </a:xfrm>
-          <a:prstGeom prst="roundRect">
-            <a:avLst/>
-          </a:prstGeom>
-          <a:solidFill>
-            <a:srgbClr val="E8EEF9"/>
-          </a:solidFill>
-          <a:ln>
-            <a:noFill/>
-          </a:ln>
-          <a:effectLst/>
-        </p:spPr>
-        <p:style>
-          <a:lnRef idx="1">
-            <a:schemeClr val="accent1"/>
-          </a:lnRef>
-          <a:fillRef idx="3">
-            <a:schemeClr val="accent1"/>
-          </a:fillRef>
-          <a:effectRef idx="2">
-            <a:schemeClr val="accent1"/>
-          </a:effectRef>
-          <a:fontRef idx="minor">
-            <a:schemeClr val="lt1"/>
-          </a:fontRef>
-        </p:style>
-        <p:txBody>
-          <a:bodyPr rtlCol="0" anchor="ctr"/>
-          <a:lstStyle/>
-          <a:p>
-            <a:pPr algn="ctr"/>
-          </a:p>
-        </p:txBody>
-      </p:sp>
-      <p:sp>
-        <p:nvSpPr>
-          <p:cNvPr id="33" name="TextBox 32"/>
-          <p:cNvSpPr txBox="1"/>
-          <p:nvPr/>
-        </p:nvSpPr>
-        <p:spPr>
-          <a:xfrm>
-            <a:off x="1097280" y="5504688"/>
-            <a:ext cx="10058400" cy="640080"/>
-          </a:xfrm>
-          <a:prstGeom prst="rect">
-            <a:avLst/>
-          </a:prstGeom>
-          <a:noFill/>
-        </p:spPr>
-        <p:txBody>
-          <a:bodyPr wrap="square">
-            <a:spAutoFit/>
-          </a:bodyPr>
-          <a:lstStyle/>
-          <a:p>
-            <a:pPr algn="ctr">
-              <a:lnSpc>
-                <a:spcPct val="125000"/>
-              </a:lnSpc>
-            </a:pPr>
-            <a:r>
-              <a:rPr sz="1800" b="0">
-                <a:solidFill>
-                  <a:srgbClr val="1B2233"/>
-                </a:solidFill>
-                <a:latin typeface="微软雅黑"/>
-                <a:ea typeface="微软雅黑"/>
-                <a:cs typeface="微软雅黑"/>
-              </a:rPr>
-              <a:t>本地数据库 SQLite：约 50 张表 · 手机号 AES-256-GCM 加密 · 全流程留痕</a:t>
-            </a:r>
-          </a:p>
-        </p:txBody>
-      </p:sp>
-      <p:sp>
-        <p:nvSpPr>
-          <p:cNvPr id="34" name="Rectangle 33"/>
+              <a:t>没有网络也能用：大模型与天气会自动回到规则与本地数据</a:t>
+            </a:r>
+          </a:p>
+        </p:txBody>
+      </p:sp>
+      <p:sp>
+        <p:nvSpPr>
+          <p:cNvPr id="7" name="Rectangle 6"/>
           <p:cNvSpPr/>
           <p:nvPr/>
         </p:nvSpPr>
@@ -8248,14 +6843,14 @@
       </p:sp>
       <p:sp>
         <p:nvSpPr>
-          <p:cNvPr id="35" name="TextBox 34"/>
+          <p:cNvPr id="8" name="TextBox 7"/>
           <p:cNvSpPr txBox="1"/>
           <p:nvPr/>
         </p:nvSpPr>
         <p:spPr>
           <a:xfrm>
-            <a:off x="10607040" y="6565392"/>
-            <a:ext cx="822960" cy="274320"/>
+            <a:off x="548640" y="6565392"/>
+            <a:ext cx="7315200" cy="274320"/>
           </a:xfrm>
           <a:prstGeom prst="rect">
             <a:avLst/>
@@ -8268,6 +6863,47 @@
           </a:bodyPr>
           <a:lstStyle/>
           <a:p>
+            <a:pPr algn="l">
+              <a:lnSpc>
+                <a:spcPct val="125000"/>
+              </a:lnSpc>
+            </a:pPr>
+            <a:r>
+              <a:rPr sz="1100" b="0">
+                <a:solidFill>
+                  <a:srgbClr val="6B7485"/>
+                </a:solidFill>
+                <a:latin typeface="微软雅黑"/>
+                <a:ea typeface="微软雅黑"/>
+                <a:cs typeface="微软雅黑"/>
+              </a:rPr>
+              <a:t>社区先知 CommunityInsight</a:t>
+            </a:r>
+          </a:p>
+        </p:txBody>
+      </p:sp>
+      <p:sp>
+        <p:nvSpPr>
+          <p:cNvPr id="9" name="TextBox 8"/>
+          <p:cNvSpPr txBox="1"/>
+          <p:nvPr/>
+        </p:nvSpPr>
+        <p:spPr>
+          <a:xfrm>
+            <a:off x="10058400" y="6565392"/>
+            <a:ext cx="1371600" cy="274320"/>
+          </a:xfrm>
+          <a:prstGeom prst="rect">
+            <a:avLst/>
+          </a:prstGeom>
+          <a:noFill/>
+        </p:spPr>
+        <p:txBody>
+          <a:bodyPr wrap="square">
+            <a:spAutoFit/>
+          </a:bodyPr>
+          <a:lstStyle/>
+          <a:p>
             <a:pPr algn="r">
               <a:lnSpc>
                 <a:spcPct val="125000"/>
@@ -8282,7 +6918,7 @@
                 <a:ea typeface="微软雅黑"/>
                 <a:cs typeface="微软雅黑"/>
               </a:rPr>
-              <a:t>14 / 15</a:t>
+              <a:t>附录</a:t>
             </a:r>
           </a:p>
         </p:txBody>
@@ -8946,8 +7582,8 @@
         </p:nvSpPr>
         <p:spPr>
           <a:xfrm>
-            <a:off x="10607040" y="6565392"/>
-            <a:ext cx="822960" cy="274320"/>
+            <a:off x="548640" y="6565392"/>
+            <a:ext cx="7315200" cy="274320"/>
           </a:xfrm>
           <a:prstGeom prst="rect">
             <a:avLst/>
@@ -8960,6 +7596,47 @@
           </a:bodyPr>
           <a:lstStyle/>
           <a:p>
+            <a:pPr algn="l">
+              <a:lnSpc>
+                <a:spcPct val="125000"/>
+              </a:lnSpc>
+            </a:pPr>
+            <a:r>
+              <a:rPr sz="1100" b="0">
+                <a:solidFill>
+                  <a:srgbClr val="6B7485"/>
+                </a:solidFill>
+                <a:latin typeface="微软雅黑"/>
+                <a:ea typeface="微软雅黑"/>
+                <a:cs typeface="微软雅黑"/>
+              </a:rPr>
+              <a:t>社区先知 CommunityInsight</a:t>
+            </a:r>
+          </a:p>
+        </p:txBody>
+      </p:sp>
+      <p:sp>
+        <p:nvSpPr>
+          <p:cNvPr id="18" name="TextBox 17"/>
+          <p:cNvSpPr txBox="1"/>
+          <p:nvPr/>
+        </p:nvSpPr>
+        <p:spPr>
+          <a:xfrm>
+            <a:off x="10058400" y="6565392"/>
+            <a:ext cx="1371600" cy="274320"/>
+          </a:xfrm>
+          <a:prstGeom prst="rect">
+            <a:avLst/>
+          </a:prstGeom>
+          <a:noFill/>
+        </p:spPr>
+        <p:txBody>
+          <a:bodyPr wrap="square">
+            <a:spAutoFit/>
+          </a:bodyPr>
+          <a:lstStyle/>
+          <a:p>
             <a:pPr algn="r">
               <a:lnSpc>
                 <a:spcPct val="125000"/>
@@ -8974,7 +7651,7 @@
                 <a:ea typeface="微软雅黑"/>
                 <a:cs typeface="微软雅黑"/>
               </a:rPr>
-              <a:t>15 / 15</a:t>
+              <a:t>附录</a:t>
             </a:r>
           </a:p>
         </p:txBody>
@@ -9539,8 +8216,8 @@
         </p:nvSpPr>
         <p:spPr>
           <a:xfrm>
-            <a:off x="10607040" y="6565392"/>
-            <a:ext cx="822960" cy="274320"/>
+            <a:off x="10058400" y="6565392"/>
+            <a:ext cx="1371600" cy="274320"/>
           </a:xfrm>
           <a:prstGeom prst="rect">
             <a:avLst/>
@@ -9567,7 +8244,7 @@
                 <a:ea typeface="微软雅黑"/>
                 <a:cs typeface="微软雅黑"/>
               </a:rPr>
-              <a:t>2 / 8</a:t>
+              <a:t>2 / 11</a:t>
             </a:r>
           </a:p>
         </p:txBody>
@@ -10599,7 +9276,7 @@
         </p:blipFill>
         <p:spPr>
           <a:xfrm>
-            <a:off x="8595360" y="4389120"/>
+            <a:off x="8732032" y="4389120"/>
             <a:ext cx="823935" cy="1783080"/>
           </a:xfrm>
           <a:prstGeom prst="rect">
@@ -10823,8 +9500,8 @@
         </p:nvSpPr>
         <p:spPr>
           <a:xfrm>
-            <a:off x="10607040" y="6565392"/>
-            <a:ext cx="822960" cy="274320"/>
+            <a:off x="10058400" y="6565392"/>
+            <a:ext cx="1371600" cy="274320"/>
           </a:xfrm>
           <a:prstGeom prst="rect">
             <a:avLst/>
@@ -10851,7 +9528,7 @@
                 <a:ea typeface="微软雅黑"/>
                 <a:cs typeface="微软雅黑"/>
               </a:rPr>
-              <a:t>3 / 8</a:t>
+              <a:t>3 / 11</a:t>
             </a:r>
           </a:p>
         </p:txBody>
@@ -10954,116 +9631,21 @@
                 <a:ea typeface="微软雅黑"/>
                 <a:cs typeface="微软雅黑"/>
               </a:rPr>
-              <a:t>它们真的在传消息</a:t>
-            </a:r>
-          </a:p>
-        </p:txBody>
-      </p:sp>
-      <p:sp>
-        <p:nvSpPr>
-          <p:cNvPr id="4" name="TextBox 3"/>
-          <p:cNvSpPr txBox="1"/>
-          <p:nvPr/>
-        </p:nvSpPr>
-        <p:spPr>
-          <a:xfrm>
-            <a:off x="868680" y="1600200"/>
-            <a:ext cx="5852160" cy="2377440"/>
-          </a:xfrm>
-          <a:prstGeom prst="rect">
-            <a:avLst/>
-          </a:prstGeom>
-          <a:noFill/>
-        </p:spPr>
-        <p:txBody>
-          <a:bodyPr wrap="square">
-            <a:spAutoFit/>
-          </a:bodyPr>
-          <a:lstStyle/>
-          <a:p>
-            <a:pPr algn="l">
-              <a:lnSpc>
-                <a:spcPct val="145000"/>
-              </a:lnSpc>
-            </a:pPr>
-            <a:r>
-              <a:rPr sz="2200" b="0">
-                <a:solidFill>
-                  <a:srgbClr val="1B2233"/>
-                </a:solidFill>
-                <a:latin typeface="微软雅黑"/>
-                <a:ea typeface="微软雅黑"/>
-                <a:cs typeface="微软雅黑"/>
-              </a:rPr>
-              <a:t>黑板：带锁 · 带版本 · 带历史</a:t>
-            </a:r>
-          </a:p>
-          <a:p>
-            <a:pPr algn="l">
-              <a:lnSpc>
-                <a:spcPct val="145000"/>
-              </a:lnSpc>
-            </a:pPr>
-            <a:r>
-              <a:rPr sz="2200" b="0">
-                <a:solidFill>
-                  <a:srgbClr val="1B2233"/>
-                </a:solidFill>
-                <a:latin typeface="微软雅黑"/>
-                <a:ea typeface="微软雅黑"/>
-                <a:cs typeface="微软雅黑"/>
-              </a:rPr>
-              <a:t>5 种消息：请求 / 响应 / 通知 /</a:t>
-            </a:r>
-          </a:p>
-          <a:p>
-            <a:pPr algn="l">
-              <a:lnSpc>
-                <a:spcPct val="145000"/>
-              </a:lnSpc>
-            </a:pPr>
-            <a:r>
-              <a:rPr sz="2200" b="0">
-                <a:solidFill>
-                  <a:srgbClr val="1B2233"/>
-                </a:solidFill>
-                <a:latin typeface="微软雅黑"/>
-                <a:ea typeface="微软雅黑"/>
-                <a:cs typeface="微软雅黑"/>
-              </a:rPr>
-              <a:t>错误 / 转交</a:t>
-            </a:r>
-          </a:p>
-          <a:p>
-            <a:pPr algn="l">
-              <a:lnSpc>
-                <a:spcPct val="145000"/>
-              </a:lnSpc>
-            </a:pPr>
-            <a:r>
-              <a:rPr sz="2200" b="0">
-                <a:solidFill>
-                  <a:srgbClr val="1B2233"/>
-                </a:solidFill>
-                <a:latin typeface="微软雅黑"/>
-                <a:ea typeface="微软雅黑"/>
-                <a:cs typeface="微软雅黑"/>
-              </a:rPr>
-              <a:t>校验 + 仲裁，合规审计一票否决</a:t>
-            </a:r>
-          </a:p>
-        </p:txBody>
-      </p:sp>
-      <p:sp>
-        <p:nvSpPr>
-          <p:cNvPr id="5" name="Rounded Rectangle 4"/>
+              <a:t>它是怎么搭起来的</a:t>
+            </a:r>
+          </a:p>
+        </p:txBody>
+      </p:sp>
+      <p:sp>
+        <p:nvSpPr>
+          <p:cNvPr id="4" name="Rounded Rectangle 3"/>
           <p:cNvSpPr/>
           <p:nvPr/>
         </p:nvSpPr>
         <p:spPr>
           <a:xfrm>
-            <a:off x="868680" y="3977639"/>
-            <a:ext cx="5852160" cy="1737360"/>
+            <a:off x="868680" y="1737360"/>
+            <a:ext cx="1828800" cy="868680"/>
           </a:xfrm>
           <a:prstGeom prst="roundRect">
             <a:avLst/>
@@ -11100,14 +9682,14 @@
       </p:sp>
       <p:sp>
         <p:nvSpPr>
-          <p:cNvPr id="6" name="TextBox 5"/>
+          <p:cNvPr id="5" name="TextBox 4"/>
           <p:cNvSpPr txBox="1"/>
           <p:nvPr/>
         </p:nvSpPr>
         <p:spPr>
           <a:xfrm>
-            <a:off x="1097280" y="4160520"/>
-            <a:ext cx="5486400" cy="1463040"/>
+            <a:off x="868680" y="1947672"/>
+            <a:ext cx="1828800" cy="457200"/>
           </a:xfrm>
           <a:prstGeom prst="rect">
             <a:avLst/>
@@ -11120,9 +9702,9 @@
           </a:bodyPr>
           <a:lstStyle/>
           <a:p>
-            <a:pPr algn="l">
-              <a:lnSpc>
-                <a:spcPct val="135000"/>
+            <a:pPr algn="ctr">
+              <a:lnSpc>
+                <a:spcPct val="125000"/>
               </a:lnSpc>
             </a:pPr>
             <a:r>
@@ -11134,81 +9716,65 @@
                 <a:ea typeface="微软雅黑"/>
                 <a:cs typeface="微软雅黑"/>
               </a:rPr>
-              <a:t>规则为主，大模型为辅：</a:t>
-            </a:r>
-          </a:p>
-          <a:p>
-            <a:pPr algn="l">
-              <a:lnSpc>
-                <a:spcPct val="135000"/>
-              </a:lnSpc>
-            </a:pPr>
-            <a:r>
-              <a:rPr sz="2000" b="0">
-                <a:solidFill>
-                  <a:srgbClr val="1B2233"/>
-                </a:solidFill>
-                <a:latin typeface="微软雅黑"/>
-                <a:ea typeface="微软雅黑"/>
-                <a:cs typeface="微软雅黑"/>
-              </a:rPr>
-              <a:t>意图/追问/政策生成 → 大模型</a:t>
-            </a:r>
-          </a:p>
-          <a:p>
-            <a:pPr algn="l">
-              <a:lnSpc>
-                <a:spcPct val="135000"/>
-              </a:lnSpc>
-            </a:pPr>
-            <a:r>
-              <a:rPr sz="2000" b="0">
-                <a:solidFill>
-                  <a:srgbClr val="1B2233"/>
-                </a:solidFill>
-                <a:latin typeface="微软雅黑"/>
-                <a:ea typeface="微软雅黑"/>
-                <a:cs typeface="微软雅黑"/>
-              </a:rPr>
-              <a:t>状态机/派单/权限/加密 → 规则</a:t>
-            </a:r>
-          </a:p>
-        </p:txBody>
-      </p:sp>
-      <p:pic>
-        <p:nvPicPr>
-          <p:cNvPr id="7" name="Picture 6" descr="04-多智能体执行链.png"/>
-          <p:cNvPicPr>
-            <a:picLocks noChangeAspect="1"/>
-          </p:cNvPicPr>
-          <p:nvPr/>
-        </p:nvPicPr>
-        <p:blipFill>
-          <a:blip r:embed="rId2"/>
-          <a:stretch>
-            <a:fillRect/>
-          </a:stretch>
-        </p:blipFill>
-        <p:spPr>
-          <a:xfrm>
-            <a:off x="7040880" y="1554480"/>
-            <a:ext cx="4480560" cy="2800350"/>
-          </a:xfrm>
-          <a:prstGeom prst="rect">
-            <a:avLst/>
-          </a:prstGeom>
-        </p:spPr>
-      </p:pic>
-      <p:sp>
-        <p:nvSpPr>
-          <p:cNvPr id="8" name="TextBox 7"/>
+              <a:t>居民端</a:t>
+            </a:r>
+          </a:p>
+        </p:txBody>
+      </p:sp>
+      <p:sp>
+        <p:nvSpPr>
+          <p:cNvPr id="6" name="Rounded Rectangle 5"/>
+          <p:cNvSpPr/>
+          <p:nvPr/>
+        </p:nvSpPr>
+        <p:spPr>
+          <a:xfrm>
+            <a:off x="2834640" y="1737360"/>
+            <a:ext cx="1828800" cy="868680"/>
+          </a:xfrm>
+          <a:prstGeom prst="roundRect">
+            <a:avLst/>
+          </a:prstGeom>
+          <a:solidFill>
+            <a:srgbClr val="F2F5FB"/>
+          </a:solidFill>
+          <a:ln>
+            <a:noFill/>
+          </a:ln>
+          <a:effectLst/>
+        </p:spPr>
+        <p:style>
+          <a:lnRef idx="1">
+            <a:schemeClr val="accent1"/>
+          </a:lnRef>
+          <a:fillRef idx="3">
+            <a:schemeClr val="accent1"/>
+          </a:fillRef>
+          <a:effectRef idx="2">
+            <a:schemeClr val="accent1"/>
+          </a:effectRef>
+          <a:fontRef idx="minor">
+            <a:schemeClr val="lt1"/>
+          </a:fontRef>
+        </p:style>
+        <p:txBody>
+          <a:bodyPr rtlCol="0" anchor="ctr"/>
+          <a:lstStyle/>
+          <a:p>
+            <a:pPr algn="ctr"/>
+          </a:p>
+        </p:txBody>
+      </p:sp>
+      <p:sp>
+        <p:nvSpPr>
+          <p:cNvPr id="7" name="TextBox 6"/>
           <p:cNvSpPr txBox="1"/>
           <p:nvPr/>
         </p:nvSpPr>
         <p:spPr>
           <a:xfrm>
-            <a:off x="7040880" y="5623560"/>
-            <a:ext cx="4572000" cy="457200"/>
+            <a:off x="2834640" y="1947672"/>
+            <a:ext cx="1828800" cy="457200"/>
           </a:xfrm>
           <a:prstGeom prst="rect">
             <a:avLst/>
@@ -11221,13 +9787,139 @@
           </a:bodyPr>
           <a:lstStyle/>
           <a:p>
+            <a:pPr algn="ctr">
+              <a:lnSpc>
+                <a:spcPct val="125000"/>
+              </a:lnSpc>
+            </a:pPr>
+            <a:r>
+              <a:rPr sz="2000" b="0">
+                <a:solidFill>
+                  <a:srgbClr val="1B2233"/>
+                </a:solidFill>
+                <a:latin typeface="微软雅黑"/>
+                <a:ea typeface="微软雅黑"/>
+                <a:cs typeface="微软雅黑"/>
+              </a:rPr>
+              <a:t>网格员端</a:t>
+            </a:r>
+          </a:p>
+        </p:txBody>
+      </p:sp>
+      <p:sp>
+        <p:nvSpPr>
+          <p:cNvPr id="8" name="Rounded Rectangle 7"/>
+          <p:cNvSpPr/>
+          <p:nvPr/>
+        </p:nvSpPr>
+        <p:spPr>
+          <a:xfrm>
+            <a:off x="4800600" y="1737360"/>
+            <a:ext cx="1828800" cy="868680"/>
+          </a:xfrm>
+          <a:prstGeom prst="roundRect">
+            <a:avLst/>
+          </a:prstGeom>
+          <a:solidFill>
+            <a:srgbClr val="F2F5FB"/>
+          </a:solidFill>
+          <a:ln>
+            <a:noFill/>
+          </a:ln>
+          <a:effectLst/>
+        </p:spPr>
+        <p:style>
+          <a:lnRef idx="1">
+            <a:schemeClr val="accent1"/>
+          </a:lnRef>
+          <a:fillRef idx="3">
+            <a:schemeClr val="accent1"/>
+          </a:fillRef>
+          <a:effectRef idx="2">
+            <a:schemeClr val="accent1"/>
+          </a:effectRef>
+          <a:fontRef idx="minor">
+            <a:schemeClr val="lt1"/>
+          </a:fontRef>
+        </p:style>
+        <p:txBody>
+          <a:bodyPr rtlCol="0" anchor="ctr"/>
+          <a:lstStyle/>
+          <a:p>
+            <a:pPr algn="ctr"/>
+          </a:p>
+        </p:txBody>
+      </p:sp>
+      <p:sp>
+        <p:nvSpPr>
+          <p:cNvPr id="9" name="TextBox 8"/>
+          <p:cNvSpPr txBox="1"/>
+          <p:nvPr/>
+        </p:nvSpPr>
+        <p:spPr>
+          <a:xfrm>
+            <a:off x="4800600" y="1947672"/>
+            <a:ext cx="1828800" cy="457200"/>
+          </a:xfrm>
+          <a:prstGeom prst="rect">
+            <a:avLst/>
+          </a:prstGeom>
+          <a:noFill/>
+        </p:spPr>
+        <p:txBody>
+          <a:bodyPr wrap="square">
+            <a:spAutoFit/>
+          </a:bodyPr>
+          <a:lstStyle/>
+          <a:p>
+            <a:pPr algn="ctr">
+              <a:lnSpc>
+                <a:spcPct val="125000"/>
+              </a:lnSpc>
+            </a:pPr>
+            <a:r>
+              <a:rPr sz="2000" b="0">
+                <a:solidFill>
+                  <a:srgbClr val="1B2233"/>
+                </a:solidFill>
+                <a:latin typeface="微软雅黑"/>
+                <a:ea typeface="微软雅黑"/>
+                <a:cs typeface="微软雅黑"/>
+              </a:rPr>
+              <a:t>老年端</a:t>
+            </a:r>
+          </a:p>
+        </p:txBody>
+      </p:sp>
+      <p:sp>
+        <p:nvSpPr>
+          <p:cNvPr id="10" name="TextBox 9"/>
+          <p:cNvSpPr txBox="1"/>
+          <p:nvPr/>
+        </p:nvSpPr>
+        <p:spPr>
+          <a:xfrm>
+            <a:off x="6949440" y="1783080"/>
+            <a:ext cx="4480560" cy="914400"/>
+          </a:xfrm>
+          <a:prstGeom prst="rect">
+            <a:avLst/>
+          </a:prstGeom>
+          <a:noFill/>
+        </p:spPr>
+        <p:txBody>
+          <a:bodyPr wrap="square">
+            <a:spAutoFit/>
+          </a:bodyPr>
+          <a:lstStyle/>
+          <a:p>
             <a:pPr algn="l">
               <a:lnSpc>
                 <a:spcPct val="125000"/>
               </a:lnSpc>
             </a:pPr>
             <a:r>
-              <a:rPr sz="1400" b="0">
+              <a:rPr sz="1600" b="0">
                 <a:solidFill>
                   <a:srgbClr val="6B7485"/>
                 </a:solidFill>
@@ -11235,14 +9927,1008 @@
                 <a:ea typeface="微软雅黑"/>
                 <a:cs typeface="微软雅黑"/>
               </a:rPr>
-              <a:t>↑ 现场展开的「多智能体执行链」</a:t>
-            </a:r>
-          </a:p>
-        </p:txBody>
-      </p:sp>
-      <p:sp>
-        <p:nvSpPr>
-          <p:cNvPr id="9" name="Rectangle 8"/>
+              <a:t>三端共用一个后端</a:t>
+            </a:r>
+          </a:p>
+          <a:p>
+            <a:pPr algn="l">
+              <a:lnSpc>
+                <a:spcPct val="125000"/>
+              </a:lnSpc>
+            </a:pPr>
+            <a:r>
+              <a:rPr sz="1600" b="0">
+                <a:solidFill>
+                  <a:srgbClr val="6B7485"/>
+                </a:solidFill>
+                <a:latin typeface="微软雅黑"/>
+                <a:ea typeface="微软雅黑"/>
+                <a:cs typeface="微软雅黑"/>
+              </a:rPr>
+              <a:t>（Vue3 + Naive UI，已构建为静态文件）</a:t>
+            </a:r>
+          </a:p>
+        </p:txBody>
+      </p:sp>
+      <p:sp>
+        <p:nvSpPr>
+          <p:cNvPr id="11" name="Rounded Rectangle 10"/>
+          <p:cNvSpPr/>
+          <p:nvPr/>
+        </p:nvSpPr>
+        <p:spPr>
+          <a:xfrm>
+            <a:off x="868680" y="2880360"/>
+            <a:ext cx="10424160" cy="914400"/>
+          </a:xfrm>
+          <a:prstGeom prst="roundRect">
+            <a:avLst/>
+          </a:prstGeom>
+          <a:solidFill>
+            <a:srgbClr val="2D5BFF"/>
+          </a:solidFill>
+          <a:ln>
+            <a:noFill/>
+          </a:ln>
+          <a:effectLst/>
+        </p:spPr>
+        <p:style>
+          <a:lnRef idx="1">
+            <a:schemeClr val="accent1"/>
+          </a:lnRef>
+          <a:fillRef idx="3">
+            <a:schemeClr val="accent1"/>
+          </a:fillRef>
+          <a:effectRef idx="2">
+            <a:schemeClr val="accent1"/>
+          </a:effectRef>
+          <a:fontRef idx="minor">
+            <a:schemeClr val="lt1"/>
+          </a:fontRef>
+        </p:style>
+        <p:txBody>
+          <a:bodyPr rtlCol="0" anchor="ctr"/>
+          <a:lstStyle/>
+          <a:p>
+            <a:pPr algn="ctr"/>
+          </a:p>
+        </p:txBody>
+      </p:sp>
+      <p:sp>
+        <p:nvSpPr>
+          <p:cNvPr id="12" name="TextBox 11"/>
+          <p:cNvSpPr txBox="1"/>
+          <p:nvPr/>
+        </p:nvSpPr>
+        <p:spPr>
+          <a:xfrm>
+            <a:off x="1097280" y="3090672"/>
+            <a:ext cx="10058400" cy="548640"/>
+          </a:xfrm>
+          <a:prstGeom prst="rect">
+            <a:avLst/>
+          </a:prstGeom>
+          <a:noFill/>
+        </p:spPr>
+        <p:txBody>
+          <a:bodyPr wrap="square">
+            <a:spAutoFit/>
+          </a:bodyPr>
+          <a:lstStyle/>
+          <a:p>
+            <a:pPr algn="ctr">
+              <a:lnSpc>
+                <a:spcPct val="125000"/>
+              </a:lnSpc>
+            </a:pPr>
+            <a:r>
+              <a:rPr sz="2000" b="1">
+                <a:solidFill>
+                  <a:srgbClr val="FFFFFF"/>
+                </a:solidFill>
+                <a:latin typeface="微软雅黑"/>
+                <a:ea typeface="微软雅黑"/>
+                <a:cs typeface="微软雅黑"/>
+              </a:rPr>
+              <a:t>主服务 FastAPI：接口 · 鉴权 · 安全响应头 · 实时通知</a:t>
+            </a:r>
+          </a:p>
+        </p:txBody>
+      </p:sp>
+      <p:sp>
+        <p:nvSpPr>
+          <p:cNvPr id="13" name="TextBox 12"/>
+          <p:cNvSpPr txBox="1"/>
+          <p:nvPr/>
+        </p:nvSpPr>
+        <p:spPr>
+          <a:xfrm>
+            <a:off x="868680" y="4023360"/>
+            <a:ext cx="10424160" cy="457200"/>
+          </a:xfrm>
+          <a:prstGeom prst="rect">
+            <a:avLst/>
+          </a:prstGeom>
+          <a:noFill/>
+        </p:spPr>
+        <p:txBody>
+          <a:bodyPr wrap="square">
+            <a:spAutoFit/>
+          </a:bodyPr>
+          <a:lstStyle/>
+          <a:p>
+            <a:pPr algn="l">
+              <a:lnSpc>
+                <a:spcPct val="125000"/>
+              </a:lnSpc>
+            </a:pPr>
+            <a:r>
+              <a:rPr sz="1800" b="1">
+                <a:solidFill>
+                  <a:srgbClr val="122A51"/>
+                </a:solidFill>
+                <a:latin typeface="微软雅黑"/>
+                <a:ea typeface="微软雅黑"/>
+                <a:cs typeface="微软雅黑"/>
+              </a:rPr>
+              <a:t>9 个智能体角色（黑板协作）</a:t>
+            </a:r>
+          </a:p>
+        </p:txBody>
+      </p:sp>
+      <p:sp>
+        <p:nvSpPr>
+          <p:cNvPr id="14" name="Rounded Rectangle 13"/>
+          <p:cNvSpPr/>
+          <p:nvPr/>
+        </p:nvSpPr>
+        <p:spPr>
+          <a:xfrm>
+            <a:off x="868680" y="4480560"/>
+            <a:ext cx="1097280" cy="566928"/>
+          </a:xfrm>
+          <a:prstGeom prst="roundRect">
+            <a:avLst/>
+          </a:prstGeom>
+          <a:solidFill>
+            <a:srgbClr val="F2F5FB"/>
+          </a:solidFill>
+          <a:ln>
+            <a:noFill/>
+          </a:ln>
+          <a:effectLst/>
+        </p:spPr>
+        <p:style>
+          <a:lnRef idx="1">
+            <a:schemeClr val="accent1"/>
+          </a:lnRef>
+          <a:fillRef idx="3">
+            <a:schemeClr val="accent1"/>
+          </a:fillRef>
+          <a:effectRef idx="2">
+            <a:schemeClr val="accent1"/>
+          </a:effectRef>
+          <a:fontRef idx="minor">
+            <a:schemeClr val="lt1"/>
+          </a:fontRef>
+        </p:style>
+        <p:txBody>
+          <a:bodyPr rtlCol="0" anchor="ctr"/>
+          <a:lstStyle/>
+          <a:p>
+            <a:pPr algn="ctr"/>
+          </a:p>
+        </p:txBody>
+      </p:sp>
+      <p:sp>
+        <p:nvSpPr>
+          <p:cNvPr id="15" name="TextBox 14"/>
+          <p:cNvSpPr txBox="1"/>
+          <p:nvPr/>
+        </p:nvSpPr>
+        <p:spPr>
+          <a:xfrm>
+            <a:off x="868680" y="4599432"/>
+            <a:ext cx="1097280" cy="365760"/>
+          </a:xfrm>
+          <a:prstGeom prst="rect">
+            <a:avLst/>
+          </a:prstGeom>
+          <a:noFill/>
+        </p:spPr>
+        <p:txBody>
+          <a:bodyPr wrap="square">
+            <a:spAutoFit/>
+          </a:bodyPr>
+          <a:lstStyle/>
+          <a:p>
+            <a:pPr algn="ctr">
+              <a:lnSpc>
+                <a:spcPct val="125000"/>
+              </a:lnSpc>
+            </a:pPr>
+            <a:r>
+              <a:rPr sz="1200" b="0">
+                <a:solidFill>
+                  <a:srgbClr val="1B2233"/>
+                </a:solidFill>
+                <a:latin typeface="微软雅黑"/>
+                <a:ea typeface="微软雅黑"/>
+                <a:cs typeface="微软雅黑"/>
+              </a:rPr>
+              <a:t>接待员</a:t>
+            </a:r>
+          </a:p>
+        </p:txBody>
+      </p:sp>
+      <p:sp>
+        <p:nvSpPr>
+          <p:cNvPr id="16" name="Rounded Rectangle 15"/>
+          <p:cNvSpPr/>
+          <p:nvPr/>
+        </p:nvSpPr>
+        <p:spPr>
+          <a:xfrm>
+            <a:off x="2048256" y="4480560"/>
+            <a:ext cx="1097280" cy="566928"/>
+          </a:xfrm>
+          <a:prstGeom prst="roundRect">
+            <a:avLst/>
+          </a:prstGeom>
+          <a:solidFill>
+            <a:srgbClr val="F2F5FB"/>
+          </a:solidFill>
+          <a:ln>
+            <a:noFill/>
+          </a:ln>
+          <a:effectLst/>
+        </p:spPr>
+        <p:style>
+          <a:lnRef idx="1">
+            <a:schemeClr val="accent1"/>
+          </a:lnRef>
+          <a:fillRef idx="3">
+            <a:schemeClr val="accent1"/>
+          </a:fillRef>
+          <a:effectRef idx="2">
+            <a:schemeClr val="accent1"/>
+          </a:effectRef>
+          <a:fontRef idx="minor">
+            <a:schemeClr val="lt1"/>
+          </a:fontRef>
+        </p:style>
+        <p:txBody>
+          <a:bodyPr rtlCol="0" anchor="ctr"/>
+          <a:lstStyle/>
+          <a:p>
+            <a:pPr algn="ctr"/>
+          </a:p>
+        </p:txBody>
+      </p:sp>
+      <p:sp>
+        <p:nvSpPr>
+          <p:cNvPr id="17" name="TextBox 16"/>
+          <p:cNvSpPr txBox="1"/>
+          <p:nvPr/>
+        </p:nvSpPr>
+        <p:spPr>
+          <a:xfrm>
+            <a:off x="2048256" y="4599432"/>
+            <a:ext cx="1097280" cy="365760"/>
+          </a:xfrm>
+          <a:prstGeom prst="rect">
+            <a:avLst/>
+          </a:prstGeom>
+          <a:noFill/>
+        </p:spPr>
+        <p:txBody>
+          <a:bodyPr wrap="square">
+            <a:spAutoFit/>
+          </a:bodyPr>
+          <a:lstStyle/>
+          <a:p>
+            <a:pPr algn="ctr">
+              <a:lnSpc>
+                <a:spcPct val="125000"/>
+              </a:lnSpc>
+            </a:pPr>
+            <a:r>
+              <a:rPr sz="1200" b="0">
+                <a:solidFill>
+                  <a:srgbClr val="1B2233"/>
+                </a:solidFill>
+                <a:latin typeface="微软雅黑"/>
+                <a:ea typeface="微软雅黑"/>
+                <a:cs typeface="微软雅黑"/>
+              </a:rPr>
+              <a:t>报修调度</a:t>
+            </a:r>
+          </a:p>
+        </p:txBody>
+      </p:sp>
+      <p:sp>
+        <p:nvSpPr>
+          <p:cNvPr id="18" name="Rounded Rectangle 17"/>
+          <p:cNvSpPr/>
+          <p:nvPr/>
+        </p:nvSpPr>
+        <p:spPr>
+          <a:xfrm>
+            <a:off x="3227832" y="4480560"/>
+            <a:ext cx="1097280" cy="566928"/>
+          </a:xfrm>
+          <a:prstGeom prst="roundRect">
+            <a:avLst/>
+          </a:prstGeom>
+          <a:solidFill>
+            <a:srgbClr val="F2F5FB"/>
+          </a:solidFill>
+          <a:ln>
+            <a:noFill/>
+          </a:ln>
+          <a:effectLst/>
+        </p:spPr>
+        <p:style>
+          <a:lnRef idx="1">
+            <a:schemeClr val="accent1"/>
+          </a:lnRef>
+          <a:fillRef idx="3">
+            <a:schemeClr val="accent1"/>
+          </a:fillRef>
+          <a:effectRef idx="2">
+            <a:schemeClr val="accent1"/>
+          </a:effectRef>
+          <a:fontRef idx="minor">
+            <a:schemeClr val="lt1"/>
+          </a:fontRef>
+        </p:style>
+        <p:txBody>
+          <a:bodyPr rtlCol="0" anchor="ctr"/>
+          <a:lstStyle/>
+          <a:p>
+            <a:pPr algn="ctr"/>
+          </a:p>
+        </p:txBody>
+      </p:sp>
+      <p:sp>
+        <p:nvSpPr>
+          <p:cNvPr id="19" name="TextBox 18"/>
+          <p:cNvSpPr txBox="1"/>
+          <p:nvPr/>
+        </p:nvSpPr>
+        <p:spPr>
+          <a:xfrm>
+            <a:off x="3227832" y="4599432"/>
+            <a:ext cx="1097280" cy="365760"/>
+          </a:xfrm>
+          <a:prstGeom prst="rect">
+            <a:avLst/>
+          </a:prstGeom>
+          <a:noFill/>
+        </p:spPr>
+        <p:txBody>
+          <a:bodyPr wrap="square">
+            <a:spAutoFit/>
+          </a:bodyPr>
+          <a:lstStyle/>
+          <a:p>
+            <a:pPr algn="ctr">
+              <a:lnSpc>
+                <a:spcPct val="125000"/>
+              </a:lnSpc>
+            </a:pPr>
+            <a:r>
+              <a:rPr sz="1200" b="0">
+                <a:solidFill>
+                  <a:srgbClr val="1B2233"/>
+                </a:solidFill>
+                <a:latin typeface="微软雅黑"/>
+                <a:ea typeface="微软雅黑"/>
+                <a:cs typeface="微软雅黑"/>
+              </a:rPr>
+              <a:t>提案协商</a:t>
+            </a:r>
+          </a:p>
+        </p:txBody>
+      </p:sp>
+      <p:sp>
+        <p:nvSpPr>
+          <p:cNvPr id="20" name="Rounded Rectangle 19"/>
+          <p:cNvSpPr/>
+          <p:nvPr/>
+        </p:nvSpPr>
+        <p:spPr>
+          <a:xfrm>
+            <a:off x="4407408" y="4480560"/>
+            <a:ext cx="1097280" cy="566928"/>
+          </a:xfrm>
+          <a:prstGeom prst="roundRect">
+            <a:avLst/>
+          </a:prstGeom>
+          <a:solidFill>
+            <a:srgbClr val="F2F5FB"/>
+          </a:solidFill>
+          <a:ln>
+            <a:noFill/>
+          </a:ln>
+          <a:effectLst/>
+        </p:spPr>
+        <p:style>
+          <a:lnRef idx="1">
+            <a:schemeClr val="accent1"/>
+          </a:lnRef>
+          <a:fillRef idx="3">
+            <a:schemeClr val="accent1"/>
+          </a:fillRef>
+          <a:effectRef idx="2">
+            <a:schemeClr val="accent1"/>
+          </a:effectRef>
+          <a:fontRef idx="minor">
+            <a:schemeClr val="lt1"/>
+          </a:fontRef>
+        </p:style>
+        <p:txBody>
+          <a:bodyPr rtlCol="0" anchor="ctr"/>
+          <a:lstStyle/>
+          <a:p>
+            <a:pPr algn="ctr"/>
+          </a:p>
+        </p:txBody>
+      </p:sp>
+      <p:sp>
+        <p:nvSpPr>
+          <p:cNvPr id="21" name="TextBox 20"/>
+          <p:cNvSpPr txBox="1"/>
+          <p:nvPr/>
+        </p:nvSpPr>
+        <p:spPr>
+          <a:xfrm>
+            <a:off x="4407408" y="4599432"/>
+            <a:ext cx="1097280" cy="365760"/>
+          </a:xfrm>
+          <a:prstGeom prst="rect">
+            <a:avLst/>
+          </a:prstGeom>
+          <a:noFill/>
+        </p:spPr>
+        <p:txBody>
+          <a:bodyPr wrap="square">
+            <a:spAutoFit/>
+          </a:bodyPr>
+          <a:lstStyle/>
+          <a:p>
+            <a:pPr algn="ctr">
+              <a:lnSpc>
+                <a:spcPct val="125000"/>
+              </a:lnSpc>
+            </a:pPr>
+            <a:r>
+              <a:rPr sz="1200" b="0">
+                <a:solidFill>
+                  <a:srgbClr val="1B2233"/>
+                </a:solidFill>
+                <a:latin typeface="微软雅黑"/>
+                <a:ea typeface="微软雅黑"/>
+                <a:cs typeface="微软雅黑"/>
+              </a:rPr>
+              <a:t>政策专员</a:t>
+            </a:r>
+          </a:p>
+        </p:txBody>
+      </p:sp>
+      <p:sp>
+        <p:nvSpPr>
+          <p:cNvPr id="22" name="Rounded Rectangle 21"/>
+          <p:cNvSpPr/>
+          <p:nvPr/>
+        </p:nvSpPr>
+        <p:spPr>
+          <a:xfrm>
+            <a:off x="5586984" y="4480560"/>
+            <a:ext cx="1097280" cy="566928"/>
+          </a:xfrm>
+          <a:prstGeom prst="roundRect">
+            <a:avLst/>
+          </a:prstGeom>
+          <a:solidFill>
+            <a:srgbClr val="F2F5FB"/>
+          </a:solidFill>
+          <a:ln>
+            <a:noFill/>
+          </a:ln>
+          <a:effectLst/>
+        </p:spPr>
+        <p:style>
+          <a:lnRef idx="1">
+            <a:schemeClr val="accent1"/>
+          </a:lnRef>
+          <a:fillRef idx="3">
+            <a:schemeClr val="accent1"/>
+          </a:fillRef>
+          <a:effectRef idx="2">
+            <a:schemeClr val="accent1"/>
+          </a:effectRef>
+          <a:fontRef idx="minor">
+            <a:schemeClr val="lt1"/>
+          </a:fontRef>
+        </p:style>
+        <p:txBody>
+          <a:bodyPr rtlCol="0" anchor="ctr"/>
+          <a:lstStyle/>
+          <a:p>
+            <a:pPr algn="ctr"/>
+          </a:p>
+        </p:txBody>
+      </p:sp>
+      <p:sp>
+        <p:nvSpPr>
+          <p:cNvPr id="23" name="TextBox 22"/>
+          <p:cNvSpPr txBox="1"/>
+          <p:nvPr/>
+        </p:nvSpPr>
+        <p:spPr>
+          <a:xfrm>
+            <a:off x="5586984" y="4599432"/>
+            <a:ext cx="1097280" cy="365760"/>
+          </a:xfrm>
+          <a:prstGeom prst="rect">
+            <a:avLst/>
+          </a:prstGeom>
+          <a:noFill/>
+        </p:spPr>
+        <p:txBody>
+          <a:bodyPr wrap="square">
+            <a:spAutoFit/>
+          </a:bodyPr>
+          <a:lstStyle/>
+          <a:p>
+            <a:pPr algn="ctr">
+              <a:lnSpc>
+                <a:spcPct val="125000"/>
+              </a:lnSpc>
+            </a:pPr>
+            <a:r>
+              <a:rPr sz="1200" b="0">
+                <a:solidFill>
+                  <a:srgbClr val="1B2233"/>
+                </a:solidFill>
+                <a:latin typeface="微软雅黑"/>
+                <a:ea typeface="微软雅黑"/>
+                <a:cs typeface="微软雅黑"/>
+              </a:rPr>
+              <a:t>健康顾问</a:t>
+            </a:r>
+          </a:p>
+        </p:txBody>
+      </p:sp>
+      <p:sp>
+        <p:nvSpPr>
+          <p:cNvPr id="24" name="Rounded Rectangle 23"/>
+          <p:cNvSpPr/>
+          <p:nvPr/>
+        </p:nvSpPr>
+        <p:spPr>
+          <a:xfrm>
+            <a:off x="6766560" y="4480560"/>
+            <a:ext cx="1097280" cy="566928"/>
+          </a:xfrm>
+          <a:prstGeom prst="roundRect">
+            <a:avLst/>
+          </a:prstGeom>
+          <a:solidFill>
+            <a:srgbClr val="F2F5FB"/>
+          </a:solidFill>
+          <a:ln>
+            <a:noFill/>
+          </a:ln>
+          <a:effectLst/>
+        </p:spPr>
+        <p:style>
+          <a:lnRef idx="1">
+            <a:schemeClr val="accent1"/>
+          </a:lnRef>
+          <a:fillRef idx="3">
+            <a:schemeClr val="accent1"/>
+          </a:fillRef>
+          <a:effectRef idx="2">
+            <a:schemeClr val="accent1"/>
+          </a:effectRef>
+          <a:fontRef idx="minor">
+            <a:schemeClr val="lt1"/>
+          </a:fontRef>
+        </p:style>
+        <p:txBody>
+          <a:bodyPr rtlCol="0" anchor="ctr"/>
+          <a:lstStyle/>
+          <a:p>
+            <a:pPr algn="ctr"/>
+          </a:p>
+        </p:txBody>
+      </p:sp>
+      <p:sp>
+        <p:nvSpPr>
+          <p:cNvPr id="25" name="TextBox 24"/>
+          <p:cNvSpPr txBox="1"/>
+          <p:nvPr/>
+        </p:nvSpPr>
+        <p:spPr>
+          <a:xfrm>
+            <a:off x="6766560" y="4599432"/>
+            <a:ext cx="1097280" cy="365760"/>
+          </a:xfrm>
+          <a:prstGeom prst="rect">
+            <a:avLst/>
+          </a:prstGeom>
+          <a:noFill/>
+        </p:spPr>
+        <p:txBody>
+          <a:bodyPr wrap="square">
+            <a:spAutoFit/>
+          </a:bodyPr>
+          <a:lstStyle/>
+          <a:p>
+            <a:pPr algn="ctr">
+              <a:lnSpc>
+                <a:spcPct val="125000"/>
+              </a:lnSpc>
+            </a:pPr>
+            <a:r>
+              <a:rPr sz="1200" b="0">
+                <a:solidFill>
+                  <a:srgbClr val="1B2233"/>
+                </a:solidFill>
+                <a:latin typeface="微软雅黑"/>
+                <a:ea typeface="微软雅黑"/>
+                <a:cs typeface="微软雅黑"/>
+              </a:rPr>
+              <a:t>天气守护</a:t>
+            </a:r>
+          </a:p>
+        </p:txBody>
+      </p:sp>
+      <p:sp>
+        <p:nvSpPr>
+          <p:cNvPr id="26" name="Rounded Rectangle 25"/>
+          <p:cNvSpPr/>
+          <p:nvPr/>
+        </p:nvSpPr>
+        <p:spPr>
+          <a:xfrm>
+            <a:off x="7946136" y="4480560"/>
+            <a:ext cx="1097280" cy="566928"/>
+          </a:xfrm>
+          <a:prstGeom prst="roundRect">
+            <a:avLst/>
+          </a:prstGeom>
+          <a:solidFill>
+            <a:srgbClr val="F2F5FB"/>
+          </a:solidFill>
+          <a:ln>
+            <a:noFill/>
+          </a:ln>
+          <a:effectLst/>
+        </p:spPr>
+        <p:style>
+          <a:lnRef idx="1">
+            <a:schemeClr val="accent1"/>
+          </a:lnRef>
+          <a:fillRef idx="3">
+            <a:schemeClr val="accent1"/>
+          </a:fillRef>
+          <a:effectRef idx="2">
+            <a:schemeClr val="accent1"/>
+          </a:effectRef>
+          <a:fontRef idx="minor">
+            <a:schemeClr val="lt1"/>
+          </a:fontRef>
+        </p:style>
+        <p:txBody>
+          <a:bodyPr rtlCol="0" anchor="ctr"/>
+          <a:lstStyle/>
+          <a:p>
+            <a:pPr algn="ctr"/>
+          </a:p>
+        </p:txBody>
+      </p:sp>
+      <p:sp>
+        <p:nvSpPr>
+          <p:cNvPr id="27" name="TextBox 26"/>
+          <p:cNvSpPr txBox="1"/>
+          <p:nvPr/>
+        </p:nvSpPr>
+        <p:spPr>
+          <a:xfrm>
+            <a:off x="7946136" y="4599432"/>
+            <a:ext cx="1097280" cy="365760"/>
+          </a:xfrm>
+          <a:prstGeom prst="rect">
+            <a:avLst/>
+          </a:prstGeom>
+          <a:noFill/>
+        </p:spPr>
+        <p:txBody>
+          <a:bodyPr wrap="square">
+            <a:spAutoFit/>
+          </a:bodyPr>
+          <a:lstStyle/>
+          <a:p>
+            <a:pPr algn="ctr">
+              <a:lnSpc>
+                <a:spcPct val="125000"/>
+              </a:lnSpc>
+            </a:pPr>
+            <a:r>
+              <a:rPr sz="1200" b="0">
+                <a:solidFill>
+                  <a:srgbClr val="1B2233"/>
+                </a:solidFill>
+                <a:latin typeface="微软雅黑"/>
+                <a:ea typeface="微软雅黑"/>
+                <a:cs typeface="微软雅黑"/>
+              </a:rPr>
+              <a:t>通知管理</a:t>
+            </a:r>
+          </a:p>
+        </p:txBody>
+      </p:sp>
+      <p:sp>
+        <p:nvSpPr>
+          <p:cNvPr id="28" name="Rounded Rectangle 27"/>
+          <p:cNvSpPr/>
+          <p:nvPr/>
+        </p:nvSpPr>
+        <p:spPr>
+          <a:xfrm>
+            <a:off x="9125712" y="4480560"/>
+            <a:ext cx="1097280" cy="566928"/>
+          </a:xfrm>
+          <a:prstGeom prst="roundRect">
+            <a:avLst/>
+          </a:prstGeom>
+          <a:solidFill>
+            <a:srgbClr val="F2F5FB"/>
+          </a:solidFill>
+          <a:ln>
+            <a:noFill/>
+          </a:ln>
+          <a:effectLst/>
+        </p:spPr>
+        <p:style>
+          <a:lnRef idx="1">
+            <a:schemeClr val="accent1"/>
+          </a:lnRef>
+          <a:fillRef idx="3">
+            <a:schemeClr val="accent1"/>
+          </a:fillRef>
+          <a:effectRef idx="2">
+            <a:schemeClr val="accent1"/>
+          </a:effectRef>
+          <a:fontRef idx="minor">
+            <a:schemeClr val="lt1"/>
+          </a:fontRef>
+        </p:style>
+        <p:txBody>
+          <a:bodyPr rtlCol="0" anchor="ctr"/>
+          <a:lstStyle/>
+          <a:p>
+            <a:pPr algn="ctr"/>
+          </a:p>
+        </p:txBody>
+      </p:sp>
+      <p:sp>
+        <p:nvSpPr>
+          <p:cNvPr id="29" name="TextBox 28"/>
+          <p:cNvSpPr txBox="1"/>
+          <p:nvPr/>
+        </p:nvSpPr>
+        <p:spPr>
+          <a:xfrm>
+            <a:off x="9125712" y="4599432"/>
+            <a:ext cx="1097280" cy="365760"/>
+          </a:xfrm>
+          <a:prstGeom prst="rect">
+            <a:avLst/>
+          </a:prstGeom>
+          <a:noFill/>
+        </p:spPr>
+        <p:txBody>
+          <a:bodyPr wrap="square">
+            <a:spAutoFit/>
+          </a:bodyPr>
+          <a:lstStyle/>
+          <a:p>
+            <a:pPr algn="ctr">
+              <a:lnSpc>
+                <a:spcPct val="125000"/>
+              </a:lnSpc>
+            </a:pPr>
+            <a:r>
+              <a:rPr sz="1200" b="0">
+                <a:solidFill>
+                  <a:srgbClr val="1B2233"/>
+                </a:solidFill>
+                <a:latin typeface="微软雅黑"/>
+                <a:ea typeface="微软雅黑"/>
+                <a:cs typeface="微软雅黑"/>
+              </a:rPr>
+              <a:t>网格助手</a:t>
+            </a:r>
+          </a:p>
+        </p:txBody>
+      </p:sp>
+      <p:sp>
+        <p:nvSpPr>
+          <p:cNvPr id="30" name="Rounded Rectangle 29"/>
+          <p:cNvSpPr/>
+          <p:nvPr/>
+        </p:nvSpPr>
+        <p:spPr>
+          <a:xfrm>
+            <a:off x="10305288" y="4480560"/>
+            <a:ext cx="1097280" cy="566928"/>
+          </a:xfrm>
+          <a:prstGeom prst="roundRect">
+            <a:avLst/>
+          </a:prstGeom>
+          <a:solidFill>
+            <a:srgbClr val="FF8C42"/>
+          </a:solidFill>
+          <a:ln>
+            <a:noFill/>
+          </a:ln>
+          <a:effectLst/>
+        </p:spPr>
+        <p:style>
+          <a:lnRef idx="1">
+            <a:schemeClr val="accent1"/>
+          </a:lnRef>
+          <a:fillRef idx="3">
+            <a:schemeClr val="accent1"/>
+          </a:fillRef>
+          <a:effectRef idx="2">
+            <a:schemeClr val="accent1"/>
+          </a:effectRef>
+          <a:fontRef idx="minor">
+            <a:schemeClr val="lt1"/>
+          </a:fontRef>
+        </p:style>
+        <p:txBody>
+          <a:bodyPr rtlCol="0" anchor="ctr"/>
+          <a:lstStyle/>
+          <a:p>
+            <a:pPr algn="ctr"/>
+          </a:p>
+        </p:txBody>
+      </p:sp>
+      <p:sp>
+        <p:nvSpPr>
+          <p:cNvPr id="31" name="TextBox 30"/>
+          <p:cNvSpPr txBox="1"/>
+          <p:nvPr/>
+        </p:nvSpPr>
+        <p:spPr>
+          <a:xfrm>
+            <a:off x="10305288" y="4599432"/>
+            <a:ext cx="1097280" cy="365760"/>
+          </a:xfrm>
+          <a:prstGeom prst="rect">
+            <a:avLst/>
+          </a:prstGeom>
+          <a:noFill/>
+        </p:spPr>
+        <p:txBody>
+          <a:bodyPr wrap="square">
+            <a:spAutoFit/>
+          </a:bodyPr>
+          <a:lstStyle/>
+          <a:p>
+            <a:pPr algn="ctr">
+              <a:lnSpc>
+                <a:spcPct val="125000"/>
+              </a:lnSpc>
+            </a:pPr>
+            <a:r>
+              <a:rPr sz="1200" b="0">
+                <a:solidFill>
+                  <a:srgbClr val="FFFFFF"/>
+                </a:solidFill>
+                <a:latin typeface="微软雅黑"/>
+                <a:ea typeface="微软雅黑"/>
+                <a:cs typeface="微软雅黑"/>
+              </a:rPr>
+              <a:t>合规审计</a:t>
+            </a:r>
+          </a:p>
+        </p:txBody>
+      </p:sp>
+      <p:sp>
+        <p:nvSpPr>
+          <p:cNvPr id="32" name="Rounded Rectangle 31"/>
+          <p:cNvSpPr/>
+          <p:nvPr/>
+        </p:nvSpPr>
+        <p:spPr>
+          <a:xfrm>
+            <a:off x="868680" y="5349240"/>
+            <a:ext cx="10424160" cy="914400"/>
+          </a:xfrm>
+          <a:prstGeom prst="roundRect">
+            <a:avLst/>
+          </a:prstGeom>
+          <a:solidFill>
+            <a:srgbClr val="E8EEF9"/>
+          </a:solidFill>
+          <a:ln>
+            <a:noFill/>
+          </a:ln>
+          <a:effectLst/>
+        </p:spPr>
+        <p:style>
+          <a:lnRef idx="1">
+            <a:schemeClr val="accent1"/>
+          </a:lnRef>
+          <a:fillRef idx="3">
+            <a:schemeClr val="accent1"/>
+          </a:fillRef>
+          <a:effectRef idx="2">
+            <a:schemeClr val="accent1"/>
+          </a:effectRef>
+          <a:fontRef idx="minor">
+            <a:schemeClr val="lt1"/>
+          </a:fontRef>
+        </p:style>
+        <p:txBody>
+          <a:bodyPr rtlCol="0" anchor="ctr"/>
+          <a:lstStyle/>
+          <a:p>
+            <a:pPr algn="ctr"/>
+          </a:p>
+        </p:txBody>
+      </p:sp>
+      <p:sp>
+        <p:nvSpPr>
+          <p:cNvPr id="33" name="TextBox 32"/>
+          <p:cNvSpPr txBox="1"/>
+          <p:nvPr/>
+        </p:nvSpPr>
+        <p:spPr>
+          <a:xfrm>
+            <a:off x="1097280" y="5504688"/>
+            <a:ext cx="10058400" cy="640080"/>
+          </a:xfrm>
+          <a:prstGeom prst="rect">
+            <a:avLst/>
+          </a:prstGeom>
+          <a:noFill/>
+        </p:spPr>
+        <p:txBody>
+          <a:bodyPr wrap="square">
+            <a:spAutoFit/>
+          </a:bodyPr>
+          <a:lstStyle/>
+          <a:p>
+            <a:pPr algn="ctr">
+              <a:lnSpc>
+                <a:spcPct val="125000"/>
+              </a:lnSpc>
+            </a:pPr>
+            <a:r>
+              <a:rPr sz="1800" b="0">
+                <a:solidFill>
+                  <a:srgbClr val="1B2233"/>
+                </a:solidFill>
+                <a:latin typeface="微软雅黑"/>
+                <a:ea typeface="微软雅黑"/>
+                <a:cs typeface="微软雅黑"/>
+              </a:rPr>
+              <a:t>本地数据库 SQLite：约 50 张表 · 手机号 AES-256-GCM 加密 · 全流程留痕</a:t>
+            </a:r>
+          </a:p>
+        </p:txBody>
+      </p:sp>
+      <p:sp>
+        <p:nvSpPr>
+          <p:cNvPr id="34" name="Rectangle 33"/>
           <p:cNvSpPr/>
           <p:nvPr/>
         </p:nvSpPr>
@@ -11286,7 +10972,7 @@
       </p:sp>
       <p:sp>
         <p:nvSpPr>
-          <p:cNvPr id="10" name="TextBox 9"/>
+          <p:cNvPr id="35" name="TextBox 34"/>
           <p:cNvSpPr txBox="1"/>
           <p:nvPr/>
         </p:nvSpPr>
@@ -11327,14 +11013,14 @@
       </p:sp>
       <p:sp>
         <p:nvSpPr>
-          <p:cNvPr id="11" name="TextBox 10"/>
+          <p:cNvPr id="36" name="TextBox 35"/>
           <p:cNvSpPr txBox="1"/>
           <p:nvPr/>
         </p:nvSpPr>
         <p:spPr>
           <a:xfrm>
-            <a:off x="10607040" y="6565392"/>
-            <a:ext cx="822960" cy="274320"/>
+            <a:off x="10058400" y="6565392"/>
+            <a:ext cx="1371600" cy="274320"/>
           </a:xfrm>
           <a:prstGeom prst="rect">
             <a:avLst/>
@@ -11361,7 +11047,7 @@
                 <a:ea typeface="微软雅黑"/>
                 <a:cs typeface="微软雅黑"/>
               </a:rPr>
-              <a:t>4 / 8</a:t>
+              <a:t>4 / 11</a:t>
             </a:r>
           </a:p>
         </p:txBody>
@@ -11464,7 +11150,7 @@
                 <a:ea typeface="微软雅黑"/>
                 <a:cs typeface="微软雅黑"/>
               </a:rPr>
-              <a:t>老人端是重做的，不是放大的</a:t>
+              <a:t>它们真的在传消息</a:t>
             </a:r>
           </a:p>
         </p:txBody>
@@ -11477,8 +11163,8 @@
         </p:nvSpPr>
         <p:spPr>
           <a:xfrm>
-            <a:off x="868680" y="1645920"/>
-            <a:ext cx="5120640" cy="2926080"/>
+            <a:off x="868680" y="1600200"/>
+            <a:ext cx="5852160" cy="2377440"/>
           </a:xfrm>
           <a:prstGeom prst="rect">
             <a:avLst/>
@@ -11493,11 +11179,11 @@
           <a:p>
             <a:pPr algn="l">
               <a:lnSpc>
-                <a:spcPct val="150000"/>
-              </a:lnSpc>
-            </a:pPr>
-            <a:r>
-              <a:rPr sz="2600" b="0">
+                <a:spcPct val="145000"/>
+              </a:lnSpc>
+            </a:pPr>
+            <a:r>
+              <a:rPr sz="2200" b="0">
                 <a:solidFill>
                   <a:srgbClr val="1B2233"/>
                 </a:solidFill>
@@ -11505,17 +11191,17 @@
                 <a:ea typeface="微软雅黑"/>
                 <a:cs typeface="微软雅黑"/>
               </a:rPr>
-              <a:t>大字大按钮，免登录就能进</a:t>
+              <a:t>黑板：带锁 · 带版本 · 带历史</a:t>
             </a:r>
           </a:p>
           <a:p>
             <a:pPr algn="l">
               <a:lnSpc>
-                <a:spcPct val="150000"/>
-              </a:lnSpc>
-            </a:pPr>
-            <a:r>
-              <a:rPr sz="2600" b="0">
+                <a:spcPct val="145000"/>
+              </a:lnSpc>
+            </a:pPr>
+            <a:r>
+              <a:rPr sz="2200" b="0">
                 <a:solidFill>
                   <a:srgbClr val="1B2233"/>
                 </a:solidFill>
@@ -11523,17 +11209,17 @@
                 <a:ea typeface="微软雅黑"/>
                 <a:cs typeface="微软雅黑"/>
               </a:rPr>
-              <a:t>语音报修；用药提醒点一下「我已吃」</a:t>
+              <a:t>5 种消息：请求 / 响应 / 通知 /</a:t>
             </a:r>
           </a:p>
           <a:p>
             <a:pPr algn="l">
               <a:lnSpc>
-                <a:spcPct val="150000"/>
-              </a:lnSpc>
-            </a:pPr>
-            <a:r>
-              <a:rPr sz="2600" b="0">
+                <a:spcPct val="145000"/>
+              </a:lnSpc>
+            </a:pPr>
+            <a:r>
+              <a:rPr sz="2200" b="0">
                 <a:solidFill>
                   <a:srgbClr val="1B2233"/>
                 </a:solidFill>
@@ -11541,21 +11227,83 @@
                 <a:ea typeface="微软雅黑"/>
                 <a:cs typeface="微软雅黑"/>
               </a:rPr>
-              <a:t>长按 3 秒才求助，还要再确认一次</a:t>
-            </a:r>
-          </a:p>
-        </p:txBody>
-      </p:sp>
-      <p:sp>
-        <p:nvSpPr>
-          <p:cNvPr id="5" name="TextBox 4"/>
+              <a:t>错误 / 转交</a:t>
+            </a:r>
+          </a:p>
+          <a:p>
+            <a:pPr algn="l">
+              <a:lnSpc>
+                <a:spcPct val="145000"/>
+              </a:lnSpc>
+            </a:pPr>
+            <a:r>
+              <a:rPr sz="2200" b="0">
+                <a:solidFill>
+                  <a:srgbClr val="1B2233"/>
+                </a:solidFill>
+                <a:latin typeface="微软雅黑"/>
+                <a:ea typeface="微软雅黑"/>
+                <a:cs typeface="微软雅黑"/>
+              </a:rPr>
+              <a:t>校验 + 仲裁，合规审计一票否决</a:t>
+            </a:r>
+          </a:p>
+        </p:txBody>
+      </p:sp>
+      <p:sp>
+        <p:nvSpPr>
+          <p:cNvPr id="5" name="Rounded Rectangle 4"/>
+          <p:cNvSpPr/>
+          <p:nvPr/>
+        </p:nvSpPr>
+        <p:spPr>
+          <a:xfrm>
+            <a:off x="868680" y="3977639"/>
+            <a:ext cx="5852160" cy="1737360"/>
+          </a:xfrm>
+          <a:prstGeom prst="roundRect">
+            <a:avLst/>
+          </a:prstGeom>
+          <a:solidFill>
+            <a:srgbClr val="F2F5FB"/>
+          </a:solidFill>
+          <a:ln>
+            <a:noFill/>
+          </a:ln>
+          <a:effectLst/>
+        </p:spPr>
+        <p:style>
+          <a:lnRef idx="1">
+            <a:schemeClr val="accent1"/>
+          </a:lnRef>
+          <a:fillRef idx="3">
+            <a:schemeClr val="accent1"/>
+          </a:fillRef>
+          <a:effectRef idx="2">
+            <a:schemeClr val="accent1"/>
+          </a:effectRef>
+          <a:fontRef idx="minor">
+            <a:schemeClr val="lt1"/>
+          </a:fontRef>
+        </p:style>
+        <p:txBody>
+          <a:bodyPr rtlCol="0" anchor="ctr"/>
+          <a:lstStyle/>
+          <a:p>
+            <a:pPr algn="ctr"/>
+          </a:p>
+        </p:txBody>
+      </p:sp>
+      <p:sp>
+        <p:nvSpPr>
+          <p:cNvPr id="6" name="TextBox 5"/>
           <p:cNvSpPr txBox="1"/>
           <p:nvPr/>
         </p:nvSpPr>
         <p:spPr>
           <a:xfrm>
-            <a:off x="868680" y="4754880"/>
-            <a:ext cx="5120640" cy="1097280"/>
+            <a:off x="1097280" y="4160520"/>
+            <a:ext cx="5486400" cy="1463040"/>
           </a:xfrm>
           <a:prstGeom prst="rect">
             <a:avLst/>
@@ -11570,26 +11318,62 @@
           <a:p>
             <a:pPr algn="l">
               <a:lnSpc>
-                <a:spcPct val="125000"/>
-              </a:lnSpc>
-            </a:pPr>
-            <a:r>
-              <a:rPr sz="2200" b="1">
-                <a:solidFill>
-                  <a:srgbClr val="FF8C42"/>
-                </a:solidFill>
-                <a:latin typeface="微软雅黑"/>
-                <a:ea typeface="微软雅黑"/>
-                <a:cs typeface="微软雅黑"/>
-              </a:rPr>
-              <a:t>我怕老人放兜里，误触。</a:t>
+                <a:spcPct val="135000"/>
+              </a:lnSpc>
+            </a:pPr>
+            <a:r>
+              <a:rPr sz="2000" b="0">
+                <a:solidFill>
+                  <a:srgbClr val="1B2233"/>
+                </a:solidFill>
+                <a:latin typeface="微软雅黑"/>
+                <a:ea typeface="微软雅黑"/>
+                <a:cs typeface="微软雅黑"/>
+              </a:rPr>
+              <a:t>规则为主，大模型为辅：</a:t>
+            </a:r>
+          </a:p>
+          <a:p>
+            <a:pPr algn="l">
+              <a:lnSpc>
+                <a:spcPct val="135000"/>
+              </a:lnSpc>
+            </a:pPr>
+            <a:r>
+              <a:rPr sz="2000" b="0">
+                <a:solidFill>
+                  <a:srgbClr val="1B2233"/>
+                </a:solidFill>
+                <a:latin typeface="微软雅黑"/>
+                <a:ea typeface="微软雅黑"/>
+                <a:cs typeface="微软雅黑"/>
+              </a:rPr>
+              <a:t>意图/追问/政策生成 → 大模型</a:t>
+            </a:r>
+          </a:p>
+          <a:p>
+            <a:pPr algn="l">
+              <a:lnSpc>
+                <a:spcPct val="135000"/>
+              </a:lnSpc>
+            </a:pPr>
+            <a:r>
+              <a:rPr sz="2000" b="0">
+                <a:solidFill>
+                  <a:srgbClr val="1B2233"/>
+                </a:solidFill>
+                <a:latin typeface="微软雅黑"/>
+                <a:ea typeface="微软雅黑"/>
+                <a:cs typeface="微软雅黑"/>
+              </a:rPr>
+              <a:t>状态机/派单/权限/加密 → 规则</a:t>
             </a:r>
           </a:p>
         </p:txBody>
       </p:sp>
       <p:pic>
         <p:nvPicPr>
-          <p:cNvPr id="6" name="Picture 5" descr="07-老年端大字首页.png"/>
+          <p:cNvPr id="7" name="Picture 6" descr="04-多智能体执行链.png"/>
           <p:cNvPicPr>
             <a:picLocks noChangeAspect="1"/>
           </p:cNvPicPr>
@@ -11603,41 +11387,58 @@
         </p:blipFill>
         <p:spPr>
           <a:xfrm>
-            <a:off x="6492240" y="1554480"/>
-            <a:ext cx="1943642" cy="4206240"/>
+            <a:off x="7040880" y="1554480"/>
+            <a:ext cx="4480560" cy="2800350"/>
           </a:xfrm>
           <a:prstGeom prst="rect">
             <a:avLst/>
           </a:prstGeom>
         </p:spPr>
       </p:pic>
-      <p:pic>
-        <p:nvPicPr>
-          <p:cNvPr id="7" name="Picture 6" descr="08-老年端长按求助确认框.png"/>
-          <p:cNvPicPr>
-            <a:picLocks noChangeAspect="1"/>
-          </p:cNvPicPr>
-          <p:nvPr/>
-        </p:nvPicPr>
-        <p:blipFill>
-          <a:blip r:embed="rId3"/>
-          <a:stretch>
-            <a:fillRect/>
-          </a:stretch>
-        </p:blipFill>
-        <p:spPr>
-          <a:xfrm>
-            <a:off x="9052560" y="1554480"/>
-            <a:ext cx="1943642" cy="4206240"/>
-          </a:xfrm>
-          <a:prstGeom prst="rect">
-            <a:avLst/>
-          </a:prstGeom>
-        </p:spPr>
-      </p:pic>
-      <p:sp>
-        <p:nvSpPr>
-          <p:cNvPr id="8" name="Rectangle 7"/>
+      <p:sp>
+        <p:nvSpPr>
+          <p:cNvPr id="8" name="TextBox 7"/>
+          <p:cNvSpPr txBox="1"/>
+          <p:nvPr/>
+        </p:nvSpPr>
+        <p:spPr>
+          <a:xfrm>
+            <a:off x="7040880" y="5623560"/>
+            <a:ext cx="4572000" cy="457200"/>
+          </a:xfrm>
+          <a:prstGeom prst="rect">
+            <a:avLst/>
+          </a:prstGeom>
+          <a:noFill/>
+        </p:spPr>
+        <p:txBody>
+          <a:bodyPr wrap="square">
+            <a:spAutoFit/>
+          </a:bodyPr>
+          <a:lstStyle/>
+          <a:p>
+            <a:pPr algn="l">
+              <a:lnSpc>
+                <a:spcPct val="125000"/>
+              </a:lnSpc>
+            </a:pPr>
+            <a:r>
+              <a:rPr sz="1400" b="0">
+                <a:solidFill>
+                  <a:srgbClr val="6B7485"/>
+                </a:solidFill>
+                <a:latin typeface="微软雅黑"/>
+                <a:ea typeface="微软雅黑"/>
+                <a:cs typeface="微软雅黑"/>
+              </a:rPr>
+              <a:t>↑ 一次提问后，角色之间的执行链</a:t>
+            </a:r>
+          </a:p>
+        </p:txBody>
+      </p:sp>
+      <p:sp>
+        <p:nvSpPr>
+          <p:cNvPr id="9" name="Rectangle 8"/>
           <p:cNvSpPr/>
           <p:nvPr/>
         </p:nvSpPr>
@@ -11681,7 +11482,7 @@
       </p:sp>
       <p:sp>
         <p:nvSpPr>
-          <p:cNvPr id="9" name="TextBox 8"/>
+          <p:cNvPr id="10" name="TextBox 9"/>
           <p:cNvSpPr txBox="1"/>
           <p:nvPr/>
         </p:nvSpPr>
@@ -11722,14 +11523,14 @@
       </p:sp>
       <p:sp>
         <p:nvSpPr>
-          <p:cNvPr id="10" name="TextBox 9"/>
+          <p:cNvPr id="11" name="TextBox 10"/>
           <p:cNvSpPr txBox="1"/>
           <p:nvPr/>
         </p:nvSpPr>
         <p:spPr>
           <a:xfrm>
-            <a:off x="10607040" y="6565392"/>
-            <a:ext cx="822960" cy="274320"/>
+            <a:off x="10058400" y="6565392"/>
+            <a:ext cx="1371600" cy="274320"/>
           </a:xfrm>
           <a:prstGeom prst="rect">
             <a:avLst/>
@@ -11756,7 +11557,7 @@
                 <a:ea typeface="微软雅黑"/>
                 <a:cs typeface="微软雅黑"/>
               </a:rPr>
-              <a:t>5 / 8</a:t>
+              <a:t>5 / 11</a:t>
             </a:r>
           </a:p>
         </p:txBody>
@@ -11859,14 +11660,132 @@
                 <a:ea typeface="微软雅黑"/>
                 <a:cs typeface="微软雅黑"/>
               </a:rPr>
-              <a:t>五步走完一套流程</a:t>
+              <a:t>老人端是重做的，不是放大的</a:t>
+            </a:r>
+          </a:p>
+        </p:txBody>
+      </p:sp>
+      <p:sp>
+        <p:nvSpPr>
+          <p:cNvPr id="4" name="TextBox 3"/>
+          <p:cNvSpPr txBox="1"/>
+          <p:nvPr/>
+        </p:nvSpPr>
+        <p:spPr>
+          <a:xfrm>
+            <a:off x="868680" y="1645920"/>
+            <a:ext cx="5120640" cy="2926080"/>
+          </a:xfrm>
+          <a:prstGeom prst="rect">
+            <a:avLst/>
+          </a:prstGeom>
+          <a:noFill/>
+        </p:spPr>
+        <p:txBody>
+          <a:bodyPr wrap="square">
+            <a:spAutoFit/>
+          </a:bodyPr>
+          <a:lstStyle/>
+          <a:p>
+            <a:pPr algn="l">
+              <a:lnSpc>
+                <a:spcPct val="150000"/>
+              </a:lnSpc>
+            </a:pPr>
+            <a:r>
+              <a:rPr sz="2600" b="0">
+                <a:solidFill>
+                  <a:srgbClr val="1B2233"/>
+                </a:solidFill>
+                <a:latin typeface="微软雅黑"/>
+                <a:ea typeface="微软雅黑"/>
+                <a:cs typeface="微软雅黑"/>
+              </a:rPr>
+              <a:t>大字大按钮，免登录就能进</a:t>
+            </a:r>
+          </a:p>
+          <a:p>
+            <a:pPr algn="l">
+              <a:lnSpc>
+                <a:spcPct val="150000"/>
+              </a:lnSpc>
+            </a:pPr>
+            <a:r>
+              <a:rPr sz="2600" b="0">
+                <a:solidFill>
+                  <a:srgbClr val="1B2233"/>
+                </a:solidFill>
+                <a:latin typeface="微软雅黑"/>
+                <a:ea typeface="微软雅黑"/>
+                <a:cs typeface="微软雅黑"/>
+              </a:rPr>
+              <a:t>语音报修；用药提醒点一下「我已吃」</a:t>
+            </a:r>
+          </a:p>
+          <a:p>
+            <a:pPr algn="l">
+              <a:lnSpc>
+                <a:spcPct val="150000"/>
+              </a:lnSpc>
+            </a:pPr>
+            <a:r>
+              <a:rPr sz="2600" b="0">
+                <a:solidFill>
+                  <a:srgbClr val="1B2233"/>
+                </a:solidFill>
+                <a:latin typeface="微软雅黑"/>
+                <a:ea typeface="微软雅黑"/>
+                <a:cs typeface="微软雅黑"/>
+              </a:rPr>
+              <a:t>长按 3 秒才求助，还要再确认一次</a:t>
+            </a:r>
+          </a:p>
+        </p:txBody>
+      </p:sp>
+      <p:sp>
+        <p:nvSpPr>
+          <p:cNvPr id="5" name="TextBox 4"/>
+          <p:cNvSpPr txBox="1"/>
+          <p:nvPr/>
+        </p:nvSpPr>
+        <p:spPr>
+          <a:xfrm>
+            <a:off x="868680" y="4754880"/>
+            <a:ext cx="5120640" cy="1097280"/>
+          </a:xfrm>
+          <a:prstGeom prst="rect">
+            <a:avLst/>
+          </a:prstGeom>
+          <a:noFill/>
+        </p:spPr>
+        <p:txBody>
+          <a:bodyPr wrap="square">
+            <a:spAutoFit/>
+          </a:bodyPr>
+          <a:lstStyle/>
+          <a:p>
+            <a:pPr algn="l">
+              <a:lnSpc>
+                <a:spcPct val="125000"/>
+              </a:lnSpc>
+            </a:pPr>
+            <a:r>
+              <a:rPr sz="2200" b="1">
+                <a:solidFill>
+                  <a:srgbClr val="FF8C42"/>
+                </a:solidFill>
+                <a:latin typeface="微软雅黑"/>
+                <a:ea typeface="微软雅黑"/>
+                <a:cs typeface="微软雅黑"/>
+              </a:rPr>
+              <a:t>我怕老人放兜里，误触。</a:t>
             </a:r>
           </a:p>
         </p:txBody>
       </p:sp>
       <p:pic>
         <p:nvPicPr>
-          <p:cNvPr id="4" name="Picture 3" descr="10-提交报修表单.png"/>
+          <p:cNvPr id="6" name="Picture 5" descr="07-老年端大字首页.png"/>
           <p:cNvPicPr>
             <a:picLocks noChangeAspect="1"/>
           </p:cNvPicPr>
@@ -11880,143 +11799,17 @@
         </p:blipFill>
         <p:spPr>
           <a:xfrm>
-            <a:off x="658368" y="2017395"/>
-            <a:ext cx="2103120" cy="1314450"/>
+            <a:off x="6492240" y="1554480"/>
+            <a:ext cx="1943642" cy="4206240"/>
           </a:xfrm>
           <a:prstGeom prst="rect">
             <a:avLst/>
           </a:prstGeom>
         </p:spPr>
       </p:pic>
-      <p:sp>
-        <p:nvSpPr>
-          <p:cNvPr id="5" name="Rounded Rectangle 4"/>
-          <p:cNvSpPr/>
-          <p:nvPr/>
-        </p:nvSpPr>
-        <p:spPr>
-          <a:xfrm>
-            <a:off x="658368" y="3977639"/>
-            <a:ext cx="2103120" cy="1325880"/>
-          </a:xfrm>
-          <a:prstGeom prst="roundRect">
-            <a:avLst/>
-          </a:prstGeom>
-          <a:solidFill>
-            <a:srgbClr val="F2F5FB"/>
-          </a:solidFill>
-          <a:ln>
-            <a:noFill/>
-          </a:ln>
-          <a:effectLst/>
-        </p:spPr>
-        <p:style>
-          <a:lnRef idx="1">
-            <a:schemeClr val="accent1"/>
-          </a:lnRef>
-          <a:fillRef idx="3">
-            <a:schemeClr val="accent1"/>
-          </a:fillRef>
-          <a:effectRef idx="2">
-            <a:schemeClr val="accent1"/>
-          </a:effectRef>
-          <a:fontRef idx="minor">
-            <a:schemeClr val="lt1"/>
-          </a:fontRef>
-        </p:style>
-        <p:txBody>
-          <a:bodyPr rtlCol="0" anchor="ctr"/>
-          <a:lstStyle/>
-          <a:p>
-            <a:pPr algn="ctr"/>
-          </a:p>
-        </p:txBody>
-      </p:sp>
-      <p:sp>
-        <p:nvSpPr>
-          <p:cNvPr id="6" name="TextBox 5"/>
-          <p:cNvSpPr txBox="1"/>
-          <p:nvPr/>
-        </p:nvSpPr>
-        <p:spPr>
-          <a:xfrm>
-            <a:off x="658368" y="4078224"/>
-            <a:ext cx="2103120" cy="457200"/>
-          </a:xfrm>
-          <a:prstGeom prst="rect">
-            <a:avLst/>
-          </a:prstGeom>
-          <a:noFill/>
-        </p:spPr>
-        <p:txBody>
-          <a:bodyPr wrap="square">
-            <a:spAutoFit/>
-          </a:bodyPr>
-          <a:lstStyle/>
-          <a:p>
-            <a:pPr algn="ctr">
-              <a:lnSpc>
-                <a:spcPct val="125000"/>
-              </a:lnSpc>
-            </a:pPr>
-            <a:r>
-              <a:rPr sz="2000" b="1">
-                <a:solidFill>
-                  <a:srgbClr val="122A51"/>
-                </a:solidFill>
-                <a:latin typeface="微软雅黑"/>
-                <a:ea typeface="微软雅黑"/>
-                <a:cs typeface="微软雅黑"/>
-              </a:rPr>
-              <a:t>① 报修</a:t>
-            </a:r>
-          </a:p>
-        </p:txBody>
-      </p:sp>
-      <p:sp>
-        <p:nvSpPr>
-          <p:cNvPr id="7" name="TextBox 6"/>
-          <p:cNvSpPr txBox="1"/>
-          <p:nvPr/>
-        </p:nvSpPr>
-        <p:spPr>
-          <a:xfrm>
-            <a:off x="658368" y="4590288"/>
-            <a:ext cx="2103120" cy="640080"/>
-          </a:xfrm>
-          <a:prstGeom prst="rect">
-            <a:avLst/>
-          </a:prstGeom>
-          <a:noFill/>
-        </p:spPr>
-        <p:txBody>
-          <a:bodyPr wrap="square">
-            <a:spAutoFit/>
-          </a:bodyPr>
-          <a:lstStyle/>
-          <a:p>
-            <a:pPr algn="ctr">
-              <a:lnSpc>
-                <a:spcPct val="125000"/>
-              </a:lnSpc>
-            </a:pPr>
-            <a:r>
-              <a:rPr sz="1400" b="0">
-                <a:solidFill>
-                  <a:srgbClr val="6B7485"/>
-                </a:solidFill>
-                <a:latin typeface="微软雅黑"/>
-                <a:ea typeface="微软雅黑"/>
-                <a:cs typeface="微软雅黑"/>
-              </a:rPr>
-              <a:t>一句话提交</a:t>
-            </a:r>
-          </a:p>
-        </p:txBody>
-      </p:sp>
       <p:pic>
         <p:nvPicPr>
-          <p:cNvPr id="8" name="Picture 7" descr="03-政策问答带依据与属地.png"/>
+          <p:cNvPr id="7" name="Picture 6" descr="08-老年端长按求助确认框.png"/>
           <p:cNvPicPr>
             <a:picLocks noChangeAspect="1"/>
           </p:cNvPicPr>
@@ -12030,8 +11823,8 @@
         </p:blipFill>
         <p:spPr>
           <a:xfrm>
-            <a:off x="2907791" y="2017395"/>
-            <a:ext cx="2103120" cy="1314450"/>
+            <a:off x="9052560" y="1554480"/>
+            <a:ext cx="1943642" cy="4206240"/>
           </a:xfrm>
           <a:prstGeom prst="rect">
             <a:avLst/>
@@ -12040,583 +11833,7 @@
       </p:pic>
       <p:sp>
         <p:nvSpPr>
-          <p:cNvPr id="9" name="Rounded Rectangle 8"/>
-          <p:cNvSpPr/>
-          <p:nvPr/>
-        </p:nvSpPr>
-        <p:spPr>
-          <a:xfrm>
-            <a:off x="2907791" y="3977639"/>
-            <a:ext cx="2103120" cy="1325880"/>
-          </a:xfrm>
-          <a:prstGeom prst="roundRect">
-            <a:avLst/>
-          </a:prstGeom>
-          <a:solidFill>
-            <a:srgbClr val="F2F5FB"/>
-          </a:solidFill>
-          <a:ln>
-            <a:noFill/>
-          </a:ln>
-          <a:effectLst/>
-        </p:spPr>
-        <p:style>
-          <a:lnRef idx="1">
-            <a:schemeClr val="accent1"/>
-          </a:lnRef>
-          <a:fillRef idx="3">
-            <a:schemeClr val="accent1"/>
-          </a:fillRef>
-          <a:effectRef idx="2">
-            <a:schemeClr val="accent1"/>
-          </a:effectRef>
-          <a:fontRef idx="minor">
-            <a:schemeClr val="lt1"/>
-          </a:fontRef>
-        </p:style>
-        <p:txBody>
-          <a:bodyPr rtlCol="0" anchor="ctr"/>
-          <a:lstStyle/>
-          <a:p>
-            <a:pPr algn="ctr"/>
-          </a:p>
-        </p:txBody>
-      </p:sp>
-      <p:sp>
-        <p:nvSpPr>
-          <p:cNvPr id="10" name="TextBox 9"/>
-          <p:cNvSpPr txBox="1"/>
-          <p:nvPr/>
-        </p:nvSpPr>
-        <p:spPr>
-          <a:xfrm>
-            <a:off x="2907791" y="4078224"/>
-            <a:ext cx="2103120" cy="457200"/>
-          </a:xfrm>
-          <a:prstGeom prst="rect">
-            <a:avLst/>
-          </a:prstGeom>
-          <a:noFill/>
-        </p:spPr>
-        <p:txBody>
-          <a:bodyPr wrap="square">
-            <a:spAutoFit/>
-          </a:bodyPr>
-          <a:lstStyle/>
-          <a:p>
-            <a:pPr algn="ctr">
-              <a:lnSpc>
-                <a:spcPct val="125000"/>
-              </a:lnSpc>
-            </a:pPr>
-            <a:r>
-              <a:rPr sz="2000" b="1">
-                <a:solidFill>
-                  <a:srgbClr val="122A51"/>
-                </a:solidFill>
-                <a:latin typeface="微软雅黑"/>
-                <a:ea typeface="微软雅黑"/>
-                <a:cs typeface="微软雅黑"/>
-              </a:rPr>
-              <a:t>② 政策问答</a:t>
-            </a:r>
-          </a:p>
-        </p:txBody>
-      </p:sp>
-      <p:sp>
-        <p:nvSpPr>
-          <p:cNvPr id="11" name="TextBox 10"/>
-          <p:cNvSpPr txBox="1"/>
-          <p:nvPr/>
-        </p:nvSpPr>
-        <p:spPr>
-          <a:xfrm>
-            <a:off x="2907791" y="4590288"/>
-            <a:ext cx="2103120" cy="640080"/>
-          </a:xfrm>
-          <a:prstGeom prst="rect">
-            <a:avLst/>
-          </a:prstGeom>
-          <a:noFill/>
-        </p:spPr>
-        <p:txBody>
-          <a:bodyPr wrap="square">
-            <a:spAutoFit/>
-          </a:bodyPr>
-          <a:lstStyle/>
-          <a:p>
-            <a:pPr algn="ctr">
-              <a:lnSpc>
-                <a:spcPct val="125000"/>
-              </a:lnSpc>
-            </a:pPr>
-            <a:r>
-              <a:rPr sz="1400" b="0">
-                <a:solidFill>
-                  <a:srgbClr val="6B7485"/>
-                </a:solidFill>
-                <a:latin typeface="微软雅黑"/>
-                <a:ea typeface="微软雅黑"/>
-                <a:cs typeface="微软雅黑"/>
-              </a:rPr>
-              <a:t>带依据与属地</a:t>
-            </a:r>
-          </a:p>
-        </p:txBody>
-      </p:sp>
-      <p:pic>
-        <p:nvPicPr>
-          <p:cNvPr id="12" name="Picture 11" descr="04-多智能体执行链.png"/>
-          <p:cNvPicPr>
-            <a:picLocks noChangeAspect="1"/>
-          </p:cNvPicPr>
-          <p:nvPr/>
-        </p:nvPicPr>
-        <p:blipFill>
-          <a:blip r:embed="rId4"/>
-          <a:stretch>
-            <a:fillRect/>
-          </a:stretch>
-        </p:blipFill>
-        <p:spPr>
-          <a:xfrm>
-            <a:off x="5157216" y="2017395"/>
-            <a:ext cx="2103120" cy="1314450"/>
-          </a:xfrm>
-          <a:prstGeom prst="rect">
-            <a:avLst/>
-          </a:prstGeom>
-        </p:spPr>
-      </p:pic>
-      <p:sp>
-        <p:nvSpPr>
-          <p:cNvPr id="13" name="Rounded Rectangle 12"/>
-          <p:cNvSpPr/>
-          <p:nvPr/>
-        </p:nvSpPr>
-        <p:spPr>
-          <a:xfrm>
-            <a:off x="5157216" y="3977639"/>
-            <a:ext cx="2103120" cy="1325880"/>
-          </a:xfrm>
-          <a:prstGeom prst="roundRect">
-            <a:avLst/>
-          </a:prstGeom>
-          <a:solidFill>
-            <a:srgbClr val="F2F5FB"/>
-          </a:solidFill>
-          <a:ln>
-            <a:noFill/>
-          </a:ln>
-          <a:effectLst/>
-        </p:spPr>
-        <p:style>
-          <a:lnRef idx="1">
-            <a:schemeClr val="accent1"/>
-          </a:lnRef>
-          <a:fillRef idx="3">
-            <a:schemeClr val="accent1"/>
-          </a:fillRef>
-          <a:effectRef idx="2">
-            <a:schemeClr val="accent1"/>
-          </a:effectRef>
-          <a:fontRef idx="minor">
-            <a:schemeClr val="lt1"/>
-          </a:fontRef>
-        </p:style>
-        <p:txBody>
-          <a:bodyPr rtlCol="0" anchor="ctr"/>
-          <a:lstStyle/>
-          <a:p>
-            <a:pPr algn="ctr"/>
-          </a:p>
-        </p:txBody>
-      </p:sp>
-      <p:sp>
-        <p:nvSpPr>
-          <p:cNvPr id="14" name="TextBox 13"/>
-          <p:cNvSpPr txBox="1"/>
-          <p:nvPr/>
-        </p:nvSpPr>
-        <p:spPr>
-          <a:xfrm>
-            <a:off x="5157216" y="4078224"/>
-            <a:ext cx="2103120" cy="457200"/>
-          </a:xfrm>
-          <a:prstGeom prst="rect">
-            <a:avLst/>
-          </a:prstGeom>
-          <a:noFill/>
-        </p:spPr>
-        <p:txBody>
-          <a:bodyPr wrap="square">
-            <a:spAutoFit/>
-          </a:bodyPr>
-          <a:lstStyle/>
-          <a:p>
-            <a:pPr algn="ctr">
-              <a:lnSpc>
-                <a:spcPct val="125000"/>
-              </a:lnSpc>
-            </a:pPr>
-            <a:r>
-              <a:rPr sz="2000" b="1">
-                <a:solidFill>
-                  <a:srgbClr val="122A51"/>
-                </a:solidFill>
-                <a:latin typeface="微软雅黑"/>
-                <a:ea typeface="微软雅黑"/>
-                <a:cs typeface="微软雅黑"/>
-              </a:rPr>
-              <a:t>③ 天气联动</a:t>
-            </a:r>
-          </a:p>
-        </p:txBody>
-      </p:sp>
-      <p:sp>
-        <p:nvSpPr>
-          <p:cNvPr id="15" name="TextBox 14"/>
-          <p:cNvSpPr txBox="1"/>
-          <p:nvPr/>
-        </p:nvSpPr>
-        <p:spPr>
-          <a:xfrm>
-            <a:off x="5157216" y="4590288"/>
-            <a:ext cx="2103120" cy="640080"/>
-          </a:xfrm>
-          <a:prstGeom prst="rect">
-            <a:avLst/>
-          </a:prstGeom>
-          <a:noFill/>
-        </p:spPr>
-        <p:txBody>
-          <a:bodyPr wrap="square">
-            <a:spAutoFit/>
-          </a:bodyPr>
-          <a:lstStyle/>
-          <a:p>
-            <a:pPr algn="ctr">
-              <a:lnSpc>
-                <a:spcPct val="125000"/>
-              </a:lnSpc>
-            </a:pPr>
-            <a:r>
-              <a:rPr sz="1400" b="0">
-                <a:solidFill>
-                  <a:srgbClr val="6B7485"/>
-                </a:solidFill>
-                <a:latin typeface="微软雅黑"/>
-                <a:ea typeface="微软雅黑"/>
-                <a:cs typeface="微软雅黑"/>
-              </a:rPr>
-              <a:t>看执行链</a:t>
-            </a:r>
-          </a:p>
-        </p:txBody>
-      </p:sp>
-      <p:pic>
-        <p:nvPicPr>
-          <p:cNvPr id="16" name="Picture 15" descr="08-老年端长按求助确认框.png"/>
-          <p:cNvPicPr>
-            <a:picLocks noChangeAspect="1"/>
-          </p:cNvPicPr>
-          <p:nvPr/>
-        </p:nvPicPr>
-        <p:blipFill>
-          <a:blip r:embed="rId5"/>
-          <a:stretch>
-            <a:fillRect/>
-          </a:stretch>
-        </p:blipFill>
-        <p:spPr>
-          <a:xfrm>
-            <a:off x="7961726" y="1600200"/>
-            <a:ext cx="992947" cy="2148839"/>
-          </a:xfrm>
-          <a:prstGeom prst="rect">
-            <a:avLst/>
-          </a:prstGeom>
-        </p:spPr>
-      </p:pic>
-      <p:sp>
-        <p:nvSpPr>
-          <p:cNvPr id="17" name="Rounded Rectangle 16"/>
-          <p:cNvSpPr/>
-          <p:nvPr/>
-        </p:nvSpPr>
-        <p:spPr>
-          <a:xfrm>
-            <a:off x="7406640" y="3977639"/>
-            <a:ext cx="2103120" cy="1325880"/>
-          </a:xfrm>
-          <a:prstGeom prst="roundRect">
-            <a:avLst/>
-          </a:prstGeom>
-          <a:solidFill>
-            <a:srgbClr val="F2F5FB"/>
-          </a:solidFill>
-          <a:ln>
-            <a:noFill/>
-          </a:ln>
-          <a:effectLst/>
-        </p:spPr>
-        <p:style>
-          <a:lnRef idx="1">
-            <a:schemeClr val="accent1"/>
-          </a:lnRef>
-          <a:fillRef idx="3">
-            <a:schemeClr val="accent1"/>
-          </a:fillRef>
-          <a:effectRef idx="2">
-            <a:schemeClr val="accent1"/>
-          </a:effectRef>
-          <a:fontRef idx="minor">
-            <a:schemeClr val="lt1"/>
-          </a:fontRef>
-        </p:style>
-        <p:txBody>
-          <a:bodyPr rtlCol="0" anchor="ctr"/>
-          <a:lstStyle/>
-          <a:p>
-            <a:pPr algn="ctr"/>
-          </a:p>
-        </p:txBody>
-      </p:sp>
-      <p:sp>
-        <p:nvSpPr>
-          <p:cNvPr id="18" name="TextBox 17"/>
-          <p:cNvSpPr txBox="1"/>
-          <p:nvPr/>
-        </p:nvSpPr>
-        <p:spPr>
-          <a:xfrm>
-            <a:off x="7406640" y="4078224"/>
-            <a:ext cx="2103120" cy="457200"/>
-          </a:xfrm>
-          <a:prstGeom prst="rect">
-            <a:avLst/>
-          </a:prstGeom>
-          <a:noFill/>
-        </p:spPr>
-        <p:txBody>
-          <a:bodyPr wrap="square">
-            <a:spAutoFit/>
-          </a:bodyPr>
-          <a:lstStyle/>
-          <a:p>
-            <a:pPr algn="ctr">
-              <a:lnSpc>
-                <a:spcPct val="125000"/>
-              </a:lnSpc>
-            </a:pPr>
-            <a:r>
-              <a:rPr sz="2000" b="1">
-                <a:solidFill>
-                  <a:srgbClr val="122A51"/>
-                </a:solidFill>
-                <a:latin typeface="微软雅黑"/>
-                <a:ea typeface="微软雅黑"/>
-                <a:cs typeface="微软雅黑"/>
-              </a:rPr>
-              <a:t>④ 老人端</a:t>
-            </a:r>
-          </a:p>
-        </p:txBody>
-      </p:sp>
-      <p:sp>
-        <p:nvSpPr>
-          <p:cNvPr id="19" name="TextBox 18"/>
-          <p:cNvSpPr txBox="1"/>
-          <p:nvPr/>
-        </p:nvSpPr>
-        <p:spPr>
-          <a:xfrm>
-            <a:off x="7406640" y="4590288"/>
-            <a:ext cx="2103120" cy="640080"/>
-          </a:xfrm>
-          <a:prstGeom prst="rect">
-            <a:avLst/>
-          </a:prstGeom>
-          <a:noFill/>
-        </p:spPr>
-        <p:txBody>
-          <a:bodyPr wrap="square">
-            <a:spAutoFit/>
-          </a:bodyPr>
-          <a:lstStyle/>
-          <a:p>
-            <a:pPr algn="ctr">
-              <a:lnSpc>
-                <a:spcPct val="125000"/>
-              </a:lnSpc>
-            </a:pPr>
-            <a:r>
-              <a:rPr sz="1400" b="0">
-                <a:solidFill>
-                  <a:srgbClr val="6B7485"/>
-                </a:solidFill>
-                <a:latin typeface="微软雅黑"/>
-                <a:ea typeface="微软雅黑"/>
-                <a:cs typeface="微软雅黑"/>
-              </a:rPr>
-              <a:t>长按 3 秒再确认</a:t>
-            </a:r>
-          </a:p>
-        </p:txBody>
-      </p:sp>
-      <p:pic>
-        <p:nvPicPr>
-          <p:cNvPr id="20" name="Picture 19" descr="06-网格员工作台.png"/>
-          <p:cNvPicPr>
-            <a:picLocks noChangeAspect="1"/>
-          </p:cNvPicPr>
-          <p:nvPr/>
-        </p:nvPicPr>
-        <p:blipFill>
-          <a:blip r:embed="rId6"/>
-          <a:stretch>
-            <a:fillRect/>
-          </a:stretch>
-        </p:blipFill>
-        <p:spPr>
-          <a:xfrm>
-            <a:off x="9656063" y="2017395"/>
-            <a:ext cx="2103120" cy="1314450"/>
-          </a:xfrm>
-          <a:prstGeom prst="rect">
-            <a:avLst/>
-          </a:prstGeom>
-        </p:spPr>
-      </p:pic>
-      <p:sp>
-        <p:nvSpPr>
-          <p:cNvPr id="21" name="Rounded Rectangle 20"/>
-          <p:cNvSpPr/>
-          <p:nvPr/>
-        </p:nvSpPr>
-        <p:spPr>
-          <a:xfrm>
-            <a:off x="9656063" y="3977639"/>
-            <a:ext cx="2103120" cy="1325880"/>
-          </a:xfrm>
-          <a:prstGeom prst="roundRect">
-            <a:avLst/>
-          </a:prstGeom>
-          <a:solidFill>
-            <a:srgbClr val="F2F5FB"/>
-          </a:solidFill>
-          <a:ln>
-            <a:noFill/>
-          </a:ln>
-          <a:effectLst/>
-        </p:spPr>
-        <p:style>
-          <a:lnRef idx="1">
-            <a:schemeClr val="accent1"/>
-          </a:lnRef>
-          <a:fillRef idx="3">
-            <a:schemeClr val="accent1"/>
-          </a:fillRef>
-          <a:effectRef idx="2">
-            <a:schemeClr val="accent1"/>
-          </a:effectRef>
-          <a:fontRef idx="minor">
-            <a:schemeClr val="lt1"/>
-          </a:fontRef>
-        </p:style>
-        <p:txBody>
-          <a:bodyPr rtlCol="0" anchor="ctr"/>
-          <a:lstStyle/>
-          <a:p>
-            <a:pPr algn="ctr"/>
-          </a:p>
-        </p:txBody>
-      </p:sp>
-      <p:sp>
-        <p:nvSpPr>
-          <p:cNvPr id="22" name="TextBox 21"/>
-          <p:cNvSpPr txBox="1"/>
-          <p:nvPr/>
-        </p:nvSpPr>
-        <p:spPr>
-          <a:xfrm>
-            <a:off x="9656063" y="4078224"/>
-            <a:ext cx="2103120" cy="457200"/>
-          </a:xfrm>
-          <a:prstGeom prst="rect">
-            <a:avLst/>
-          </a:prstGeom>
-          <a:noFill/>
-        </p:spPr>
-        <p:txBody>
-          <a:bodyPr wrap="square">
-            <a:spAutoFit/>
-          </a:bodyPr>
-          <a:lstStyle/>
-          <a:p>
-            <a:pPr algn="ctr">
-              <a:lnSpc>
-                <a:spcPct val="125000"/>
-              </a:lnSpc>
-            </a:pPr>
-            <a:r>
-              <a:rPr sz="2000" b="1">
-                <a:solidFill>
-                  <a:srgbClr val="122A51"/>
-                </a:solidFill>
-                <a:latin typeface="微软雅黑"/>
-                <a:ea typeface="微软雅黑"/>
-                <a:cs typeface="微软雅黑"/>
-              </a:rPr>
-              <a:t>⑤ 网格端</a:t>
-            </a:r>
-          </a:p>
-        </p:txBody>
-      </p:sp>
-      <p:sp>
-        <p:nvSpPr>
-          <p:cNvPr id="23" name="TextBox 22"/>
-          <p:cNvSpPr txBox="1"/>
-          <p:nvPr/>
-        </p:nvSpPr>
-        <p:spPr>
-          <a:xfrm>
-            <a:off x="9656063" y="4590288"/>
-            <a:ext cx="2103120" cy="640080"/>
-          </a:xfrm>
-          <a:prstGeom prst="rect">
-            <a:avLst/>
-          </a:prstGeom>
-          <a:noFill/>
-        </p:spPr>
-        <p:txBody>
-          <a:bodyPr wrap="square">
-            <a:spAutoFit/>
-          </a:bodyPr>
-          <a:lstStyle/>
-          <a:p>
-            <a:pPr algn="ctr">
-              <a:lnSpc>
-                <a:spcPct val="125000"/>
-              </a:lnSpc>
-            </a:pPr>
-            <a:r>
-              <a:rPr sz="1400" b="0">
-                <a:solidFill>
-                  <a:srgbClr val="6B7485"/>
-                </a:solidFill>
-                <a:latin typeface="微软雅黑"/>
-                <a:ea typeface="微软雅黑"/>
-                <a:cs typeface="微软雅黑"/>
-              </a:rPr>
-              <a:t>待办与处理</a:t>
-            </a:r>
-          </a:p>
-        </p:txBody>
-      </p:sp>
-      <p:sp>
-        <p:nvSpPr>
-          <p:cNvPr id="24" name="Rectangle 23"/>
+          <p:cNvPr id="8" name="Rectangle 7"/>
           <p:cNvSpPr/>
           <p:nvPr/>
         </p:nvSpPr>
@@ -12660,7 +11877,7 @@
       </p:sp>
       <p:sp>
         <p:nvSpPr>
-          <p:cNvPr id="25" name="TextBox 24"/>
+          <p:cNvPr id="9" name="TextBox 8"/>
           <p:cNvSpPr txBox="1"/>
           <p:nvPr/>
         </p:nvSpPr>
@@ -12701,14 +11918,14 @@
       </p:sp>
       <p:sp>
         <p:nvSpPr>
-          <p:cNvPr id="26" name="TextBox 25"/>
+          <p:cNvPr id="10" name="TextBox 9"/>
           <p:cNvSpPr txBox="1"/>
           <p:nvPr/>
         </p:nvSpPr>
         <p:spPr>
           <a:xfrm>
-            <a:off x="10607040" y="6565392"/>
-            <a:ext cx="822960" cy="274320"/>
+            <a:off x="10058400" y="6565392"/>
+            <a:ext cx="1371600" cy="274320"/>
           </a:xfrm>
           <a:prstGeom prst="rect">
             <a:avLst/>
@@ -12735,7 +11952,7 @@
                 <a:ea typeface="微软雅黑"/>
                 <a:cs typeface="微软雅黑"/>
               </a:rPr>
-              <a:t>6 / 8</a:t>
+              <a:t>6 / 11</a:t>
             </a:r>
           </a:p>
         </p:txBody>
@@ -12760,51 +11977,7 @@
       <p:grpSpPr/>
       <p:sp>
         <p:nvSpPr>
-          <p:cNvPr id="2" name="Rectangle 1"/>
-          <p:cNvSpPr/>
-          <p:nvPr/>
-        </p:nvSpPr>
-        <p:spPr>
-          <a:xfrm>
-            <a:off x="0" y="0"/>
-            <a:ext cx="12191695" cy="6858000"/>
-          </a:xfrm>
-          <a:prstGeom prst="rect">
-            <a:avLst/>
-          </a:prstGeom>
-          <a:solidFill>
-            <a:srgbClr val="122A51"/>
-          </a:solidFill>
-          <a:ln>
-            <a:noFill/>
-          </a:ln>
-          <a:effectLst/>
-        </p:spPr>
-        <p:style>
-          <a:lnRef idx="1">
-            <a:schemeClr val="accent1"/>
-          </a:lnRef>
-          <a:fillRef idx="3">
-            <a:schemeClr val="accent1"/>
-          </a:fillRef>
-          <a:effectRef idx="2">
-            <a:schemeClr val="accent1"/>
-          </a:effectRef>
-          <a:fontRef idx="minor">
-            <a:schemeClr val="lt1"/>
-          </a:fontRef>
-        </p:style>
-        <p:txBody>
-          <a:bodyPr rtlCol="0" anchor="ctr"/>
-          <a:lstStyle/>
-          <a:p>
-            <a:pPr algn="ctr"/>
-          </a:p>
-        </p:txBody>
-      </p:sp>
-      <p:sp>
-        <p:nvSpPr>
-          <p:cNvPr id="3" name="Rounded Rectangle 2"/>
+          <p:cNvPr id="2" name="Rounded Rectangle 1"/>
           <p:cNvSpPr/>
           <p:nvPr/>
         </p:nvSpPr>
@@ -12848,7 +12021,7 @@
       </p:sp>
       <p:sp>
         <p:nvSpPr>
-          <p:cNvPr id="4" name="TextBox 3"/>
+          <p:cNvPr id="3" name="TextBox 2"/>
           <p:cNvSpPr txBox="1"/>
           <p:nvPr/>
         </p:nvSpPr>
@@ -12882,21 +12055,89 @@
                 <a:ea typeface="微软雅黑"/>
                 <a:cs typeface="微软雅黑"/>
               </a:rPr>
-              <a:t>几个能复算的数字</a:t>
-            </a:r>
-          </a:p>
-        </p:txBody>
-      </p:sp>
-      <p:sp>
-        <p:nvSpPr>
-          <p:cNvPr id="5" name="TextBox 4"/>
+              <a:t>五步走完一套流程</a:t>
+            </a:r>
+          </a:p>
+        </p:txBody>
+      </p:sp>
+      <p:pic>
+        <p:nvPicPr>
+          <p:cNvPr id="4" name="Picture 3" descr="10-提交报修表单.png"/>
+          <p:cNvPicPr>
+            <a:picLocks noChangeAspect="1"/>
+          </p:cNvPicPr>
+          <p:nvPr/>
+        </p:nvPicPr>
+        <p:blipFill>
+          <a:blip r:embed="rId2"/>
+          <a:stretch>
+            <a:fillRect/>
+          </a:stretch>
+        </p:blipFill>
+        <p:spPr>
+          <a:xfrm>
+            <a:off x="658368" y="2017395"/>
+            <a:ext cx="2103120" cy="1314450"/>
+          </a:xfrm>
+          <a:prstGeom prst="rect">
+            <a:avLst/>
+          </a:prstGeom>
+        </p:spPr>
+      </p:pic>
+      <p:sp>
+        <p:nvSpPr>
+          <p:cNvPr id="5" name="Rounded Rectangle 4"/>
+          <p:cNvSpPr/>
+          <p:nvPr/>
+        </p:nvSpPr>
+        <p:spPr>
+          <a:xfrm>
+            <a:off x="658368" y="3977639"/>
+            <a:ext cx="2103120" cy="1325880"/>
+          </a:xfrm>
+          <a:prstGeom prst="roundRect">
+            <a:avLst/>
+          </a:prstGeom>
+          <a:solidFill>
+            <a:srgbClr val="F2F5FB"/>
+          </a:solidFill>
+          <a:ln>
+            <a:noFill/>
+          </a:ln>
+          <a:effectLst/>
+        </p:spPr>
+        <p:style>
+          <a:lnRef idx="1">
+            <a:schemeClr val="accent1"/>
+          </a:lnRef>
+          <a:fillRef idx="3">
+            <a:schemeClr val="accent1"/>
+          </a:fillRef>
+          <a:effectRef idx="2">
+            <a:schemeClr val="accent1"/>
+          </a:effectRef>
+          <a:fontRef idx="minor">
+            <a:schemeClr val="lt1"/>
+          </a:fontRef>
+        </p:style>
+        <p:txBody>
+          <a:bodyPr rtlCol="0" anchor="ctr"/>
+          <a:lstStyle/>
+          <a:p>
+            <a:pPr algn="ctr"/>
+          </a:p>
+        </p:txBody>
+      </p:sp>
+      <p:sp>
+        <p:nvSpPr>
+          <p:cNvPr id="6" name="TextBox 5"/>
           <p:cNvSpPr txBox="1"/>
           <p:nvPr/>
         </p:nvSpPr>
         <p:spPr>
           <a:xfrm>
-            <a:off x="868680" y="1920240"/>
-            <a:ext cx="4937760" cy="1097280"/>
+            <a:off x="658368" y="4078224"/>
+            <a:ext cx="2103120" cy="457200"/>
           </a:xfrm>
           <a:prstGeom prst="rect">
             <a:avLst/>
@@ -12909,35 +12150,35 @@
           </a:bodyPr>
           <a:lstStyle/>
           <a:p>
-            <a:pPr algn="l">
+            <a:pPr algn="ctr">
               <a:lnSpc>
                 <a:spcPct val="125000"/>
               </a:lnSpc>
             </a:pPr>
             <a:r>
-              <a:rPr sz="7200" b="1">
-                <a:solidFill>
-                  <a:srgbClr val="FFFFFF"/>
-                </a:solidFill>
-                <a:latin typeface="微软雅黑"/>
-                <a:ea typeface="微软雅黑"/>
-                <a:cs typeface="微软雅黑"/>
-              </a:rPr>
-              <a:t>638</a:t>
-            </a:r>
-          </a:p>
-        </p:txBody>
-      </p:sp>
-      <p:sp>
-        <p:nvSpPr>
-          <p:cNvPr id="6" name="TextBox 5"/>
+              <a:rPr sz="2000" b="1">
+                <a:solidFill>
+                  <a:srgbClr val="122A51"/>
+                </a:solidFill>
+                <a:latin typeface="微软雅黑"/>
+                <a:ea typeface="微软雅黑"/>
+                <a:cs typeface="微软雅黑"/>
+              </a:rPr>
+              <a:t>① 报修</a:t>
+            </a:r>
+          </a:p>
+        </p:txBody>
+      </p:sp>
+      <p:sp>
+        <p:nvSpPr>
+          <p:cNvPr id="7" name="TextBox 6"/>
           <p:cNvSpPr txBox="1"/>
           <p:nvPr/>
         </p:nvSpPr>
         <p:spPr>
           <a:xfrm>
-            <a:off x="868680" y="2971800"/>
-            <a:ext cx="4937760" cy="548640"/>
+            <a:off x="658368" y="4590288"/>
+            <a:ext cx="2103120" cy="640080"/>
           </a:xfrm>
           <a:prstGeom prst="rect">
             <a:avLst/>
@@ -12950,35 +12191,103 @@
           </a:bodyPr>
           <a:lstStyle/>
           <a:p>
-            <a:pPr algn="l">
+            <a:pPr algn="ctr">
               <a:lnSpc>
                 <a:spcPct val="125000"/>
               </a:lnSpc>
             </a:pPr>
             <a:r>
-              <a:rPr sz="2200" b="0">
-                <a:solidFill>
-                  <a:srgbClr val="FF8C42"/>
-                </a:solidFill>
-                <a:latin typeface="微软雅黑"/>
-                <a:ea typeface="微软雅黑"/>
-                <a:cs typeface="微软雅黑"/>
-              </a:rPr>
-              <a:t>项测试 · 全绿</a:t>
-            </a:r>
-          </a:p>
-        </p:txBody>
-      </p:sp>
-      <p:sp>
-        <p:nvSpPr>
-          <p:cNvPr id="7" name="TextBox 6"/>
+              <a:rPr sz="1400" b="0">
+                <a:solidFill>
+                  <a:srgbClr val="6B7485"/>
+                </a:solidFill>
+                <a:latin typeface="微软雅黑"/>
+                <a:ea typeface="微软雅黑"/>
+                <a:cs typeface="微软雅黑"/>
+              </a:rPr>
+              <a:t>一句话提交</a:t>
+            </a:r>
+          </a:p>
+        </p:txBody>
+      </p:sp>
+      <p:pic>
+        <p:nvPicPr>
+          <p:cNvPr id="8" name="Picture 7" descr="03-政策问答带依据与属地.png"/>
+          <p:cNvPicPr>
+            <a:picLocks noChangeAspect="1"/>
+          </p:cNvPicPr>
+          <p:nvPr/>
+        </p:nvPicPr>
+        <p:blipFill>
+          <a:blip r:embed="rId3"/>
+          <a:stretch>
+            <a:fillRect/>
+          </a:stretch>
+        </p:blipFill>
+        <p:spPr>
+          <a:xfrm>
+            <a:off x="2907791" y="2017395"/>
+            <a:ext cx="2103120" cy="1314450"/>
+          </a:xfrm>
+          <a:prstGeom prst="rect">
+            <a:avLst/>
+          </a:prstGeom>
+        </p:spPr>
+      </p:pic>
+      <p:sp>
+        <p:nvSpPr>
+          <p:cNvPr id="9" name="Rounded Rectangle 8"/>
+          <p:cNvSpPr/>
+          <p:nvPr/>
+        </p:nvSpPr>
+        <p:spPr>
+          <a:xfrm>
+            <a:off x="2907791" y="3977639"/>
+            <a:ext cx="2103120" cy="1325880"/>
+          </a:xfrm>
+          <a:prstGeom prst="roundRect">
+            <a:avLst/>
+          </a:prstGeom>
+          <a:solidFill>
+            <a:srgbClr val="F2F5FB"/>
+          </a:solidFill>
+          <a:ln>
+            <a:noFill/>
+          </a:ln>
+          <a:effectLst/>
+        </p:spPr>
+        <p:style>
+          <a:lnRef idx="1">
+            <a:schemeClr val="accent1"/>
+          </a:lnRef>
+          <a:fillRef idx="3">
+            <a:schemeClr val="accent1"/>
+          </a:fillRef>
+          <a:effectRef idx="2">
+            <a:schemeClr val="accent1"/>
+          </a:effectRef>
+          <a:fontRef idx="minor">
+            <a:schemeClr val="lt1"/>
+          </a:fontRef>
+        </p:style>
+        <p:txBody>
+          <a:bodyPr rtlCol="0" anchor="ctr"/>
+          <a:lstStyle/>
+          <a:p>
+            <a:pPr algn="ctr"/>
+          </a:p>
+        </p:txBody>
+      </p:sp>
+      <p:sp>
+        <p:nvSpPr>
+          <p:cNvPr id="10" name="TextBox 9"/>
           <p:cNvSpPr txBox="1"/>
           <p:nvPr/>
         </p:nvSpPr>
         <p:spPr>
           <a:xfrm>
-            <a:off x="6355080" y="1920240"/>
-            <a:ext cx="4937760" cy="1097280"/>
+            <a:off x="2907791" y="4078224"/>
+            <a:ext cx="2103120" cy="457200"/>
           </a:xfrm>
           <a:prstGeom prst="rect">
             <a:avLst/>
@@ -12991,35 +12300,35 @@
           </a:bodyPr>
           <a:lstStyle/>
           <a:p>
-            <a:pPr algn="l">
+            <a:pPr algn="ctr">
               <a:lnSpc>
                 <a:spcPct val="125000"/>
               </a:lnSpc>
             </a:pPr>
             <a:r>
-              <a:rPr sz="7200" b="1">
-                <a:solidFill>
-                  <a:srgbClr val="FFFFFF"/>
-                </a:solidFill>
-                <a:latin typeface="微软雅黑"/>
-                <a:ea typeface="微软雅黑"/>
-                <a:cs typeface="微软雅黑"/>
-              </a:rPr>
-              <a:t>550</a:t>
-            </a:r>
-          </a:p>
-        </p:txBody>
-      </p:sp>
-      <p:sp>
-        <p:nvSpPr>
-          <p:cNvPr id="8" name="TextBox 7"/>
+              <a:rPr sz="2000" b="1">
+                <a:solidFill>
+                  <a:srgbClr val="122A51"/>
+                </a:solidFill>
+                <a:latin typeface="微软雅黑"/>
+                <a:ea typeface="微软雅黑"/>
+                <a:cs typeface="微软雅黑"/>
+              </a:rPr>
+              <a:t>② 政策问答</a:t>
+            </a:r>
+          </a:p>
+        </p:txBody>
+      </p:sp>
+      <p:sp>
+        <p:nvSpPr>
+          <p:cNvPr id="11" name="TextBox 10"/>
           <p:cNvSpPr txBox="1"/>
           <p:nvPr/>
         </p:nvSpPr>
         <p:spPr>
           <a:xfrm>
-            <a:off x="6355080" y="2971800"/>
-            <a:ext cx="4937760" cy="548640"/>
+            <a:off x="2907791" y="4590288"/>
+            <a:ext cx="2103120" cy="640080"/>
           </a:xfrm>
           <a:prstGeom prst="rect">
             <a:avLst/>
@@ -13032,35 +12341,103 @@
           </a:bodyPr>
           <a:lstStyle/>
           <a:p>
-            <a:pPr algn="l">
+            <a:pPr algn="ctr">
               <a:lnSpc>
                 <a:spcPct val="125000"/>
               </a:lnSpc>
             </a:pPr>
             <a:r>
-              <a:rPr sz="2200" b="0">
-                <a:solidFill>
-                  <a:srgbClr val="FF8C42"/>
-                </a:solidFill>
-                <a:latin typeface="微软雅黑"/>
-                <a:ea typeface="微软雅黑"/>
-                <a:cs typeface="微软雅黑"/>
-              </a:rPr>
-              <a:t>并发 · 零失败</a:t>
-            </a:r>
-          </a:p>
-        </p:txBody>
-      </p:sp>
-      <p:sp>
-        <p:nvSpPr>
-          <p:cNvPr id="9" name="TextBox 8"/>
+              <a:rPr sz="1400" b="0">
+                <a:solidFill>
+                  <a:srgbClr val="6B7485"/>
+                </a:solidFill>
+                <a:latin typeface="微软雅黑"/>
+                <a:ea typeface="微软雅黑"/>
+                <a:cs typeface="微软雅黑"/>
+              </a:rPr>
+              <a:t>带依据与属地</a:t>
+            </a:r>
+          </a:p>
+        </p:txBody>
+      </p:sp>
+      <p:pic>
+        <p:nvPicPr>
+          <p:cNvPr id="12" name="Picture 11" descr="04-多智能体执行链.png"/>
+          <p:cNvPicPr>
+            <a:picLocks noChangeAspect="1"/>
+          </p:cNvPicPr>
+          <p:nvPr/>
+        </p:nvPicPr>
+        <p:blipFill>
+          <a:blip r:embed="rId4"/>
+          <a:stretch>
+            <a:fillRect/>
+          </a:stretch>
+        </p:blipFill>
+        <p:spPr>
+          <a:xfrm>
+            <a:off x="5157216" y="2017395"/>
+            <a:ext cx="2103120" cy="1314450"/>
+          </a:xfrm>
+          <a:prstGeom prst="rect">
+            <a:avLst/>
+          </a:prstGeom>
+        </p:spPr>
+      </p:pic>
+      <p:sp>
+        <p:nvSpPr>
+          <p:cNvPr id="13" name="Rounded Rectangle 12"/>
+          <p:cNvSpPr/>
+          <p:nvPr/>
+        </p:nvSpPr>
+        <p:spPr>
+          <a:xfrm>
+            <a:off x="5157216" y="3977639"/>
+            <a:ext cx="2103120" cy="1325880"/>
+          </a:xfrm>
+          <a:prstGeom prst="roundRect">
+            <a:avLst/>
+          </a:prstGeom>
+          <a:solidFill>
+            <a:srgbClr val="F2F5FB"/>
+          </a:solidFill>
+          <a:ln>
+            <a:noFill/>
+          </a:ln>
+          <a:effectLst/>
+        </p:spPr>
+        <p:style>
+          <a:lnRef idx="1">
+            <a:schemeClr val="accent1"/>
+          </a:lnRef>
+          <a:fillRef idx="3">
+            <a:schemeClr val="accent1"/>
+          </a:fillRef>
+          <a:effectRef idx="2">
+            <a:schemeClr val="accent1"/>
+          </a:effectRef>
+          <a:fontRef idx="minor">
+            <a:schemeClr val="lt1"/>
+          </a:fontRef>
+        </p:style>
+        <p:txBody>
+          <a:bodyPr rtlCol="0" anchor="ctr"/>
+          <a:lstStyle/>
+          <a:p>
+            <a:pPr algn="ctr"/>
+          </a:p>
+        </p:txBody>
+      </p:sp>
+      <p:sp>
+        <p:nvSpPr>
+          <p:cNvPr id="14" name="TextBox 13"/>
           <p:cNvSpPr txBox="1"/>
           <p:nvPr/>
         </p:nvSpPr>
         <p:spPr>
           <a:xfrm>
-            <a:off x="868680" y="3840480"/>
-            <a:ext cx="4937760" cy="1097280"/>
+            <a:off x="5157216" y="4078224"/>
+            <a:ext cx="2103120" cy="457200"/>
           </a:xfrm>
           <a:prstGeom prst="rect">
             <a:avLst/>
@@ -13073,35 +12450,35 @@
           </a:bodyPr>
           <a:lstStyle/>
           <a:p>
-            <a:pPr algn="l">
+            <a:pPr algn="ctr">
               <a:lnSpc>
                 <a:spcPct val="125000"/>
               </a:lnSpc>
             </a:pPr>
             <a:r>
-              <a:rPr sz="7200" b="1">
-                <a:solidFill>
-                  <a:srgbClr val="FFFFFF"/>
-                </a:solidFill>
-                <a:latin typeface="微软雅黑"/>
-                <a:ea typeface="微软雅黑"/>
-                <a:cs typeface="微软雅黑"/>
-              </a:rPr>
-              <a:t>48</a:t>
-            </a:r>
-          </a:p>
-        </p:txBody>
-      </p:sp>
-      <p:sp>
-        <p:nvSpPr>
-          <p:cNvPr id="10" name="TextBox 9"/>
+              <a:rPr sz="2000" b="1">
+                <a:solidFill>
+                  <a:srgbClr val="122A51"/>
+                </a:solidFill>
+                <a:latin typeface="微软雅黑"/>
+                <a:ea typeface="微软雅黑"/>
+                <a:cs typeface="微软雅黑"/>
+              </a:rPr>
+              <a:t>③ 天气联动</a:t>
+            </a:r>
+          </a:p>
+        </p:txBody>
+      </p:sp>
+      <p:sp>
+        <p:nvSpPr>
+          <p:cNvPr id="15" name="TextBox 14"/>
           <p:cNvSpPr txBox="1"/>
           <p:nvPr/>
         </p:nvSpPr>
         <p:spPr>
           <a:xfrm>
-            <a:off x="868680" y="4892040"/>
-            <a:ext cx="4937760" cy="548640"/>
+            <a:off x="5157216" y="4590288"/>
+            <a:ext cx="2103120" cy="640080"/>
           </a:xfrm>
           <a:prstGeom prst="rect">
             <a:avLst/>
@@ -13114,35 +12491,103 @@
           </a:bodyPr>
           <a:lstStyle/>
           <a:p>
-            <a:pPr algn="l">
+            <a:pPr algn="ctr">
               <a:lnSpc>
                 <a:spcPct val="125000"/>
               </a:lnSpc>
             </a:pPr>
             <a:r>
-              <a:rPr sz="2200" b="0">
-                <a:solidFill>
-                  <a:srgbClr val="FF8C42"/>
-                </a:solidFill>
-                <a:latin typeface="微软雅黑"/>
-                <a:ea typeface="微软雅黑"/>
-                <a:cs typeface="微软雅黑"/>
-              </a:rPr>
-              <a:t>条金标 · 第一位命中 100%</a:t>
-            </a:r>
-          </a:p>
-        </p:txBody>
-      </p:sp>
-      <p:sp>
-        <p:nvSpPr>
-          <p:cNvPr id="11" name="TextBox 10"/>
+              <a:rPr sz="1400" b="0">
+                <a:solidFill>
+                  <a:srgbClr val="6B7485"/>
+                </a:solidFill>
+                <a:latin typeface="微软雅黑"/>
+                <a:ea typeface="微软雅黑"/>
+                <a:cs typeface="微软雅黑"/>
+              </a:rPr>
+              <a:t>看执行链</a:t>
+            </a:r>
+          </a:p>
+        </p:txBody>
+      </p:sp>
+      <p:pic>
+        <p:nvPicPr>
+          <p:cNvPr id="16" name="Picture 15" descr="08-老年端长按求助确认框.png"/>
+          <p:cNvPicPr>
+            <a:picLocks noChangeAspect="1"/>
+          </p:cNvPicPr>
+          <p:nvPr/>
+        </p:nvPicPr>
+        <p:blipFill>
+          <a:blip r:embed="rId5"/>
+          <a:stretch>
+            <a:fillRect/>
+          </a:stretch>
+        </p:blipFill>
+        <p:spPr>
+          <a:xfrm>
+            <a:off x="7961726" y="1600200"/>
+            <a:ext cx="992947" cy="2148839"/>
+          </a:xfrm>
+          <a:prstGeom prst="rect">
+            <a:avLst/>
+          </a:prstGeom>
+        </p:spPr>
+      </p:pic>
+      <p:sp>
+        <p:nvSpPr>
+          <p:cNvPr id="17" name="Rounded Rectangle 16"/>
+          <p:cNvSpPr/>
+          <p:nvPr/>
+        </p:nvSpPr>
+        <p:spPr>
+          <a:xfrm>
+            <a:off x="7406640" y="3977639"/>
+            <a:ext cx="2103120" cy="1325880"/>
+          </a:xfrm>
+          <a:prstGeom prst="roundRect">
+            <a:avLst/>
+          </a:prstGeom>
+          <a:solidFill>
+            <a:srgbClr val="F2F5FB"/>
+          </a:solidFill>
+          <a:ln>
+            <a:noFill/>
+          </a:ln>
+          <a:effectLst/>
+        </p:spPr>
+        <p:style>
+          <a:lnRef idx="1">
+            <a:schemeClr val="accent1"/>
+          </a:lnRef>
+          <a:fillRef idx="3">
+            <a:schemeClr val="accent1"/>
+          </a:fillRef>
+          <a:effectRef idx="2">
+            <a:schemeClr val="accent1"/>
+          </a:effectRef>
+          <a:fontRef idx="minor">
+            <a:schemeClr val="lt1"/>
+          </a:fontRef>
+        </p:style>
+        <p:txBody>
+          <a:bodyPr rtlCol="0" anchor="ctr"/>
+          <a:lstStyle/>
+          <a:p>
+            <a:pPr algn="ctr"/>
+          </a:p>
+        </p:txBody>
+      </p:sp>
+      <p:sp>
+        <p:nvSpPr>
+          <p:cNvPr id="18" name="TextBox 17"/>
           <p:cNvSpPr txBox="1"/>
           <p:nvPr/>
         </p:nvSpPr>
         <p:spPr>
           <a:xfrm>
-            <a:off x="6355080" y="3840480"/>
-            <a:ext cx="4937760" cy="1097280"/>
+            <a:off x="7406640" y="4078224"/>
+            <a:ext cx="2103120" cy="457200"/>
           </a:xfrm>
           <a:prstGeom prst="rect">
             <a:avLst/>
@@ -13155,35 +12600,35 @@
           </a:bodyPr>
           <a:lstStyle/>
           <a:p>
-            <a:pPr algn="l">
+            <a:pPr algn="ctr">
               <a:lnSpc>
                 <a:spcPct val="125000"/>
               </a:lnSpc>
             </a:pPr>
             <a:r>
-              <a:rPr sz="7200" b="1">
-                <a:solidFill>
-                  <a:srgbClr val="FFFFFF"/>
-                </a:solidFill>
-                <a:latin typeface="微软雅黑"/>
-                <a:ea typeface="微软雅黑"/>
-                <a:cs typeface="微软雅黑"/>
-              </a:rPr>
-              <a:t>0</a:t>
-            </a:r>
-          </a:p>
-        </p:txBody>
-      </p:sp>
-      <p:sp>
-        <p:nvSpPr>
-          <p:cNvPr id="12" name="TextBox 11"/>
+              <a:rPr sz="2000" b="1">
+                <a:solidFill>
+                  <a:srgbClr val="122A51"/>
+                </a:solidFill>
+                <a:latin typeface="微软雅黑"/>
+                <a:ea typeface="微软雅黑"/>
+                <a:cs typeface="微软雅黑"/>
+              </a:rPr>
+              <a:t>④ 老人端</a:t>
+            </a:r>
+          </a:p>
+        </p:txBody>
+      </p:sp>
+      <p:sp>
+        <p:nvSpPr>
+          <p:cNvPr id="19" name="TextBox 18"/>
           <p:cNvSpPr txBox="1"/>
           <p:nvPr/>
         </p:nvSpPr>
         <p:spPr>
           <a:xfrm>
-            <a:off x="6355080" y="4892040"/>
-            <a:ext cx="4937760" cy="548640"/>
+            <a:off x="7406640" y="4590288"/>
+            <a:ext cx="2103120" cy="640080"/>
           </a:xfrm>
           <a:prstGeom prst="rect">
             <a:avLst/>
@@ -13196,35 +12641,103 @@
           </a:bodyPr>
           <a:lstStyle/>
           <a:p>
-            <a:pPr algn="l">
+            <a:pPr algn="ctr">
               <a:lnSpc>
                 <a:spcPct val="125000"/>
               </a:lnSpc>
             </a:pPr>
             <a:r>
-              <a:rPr sz="2200" b="0">
-                <a:solidFill>
-                  <a:srgbClr val="FF8C42"/>
-                </a:solidFill>
-                <a:latin typeface="微软雅黑"/>
-                <a:ea typeface="微软雅黑"/>
-                <a:cs typeface="微软雅黑"/>
-              </a:rPr>
-              <a:t>ruff 问题</a:t>
-            </a:r>
-          </a:p>
-        </p:txBody>
-      </p:sp>
-      <p:sp>
-        <p:nvSpPr>
-          <p:cNvPr id="13" name="TextBox 12"/>
+              <a:rPr sz="1400" b="0">
+                <a:solidFill>
+                  <a:srgbClr val="6B7485"/>
+                </a:solidFill>
+                <a:latin typeface="微软雅黑"/>
+                <a:ea typeface="微软雅黑"/>
+                <a:cs typeface="微软雅黑"/>
+              </a:rPr>
+              <a:t>长按 3 秒再确认</a:t>
+            </a:r>
+          </a:p>
+        </p:txBody>
+      </p:sp>
+      <p:pic>
+        <p:nvPicPr>
+          <p:cNvPr id="20" name="Picture 19" descr="06-网格员工作台.png"/>
+          <p:cNvPicPr>
+            <a:picLocks noChangeAspect="1"/>
+          </p:cNvPicPr>
+          <p:nvPr/>
+        </p:nvPicPr>
+        <p:blipFill>
+          <a:blip r:embed="rId6"/>
+          <a:stretch>
+            <a:fillRect/>
+          </a:stretch>
+        </p:blipFill>
+        <p:spPr>
+          <a:xfrm>
+            <a:off x="9656063" y="2017395"/>
+            <a:ext cx="2103120" cy="1314450"/>
+          </a:xfrm>
+          <a:prstGeom prst="rect">
+            <a:avLst/>
+          </a:prstGeom>
+        </p:spPr>
+      </p:pic>
+      <p:sp>
+        <p:nvSpPr>
+          <p:cNvPr id="21" name="Rounded Rectangle 20"/>
+          <p:cNvSpPr/>
+          <p:nvPr/>
+        </p:nvSpPr>
+        <p:spPr>
+          <a:xfrm>
+            <a:off x="9656063" y="3977639"/>
+            <a:ext cx="2103120" cy="1325880"/>
+          </a:xfrm>
+          <a:prstGeom prst="roundRect">
+            <a:avLst/>
+          </a:prstGeom>
+          <a:solidFill>
+            <a:srgbClr val="F2F5FB"/>
+          </a:solidFill>
+          <a:ln>
+            <a:noFill/>
+          </a:ln>
+          <a:effectLst/>
+        </p:spPr>
+        <p:style>
+          <a:lnRef idx="1">
+            <a:schemeClr val="accent1"/>
+          </a:lnRef>
+          <a:fillRef idx="3">
+            <a:schemeClr val="accent1"/>
+          </a:fillRef>
+          <a:effectRef idx="2">
+            <a:schemeClr val="accent1"/>
+          </a:effectRef>
+          <a:fontRef idx="minor">
+            <a:schemeClr val="lt1"/>
+          </a:fontRef>
+        </p:style>
+        <p:txBody>
+          <a:bodyPr rtlCol="0" anchor="ctr"/>
+          <a:lstStyle/>
+          <a:p>
+            <a:pPr algn="ctr"/>
+          </a:p>
+        </p:txBody>
+      </p:sp>
+      <p:sp>
+        <p:nvSpPr>
+          <p:cNvPr id="22" name="TextBox 21"/>
           <p:cNvSpPr txBox="1"/>
           <p:nvPr/>
         </p:nvSpPr>
         <p:spPr>
           <a:xfrm>
-            <a:off x="868680" y="5760720"/>
-            <a:ext cx="10058400" cy="640080"/>
+            <a:off x="9656063" y="4078224"/>
+            <a:ext cx="2103120" cy="457200"/>
           </a:xfrm>
           <a:prstGeom prst="rect">
             <a:avLst/>
@@ -13237,28 +12750,69 @@
           </a:bodyPr>
           <a:lstStyle/>
           <a:p>
-            <a:pPr algn="l">
+            <a:pPr algn="ctr">
               <a:lnSpc>
                 <a:spcPct val="125000"/>
               </a:lnSpc>
             </a:pPr>
             <a:r>
-              <a:rPr sz="2000" b="0">
-                <a:solidFill>
-                  <a:srgbClr val="FFFFFF"/>
-                </a:solidFill>
-                <a:latin typeface="微软雅黑"/>
-                <a:ea typeface="微软雅黑"/>
-                <a:cs typeface="微软雅黑"/>
-              </a:rPr>
-              <a:t>数据库 schema v46 · 约 50 张表　｜　本机自测，非第三方测评</a:t>
-            </a:r>
-          </a:p>
-        </p:txBody>
-      </p:sp>
-      <p:sp>
-        <p:nvSpPr>
-          <p:cNvPr id="14" name="Rectangle 13"/>
+              <a:rPr sz="2000" b="1">
+                <a:solidFill>
+                  <a:srgbClr val="122A51"/>
+                </a:solidFill>
+                <a:latin typeface="微软雅黑"/>
+                <a:ea typeface="微软雅黑"/>
+                <a:cs typeface="微软雅黑"/>
+              </a:rPr>
+              <a:t>⑤ 网格端</a:t>
+            </a:r>
+          </a:p>
+        </p:txBody>
+      </p:sp>
+      <p:sp>
+        <p:nvSpPr>
+          <p:cNvPr id="23" name="TextBox 22"/>
+          <p:cNvSpPr txBox="1"/>
+          <p:nvPr/>
+        </p:nvSpPr>
+        <p:spPr>
+          <a:xfrm>
+            <a:off x="9656063" y="4590288"/>
+            <a:ext cx="2103120" cy="640080"/>
+          </a:xfrm>
+          <a:prstGeom prst="rect">
+            <a:avLst/>
+          </a:prstGeom>
+          <a:noFill/>
+        </p:spPr>
+        <p:txBody>
+          <a:bodyPr wrap="square">
+            <a:spAutoFit/>
+          </a:bodyPr>
+          <a:lstStyle/>
+          <a:p>
+            <a:pPr algn="ctr">
+              <a:lnSpc>
+                <a:spcPct val="125000"/>
+              </a:lnSpc>
+            </a:pPr>
+            <a:r>
+              <a:rPr sz="1400" b="0">
+                <a:solidFill>
+                  <a:srgbClr val="6B7485"/>
+                </a:solidFill>
+                <a:latin typeface="微软雅黑"/>
+                <a:ea typeface="微软雅黑"/>
+                <a:cs typeface="微软雅黑"/>
+              </a:rPr>
+              <a:t>待办与处理</a:t>
+            </a:r>
+          </a:p>
+        </p:txBody>
+      </p:sp>
+      <p:sp>
+        <p:nvSpPr>
+          <p:cNvPr id="24" name="Rectangle 23"/>
           <p:cNvSpPr/>
           <p:nvPr/>
         </p:nvSpPr>
@@ -13302,7 +12856,7 @@
       </p:sp>
       <p:sp>
         <p:nvSpPr>
-          <p:cNvPr id="15" name="TextBox 14"/>
+          <p:cNvPr id="25" name="TextBox 24"/>
           <p:cNvSpPr txBox="1"/>
           <p:nvPr/>
         </p:nvSpPr>
@@ -13343,14 +12897,14 @@
       </p:sp>
       <p:sp>
         <p:nvSpPr>
-          <p:cNvPr id="16" name="TextBox 15"/>
+          <p:cNvPr id="26" name="TextBox 25"/>
           <p:cNvSpPr txBox="1"/>
           <p:nvPr/>
         </p:nvSpPr>
         <p:spPr>
           <a:xfrm>
-            <a:off x="10607040" y="6565392"/>
-            <a:ext cx="822960" cy="274320"/>
+            <a:off x="10058400" y="6565392"/>
+            <a:ext cx="1371600" cy="274320"/>
           </a:xfrm>
           <a:prstGeom prst="rect">
             <a:avLst/>
@@ -13377,7 +12931,7 @@
                 <a:ea typeface="微软雅黑"/>
                 <a:cs typeface="微软雅黑"/>
               </a:rPr>
-              <a:t>7 / 8</a:t>
+              <a:t>7 / 11</a:t>
             </a:r>
           </a:p>
         </p:txBody>
@@ -13480,55 +13034,35 @@
                 <a:ea typeface="微软雅黑"/>
                 <a:cs typeface="微软雅黑"/>
               </a:rPr>
-              <a:t>它现在的位置，和我想请教的三件事</a:t>
-            </a:r>
-          </a:p>
-        </p:txBody>
-      </p:sp>
-      <p:sp>
-        <p:nvSpPr>
-          <p:cNvPr id="4" name="Rounded Rectangle 3"/>
-          <p:cNvSpPr/>
-          <p:nvPr/>
-        </p:nvSpPr>
-        <p:spPr>
-          <a:xfrm>
-            <a:off x="868680" y="1691640"/>
-            <a:ext cx="10424160" cy="914400"/>
-          </a:xfrm>
-          <a:prstGeom prst="roundRect">
-            <a:avLst/>
-          </a:prstGeom>
-          <a:solidFill>
-            <a:srgbClr val="F2F5FB"/>
-          </a:solidFill>
-          <a:ln>
-            <a:noFill/>
-          </a:ln>
-          <a:effectLst/>
-        </p:spPr>
-        <p:style>
-          <a:lnRef idx="1">
-            <a:schemeClr val="accent1"/>
-          </a:lnRef>
-          <a:fillRef idx="3">
-            <a:schemeClr val="accent1"/>
-          </a:fillRef>
-          <a:effectRef idx="2">
-            <a:schemeClr val="accent1"/>
-          </a:effectRef>
-          <a:fontRef idx="minor">
-            <a:schemeClr val="lt1"/>
-          </a:fontRef>
-        </p:style>
-        <p:txBody>
-          <a:bodyPr rtlCol="0" anchor="ctr"/>
-          <a:lstStyle/>
-          <a:p>
-            <a:pPr algn="ctr"/>
-          </a:p>
-        </p:txBody>
-      </p:sp>
+              <a:t>再看几处细节</a:t>
+            </a:r>
+          </a:p>
+        </p:txBody>
+      </p:sp>
+      <p:pic>
+        <p:nvPicPr>
+          <p:cNvPr id="4" name="Picture 3" descr="03-政策问答带依据与属地.png"/>
+          <p:cNvPicPr>
+            <a:picLocks noChangeAspect="1"/>
+          </p:cNvPicPr>
+          <p:nvPr/>
+        </p:nvPicPr>
+        <p:blipFill>
+          <a:blip r:embed="rId2"/>
+          <a:stretch>
+            <a:fillRect/>
+          </a:stretch>
+        </p:blipFill>
+        <p:spPr>
+          <a:xfrm>
+            <a:off x="868680" y="1645920"/>
+            <a:ext cx="3291840" cy="2057400"/>
+          </a:xfrm>
+          <a:prstGeom prst="rect">
+            <a:avLst/>
+          </a:prstGeom>
+        </p:spPr>
+      </p:pic>
       <p:sp>
         <p:nvSpPr>
           <p:cNvPr id="5" name="TextBox 4"/>
@@ -13537,8 +13071,8 @@
         </p:nvSpPr>
         <p:spPr>
           <a:xfrm>
-            <a:off x="1188720" y="1828800"/>
-            <a:ext cx="9875520" cy="640080"/>
+            <a:off x="868680" y="3886200"/>
+            <a:ext cx="3291840" cy="822960"/>
           </a:xfrm>
           <a:prstGeom prst="rect">
             <a:avLst/>
@@ -13557,29 +13091,53 @@
               </a:lnSpc>
             </a:pPr>
             <a:r>
-              <a:rPr sz="2400" b="0">
-                <a:solidFill>
-                  <a:srgbClr val="1B2233"/>
-                </a:solidFill>
-                <a:latin typeface="微软雅黑"/>
-                <a:ea typeface="微软雅黑"/>
-                <a:cs typeface="微软雅黑"/>
-              </a:rPr>
-              <a:t>工程原型：还没在真实街道试点，没有运营数据，商业模式在探索</a:t>
-            </a:r>
-          </a:p>
-        </p:txBody>
-      </p:sp>
-      <p:sp>
-        <p:nvSpPr>
-          <p:cNvPr id="6" name="TextBox 5"/>
+              <a:rPr sz="1400" b="0">
+                <a:solidFill>
+                  <a:srgbClr val="6B7485"/>
+                </a:solidFill>
+                <a:latin typeface="微软雅黑"/>
+                <a:ea typeface="微软雅黑"/>
+                <a:cs typeface="微软雅黑"/>
+              </a:rPr>
+              <a:t>政策问答：答案下方给知识库依据，并标注适用地区</a:t>
+            </a:r>
+          </a:p>
+        </p:txBody>
+      </p:sp>
+      <p:pic>
+        <p:nvPicPr>
+          <p:cNvPr id="6" name="Picture 5" descr="05-工单详情与处理留痕.png"/>
+          <p:cNvPicPr>
+            <a:picLocks noChangeAspect="1"/>
+          </p:cNvPicPr>
+          <p:nvPr/>
+        </p:nvPicPr>
+        <p:blipFill>
+          <a:blip r:embed="rId3"/>
+          <a:stretch>
+            <a:fillRect/>
+          </a:stretch>
+        </p:blipFill>
+        <p:spPr>
+          <a:xfrm>
+            <a:off x="4434840" y="1645920"/>
+            <a:ext cx="3291840" cy="2057400"/>
+          </a:xfrm>
+          <a:prstGeom prst="rect">
+            <a:avLst/>
+          </a:prstGeom>
+        </p:spPr>
+      </p:pic>
+      <p:sp>
+        <p:nvSpPr>
+          <p:cNvPr id="7" name="TextBox 6"/>
           <p:cNvSpPr txBox="1"/>
           <p:nvPr/>
         </p:nvSpPr>
         <p:spPr>
           <a:xfrm>
-            <a:off x="1097280" y="3063240"/>
-            <a:ext cx="7680960" cy="640080"/>
+            <a:off x="4434840" y="3886200"/>
+            <a:ext cx="3291840" cy="822960"/>
           </a:xfrm>
           <a:prstGeom prst="rect">
             <a:avLst/>
@@ -13598,29 +13156,53 @@
               </a:lnSpc>
             </a:pPr>
             <a:r>
-              <a:rPr sz="2600" b="0">
-                <a:solidFill>
-                  <a:srgbClr val="1B2233"/>
-                </a:solidFill>
-                <a:latin typeface="微软雅黑"/>
-                <a:ea typeface="微软雅黑"/>
-                <a:cs typeface="微软雅黑"/>
-              </a:rPr>
-              <a:t>① 多智能体的「自动」边界怎么划？</a:t>
-            </a:r>
-          </a:p>
-        </p:txBody>
-      </p:sp>
-      <p:sp>
-        <p:nvSpPr>
-          <p:cNvPr id="7" name="TextBox 6"/>
+              <a:rPr sz="1400" b="0">
+                <a:solidFill>
+                  <a:srgbClr val="6B7485"/>
+                </a:solidFill>
+                <a:latin typeface="微软雅黑"/>
+                <a:ea typeface="微软雅黑"/>
+                <a:cs typeface="微软雅黑"/>
+              </a:rPr>
+              <a:t>工单详情：谁在什么时候处理，全有留痕</a:t>
+            </a:r>
+          </a:p>
+        </p:txBody>
+      </p:sp>
+      <p:pic>
+        <p:nvPicPr>
+          <p:cNvPr id="8" name="Picture 7" descr="05-工单详情与处理留痕.png"/>
+          <p:cNvPicPr>
+            <a:picLocks noChangeAspect="1"/>
+          </p:cNvPicPr>
+          <p:nvPr/>
+        </p:nvPicPr>
+        <p:blipFill>
+          <a:blip r:embed="rId3"/>
+          <a:stretch>
+            <a:fillRect/>
+          </a:stretch>
+        </p:blipFill>
+        <p:spPr>
+          <a:xfrm>
+            <a:off x="8001000" y="1645920"/>
+            <a:ext cx="3291840" cy="2057400"/>
+          </a:xfrm>
+          <a:prstGeom prst="rect">
+            <a:avLst/>
+          </a:prstGeom>
+        </p:spPr>
+      </p:pic>
+      <p:sp>
+        <p:nvSpPr>
+          <p:cNvPr id="9" name="TextBox 8"/>
           <p:cNvSpPr txBox="1"/>
           <p:nvPr/>
         </p:nvSpPr>
         <p:spPr>
           <a:xfrm>
-            <a:off x="8961120" y="3154680"/>
-            <a:ext cx="2377440" cy="548640"/>
+            <a:off x="8001000" y="3886200"/>
+            <a:ext cx="3291840" cy="822960"/>
           </a:xfrm>
           <a:prstGeom prst="rect">
             <a:avLst/>
@@ -13639,7 +13221,7 @@
               </a:lnSpc>
             </a:pPr>
             <a:r>
-              <a:rPr sz="1500" b="0">
+              <a:rPr sz="1400" b="0">
                 <a:solidFill>
                   <a:srgbClr val="6B7485"/>
                 </a:solidFill>
@@ -13647,219 +13229,14 @@
                 <a:ea typeface="微软雅黑"/>
                 <a:cs typeface="微软雅黑"/>
               </a:rPr>
-              <a:t>想请教技术专家</a:t>
-            </a:r>
-          </a:p>
-        </p:txBody>
-      </p:sp>
-      <p:sp>
-        <p:nvSpPr>
-          <p:cNvPr id="8" name="TextBox 7"/>
-          <p:cNvSpPr txBox="1"/>
-          <p:nvPr/>
-        </p:nvSpPr>
-        <p:spPr>
-          <a:xfrm>
-            <a:off x="1097280" y="3931920"/>
-            <a:ext cx="7680960" cy="640080"/>
-          </a:xfrm>
-          <a:prstGeom prst="rect">
-            <a:avLst/>
-          </a:prstGeom>
-          <a:noFill/>
-        </p:spPr>
-        <p:txBody>
-          <a:bodyPr wrap="square">
-            <a:spAutoFit/>
-          </a:bodyPr>
-          <a:lstStyle/>
-          <a:p>
-            <a:pPr algn="l">
-              <a:lnSpc>
-                <a:spcPct val="125000"/>
-              </a:lnSpc>
-            </a:pPr>
-            <a:r>
-              <a:rPr sz="2600" b="0">
-                <a:solidFill>
-                  <a:srgbClr val="1B2233"/>
-                </a:solidFill>
-                <a:latin typeface="微软雅黑"/>
-                <a:ea typeface="微软雅黑"/>
-                <a:cs typeface="微软雅黑"/>
-              </a:rPr>
-              <a:t>② 第一个试点社区怎么找、怎么谈？</a:t>
-            </a:r>
-          </a:p>
-        </p:txBody>
-      </p:sp>
-      <p:sp>
-        <p:nvSpPr>
-          <p:cNvPr id="9" name="TextBox 8"/>
-          <p:cNvSpPr txBox="1"/>
-          <p:nvPr/>
-        </p:nvSpPr>
-        <p:spPr>
-          <a:xfrm>
-            <a:off x="8961120" y="4023360"/>
-            <a:ext cx="2377440" cy="548640"/>
-          </a:xfrm>
-          <a:prstGeom prst="rect">
-            <a:avLst/>
-          </a:prstGeom>
-          <a:noFill/>
-        </p:spPr>
-        <p:txBody>
-          <a:bodyPr wrap="square">
-            <a:spAutoFit/>
-          </a:bodyPr>
-          <a:lstStyle/>
-          <a:p>
-            <a:pPr algn="l">
-              <a:lnSpc>
-                <a:spcPct val="125000"/>
-              </a:lnSpc>
-            </a:pPr>
-            <a:r>
-              <a:rPr sz="1500" b="0">
-                <a:solidFill>
-                  <a:srgbClr val="6B7485"/>
-                </a:solidFill>
-                <a:latin typeface="微软雅黑"/>
-                <a:ea typeface="微软雅黑"/>
-                <a:cs typeface="微软雅黑"/>
-              </a:rPr>
-              <a:t>想请教企业负责人</a:t>
-            </a:r>
-          </a:p>
-        </p:txBody>
-      </p:sp>
-      <p:sp>
-        <p:nvSpPr>
-          <p:cNvPr id="10" name="TextBox 9"/>
-          <p:cNvSpPr txBox="1"/>
-          <p:nvPr/>
-        </p:nvSpPr>
-        <p:spPr>
-          <a:xfrm>
-            <a:off x="1097280" y="4800600"/>
-            <a:ext cx="7680960" cy="640080"/>
-          </a:xfrm>
-          <a:prstGeom prst="rect">
-            <a:avLst/>
-          </a:prstGeom>
-          <a:noFill/>
-        </p:spPr>
-        <p:txBody>
-          <a:bodyPr wrap="square">
-            <a:spAutoFit/>
-          </a:bodyPr>
-          <a:lstStyle/>
-          <a:p>
-            <a:pPr algn="l">
-              <a:lnSpc>
-                <a:spcPct val="125000"/>
-              </a:lnSpc>
-            </a:pPr>
-            <a:r>
-              <a:rPr sz="2600" b="0">
-                <a:solidFill>
-                  <a:srgbClr val="1B2233"/>
-                </a:solidFill>
-                <a:latin typeface="微软雅黑"/>
-                <a:ea typeface="微软雅黑"/>
-                <a:cs typeface="微软雅黑"/>
-              </a:rPr>
-              <a:t>③ 没有历史数据，冷启动怎么破？</a:t>
-            </a:r>
-          </a:p>
-        </p:txBody>
-      </p:sp>
-      <p:sp>
-        <p:nvSpPr>
-          <p:cNvPr id="11" name="TextBox 10"/>
-          <p:cNvSpPr txBox="1"/>
-          <p:nvPr/>
-        </p:nvSpPr>
-        <p:spPr>
-          <a:xfrm>
-            <a:off x="8961120" y="4892040"/>
-            <a:ext cx="2377440" cy="548640"/>
-          </a:xfrm>
-          <a:prstGeom prst="rect">
-            <a:avLst/>
-          </a:prstGeom>
-          <a:noFill/>
-        </p:spPr>
-        <p:txBody>
-          <a:bodyPr wrap="square">
-            <a:spAutoFit/>
-          </a:bodyPr>
-          <a:lstStyle/>
-          <a:p>
-            <a:pPr algn="l">
-              <a:lnSpc>
-                <a:spcPct val="125000"/>
-              </a:lnSpc>
-            </a:pPr>
-            <a:r>
-              <a:rPr sz="1500" b="0">
-                <a:solidFill>
-                  <a:srgbClr val="6B7485"/>
-                </a:solidFill>
-                <a:latin typeface="微软雅黑"/>
-                <a:ea typeface="微软雅黑"/>
-                <a:cs typeface="微软雅黑"/>
-              </a:rPr>
-              <a:t>想请教投资人视角</a:t>
-            </a:r>
-          </a:p>
-        </p:txBody>
-      </p:sp>
-      <p:sp>
-        <p:nvSpPr>
-          <p:cNvPr id="12" name="TextBox 11"/>
-          <p:cNvSpPr txBox="1"/>
-          <p:nvPr/>
-        </p:nvSpPr>
-        <p:spPr>
-          <a:xfrm>
-            <a:off x="1097280" y="5943600"/>
-            <a:ext cx="10058400" cy="548640"/>
-          </a:xfrm>
-          <a:prstGeom prst="rect">
-            <a:avLst/>
-          </a:prstGeom>
-          <a:noFill/>
-        </p:spPr>
-        <p:txBody>
-          <a:bodyPr wrap="square">
-            <a:spAutoFit/>
-          </a:bodyPr>
-          <a:lstStyle/>
-          <a:p>
-            <a:pPr algn="l">
-              <a:lnSpc>
-                <a:spcPct val="125000"/>
-              </a:lnSpc>
-            </a:pPr>
-            <a:r>
-              <a:rPr sz="2000" b="1">
-                <a:solidFill>
-                  <a:srgbClr val="FF8C42"/>
-                </a:solidFill>
-                <a:latin typeface="微软雅黑"/>
-                <a:ea typeface="微软雅黑"/>
-                <a:cs typeface="微软雅黑"/>
-              </a:rPr>
-              <a:t>张奶奶那条路，现在是一句话。</a:t>
-            </a:r>
-          </a:p>
-        </p:txBody>
-      </p:sp>
-      <p:sp>
-        <p:nvSpPr>
-          <p:cNvPr id="13" name="Rectangle 12"/>
+              <a:t>居民端报修列表：状态一目了然</a:t>
+            </a:r>
+          </a:p>
+        </p:txBody>
+      </p:sp>
+      <p:sp>
+        <p:nvSpPr>
+          <p:cNvPr id="10" name="Rectangle 9"/>
           <p:cNvSpPr/>
           <p:nvPr/>
         </p:nvSpPr>
@@ -13903,7 +13280,7 @@
       </p:sp>
       <p:sp>
         <p:nvSpPr>
-          <p:cNvPr id="14" name="TextBox 13"/>
+          <p:cNvPr id="11" name="TextBox 10"/>
           <p:cNvSpPr txBox="1"/>
           <p:nvPr/>
         </p:nvSpPr>
@@ -13944,14 +13321,14 @@
       </p:sp>
       <p:sp>
         <p:nvSpPr>
-          <p:cNvPr id="15" name="TextBox 14"/>
+          <p:cNvPr id="12" name="TextBox 11"/>
           <p:cNvSpPr txBox="1"/>
           <p:nvPr/>
         </p:nvSpPr>
         <p:spPr>
           <a:xfrm>
-            <a:off x="10607040" y="6565392"/>
-            <a:ext cx="822960" cy="274320"/>
+            <a:off x="10058400" y="6565392"/>
+            <a:ext cx="1371600" cy="274320"/>
           </a:xfrm>
           <a:prstGeom prst="rect">
             <a:avLst/>
@@ -13978,7 +13355,7 @@
                 <a:ea typeface="微软雅黑"/>
                 <a:cs typeface="微软雅黑"/>
               </a:rPr>
-              <a:t>8 / 8</a:t>
+              <a:t>8 / 11</a:t>
             </a:r>
           </a:p>
         </p:txBody>
@@ -14081,21 +13458,65 @@
                 <a:ea typeface="微软雅黑"/>
                 <a:cs typeface="微软雅黑"/>
               </a:rPr>
-              <a:t>备用：为什么规则为主、大模型为辅</a:t>
-            </a:r>
-          </a:p>
-        </p:txBody>
-      </p:sp>
-      <p:sp>
-        <p:nvSpPr>
-          <p:cNvPr id="4" name="TextBox 3"/>
+              <a:t>现在能用的功能</a:t>
+            </a:r>
+          </a:p>
+        </p:txBody>
+      </p:sp>
+      <p:sp>
+        <p:nvSpPr>
+          <p:cNvPr id="4" name="Rounded Rectangle 3"/>
+          <p:cNvSpPr/>
+          <p:nvPr/>
+        </p:nvSpPr>
+        <p:spPr>
+          <a:xfrm>
+            <a:off x="868680" y="1737360"/>
+            <a:ext cx="5120640" cy="960120"/>
+          </a:xfrm>
+          <a:prstGeom prst="roundRect">
+            <a:avLst/>
+          </a:prstGeom>
+          <a:solidFill>
+            <a:srgbClr val="F2F5FB"/>
+          </a:solidFill>
+          <a:ln>
+            <a:noFill/>
+          </a:ln>
+          <a:effectLst/>
+        </p:spPr>
+        <p:style>
+          <a:lnRef idx="1">
+            <a:schemeClr val="accent1"/>
+          </a:lnRef>
+          <a:fillRef idx="3">
+            <a:schemeClr val="accent1"/>
+          </a:fillRef>
+          <a:effectRef idx="2">
+            <a:schemeClr val="accent1"/>
+          </a:effectRef>
+          <a:fontRef idx="minor">
+            <a:schemeClr val="lt1"/>
+          </a:fontRef>
+        </p:style>
+        <p:txBody>
+          <a:bodyPr rtlCol="0" anchor="ctr"/>
+          <a:lstStyle/>
+          <a:p>
+            <a:pPr algn="ctr"/>
+          </a:p>
+        </p:txBody>
+      </p:sp>
+      <p:sp>
+        <p:nvSpPr>
+          <p:cNvPr id="5" name="TextBox 4"/>
           <p:cNvSpPr txBox="1"/>
           <p:nvPr/>
         </p:nvSpPr>
         <p:spPr>
           <a:xfrm>
-            <a:off x="868680" y="1828800"/>
-            <a:ext cx="10424160" cy="2743200"/>
+            <a:off x="1097280" y="1847088"/>
+            <a:ext cx="1463040" cy="731520"/>
           </a:xfrm>
           <a:prstGeom prst="rect">
             <a:avLst/>
@@ -14110,87 +13531,33 @@
           <a:p>
             <a:pPr algn="l">
               <a:lnSpc>
-                <a:spcPct val="150000"/>
-              </a:lnSpc>
-            </a:pPr>
-            <a:r>
-              <a:rPr sz="2600" b="0">
-                <a:solidFill>
-                  <a:srgbClr val="1B2233"/>
-                </a:solidFill>
-                <a:latin typeface="微软雅黑"/>
-                <a:ea typeface="微软雅黑"/>
-                <a:cs typeface="微软雅黑"/>
-              </a:rPr>
-              <a:t>接了 DeepSeek，但四个 LLM 开关默认关</a:t>
-            </a:r>
-          </a:p>
-          <a:p>
-            <a:pPr algn="l">
-              <a:lnSpc>
-                <a:spcPct val="150000"/>
-              </a:lnSpc>
-            </a:pPr>
-            <a:r>
-              <a:rPr sz="2600" b="0">
-                <a:solidFill>
-                  <a:srgbClr val="1B2233"/>
-                </a:solidFill>
-                <a:latin typeface="微软雅黑"/>
-                <a:ea typeface="微软雅黑"/>
-                <a:cs typeface="微软雅黑"/>
-              </a:rPr>
-              <a:t>意图识别 / 追问补全 / 政策生成 → 大模型</a:t>
-            </a:r>
-          </a:p>
-          <a:p>
-            <a:pPr algn="l">
-              <a:lnSpc>
-                <a:spcPct val="150000"/>
-              </a:lnSpc>
-            </a:pPr>
-            <a:r>
-              <a:rPr sz="2600" b="0">
-                <a:solidFill>
-                  <a:srgbClr val="1B2233"/>
-                </a:solidFill>
-                <a:latin typeface="微软雅黑"/>
-                <a:ea typeface="微软雅黑"/>
-                <a:cs typeface="微软雅黑"/>
-              </a:rPr>
-              <a:t>状态机 / 派单 / 权限 / 加密 → 永远走规则</a:t>
-            </a:r>
-          </a:p>
-          <a:p>
-            <a:pPr algn="l">
-              <a:lnSpc>
-                <a:spcPct val="150000"/>
-              </a:lnSpc>
-            </a:pPr>
-            <a:r>
-              <a:rPr sz="2600" b="0">
-                <a:solidFill>
-                  <a:srgbClr val="1B2233"/>
-                </a:solidFill>
-                <a:latin typeface="微软雅黑"/>
-                <a:ea typeface="微软雅黑"/>
-                <a:cs typeface="微软雅黑"/>
-              </a:rPr>
-              <a:t>每次调用 3–5 秒超时，自动回落规则</a:t>
-            </a:r>
-          </a:p>
-        </p:txBody>
-      </p:sp>
-      <p:sp>
-        <p:nvSpPr>
-          <p:cNvPr id="5" name="TextBox 4"/>
+                <a:spcPct val="125000"/>
+              </a:lnSpc>
+            </a:pPr>
+            <a:r>
+              <a:rPr sz="2000" b="1">
+                <a:solidFill>
+                  <a:srgbClr val="122A51"/>
+                </a:solidFill>
+                <a:latin typeface="微软雅黑"/>
+                <a:ea typeface="微软雅黑"/>
+                <a:cs typeface="微软雅黑"/>
+              </a:rPr>
+              <a:t>报修</a:t>
+            </a:r>
+          </a:p>
+        </p:txBody>
+      </p:sp>
+      <p:sp>
+        <p:nvSpPr>
+          <p:cNvPr id="6" name="TextBox 5"/>
           <p:cNvSpPr txBox="1"/>
           <p:nvPr/>
         </p:nvSpPr>
         <p:spPr>
           <a:xfrm>
-            <a:off x="868680" y="5852160"/>
-            <a:ext cx="10424160" cy="548640"/>
+            <a:off x="2606039" y="1901952"/>
+            <a:ext cx="3200400" cy="731520"/>
           </a:xfrm>
           <a:prstGeom prst="rect">
             <a:avLst/>
@@ -14209,7 +13576,974 @@
               </a:lnSpc>
             </a:pPr>
             <a:r>
-              <a:rPr sz="2000" b="0">
+              <a:rPr sz="1500" b="0">
+                <a:solidFill>
+                  <a:srgbClr val="1B2233"/>
+                </a:solidFill>
+                <a:latin typeface="微软雅黑"/>
+                <a:ea typeface="微软雅黑"/>
+                <a:cs typeface="微软雅黑"/>
+              </a:rPr>
+              <a:t>全状态机：提交 → 审核 → 派单 → 处理 → 办结 → 回访</a:t>
+            </a:r>
+          </a:p>
+        </p:txBody>
+      </p:sp>
+      <p:sp>
+        <p:nvSpPr>
+          <p:cNvPr id="7" name="Rounded Rectangle 6"/>
+          <p:cNvSpPr/>
+          <p:nvPr/>
+        </p:nvSpPr>
+        <p:spPr>
+          <a:xfrm>
+            <a:off x="6355080" y="1737360"/>
+            <a:ext cx="5120640" cy="960120"/>
+          </a:xfrm>
+          <a:prstGeom prst="roundRect">
+            <a:avLst/>
+          </a:prstGeom>
+          <a:solidFill>
+            <a:srgbClr val="F2F5FB"/>
+          </a:solidFill>
+          <a:ln>
+            <a:noFill/>
+          </a:ln>
+          <a:effectLst/>
+        </p:spPr>
+        <p:style>
+          <a:lnRef idx="1">
+            <a:schemeClr val="accent1"/>
+          </a:lnRef>
+          <a:fillRef idx="3">
+            <a:schemeClr val="accent1"/>
+          </a:fillRef>
+          <a:effectRef idx="2">
+            <a:schemeClr val="accent1"/>
+          </a:effectRef>
+          <a:fontRef idx="minor">
+            <a:schemeClr val="lt1"/>
+          </a:fontRef>
+        </p:style>
+        <p:txBody>
+          <a:bodyPr rtlCol="0" anchor="ctr"/>
+          <a:lstStyle/>
+          <a:p>
+            <a:pPr algn="ctr"/>
+          </a:p>
+        </p:txBody>
+      </p:sp>
+      <p:sp>
+        <p:nvSpPr>
+          <p:cNvPr id="8" name="TextBox 7"/>
+          <p:cNvSpPr txBox="1"/>
+          <p:nvPr/>
+        </p:nvSpPr>
+        <p:spPr>
+          <a:xfrm>
+            <a:off x="6583680" y="1847088"/>
+            <a:ext cx="1463040" cy="731520"/>
+          </a:xfrm>
+          <a:prstGeom prst="rect">
+            <a:avLst/>
+          </a:prstGeom>
+          <a:noFill/>
+        </p:spPr>
+        <p:txBody>
+          <a:bodyPr wrap="square">
+            <a:spAutoFit/>
+          </a:bodyPr>
+          <a:lstStyle/>
+          <a:p>
+            <a:pPr algn="l">
+              <a:lnSpc>
+                <a:spcPct val="125000"/>
+              </a:lnSpc>
+            </a:pPr>
+            <a:r>
+              <a:rPr sz="2000" b="1">
+                <a:solidFill>
+                  <a:srgbClr val="122A51"/>
+                </a:solidFill>
+                <a:latin typeface="微软雅黑"/>
+                <a:ea typeface="微软雅黑"/>
+                <a:cs typeface="微软雅黑"/>
+              </a:rPr>
+              <a:t>提案</a:t>
+            </a:r>
+          </a:p>
+        </p:txBody>
+      </p:sp>
+      <p:sp>
+        <p:nvSpPr>
+          <p:cNvPr id="9" name="TextBox 8"/>
+          <p:cNvSpPr txBox="1"/>
+          <p:nvPr/>
+        </p:nvSpPr>
+        <p:spPr>
+          <a:xfrm>
+            <a:off x="8092440" y="1901952"/>
+            <a:ext cx="3200400" cy="731520"/>
+          </a:xfrm>
+          <a:prstGeom prst="rect">
+            <a:avLst/>
+          </a:prstGeom>
+          <a:noFill/>
+        </p:spPr>
+        <p:txBody>
+          <a:bodyPr wrap="square">
+            <a:spAutoFit/>
+          </a:bodyPr>
+          <a:lstStyle/>
+          <a:p>
+            <a:pPr algn="l">
+              <a:lnSpc>
+                <a:spcPct val="125000"/>
+              </a:lnSpc>
+            </a:pPr>
+            <a:r>
+              <a:rPr sz="1500" b="0">
+                <a:solidFill>
+                  <a:srgbClr val="1B2233"/>
+                </a:solidFill>
+                <a:latin typeface="微软雅黑"/>
+                <a:ea typeface="微软雅黑"/>
+                <a:cs typeface="微软雅黑"/>
+              </a:rPr>
+              <a:t>全生命周期：提交 → 附议 → 回应 → 采纳 → 实施</a:t>
+            </a:r>
+          </a:p>
+        </p:txBody>
+      </p:sp>
+      <p:sp>
+        <p:nvSpPr>
+          <p:cNvPr id="10" name="Rounded Rectangle 9"/>
+          <p:cNvSpPr/>
+          <p:nvPr/>
+        </p:nvSpPr>
+        <p:spPr>
+          <a:xfrm>
+            <a:off x="868680" y="2880360"/>
+            <a:ext cx="5120640" cy="960120"/>
+          </a:xfrm>
+          <a:prstGeom prst="roundRect">
+            <a:avLst/>
+          </a:prstGeom>
+          <a:solidFill>
+            <a:srgbClr val="F2F5FB"/>
+          </a:solidFill>
+          <a:ln>
+            <a:noFill/>
+          </a:ln>
+          <a:effectLst/>
+        </p:spPr>
+        <p:style>
+          <a:lnRef idx="1">
+            <a:schemeClr val="accent1"/>
+          </a:lnRef>
+          <a:fillRef idx="3">
+            <a:schemeClr val="accent1"/>
+          </a:fillRef>
+          <a:effectRef idx="2">
+            <a:schemeClr val="accent1"/>
+          </a:effectRef>
+          <a:fontRef idx="minor">
+            <a:schemeClr val="lt1"/>
+          </a:fontRef>
+        </p:style>
+        <p:txBody>
+          <a:bodyPr rtlCol="0" anchor="ctr"/>
+          <a:lstStyle/>
+          <a:p>
+            <a:pPr algn="ctr"/>
+          </a:p>
+        </p:txBody>
+      </p:sp>
+      <p:sp>
+        <p:nvSpPr>
+          <p:cNvPr id="11" name="TextBox 10"/>
+          <p:cNvSpPr txBox="1"/>
+          <p:nvPr/>
+        </p:nvSpPr>
+        <p:spPr>
+          <a:xfrm>
+            <a:off x="1097280" y="2990088"/>
+            <a:ext cx="1463040" cy="731520"/>
+          </a:xfrm>
+          <a:prstGeom prst="rect">
+            <a:avLst/>
+          </a:prstGeom>
+          <a:noFill/>
+        </p:spPr>
+        <p:txBody>
+          <a:bodyPr wrap="square">
+            <a:spAutoFit/>
+          </a:bodyPr>
+          <a:lstStyle/>
+          <a:p>
+            <a:pPr algn="l">
+              <a:lnSpc>
+                <a:spcPct val="125000"/>
+              </a:lnSpc>
+            </a:pPr>
+            <a:r>
+              <a:rPr sz="2000" b="1">
+                <a:solidFill>
+                  <a:srgbClr val="122A51"/>
+                </a:solidFill>
+                <a:latin typeface="微软雅黑"/>
+                <a:ea typeface="微软雅黑"/>
+                <a:cs typeface="微软雅黑"/>
+              </a:rPr>
+              <a:t>通知</a:t>
+            </a:r>
+          </a:p>
+        </p:txBody>
+      </p:sp>
+      <p:sp>
+        <p:nvSpPr>
+          <p:cNvPr id="12" name="TextBox 11"/>
+          <p:cNvSpPr txBox="1"/>
+          <p:nvPr/>
+        </p:nvSpPr>
+        <p:spPr>
+          <a:xfrm>
+            <a:off x="2606039" y="3044952"/>
+            <a:ext cx="3200400" cy="731520"/>
+          </a:xfrm>
+          <a:prstGeom prst="rect">
+            <a:avLst/>
+          </a:prstGeom>
+          <a:noFill/>
+        </p:spPr>
+        <p:txBody>
+          <a:bodyPr wrap="square">
+            <a:spAutoFit/>
+          </a:bodyPr>
+          <a:lstStyle/>
+          <a:p>
+            <a:pPr algn="l">
+              <a:lnSpc>
+                <a:spcPct val="125000"/>
+              </a:lnSpc>
+            </a:pPr>
+            <a:r>
+              <a:rPr sz="1500" b="0">
+                <a:solidFill>
+                  <a:srgbClr val="1B2233"/>
+                </a:solidFill>
+                <a:latin typeface="微软雅黑"/>
+                <a:ea typeface="微软雅黑"/>
+                <a:cs typeface="微软雅黑"/>
+              </a:rPr>
+              <a:t>普通 / 紧急 / 定时 / 已读回执</a:t>
+            </a:r>
+          </a:p>
+        </p:txBody>
+      </p:sp>
+      <p:sp>
+        <p:nvSpPr>
+          <p:cNvPr id="13" name="Rounded Rectangle 12"/>
+          <p:cNvSpPr/>
+          <p:nvPr/>
+        </p:nvSpPr>
+        <p:spPr>
+          <a:xfrm>
+            <a:off x="6355080" y="2880360"/>
+            <a:ext cx="5120640" cy="960120"/>
+          </a:xfrm>
+          <a:prstGeom prst="roundRect">
+            <a:avLst/>
+          </a:prstGeom>
+          <a:solidFill>
+            <a:srgbClr val="F2F5FB"/>
+          </a:solidFill>
+          <a:ln>
+            <a:noFill/>
+          </a:ln>
+          <a:effectLst/>
+        </p:spPr>
+        <p:style>
+          <a:lnRef idx="1">
+            <a:schemeClr val="accent1"/>
+          </a:lnRef>
+          <a:fillRef idx="3">
+            <a:schemeClr val="accent1"/>
+          </a:fillRef>
+          <a:effectRef idx="2">
+            <a:schemeClr val="accent1"/>
+          </a:effectRef>
+          <a:fontRef idx="minor">
+            <a:schemeClr val="lt1"/>
+          </a:fontRef>
+        </p:style>
+        <p:txBody>
+          <a:bodyPr rtlCol="0" anchor="ctr"/>
+          <a:lstStyle/>
+          <a:p>
+            <a:pPr algn="ctr"/>
+          </a:p>
+        </p:txBody>
+      </p:sp>
+      <p:sp>
+        <p:nvSpPr>
+          <p:cNvPr id="14" name="TextBox 13"/>
+          <p:cNvSpPr txBox="1"/>
+          <p:nvPr/>
+        </p:nvSpPr>
+        <p:spPr>
+          <a:xfrm>
+            <a:off x="6583680" y="2990088"/>
+            <a:ext cx="1463040" cy="731520"/>
+          </a:xfrm>
+          <a:prstGeom prst="rect">
+            <a:avLst/>
+          </a:prstGeom>
+          <a:noFill/>
+        </p:spPr>
+        <p:txBody>
+          <a:bodyPr wrap="square">
+            <a:spAutoFit/>
+          </a:bodyPr>
+          <a:lstStyle/>
+          <a:p>
+            <a:pPr algn="l">
+              <a:lnSpc>
+                <a:spcPct val="125000"/>
+              </a:lnSpc>
+            </a:pPr>
+            <a:r>
+              <a:rPr sz="2000" b="1">
+                <a:solidFill>
+                  <a:srgbClr val="122A51"/>
+                </a:solidFill>
+                <a:latin typeface="微软雅黑"/>
+                <a:ea typeface="微软雅黑"/>
+                <a:cs typeface="微软雅黑"/>
+              </a:rPr>
+              <a:t>政策问答</a:t>
+            </a:r>
+          </a:p>
+        </p:txBody>
+      </p:sp>
+      <p:sp>
+        <p:nvSpPr>
+          <p:cNvPr id="15" name="TextBox 14"/>
+          <p:cNvSpPr txBox="1"/>
+          <p:nvPr/>
+        </p:nvSpPr>
+        <p:spPr>
+          <a:xfrm>
+            <a:off x="8092440" y="3044952"/>
+            <a:ext cx="3200400" cy="731520"/>
+          </a:xfrm>
+          <a:prstGeom prst="rect">
+            <a:avLst/>
+          </a:prstGeom>
+          <a:noFill/>
+        </p:spPr>
+        <p:txBody>
+          <a:bodyPr wrap="square">
+            <a:spAutoFit/>
+          </a:bodyPr>
+          <a:lstStyle/>
+          <a:p>
+            <a:pPr algn="l">
+              <a:lnSpc>
+                <a:spcPct val="125000"/>
+              </a:lnSpc>
+            </a:pPr>
+            <a:r>
+              <a:rPr sz="1500" b="0">
+                <a:solidFill>
+                  <a:srgbClr val="1B2233"/>
+                </a:solidFill>
+                <a:latin typeface="微软雅黑"/>
+                <a:ea typeface="微软雅黑"/>
+                <a:cs typeface="微软雅黑"/>
+              </a:rPr>
+              <a:t>答案带出处；检索无结果就转人工</a:t>
+            </a:r>
+          </a:p>
+        </p:txBody>
+      </p:sp>
+      <p:sp>
+        <p:nvSpPr>
+          <p:cNvPr id="16" name="Rounded Rectangle 15"/>
+          <p:cNvSpPr/>
+          <p:nvPr/>
+        </p:nvSpPr>
+        <p:spPr>
+          <a:xfrm>
+            <a:off x="868680" y="4023360"/>
+            <a:ext cx="5120640" cy="960120"/>
+          </a:xfrm>
+          <a:prstGeom prst="roundRect">
+            <a:avLst/>
+          </a:prstGeom>
+          <a:solidFill>
+            <a:srgbClr val="F2F5FB"/>
+          </a:solidFill>
+          <a:ln>
+            <a:noFill/>
+          </a:ln>
+          <a:effectLst/>
+        </p:spPr>
+        <p:style>
+          <a:lnRef idx="1">
+            <a:schemeClr val="accent1"/>
+          </a:lnRef>
+          <a:fillRef idx="3">
+            <a:schemeClr val="accent1"/>
+          </a:fillRef>
+          <a:effectRef idx="2">
+            <a:schemeClr val="accent1"/>
+          </a:effectRef>
+          <a:fontRef idx="minor">
+            <a:schemeClr val="lt1"/>
+          </a:fontRef>
+        </p:style>
+        <p:txBody>
+          <a:bodyPr rtlCol="0" anchor="ctr"/>
+          <a:lstStyle/>
+          <a:p>
+            <a:pPr algn="ctr"/>
+          </a:p>
+        </p:txBody>
+      </p:sp>
+      <p:sp>
+        <p:nvSpPr>
+          <p:cNvPr id="17" name="TextBox 16"/>
+          <p:cNvSpPr txBox="1"/>
+          <p:nvPr/>
+        </p:nvSpPr>
+        <p:spPr>
+          <a:xfrm>
+            <a:off x="1097280" y="4133088"/>
+            <a:ext cx="1463040" cy="731520"/>
+          </a:xfrm>
+          <a:prstGeom prst="rect">
+            <a:avLst/>
+          </a:prstGeom>
+          <a:noFill/>
+        </p:spPr>
+        <p:txBody>
+          <a:bodyPr wrap="square">
+            <a:spAutoFit/>
+          </a:bodyPr>
+          <a:lstStyle/>
+          <a:p>
+            <a:pPr algn="l">
+              <a:lnSpc>
+                <a:spcPct val="125000"/>
+              </a:lnSpc>
+            </a:pPr>
+            <a:r>
+              <a:rPr sz="2000" b="1">
+                <a:solidFill>
+                  <a:srgbClr val="122A51"/>
+                </a:solidFill>
+                <a:latin typeface="微软雅黑"/>
+                <a:ea typeface="微软雅黑"/>
+                <a:cs typeface="微软雅黑"/>
+              </a:rPr>
+              <a:t>健康咨询</a:t>
+            </a:r>
+          </a:p>
+        </p:txBody>
+      </p:sp>
+      <p:sp>
+        <p:nvSpPr>
+          <p:cNvPr id="18" name="TextBox 17"/>
+          <p:cNvSpPr txBox="1"/>
+          <p:nvPr/>
+        </p:nvSpPr>
+        <p:spPr>
+          <a:xfrm>
+            <a:off x="2606039" y="4187952"/>
+            <a:ext cx="3200400" cy="731520"/>
+          </a:xfrm>
+          <a:prstGeom prst="rect">
+            <a:avLst/>
+          </a:prstGeom>
+          <a:noFill/>
+        </p:spPr>
+        <p:txBody>
+          <a:bodyPr wrap="square">
+            <a:spAutoFit/>
+          </a:bodyPr>
+          <a:lstStyle/>
+          <a:p>
+            <a:pPr algn="l">
+              <a:lnSpc>
+                <a:spcPct val="125000"/>
+              </a:lnSpc>
+            </a:pPr>
+            <a:r>
+              <a:rPr sz="1500" b="0">
+                <a:solidFill>
+                  <a:srgbClr val="1B2233"/>
+                </a:solidFill>
+                <a:latin typeface="微软雅黑"/>
+                <a:ea typeface="微软雅黑"/>
+                <a:cs typeface="微软雅黑"/>
+              </a:rPr>
+              <a:t>只给建议，紧急情况转人工（不做诊断）</a:t>
+            </a:r>
+          </a:p>
+        </p:txBody>
+      </p:sp>
+      <p:sp>
+        <p:nvSpPr>
+          <p:cNvPr id="19" name="Rounded Rectangle 18"/>
+          <p:cNvSpPr/>
+          <p:nvPr/>
+        </p:nvSpPr>
+        <p:spPr>
+          <a:xfrm>
+            <a:off x="6355080" y="4023360"/>
+            <a:ext cx="5120640" cy="960120"/>
+          </a:xfrm>
+          <a:prstGeom prst="roundRect">
+            <a:avLst/>
+          </a:prstGeom>
+          <a:solidFill>
+            <a:srgbClr val="F2F5FB"/>
+          </a:solidFill>
+          <a:ln>
+            <a:noFill/>
+          </a:ln>
+          <a:effectLst/>
+        </p:spPr>
+        <p:style>
+          <a:lnRef idx="1">
+            <a:schemeClr val="accent1"/>
+          </a:lnRef>
+          <a:fillRef idx="3">
+            <a:schemeClr val="accent1"/>
+          </a:fillRef>
+          <a:effectRef idx="2">
+            <a:schemeClr val="accent1"/>
+          </a:effectRef>
+          <a:fontRef idx="minor">
+            <a:schemeClr val="lt1"/>
+          </a:fontRef>
+        </p:style>
+        <p:txBody>
+          <a:bodyPr rtlCol="0" anchor="ctr"/>
+          <a:lstStyle/>
+          <a:p>
+            <a:pPr algn="ctr"/>
+          </a:p>
+        </p:txBody>
+      </p:sp>
+      <p:sp>
+        <p:nvSpPr>
+          <p:cNvPr id="20" name="TextBox 19"/>
+          <p:cNvSpPr txBox="1"/>
+          <p:nvPr/>
+        </p:nvSpPr>
+        <p:spPr>
+          <a:xfrm>
+            <a:off x="6583680" y="4133088"/>
+            <a:ext cx="1463040" cy="731520"/>
+          </a:xfrm>
+          <a:prstGeom prst="rect">
+            <a:avLst/>
+          </a:prstGeom>
+          <a:noFill/>
+        </p:spPr>
+        <p:txBody>
+          <a:bodyPr wrap="square">
+            <a:spAutoFit/>
+          </a:bodyPr>
+          <a:lstStyle/>
+          <a:p>
+            <a:pPr algn="l">
+              <a:lnSpc>
+                <a:spcPct val="125000"/>
+              </a:lnSpc>
+            </a:pPr>
+            <a:r>
+              <a:rPr sz="2000" b="1">
+                <a:solidFill>
+                  <a:srgbClr val="122A51"/>
+                </a:solidFill>
+                <a:latin typeface="微软雅黑"/>
+                <a:ea typeface="微软雅黑"/>
+                <a:cs typeface="微软雅黑"/>
+              </a:rPr>
+              <a:t>天气联动</a:t>
+            </a:r>
+          </a:p>
+        </p:txBody>
+      </p:sp>
+      <p:sp>
+        <p:nvSpPr>
+          <p:cNvPr id="21" name="TextBox 20"/>
+          <p:cNvSpPr txBox="1"/>
+          <p:nvPr/>
+        </p:nvSpPr>
+        <p:spPr>
+          <a:xfrm>
+            <a:off x="8092440" y="4187952"/>
+            <a:ext cx="3200400" cy="731520"/>
+          </a:xfrm>
+          <a:prstGeom prst="rect">
+            <a:avLst/>
+          </a:prstGeom>
+          <a:noFill/>
+        </p:spPr>
+        <p:txBody>
+          <a:bodyPr wrap="square">
+            <a:spAutoFit/>
+          </a:bodyPr>
+          <a:lstStyle/>
+          <a:p>
+            <a:pPr algn="l">
+              <a:lnSpc>
+                <a:spcPct val="125000"/>
+              </a:lnSpc>
+            </a:pPr>
+            <a:r>
+              <a:rPr sz="1500" b="0">
+                <a:solidFill>
+                  <a:srgbClr val="1B2233"/>
+                </a:solidFill>
+                <a:latin typeface="微软雅黑"/>
+                <a:ea typeface="微软雅黑"/>
+                <a:cs typeface="微软雅黑"/>
+              </a:rPr>
+              <a:t>极端天气 → 健康防护建议 → 自动发通知</a:t>
+            </a:r>
+          </a:p>
+        </p:txBody>
+      </p:sp>
+      <p:sp>
+        <p:nvSpPr>
+          <p:cNvPr id="22" name="Rounded Rectangle 21"/>
+          <p:cNvSpPr/>
+          <p:nvPr/>
+        </p:nvSpPr>
+        <p:spPr>
+          <a:xfrm>
+            <a:off x="868680" y="5166360"/>
+            <a:ext cx="5120640" cy="960120"/>
+          </a:xfrm>
+          <a:prstGeom prst="roundRect">
+            <a:avLst/>
+          </a:prstGeom>
+          <a:solidFill>
+            <a:srgbClr val="F2F5FB"/>
+          </a:solidFill>
+          <a:ln>
+            <a:noFill/>
+          </a:ln>
+          <a:effectLst/>
+        </p:spPr>
+        <p:style>
+          <a:lnRef idx="1">
+            <a:schemeClr val="accent1"/>
+          </a:lnRef>
+          <a:fillRef idx="3">
+            <a:schemeClr val="accent1"/>
+          </a:fillRef>
+          <a:effectRef idx="2">
+            <a:schemeClr val="accent1"/>
+          </a:effectRef>
+          <a:fontRef idx="minor">
+            <a:schemeClr val="lt1"/>
+          </a:fontRef>
+        </p:style>
+        <p:txBody>
+          <a:bodyPr rtlCol="0" anchor="ctr"/>
+          <a:lstStyle/>
+          <a:p>
+            <a:pPr algn="ctr"/>
+          </a:p>
+        </p:txBody>
+      </p:sp>
+      <p:sp>
+        <p:nvSpPr>
+          <p:cNvPr id="23" name="TextBox 22"/>
+          <p:cNvSpPr txBox="1"/>
+          <p:nvPr/>
+        </p:nvSpPr>
+        <p:spPr>
+          <a:xfrm>
+            <a:off x="1097280" y="5276088"/>
+            <a:ext cx="1463040" cy="731520"/>
+          </a:xfrm>
+          <a:prstGeom prst="rect">
+            <a:avLst/>
+          </a:prstGeom>
+          <a:noFill/>
+        </p:spPr>
+        <p:txBody>
+          <a:bodyPr wrap="square">
+            <a:spAutoFit/>
+          </a:bodyPr>
+          <a:lstStyle/>
+          <a:p>
+            <a:pPr algn="l">
+              <a:lnSpc>
+                <a:spcPct val="125000"/>
+              </a:lnSpc>
+            </a:pPr>
+            <a:r>
+              <a:rPr sz="2000" b="1">
+                <a:solidFill>
+                  <a:srgbClr val="122A51"/>
+                </a:solidFill>
+                <a:latin typeface="微软雅黑"/>
+                <a:ea typeface="微软雅黑"/>
+                <a:cs typeface="微软雅黑"/>
+              </a:rPr>
+              <a:t>网格员工作台</a:t>
+            </a:r>
+          </a:p>
+        </p:txBody>
+      </p:sp>
+      <p:sp>
+        <p:nvSpPr>
+          <p:cNvPr id="24" name="TextBox 23"/>
+          <p:cNvSpPr txBox="1"/>
+          <p:nvPr/>
+        </p:nvSpPr>
+        <p:spPr>
+          <a:xfrm>
+            <a:off x="2606039" y="5330952"/>
+            <a:ext cx="3200400" cy="731520"/>
+          </a:xfrm>
+          <a:prstGeom prst="rect">
+            <a:avLst/>
+          </a:prstGeom>
+          <a:noFill/>
+        </p:spPr>
+        <p:txBody>
+          <a:bodyPr wrap="square">
+            <a:spAutoFit/>
+          </a:bodyPr>
+          <a:lstStyle/>
+          <a:p>
+            <a:pPr algn="l">
+              <a:lnSpc>
+                <a:spcPct val="125000"/>
+              </a:lnSpc>
+            </a:pPr>
+            <a:r>
+              <a:rPr sz="1500" b="0">
+                <a:solidFill>
+                  <a:srgbClr val="1B2233"/>
+                </a:solidFill>
+                <a:latin typeface="微软雅黑"/>
+                <a:ea typeface="微软雅黑"/>
+                <a:cs typeface="微软雅黑"/>
+              </a:rPr>
+              <a:t>AI 助手、待办、统计导出</a:t>
+            </a:r>
+          </a:p>
+        </p:txBody>
+      </p:sp>
+      <p:sp>
+        <p:nvSpPr>
+          <p:cNvPr id="25" name="Rounded Rectangle 24"/>
+          <p:cNvSpPr/>
+          <p:nvPr/>
+        </p:nvSpPr>
+        <p:spPr>
+          <a:xfrm>
+            <a:off x="6355080" y="5166360"/>
+            <a:ext cx="5120640" cy="960120"/>
+          </a:xfrm>
+          <a:prstGeom prst="roundRect">
+            <a:avLst/>
+          </a:prstGeom>
+          <a:solidFill>
+            <a:srgbClr val="F2F5FB"/>
+          </a:solidFill>
+          <a:ln>
+            <a:noFill/>
+          </a:ln>
+          <a:effectLst/>
+        </p:spPr>
+        <p:style>
+          <a:lnRef idx="1">
+            <a:schemeClr val="accent1"/>
+          </a:lnRef>
+          <a:fillRef idx="3">
+            <a:schemeClr val="accent1"/>
+          </a:fillRef>
+          <a:effectRef idx="2">
+            <a:schemeClr val="accent1"/>
+          </a:effectRef>
+          <a:fontRef idx="minor">
+            <a:schemeClr val="lt1"/>
+          </a:fontRef>
+        </p:style>
+        <p:txBody>
+          <a:bodyPr rtlCol="0" anchor="ctr"/>
+          <a:lstStyle/>
+          <a:p>
+            <a:pPr algn="ctr"/>
+          </a:p>
+        </p:txBody>
+      </p:sp>
+      <p:sp>
+        <p:nvSpPr>
+          <p:cNvPr id="26" name="TextBox 25"/>
+          <p:cNvSpPr txBox="1"/>
+          <p:nvPr/>
+        </p:nvSpPr>
+        <p:spPr>
+          <a:xfrm>
+            <a:off x="6583680" y="5276088"/>
+            <a:ext cx="1463040" cy="731520"/>
+          </a:xfrm>
+          <a:prstGeom prst="rect">
+            <a:avLst/>
+          </a:prstGeom>
+          <a:noFill/>
+        </p:spPr>
+        <p:txBody>
+          <a:bodyPr wrap="square">
+            <a:spAutoFit/>
+          </a:bodyPr>
+          <a:lstStyle/>
+          <a:p>
+            <a:pPr algn="l">
+              <a:lnSpc>
+                <a:spcPct val="125000"/>
+              </a:lnSpc>
+            </a:pPr>
+            <a:r>
+              <a:rPr sz="2000" b="1">
+                <a:solidFill>
+                  <a:srgbClr val="122A51"/>
+                </a:solidFill>
+                <a:latin typeface="微软雅黑"/>
+                <a:ea typeface="微软雅黑"/>
+                <a:cs typeface="微软雅黑"/>
+              </a:rPr>
+              <a:t>转人工</a:t>
+            </a:r>
+          </a:p>
+        </p:txBody>
+      </p:sp>
+      <p:sp>
+        <p:nvSpPr>
+          <p:cNvPr id="27" name="TextBox 26"/>
+          <p:cNvSpPr txBox="1"/>
+          <p:nvPr/>
+        </p:nvSpPr>
+        <p:spPr>
+          <a:xfrm>
+            <a:off x="8092440" y="5330952"/>
+            <a:ext cx="3200400" cy="731520"/>
+          </a:xfrm>
+          <a:prstGeom prst="rect">
+            <a:avLst/>
+          </a:prstGeom>
+          <a:noFill/>
+        </p:spPr>
+        <p:txBody>
+          <a:bodyPr wrap="square">
+            <a:spAutoFit/>
+          </a:bodyPr>
+          <a:lstStyle/>
+          <a:p>
+            <a:pPr algn="l">
+              <a:lnSpc>
+                <a:spcPct val="125000"/>
+              </a:lnSpc>
+            </a:pPr>
+            <a:r>
+              <a:rPr sz="1500" b="0">
+                <a:solidFill>
+                  <a:srgbClr val="1B2233"/>
+                </a:solidFill>
+                <a:latin typeface="微软雅黑"/>
+                <a:ea typeface="微软雅黑"/>
+                <a:cs typeface="微软雅黑"/>
+              </a:rPr>
+              <a:t>带「处理包」：用户信息 + 执行链 + 待确认事项</a:t>
+            </a:r>
+          </a:p>
+        </p:txBody>
+      </p:sp>
+      <p:sp>
+        <p:nvSpPr>
+          <p:cNvPr id="28" name="Rectangle 27"/>
+          <p:cNvSpPr/>
+          <p:nvPr/>
+        </p:nvSpPr>
+        <p:spPr>
+          <a:xfrm>
+            <a:off x="548640" y="6510528"/>
+            <a:ext cx="10881360" cy="9525"/>
+          </a:xfrm>
+          <a:prstGeom prst="rect">
+            <a:avLst/>
+          </a:prstGeom>
+          <a:solidFill>
+            <a:srgbClr val="DDE3EE"/>
+          </a:solidFill>
+          <a:ln>
+            <a:noFill/>
+          </a:ln>
+          <a:effectLst/>
+        </p:spPr>
+        <p:style>
+          <a:lnRef idx="1">
+            <a:schemeClr val="accent1"/>
+          </a:lnRef>
+          <a:fillRef idx="3">
+            <a:schemeClr val="accent1"/>
+          </a:fillRef>
+          <a:effectRef idx="2">
+            <a:schemeClr val="accent1"/>
+          </a:effectRef>
+          <a:fontRef idx="minor">
+            <a:schemeClr val="lt1"/>
+          </a:fontRef>
+        </p:style>
+        <p:txBody>
+          <a:bodyPr rtlCol="0" anchor="ctr"/>
+          <a:lstStyle/>
+          <a:p>
+            <a:pPr algn="ctr"/>
+          </a:p>
+        </p:txBody>
+      </p:sp>
+      <p:sp>
+        <p:nvSpPr>
+          <p:cNvPr id="29" name="TextBox 28"/>
+          <p:cNvSpPr txBox="1"/>
+          <p:nvPr/>
+        </p:nvSpPr>
+        <p:spPr>
+          <a:xfrm>
+            <a:off x="548640" y="6565392"/>
+            <a:ext cx="7315200" cy="274320"/>
+          </a:xfrm>
+          <a:prstGeom prst="rect">
+            <a:avLst/>
+          </a:prstGeom>
+          <a:noFill/>
+        </p:spPr>
+        <p:txBody>
+          <a:bodyPr wrap="square">
+            <a:spAutoFit/>
+          </a:bodyPr>
+          <a:lstStyle/>
+          <a:p>
+            <a:pPr algn="l">
+              <a:lnSpc>
+                <a:spcPct val="125000"/>
+              </a:lnSpc>
+            </a:pPr>
+            <a:r>
+              <a:rPr sz="1100" b="0">
                 <a:solidFill>
                   <a:srgbClr val="6B7485"/>
                 </a:solidFill>
@@ -14217,7 +14551,48 @@
                 <a:ea typeface="微软雅黑"/>
                 <a:cs typeface="微软雅黑"/>
               </a:rPr>
-              <a:t>省成本，也保稳定——学生项目也养得起。</a:t>
+              <a:t>社区先知 CommunityInsight</a:t>
+            </a:r>
+          </a:p>
+        </p:txBody>
+      </p:sp>
+      <p:sp>
+        <p:nvSpPr>
+          <p:cNvPr id="30" name="TextBox 29"/>
+          <p:cNvSpPr txBox="1"/>
+          <p:nvPr/>
+        </p:nvSpPr>
+        <p:spPr>
+          <a:xfrm>
+            <a:off x="10058400" y="6565392"/>
+            <a:ext cx="1371600" cy="274320"/>
+          </a:xfrm>
+          <a:prstGeom prst="rect">
+            <a:avLst/>
+          </a:prstGeom>
+          <a:noFill/>
+        </p:spPr>
+        <p:txBody>
+          <a:bodyPr wrap="square">
+            <a:spAutoFit/>
+          </a:bodyPr>
+          <a:lstStyle/>
+          <a:p>
+            <a:pPr algn="r">
+              <a:lnSpc>
+                <a:spcPct val="125000"/>
+              </a:lnSpc>
+            </a:pPr>
+            <a:r>
+              <a:rPr sz="1100" b="0">
+                <a:solidFill>
+                  <a:srgbClr val="6B7485"/>
+                </a:solidFill>
+                <a:latin typeface="微软雅黑"/>
+                <a:ea typeface="微软雅黑"/>
+                <a:cs typeface="微软雅黑"/>
+              </a:rPr>
+              <a:t>9 / 11</a:t>
             </a:r>
           </a:p>
         </p:txBody>

--- a/docs/competition/9月22日路演-社区先知.pptx
+++ b/docs/competition/9月22日路演-社区先知.pptx
@@ -5384,7 +5384,7 @@
         </p:nvSpPr>
         <p:spPr>
           <a:xfrm>
-            <a:off x="548640" y="6565392"/>
+            <a:off x="548640" y="6547104"/>
             <a:ext cx="7315200" cy="274320"/>
           </a:xfrm>
           <a:prstGeom prst="rect">
@@ -5404,7 +5404,7 @@
               </a:lnSpc>
             </a:pPr>
             <a:r>
-              <a:rPr sz="1100" b="0">
+              <a:rPr sz="1200" b="0">
                 <a:solidFill>
                   <a:srgbClr val="6B7485"/>
                 </a:solidFill>
@@ -5425,7 +5425,7 @@
         </p:nvSpPr>
         <p:spPr>
           <a:xfrm>
-            <a:off x="10058400" y="6565392"/>
+            <a:off x="10058400" y="6547104"/>
             <a:ext cx="1371600" cy="274320"/>
           </a:xfrm>
           <a:prstGeom prst="rect">
@@ -5445,7 +5445,7 @@
               </a:lnSpc>
             </a:pPr>
             <a:r>
-              <a:rPr sz="1100" b="0">
+              <a:rPr sz="1200" b="0">
                 <a:solidFill>
                   <a:srgbClr val="6B7485"/>
                 </a:solidFill>
@@ -5985,7 +5985,7 @@
         </p:nvSpPr>
         <p:spPr>
           <a:xfrm>
-            <a:off x="548640" y="6565392"/>
+            <a:off x="548640" y="6547104"/>
             <a:ext cx="7315200" cy="274320"/>
           </a:xfrm>
           <a:prstGeom prst="rect">
@@ -6005,7 +6005,7 @@
               </a:lnSpc>
             </a:pPr>
             <a:r>
-              <a:rPr sz="1100" b="0">
+              <a:rPr sz="1200" b="0">
                 <a:solidFill>
                   <a:srgbClr val="6B7485"/>
                 </a:solidFill>
@@ -6026,7 +6026,7 @@
         </p:nvSpPr>
         <p:spPr>
           <a:xfrm>
-            <a:off x="10058400" y="6565392"/>
+            <a:off x="10058400" y="6547104"/>
             <a:ext cx="1371600" cy="274320"/>
           </a:xfrm>
           <a:prstGeom prst="rect">
@@ -6046,7 +6046,7 @@
               </a:lnSpc>
             </a:pPr>
             <a:r>
-              <a:rPr sz="1100" b="0">
+              <a:rPr sz="1200" b="0">
                 <a:solidFill>
                   <a:srgbClr val="6B7485"/>
                 </a:solidFill>
@@ -6748,7 +6748,7 @@
               </a:lnSpc>
             </a:pPr>
             <a:r>
-              <a:rPr sz="1800" b="0">
+              <a:rPr sz="1900" b="0">
                 <a:solidFill>
                   <a:srgbClr val="1B2233"/>
                 </a:solidFill>
@@ -6766,7 +6766,7 @@
               </a:lnSpc>
             </a:pPr>
             <a:r>
-              <a:rPr sz="1800" b="0">
+              <a:rPr sz="1900" b="0">
                 <a:solidFill>
                   <a:srgbClr val="1B2233"/>
                 </a:solidFill>
@@ -6784,7 +6784,7 @@
               </a:lnSpc>
             </a:pPr>
             <a:r>
-              <a:rPr sz="1800" b="0">
+              <a:rPr sz="1900" b="0">
                 <a:solidFill>
                   <a:srgbClr val="1B2233"/>
                 </a:solidFill>
@@ -6849,7 +6849,7 @@
         </p:nvSpPr>
         <p:spPr>
           <a:xfrm>
-            <a:off x="548640" y="6565392"/>
+            <a:off x="548640" y="6547104"/>
             <a:ext cx="7315200" cy="274320"/>
           </a:xfrm>
           <a:prstGeom prst="rect">
@@ -6869,7 +6869,7 @@
               </a:lnSpc>
             </a:pPr>
             <a:r>
-              <a:rPr sz="1100" b="0">
+              <a:rPr sz="1200" b="0">
                 <a:solidFill>
                   <a:srgbClr val="6B7485"/>
                 </a:solidFill>
@@ -6890,7 +6890,7 @@
         </p:nvSpPr>
         <p:spPr>
           <a:xfrm>
-            <a:off x="10058400" y="6565392"/>
+            <a:off x="10058400" y="6547104"/>
             <a:ext cx="1371600" cy="274320"/>
           </a:xfrm>
           <a:prstGeom prst="rect">
@@ -6910,7 +6910,7 @@
               </a:lnSpc>
             </a:pPr>
             <a:r>
-              <a:rPr sz="1100" b="0">
+              <a:rPr sz="1200" b="0">
                 <a:solidFill>
                   <a:srgbClr val="6B7485"/>
                 </a:solidFill>
@@ -7119,8 +7119,8 @@
         </p:nvSpPr>
         <p:spPr>
           <a:xfrm>
-            <a:off x="1097280" y="2221992"/>
-            <a:ext cx="10058400" cy="457200"/>
+            <a:off x="1097280" y="2203704"/>
+            <a:ext cx="10058400" cy="502920"/>
           </a:xfrm>
           <a:prstGeom prst="rect">
             <a:avLst/>
@@ -7139,7 +7139,7 @@
               </a:lnSpc>
             </a:pPr>
             <a:r>
-              <a:rPr sz="1500" b="0">
+              <a:rPr sz="1600" b="0">
                 <a:solidFill>
                   <a:srgbClr val="1B2233"/>
                 </a:solidFill>
@@ -7245,8 +7245,8 @@
         </p:nvSpPr>
         <p:spPr>
           <a:xfrm>
-            <a:off x="1097280" y="3429000"/>
-            <a:ext cx="10058400" cy="457200"/>
+            <a:off x="1097280" y="3410712"/>
+            <a:ext cx="10058400" cy="502920"/>
           </a:xfrm>
           <a:prstGeom prst="rect">
             <a:avLst/>
@@ -7265,7 +7265,7 @@
               </a:lnSpc>
             </a:pPr>
             <a:r>
-              <a:rPr sz="1500" b="0">
+              <a:rPr sz="1600" b="0">
                 <a:solidFill>
                   <a:srgbClr val="1B2233"/>
                 </a:solidFill>
@@ -7371,8 +7371,8 @@
         </p:nvSpPr>
         <p:spPr>
           <a:xfrm>
-            <a:off x="1097280" y="4636008"/>
-            <a:ext cx="10058400" cy="457200"/>
+            <a:off x="1097280" y="4617720"/>
+            <a:ext cx="10058400" cy="502920"/>
           </a:xfrm>
           <a:prstGeom prst="rect">
             <a:avLst/>
@@ -7391,7 +7391,7 @@
               </a:lnSpc>
             </a:pPr>
             <a:r>
-              <a:rPr sz="1500" b="0">
+              <a:rPr sz="1600" b="0">
                 <a:solidFill>
                   <a:srgbClr val="1B2233"/>
                 </a:solidFill>
@@ -7497,8 +7497,8 @@
         </p:nvSpPr>
         <p:spPr>
           <a:xfrm>
-            <a:off x="1097280" y="5843016"/>
-            <a:ext cx="10058400" cy="457200"/>
+            <a:off x="1097280" y="5824728"/>
+            <a:ext cx="10058400" cy="502920"/>
           </a:xfrm>
           <a:prstGeom prst="rect">
             <a:avLst/>
@@ -7517,7 +7517,7 @@
               </a:lnSpc>
             </a:pPr>
             <a:r>
-              <a:rPr sz="1500" b="0">
+              <a:rPr sz="1600" b="0">
                 <a:solidFill>
                   <a:srgbClr val="1B2233"/>
                 </a:solidFill>
@@ -7582,7 +7582,7 @@
         </p:nvSpPr>
         <p:spPr>
           <a:xfrm>
-            <a:off x="548640" y="6565392"/>
+            <a:off x="548640" y="6547104"/>
             <a:ext cx="7315200" cy="274320"/>
           </a:xfrm>
           <a:prstGeom prst="rect">
@@ -7602,7 +7602,7 @@
               </a:lnSpc>
             </a:pPr>
             <a:r>
-              <a:rPr sz="1100" b="0">
+              <a:rPr sz="1200" b="0">
                 <a:solidFill>
                   <a:srgbClr val="6B7485"/>
                 </a:solidFill>
@@ -7623,7 +7623,7 @@
         </p:nvSpPr>
         <p:spPr>
           <a:xfrm>
-            <a:off x="10058400" y="6565392"/>
+            <a:off x="10058400" y="6547104"/>
             <a:ext cx="1371600" cy="274320"/>
           </a:xfrm>
           <a:prstGeom prst="rect">
@@ -7643,7 +7643,7 @@
               </a:lnSpc>
             </a:pPr>
             <a:r>
-              <a:rPr sz="1100" b="0">
+              <a:rPr sz="1200" b="0">
                 <a:solidFill>
                   <a:srgbClr val="6B7485"/>
                 </a:solidFill>
@@ -8175,7 +8175,7 @@
         </p:nvSpPr>
         <p:spPr>
           <a:xfrm>
-            <a:off x="548640" y="6565392"/>
+            <a:off x="548640" y="6547104"/>
             <a:ext cx="7315200" cy="274320"/>
           </a:xfrm>
           <a:prstGeom prst="rect">
@@ -8195,7 +8195,7 @@
               </a:lnSpc>
             </a:pPr>
             <a:r>
-              <a:rPr sz="1100" b="0">
+              <a:rPr sz="1200" b="0">
                 <a:solidFill>
                   <a:srgbClr val="6B7485"/>
                 </a:solidFill>
@@ -8216,7 +8216,7 @@
         </p:nvSpPr>
         <p:spPr>
           <a:xfrm>
-            <a:off x="10058400" y="6565392"/>
+            <a:off x="10058400" y="6547104"/>
             <a:ext cx="1371600" cy="274320"/>
           </a:xfrm>
           <a:prstGeom prst="rect">
@@ -8236,7 +8236,7 @@
               </a:lnSpc>
             </a:pPr>
             <a:r>
-              <a:rPr sz="1100" b="0">
+              <a:rPr sz="1200" b="0">
                 <a:solidFill>
                   <a:srgbClr val="6B7485"/>
                 </a:solidFill>
@@ -9145,7 +9145,7 @@
               </a:lnSpc>
             </a:pPr>
             <a:r>
-              <a:rPr sz="1800" b="0">
+              <a:rPr sz="1900" b="0">
                 <a:solidFill>
                   <a:srgbClr val="1B2233"/>
                 </a:solidFill>
@@ -9163,7 +9163,7 @@
               </a:lnSpc>
             </a:pPr>
             <a:r>
-              <a:rPr sz="1800" b="0">
+              <a:rPr sz="1900" b="0">
                 <a:solidFill>
                   <a:srgbClr val="1B2233"/>
                 </a:solidFill>
@@ -9181,7 +9181,7 @@
               </a:lnSpc>
             </a:pPr>
             <a:r>
-              <a:rPr sz="1800" b="0">
+              <a:rPr sz="1900" b="0">
                 <a:solidFill>
                   <a:srgbClr val="1B2233"/>
                 </a:solidFill>
@@ -9199,7 +9199,7 @@
               </a:lnSpc>
             </a:pPr>
             <a:r>
-              <a:rPr sz="1800" b="0">
+              <a:rPr sz="1900" b="0">
                 <a:solidFill>
                   <a:srgbClr val="1B2233"/>
                 </a:solidFill>
@@ -9292,7 +9292,7 @@
         </p:nvSpPr>
         <p:spPr>
           <a:xfrm>
-            <a:off x="868680" y="6217920"/>
+            <a:off x="868680" y="6199632"/>
             <a:ext cx="2926080" cy="274320"/>
           </a:xfrm>
           <a:prstGeom prst="rect">
@@ -9312,7 +9312,7 @@
               </a:lnSpc>
             </a:pPr>
             <a:r>
-              <a:rPr sz="1300" b="0">
+              <a:rPr sz="1500" b="0">
                 <a:solidFill>
                   <a:srgbClr val="6B7485"/>
                 </a:solidFill>
@@ -9333,7 +9333,7 @@
         </p:nvSpPr>
         <p:spPr>
           <a:xfrm>
-            <a:off x="4114800" y="6217920"/>
+            <a:off x="4114800" y="6199632"/>
             <a:ext cx="2926080" cy="274320"/>
           </a:xfrm>
           <a:prstGeom prst="rect">
@@ -9353,7 +9353,7 @@
               </a:lnSpc>
             </a:pPr>
             <a:r>
-              <a:rPr sz="1300" b="0">
+              <a:rPr sz="1500" b="0">
                 <a:solidFill>
                   <a:srgbClr val="6B7485"/>
                 </a:solidFill>
@@ -9374,7 +9374,7 @@
         </p:nvSpPr>
         <p:spPr>
           <a:xfrm>
-            <a:off x="7589520" y="6217920"/>
+            <a:off x="7589520" y="6199632"/>
             <a:ext cx="3017520" cy="274320"/>
           </a:xfrm>
           <a:prstGeom prst="rect">
@@ -9394,7 +9394,7 @@
               </a:lnSpc>
             </a:pPr>
             <a:r>
-              <a:rPr sz="1300" b="0">
+              <a:rPr sz="1500" b="0">
                 <a:solidFill>
                   <a:srgbClr val="6B7485"/>
                 </a:solidFill>
@@ -9459,7 +9459,7 @@
         </p:nvSpPr>
         <p:spPr>
           <a:xfrm>
-            <a:off x="548640" y="6565392"/>
+            <a:off x="548640" y="6547104"/>
             <a:ext cx="7315200" cy="274320"/>
           </a:xfrm>
           <a:prstGeom prst="rect">
@@ -9479,7 +9479,7 @@
               </a:lnSpc>
             </a:pPr>
             <a:r>
-              <a:rPr sz="1100" b="0">
+              <a:rPr sz="1200" b="0">
                 <a:solidFill>
                   <a:srgbClr val="6B7485"/>
                 </a:solidFill>
@@ -9500,7 +9500,7 @@
         </p:nvSpPr>
         <p:spPr>
           <a:xfrm>
-            <a:off x="10058400" y="6565392"/>
+            <a:off x="10058400" y="6547104"/>
             <a:ext cx="1371600" cy="274320"/>
           </a:xfrm>
           <a:prstGeom prst="rect">
@@ -9520,7 +9520,7 @@
               </a:lnSpc>
             </a:pPr>
             <a:r>
-              <a:rPr sz="1100" b="0">
+              <a:rPr sz="1200" b="0">
                 <a:solidFill>
                   <a:srgbClr val="6B7485"/>
                 </a:solidFill>
@@ -9919,7 +9919,7 @@
               </a:lnSpc>
             </a:pPr>
             <a:r>
-              <a:rPr sz="1600" b="0">
+              <a:rPr sz="1700" b="0">
                 <a:solidFill>
                   <a:srgbClr val="6B7485"/>
                 </a:solidFill>
@@ -9937,7 +9937,7 @@
               </a:lnSpc>
             </a:pPr>
             <a:r>
-              <a:rPr sz="1600" b="0">
+              <a:rPr sz="1700" b="0">
                 <a:solidFill>
                   <a:srgbClr val="6B7485"/>
                 </a:solidFill>
@@ -10128,8 +10128,8 @@
         </p:nvSpPr>
         <p:spPr>
           <a:xfrm>
-            <a:off x="868680" y="4599432"/>
-            <a:ext cx="1097280" cy="365760"/>
+            <a:off x="868680" y="4590288"/>
+            <a:ext cx="1097280" cy="411480"/>
           </a:xfrm>
           <a:prstGeom prst="rect">
             <a:avLst/>
@@ -10148,7 +10148,7 @@
               </a:lnSpc>
             </a:pPr>
             <a:r>
-              <a:rPr sz="1200" b="0">
+              <a:rPr sz="1300" b="0">
                 <a:solidFill>
                   <a:srgbClr val="1B2233"/>
                 </a:solidFill>
@@ -10213,8 +10213,8 @@
         </p:nvSpPr>
         <p:spPr>
           <a:xfrm>
-            <a:off x="2048256" y="4599432"/>
-            <a:ext cx="1097280" cy="365760"/>
+            <a:off x="2048256" y="4590288"/>
+            <a:ext cx="1097280" cy="411480"/>
           </a:xfrm>
           <a:prstGeom prst="rect">
             <a:avLst/>
@@ -10233,7 +10233,7 @@
               </a:lnSpc>
             </a:pPr>
             <a:r>
-              <a:rPr sz="1200" b="0">
+              <a:rPr sz="1300" b="0">
                 <a:solidFill>
                   <a:srgbClr val="1B2233"/>
                 </a:solidFill>
@@ -10298,8 +10298,8 @@
         </p:nvSpPr>
         <p:spPr>
           <a:xfrm>
-            <a:off x="3227832" y="4599432"/>
-            <a:ext cx="1097280" cy="365760"/>
+            <a:off x="3227832" y="4590288"/>
+            <a:ext cx="1097280" cy="411480"/>
           </a:xfrm>
           <a:prstGeom prst="rect">
             <a:avLst/>
@@ -10318,7 +10318,7 @@
               </a:lnSpc>
             </a:pPr>
             <a:r>
-              <a:rPr sz="1200" b="0">
+              <a:rPr sz="1300" b="0">
                 <a:solidFill>
                   <a:srgbClr val="1B2233"/>
                 </a:solidFill>
@@ -10383,8 +10383,8 @@
         </p:nvSpPr>
         <p:spPr>
           <a:xfrm>
-            <a:off x="4407408" y="4599432"/>
-            <a:ext cx="1097280" cy="365760"/>
+            <a:off x="4407408" y="4590288"/>
+            <a:ext cx="1097280" cy="411480"/>
           </a:xfrm>
           <a:prstGeom prst="rect">
             <a:avLst/>
@@ -10403,7 +10403,7 @@
               </a:lnSpc>
             </a:pPr>
             <a:r>
-              <a:rPr sz="1200" b="0">
+              <a:rPr sz="1300" b="0">
                 <a:solidFill>
                   <a:srgbClr val="1B2233"/>
                 </a:solidFill>
@@ -10468,8 +10468,8 @@
         </p:nvSpPr>
         <p:spPr>
           <a:xfrm>
-            <a:off x="5586984" y="4599432"/>
-            <a:ext cx="1097280" cy="365760"/>
+            <a:off x="5586984" y="4590288"/>
+            <a:ext cx="1097280" cy="411480"/>
           </a:xfrm>
           <a:prstGeom prst="rect">
             <a:avLst/>
@@ -10488,7 +10488,7 @@
               </a:lnSpc>
             </a:pPr>
             <a:r>
-              <a:rPr sz="1200" b="0">
+              <a:rPr sz="1300" b="0">
                 <a:solidFill>
                   <a:srgbClr val="1B2233"/>
                 </a:solidFill>
@@ -10553,8 +10553,8 @@
         </p:nvSpPr>
         <p:spPr>
           <a:xfrm>
-            <a:off x="6766560" y="4599432"/>
-            <a:ext cx="1097280" cy="365760"/>
+            <a:off x="6766560" y="4590288"/>
+            <a:ext cx="1097280" cy="411480"/>
           </a:xfrm>
           <a:prstGeom prst="rect">
             <a:avLst/>
@@ -10573,7 +10573,7 @@
               </a:lnSpc>
             </a:pPr>
             <a:r>
-              <a:rPr sz="1200" b="0">
+              <a:rPr sz="1300" b="0">
                 <a:solidFill>
                   <a:srgbClr val="1B2233"/>
                 </a:solidFill>
@@ -10638,8 +10638,8 @@
         </p:nvSpPr>
         <p:spPr>
           <a:xfrm>
-            <a:off x="7946136" y="4599432"/>
-            <a:ext cx="1097280" cy="365760"/>
+            <a:off x="7946136" y="4590288"/>
+            <a:ext cx="1097280" cy="411480"/>
           </a:xfrm>
           <a:prstGeom prst="rect">
             <a:avLst/>
@@ -10658,7 +10658,7 @@
               </a:lnSpc>
             </a:pPr>
             <a:r>
-              <a:rPr sz="1200" b="0">
+              <a:rPr sz="1300" b="0">
                 <a:solidFill>
                   <a:srgbClr val="1B2233"/>
                 </a:solidFill>
@@ -10723,8 +10723,8 @@
         </p:nvSpPr>
         <p:spPr>
           <a:xfrm>
-            <a:off x="9125712" y="4599432"/>
-            <a:ext cx="1097280" cy="365760"/>
+            <a:off x="9125712" y="4590288"/>
+            <a:ext cx="1097280" cy="411480"/>
           </a:xfrm>
           <a:prstGeom prst="rect">
             <a:avLst/>
@@ -10743,7 +10743,7 @@
               </a:lnSpc>
             </a:pPr>
             <a:r>
-              <a:rPr sz="1200" b="0">
+              <a:rPr sz="1300" b="0">
                 <a:solidFill>
                   <a:srgbClr val="1B2233"/>
                 </a:solidFill>
@@ -10808,8 +10808,8 @@
         </p:nvSpPr>
         <p:spPr>
           <a:xfrm>
-            <a:off x="10305288" y="4599432"/>
-            <a:ext cx="1097280" cy="365760"/>
+            <a:off x="10305288" y="4590288"/>
+            <a:ext cx="1097280" cy="411480"/>
           </a:xfrm>
           <a:prstGeom prst="rect">
             <a:avLst/>
@@ -10828,7 +10828,7 @@
               </a:lnSpc>
             </a:pPr>
             <a:r>
-              <a:rPr sz="1200" b="0">
+              <a:rPr sz="1300" b="0">
                 <a:solidFill>
                   <a:srgbClr val="FFFFFF"/>
                 </a:solidFill>
@@ -10913,7 +10913,7 @@
               </a:lnSpc>
             </a:pPr>
             <a:r>
-              <a:rPr sz="1800" b="0">
+              <a:rPr sz="1900" b="0">
                 <a:solidFill>
                   <a:srgbClr val="1B2233"/>
                 </a:solidFill>
@@ -10978,7 +10978,7 @@
         </p:nvSpPr>
         <p:spPr>
           <a:xfrm>
-            <a:off x="548640" y="6565392"/>
+            <a:off x="548640" y="6547104"/>
             <a:ext cx="7315200" cy="274320"/>
           </a:xfrm>
           <a:prstGeom prst="rect">
@@ -10998,7 +10998,7 @@
               </a:lnSpc>
             </a:pPr>
             <a:r>
-              <a:rPr sz="1100" b="0">
+              <a:rPr sz="1200" b="0">
                 <a:solidFill>
                   <a:srgbClr val="6B7485"/>
                 </a:solidFill>
@@ -11019,7 +11019,7 @@
         </p:nvSpPr>
         <p:spPr>
           <a:xfrm>
-            <a:off x="10058400" y="6565392"/>
+            <a:off x="10058400" y="6547104"/>
             <a:ext cx="1371600" cy="274320"/>
           </a:xfrm>
           <a:prstGeom prst="rect">
@@ -11039,7 +11039,7 @@
               </a:lnSpc>
             </a:pPr>
             <a:r>
-              <a:rPr sz="1100" b="0">
+              <a:rPr sz="1200" b="0">
                 <a:solidFill>
                   <a:srgbClr val="6B7485"/>
                 </a:solidFill>
@@ -11403,8 +11403,8 @@
         </p:nvSpPr>
         <p:spPr>
           <a:xfrm>
-            <a:off x="7040880" y="5623560"/>
-            <a:ext cx="4572000" cy="457200"/>
+            <a:off x="7040880" y="5596128"/>
+            <a:ext cx="4754880" cy="457200"/>
           </a:xfrm>
           <a:prstGeom prst="rect">
             <a:avLst/>
@@ -11423,7 +11423,7 @@
               </a:lnSpc>
             </a:pPr>
             <a:r>
-              <a:rPr sz="1400" b="0">
+              <a:rPr sz="1600" b="0">
                 <a:solidFill>
                   <a:srgbClr val="6B7485"/>
                 </a:solidFill>
@@ -11488,7 +11488,7 @@
         </p:nvSpPr>
         <p:spPr>
           <a:xfrm>
-            <a:off x="548640" y="6565392"/>
+            <a:off x="548640" y="6547104"/>
             <a:ext cx="7315200" cy="274320"/>
           </a:xfrm>
           <a:prstGeom prst="rect">
@@ -11508,7 +11508,7 @@
               </a:lnSpc>
             </a:pPr>
             <a:r>
-              <a:rPr sz="1100" b="0">
+              <a:rPr sz="1200" b="0">
                 <a:solidFill>
                   <a:srgbClr val="6B7485"/>
                 </a:solidFill>
@@ -11529,7 +11529,7 @@
         </p:nvSpPr>
         <p:spPr>
           <a:xfrm>
-            <a:off x="10058400" y="6565392"/>
+            <a:off x="10058400" y="6547104"/>
             <a:ext cx="1371600" cy="274320"/>
           </a:xfrm>
           <a:prstGeom prst="rect">
@@ -11549,7 +11549,7 @@
               </a:lnSpc>
             </a:pPr>
             <a:r>
-              <a:rPr sz="1100" b="0">
+              <a:rPr sz="1200" b="0">
                 <a:solidFill>
                   <a:srgbClr val="6B7485"/>
                 </a:solidFill>
@@ -11883,7 +11883,7 @@
         </p:nvSpPr>
         <p:spPr>
           <a:xfrm>
-            <a:off x="548640" y="6565392"/>
+            <a:off x="548640" y="6547104"/>
             <a:ext cx="7315200" cy="274320"/>
           </a:xfrm>
           <a:prstGeom prst="rect">
@@ -11903,7 +11903,7 @@
               </a:lnSpc>
             </a:pPr>
             <a:r>
-              <a:rPr sz="1100" b="0">
+              <a:rPr sz="1200" b="0">
                 <a:solidFill>
                   <a:srgbClr val="6B7485"/>
                 </a:solidFill>
@@ -11924,7 +11924,7 @@
         </p:nvSpPr>
         <p:spPr>
           <a:xfrm>
-            <a:off x="10058400" y="6565392"/>
+            <a:off x="10058400" y="6547104"/>
             <a:ext cx="1371600" cy="274320"/>
           </a:xfrm>
           <a:prstGeom prst="rect">
@@ -11944,7 +11944,7 @@
               </a:lnSpc>
             </a:pPr>
             <a:r>
-              <a:rPr sz="1100" b="0">
+              <a:rPr sz="1200" b="0">
                 <a:solidFill>
                   <a:srgbClr val="6B7485"/>
                 </a:solidFill>
@@ -12177,7 +12177,7 @@
         </p:nvSpPr>
         <p:spPr>
           <a:xfrm>
-            <a:off x="658368" y="4590288"/>
+            <a:off x="658368" y="4572000"/>
             <a:ext cx="2103120" cy="640080"/>
           </a:xfrm>
           <a:prstGeom prst="rect">
@@ -12197,7 +12197,7 @@
               </a:lnSpc>
             </a:pPr>
             <a:r>
-              <a:rPr sz="1400" b="0">
+              <a:rPr sz="1600" b="0">
                 <a:solidFill>
                   <a:srgbClr val="6B7485"/>
                 </a:solidFill>
@@ -12327,7 +12327,7 @@
         </p:nvSpPr>
         <p:spPr>
           <a:xfrm>
-            <a:off x="2907791" y="4590288"/>
+            <a:off x="2907791" y="4572000"/>
             <a:ext cx="2103120" cy="640080"/>
           </a:xfrm>
           <a:prstGeom prst="rect">
@@ -12347,7 +12347,7 @@
               </a:lnSpc>
             </a:pPr>
             <a:r>
-              <a:rPr sz="1400" b="0">
+              <a:rPr sz="1600" b="0">
                 <a:solidFill>
                   <a:srgbClr val="6B7485"/>
                 </a:solidFill>
@@ -12477,7 +12477,7 @@
         </p:nvSpPr>
         <p:spPr>
           <a:xfrm>
-            <a:off x="5157216" y="4590288"/>
+            <a:off x="5157216" y="4572000"/>
             <a:ext cx="2103120" cy="640080"/>
           </a:xfrm>
           <a:prstGeom prst="rect">
@@ -12497,7 +12497,7 @@
               </a:lnSpc>
             </a:pPr>
             <a:r>
-              <a:rPr sz="1400" b="0">
+              <a:rPr sz="1600" b="0">
                 <a:solidFill>
                   <a:srgbClr val="6B7485"/>
                 </a:solidFill>
@@ -12627,7 +12627,7 @@
         </p:nvSpPr>
         <p:spPr>
           <a:xfrm>
-            <a:off x="7406640" y="4590288"/>
+            <a:off x="7406640" y="4572000"/>
             <a:ext cx="2103120" cy="640080"/>
           </a:xfrm>
           <a:prstGeom prst="rect">
@@ -12647,7 +12647,7 @@
               </a:lnSpc>
             </a:pPr>
             <a:r>
-              <a:rPr sz="1400" b="0">
+              <a:rPr sz="1600" b="0">
                 <a:solidFill>
                   <a:srgbClr val="6B7485"/>
                 </a:solidFill>
@@ -12777,7 +12777,7 @@
         </p:nvSpPr>
         <p:spPr>
           <a:xfrm>
-            <a:off x="9656063" y="4590288"/>
+            <a:off x="9656063" y="4572000"/>
             <a:ext cx="2103120" cy="640080"/>
           </a:xfrm>
           <a:prstGeom prst="rect">
@@ -12797,7 +12797,7 @@
               </a:lnSpc>
             </a:pPr>
             <a:r>
-              <a:rPr sz="1400" b="0">
+              <a:rPr sz="1600" b="0">
                 <a:solidFill>
                   <a:srgbClr val="6B7485"/>
                 </a:solidFill>
@@ -12862,7 +12862,7 @@
         </p:nvSpPr>
         <p:spPr>
           <a:xfrm>
-            <a:off x="548640" y="6565392"/>
+            <a:off x="548640" y="6547104"/>
             <a:ext cx="7315200" cy="274320"/>
           </a:xfrm>
           <a:prstGeom prst="rect">
@@ -12882,7 +12882,7 @@
               </a:lnSpc>
             </a:pPr>
             <a:r>
-              <a:rPr sz="1100" b="0">
+              <a:rPr sz="1200" b="0">
                 <a:solidFill>
                   <a:srgbClr val="6B7485"/>
                 </a:solidFill>
@@ -12903,7 +12903,7 @@
         </p:nvSpPr>
         <p:spPr>
           <a:xfrm>
-            <a:off x="10058400" y="6565392"/>
+            <a:off x="10058400" y="6547104"/>
             <a:ext cx="1371600" cy="274320"/>
           </a:xfrm>
           <a:prstGeom prst="rect">
@@ -12923,7 +12923,7 @@
               </a:lnSpc>
             </a:pPr>
             <a:r>
-              <a:rPr sz="1100" b="0">
+              <a:rPr sz="1200" b="0">
                 <a:solidFill>
                   <a:srgbClr val="6B7485"/>
                 </a:solidFill>
@@ -13091,7 +13091,7 @@
               </a:lnSpc>
             </a:pPr>
             <a:r>
-              <a:rPr sz="1400" b="0">
+              <a:rPr sz="1600" b="0">
                 <a:solidFill>
                   <a:srgbClr val="6B7485"/>
                 </a:solidFill>
@@ -13156,7 +13156,7 @@
               </a:lnSpc>
             </a:pPr>
             <a:r>
-              <a:rPr sz="1400" b="0">
+              <a:rPr sz="1600" b="0">
                 <a:solidFill>
                   <a:srgbClr val="6B7485"/>
                 </a:solidFill>
@@ -13221,7 +13221,7 @@
               </a:lnSpc>
             </a:pPr>
             <a:r>
-              <a:rPr sz="1400" b="0">
+              <a:rPr sz="1600" b="0">
                 <a:solidFill>
                   <a:srgbClr val="6B7485"/>
                 </a:solidFill>
@@ -13286,7 +13286,7 @@
         </p:nvSpPr>
         <p:spPr>
           <a:xfrm>
-            <a:off x="548640" y="6565392"/>
+            <a:off x="548640" y="6547104"/>
             <a:ext cx="7315200" cy="274320"/>
           </a:xfrm>
           <a:prstGeom prst="rect">
@@ -13306,7 +13306,7 @@
               </a:lnSpc>
             </a:pPr>
             <a:r>
-              <a:rPr sz="1100" b="0">
+              <a:rPr sz="1200" b="0">
                 <a:solidFill>
                   <a:srgbClr val="6B7485"/>
                 </a:solidFill>
@@ -13327,7 +13327,7 @@
         </p:nvSpPr>
         <p:spPr>
           <a:xfrm>
-            <a:off x="10058400" y="6565392"/>
+            <a:off x="10058400" y="6547104"/>
             <a:ext cx="1371600" cy="274320"/>
           </a:xfrm>
           <a:prstGeom prst="rect">
@@ -13347,7 +13347,7 @@
               </a:lnSpc>
             </a:pPr>
             <a:r>
-              <a:rPr sz="1100" b="0">
+              <a:rPr sz="1200" b="0">
                 <a:solidFill>
                   <a:srgbClr val="6B7485"/>
                 </a:solidFill>
@@ -13556,7 +13556,7 @@
         </p:nvSpPr>
         <p:spPr>
           <a:xfrm>
-            <a:off x="2606039" y="1901952"/>
+            <a:off x="2606039" y="1883664"/>
             <a:ext cx="3200400" cy="731520"/>
           </a:xfrm>
           <a:prstGeom prst="rect">
@@ -13576,7 +13576,7 @@
               </a:lnSpc>
             </a:pPr>
             <a:r>
-              <a:rPr sz="1500" b="0">
+              <a:rPr sz="1600" b="0">
                 <a:solidFill>
                   <a:srgbClr val="1B2233"/>
                 </a:solidFill>
@@ -13682,7 +13682,7 @@
         </p:nvSpPr>
         <p:spPr>
           <a:xfrm>
-            <a:off x="8092440" y="1901952"/>
+            <a:off x="8092440" y="1883664"/>
             <a:ext cx="3200400" cy="731520"/>
           </a:xfrm>
           <a:prstGeom prst="rect">
@@ -13702,7 +13702,7 @@
               </a:lnSpc>
             </a:pPr>
             <a:r>
-              <a:rPr sz="1500" b="0">
+              <a:rPr sz="1600" b="0">
                 <a:solidFill>
                   <a:srgbClr val="1B2233"/>
                 </a:solidFill>
@@ -13808,7 +13808,7 @@
         </p:nvSpPr>
         <p:spPr>
           <a:xfrm>
-            <a:off x="2606039" y="3044952"/>
+            <a:off x="2606039" y="3026664"/>
             <a:ext cx="3200400" cy="731520"/>
           </a:xfrm>
           <a:prstGeom prst="rect">
@@ -13828,7 +13828,7 @@
               </a:lnSpc>
             </a:pPr>
             <a:r>
-              <a:rPr sz="1500" b="0">
+              <a:rPr sz="1600" b="0">
                 <a:solidFill>
                   <a:srgbClr val="1B2233"/>
                 </a:solidFill>
@@ -13934,7 +13934,7 @@
         </p:nvSpPr>
         <p:spPr>
           <a:xfrm>
-            <a:off x="8092440" y="3044952"/>
+            <a:off x="8092440" y="3026664"/>
             <a:ext cx="3200400" cy="731520"/>
           </a:xfrm>
           <a:prstGeom prst="rect">
@@ -13954,7 +13954,7 @@
               </a:lnSpc>
             </a:pPr>
             <a:r>
-              <a:rPr sz="1500" b="0">
+              <a:rPr sz="1600" b="0">
                 <a:solidFill>
                   <a:srgbClr val="1B2233"/>
                 </a:solidFill>
@@ -14060,7 +14060,7 @@
         </p:nvSpPr>
         <p:spPr>
           <a:xfrm>
-            <a:off x="2606039" y="4187952"/>
+            <a:off x="2606039" y="4169664"/>
             <a:ext cx="3200400" cy="731520"/>
           </a:xfrm>
           <a:prstGeom prst="rect">
@@ -14080,7 +14080,7 @@
               </a:lnSpc>
             </a:pPr>
             <a:r>
-              <a:rPr sz="1500" b="0">
+              <a:rPr sz="1600" b="0">
                 <a:solidFill>
                   <a:srgbClr val="1B2233"/>
                 </a:solidFill>
@@ -14186,7 +14186,7 @@
         </p:nvSpPr>
         <p:spPr>
           <a:xfrm>
-            <a:off x="8092440" y="4187952"/>
+            <a:off x="8092440" y="4169664"/>
             <a:ext cx="3200400" cy="731520"/>
           </a:xfrm>
           <a:prstGeom prst="rect">
@@ -14206,7 +14206,7 @@
               </a:lnSpc>
             </a:pPr>
             <a:r>
-              <a:rPr sz="1500" b="0">
+              <a:rPr sz="1600" b="0">
                 <a:solidFill>
                   <a:srgbClr val="1B2233"/>
                 </a:solidFill>
@@ -14312,7 +14312,7 @@
         </p:nvSpPr>
         <p:spPr>
           <a:xfrm>
-            <a:off x="2606039" y="5330952"/>
+            <a:off x="2606039" y="5312664"/>
             <a:ext cx="3200400" cy="731520"/>
           </a:xfrm>
           <a:prstGeom prst="rect">
@@ -14332,7 +14332,7 @@
               </a:lnSpc>
             </a:pPr>
             <a:r>
-              <a:rPr sz="1500" b="0">
+              <a:rPr sz="1600" b="0">
                 <a:solidFill>
                   <a:srgbClr val="1B2233"/>
                 </a:solidFill>
@@ -14438,7 +14438,7 @@
         </p:nvSpPr>
         <p:spPr>
           <a:xfrm>
-            <a:off x="8092440" y="5330952"/>
+            <a:off x="8092440" y="5312664"/>
             <a:ext cx="3200400" cy="731520"/>
           </a:xfrm>
           <a:prstGeom prst="rect">
@@ -14458,7 +14458,7 @@
               </a:lnSpc>
             </a:pPr>
             <a:r>
-              <a:rPr sz="1500" b="0">
+              <a:rPr sz="1600" b="0">
                 <a:solidFill>
                   <a:srgbClr val="1B2233"/>
                 </a:solidFill>
@@ -14523,7 +14523,7 @@
         </p:nvSpPr>
         <p:spPr>
           <a:xfrm>
-            <a:off x="548640" y="6565392"/>
+            <a:off x="548640" y="6547104"/>
             <a:ext cx="7315200" cy="274320"/>
           </a:xfrm>
           <a:prstGeom prst="rect">
@@ -14543,7 +14543,7 @@
               </a:lnSpc>
             </a:pPr>
             <a:r>
-              <a:rPr sz="1100" b="0">
+              <a:rPr sz="1200" b="0">
                 <a:solidFill>
                   <a:srgbClr val="6B7485"/>
                 </a:solidFill>
@@ -14564,7 +14564,7 @@
         </p:nvSpPr>
         <p:spPr>
           <a:xfrm>
-            <a:off x="10058400" y="6565392"/>
+            <a:off x="10058400" y="6547104"/>
             <a:ext cx="1371600" cy="274320"/>
           </a:xfrm>
           <a:prstGeom prst="rect">
@@ -14584,7 +14584,7 @@
               </a:lnSpc>
             </a:pPr>
             <a:r>
-              <a:rPr sz="1100" b="0">
+              <a:rPr sz="1200" b="0">
                 <a:solidFill>
                   <a:srgbClr val="6B7485"/>
                 </a:solidFill>

--- a/docs/competition/9月22日路演-社区先知.pptx
+++ b/docs/competition/9月22日路演-社区先知.pptx
@@ -1006,7 +1006,7 @@
           <a:lstStyle/>
           <a:p>
             <a:r>
-              <a:t>各位专家好，我是北京工商大学大二学生。这个项目我一个人做。它服务三种人：居民、网格员、老人。今天六分钟，我讲三件事：怎么做、能干什么、我卡在哪。</a:t>
+              <a:t>各位专家好，我是北京工商大学大二学生。这个项目我一个人做。它服务三种人：居民、网格员、老人。今天七分钟，我讲三件事：怎么做、能干什么、我卡在哪。</a:t>
             </a:r>
           </a:p>
         </p:txBody>
@@ -1146,7 +1146,7 @@
           <a:lstStyle/>
           <a:p>
             <a:r>
-              <a:t>把社区里的事拆开交给 9 个角色。三端各 14 / 9 / 8 页。数据放在本地一个库里，不用搭服务器。</a:t>
+              <a:t>把社区里的事拆开，交给 9 个角色。社区里其实是三种人，所以三个端我分开做。居民端 14 页：居民要的是一句话把事说清，报修、提问都在这儿。网格员端 9 页：网格员要的是待办清楚、有据可查，工单、提案、导出都在这儿。老人端 8 页：老人要的是看得见、按得动，所以大字、语音、长按求助。三拨人要的东西不一样，硬做成一个 App，谁都不好用。</a:t>
             </a:r>
           </a:p>
         </p:txBody>
@@ -1216,7 +1216,7 @@
           <a:lstStyle/>
           <a:p>
             <a:r>
-              <a:t>它是怎么搭起来的：三端共用一个 FastAPI 后端，中间是 9 个角色在黑板协作，最下面是本地数据库（约 50 张表、手机号加密、全流程留痕）。整条链路不依赖外部服务，一台普通电脑就能跑。</a:t>
+              <a:t>它是怎么搭起来的：三端共用一个 FastAPI 后端，中间是 9 个角色在黑板协作，最下面是本地数据库（约 50 张表、手机号加密、全流程留痕）。数据库我选了本地 SQLite，不用单独搭服务器，也就没有运维。整条链路不依赖外部服务，一台普通电脑就能跑。</a:t>
             </a:r>
           </a:p>
         </p:txBody>
@@ -1286,7 +1286,7 @@
           <a:lstStyle/>
           <a:p>
             <a:r>
-              <a:t>重点页（90 秒）：9 个角色不写死流程，靠黑板 + 5 种消息真来往；每轮过校验员与仲裁器，合规审计一票否决。大模型只做意图/追问/政策生成，状态机、派单、权限、加密永远走规则；四个开关默认关。防编造三招：强制出处、回查数据库、敏感词与权限审计。实话：这是按规则分工协作，不是完全自主的大模型智能体。</a:t>
+              <a:t>重点页（85 秒）：9 个角色不写死流程，靠黑板 + 5 种消息真来往；每轮过校验员与仲裁器，合规审计一票否决。大模型只做意图/追问/政策生成，状态机、派单、权限、加密永远走规则；四个开关默认关。防编造三招：强制出处、回查数据库、敏感词与权限审计。实话：这是按规则分工协作，不是完全自主的大模型智能体。</a:t>
             </a:r>
           </a:p>
         </p:txBody>
@@ -1356,7 +1356,7 @@
           <a:lstStyle/>
           <a:p>
             <a:r>
-              <a:t>老人端是单独重做的：大字大按钮、免登录、语音报修、用药提醒点一下。紧急求助要长按 3 秒再确认——我怕老人放兜里误触。</a:t>
+              <a:t>老人端是单独重做的，不是把居民端放大：大字大按钮、免登录。不会打字也不怕，常用的话做成大按钮点一下就问（家里灯不亮了 / 医保怎么报销）。吃药提醒到点会响，就两个按钮：我吃了、10 分钟后再说；用药提醒要社区审核通过才开始播报。紧急求助长按 3 秒出确认框，10 秒不点自动取消——我怕老人放兜里误触，所以防了两道。</a:t>
             </a:r>
           </a:p>
         </p:txBody>
@@ -1426,7 +1426,7 @@
           <a:lstStyle/>
           <a:p>
             <a:r>
-              <a:t>五步走查（本场不需要实操，全靠 PPT 里的截图）：① 居民一句话报修 → ② 政策问答带依据与属地 → ③ 天气联动点开执行链 → ④ 老人端长按求助出确认框 → ⑤ 网格员工作台看待办。讲的时候按图说：这一步居民做了什么、系统回了什么。</a:t>
+              <a:t>五步走一遍，都是真实界面。① 居民报修：一句话提交，不用选分类。② 政策问答：答案下面有依据，写明哪份政策、适用哪个地区；答不出依据就不硬答，转人工。③ 天气联动：点开执行链，天气守护、健康顾问、通知管理三个角色都在，谁先动谁接话看得见。④ 老人端：长按 3 秒出确认框（我不能真发，点到取消）。⑤ 网格员端：刚才那条报修已进工作台，待办、AI 助手、统计导出都在这一页。同一件事，居民、老人、网格员三边是通的。</a:t>
             </a:r>
           </a:p>
         </p:txBody>
@@ -1496,7 +1496,7 @@
           <a:lstStyle/>
           <a:p>
             <a:r>
-              <a:t>再看几处细节：政策问答的答案下面有知识库依据和适用地区；工单详情里能看到谁在什么时候处理；居民端报修列表状态一目了然。这三张是五步之外的补充。</a:t>
+              <a:t>再看三处细节（五步之外的补充）：政策问答的答案下面有知识库依据和适用地区；工单详情里能看到谁在什么时候接的、什么时候处理的，全程留痕；居民端报修列表每条走到哪一步、状态和颜色都写清楚。</a:t>
             </a:r>
           </a:p>
         </p:txBody>

--- a/docs/competition/9月22日路演-社区先知.pptx
+++ b/docs/competition/9月22日路演-社区先知.pptx
@@ -20,6 +20,9 @@
     <p:sldId id="268" r:id="rId19"/>
     <p:sldId id="269" r:id="rId20"/>
     <p:sldId id="270" r:id="rId21"/>
+    <p:sldId id="271" r:id="rId22"/>
+    <p:sldId id="272" r:id="rId23"/>
+    <p:sldId id="273" r:id="rId24"/>
   </p:sldIdLst>
   <p:sldSz cx="12191695" cy="6858000" type="screen4x3"/>
   <p:notesSz cx="6858000" cy="9144000"/>
@@ -516,7 +519,7 @@
           <a:lstStyle/>
           <a:p>
             <a:r>
-              <a:t>开场（30 秒，不念 PPT）：上周，我家楼下张奶奶摔了一跤。她想找人帮忙，手机却只会打给外地的儿子。等社区知道这件事，天已经黑了。——这一晚没有人做错什么，是这条路太长了。我想把它缩短成一句话，这就是社区先知。</a:t>
+              <a:t>开场（25 秒，不念 PPT）：上周，我家楼下张奶奶摔了一跤。她想找人帮忙，手机却只会打给外地的儿子。等社区知道这件事，天已经黑了。——这一晚没有人做错什么，是这条路太长了。我想把它缩短成一句话，这就是社区先知。</a:t>
             </a:r>
           </a:p>
         </p:txBody>
@@ -586,7 +589,7 @@
           <a:lstStyle/>
           <a:p>
             <a:r>
-              <a:t>功能全景：报修全状态机、提案全生命周期、通知四类、政策问答带出处、健康咨询不诊断并转人工、天气联动、网格员工作台的 AI 助手与导出、以及转人工的处理包（用户信息 + 执行链 + 待确认事项）。</a:t>
+              <a:t>网格员端（二）处理与关怀：工单管理能搜索、能导出、能批量派单、能批量关闭；审核退回必须写意见，派单必须填维修人员与电话。点开一条工单，处理过程全程留痕。老年关怀里，用药提醒和紧急联系人都要审核通过才生效；老人求助来了，要确认响应、再结束。</a:t>
             </a:r>
           </a:p>
         </p:txBody>
@@ -656,7 +659,7 @@
           <a:lstStyle/>
           <a:p>
             <a:r>
-              <a:t>几个能复算的数字：638 项测试全绿、550 并发零失败、48 条金标第一位命中 100%、ruff 0；数据库 v46、约 50 张表。都是本机自测，不是第三方测评。</a:t>
+              <a:t>老人端（一）看得见按得动：不是把居民端放大，是重做的。字大、按钮大、不用登录。首页就六件事：天气、通知、报修、联系社区、联系人、用药提醒。天气和帮助都能用语音念出来。</a:t>
             </a:r>
           </a:p>
         </p:txBody>
@@ -726,7 +729,7 @@
           <a:lstStyle/>
           <a:p>
             <a:r>
-              <a:t>它现在的位置：工程原型，没在真实街道试点，没有运营数据，商业模式在探索。今天不是来要投资，是来请教三个问题：多智能体的自动边界怎么划、第一个试点社区怎么谈、没有历史数据怎么冷启动。张奶奶那条路，现在是一句话。</a:t>
+              <a:t>老人端（二）不会打字也能办事：三条路——① 点现成的话（家里灯不亮了 / 医保怎么报销）；② 直接说话，语音报修；③ 吃药提醒，就两个按钮「我吃了」「10 分钟后再说」，而且用药提醒要社区审核通过才开始播报。紧急求助长按 3 秒出确认框，10 秒不点自动取消——我怕老人放兜里误触，所以防了两道。</a:t>
             </a:r>
           </a:p>
         </p:txBody>
@@ -796,7 +799,7 @@
           <a:lstStyle/>
           <a:p>
             <a:r>
-              <a:t>备用页：被追问「为什么不全用大模型」时翻到这页。</a:t>
+              <a:t>功能全景：报修全状态机、提案全生命周期、通知四类、政策问答带出处、健康咨询不诊断并转人工、天气联动、网格员工作台的 AI 助手与导出、以及转人工的处理包（用户信息 + 执行链 + 待确认事项）。</a:t>
             </a:r>
           </a:p>
         </p:txBody>
@@ -866,7 +869,7 @@
           <a:lstStyle/>
           <a:p>
             <a:r>
-              <a:t>备用页：被追问「会不会编造、数据安全吗」时翻到这页。</a:t>
+              <a:t>几个能复算的数字：638 项测试全绿、550 并发零失败、48 条金标第一位命中 100%、ruff 0；数据库 v46、约 50 张表。都是本机自测，不是第三方测评。</a:t>
             </a:r>
           </a:p>
         </p:txBody>
@@ -936,6 +939,216 @@
           <a:lstStyle/>
           <a:p>
             <a:r>
+              <a:t>它现在的位置：工程原型，没在真实街道试点，没有运营数据，商业模式在探索。今天不是来要投资，是来请教三个问题：多智能体的自动边界怎么划、第一个试点社区怎么谈、没有历史数据怎么冷启动。张奶奶那条路，现在是一句话。</a:t>
+            </a:r>
+          </a:p>
+        </p:txBody>
+      </p:sp>
+      <p:sp>
+        <p:nvSpPr>
+          <p:cNvPr id="4" name="Slide Number Placeholder 3"/>
+          <p:cNvSpPr>
+            <a:spLocks noGrp="1"/>
+          </p:cNvSpPr>
+          <p:nvPr>
+            <p:ph type="sldNum" idx="5" sz="quarter"/>
+          </p:nvPr>
+        </p:nvSpPr>
+        <p:spPr/>
+      </p:sp>
+    </p:spTree>
+  </p:cSld>
+  <p:clrMapOvr>
+    <a:masterClrMapping/>
+  </p:clrMapOvr>
+</p:notes>
+</file>
+
+<file path=ppt/notesSlides/notesSlide16.xml><?xml version="1.0" encoding="utf-8"?>
+<p:notes xmlns:a="http://schemas.openxmlformats.org/drawingml/2006/main" xmlns:p="http://schemas.openxmlformats.org/presentationml/2006/main" xmlns:r="http://schemas.openxmlformats.org/officeDocument/2006/relationships">
+  <p:cSld>
+    <p:spTree>
+      <p:nvGrpSpPr>
+        <p:cNvPr id="1" name=""/>
+        <p:cNvGrpSpPr/>
+        <p:nvPr/>
+      </p:nvGrpSpPr>
+      <p:grpSpPr>
+        <a:xfrm>
+          <a:off x="0" y="0"/>
+          <a:ext cx="0" cy="0"/>
+          <a:chOff x="0" y="0"/>
+          <a:chExt cx="0" cy="0"/>
+        </a:xfrm>
+      </p:grpSpPr>
+      <p:sp>
+        <p:nvSpPr>
+          <p:cNvPr id="2" name="Slide Image Placeholder 1"/>
+          <p:cNvSpPr>
+            <a:spLocks noGrp="1"/>
+          </p:cNvSpPr>
+          <p:nvPr>
+            <p:ph type="sldImg" idx="2"/>
+          </p:nvPr>
+        </p:nvSpPr>
+        <p:spPr/>
+      </p:sp>
+      <p:sp>
+        <p:nvSpPr>
+          <p:cNvPr id="3" name="Notes Placeholder 2"/>
+          <p:cNvSpPr>
+            <a:spLocks noGrp="1"/>
+          </p:cNvSpPr>
+          <p:nvPr>
+            <p:ph type="body" idx="3" sz="quarter"/>
+          </p:nvPr>
+        </p:nvSpPr>
+        <p:spPr/>
+        <p:txBody>
+          <a:bodyPr/>
+          <a:lstStyle/>
+          <a:p>
+            <a:r>
+              <a:t>备用页：被追问「为什么不全用大模型」时翻到这页。</a:t>
+            </a:r>
+          </a:p>
+        </p:txBody>
+      </p:sp>
+      <p:sp>
+        <p:nvSpPr>
+          <p:cNvPr id="4" name="Slide Number Placeholder 3"/>
+          <p:cNvSpPr>
+            <a:spLocks noGrp="1"/>
+          </p:cNvSpPr>
+          <p:nvPr>
+            <p:ph type="sldNum" idx="5" sz="quarter"/>
+          </p:nvPr>
+        </p:nvSpPr>
+        <p:spPr/>
+      </p:sp>
+    </p:spTree>
+  </p:cSld>
+  <p:clrMapOvr>
+    <a:masterClrMapping/>
+  </p:clrMapOvr>
+</p:notes>
+</file>
+
+<file path=ppt/notesSlides/notesSlide17.xml><?xml version="1.0" encoding="utf-8"?>
+<p:notes xmlns:a="http://schemas.openxmlformats.org/drawingml/2006/main" xmlns:p="http://schemas.openxmlformats.org/presentationml/2006/main" xmlns:r="http://schemas.openxmlformats.org/officeDocument/2006/relationships">
+  <p:cSld>
+    <p:spTree>
+      <p:nvGrpSpPr>
+        <p:cNvPr id="1" name=""/>
+        <p:cNvGrpSpPr/>
+        <p:nvPr/>
+      </p:nvGrpSpPr>
+      <p:grpSpPr>
+        <a:xfrm>
+          <a:off x="0" y="0"/>
+          <a:ext cx="0" cy="0"/>
+          <a:chOff x="0" y="0"/>
+          <a:chExt cx="0" cy="0"/>
+        </a:xfrm>
+      </p:grpSpPr>
+      <p:sp>
+        <p:nvSpPr>
+          <p:cNvPr id="2" name="Slide Image Placeholder 1"/>
+          <p:cNvSpPr>
+            <a:spLocks noGrp="1"/>
+          </p:cNvSpPr>
+          <p:nvPr>
+            <p:ph type="sldImg" idx="2"/>
+          </p:nvPr>
+        </p:nvSpPr>
+        <p:spPr/>
+      </p:sp>
+      <p:sp>
+        <p:nvSpPr>
+          <p:cNvPr id="3" name="Notes Placeholder 2"/>
+          <p:cNvSpPr>
+            <a:spLocks noGrp="1"/>
+          </p:cNvSpPr>
+          <p:nvPr>
+            <p:ph type="body" idx="3" sz="quarter"/>
+          </p:nvPr>
+        </p:nvSpPr>
+        <p:spPr/>
+        <p:txBody>
+          <a:bodyPr/>
+          <a:lstStyle/>
+          <a:p>
+            <a:r>
+              <a:t>备用页：被追问「会不会编造、数据安全吗」时翻到这页。</a:t>
+            </a:r>
+          </a:p>
+        </p:txBody>
+      </p:sp>
+      <p:sp>
+        <p:nvSpPr>
+          <p:cNvPr id="4" name="Slide Number Placeholder 3"/>
+          <p:cNvSpPr>
+            <a:spLocks noGrp="1"/>
+          </p:cNvSpPr>
+          <p:nvPr>
+            <p:ph type="sldNum" idx="5" sz="quarter"/>
+          </p:nvPr>
+        </p:nvSpPr>
+        <p:spPr/>
+      </p:sp>
+    </p:spTree>
+  </p:cSld>
+  <p:clrMapOvr>
+    <a:masterClrMapping/>
+  </p:clrMapOvr>
+</p:notes>
+</file>
+
+<file path=ppt/notesSlides/notesSlide18.xml><?xml version="1.0" encoding="utf-8"?>
+<p:notes xmlns:a="http://schemas.openxmlformats.org/drawingml/2006/main" xmlns:p="http://schemas.openxmlformats.org/presentationml/2006/main" xmlns:r="http://schemas.openxmlformats.org/officeDocument/2006/relationships">
+  <p:cSld>
+    <p:spTree>
+      <p:nvGrpSpPr>
+        <p:cNvPr id="1" name=""/>
+        <p:cNvGrpSpPr/>
+        <p:nvPr/>
+      </p:nvGrpSpPr>
+      <p:grpSpPr>
+        <a:xfrm>
+          <a:off x="0" y="0"/>
+          <a:ext cx="0" cy="0"/>
+          <a:chOff x="0" y="0"/>
+          <a:chExt cx="0" cy="0"/>
+        </a:xfrm>
+      </p:grpSpPr>
+      <p:sp>
+        <p:nvSpPr>
+          <p:cNvPr id="2" name="Slide Image Placeholder 1"/>
+          <p:cNvSpPr>
+            <a:spLocks noGrp="1"/>
+          </p:cNvSpPr>
+          <p:nvPr>
+            <p:ph type="sldImg" idx="2"/>
+          </p:nvPr>
+        </p:nvSpPr>
+        <p:spPr/>
+      </p:sp>
+      <p:sp>
+        <p:nvSpPr>
+          <p:cNvPr id="3" name="Notes Placeholder 2"/>
+          <p:cNvSpPr>
+            <a:spLocks noGrp="1"/>
+          </p:cNvSpPr>
+          <p:nvPr>
+            <p:ph type="body" idx="3" sz="quarter"/>
+          </p:nvPr>
+        </p:nvSpPr>
+        <p:spPr/>
+        <p:txBody>
+          <a:bodyPr/>
+          <a:lstStyle/>
+          <a:p>
+            <a:r>
               <a:t>附录：若对方想知道怎么在电脑上看实物，翻到这页。</a:t>
             </a:r>
           </a:p>
@@ -1356,7 +1569,7 @@
           <a:lstStyle/>
           <a:p>
             <a:r>
-              <a:t>老人端是单独重做的，不是把居民端放大：大字大按钮、免登录。不会打字也不怕，常用的话做成大按钮点一下就问（家里灯不亮了 / 医保怎么报销）。吃药提醒到点会响，就两个按钮：我吃了、10 分钟后再说；用药提醒要社区审核通过才开始播报。紧急求助长按 3 秒出确认框，10 秒不点自动取消——我怕老人放兜里误触，所以防了两道。</a:t>
+              <a:t>居民端（一）报修：提交不用选分类、不用挑部门，一句话说清哪儿坏了；提交后在列表里看进度（上报 → 派单 → 处理 → 办结），每一步带时间。识别到安全隐患（比如燃气味）会自动升级成紧急通知。</a:t>
             </a:r>
           </a:p>
         </p:txBody>
@@ -1426,7 +1639,7 @@
           <a:lstStyle/>
           <a:p>
             <a:r>
-              <a:t>五步走一遍，都是真实界面。① 居民报修：一句话提交，不用选分类。② 政策问答：答案下面有依据，写明哪份政策、适用哪个地区；答不出依据就不硬答，转人工。③ 天气联动：点开执行链，天气守护、健康顾问、通知管理三个角色都在，谁先动谁接话看得见。④ 老人端：长按 3 秒出确认框（我不能真发，点到取消）。⑤ 网格员端：刚才那条报修已进工作台，待办、AI 助手、统计导出都在这一页。同一件事，居民、老人、网格员三边是通的。</a:t>
+              <a:t>居民端（二）问与议：政策问答的答案下面挂依据——哪份政策、适用哪个地区；查不到依据就转人工，不硬答。邻里议事可以提提案、邻居附议、社区回应。通知分普通/紧急/定时，发出去有已读回执。</a:t>
             </a:r>
           </a:p>
         </p:txBody>
@@ -1496,7 +1709,7 @@
           <a:lstStyle/>
           <a:p>
             <a:r>
-              <a:t>再看三处细节（五步之外的补充）：政策问答的答案下面有知识库依据和适用地区；工单详情里能看到谁在什么时候接的、什么时候处理的，全程留痕；居民端报修列表每条走到哪一步、状态和颜色都写清楚。</a:t>
+              <a:t>网格员端（一）工作台：一页看完待办（要派的、要回访的）、数据概览（红黑榜看哪个小区问题多）、导出（按条件导周报）、以及 AI 助手（用大白话问数据）。</a:t>
             </a:r>
           </a:p>
         </p:txBody>
@@ -4836,51 +5049,7 @@
       <p:grpSpPr/>
       <p:sp>
         <p:nvSpPr>
-          <p:cNvPr id="2" name="Rectangle 1"/>
-          <p:cNvSpPr/>
-          <p:nvPr/>
-        </p:nvSpPr>
-        <p:spPr>
-          <a:xfrm>
-            <a:off x="0" y="0"/>
-            <a:ext cx="12191695" cy="6858000"/>
-          </a:xfrm>
-          <a:prstGeom prst="rect">
-            <a:avLst/>
-          </a:prstGeom>
-          <a:solidFill>
-            <a:srgbClr val="122A51"/>
-          </a:solidFill>
-          <a:ln>
-            <a:noFill/>
-          </a:ln>
-          <a:effectLst/>
-        </p:spPr>
-        <p:style>
-          <a:lnRef idx="1">
-            <a:schemeClr val="accent1"/>
-          </a:lnRef>
-          <a:fillRef idx="3">
-            <a:schemeClr val="accent1"/>
-          </a:fillRef>
-          <a:effectRef idx="2">
-            <a:schemeClr val="accent1"/>
-          </a:effectRef>
-          <a:fontRef idx="minor">
-            <a:schemeClr val="lt1"/>
-          </a:fontRef>
-        </p:style>
-        <p:txBody>
-          <a:bodyPr rtlCol="0" anchor="ctr"/>
-          <a:lstStyle/>
-          <a:p>
-            <a:pPr algn="ctr"/>
-          </a:p>
-        </p:txBody>
-      </p:sp>
-      <p:sp>
-        <p:nvSpPr>
-          <p:cNvPr id="3" name="Rounded Rectangle 2"/>
+          <p:cNvPr id="2" name="Rounded Rectangle 1"/>
           <p:cNvSpPr/>
           <p:nvPr/>
         </p:nvSpPr>
@@ -4924,7 +5093,7 @@
       </p:sp>
       <p:sp>
         <p:nvSpPr>
-          <p:cNvPr id="4" name="TextBox 3"/>
+          <p:cNvPr id="3" name="TextBox 2"/>
           <p:cNvSpPr txBox="1"/>
           <p:nvPr/>
         </p:nvSpPr>
@@ -4958,21 +5127,21 @@
                 <a:ea typeface="微软雅黑"/>
                 <a:cs typeface="微软雅黑"/>
               </a:rPr>
-              <a:t>几个能复算的数字</a:t>
-            </a:r>
-          </a:p>
-        </p:txBody>
-      </p:sp>
-      <p:sp>
-        <p:nvSpPr>
-          <p:cNvPr id="5" name="TextBox 4"/>
+              <a:t>老人端：看得见，按得动</a:t>
+            </a:r>
+          </a:p>
+        </p:txBody>
+      </p:sp>
+      <p:sp>
+        <p:nvSpPr>
+          <p:cNvPr id="4" name="TextBox 3"/>
           <p:cNvSpPr txBox="1"/>
           <p:nvPr/>
         </p:nvSpPr>
         <p:spPr>
           <a:xfrm>
-            <a:off x="868680" y="1920240"/>
-            <a:ext cx="4937760" cy="1097280"/>
+            <a:off x="868680" y="1783080"/>
+            <a:ext cx="6309360" cy="3108960"/>
           </a:xfrm>
           <a:prstGeom prst="rect">
             <a:avLst/>
@@ -4987,33 +5156,87 @@
           <a:p>
             <a:pPr algn="l">
               <a:lnSpc>
-                <a:spcPct val="125000"/>
-              </a:lnSpc>
-            </a:pPr>
-            <a:r>
-              <a:rPr sz="7200" b="1">
-                <a:solidFill>
-                  <a:srgbClr val="FFFFFF"/>
-                </a:solidFill>
-                <a:latin typeface="微软雅黑"/>
-                <a:ea typeface="微软雅黑"/>
-                <a:cs typeface="微软雅黑"/>
-              </a:rPr>
-              <a:t>638</a:t>
-            </a:r>
-          </a:p>
-        </p:txBody>
-      </p:sp>
-      <p:sp>
-        <p:nvSpPr>
-          <p:cNvPr id="6" name="TextBox 5"/>
+                <a:spcPct val="150000"/>
+              </a:lnSpc>
+            </a:pPr>
+            <a:r>
+              <a:rPr sz="2400" b="0">
+                <a:solidFill>
+                  <a:srgbClr val="1B2233"/>
+                </a:solidFill>
+                <a:latin typeface="微软雅黑"/>
+                <a:ea typeface="微软雅黑"/>
+                <a:cs typeface="微软雅黑"/>
+              </a:rPr>
+              <a:t>不是把居民端放大，是重做的</a:t>
+            </a:r>
+          </a:p>
+          <a:p>
+            <a:pPr algn="l">
+              <a:lnSpc>
+                <a:spcPct val="150000"/>
+              </a:lnSpc>
+            </a:pPr>
+            <a:r>
+              <a:rPr sz="2400" b="0">
+                <a:solidFill>
+                  <a:srgbClr val="1B2233"/>
+                </a:solidFill>
+                <a:latin typeface="微软雅黑"/>
+                <a:ea typeface="微软雅黑"/>
+                <a:cs typeface="微软雅黑"/>
+              </a:rPr>
+              <a:t>字大、按钮大、不用登录就能进</a:t>
+            </a:r>
+          </a:p>
+          <a:p>
+            <a:pPr algn="l">
+              <a:lnSpc>
+                <a:spcPct val="150000"/>
+              </a:lnSpc>
+            </a:pPr>
+            <a:r>
+              <a:rPr sz="2400" b="0">
+                <a:solidFill>
+                  <a:srgbClr val="1B2233"/>
+                </a:solidFill>
+                <a:latin typeface="微软雅黑"/>
+                <a:ea typeface="微软雅黑"/>
+                <a:cs typeface="微软雅黑"/>
+              </a:rPr>
+              <a:t>首页六件事：天气 通知 报修</a:t>
+            </a:r>
+          </a:p>
+          <a:p>
+            <a:pPr algn="l">
+              <a:lnSpc>
+                <a:spcPct val="150000"/>
+              </a:lnSpc>
+            </a:pPr>
+            <a:r>
+              <a:rPr sz="2400" b="0">
+                <a:solidFill>
+                  <a:srgbClr val="1B2233"/>
+                </a:solidFill>
+                <a:latin typeface="微软雅黑"/>
+                <a:ea typeface="微软雅黑"/>
+                <a:cs typeface="微软雅黑"/>
+              </a:rPr>
+              <a:t>联系社区 联系人 用药提醒</a:t>
+            </a:r>
+          </a:p>
+        </p:txBody>
+      </p:sp>
+      <p:sp>
+        <p:nvSpPr>
+          <p:cNvPr id="5" name="TextBox 4"/>
           <p:cNvSpPr txBox="1"/>
           <p:nvPr/>
         </p:nvSpPr>
         <p:spPr>
           <a:xfrm>
-            <a:off x="868680" y="2971800"/>
-            <a:ext cx="4937760" cy="548640"/>
+            <a:off x="868680" y="4709160"/>
+            <a:ext cx="6309360" cy="1097280"/>
           </a:xfrm>
           <a:prstGeom prst="rect">
             <a:avLst/>
@@ -5032,7 +5255,7 @@
               </a:lnSpc>
             </a:pPr>
             <a:r>
-              <a:rPr sz="2200" b="0">
+              <a:rPr sz="2000" b="1">
                 <a:solidFill>
                   <a:srgbClr val="FF8C42"/>
                 </a:solidFill>
@@ -5040,11 +5263,35 @@
                 <a:ea typeface="微软雅黑"/>
                 <a:cs typeface="微软雅黑"/>
               </a:rPr>
-              <a:t>项测试 · 全绿</a:t>
-            </a:r>
-          </a:p>
-        </p:txBody>
-      </p:sp>
+              <a:t>天气和帮助都能用语音念出来</a:t>
+            </a:r>
+          </a:p>
+        </p:txBody>
+      </p:sp>
+      <p:pic>
+        <p:nvPicPr>
+          <p:cNvPr id="6" name="Picture 5" descr="07-老年端大字首页.png"/>
+          <p:cNvPicPr>
+            <a:picLocks noChangeAspect="1"/>
+          </p:cNvPicPr>
+          <p:nvPr/>
+        </p:nvPicPr>
+        <p:blipFill>
+          <a:blip r:embed="rId2"/>
+          <a:stretch>
+            <a:fillRect/>
+          </a:stretch>
+        </p:blipFill>
+        <p:spPr>
+          <a:xfrm>
+            <a:off x="8200239" y="1600200"/>
+            <a:ext cx="2070400" cy="4480558"/>
+          </a:xfrm>
+          <a:prstGeom prst="rect">
+            <a:avLst/>
+          </a:prstGeom>
+        </p:spPr>
+      </p:pic>
       <p:sp>
         <p:nvSpPr>
           <p:cNvPr id="7" name="TextBox 6"/>
@@ -5053,8 +5300,8 @@
         </p:nvSpPr>
         <p:spPr>
           <a:xfrm>
-            <a:off x="6355080" y="1920240"/>
-            <a:ext cx="4937760" cy="1097280"/>
+            <a:off x="7589520" y="6172200"/>
+            <a:ext cx="3291840" cy="365760"/>
           </a:xfrm>
           <a:prstGeom prst="rect">
             <a:avLst/>
@@ -5067,274 +5314,28 @@
           </a:bodyPr>
           <a:lstStyle/>
           <a:p>
-            <a:pPr algn="l">
+            <a:pPr algn="ctr">
               <a:lnSpc>
                 <a:spcPct val="125000"/>
               </a:lnSpc>
             </a:pPr>
             <a:r>
-              <a:rPr sz="7200" b="1">
-                <a:solidFill>
-                  <a:srgbClr val="FFFFFF"/>
-                </a:solidFill>
-                <a:latin typeface="微软雅黑"/>
-                <a:ea typeface="微软雅黑"/>
-                <a:cs typeface="微软雅黑"/>
-              </a:rPr>
-              <a:t>550</a:t>
-            </a:r>
-          </a:p>
-        </p:txBody>
-      </p:sp>
-      <p:sp>
-        <p:nvSpPr>
-          <p:cNvPr id="8" name="TextBox 7"/>
-          <p:cNvSpPr txBox="1"/>
-          <p:nvPr/>
-        </p:nvSpPr>
-        <p:spPr>
-          <a:xfrm>
-            <a:off x="6355080" y="2971800"/>
-            <a:ext cx="4937760" cy="548640"/>
-          </a:xfrm>
-          <a:prstGeom prst="rect">
-            <a:avLst/>
-          </a:prstGeom>
-          <a:noFill/>
-        </p:spPr>
-        <p:txBody>
-          <a:bodyPr wrap="square">
-            <a:spAutoFit/>
-          </a:bodyPr>
-          <a:lstStyle/>
-          <a:p>
-            <a:pPr algn="l">
-              <a:lnSpc>
-                <a:spcPct val="125000"/>
-              </a:lnSpc>
-            </a:pPr>
-            <a:r>
-              <a:rPr sz="2200" b="0">
-                <a:solidFill>
-                  <a:srgbClr val="FF8C42"/>
-                </a:solidFill>
-                <a:latin typeface="微软雅黑"/>
-                <a:ea typeface="微软雅黑"/>
-                <a:cs typeface="微软雅黑"/>
-              </a:rPr>
-              <a:t>并发 · 零失败</a:t>
-            </a:r>
-          </a:p>
-        </p:txBody>
-      </p:sp>
-      <p:sp>
-        <p:nvSpPr>
-          <p:cNvPr id="9" name="TextBox 8"/>
-          <p:cNvSpPr txBox="1"/>
-          <p:nvPr/>
-        </p:nvSpPr>
-        <p:spPr>
-          <a:xfrm>
-            <a:off x="868680" y="3840480"/>
-            <a:ext cx="4937760" cy="1097280"/>
-          </a:xfrm>
-          <a:prstGeom prst="rect">
-            <a:avLst/>
-          </a:prstGeom>
-          <a:noFill/>
-        </p:spPr>
-        <p:txBody>
-          <a:bodyPr wrap="square">
-            <a:spAutoFit/>
-          </a:bodyPr>
-          <a:lstStyle/>
-          <a:p>
-            <a:pPr algn="l">
-              <a:lnSpc>
-                <a:spcPct val="125000"/>
-              </a:lnSpc>
-            </a:pPr>
-            <a:r>
-              <a:rPr sz="7200" b="1">
-                <a:solidFill>
-                  <a:srgbClr val="FFFFFF"/>
-                </a:solidFill>
-                <a:latin typeface="微软雅黑"/>
-                <a:ea typeface="微软雅黑"/>
-                <a:cs typeface="微软雅黑"/>
-              </a:rPr>
-              <a:t>48</a:t>
-            </a:r>
-          </a:p>
-        </p:txBody>
-      </p:sp>
-      <p:sp>
-        <p:nvSpPr>
-          <p:cNvPr id="10" name="TextBox 9"/>
-          <p:cNvSpPr txBox="1"/>
-          <p:nvPr/>
-        </p:nvSpPr>
-        <p:spPr>
-          <a:xfrm>
-            <a:off x="868680" y="4892040"/>
-            <a:ext cx="4937760" cy="548640"/>
-          </a:xfrm>
-          <a:prstGeom prst="rect">
-            <a:avLst/>
-          </a:prstGeom>
-          <a:noFill/>
-        </p:spPr>
-        <p:txBody>
-          <a:bodyPr wrap="square">
-            <a:spAutoFit/>
-          </a:bodyPr>
-          <a:lstStyle/>
-          <a:p>
-            <a:pPr algn="l">
-              <a:lnSpc>
-                <a:spcPct val="125000"/>
-              </a:lnSpc>
-            </a:pPr>
-            <a:r>
-              <a:rPr sz="2200" b="0">
-                <a:solidFill>
-                  <a:srgbClr val="FF8C42"/>
-                </a:solidFill>
-                <a:latin typeface="微软雅黑"/>
-                <a:ea typeface="微软雅黑"/>
-                <a:cs typeface="微软雅黑"/>
-              </a:rPr>
-              <a:t>条金标 · 第一位命中 100%</a:t>
-            </a:r>
-          </a:p>
-        </p:txBody>
-      </p:sp>
-      <p:sp>
-        <p:nvSpPr>
-          <p:cNvPr id="11" name="TextBox 10"/>
-          <p:cNvSpPr txBox="1"/>
-          <p:nvPr/>
-        </p:nvSpPr>
-        <p:spPr>
-          <a:xfrm>
-            <a:off x="6355080" y="3840480"/>
-            <a:ext cx="4937760" cy="1097280"/>
-          </a:xfrm>
-          <a:prstGeom prst="rect">
-            <a:avLst/>
-          </a:prstGeom>
-          <a:noFill/>
-        </p:spPr>
-        <p:txBody>
-          <a:bodyPr wrap="square">
-            <a:spAutoFit/>
-          </a:bodyPr>
-          <a:lstStyle/>
-          <a:p>
-            <a:pPr algn="l">
-              <a:lnSpc>
-                <a:spcPct val="125000"/>
-              </a:lnSpc>
-            </a:pPr>
-            <a:r>
-              <a:rPr sz="7200" b="1">
-                <a:solidFill>
-                  <a:srgbClr val="FFFFFF"/>
-                </a:solidFill>
-                <a:latin typeface="微软雅黑"/>
-                <a:ea typeface="微软雅黑"/>
-                <a:cs typeface="微软雅黑"/>
-              </a:rPr>
-              <a:t>0</a:t>
-            </a:r>
-          </a:p>
-        </p:txBody>
-      </p:sp>
-      <p:sp>
-        <p:nvSpPr>
-          <p:cNvPr id="12" name="TextBox 11"/>
-          <p:cNvSpPr txBox="1"/>
-          <p:nvPr/>
-        </p:nvSpPr>
-        <p:spPr>
-          <a:xfrm>
-            <a:off x="6355080" y="4892040"/>
-            <a:ext cx="4937760" cy="548640"/>
-          </a:xfrm>
-          <a:prstGeom prst="rect">
-            <a:avLst/>
-          </a:prstGeom>
-          <a:noFill/>
-        </p:spPr>
-        <p:txBody>
-          <a:bodyPr wrap="square">
-            <a:spAutoFit/>
-          </a:bodyPr>
-          <a:lstStyle/>
-          <a:p>
-            <a:pPr algn="l">
-              <a:lnSpc>
-                <a:spcPct val="125000"/>
-              </a:lnSpc>
-            </a:pPr>
-            <a:r>
-              <a:rPr sz="2200" b="0">
-                <a:solidFill>
-                  <a:srgbClr val="FF8C42"/>
-                </a:solidFill>
-                <a:latin typeface="微软雅黑"/>
-                <a:ea typeface="微软雅黑"/>
-                <a:cs typeface="微软雅黑"/>
-              </a:rPr>
-              <a:t>ruff 问题</a:t>
-            </a:r>
-          </a:p>
-        </p:txBody>
-      </p:sp>
-      <p:sp>
-        <p:nvSpPr>
-          <p:cNvPr id="13" name="TextBox 12"/>
-          <p:cNvSpPr txBox="1"/>
-          <p:nvPr/>
-        </p:nvSpPr>
-        <p:spPr>
-          <a:xfrm>
-            <a:off x="868680" y="5760720"/>
-            <a:ext cx="10058400" cy="640080"/>
-          </a:xfrm>
-          <a:prstGeom prst="rect">
-            <a:avLst/>
-          </a:prstGeom>
-          <a:noFill/>
-        </p:spPr>
-        <p:txBody>
-          <a:bodyPr wrap="square">
-            <a:spAutoFit/>
-          </a:bodyPr>
-          <a:lstStyle/>
-          <a:p>
-            <a:pPr algn="l">
-              <a:lnSpc>
-                <a:spcPct val="125000"/>
-              </a:lnSpc>
-            </a:pPr>
-            <a:r>
-              <a:rPr sz="2000" b="0">
-                <a:solidFill>
-                  <a:srgbClr val="FFFFFF"/>
-                </a:solidFill>
-                <a:latin typeface="微软雅黑"/>
-                <a:ea typeface="微软雅黑"/>
-                <a:cs typeface="微软雅黑"/>
-              </a:rPr>
-              <a:t>数据库 schema v46 · 约 50 张表　｜　本机自测，非第三方测评</a:t>
-            </a:r>
-          </a:p>
-        </p:txBody>
-      </p:sp>
-      <p:sp>
-        <p:nvSpPr>
-          <p:cNvPr id="14" name="Rectangle 13"/>
+              <a:rPr sz="1600" b="0">
+                <a:solidFill>
+                  <a:srgbClr val="6B7485"/>
+                </a:solidFill>
+                <a:latin typeface="微软雅黑"/>
+                <a:ea typeface="微软雅黑"/>
+                <a:cs typeface="微软雅黑"/>
+              </a:rPr>
+              <a:t>大字首页（手机实拍）</a:t>
+            </a:r>
+          </a:p>
+        </p:txBody>
+      </p:sp>
+      <p:sp>
+        <p:nvSpPr>
+          <p:cNvPr id="8" name="Rectangle 7"/>
           <p:cNvSpPr/>
           <p:nvPr/>
         </p:nvSpPr>
@@ -5378,7 +5379,7 @@
       </p:sp>
       <p:sp>
         <p:nvSpPr>
-          <p:cNvPr id="15" name="TextBox 14"/>
+          <p:cNvPr id="9" name="TextBox 8"/>
           <p:cNvSpPr txBox="1"/>
           <p:nvPr/>
         </p:nvSpPr>
@@ -5419,7 +5420,7 @@
       </p:sp>
       <p:sp>
         <p:nvSpPr>
-          <p:cNvPr id="16" name="TextBox 15"/>
+          <p:cNvPr id="10" name="TextBox 9"/>
           <p:cNvSpPr txBox="1"/>
           <p:nvPr/>
         </p:nvSpPr>
@@ -5453,7 +5454,7 @@
                 <a:ea typeface="微软雅黑"/>
                 <a:cs typeface="微软雅黑"/>
               </a:rPr>
-              <a:t>10 / 11</a:t>
+              <a:t>10 / 14</a:t>
             </a:r>
           </a:p>
         </p:txBody>
@@ -5556,55 +5557,35 @@
                 <a:ea typeface="微软雅黑"/>
                 <a:cs typeface="微软雅黑"/>
               </a:rPr>
-              <a:t>它现在的位置，和我想请教的三件事</a:t>
-            </a:r>
-          </a:p>
-        </p:txBody>
-      </p:sp>
-      <p:sp>
-        <p:nvSpPr>
-          <p:cNvPr id="4" name="Rounded Rectangle 3"/>
-          <p:cNvSpPr/>
-          <p:nvPr/>
-        </p:nvSpPr>
-        <p:spPr>
-          <a:xfrm>
-            <a:off x="868680" y="1691640"/>
-            <a:ext cx="10424160" cy="914400"/>
-          </a:xfrm>
-          <a:prstGeom prst="roundRect">
-            <a:avLst/>
-          </a:prstGeom>
-          <a:solidFill>
-            <a:srgbClr val="F2F5FB"/>
-          </a:solidFill>
-          <a:ln>
-            <a:noFill/>
-          </a:ln>
-          <a:effectLst/>
-        </p:spPr>
-        <p:style>
-          <a:lnRef idx="1">
-            <a:schemeClr val="accent1"/>
-          </a:lnRef>
-          <a:fillRef idx="3">
-            <a:schemeClr val="accent1"/>
-          </a:fillRef>
-          <a:effectRef idx="2">
-            <a:schemeClr val="accent1"/>
-          </a:effectRef>
-          <a:fontRef idx="minor">
-            <a:schemeClr val="lt1"/>
-          </a:fontRef>
-        </p:style>
-        <p:txBody>
-          <a:bodyPr rtlCol="0" anchor="ctr"/>
-          <a:lstStyle/>
-          <a:p>
-            <a:pPr algn="ctr"/>
-          </a:p>
-        </p:txBody>
-      </p:sp>
+              <a:t>老人端：不会打字，也能办事</a:t>
+            </a:r>
+          </a:p>
+        </p:txBody>
+      </p:sp>
+      <p:pic>
+        <p:nvPicPr>
+          <p:cNvPr id="4" name="Picture 3" descr="15-老年端-社区小助手.png"/>
+          <p:cNvPicPr>
+            <a:picLocks noChangeAspect="1"/>
+          </p:cNvPicPr>
+          <p:nvPr/>
+        </p:nvPicPr>
+        <p:blipFill>
+          <a:blip r:embed="rId2"/>
+          <a:stretch>
+            <a:fillRect/>
+          </a:stretch>
+        </p:blipFill>
+        <p:spPr>
+          <a:xfrm>
+            <a:off x="1493592" y="1554480"/>
+            <a:ext cx="1859135" cy="4023359"/>
+          </a:xfrm>
+          <a:prstGeom prst="rect">
+            <a:avLst/>
+          </a:prstGeom>
+        </p:spPr>
+      </p:pic>
       <p:sp>
         <p:nvSpPr>
           <p:cNvPr id="5" name="TextBox 4"/>
@@ -5613,8 +5594,8 @@
         </p:nvSpPr>
         <p:spPr>
           <a:xfrm>
-            <a:off x="1188720" y="1828800"/>
-            <a:ext cx="9875520" cy="640080"/>
+            <a:off x="960120" y="5669280"/>
+            <a:ext cx="2926080" cy="548640"/>
           </a:xfrm>
           <a:prstGeom prst="rect">
             <a:avLst/>
@@ -5627,35 +5608,59 @@
           </a:bodyPr>
           <a:lstStyle/>
           <a:p>
-            <a:pPr algn="l">
+            <a:pPr algn="ctr">
               <a:lnSpc>
                 <a:spcPct val="125000"/>
               </a:lnSpc>
             </a:pPr>
             <a:r>
-              <a:rPr sz="2400" b="0">
-                <a:solidFill>
-                  <a:srgbClr val="1B2233"/>
-                </a:solidFill>
-                <a:latin typeface="微软雅黑"/>
-                <a:ea typeface="微软雅黑"/>
-                <a:cs typeface="微软雅黑"/>
-              </a:rPr>
-              <a:t>工程原型：还没在真实街道试点，没有运营数据，商业模式在探索</a:t>
-            </a:r>
-          </a:p>
-        </p:txBody>
-      </p:sp>
-      <p:sp>
-        <p:nvSpPr>
-          <p:cNvPr id="6" name="TextBox 5"/>
+              <a:rPr sz="1500" b="0">
+                <a:solidFill>
+                  <a:srgbClr val="6B7485"/>
+                </a:solidFill>
+                <a:latin typeface="微软雅黑"/>
+                <a:ea typeface="微软雅黑"/>
+                <a:cs typeface="微软雅黑"/>
+              </a:rPr>
+              <a:t>点现成的话就能问</a:t>
+            </a:r>
+          </a:p>
+        </p:txBody>
+      </p:sp>
+      <p:pic>
+        <p:nvPicPr>
+          <p:cNvPr id="6" name="Picture 5" descr="16-老年端-用药提醒.png"/>
+          <p:cNvPicPr>
+            <a:picLocks noChangeAspect="1"/>
+          </p:cNvPicPr>
+          <p:nvPr/>
+        </p:nvPicPr>
+        <p:blipFill>
+          <a:blip r:embed="rId3"/>
+          <a:stretch>
+            <a:fillRect/>
+          </a:stretch>
+        </p:blipFill>
+        <p:spPr>
+          <a:xfrm>
+            <a:off x="4739712" y="1554480"/>
+            <a:ext cx="1859135" cy="4023359"/>
+          </a:xfrm>
+          <a:prstGeom prst="rect">
+            <a:avLst/>
+          </a:prstGeom>
+        </p:spPr>
+      </p:pic>
+      <p:sp>
+        <p:nvSpPr>
+          <p:cNvPr id="7" name="TextBox 6"/>
           <p:cNvSpPr txBox="1"/>
           <p:nvPr/>
         </p:nvSpPr>
         <p:spPr>
           <a:xfrm>
-            <a:off x="1097280" y="3063240"/>
-            <a:ext cx="7680960" cy="640080"/>
+            <a:off x="4206240" y="5669280"/>
+            <a:ext cx="2926080" cy="548640"/>
           </a:xfrm>
           <a:prstGeom prst="rect">
             <a:avLst/>
@@ -5668,35 +5673,59 @@
           </a:bodyPr>
           <a:lstStyle/>
           <a:p>
-            <a:pPr algn="l">
+            <a:pPr algn="ctr">
               <a:lnSpc>
                 <a:spcPct val="125000"/>
               </a:lnSpc>
             </a:pPr>
             <a:r>
-              <a:rPr sz="2600" b="0">
-                <a:solidFill>
-                  <a:srgbClr val="1B2233"/>
-                </a:solidFill>
-                <a:latin typeface="微软雅黑"/>
-                <a:ea typeface="微软雅黑"/>
-                <a:cs typeface="微软雅黑"/>
-              </a:rPr>
-              <a:t>① 多智能体的「自动」边界怎么划？</a:t>
-            </a:r>
-          </a:p>
-        </p:txBody>
-      </p:sp>
-      <p:sp>
-        <p:nvSpPr>
-          <p:cNvPr id="7" name="TextBox 6"/>
+              <a:rPr sz="1500" b="0">
+                <a:solidFill>
+                  <a:srgbClr val="6B7485"/>
+                </a:solidFill>
+                <a:latin typeface="微软雅黑"/>
+                <a:ea typeface="微软雅黑"/>
+                <a:cs typeface="微软雅黑"/>
+              </a:rPr>
+              <a:t>我吃了 / 10 分钟后再说</a:t>
+            </a:r>
+          </a:p>
+        </p:txBody>
+      </p:sp>
+      <p:pic>
+        <p:nvPicPr>
+          <p:cNvPr id="8" name="Picture 7" descr="08-老年端长按求助确认框.png"/>
+          <p:cNvPicPr>
+            <a:picLocks noChangeAspect="1"/>
+          </p:cNvPicPr>
+          <p:nvPr/>
+        </p:nvPicPr>
+        <p:blipFill>
+          <a:blip r:embed="rId4"/>
+          <a:stretch>
+            <a:fillRect/>
+          </a:stretch>
+        </p:blipFill>
+        <p:spPr>
+          <a:xfrm>
+            <a:off x="7985832" y="1554480"/>
+            <a:ext cx="1859135" cy="4023359"/>
+          </a:xfrm>
+          <a:prstGeom prst="rect">
+            <a:avLst/>
+          </a:prstGeom>
+        </p:spPr>
+      </p:pic>
+      <p:sp>
+        <p:nvSpPr>
+          <p:cNvPr id="9" name="TextBox 8"/>
           <p:cNvSpPr txBox="1"/>
           <p:nvPr/>
         </p:nvSpPr>
         <p:spPr>
           <a:xfrm>
-            <a:off x="8961120" y="3154680"/>
-            <a:ext cx="2377440" cy="548640"/>
+            <a:off x="7452360" y="5669280"/>
+            <a:ext cx="2926080" cy="548640"/>
           </a:xfrm>
           <a:prstGeom prst="rect">
             <a:avLst/>
@@ -5709,7 +5738,7 @@
           </a:bodyPr>
           <a:lstStyle/>
           <a:p>
-            <a:pPr algn="l">
+            <a:pPr algn="ctr">
               <a:lnSpc>
                 <a:spcPct val="125000"/>
               </a:lnSpc>
@@ -5723,21 +5752,21 @@
                 <a:ea typeface="微软雅黑"/>
                 <a:cs typeface="微软雅黑"/>
               </a:rPr>
-              <a:t>想请教技术专家</a:t>
-            </a:r>
-          </a:p>
-        </p:txBody>
-      </p:sp>
-      <p:sp>
-        <p:nvSpPr>
-          <p:cNvPr id="8" name="TextBox 7"/>
+              <a:t>长按 3 秒，10 秒自动取消</a:t>
+            </a:r>
+          </a:p>
+        </p:txBody>
+      </p:sp>
+      <p:sp>
+        <p:nvSpPr>
+          <p:cNvPr id="10" name="TextBox 9"/>
           <p:cNvSpPr txBox="1"/>
           <p:nvPr/>
         </p:nvSpPr>
         <p:spPr>
           <a:xfrm>
-            <a:off x="1097280" y="3931920"/>
-            <a:ext cx="7680960" cy="640080"/>
+            <a:off x="868680" y="6263640"/>
+            <a:ext cx="10424160" cy="365760"/>
           </a:xfrm>
           <a:prstGeom prst="rect">
             <a:avLst/>
@@ -5756,171 +5785,7 @@
               </a:lnSpc>
             </a:pPr>
             <a:r>
-              <a:rPr sz="2600" b="0">
-                <a:solidFill>
-                  <a:srgbClr val="1B2233"/>
-                </a:solidFill>
-                <a:latin typeface="微软雅黑"/>
-                <a:ea typeface="微软雅黑"/>
-                <a:cs typeface="微软雅黑"/>
-              </a:rPr>
-              <a:t>② 第一个试点社区怎么找、怎么谈？</a:t>
-            </a:r>
-          </a:p>
-        </p:txBody>
-      </p:sp>
-      <p:sp>
-        <p:nvSpPr>
-          <p:cNvPr id="9" name="TextBox 8"/>
-          <p:cNvSpPr txBox="1"/>
-          <p:nvPr/>
-        </p:nvSpPr>
-        <p:spPr>
-          <a:xfrm>
-            <a:off x="8961120" y="4023360"/>
-            <a:ext cx="2377440" cy="548640"/>
-          </a:xfrm>
-          <a:prstGeom prst="rect">
-            <a:avLst/>
-          </a:prstGeom>
-          <a:noFill/>
-        </p:spPr>
-        <p:txBody>
-          <a:bodyPr wrap="square">
-            <a:spAutoFit/>
-          </a:bodyPr>
-          <a:lstStyle/>
-          <a:p>
-            <a:pPr algn="l">
-              <a:lnSpc>
-                <a:spcPct val="125000"/>
-              </a:lnSpc>
-            </a:pPr>
-            <a:r>
-              <a:rPr sz="1500" b="0">
-                <a:solidFill>
-                  <a:srgbClr val="6B7485"/>
-                </a:solidFill>
-                <a:latin typeface="微软雅黑"/>
-                <a:ea typeface="微软雅黑"/>
-                <a:cs typeface="微软雅黑"/>
-              </a:rPr>
-              <a:t>想请教企业负责人</a:t>
-            </a:r>
-          </a:p>
-        </p:txBody>
-      </p:sp>
-      <p:sp>
-        <p:nvSpPr>
-          <p:cNvPr id="10" name="TextBox 9"/>
-          <p:cNvSpPr txBox="1"/>
-          <p:nvPr/>
-        </p:nvSpPr>
-        <p:spPr>
-          <a:xfrm>
-            <a:off x="1097280" y="4800600"/>
-            <a:ext cx="7680960" cy="640080"/>
-          </a:xfrm>
-          <a:prstGeom prst="rect">
-            <a:avLst/>
-          </a:prstGeom>
-          <a:noFill/>
-        </p:spPr>
-        <p:txBody>
-          <a:bodyPr wrap="square">
-            <a:spAutoFit/>
-          </a:bodyPr>
-          <a:lstStyle/>
-          <a:p>
-            <a:pPr algn="l">
-              <a:lnSpc>
-                <a:spcPct val="125000"/>
-              </a:lnSpc>
-            </a:pPr>
-            <a:r>
-              <a:rPr sz="2600" b="0">
-                <a:solidFill>
-                  <a:srgbClr val="1B2233"/>
-                </a:solidFill>
-                <a:latin typeface="微软雅黑"/>
-                <a:ea typeface="微软雅黑"/>
-                <a:cs typeface="微软雅黑"/>
-              </a:rPr>
-              <a:t>③ 没有历史数据，冷启动怎么破？</a:t>
-            </a:r>
-          </a:p>
-        </p:txBody>
-      </p:sp>
-      <p:sp>
-        <p:nvSpPr>
-          <p:cNvPr id="11" name="TextBox 10"/>
-          <p:cNvSpPr txBox="1"/>
-          <p:nvPr/>
-        </p:nvSpPr>
-        <p:spPr>
-          <a:xfrm>
-            <a:off x="8961120" y="4892040"/>
-            <a:ext cx="2377440" cy="548640"/>
-          </a:xfrm>
-          <a:prstGeom prst="rect">
-            <a:avLst/>
-          </a:prstGeom>
-          <a:noFill/>
-        </p:spPr>
-        <p:txBody>
-          <a:bodyPr wrap="square">
-            <a:spAutoFit/>
-          </a:bodyPr>
-          <a:lstStyle/>
-          <a:p>
-            <a:pPr algn="l">
-              <a:lnSpc>
-                <a:spcPct val="125000"/>
-              </a:lnSpc>
-            </a:pPr>
-            <a:r>
-              <a:rPr sz="1500" b="0">
-                <a:solidFill>
-                  <a:srgbClr val="6B7485"/>
-                </a:solidFill>
-                <a:latin typeface="微软雅黑"/>
-                <a:ea typeface="微软雅黑"/>
-                <a:cs typeface="微软雅黑"/>
-              </a:rPr>
-              <a:t>想请教投资人视角</a:t>
-            </a:r>
-          </a:p>
-        </p:txBody>
-      </p:sp>
-      <p:sp>
-        <p:nvSpPr>
-          <p:cNvPr id="12" name="TextBox 11"/>
-          <p:cNvSpPr txBox="1"/>
-          <p:nvPr/>
-        </p:nvSpPr>
-        <p:spPr>
-          <a:xfrm>
-            <a:off x="1097280" y="5943600"/>
-            <a:ext cx="10058400" cy="548640"/>
-          </a:xfrm>
-          <a:prstGeom prst="rect">
-            <a:avLst/>
-          </a:prstGeom>
-          <a:noFill/>
-        </p:spPr>
-        <p:txBody>
-          <a:bodyPr wrap="square">
-            <a:spAutoFit/>
-          </a:bodyPr>
-          <a:lstStyle/>
-          <a:p>
-            <a:pPr algn="l">
-              <a:lnSpc>
-                <a:spcPct val="125000"/>
-              </a:lnSpc>
-            </a:pPr>
-            <a:r>
-              <a:rPr sz="2000" b="1">
+              <a:rPr sz="1800" b="1">
                 <a:solidFill>
                   <a:srgbClr val="FF8C42"/>
                 </a:solidFill>
@@ -5928,14 +5793,14 @@
                 <a:ea typeface="微软雅黑"/>
                 <a:cs typeface="微软雅黑"/>
               </a:rPr>
-              <a:t>张奶奶那条路，现在是一句话。</a:t>
-            </a:r>
-          </a:p>
-        </p:txBody>
-      </p:sp>
-      <p:sp>
-        <p:nvSpPr>
-          <p:cNvPr id="13" name="Rectangle 12"/>
+              <a:t>三条路都不用打字；紧急求助防了两道</a:t>
+            </a:r>
+          </a:p>
+        </p:txBody>
+      </p:sp>
+      <p:sp>
+        <p:nvSpPr>
+          <p:cNvPr id="11" name="Rectangle 10"/>
           <p:cNvSpPr/>
           <p:nvPr/>
         </p:nvSpPr>
@@ -5979,7 +5844,7 @@
       </p:sp>
       <p:sp>
         <p:nvSpPr>
-          <p:cNvPr id="14" name="TextBox 13"/>
+          <p:cNvPr id="12" name="TextBox 11"/>
           <p:cNvSpPr txBox="1"/>
           <p:nvPr/>
         </p:nvSpPr>
@@ -6020,7 +5885,7 @@
       </p:sp>
       <p:sp>
         <p:nvSpPr>
-          <p:cNvPr id="15" name="TextBox 14"/>
+          <p:cNvPr id="13" name="TextBox 12"/>
           <p:cNvSpPr txBox="1"/>
           <p:nvPr/>
         </p:nvSpPr>
@@ -6054,7 +5919,7 @@
                 <a:ea typeface="微软雅黑"/>
                 <a:cs typeface="微软雅黑"/>
               </a:rPr>
-              <a:t>11 / 11</a:t>
+              <a:t>11 / 14</a:t>
             </a:r>
           </a:p>
         </p:txBody>
@@ -6157,21 +6022,65 @@
                 <a:ea typeface="微软雅黑"/>
                 <a:cs typeface="微软雅黑"/>
               </a:rPr>
-              <a:t>备用：为什么规则为主、大模型为辅</a:t>
-            </a:r>
-          </a:p>
-        </p:txBody>
-      </p:sp>
-      <p:sp>
-        <p:nvSpPr>
-          <p:cNvPr id="4" name="TextBox 3"/>
+              <a:t>现在能用的功能</a:t>
+            </a:r>
+          </a:p>
+        </p:txBody>
+      </p:sp>
+      <p:sp>
+        <p:nvSpPr>
+          <p:cNvPr id="4" name="Rounded Rectangle 3"/>
+          <p:cNvSpPr/>
+          <p:nvPr/>
+        </p:nvSpPr>
+        <p:spPr>
+          <a:xfrm>
+            <a:off x="868680" y="1737360"/>
+            <a:ext cx="5120640" cy="960120"/>
+          </a:xfrm>
+          <a:prstGeom prst="roundRect">
+            <a:avLst/>
+          </a:prstGeom>
+          <a:solidFill>
+            <a:srgbClr val="F2F5FB"/>
+          </a:solidFill>
+          <a:ln>
+            <a:noFill/>
+          </a:ln>
+          <a:effectLst/>
+        </p:spPr>
+        <p:style>
+          <a:lnRef idx="1">
+            <a:schemeClr val="accent1"/>
+          </a:lnRef>
+          <a:fillRef idx="3">
+            <a:schemeClr val="accent1"/>
+          </a:fillRef>
+          <a:effectRef idx="2">
+            <a:schemeClr val="accent1"/>
+          </a:effectRef>
+          <a:fontRef idx="minor">
+            <a:schemeClr val="lt1"/>
+          </a:fontRef>
+        </p:style>
+        <p:txBody>
+          <a:bodyPr rtlCol="0" anchor="ctr"/>
+          <a:lstStyle/>
+          <a:p>
+            <a:pPr algn="ctr"/>
+          </a:p>
+        </p:txBody>
+      </p:sp>
+      <p:sp>
+        <p:nvSpPr>
+          <p:cNvPr id="5" name="TextBox 4"/>
           <p:cNvSpPr txBox="1"/>
           <p:nvPr/>
         </p:nvSpPr>
         <p:spPr>
           <a:xfrm>
-            <a:off x="868680" y="1828800"/>
-            <a:ext cx="10424160" cy="2743200"/>
+            <a:off x="1097280" y="1847088"/>
+            <a:ext cx="1463040" cy="731520"/>
           </a:xfrm>
           <a:prstGeom prst="rect">
             <a:avLst/>
@@ -6186,87 +6095,33 @@
           <a:p>
             <a:pPr algn="l">
               <a:lnSpc>
-                <a:spcPct val="150000"/>
-              </a:lnSpc>
-            </a:pPr>
-            <a:r>
-              <a:rPr sz="2600" b="0">
-                <a:solidFill>
-                  <a:srgbClr val="1B2233"/>
-                </a:solidFill>
-                <a:latin typeface="微软雅黑"/>
-                <a:ea typeface="微软雅黑"/>
-                <a:cs typeface="微软雅黑"/>
-              </a:rPr>
-              <a:t>接了 DeepSeek，但四个 LLM 开关默认关</a:t>
-            </a:r>
-          </a:p>
-          <a:p>
-            <a:pPr algn="l">
-              <a:lnSpc>
-                <a:spcPct val="150000"/>
-              </a:lnSpc>
-            </a:pPr>
-            <a:r>
-              <a:rPr sz="2600" b="0">
-                <a:solidFill>
-                  <a:srgbClr val="1B2233"/>
-                </a:solidFill>
-                <a:latin typeface="微软雅黑"/>
-                <a:ea typeface="微软雅黑"/>
-                <a:cs typeface="微软雅黑"/>
-              </a:rPr>
-              <a:t>意图识别 / 追问补全 / 政策生成 → 大模型</a:t>
-            </a:r>
-          </a:p>
-          <a:p>
-            <a:pPr algn="l">
-              <a:lnSpc>
-                <a:spcPct val="150000"/>
-              </a:lnSpc>
-            </a:pPr>
-            <a:r>
-              <a:rPr sz="2600" b="0">
-                <a:solidFill>
-                  <a:srgbClr val="1B2233"/>
-                </a:solidFill>
-                <a:latin typeface="微软雅黑"/>
-                <a:ea typeface="微软雅黑"/>
-                <a:cs typeface="微软雅黑"/>
-              </a:rPr>
-              <a:t>状态机 / 派单 / 权限 / 加密 → 永远走规则</a:t>
-            </a:r>
-          </a:p>
-          <a:p>
-            <a:pPr algn="l">
-              <a:lnSpc>
-                <a:spcPct val="150000"/>
-              </a:lnSpc>
-            </a:pPr>
-            <a:r>
-              <a:rPr sz="2600" b="0">
-                <a:solidFill>
-                  <a:srgbClr val="1B2233"/>
-                </a:solidFill>
-                <a:latin typeface="微软雅黑"/>
-                <a:ea typeface="微软雅黑"/>
-                <a:cs typeface="微软雅黑"/>
-              </a:rPr>
-              <a:t>每次调用 3–5 秒超时，自动回落规则</a:t>
-            </a:r>
-          </a:p>
-        </p:txBody>
-      </p:sp>
-      <p:sp>
-        <p:nvSpPr>
-          <p:cNvPr id="5" name="TextBox 4"/>
+                <a:spcPct val="125000"/>
+              </a:lnSpc>
+            </a:pPr>
+            <a:r>
+              <a:rPr sz="2000" b="1">
+                <a:solidFill>
+                  <a:srgbClr val="122A51"/>
+                </a:solidFill>
+                <a:latin typeface="微软雅黑"/>
+                <a:ea typeface="微软雅黑"/>
+                <a:cs typeface="微软雅黑"/>
+              </a:rPr>
+              <a:t>报修</a:t>
+            </a:r>
+          </a:p>
+        </p:txBody>
+      </p:sp>
+      <p:sp>
+        <p:nvSpPr>
+          <p:cNvPr id="6" name="TextBox 5"/>
           <p:cNvSpPr txBox="1"/>
           <p:nvPr/>
         </p:nvSpPr>
         <p:spPr>
           <a:xfrm>
-            <a:off x="868680" y="5760720"/>
-            <a:ext cx="10424160" cy="548640"/>
+            <a:off x="2606039" y="1883664"/>
+            <a:ext cx="3200400" cy="731520"/>
           </a:xfrm>
           <a:prstGeom prst="rect">
             <a:avLst/>
@@ -6285,7 +6140,974 @@
               </a:lnSpc>
             </a:pPr>
             <a:r>
-              <a:rPr sz="2000" b="0">
+              <a:rPr sz="1600" b="0">
+                <a:solidFill>
+                  <a:srgbClr val="1B2233"/>
+                </a:solidFill>
+                <a:latin typeface="微软雅黑"/>
+                <a:ea typeface="微软雅黑"/>
+                <a:cs typeface="微软雅黑"/>
+              </a:rPr>
+              <a:t>全状态机：提交 → 审核 → 派单 → 处理 → 办结 → 回访</a:t>
+            </a:r>
+          </a:p>
+        </p:txBody>
+      </p:sp>
+      <p:sp>
+        <p:nvSpPr>
+          <p:cNvPr id="7" name="Rounded Rectangle 6"/>
+          <p:cNvSpPr/>
+          <p:nvPr/>
+        </p:nvSpPr>
+        <p:spPr>
+          <a:xfrm>
+            <a:off x="6355080" y="1737360"/>
+            <a:ext cx="5120640" cy="960120"/>
+          </a:xfrm>
+          <a:prstGeom prst="roundRect">
+            <a:avLst/>
+          </a:prstGeom>
+          <a:solidFill>
+            <a:srgbClr val="F2F5FB"/>
+          </a:solidFill>
+          <a:ln>
+            <a:noFill/>
+          </a:ln>
+          <a:effectLst/>
+        </p:spPr>
+        <p:style>
+          <a:lnRef idx="1">
+            <a:schemeClr val="accent1"/>
+          </a:lnRef>
+          <a:fillRef idx="3">
+            <a:schemeClr val="accent1"/>
+          </a:fillRef>
+          <a:effectRef idx="2">
+            <a:schemeClr val="accent1"/>
+          </a:effectRef>
+          <a:fontRef idx="minor">
+            <a:schemeClr val="lt1"/>
+          </a:fontRef>
+        </p:style>
+        <p:txBody>
+          <a:bodyPr rtlCol="0" anchor="ctr"/>
+          <a:lstStyle/>
+          <a:p>
+            <a:pPr algn="ctr"/>
+          </a:p>
+        </p:txBody>
+      </p:sp>
+      <p:sp>
+        <p:nvSpPr>
+          <p:cNvPr id="8" name="TextBox 7"/>
+          <p:cNvSpPr txBox="1"/>
+          <p:nvPr/>
+        </p:nvSpPr>
+        <p:spPr>
+          <a:xfrm>
+            <a:off x="6583680" y="1847088"/>
+            <a:ext cx="1463040" cy="731520"/>
+          </a:xfrm>
+          <a:prstGeom prst="rect">
+            <a:avLst/>
+          </a:prstGeom>
+          <a:noFill/>
+        </p:spPr>
+        <p:txBody>
+          <a:bodyPr wrap="square">
+            <a:spAutoFit/>
+          </a:bodyPr>
+          <a:lstStyle/>
+          <a:p>
+            <a:pPr algn="l">
+              <a:lnSpc>
+                <a:spcPct val="125000"/>
+              </a:lnSpc>
+            </a:pPr>
+            <a:r>
+              <a:rPr sz="2000" b="1">
+                <a:solidFill>
+                  <a:srgbClr val="122A51"/>
+                </a:solidFill>
+                <a:latin typeface="微软雅黑"/>
+                <a:ea typeface="微软雅黑"/>
+                <a:cs typeface="微软雅黑"/>
+              </a:rPr>
+              <a:t>提案</a:t>
+            </a:r>
+          </a:p>
+        </p:txBody>
+      </p:sp>
+      <p:sp>
+        <p:nvSpPr>
+          <p:cNvPr id="9" name="TextBox 8"/>
+          <p:cNvSpPr txBox="1"/>
+          <p:nvPr/>
+        </p:nvSpPr>
+        <p:spPr>
+          <a:xfrm>
+            <a:off x="8092440" y="1883664"/>
+            <a:ext cx="3200400" cy="731520"/>
+          </a:xfrm>
+          <a:prstGeom prst="rect">
+            <a:avLst/>
+          </a:prstGeom>
+          <a:noFill/>
+        </p:spPr>
+        <p:txBody>
+          <a:bodyPr wrap="square">
+            <a:spAutoFit/>
+          </a:bodyPr>
+          <a:lstStyle/>
+          <a:p>
+            <a:pPr algn="l">
+              <a:lnSpc>
+                <a:spcPct val="125000"/>
+              </a:lnSpc>
+            </a:pPr>
+            <a:r>
+              <a:rPr sz="1600" b="0">
+                <a:solidFill>
+                  <a:srgbClr val="1B2233"/>
+                </a:solidFill>
+                <a:latin typeface="微软雅黑"/>
+                <a:ea typeface="微软雅黑"/>
+                <a:cs typeface="微软雅黑"/>
+              </a:rPr>
+              <a:t>全生命周期：提交 → 附议 → 回应 → 采纳 → 实施</a:t>
+            </a:r>
+          </a:p>
+        </p:txBody>
+      </p:sp>
+      <p:sp>
+        <p:nvSpPr>
+          <p:cNvPr id="10" name="Rounded Rectangle 9"/>
+          <p:cNvSpPr/>
+          <p:nvPr/>
+        </p:nvSpPr>
+        <p:spPr>
+          <a:xfrm>
+            <a:off x="868680" y="2880360"/>
+            <a:ext cx="5120640" cy="960120"/>
+          </a:xfrm>
+          <a:prstGeom prst="roundRect">
+            <a:avLst/>
+          </a:prstGeom>
+          <a:solidFill>
+            <a:srgbClr val="F2F5FB"/>
+          </a:solidFill>
+          <a:ln>
+            <a:noFill/>
+          </a:ln>
+          <a:effectLst/>
+        </p:spPr>
+        <p:style>
+          <a:lnRef idx="1">
+            <a:schemeClr val="accent1"/>
+          </a:lnRef>
+          <a:fillRef idx="3">
+            <a:schemeClr val="accent1"/>
+          </a:fillRef>
+          <a:effectRef idx="2">
+            <a:schemeClr val="accent1"/>
+          </a:effectRef>
+          <a:fontRef idx="minor">
+            <a:schemeClr val="lt1"/>
+          </a:fontRef>
+        </p:style>
+        <p:txBody>
+          <a:bodyPr rtlCol="0" anchor="ctr"/>
+          <a:lstStyle/>
+          <a:p>
+            <a:pPr algn="ctr"/>
+          </a:p>
+        </p:txBody>
+      </p:sp>
+      <p:sp>
+        <p:nvSpPr>
+          <p:cNvPr id="11" name="TextBox 10"/>
+          <p:cNvSpPr txBox="1"/>
+          <p:nvPr/>
+        </p:nvSpPr>
+        <p:spPr>
+          <a:xfrm>
+            <a:off x="1097280" y="2990088"/>
+            <a:ext cx="1463040" cy="731520"/>
+          </a:xfrm>
+          <a:prstGeom prst="rect">
+            <a:avLst/>
+          </a:prstGeom>
+          <a:noFill/>
+        </p:spPr>
+        <p:txBody>
+          <a:bodyPr wrap="square">
+            <a:spAutoFit/>
+          </a:bodyPr>
+          <a:lstStyle/>
+          <a:p>
+            <a:pPr algn="l">
+              <a:lnSpc>
+                <a:spcPct val="125000"/>
+              </a:lnSpc>
+            </a:pPr>
+            <a:r>
+              <a:rPr sz="2000" b="1">
+                <a:solidFill>
+                  <a:srgbClr val="122A51"/>
+                </a:solidFill>
+                <a:latin typeface="微软雅黑"/>
+                <a:ea typeface="微软雅黑"/>
+                <a:cs typeface="微软雅黑"/>
+              </a:rPr>
+              <a:t>通知</a:t>
+            </a:r>
+          </a:p>
+        </p:txBody>
+      </p:sp>
+      <p:sp>
+        <p:nvSpPr>
+          <p:cNvPr id="12" name="TextBox 11"/>
+          <p:cNvSpPr txBox="1"/>
+          <p:nvPr/>
+        </p:nvSpPr>
+        <p:spPr>
+          <a:xfrm>
+            <a:off x="2606039" y="3026664"/>
+            <a:ext cx="3200400" cy="731520"/>
+          </a:xfrm>
+          <a:prstGeom prst="rect">
+            <a:avLst/>
+          </a:prstGeom>
+          <a:noFill/>
+        </p:spPr>
+        <p:txBody>
+          <a:bodyPr wrap="square">
+            <a:spAutoFit/>
+          </a:bodyPr>
+          <a:lstStyle/>
+          <a:p>
+            <a:pPr algn="l">
+              <a:lnSpc>
+                <a:spcPct val="125000"/>
+              </a:lnSpc>
+            </a:pPr>
+            <a:r>
+              <a:rPr sz="1600" b="0">
+                <a:solidFill>
+                  <a:srgbClr val="1B2233"/>
+                </a:solidFill>
+                <a:latin typeface="微软雅黑"/>
+                <a:ea typeface="微软雅黑"/>
+                <a:cs typeface="微软雅黑"/>
+              </a:rPr>
+              <a:t>普通 / 紧急 / 定时 / 已读回执</a:t>
+            </a:r>
+          </a:p>
+        </p:txBody>
+      </p:sp>
+      <p:sp>
+        <p:nvSpPr>
+          <p:cNvPr id="13" name="Rounded Rectangle 12"/>
+          <p:cNvSpPr/>
+          <p:nvPr/>
+        </p:nvSpPr>
+        <p:spPr>
+          <a:xfrm>
+            <a:off x="6355080" y="2880360"/>
+            <a:ext cx="5120640" cy="960120"/>
+          </a:xfrm>
+          <a:prstGeom prst="roundRect">
+            <a:avLst/>
+          </a:prstGeom>
+          <a:solidFill>
+            <a:srgbClr val="F2F5FB"/>
+          </a:solidFill>
+          <a:ln>
+            <a:noFill/>
+          </a:ln>
+          <a:effectLst/>
+        </p:spPr>
+        <p:style>
+          <a:lnRef idx="1">
+            <a:schemeClr val="accent1"/>
+          </a:lnRef>
+          <a:fillRef idx="3">
+            <a:schemeClr val="accent1"/>
+          </a:fillRef>
+          <a:effectRef idx="2">
+            <a:schemeClr val="accent1"/>
+          </a:effectRef>
+          <a:fontRef idx="minor">
+            <a:schemeClr val="lt1"/>
+          </a:fontRef>
+        </p:style>
+        <p:txBody>
+          <a:bodyPr rtlCol="0" anchor="ctr"/>
+          <a:lstStyle/>
+          <a:p>
+            <a:pPr algn="ctr"/>
+          </a:p>
+        </p:txBody>
+      </p:sp>
+      <p:sp>
+        <p:nvSpPr>
+          <p:cNvPr id="14" name="TextBox 13"/>
+          <p:cNvSpPr txBox="1"/>
+          <p:nvPr/>
+        </p:nvSpPr>
+        <p:spPr>
+          <a:xfrm>
+            <a:off x="6583680" y="2990088"/>
+            <a:ext cx="1463040" cy="731520"/>
+          </a:xfrm>
+          <a:prstGeom prst="rect">
+            <a:avLst/>
+          </a:prstGeom>
+          <a:noFill/>
+        </p:spPr>
+        <p:txBody>
+          <a:bodyPr wrap="square">
+            <a:spAutoFit/>
+          </a:bodyPr>
+          <a:lstStyle/>
+          <a:p>
+            <a:pPr algn="l">
+              <a:lnSpc>
+                <a:spcPct val="125000"/>
+              </a:lnSpc>
+            </a:pPr>
+            <a:r>
+              <a:rPr sz="2000" b="1">
+                <a:solidFill>
+                  <a:srgbClr val="122A51"/>
+                </a:solidFill>
+                <a:latin typeface="微软雅黑"/>
+                <a:ea typeface="微软雅黑"/>
+                <a:cs typeface="微软雅黑"/>
+              </a:rPr>
+              <a:t>政策问答</a:t>
+            </a:r>
+          </a:p>
+        </p:txBody>
+      </p:sp>
+      <p:sp>
+        <p:nvSpPr>
+          <p:cNvPr id="15" name="TextBox 14"/>
+          <p:cNvSpPr txBox="1"/>
+          <p:nvPr/>
+        </p:nvSpPr>
+        <p:spPr>
+          <a:xfrm>
+            <a:off x="8092440" y="3026664"/>
+            <a:ext cx="3200400" cy="731520"/>
+          </a:xfrm>
+          <a:prstGeom prst="rect">
+            <a:avLst/>
+          </a:prstGeom>
+          <a:noFill/>
+        </p:spPr>
+        <p:txBody>
+          <a:bodyPr wrap="square">
+            <a:spAutoFit/>
+          </a:bodyPr>
+          <a:lstStyle/>
+          <a:p>
+            <a:pPr algn="l">
+              <a:lnSpc>
+                <a:spcPct val="125000"/>
+              </a:lnSpc>
+            </a:pPr>
+            <a:r>
+              <a:rPr sz="1600" b="0">
+                <a:solidFill>
+                  <a:srgbClr val="1B2233"/>
+                </a:solidFill>
+                <a:latin typeface="微软雅黑"/>
+                <a:ea typeface="微软雅黑"/>
+                <a:cs typeface="微软雅黑"/>
+              </a:rPr>
+              <a:t>答案带出处；检索无结果就转人工</a:t>
+            </a:r>
+          </a:p>
+        </p:txBody>
+      </p:sp>
+      <p:sp>
+        <p:nvSpPr>
+          <p:cNvPr id="16" name="Rounded Rectangle 15"/>
+          <p:cNvSpPr/>
+          <p:nvPr/>
+        </p:nvSpPr>
+        <p:spPr>
+          <a:xfrm>
+            <a:off x="868680" y="4023360"/>
+            <a:ext cx="5120640" cy="960120"/>
+          </a:xfrm>
+          <a:prstGeom prst="roundRect">
+            <a:avLst/>
+          </a:prstGeom>
+          <a:solidFill>
+            <a:srgbClr val="F2F5FB"/>
+          </a:solidFill>
+          <a:ln>
+            <a:noFill/>
+          </a:ln>
+          <a:effectLst/>
+        </p:spPr>
+        <p:style>
+          <a:lnRef idx="1">
+            <a:schemeClr val="accent1"/>
+          </a:lnRef>
+          <a:fillRef idx="3">
+            <a:schemeClr val="accent1"/>
+          </a:fillRef>
+          <a:effectRef idx="2">
+            <a:schemeClr val="accent1"/>
+          </a:effectRef>
+          <a:fontRef idx="minor">
+            <a:schemeClr val="lt1"/>
+          </a:fontRef>
+        </p:style>
+        <p:txBody>
+          <a:bodyPr rtlCol="0" anchor="ctr"/>
+          <a:lstStyle/>
+          <a:p>
+            <a:pPr algn="ctr"/>
+          </a:p>
+        </p:txBody>
+      </p:sp>
+      <p:sp>
+        <p:nvSpPr>
+          <p:cNvPr id="17" name="TextBox 16"/>
+          <p:cNvSpPr txBox="1"/>
+          <p:nvPr/>
+        </p:nvSpPr>
+        <p:spPr>
+          <a:xfrm>
+            <a:off x="1097280" y="4133088"/>
+            <a:ext cx="1463040" cy="731520"/>
+          </a:xfrm>
+          <a:prstGeom prst="rect">
+            <a:avLst/>
+          </a:prstGeom>
+          <a:noFill/>
+        </p:spPr>
+        <p:txBody>
+          <a:bodyPr wrap="square">
+            <a:spAutoFit/>
+          </a:bodyPr>
+          <a:lstStyle/>
+          <a:p>
+            <a:pPr algn="l">
+              <a:lnSpc>
+                <a:spcPct val="125000"/>
+              </a:lnSpc>
+            </a:pPr>
+            <a:r>
+              <a:rPr sz="2000" b="1">
+                <a:solidFill>
+                  <a:srgbClr val="122A51"/>
+                </a:solidFill>
+                <a:latin typeface="微软雅黑"/>
+                <a:ea typeface="微软雅黑"/>
+                <a:cs typeface="微软雅黑"/>
+              </a:rPr>
+              <a:t>健康咨询</a:t>
+            </a:r>
+          </a:p>
+        </p:txBody>
+      </p:sp>
+      <p:sp>
+        <p:nvSpPr>
+          <p:cNvPr id="18" name="TextBox 17"/>
+          <p:cNvSpPr txBox="1"/>
+          <p:nvPr/>
+        </p:nvSpPr>
+        <p:spPr>
+          <a:xfrm>
+            <a:off x="2606039" y="4169664"/>
+            <a:ext cx="3200400" cy="731520"/>
+          </a:xfrm>
+          <a:prstGeom prst="rect">
+            <a:avLst/>
+          </a:prstGeom>
+          <a:noFill/>
+        </p:spPr>
+        <p:txBody>
+          <a:bodyPr wrap="square">
+            <a:spAutoFit/>
+          </a:bodyPr>
+          <a:lstStyle/>
+          <a:p>
+            <a:pPr algn="l">
+              <a:lnSpc>
+                <a:spcPct val="125000"/>
+              </a:lnSpc>
+            </a:pPr>
+            <a:r>
+              <a:rPr sz="1600" b="0">
+                <a:solidFill>
+                  <a:srgbClr val="1B2233"/>
+                </a:solidFill>
+                <a:latin typeface="微软雅黑"/>
+                <a:ea typeface="微软雅黑"/>
+                <a:cs typeface="微软雅黑"/>
+              </a:rPr>
+              <a:t>只给建议，紧急情况转人工（不做诊断）</a:t>
+            </a:r>
+          </a:p>
+        </p:txBody>
+      </p:sp>
+      <p:sp>
+        <p:nvSpPr>
+          <p:cNvPr id="19" name="Rounded Rectangle 18"/>
+          <p:cNvSpPr/>
+          <p:nvPr/>
+        </p:nvSpPr>
+        <p:spPr>
+          <a:xfrm>
+            <a:off x="6355080" y="4023360"/>
+            <a:ext cx="5120640" cy="960120"/>
+          </a:xfrm>
+          <a:prstGeom prst="roundRect">
+            <a:avLst/>
+          </a:prstGeom>
+          <a:solidFill>
+            <a:srgbClr val="F2F5FB"/>
+          </a:solidFill>
+          <a:ln>
+            <a:noFill/>
+          </a:ln>
+          <a:effectLst/>
+        </p:spPr>
+        <p:style>
+          <a:lnRef idx="1">
+            <a:schemeClr val="accent1"/>
+          </a:lnRef>
+          <a:fillRef idx="3">
+            <a:schemeClr val="accent1"/>
+          </a:fillRef>
+          <a:effectRef idx="2">
+            <a:schemeClr val="accent1"/>
+          </a:effectRef>
+          <a:fontRef idx="minor">
+            <a:schemeClr val="lt1"/>
+          </a:fontRef>
+        </p:style>
+        <p:txBody>
+          <a:bodyPr rtlCol="0" anchor="ctr"/>
+          <a:lstStyle/>
+          <a:p>
+            <a:pPr algn="ctr"/>
+          </a:p>
+        </p:txBody>
+      </p:sp>
+      <p:sp>
+        <p:nvSpPr>
+          <p:cNvPr id="20" name="TextBox 19"/>
+          <p:cNvSpPr txBox="1"/>
+          <p:nvPr/>
+        </p:nvSpPr>
+        <p:spPr>
+          <a:xfrm>
+            <a:off x="6583680" y="4133088"/>
+            <a:ext cx="1463040" cy="731520"/>
+          </a:xfrm>
+          <a:prstGeom prst="rect">
+            <a:avLst/>
+          </a:prstGeom>
+          <a:noFill/>
+        </p:spPr>
+        <p:txBody>
+          <a:bodyPr wrap="square">
+            <a:spAutoFit/>
+          </a:bodyPr>
+          <a:lstStyle/>
+          <a:p>
+            <a:pPr algn="l">
+              <a:lnSpc>
+                <a:spcPct val="125000"/>
+              </a:lnSpc>
+            </a:pPr>
+            <a:r>
+              <a:rPr sz="2000" b="1">
+                <a:solidFill>
+                  <a:srgbClr val="122A51"/>
+                </a:solidFill>
+                <a:latin typeface="微软雅黑"/>
+                <a:ea typeface="微软雅黑"/>
+                <a:cs typeface="微软雅黑"/>
+              </a:rPr>
+              <a:t>天气联动</a:t>
+            </a:r>
+          </a:p>
+        </p:txBody>
+      </p:sp>
+      <p:sp>
+        <p:nvSpPr>
+          <p:cNvPr id="21" name="TextBox 20"/>
+          <p:cNvSpPr txBox="1"/>
+          <p:nvPr/>
+        </p:nvSpPr>
+        <p:spPr>
+          <a:xfrm>
+            <a:off x="8092440" y="4169664"/>
+            <a:ext cx="3200400" cy="731520"/>
+          </a:xfrm>
+          <a:prstGeom prst="rect">
+            <a:avLst/>
+          </a:prstGeom>
+          <a:noFill/>
+        </p:spPr>
+        <p:txBody>
+          <a:bodyPr wrap="square">
+            <a:spAutoFit/>
+          </a:bodyPr>
+          <a:lstStyle/>
+          <a:p>
+            <a:pPr algn="l">
+              <a:lnSpc>
+                <a:spcPct val="125000"/>
+              </a:lnSpc>
+            </a:pPr>
+            <a:r>
+              <a:rPr sz="1600" b="0">
+                <a:solidFill>
+                  <a:srgbClr val="1B2233"/>
+                </a:solidFill>
+                <a:latin typeface="微软雅黑"/>
+                <a:ea typeface="微软雅黑"/>
+                <a:cs typeface="微软雅黑"/>
+              </a:rPr>
+              <a:t>极端天气 → 健康防护建议 → 自动发通知</a:t>
+            </a:r>
+          </a:p>
+        </p:txBody>
+      </p:sp>
+      <p:sp>
+        <p:nvSpPr>
+          <p:cNvPr id="22" name="Rounded Rectangle 21"/>
+          <p:cNvSpPr/>
+          <p:nvPr/>
+        </p:nvSpPr>
+        <p:spPr>
+          <a:xfrm>
+            <a:off x="868680" y="5166360"/>
+            <a:ext cx="5120640" cy="960120"/>
+          </a:xfrm>
+          <a:prstGeom prst="roundRect">
+            <a:avLst/>
+          </a:prstGeom>
+          <a:solidFill>
+            <a:srgbClr val="F2F5FB"/>
+          </a:solidFill>
+          <a:ln>
+            <a:noFill/>
+          </a:ln>
+          <a:effectLst/>
+        </p:spPr>
+        <p:style>
+          <a:lnRef idx="1">
+            <a:schemeClr val="accent1"/>
+          </a:lnRef>
+          <a:fillRef idx="3">
+            <a:schemeClr val="accent1"/>
+          </a:fillRef>
+          <a:effectRef idx="2">
+            <a:schemeClr val="accent1"/>
+          </a:effectRef>
+          <a:fontRef idx="minor">
+            <a:schemeClr val="lt1"/>
+          </a:fontRef>
+        </p:style>
+        <p:txBody>
+          <a:bodyPr rtlCol="0" anchor="ctr"/>
+          <a:lstStyle/>
+          <a:p>
+            <a:pPr algn="ctr"/>
+          </a:p>
+        </p:txBody>
+      </p:sp>
+      <p:sp>
+        <p:nvSpPr>
+          <p:cNvPr id="23" name="TextBox 22"/>
+          <p:cNvSpPr txBox="1"/>
+          <p:nvPr/>
+        </p:nvSpPr>
+        <p:spPr>
+          <a:xfrm>
+            <a:off x="1097280" y="5276088"/>
+            <a:ext cx="1463040" cy="731520"/>
+          </a:xfrm>
+          <a:prstGeom prst="rect">
+            <a:avLst/>
+          </a:prstGeom>
+          <a:noFill/>
+        </p:spPr>
+        <p:txBody>
+          <a:bodyPr wrap="square">
+            <a:spAutoFit/>
+          </a:bodyPr>
+          <a:lstStyle/>
+          <a:p>
+            <a:pPr algn="l">
+              <a:lnSpc>
+                <a:spcPct val="125000"/>
+              </a:lnSpc>
+            </a:pPr>
+            <a:r>
+              <a:rPr sz="2000" b="1">
+                <a:solidFill>
+                  <a:srgbClr val="122A51"/>
+                </a:solidFill>
+                <a:latin typeface="微软雅黑"/>
+                <a:ea typeface="微软雅黑"/>
+                <a:cs typeface="微软雅黑"/>
+              </a:rPr>
+              <a:t>网格员工作台</a:t>
+            </a:r>
+          </a:p>
+        </p:txBody>
+      </p:sp>
+      <p:sp>
+        <p:nvSpPr>
+          <p:cNvPr id="24" name="TextBox 23"/>
+          <p:cNvSpPr txBox="1"/>
+          <p:nvPr/>
+        </p:nvSpPr>
+        <p:spPr>
+          <a:xfrm>
+            <a:off x="2606039" y="5312664"/>
+            <a:ext cx="3200400" cy="731520"/>
+          </a:xfrm>
+          <a:prstGeom prst="rect">
+            <a:avLst/>
+          </a:prstGeom>
+          <a:noFill/>
+        </p:spPr>
+        <p:txBody>
+          <a:bodyPr wrap="square">
+            <a:spAutoFit/>
+          </a:bodyPr>
+          <a:lstStyle/>
+          <a:p>
+            <a:pPr algn="l">
+              <a:lnSpc>
+                <a:spcPct val="125000"/>
+              </a:lnSpc>
+            </a:pPr>
+            <a:r>
+              <a:rPr sz="1600" b="0">
+                <a:solidFill>
+                  <a:srgbClr val="1B2233"/>
+                </a:solidFill>
+                <a:latin typeface="微软雅黑"/>
+                <a:ea typeface="微软雅黑"/>
+                <a:cs typeface="微软雅黑"/>
+              </a:rPr>
+              <a:t>AI 助手、待办、统计导出</a:t>
+            </a:r>
+          </a:p>
+        </p:txBody>
+      </p:sp>
+      <p:sp>
+        <p:nvSpPr>
+          <p:cNvPr id="25" name="Rounded Rectangle 24"/>
+          <p:cNvSpPr/>
+          <p:nvPr/>
+        </p:nvSpPr>
+        <p:spPr>
+          <a:xfrm>
+            <a:off x="6355080" y="5166360"/>
+            <a:ext cx="5120640" cy="960120"/>
+          </a:xfrm>
+          <a:prstGeom prst="roundRect">
+            <a:avLst/>
+          </a:prstGeom>
+          <a:solidFill>
+            <a:srgbClr val="F2F5FB"/>
+          </a:solidFill>
+          <a:ln>
+            <a:noFill/>
+          </a:ln>
+          <a:effectLst/>
+        </p:spPr>
+        <p:style>
+          <a:lnRef idx="1">
+            <a:schemeClr val="accent1"/>
+          </a:lnRef>
+          <a:fillRef idx="3">
+            <a:schemeClr val="accent1"/>
+          </a:fillRef>
+          <a:effectRef idx="2">
+            <a:schemeClr val="accent1"/>
+          </a:effectRef>
+          <a:fontRef idx="minor">
+            <a:schemeClr val="lt1"/>
+          </a:fontRef>
+        </p:style>
+        <p:txBody>
+          <a:bodyPr rtlCol="0" anchor="ctr"/>
+          <a:lstStyle/>
+          <a:p>
+            <a:pPr algn="ctr"/>
+          </a:p>
+        </p:txBody>
+      </p:sp>
+      <p:sp>
+        <p:nvSpPr>
+          <p:cNvPr id="26" name="TextBox 25"/>
+          <p:cNvSpPr txBox="1"/>
+          <p:nvPr/>
+        </p:nvSpPr>
+        <p:spPr>
+          <a:xfrm>
+            <a:off x="6583680" y="5276088"/>
+            <a:ext cx="1463040" cy="731520"/>
+          </a:xfrm>
+          <a:prstGeom prst="rect">
+            <a:avLst/>
+          </a:prstGeom>
+          <a:noFill/>
+        </p:spPr>
+        <p:txBody>
+          <a:bodyPr wrap="square">
+            <a:spAutoFit/>
+          </a:bodyPr>
+          <a:lstStyle/>
+          <a:p>
+            <a:pPr algn="l">
+              <a:lnSpc>
+                <a:spcPct val="125000"/>
+              </a:lnSpc>
+            </a:pPr>
+            <a:r>
+              <a:rPr sz="2000" b="1">
+                <a:solidFill>
+                  <a:srgbClr val="122A51"/>
+                </a:solidFill>
+                <a:latin typeface="微软雅黑"/>
+                <a:ea typeface="微软雅黑"/>
+                <a:cs typeface="微软雅黑"/>
+              </a:rPr>
+              <a:t>转人工</a:t>
+            </a:r>
+          </a:p>
+        </p:txBody>
+      </p:sp>
+      <p:sp>
+        <p:nvSpPr>
+          <p:cNvPr id="27" name="TextBox 26"/>
+          <p:cNvSpPr txBox="1"/>
+          <p:nvPr/>
+        </p:nvSpPr>
+        <p:spPr>
+          <a:xfrm>
+            <a:off x="8092440" y="5312664"/>
+            <a:ext cx="3200400" cy="731520"/>
+          </a:xfrm>
+          <a:prstGeom prst="rect">
+            <a:avLst/>
+          </a:prstGeom>
+          <a:noFill/>
+        </p:spPr>
+        <p:txBody>
+          <a:bodyPr wrap="square">
+            <a:spAutoFit/>
+          </a:bodyPr>
+          <a:lstStyle/>
+          <a:p>
+            <a:pPr algn="l">
+              <a:lnSpc>
+                <a:spcPct val="125000"/>
+              </a:lnSpc>
+            </a:pPr>
+            <a:r>
+              <a:rPr sz="1600" b="0">
+                <a:solidFill>
+                  <a:srgbClr val="1B2233"/>
+                </a:solidFill>
+                <a:latin typeface="微软雅黑"/>
+                <a:ea typeface="微软雅黑"/>
+                <a:cs typeface="微软雅黑"/>
+              </a:rPr>
+              <a:t>带「处理包」：用户信息 + 执行链 + 待确认事项</a:t>
+            </a:r>
+          </a:p>
+        </p:txBody>
+      </p:sp>
+      <p:sp>
+        <p:nvSpPr>
+          <p:cNvPr id="28" name="Rectangle 27"/>
+          <p:cNvSpPr/>
+          <p:nvPr/>
+        </p:nvSpPr>
+        <p:spPr>
+          <a:xfrm>
+            <a:off x="548640" y="6510528"/>
+            <a:ext cx="10881360" cy="9525"/>
+          </a:xfrm>
+          <a:prstGeom prst="rect">
+            <a:avLst/>
+          </a:prstGeom>
+          <a:solidFill>
+            <a:srgbClr val="DDE3EE"/>
+          </a:solidFill>
+          <a:ln>
+            <a:noFill/>
+          </a:ln>
+          <a:effectLst/>
+        </p:spPr>
+        <p:style>
+          <a:lnRef idx="1">
+            <a:schemeClr val="accent1"/>
+          </a:lnRef>
+          <a:fillRef idx="3">
+            <a:schemeClr val="accent1"/>
+          </a:fillRef>
+          <a:effectRef idx="2">
+            <a:schemeClr val="accent1"/>
+          </a:effectRef>
+          <a:fontRef idx="minor">
+            <a:schemeClr val="lt1"/>
+          </a:fontRef>
+        </p:style>
+        <p:txBody>
+          <a:bodyPr rtlCol="0" anchor="ctr"/>
+          <a:lstStyle/>
+          <a:p>
+            <a:pPr algn="ctr"/>
+          </a:p>
+        </p:txBody>
+      </p:sp>
+      <p:sp>
+        <p:nvSpPr>
+          <p:cNvPr id="29" name="TextBox 28"/>
+          <p:cNvSpPr txBox="1"/>
+          <p:nvPr/>
+        </p:nvSpPr>
+        <p:spPr>
+          <a:xfrm>
+            <a:off x="548640" y="6547104"/>
+            <a:ext cx="7315200" cy="274320"/>
+          </a:xfrm>
+          <a:prstGeom prst="rect">
+            <a:avLst/>
+          </a:prstGeom>
+          <a:noFill/>
+        </p:spPr>
+        <p:txBody>
+          <a:bodyPr wrap="square">
+            <a:spAutoFit/>
+          </a:bodyPr>
+          <a:lstStyle/>
+          <a:p>
+            <a:pPr algn="l">
+              <a:lnSpc>
+                <a:spcPct val="125000"/>
+              </a:lnSpc>
+            </a:pPr>
+            <a:r>
+              <a:rPr sz="1200" b="0">
                 <a:solidFill>
                   <a:srgbClr val="6B7485"/>
                 </a:solidFill>
@@ -6293,7 +7115,48 @@
                 <a:ea typeface="微软雅黑"/>
                 <a:cs typeface="微软雅黑"/>
               </a:rPr>
-              <a:t>省成本，也保稳定。</a:t>
+              <a:t>社区先知 CommunityInsight</a:t>
+            </a:r>
+          </a:p>
+        </p:txBody>
+      </p:sp>
+      <p:sp>
+        <p:nvSpPr>
+          <p:cNvPr id="30" name="TextBox 29"/>
+          <p:cNvSpPr txBox="1"/>
+          <p:nvPr/>
+        </p:nvSpPr>
+        <p:spPr>
+          <a:xfrm>
+            <a:off x="10058400" y="6547104"/>
+            <a:ext cx="1371600" cy="274320"/>
+          </a:xfrm>
+          <a:prstGeom prst="rect">
+            <a:avLst/>
+          </a:prstGeom>
+          <a:noFill/>
+        </p:spPr>
+        <p:txBody>
+          <a:bodyPr wrap="square">
+            <a:spAutoFit/>
+          </a:bodyPr>
+          <a:lstStyle/>
+          <a:p>
+            <a:pPr algn="r">
+              <a:lnSpc>
+                <a:spcPct val="125000"/>
+              </a:lnSpc>
+            </a:pPr>
+            <a:r>
+              <a:rPr sz="1200" b="0">
+                <a:solidFill>
+                  <a:srgbClr val="6B7485"/>
+                </a:solidFill>
+                <a:latin typeface="微软雅黑"/>
+                <a:ea typeface="微软雅黑"/>
+                <a:cs typeface="微软雅黑"/>
+              </a:rPr>
+              <a:t>12 / 14</a:t>
             </a:r>
           </a:p>
         </p:txBody>
@@ -6318,7 +7181,51 @@
       <p:grpSpPr/>
       <p:sp>
         <p:nvSpPr>
-          <p:cNvPr id="2" name="Rounded Rectangle 1"/>
+          <p:cNvPr id="2" name="Rectangle 1"/>
+          <p:cNvSpPr/>
+          <p:nvPr/>
+        </p:nvSpPr>
+        <p:spPr>
+          <a:xfrm>
+            <a:off x="0" y="0"/>
+            <a:ext cx="12191695" cy="6858000"/>
+          </a:xfrm>
+          <a:prstGeom prst="rect">
+            <a:avLst/>
+          </a:prstGeom>
+          <a:solidFill>
+            <a:srgbClr val="122A51"/>
+          </a:solidFill>
+          <a:ln>
+            <a:noFill/>
+          </a:ln>
+          <a:effectLst/>
+        </p:spPr>
+        <p:style>
+          <a:lnRef idx="1">
+            <a:schemeClr val="accent1"/>
+          </a:lnRef>
+          <a:fillRef idx="3">
+            <a:schemeClr val="accent1"/>
+          </a:fillRef>
+          <a:effectRef idx="2">
+            <a:schemeClr val="accent1"/>
+          </a:effectRef>
+          <a:fontRef idx="minor">
+            <a:schemeClr val="lt1"/>
+          </a:fontRef>
+        </p:style>
+        <p:txBody>
+          <a:bodyPr rtlCol="0" anchor="ctr"/>
+          <a:lstStyle/>
+          <a:p>
+            <a:pPr algn="ctr"/>
+          </a:p>
+        </p:txBody>
+      </p:sp>
+      <p:sp>
+        <p:nvSpPr>
+          <p:cNvPr id="3" name="Rounded Rectangle 2"/>
           <p:cNvSpPr/>
           <p:nvPr/>
         </p:nvSpPr>
@@ -6362,7 +7269,7 @@
       </p:sp>
       <p:sp>
         <p:nvSpPr>
-          <p:cNvPr id="3" name="TextBox 2"/>
+          <p:cNvPr id="4" name="TextBox 3"/>
           <p:cNvSpPr txBox="1"/>
           <p:nvPr/>
         </p:nvSpPr>
@@ -6396,21 +7303,21 @@
                 <a:ea typeface="微软雅黑"/>
                 <a:cs typeface="微软雅黑"/>
               </a:rPr>
-              <a:t>备用：防编造与数据安全</a:t>
-            </a:r>
-          </a:p>
-        </p:txBody>
-      </p:sp>
-      <p:sp>
-        <p:nvSpPr>
-          <p:cNvPr id="4" name="TextBox 3"/>
+              <a:t>几个能复算的数字</a:t>
+            </a:r>
+          </a:p>
+        </p:txBody>
+      </p:sp>
+      <p:sp>
+        <p:nvSpPr>
+          <p:cNvPr id="5" name="TextBox 4"/>
           <p:cNvSpPr txBox="1"/>
           <p:nvPr/>
         </p:nvSpPr>
         <p:spPr>
           <a:xfrm>
-            <a:off x="868680" y="1828800"/>
-            <a:ext cx="10424160" cy="3108960"/>
+            <a:off x="868680" y="1920240"/>
+            <a:ext cx="4937760" cy="1097280"/>
           </a:xfrm>
           <a:prstGeom prst="rect">
             <a:avLst/>
@@ -6425,73 +7332,473 @@
           <a:p>
             <a:pPr algn="l">
               <a:lnSpc>
-                <a:spcPct val="150000"/>
-              </a:lnSpc>
-            </a:pPr>
-            <a:r>
-              <a:rPr sz="2600" b="0">
-                <a:solidFill>
-                  <a:srgbClr val="1B2233"/>
-                </a:solidFill>
-                <a:latin typeface="微软雅黑"/>
-                <a:ea typeface="微软雅黑"/>
-                <a:cs typeface="微软雅黑"/>
-              </a:rPr>
-              <a:t>政策回答强制挂知识库出处，回答完回查数据库</a:t>
-            </a:r>
-          </a:p>
+                <a:spcPct val="125000"/>
+              </a:lnSpc>
+            </a:pPr>
+            <a:r>
+              <a:rPr sz="7200" b="1">
+                <a:solidFill>
+                  <a:srgbClr val="FFFFFF"/>
+                </a:solidFill>
+                <a:latin typeface="微软雅黑"/>
+                <a:ea typeface="微软雅黑"/>
+                <a:cs typeface="微软雅黑"/>
+              </a:rPr>
+              <a:t>638</a:t>
+            </a:r>
+          </a:p>
+        </p:txBody>
+      </p:sp>
+      <p:sp>
+        <p:nvSpPr>
+          <p:cNvPr id="6" name="TextBox 5"/>
+          <p:cNvSpPr txBox="1"/>
+          <p:nvPr/>
+        </p:nvSpPr>
+        <p:spPr>
+          <a:xfrm>
+            <a:off x="868680" y="2971800"/>
+            <a:ext cx="4937760" cy="548640"/>
+          </a:xfrm>
+          <a:prstGeom prst="rect">
+            <a:avLst/>
+          </a:prstGeom>
+          <a:noFill/>
+        </p:spPr>
+        <p:txBody>
+          <a:bodyPr wrap="square">
+            <a:spAutoFit/>
+          </a:bodyPr>
+          <a:lstStyle/>
           <a:p>
             <a:pPr algn="l">
               <a:lnSpc>
-                <a:spcPct val="150000"/>
-              </a:lnSpc>
-            </a:pPr>
-            <a:r>
-              <a:rPr sz="2600" b="0">
-                <a:solidFill>
-                  <a:srgbClr val="1B2233"/>
-                </a:solidFill>
-                <a:latin typeface="微软雅黑"/>
-                <a:ea typeface="微软雅黑"/>
-                <a:cs typeface="微软雅黑"/>
-              </a:rPr>
-              <a:t>敏感词 + 权限再审计一道；查不到就转人工</a:t>
-            </a:r>
-          </a:p>
+                <a:spcPct val="125000"/>
+              </a:lnSpc>
+            </a:pPr>
+            <a:r>
+              <a:rPr sz="2200" b="0">
+                <a:solidFill>
+                  <a:srgbClr val="FF8C42"/>
+                </a:solidFill>
+                <a:latin typeface="微软雅黑"/>
+                <a:ea typeface="微软雅黑"/>
+                <a:cs typeface="微软雅黑"/>
+              </a:rPr>
+              <a:t>项测试 · 全绿</a:t>
+            </a:r>
+          </a:p>
+        </p:txBody>
+      </p:sp>
+      <p:sp>
+        <p:nvSpPr>
+          <p:cNvPr id="7" name="TextBox 6"/>
+          <p:cNvSpPr txBox="1"/>
+          <p:nvPr/>
+        </p:nvSpPr>
+        <p:spPr>
+          <a:xfrm>
+            <a:off x="6355080" y="1920240"/>
+            <a:ext cx="4937760" cy="1097280"/>
+          </a:xfrm>
+          <a:prstGeom prst="rect">
+            <a:avLst/>
+          </a:prstGeom>
+          <a:noFill/>
+        </p:spPr>
+        <p:txBody>
+          <a:bodyPr wrap="square">
+            <a:spAutoFit/>
+          </a:bodyPr>
+          <a:lstStyle/>
           <a:p>
             <a:pPr algn="l">
               <a:lnSpc>
-                <a:spcPct val="150000"/>
-              </a:lnSpc>
-            </a:pPr>
-            <a:r>
-              <a:rPr sz="2600" b="0">
-                <a:solidFill>
-                  <a:srgbClr val="1B2233"/>
-                </a:solidFill>
-                <a:latin typeface="微软雅黑"/>
-                <a:ea typeface="微软雅黑"/>
-                <a:cs typeface="微软雅黑"/>
-              </a:rPr>
-              <a:t>手机号 AES-256-GCM 加密存储，展示导出脱敏</a:t>
-            </a:r>
-          </a:p>
+                <a:spcPct val="125000"/>
+              </a:lnSpc>
+            </a:pPr>
+            <a:r>
+              <a:rPr sz="7200" b="1">
+                <a:solidFill>
+                  <a:srgbClr val="FFFFFF"/>
+                </a:solidFill>
+                <a:latin typeface="微软雅黑"/>
+                <a:ea typeface="微软雅黑"/>
+                <a:cs typeface="微软雅黑"/>
+              </a:rPr>
+              <a:t>550</a:t>
+            </a:r>
+          </a:p>
+        </p:txBody>
+      </p:sp>
+      <p:sp>
+        <p:nvSpPr>
+          <p:cNvPr id="8" name="TextBox 7"/>
+          <p:cNvSpPr txBox="1"/>
+          <p:nvPr/>
+        </p:nvSpPr>
+        <p:spPr>
+          <a:xfrm>
+            <a:off x="6355080" y="2971800"/>
+            <a:ext cx="4937760" cy="548640"/>
+          </a:xfrm>
+          <a:prstGeom prst="rect">
+            <a:avLst/>
+          </a:prstGeom>
+          <a:noFill/>
+        </p:spPr>
+        <p:txBody>
+          <a:bodyPr wrap="square">
+            <a:spAutoFit/>
+          </a:bodyPr>
+          <a:lstStyle/>
           <a:p>
             <a:pPr algn="l">
               <a:lnSpc>
-                <a:spcPct val="150000"/>
-              </a:lnSpc>
-            </a:pPr>
-            <a:r>
-              <a:rPr sz="2600" b="0">
-                <a:solidFill>
-                  <a:srgbClr val="1B2233"/>
-                </a:solidFill>
-                <a:latin typeface="微软雅黑"/>
-                <a:ea typeface="微软雅黑"/>
-                <a:cs typeface="微软雅黑"/>
-              </a:rPr>
-              <a:t>SQL 参数化；合规审计员有一票否决</a:t>
+                <a:spcPct val="125000"/>
+              </a:lnSpc>
+            </a:pPr>
+            <a:r>
+              <a:rPr sz="2200" b="0">
+                <a:solidFill>
+                  <a:srgbClr val="FF8C42"/>
+                </a:solidFill>
+                <a:latin typeface="微软雅黑"/>
+                <a:ea typeface="微软雅黑"/>
+                <a:cs typeface="微软雅黑"/>
+              </a:rPr>
+              <a:t>并发 · 零失败</a:t>
+            </a:r>
+          </a:p>
+        </p:txBody>
+      </p:sp>
+      <p:sp>
+        <p:nvSpPr>
+          <p:cNvPr id="9" name="TextBox 8"/>
+          <p:cNvSpPr txBox="1"/>
+          <p:nvPr/>
+        </p:nvSpPr>
+        <p:spPr>
+          <a:xfrm>
+            <a:off x="868680" y="3840480"/>
+            <a:ext cx="4937760" cy="1097280"/>
+          </a:xfrm>
+          <a:prstGeom prst="rect">
+            <a:avLst/>
+          </a:prstGeom>
+          <a:noFill/>
+        </p:spPr>
+        <p:txBody>
+          <a:bodyPr wrap="square">
+            <a:spAutoFit/>
+          </a:bodyPr>
+          <a:lstStyle/>
+          <a:p>
+            <a:pPr algn="l">
+              <a:lnSpc>
+                <a:spcPct val="125000"/>
+              </a:lnSpc>
+            </a:pPr>
+            <a:r>
+              <a:rPr sz="7200" b="1">
+                <a:solidFill>
+                  <a:srgbClr val="FFFFFF"/>
+                </a:solidFill>
+                <a:latin typeface="微软雅黑"/>
+                <a:ea typeface="微软雅黑"/>
+                <a:cs typeface="微软雅黑"/>
+              </a:rPr>
+              <a:t>48</a:t>
+            </a:r>
+          </a:p>
+        </p:txBody>
+      </p:sp>
+      <p:sp>
+        <p:nvSpPr>
+          <p:cNvPr id="10" name="TextBox 9"/>
+          <p:cNvSpPr txBox="1"/>
+          <p:nvPr/>
+        </p:nvSpPr>
+        <p:spPr>
+          <a:xfrm>
+            <a:off x="868680" y="4892040"/>
+            <a:ext cx="4937760" cy="548640"/>
+          </a:xfrm>
+          <a:prstGeom prst="rect">
+            <a:avLst/>
+          </a:prstGeom>
+          <a:noFill/>
+        </p:spPr>
+        <p:txBody>
+          <a:bodyPr wrap="square">
+            <a:spAutoFit/>
+          </a:bodyPr>
+          <a:lstStyle/>
+          <a:p>
+            <a:pPr algn="l">
+              <a:lnSpc>
+                <a:spcPct val="125000"/>
+              </a:lnSpc>
+            </a:pPr>
+            <a:r>
+              <a:rPr sz="2200" b="0">
+                <a:solidFill>
+                  <a:srgbClr val="FF8C42"/>
+                </a:solidFill>
+                <a:latin typeface="微软雅黑"/>
+                <a:ea typeface="微软雅黑"/>
+                <a:cs typeface="微软雅黑"/>
+              </a:rPr>
+              <a:t>条金标 · 第一位命中 100%</a:t>
+            </a:r>
+          </a:p>
+        </p:txBody>
+      </p:sp>
+      <p:sp>
+        <p:nvSpPr>
+          <p:cNvPr id="11" name="TextBox 10"/>
+          <p:cNvSpPr txBox="1"/>
+          <p:nvPr/>
+        </p:nvSpPr>
+        <p:spPr>
+          <a:xfrm>
+            <a:off x="6355080" y="3840480"/>
+            <a:ext cx="4937760" cy="1097280"/>
+          </a:xfrm>
+          <a:prstGeom prst="rect">
+            <a:avLst/>
+          </a:prstGeom>
+          <a:noFill/>
+        </p:spPr>
+        <p:txBody>
+          <a:bodyPr wrap="square">
+            <a:spAutoFit/>
+          </a:bodyPr>
+          <a:lstStyle/>
+          <a:p>
+            <a:pPr algn="l">
+              <a:lnSpc>
+                <a:spcPct val="125000"/>
+              </a:lnSpc>
+            </a:pPr>
+            <a:r>
+              <a:rPr sz="7200" b="1">
+                <a:solidFill>
+                  <a:srgbClr val="FFFFFF"/>
+                </a:solidFill>
+                <a:latin typeface="微软雅黑"/>
+                <a:ea typeface="微软雅黑"/>
+                <a:cs typeface="微软雅黑"/>
+              </a:rPr>
+              <a:t>0</a:t>
+            </a:r>
+          </a:p>
+        </p:txBody>
+      </p:sp>
+      <p:sp>
+        <p:nvSpPr>
+          <p:cNvPr id="12" name="TextBox 11"/>
+          <p:cNvSpPr txBox="1"/>
+          <p:nvPr/>
+        </p:nvSpPr>
+        <p:spPr>
+          <a:xfrm>
+            <a:off x="6355080" y="4892040"/>
+            <a:ext cx="4937760" cy="548640"/>
+          </a:xfrm>
+          <a:prstGeom prst="rect">
+            <a:avLst/>
+          </a:prstGeom>
+          <a:noFill/>
+        </p:spPr>
+        <p:txBody>
+          <a:bodyPr wrap="square">
+            <a:spAutoFit/>
+          </a:bodyPr>
+          <a:lstStyle/>
+          <a:p>
+            <a:pPr algn="l">
+              <a:lnSpc>
+                <a:spcPct val="125000"/>
+              </a:lnSpc>
+            </a:pPr>
+            <a:r>
+              <a:rPr sz="2200" b="0">
+                <a:solidFill>
+                  <a:srgbClr val="FF8C42"/>
+                </a:solidFill>
+                <a:latin typeface="微软雅黑"/>
+                <a:ea typeface="微软雅黑"/>
+                <a:cs typeface="微软雅黑"/>
+              </a:rPr>
+              <a:t>ruff 问题</a:t>
+            </a:r>
+          </a:p>
+        </p:txBody>
+      </p:sp>
+      <p:sp>
+        <p:nvSpPr>
+          <p:cNvPr id="13" name="TextBox 12"/>
+          <p:cNvSpPr txBox="1"/>
+          <p:nvPr/>
+        </p:nvSpPr>
+        <p:spPr>
+          <a:xfrm>
+            <a:off x="868680" y="5760720"/>
+            <a:ext cx="10058400" cy="640080"/>
+          </a:xfrm>
+          <a:prstGeom prst="rect">
+            <a:avLst/>
+          </a:prstGeom>
+          <a:noFill/>
+        </p:spPr>
+        <p:txBody>
+          <a:bodyPr wrap="square">
+            <a:spAutoFit/>
+          </a:bodyPr>
+          <a:lstStyle/>
+          <a:p>
+            <a:pPr algn="l">
+              <a:lnSpc>
+                <a:spcPct val="125000"/>
+              </a:lnSpc>
+            </a:pPr>
+            <a:r>
+              <a:rPr sz="2000" b="0">
+                <a:solidFill>
+                  <a:srgbClr val="FFFFFF"/>
+                </a:solidFill>
+                <a:latin typeface="微软雅黑"/>
+                <a:ea typeface="微软雅黑"/>
+                <a:cs typeface="微软雅黑"/>
+              </a:rPr>
+              <a:t>数据库 schema v46 · 约 50 张表　｜　本机自测，非第三方测评</a:t>
+            </a:r>
+          </a:p>
+        </p:txBody>
+      </p:sp>
+      <p:sp>
+        <p:nvSpPr>
+          <p:cNvPr id="14" name="Rectangle 13"/>
+          <p:cNvSpPr/>
+          <p:nvPr/>
+        </p:nvSpPr>
+        <p:spPr>
+          <a:xfrm>
+            <a:off x="548640" y="6510528"/>
+            <a:ext cx="10881360" cy="9525"/>
+          </a:xfrm>
+          <a:prstGeom prst="rect">
+            <a:avLst/>
+          </a:prstGeom>
+          <a:solidFill>
+            <a:srgbClr val="DDE3EE"/>
+          </a:solidFill>
+          <a:ln>
+            <a:noFill/>
+          </a:ln>
+          <a:effectLst/>
+        </p:spPr>
+        <p:style>
+          <a:lnRef idx="1">
+            <a:schemeClr val="accent1"/>
+          </a:lnRef>
+          <a:fillRef idx="3">
+            <a:schemeClr val="accent1"/>
+          </a:fillRef>
+          <a:effectRef idx="2">
+            <a:schemeClr val="accent1"/>
+          </a:effectRef>
+          <a:fontRef idx="minor">
+            <a:schemeClr val="lt1"/>
+          </a:fontRef>
+        </p:style>
+        <p:txBody>
+          <a:bodyPr rtlCol="0" anchor="ctr"/>
+          <a:lstStyle/>
+          <a:p>
+            <a:pPr algn="ctr"/>
+          </a:p>
+        </p:txBody>
+      </p:sp>
+      <p:sp>
+        <p:nvSpPr>
+          <p:cNvPr id="15" name="TextBox 14"/>
+          <p:cNvSpPr txBox="1"/>
+          <p:nvPr/>
+        </p:nvSpPr>
+        <p:spPr>
+          <a:xfrm>
+            <a:off x="548640" y="6547104"/>
+            <a:ext cx="7315200" cy="274320"/>
+          </a:xfrm>
+          <a:prstGeom prst="rect">
+            <a:avLst/>
+          </a:prstGeom>
+          <a:noFill/>
+        </p:spPr>
+        <p:txBody>
+          <a:bodyPr wrap="square">
+            <a:spAutoFit/>
+          </a:bodyPr>
+          <a:lstStyle/>
+          <a:p>
+            <a:pPr algn="l">
+              <a:lnSpc>
+                <a:spcPct val="125000"/>
+              </a:lnSpc>
+            </a:pPr>
+            <a:r>
+              <a:rPr sz="1200" b="0">
+                <a:solidFill>
+                  <a:srgbClr val="6B7485"/>
+                </a:solidFill>
+                <a:latin typeface="微软雅黑"/>
+                <a:ea typeface="微软雅黑"/>
+                <a:cs typeface="微软雅黑"/>
+              </a:rPr>
+              <a:t>社区先知 CommunityInsight</a:t>
+            </a:r>
+          </a:p>
+        </p:txBody>
+      </p:sp>
+      <p:sp>
+        <p:nvSpPr>
+          <p:cNvPr id="16" name="TextBox 15"/>
+          <p:cNvSpPr txBox="1"/>
+          <p:nvPr/>
+        </p:nvSpPr>
+        <p:spPr>
+          <a:xfrm>
+            <a:off x="10058400" y="6547104"/>
+            <a:ext cx="1371600" cy="274320"/>
+          </a:xfrm>
+          <a:prstGeom prst="rect">
+            <a:avLst/>
+          </a:prstGeom>
+          <a:noFill/>
+        </p:spPr>
+        <p:txBody>
+          <a:bodyPr wrap="square">
+            <a:spAutoFit/>
+          </a:bodyPr>
+          <a:lstStyle/>
+          <a:p>
+            <a:pPr algn="r">
+              <a:lnSpc>
+                <a:spcPct val="125000"/>
+              </a:lnSpc>
+            </a:pPr>
+            <a:r>
+              <a:rPr sz="1200" b="0">
+                <a:solidFill>
+                  <a:srgbClr val="6B7485"/>
+                </a:solidFill>
+                <a:latin typeface="微软雅黑"/>
+                <a:ea typeface="微软雅黑"/>
+                <a:cs typeface="微软雅黑"/>
+              </a:rPr>
+              <a:t>13 / 14</a:t>
             </a:r>
           </a:p>
         </p:txBody>
@@ -6594,98 +7901,21 @@
                 <a:ea typeface="微软雅黑"/>
                 <a:cs typeface="微软雅黑"/>
               </a:rPr>
-              <a:t>附录 · 如需看实物</a:t>
-            </a:r>
-          </a:p>
-        </p:txBody>
-      </p:sp>
-      <p:sp>
-        <p:nvSpPr>
-          <p:cNvPr id="4" name="TextBox 3"/>
-          <p:cNvSpPr txBox="1"/>
-          <p:nvPr/>
-        </p:nvSpPr>
-        <p:spPr>
-          <a:xfrm>
-            <a:off x="868680" y="1737360"/>
-            <a:ext cx="10424160" cy="2377440"/>
-          </a:xfrm>
-          <a:prstGeom prst="rect">
-            <a:avLst/>
-          </a:prstGeom>
-          <a:noFill/>
-        </p:spPr>
-        <p:txBody>
-          <a:bodyPr wrap="square">
-            <a:spAutoFit/>
-          </a:bodyPr>
-          <a:lstStyle/>
-          <a:p>
-            <a:pPr algn="l">
-              <a:lnSpc>
-                <a:spcPct val="150000"/>
-              </a:lnSpc>
-            </a:pPr>
-            <a:r>
-              <a:rPr sz="2600" b="0">
-                <a:solidFill>
-                  <a:srgbClr val="1B2233"/>
-                </a:solidFill>
-                <a:latin typeface="微软雅黑"/>
-                <a:ea typeface="微软雅黑"/>
-                <a:cs typeface="微软雅黑"/>
-              </a:rPr>
-              <a:t>1) 双击项目文件夹里的「启动演示」</a:t>
-            </a:r>
-          </a:p>
-          <a:p>
-            <a:pPr algn="l">
-              <a:lnSpc>
-                <a:spcPct val="150000"/>
-              </a:lnSpc>
-            </a:pPr>
-            <a:r>
-              <a:rPr sz="2600" b="0">
-                <a:solidFill>
-                  <a:srgbClr val="1B2233"/>
-                </a:solidFill>
-                <a:latin typeface="微软雅黑"/>
-                <a:ea typeface="微软雅黑"/>
-                <a:cs typeface="微软雅黑"/>
-              </a:rPr>
-              <a:t>2) 等它提示「服务已就绪」（首次约 10–20 秒，会自动建好数据库）</a:t>
-            </a:r>
-          </a:p>
-          <a:p>
-            <a:pPr algn="l">
-              <a:lnSpc>
-                <a:spcPct val="150000"/>
-              </a:lnSpc>
-            </a:pPr>
-            <a:r>
-              <a:rPr sz="2600" b="0">
-                <a:solidFill>
-                  <a:srgbClr val="1B2233"/>
-                </a:solidFill>
-                <a:latin typeface="微软雅黑"/>
-                <a:ea typeface="微软雅黑"/>
-                <a:cs typeface="微软雅黑"/>
-              </a:rPr>
-              <a:t>3) 浏览器会自动打开登录页</a:t>
-            </a:r>
-          </a:p>
-        </p:txBody>
-      </p:sp>
-      <p:sp>
-        <p:nvSpPr>
-          <p:cNvPr id="5" name="Rounded Rectangle 4"/>
+              <a:t>它现在的位置，和我想请教的三件事</a:t>
+            </a:r>
+          </a:p>
+        </p:txBody>
+      </p:sp>
+      <p:sp>
+        <p:nvSpPr>
+          <p:cNvPr id="4" name="Rounded Rectangle 3"/>
           <p:cNvSpPr/>
           <p:nvPr/>
         </p:nvSpPr>
         <p:spPr>
           <a:xfrm>
-            <a:off x="868680" y="4023360"/>
-            <a:ext cx="10424160" cy="1737360"/>
+            <a:off x="868680" y="1691640"/>
+            <a:ext cx="10424160" cy="914400"/>
           </a:xfrm>
           <a:prstGeom prst="roundRect">
             <a:avLst/>
@@ -6722,14 +7952,14 @@
       </p:sp>
       <p:sp>
         <p:nvSpPr>
-          <p:cNvPr id="6" name="TextBox 5"/>
+          <p:cNvPr id="5" name="TextBox 4"/>
           <p:cNvSpPr txBox="1"/>
           <p:nvPr/>
         </p:nvSpPr>
         <p:spPr>
           <a:xfrm>
-            <a:off x="1143000" y="4206240"/>
-            <a:ext cx="9875520" cy="1463040"/>
+            <a:off x="1188720" y="1828800"/>
+            <a:ext cx="9875520" cy="640080"/>
           </a:xfrm>
           <a:prstGeom prst="rect">
             <a:avLst/>
@@ -6744,11 +7974,11 @@
           <a:p>
             <a:pPr algn="l">
               <a:lnSpc>
-                <a:spcPct val="135000"/>
-              </a:lnSpc>
-            </a:pPr>
-            <a:r>
-              <a:rPr sz="1900" b="0">
+                <a:spcPct val="125000"/>
+              </a:lnSpc>
+            </a:pPr>
+            <a:r>
+              <a:rPr sz="2400" b="0">
                 <a:solidFill>
                   <a:srgbClr val="1B2233"/>
                 </a:solidFill>
@@ -6756,17 +7986,40 @@
                 <a:ea typeface="微软雅黑"/>
                 <a:cs typeface="微软雅黑"/>
               </a:rPr>
-              <a:t>演示账号：居民点「居民」免密 · 老年点「老年」免密 · 网格员 demo_grid / demo123</a:t>
-            </a:r>
-          </a:p>
+              <a:t>工程原型：还没在真实街道试点，没有运营数据，商业模式在探索</a:t>
+            </a:r>
+          </a:p>
+        </p:txBody>
+      </p:sp>
+      <p:sp>
+        <p:nvSpPr>
+          <p:cNvPr id="6" name="TextBox 5"/>
+          <p:cNvSpPr txBox="1"/>
+          <p:nvPr/>
+        </p:nvSpPr>
+        <p:spPr>
+          <a:xfrm>
+            <a:off x="1097280" y="3063240"/>
+            <a:ext cx="7680960" cy="640080"/>
+          </a:xfrm>
+          <a:prstGeom prst="rect">
+            <a:avLst/>
+          </a:prstGeom>
+          <a:noFill/>
+        </p:spPr>
+        <p:txBody>
+          <a:bodyPr wrap="square">
+            <a:spAutoFit/>
+          </a:bodyPr>
+          <a:lstStyle/>
           <a:p>
             <a:pPr algn="l">
               <a:lnSpc>
-                <a:spcPct val="135000"/>
-              </a:lnSpc>
-            </a:pPr>
-            <a:r>
-              <a:rPr sz="1900" b="0">
+                <a:spcPct val="125000"/>
+              </a:lnSpc>
+            </a:pPr>
+            <a:r>
+              <a:rPr sz="2600" b="0">
                 <a:solidFill>
                   <a:srgbClr val="1B2233"/>
                 </a:solidFill>
@@ -6774,17 +8027,81 @@
                 <a:ea typeface="微软雅黑"/>
                 <a:cs typeface="微软雅黑"/>
               </a:rPr>
-              <a:t>环境：Windows + Python 3.10 以上；首次启动会自动装依赖</a:t>
-            </a:r>
-          </a:p>
+              <a:t>① 多智能体的「自动」边界怎么划？</a:t>
+            </a:r>
+          </a:p>
+        </p:txBody>
+      </p:sp>
+      <p:sp>
+        <p:nvSpPr>
+          <p:cNvPr id="7" name="TextBox 6"/>
+          <p:cNvSpPr txBox="1"/>
+          <p:nvPr/>
+        </p:nvSpPr>
+        <p:spPr>
+          <a:xfrm>
+            <a:off x="8961120" y="3154680"/>
+            <a:ext cx="2377440" cy="548640"/>
+          </a:xfrm>
+          <a:prstGeom prst="rect">
+            <a:avLst/>
+          </a:prstGeom>
+          <a:noFill/>
+        </p:spPr>
+        <p:txBody>
+          <a:bodyPr wrap="square">
+            <a:spAutoFit/>
+          </a:bodyPr>
+          <a:lstStyle/>
           <a:p>
             <a:pPr algn="l">
               <a:lnSpc>
-                <a:spcPct val="135000"/>
-              </a:lnSpc>
-            </a:pPr>
-            <a:r>
-              <a:rPr sz="1900" b="0">
+                <a:spcPct val="125000"/>
+              </a:lnSpc>
+            </a:pPr>
+            <a:r>
+              <a:rPr sz="1500" b="0">
+                <a:solidFill>
+                  <a:srgbClr val="6B7485"/>
+                </a:solidFill>
+                <a:latin typeface="微软雅黑"/>
+                <a:ea typeface="微软雅黑"/>
+                <a:cs typeface="微软雅黑"/>
+              </a:rPr>
+              <a:t>想请教技术专家</a:t>
+            </a:r>
+          </a:p>
+        </p:txBody>
+      </p:sp>
+      <p:sp>
+        <p:nvSpPr>
+          <p:cNvPr id="8" name="TextBox 7"/>
+          <p:cNvSpPr txBox="1"/>
+          <p:nvPr/>
+        </p:nvSpPr>
+        <p:spPr>
+          <a:xfrm>
+            <a:off x="1097280" y="3931920"/>
+            <a:ext cx="7680960" cy="640080"/>
+          </a:xfrm>
+          <a:prstGeom prst="rect">
+            <a:avLst/>
+          </a:prstGeom>
+          <a:noFill/>
+        </p:spPr>
+        <p:txBody>
+          <a:bodyPr wrap="square">
+            <a:spAutoFit/>
+          </a:bodyPr>
+          <a:lstStyle/>
+          <a:p>
+            <a:pPr algn="l">
+              <a:lnSpc>
+                <a:spcPct val="125000"/>
+              </a:lnSpc>
+            </a:pPr>
+            <a:r>
+              <a:rPr sz="2600" b="0">
                 <a:solidFill>
                   <a:srgbClr val="1B2233"/>
                 </a:solidFill>
@@ -6792,14 +8109,178 @@
                 <a:ea typeface="微软雅黑"/>
                 <a:cs typeface="微软雅黑"/>
               </a:rPr>
-              <a:t>没有网络也能用：大模型与天气会自动回到规则与本地数据</a:t>
-            </a:r>
-          </a:p>
-        </p:txBody>
-      </p:sp>
-      <p:sp>
-        <p:nvSpPr>
-          <p:cNvPr id="7" name="Rectangle 6"/>
+              <a:t>② 第一个试点社区怎么找、怎么谈？</a:t>
+            </a:r>
+          </a:p>
+        </p:txBody>
+      </p:sp>
+      <p:sp>
+        <p:nvSpPr>
+          <p:cNvPr id="9" name="TextBox 8"/>
+          <p:cNvSpPr txBox="1"/>
+          <p:nvPr/>
+        </p:nvSpPr>
+        <p:spPr>
+          <a:xfrm>
+            <a:off x="8961120" y="4023360"/>
+            <a:ext cx="2377440" cy="548640"/>
+          </a:xfrm>
+          <a:prstGeom prst="rect">
+            <a:avLst/>
+          </a:prstGeom>
+          <a:noFill/>
+        </p:spPr>
+        <p:txBody>
+          <a:bodyPr wrap="square">
+            <a:spAutoFit/>
+          </a:bodyPr>
+          <a:lstStyle/>
+          <a:p>
+            <a:pPr algn="l">
+              <a:lnSpc>
+                <a:spcPct val="125000"/>
+              </a:lnSpc>
+            </a:pPr>
+            <a:r>
+              <a:rPr sz="1500" b="0">
+                <a:solidFill>
+                  <a:srgbClr val="6B7485"/>
+                </a:solidFill>
+                <a:latin typeface="微软雅黑"/>
+                <a:ea typeface="微软雅黑"/>
+                <a:cs typeface="微软雅黑"/>
+              </a:rPr>
+              <a:t>想请教企业负责人</a:t>
+            </a:r>
+          </a:p>
+        </p:txBody>
+      </p:sp>
+      <p:sp>
+        <p:nvSpPr>
+          <p:cNvPr id="10" name="TextBox 9"/>
+          <p:cNvSpPr txBox="1"/>
+          <p:nvPr/>
+        </p:nvSpPr>
+        <p:spPr>
+          <a:xfrm>
+            <a:off x="1097280" y="4800600"/>
+            <a:ext cx="7680960" cy="640080"/>
+          </a:xfrm>
+          <a:prstGeom prst="rect">
+            <a:avLst/>
+          </a:prstGeom>
+          <a:noFill/>
+        </p:spPr>
+        <p:txBody>
+          <a:bodyPr wrap="square">
+            <a:spAutoFit/>
+          </a:bodyPr>
+          <a:lstStyle/>
+          <a:p>
+            <a:pPr algn="l">
+              <a:lnSpc>
+                <a:spcPct val="125000"/>
+              </a:lnSpc>
+            </a:pPr>
+            <a:r>
+              <a:rPr sz="2600" b="0">
+                <a:solidFill>
+                  <a:srgbClr val="1B2233"/>
+                </a:solidFill>
+                <a:latin typeface="微软雅黑"/>
+                <a:ea typeface="微软雅黑"/>
+                <a:cs typeface="微软雅黑"/>
+              </a:rPr>
+              <a:t>③ 没有历史数据，冷启动怎么破？</a:t>
+            </a:r>
+          </a:p>
+        </p:txBody>
+      </p:sp>
+      <p:sp>
+        <p:nvSpPr>
+          <p:cNvPr id="11" name="TextBox 10"/>
+          <p:cNvSpPr txBox="1"/>
+          <p:nvPr/>
+        </p:nvSpPr>
+        <p:spPr>
+          <a:xfrm>
+            <a:off x="8961120" y="4892040"/>
+            <a:ext cx="2377440" cy="548640"/>
+          </a:xfrm>
+          <a:prstGeom prst="rect">
+            <a:avLst/>
+          </a:prstGeom>
+          <a:noFill/>
+        </p:spPr>
+        <p:txBody>
+          <a:bodyPr wrap="square">
+            <a:spAutoFit/>
+          </a:bodyPr>
+          <a:lstStyle/>
+          <a:p>
+            <a:pPr algn="l">
+              <a:lnSpc>
+                <a:spcPct val="125000"/>
+              </a:lnSpc>
+            </a:pPr>
+            <a:r>
+              <a:rPr sz="1500" b="0">
+                <a:solidFill>
+                  <a:srgbClr val="6B7485"/>
+                </a:solidFill>
+                <a:latin typeface="微软雅黑"/>
+                <a:ea typeface="微软雅黑"/>
+                <a:cs typeface="微软雅黑"/>
+              </a:rPr>
+              <a:t>想请教投资人视角</a:t>
+            </a:r>
+          </a:p>
+        </p:txBody>
+      </p:sp>
+      <p:sp>
+        <p:nvSpPr>
+          <p:cNvPr id="12" name="TextBox 11"/>
+          <p:cNvSpPr txBox="1"/>
+          <p:nvPr/>
+        </p:nvSpPr>
+        <p:spPr>
+          <a:xfrm>
+            <a:off x="1097280" y="5943600"/>
+            <a:ext cx="10058400" cy="548640"/>
+          </a:xfrm>
+          <a:prstGeom prst="rect">
+            <a:avLst/>
+          </a:prstGeom>
+          <a:noFill/>
+        </p:spPr>
+        <p:txBody>
+          <a:bodyPr wrap="square">
+            <a:spAutoFit/>
+          </a:bodyPr>
+          <a:lstStyle/>
+          <a:p>
+            <a:pPr algn="l">
+              <a:lnSpc>
+                <a:spcPct val="125000"/>
+              </a:lnSpc>
+            </a:pPr>
+            <a:r>
+              <a:rPr sz="2000" b="1">
+                <a:solidFill>
+                  <a:srgbClr val="FF8C42"/>
+                </a:solidFill>
+                <a:latin typeface="微软雅黑"/>
+                <a:ea typeface="微软雅黑"/>
+                <a:cs typeface="微软雅黑"/>
+              </a:rPr>
+              <a:t>张奶奶那条路，现在是一句话。</a:t>
+            </a:r>
+          </a:p>
+        </p:txBody>
+      </p:sp>
+      <p:sp>
+        <p:nvSpPr>
+          <p:cNvPr id="13" name="Rectangle 12"/>
           <p:cNvSpPr/>
           <p:nvPr/>
         </p:nvSpPr>
@@ -6843,7 +8324,7 @@
       </p:sp>
       <p:sp>
         <p:nvSpPr>
-          <p:cNvPr id="8" name="TextBox 7"/>
+          <p:cNvPr id="14" name="TextBox 13"/>
           <p:cNvSpPr txBox="1"/>
           <p:nvPr/>
         </p:nvSpPr>
@@ -6884,7 +8365,7 @@
       </p:sp>
       <p:sp>
         <p:nvSpPr>
-          <p:cNvPr id="9" name="TextBox 8"/>
+          <p:cNvPr id="15" name="TextBox 14"/>
           <p:cNvSpPr txBox="1"/>
           <p:nvPr/>
         </p:nvSpPr>
@@ -6918,7 +8399,7 @@
                 <a:ea typeface="微软雅黑"/>
                 <a:cs typeface="微软雅黑"/>
               </a:rPr>
-              <a:t>附录</a:t>
+              <a:t>14 / 14</a:t>
             </a:r>
           </a:p>
         </p:txBody>
@@ -7021,6 +8502,870 @@
                 <a:ea typeface="微软雅黑"/>
                 <a:cs typeface="微软雅黑"/>
               </a:rPr>
+              <a:t>备用：为什么规则为主、大模型为辅</a:t>
+            </a:r>
+          </a:p>
+        </p:txBody>
+      </p:sp>
+      <p:sp>
+        <p:nvSpPr>
+          <p:cNvPr id="4" name="TextBox 3"/>
+          <p:cNvSpPr txBox="1"/>
+          <p:nvPr/>
+        </p:nvSpPr>
+        <p:spPr>
+          <a:xfrm>
+            <a:off x="868680" y="1828800"/>
+            <a:ext cx="10424160" cy="2743200"/>
+          </a:xfrm>
+          <a:prstGeom prst="rect">
+            <a:avLst/>
+          </a:prstGeom>
+          <a:noFill/>
+        </p:spPr>
+        <p:txBody>
+          <a:bodyPr wrap="square">
+            <a:spAutoFit/>
+          </a:bodyPr>
+          <a:lstStyle/>
+          <a:p>
+            <a:pPr algn="l">
+              <a:lnSpc>
+                <a:spcPct val="150000"/>
+              </a:lnSpc>
+            </a:pPr>
+            <a:r>
+              <a:rPr sz="2600" b="0">
+                <a:solidFill>
+                  <a:srgbClr val="1B2233"/>
+                </a:solidFill>
+                <a:latin typeface="微软雅黑"/>
+                <a:ea typeface="微软雅黑"/>
+                <a:cs typeface="微软雅黑"/>
+              </a:rPr>
+              <a:t>接了 DeepSeek，但四个 LLM 开关默认关</a:t>
+            </a:r>
+          </a:p>
+          <a:p>
+            <a:pPr algn="l">
+              <a:lnSpc>
+                <a:spcPct val="150000"/>
+              </a:lnSpc>
+            </a:pPr>
+            <a:r>
+              <a:rPr sz="2600" b="0">
+                <a:solidFill>
+                  <a:srgbClr val="1B2233"/>
+                </a:solidFill>
+                <a:latin typeface="微软雅黑"/>
+                <a:ea typeface="微软雅黑"/>
+                <a:cs typeface="微软雅黑"/>
+              </a:rPr>
+              <a:t>意图识别 / 追问补全 / 政策生成 → 大模型</a:t>
+            </a:r>
+          </a:p>
+          <a:p>
+            <a:pPr algn="l">
+              <a:lnSpc>
+                <a:spcPct val="150000"/>
+              </a:lnSpc>
+            </a:pPr>
+            <a:r>
+              <a:rPr sz="2600" b="0">
+                <a:solidFill>
+                  <a:srgbClr val="1B2233"/>
+                </a:solidFill>
+                <a:latin typeface="微软雅黑"/>
+                <a:ea typeface="微软雅黑"/>
+                <a:cs typeface="微软雅黑"/>
+              </a:rPr>
+              <a:t>状态机 / 派单 / 权限 / 加密 → 永远走规则</a:t>
+            </a:r>
+          </a:p>
+          <a:p>
+            <a:pPr algn="l">
+              <a:lnSpc>
+                <a:spcPct val="150000"/>
+              </a:lnSpc>
+            </a:pPr>
+            <a:r>
+              <a:rPr sz="2600" b="0">
+                <a:solidFill>
+                  <a:srgbClr val="1B2233"/>
+                </a:solidFill>
+                <a:latin typeface="微软雅黑"/>
+                <a:ea typeface="微软雅黑"/>
+                <a:cs typeface="微软雅黑"/>
+              </a:rPr>
+              <a:t>每次调用 3–5 秒超时，自动回落规则</a:t>
+            </a:r>
+          </a:p>
+        </p:txBody>
+      </p:sp>
+      <p:sp>
+        <p:nvSpPr>
+          <p:cNvPr id="5" name="TextBox 4"/>
+          <p:cNvSpPr txBox="1"/>
+          <p:nvPr/>
+        </p:nvSpPr>
+        <p:spPr>
+          <a:xfrm>
+            <a:off x="868680" y="5760720"/>
+            <a:ext cx="10424160" cy="548640"/>
+          </a:xfrm>
+          <a:prstGeom prst="rect">
+            <a:avLst/>
+          </a:prstGeom>
+          <a:noFill/>
+        </p:spPr>
+        <p:txBody>
+          <a:bodyPr wrap="square">
+            <a:spAutoFit/>
+          </a:bodyPr>
+          <a:lstStyle/>
+          <a:p>
+            <a:pPr algn="l">
+              <a:lnSpc>
+                <a:spcPct val="125000"/>
+              </a:lnSpc>
+            </a:pPr>
+            <a:r>
+              <a:rPr sz="2000" b="0">
+                <a:solidFill>
+                  <a:srgbClr val="6B7485"/>
+                </a:solidFill>
+                <a:latin typeface="微软雅黑"/>
+                <a:ea typeface="微软雅黑"/>
+                <a:cs typeface="微软雅黑"/>
+              </a:rPr>
+              <a:t>省成本，也保稳定。</a:t>
+            </a:r>
+          </a:p>
+        </p:txBody>
+      </p:sp>
+    </p:spTree>
+  </p:cSld>
+  <p:clrMapOvr>
+    <a:masterClrMapping/>
+  </p:clrMapOvr>
+</p:sld>
+</file>
+
+<file path=ppt/slides/slide16.xml><?xml version="1.0" encoding="utf-8"?>
+<p:sld xmlns:a="http://schemas.openxmlformats.org/drawingml/2006/main" xmlns:p="http://schemas.openxmlformats.org/presentationml/2006/main" xmlns:r="http://schemas.openxmlformats.org/officeDocument/2006/relationships">
+  <p:cSld>
+    <p:spTree>
+      <p:nvGrpSpPr>
+        <p:cNvPr id="1" name=""/>
+        <p:cNvGrpSpPr/>
+        <p:nvPr/>
+      </p:nvGrpSpPr>
+      <p:grpSpPr/>
+      <p:sp>
+        <p:nvSpPr>
+          <p:cNvPr id="2" name="Rounded Rectangle 1"/>
+          <p:cNvSpPr/>
+          <p:nvPr/>
+        </p:nvSpPr>
+        <p:spPr>
+          <a:xfrm>
+            <a:off x="548640" y="502920"/>
+            <a:ext cx="128016" cy="566928"/>
+          </a:xfrm>
+          <a:prstGeom prst="roundRect">
+            <a:avLst/>
+          </a:prstGeom>
+          <a:solidFill>
+            <a:srgbClr val="FF8C42"/>
+          </a:solidFill>
+          <a:ln>
+            <a:noFill/>
+          </a:ln>
+          <a:effectLst/>
+        </p:spPr>
+        <p:style>
+          <a:lnRef idx="1">
+            <a:schemeClr val="accent1"/>
+          </a:lnRef>
+          <a:fillRef idx="3">
+            <a:schemeClr val="accent1"/>
+          </a:fillRef>
+          <a:effectRef idx="2">
+            <a:schemeClr val="accent1"/>
+          </a:effectRef>
+          <a:fontRef idx="minor">
+            <a:schemeClr val="lt1"/>
+          </a:fontRef>
+        </p:style>
+        <p:txBody>
+          <a:bodyPr rtlCol="0" anchor="ctr"/>
+          <a:lstStyle/>
+          <a:p>
+            <a:pPr algn="ctr"/>
+          </a:p>
+        </p:txBody>
+      </p:sp>
+      <p:sp>
+        <p:nvSpPr>
+          <p:cNvPr id="3" name="TextBox 2"/>
+          <p:cNvSpPr txBox="1"/>
+          <p:nvPr/>
+        </p:nvSpPr>
+        <p:spPr>
+          <a:xfrm>
+            <a:off x="868680" y="457200"/>
+            <a:ext cx="10789920" cy="822960"/>
+          </a:xfrm>
+          <a:prstGeom prst="rect">
+            <a:avLst/>
+          </a:prstGeom>
+          <a:noFill/>
+        </p:spPr>
+        <p:txBody>
+          <a:bodyPr wrap="square">
+            <a:spAutoFit/>
+          </a:bodyPr>
+          <a:lstStyle/>
+          <a:p>
+            <a:pPr algn="l">
+              <a:lnSpc>
+                <a:spcPct val="125000"/>
+              </a:lnSpc>
+            </a:pPr>
+            <a:r>
+              <a:rPr sz="4000" b="1">
+                <a:solidFill>
+                  <a:srgbClr val="122A51"/>
+                </a:solidFill>
+                <a:latin typeface="微软雅黑"/>
+                <a:ea typeface="微软雅黑"/>
+                <a:cs typeface="微软雅黑"/>
+              </a:rPr>
+              <a:t>备用：防编造与数据安全</a:t>
+            </a:r>
+          </a:p>
+        </p:txBody>
+      </p:sp>
+      <p:sp>
+        <p:nvSpPr>
+          <p:cNvPr id="4" name="TextBox 3"/>
+          <p:cNvSpPr txBox="1"/>
+          <p:nvPr/>
+        </p:nvSpPr>
+        <p:spPr>
+          <a:xfrm>
+            <a:off x="868680" y="1828800"/>
+            <a:ext cx="10424160" cy="3108960"/>
+          </a:xfrm>
+          <a:prstGeom prst="rect">
+            <a:avLst/>
+          </a:prstGeom>
+          <a:noFill/>
+        </p:spPr>
+        <p:txBody>
+          <a:bodyPr wrap="square">
+            <a:spAutoFit/>
+          </a:bodyPr>
+          <a:lstStyle/>
+          <a:p>
+            <a:pPr algn="l">
+              <a:lnSpc>
+                <a:spcPct val="150000"/>
+              </a:lnSpc>
+            </a:pPr>
+            <a:r>
+              <a:rPr sz="2600" b="0">
+                <a:solidFill>
+                  <a:srgbClr val="1B2233"/>
+                </a:solidFill>
+                <a:latin typeface="微软雅黑"/>
+                <a:ea typeface="微软雅黑"/>
+                <a:cs typeface="微软雅黑"/>
+              </a:rPr>
+              <a:t>政策回答强制挂知识库出处，回答完回查数据库</a:t>
+            </a:r>
+          </a:p>
+          <a:p>
+            <a:pPr algn="l">
+              <a:lnSpc>
+                <a:spcPct val="150000"/>
+              </a:lnSpc>
+            </a:pPr>
+            <a:r>
+              <a:rPr sz="2600" b="0">
+                <a:solidFill>
+                  <a:srgbClr val="1B2233"/>
+                </a:solidFill>
+                <a:latin typeface="微软雅黑"/>
+                <a:ea typeface="微软雅黑"/>
+                <a:cs typeface="微软雅黑"/>
+              </a:rPr>
+              <a:t>敏感词 + 权限再审计一道；查不到就转人工</a:t>
+            </a:r>
+          </a:p>
+          <a:p>
+            <a:pPr algn="l">
+              <a:lnSpc>
+                <a:spcPct val="150000"/>
+              </a:lnSpc>
+            </a:pPr>
+            <a:r>
+              <a:rPr sz="2600" b="0">
+                <a:solidFill>
+                  <a:srgbClr val="1B2233"/>
+                </a:solidFill>
+                <a:latin typeface="微软雅黑"/>
+                <a:ea typeface="微软雅黑"/>
+                <a:cs typeface="微软雅黑"/>
+              </a:rPr>
+              <a:t>手机号 AES-256-GCM 加密存储，展示导出脱敏</a:t>
+            </a:r>
+          </a:p>
+          <a:p>
+            <a:pPr algn="l">
+              <a:lnSpc>
+                <a:spcPct val="150000"/>
+              </a:lnSpc>
+            </a:pPr>
+            <a:r>
+              <a:rPr sz="2600" b="0">
+                <a:solidFill>
+                  <a:srgbClr val="1B2233"/>
+                </a:solidFill>
+                <a:latin typeface="微软雅黑"/>
+                <a:ea typeface="微软雅黑"/>
+                <a:cs typeface="微软雅黑"/>
+              </a:rPr>
+              <a:t>SQL 参数化；合规审计员有一票否决</a:t>
+            </a:r>
+          </a:p>
+        </p:txBody>
+      </p:sp>
+    </p:spTree>
+  </p:cSld>
+  <p:clrMapOvr>
+    <a:masterClrMapping/>
+  </p:clrMapOvr>
+</p:sld>
+</file>
+
+<file path=ppt/slides/slide17.xml><?xml version="1.0" encoding="utf-8"?>
+<p:sld xmlns:a="http://schemas.openxmlformats.org/drawingml/2006/main" xmlns:p="http://schemas.openxmlformats.org/presentationml/2006/main" xmlns:r="http://schemas.openxmlformats.org/officeDocument/2006/relationships">
+  <p:cSld>
+    <p:spTree>
+      <p:nvGrpSpPr>
+        <p:cNvPr id="1" name=""/>
+        <p:cNvGrpSpPr/>
+        <p:nvPr/>
+      </p:nvGrpSpPr>
+      <p:grpSpPr/>
+      <p:sp>
+        <p:nvSpPr>
+          <p:cNvPr id="2" name="Rounded Rectangle 1"/>
+          <p:cNvSpPr/>
+          <p:nvPr/>
+        </p:nvSpPr>
+        <p:spPr>
+          <a:xfrm>
+            <a:off x="548640" y="502920"/>
+            <a:ext cx="128016" cy="566928"/>
+          </a:xfrm>
+          <a:prstGeom prst="roundRect">
+            <a:avLst/>
+          </a:prstGeom>
+          <a:solidFill>
+            <a:srgbClr val="FF8C42"/>
+          </a:solidFill>
+          <a:ln>
+            <a:noFill/>
+          </a:ln>
+          <a:effectLst/>
+        </p:spPr>
+        <p:style>
+          <a:lnRef idx="1">
+            <a:schemeClr val="accent1"/>
+          </a:lnRef>
+          <a:fillRef idx="3">
+            <a:schemeClr val="accent1"/>
+          </a:fillRef>
+          <a:effectRef idx="2">
+            <a:schemeClr val="accent1"/>
+          </a:effectRef>
+          <a:fontRef idx="minor">
+            <a:schemeClr val="lt1"/>
+          </a:fontRef>
+        </p:style>
+        <p:txBody>
+          <a:bodyPr rtlCol="0" anchor="ctr"/>
+          <a:lstStyle/>
+          <a:p>
+            <a:pPr algn="ctr"/>
+          </a:p>
+        </p:txBody>
+      </p:sp>
+      <p:sp>
+        <p:nvSpPr>
+          <p:cNvPr id="3" name="TextBox 2"/>
+          <p:cNvSpPr txBox="1"/>
+          <p:nvPr/>
+        </p:nvSpPr>
+        <p:spPr>
+          <a:xfrm>
+            <a:off x="868680" y="457200"/>
+            <a:ext cx="10789920" cy="822960"/>
+          </a:xfrm>
+          <a:prstGeom prst="rect">
+            <a:avLst/>
+          </a:prstGeom>
+          <a:noFill/>
+        </p:spPr>
+        <p:txBody>
+          <a:bodyPr wrap="square">
+            <a:spAutoFit/>
+          </a:bodyPr>
+          <a:lstStyle/>
+          <a:p>
+            <a:pPr algn="l">
+              <a:lnSpc>
+                <a:spcPct val="125000"/>
+              </a:lnSpc>
+            </a:pPr>
+            <a:r>
+              <a:rPr sz="4000" b="1">
+                <a:solidFill>
+                  <a:srgbClr val="122A51"/>
+                </a:solidFill>
+                <a:latin typeface="微软雅黑"/>
+                <a:ea typeface="微软雅黑"/>
+                <a:cs typeface="微软雅黑"/>
+              </a:rPr>
+              <a:t>附录 · 如需看实物</a:t>
+            </a:r>
+          </a:p>
+        </p:txBody>
+      </p:sp>
+      <p:sp>
+        <p:nvSpPr>
+          <p:cNvPr id="4" name="TextBox 3"/>
+          <p:cNvSpPr txBox="1"/>
+          <p:nvPr/>
+        </p:nvSpPr>
+        <p:spPr>
+          <a:xfrm>
+            <a:off x="868680" y="1737360"/>
+            <a:ext cx="10424160" cy="2377440"/>
+          </a:xfrm>
+          <a:prstGeom prst="rect">
+            <a:avLst/>
+          </a:prstGeom>
+          <a:noFill/>
+        </p:spPr>
+        <p:txBody>
+          <a:bodyPr wrap="square">
+            <a:spAutoFit/>
+          </a:bodyPr>
+          <a:lstStyle/>
+          <a:p>
+            <a:pPr algn="l">
+              <a:lnSpc>
+                <a:spcPct val="150000"/>
+              </a:lnSpc>
+            </a:pPr>
+            <a:r>
+              <a:rPr sz="2600" b="0">
+                <a:solidFill>
+                  <a:srgbClr val="1B2233"/>
+                </a:solidFill>
+                <a:latin typeface="微软雅黑"/>
+                <a:ea typeface="微软雅黑"/>
+                <a:cs typeface="微软雅黑"/>
+              </a:rPr>
+              <a:t>1) 双击项目文件夹里的「启动演示」</a:t>
+            </a:r>
+          </a:p>
+          <a:p>
+            <a:pPr algn="l">
+              <a:lnSpc>
+                <a:spcPct val="150000"/>
+              </a:lnSpc>
+            </a:pPr>
+            <a:r>
+              <a:rPr sz="2600" b="0">
+                <a:solidFill>
+                  <a:srgbClr val="1B2233"/>
+                </a:solidFill>
+                <a:latin typeface="微软雅黑"/>
+                <a:ea typeface="微软雅黑"/>
+                <a:cs typeface="微软雅黑"/>
+              </a:rPr>
+              <a:t>2) 等它提示「服务已就绪」（首次约 10–20 秒，会自动建好数据库）</a:t>
+            </a:r>
+          </a:p>
+          <a:p>
+            <a:pPr algn="l">
+              <a:lnSpc>
+                <a:spcPct val="150000"/>
+              </a:lnSpc>
+            </a:pPr>
+            <a:r>
+              <a:rPr sz="2600" b="0">
+                <a:solidFill>
+                  <a:srgbClr val="1B2233"/>
+                </a:solidFill>
+                <a:latin typeface="微软雅黑"/>
+                <a:ea typeface="微软雅黑"/>
+                <a:cs typeface="微软雅黑"/>
+              </a:rPr>
+              <a:t>3) 浏览器会自动打开登录页</a:t>
+            </a:r>
+          </a:p>
+        </p:txBody>
+      </p:sp>
+      <p:sp>
+        <p:nvSpPr>
+          <p:cNvPr id="5" name="Rounded Rectangle 4"/>
+          <p:cNvSpPr/>
+          <p:nvPr/>
+        </p:nvSpPr>
+        <p:spPr>
+          <a:xfrm>
+            <a:off x="868680" y="4023360"/>
+            <a:ext cx="10424160" cy="1737360"/>
+          </a:xfrm>
+          <a:prstGeom prst="roundRect">
+            <a:avLst/>
+          </a:prstGeom>
+          <a:solidFill>
+            <a:srgbClr val="F2F5FB"/>
+          </a:solidFill>
+          <a:ln>
+            <a:noFill/>
+          </a:ln>
+          <a:effectLst/>
+        </p:spPr>
+        <p:style>
+          <a:lnRef idx="1">
+            <a:schemeClr val="accent1"/>
+          </a:lnRef>
+          <a:fillRef idx="3">
+            <a:schemeClr val="accent1"/>
+          </a:fillRef>
+          <a:effectRef idx="2">
+            <a:schemeClr val="accent1"/>
+          </a:effectRef>
+          <a:fontRef idx="minor">
+            <a:schemeClr val="lt1"/>
+          </a:fontRef>
+        </p:style>
+        <p:txBody>
+          <a:bodyPr rtlCol="0" anchor="ctr"/>
+          <a:lstStyle/>
+          <a:p>
+            <a:pPr algn="ctr"/>
+          </a:p>
+        </p:txBody>
+      </p:sp>
+      <p:sp>
+        <p:nvSpPr>
+          <p:cNvPr id="6" name="TextBox 5"/>
+          <p:cNvSpPr txBox="1"/>
+          <p:nvPr/>
+        </p:nvSpPr>
+        <p:spPr>
+          <a:xfrm>
+            <a:off x="1143000" y="4206240"/>
+            <a:ext cx="9875520" cy="1463040"/>
+          </a:xfrm>
+          <a:prstGeom prst="rect">
+            <a:avLst/>
+          </a:prstGeom>
+          <a:noFill/>
+        </p:spPr>
+        <p:txBody>
+          <a:bodyPr wrap="square">
+            <a:spAutoFit/>
+          </a:bodyPr>
+          <a:lstStyle/>
+          <a:p>
+            <a:pPr algn="l">
+              <a:lnSpc>
+                <a:spcPct val="135000"/>
+              </a:lnSpc>
+            </a:pPr>
+            <a:r>
+              <a:rPr sz="1900" b="0">
+                <a:solidFill>
+                  <a:srgbClr val="1B2233"/>
+                </a:solidFill>
+                <a:latin typeface="微软雅黑"/>
+                <a:ea typeface="微软雅黑"/>
+                <a:cs typeface="微软雅黑"/>
+              </a:rPr>
+              <a:t>演示账号：居民点「居民」免密 · 老年点「老年」免密 · 网格员 demo_grid / demo123</a:t>
+            </a:r>
+          </a:p>
+          <a:p>
+            <a:pPr algn="l">
+              <a:lnSpc>
+                <a:spcPct val="135000"/>
+              </a:lnSpc>
+            </a:pPr>
+            <a:r>
+              <a:rPr sz="1900" b="0">
+                <a:solidFill>
+                  <a:srgbClr val="1B2233"/>
+                </a:solidFill>
+                <a:latin typeface="微软雅黑"/>
+                <a:ea typeface="微软雅黑"/>
+                <a:cs typeface="微软雅黑"/>
+              </a:rPr>
+              <a:t>环境：Windows + Python 3.10 以上；首次启动会自动装依赖</a:t>
+            </a:r>
+          </a:p>
+          <a:p>
+            <a:pPr algn="l">
+              <a:lnSpc>
+                <a:spcPct val="135000"/>
+              </a:lnSpc>
+            </a:pPr>
+            <a:r>
+              <a:rPr sz="1900" b="0">
+                <a:solidFill>
+                  <a:srgbClr val="1B2233"/>
+                </a:solidFill>
+                <a:latin typeface="微软雅黑"/>
+                <a:ea typeface="微软雅黑"/>
+                <a:cs typeface="微软雅黑"/>
+              </a:rPr>
+              <a:t>没有网络也能用：大模型与天气会自动回到规则与本地数据</a:t>
+            </a:r>
+          </a:p>
+        </p:txBody>
+      </p:sp>
+      <p:sp>
+        <p:nvSpPr>
+          <p:cNvPr id="7" name="Rectangle 6"/>
+          <p:cNvSpPr/>
+          <p:nvPr/>
+        </p:nvSpPr>
+        <p:spPr>
+          <a:xfrm>
+            <a:off x="548640" y="6510528"/>
+            <a:ext cx="10881360" cy="9525"/>
+          </a:xfrm>
+          <a:prstGeom prst="rect">
+            <a:avLst/>
+          </a:prstGeom>
+          <a:solidFill>
+            <a:srgbClr val="DDE3EE"/>
+          </a:solidFill>
+          <a:ln>
+            <a:noFill/>
+          </a:ln>
+          <a:effectLst/>
+        </p:spPr>
+        <p:style>
+          <a:lnRef idx="1">
+            <a:schemeClr val="accent1"/>
+          </a:lnRef>
+          <a:fillRef idx="3">
+            <a:schemeClr val="accent1"/>
+          </a:fillRef>
+          <a:effectRef idx="2">
+            <a:schemeClr val="accent1"/>
+          </a:effectRef>
+          <a:fontRef idx="minor">
+            <a:schemeClr val="lt1"/>
+          </a:fontRef>
+        </p:style>
+        <p:txBody>
+          <a:bodyPr rtlCol="0" anchor="ctr"/>
+          <a:lstStyle/>
+          <a:p>
+            <a:pPr algn="ctr"/>
+          </a:p>
+        </p:txBody>
+      </p:sp>
+      <p:sp>
+        <p:nvSpPr>
+          <p:cNvPr id="8" name="TextBox 7"/>
+          <p:cNvSpPr txBox="1"/>
+          <p:nvPr/>
+        </p:nvSpPr>
+        <p:spPr>
+          <a:xfrm>
+            <a:off x="548640" y="6547104"/>
+            <a:ext cx="7315200" cy="274320"/>
+          </a:xfrm>
+          <a:prstGeom prst="rect">
+            <a:avLst/>
+          </a:prstGeom>
+          <a:noFill/>
+        </p:spPr>
+        <p:txBody>
+          <a:bodyPr wrap="square">
+            <a:spAutoFit/>
+          </a:bodyPr>
+          <a:lstStyle/>
+          <a:p>
+            <a:pPr algn="l">
+              <a:lnSpc>
+                <a:spcPct val="125000"/>
+              </a:lnSpc>
+            </a:pPr>
+            <a:r>
+              <a:rPr sz="1200" b="0">
+                <a:solidFill>
+                  <a:srgbClr val="6B7485"/>
+                </a:solidFill>
+                <a:latin typeface="微软雅黑"/>
+                <a:ea typeface="微软雅黑"/>
+                <a:cs typeface="微软雅黑"/>
+              </a:rPr>
+              <a:t>社区先知 CommunityInsight</a:t>
+            </a:r>
+          </a:p>
+        </p:txBody>
+      </p:sp>
+      <p:sp>
+        <p:nvSpPr>
+          <p:cNvPr id="9" name="TextBox 8"/>
+          <p:cNvSpPr txBox="1"/>
+          <p:nvPr/>
+        </p:nvSpPr>
+        <p:spPr>
+          <a:xfrm>
+            <a:off x="10058400" y="6547104"/>
+            <a:ext cx="1371600" cy="274320"/>
+          </a:xfrm>
+          <a:prstGeom prst="rect">
+            <a:avLst/>
+          </a:prstGeom>
+          <a:noFill/>
+        </p:spPr>
+        <p:txBody>
+          <a:bodyPr wrap="square">
+            <a:spAutoFit/>
+          </a:bodyPr>
+          <a:lstStyle/>
+          <a:p>
+            <a:pPr algn="r">
+              <a:lnSpc>
+                <a:spcPct val="125000"/>
+              </a:lnSpc>
+            </a:pPr>
+            <a:r>
+              <a:rPr sz="1200" b="0">
+                <a:solidFill>
+                  <a:srgbClr val="6B7485"/>
+                </a:solidFill>
+                <a:latin typeface="微软雅黑"/>
+                <a:ea typeface="微软雅黑"/>
+                <a:cs typeface="微软雅黑"/>
+              </a:rPr>
+              <a:t>附录</a:t>
+            </a:r>
+          </a:p>
+        </p:txBody>
+      </p:sp>
+    </p:spTree>
+  </p:cSld>
+  <p:clrMapOvr>
+    <a:masterClrMapping/>
+  </p:clrMapOvr>
+</p:sld>
+</file>
+
+<file path=ppt/slides/slide18.xml><?xml version="1.0" encoding="utf-8"?>
+<p:sld xmlns:a="http://schemas.openxmlformats.org/drawingml/2006/main" xmlns:p="http://schemas.openxmlformats.org/presentationml/2006/main" xmlns:r="http://schemas.openxmlformats.org/officeDocument/2006/relationships">
+  <p:cSld>
+    <p:spTree>
+      <p:nvGrpSpPr>
+        <p:cNvPr id="1" name=""/>
+        <p:cNvGrpSpPr/>
+        <p:nvPr/>
+      </p:nvGrpSpPr>
+      <p:grpSpPr/>
+      <p:sp>
+        <p:nvSpPr>
+          <p:cNvPr id="2" name="Rounded Rectangle 1"/>
+          <p:cNvSpPr/>
+          <p:nvPr/>
+        </p:nvSpPr>
+        <p:spPr>
+          <a:xfrm>
+            <a:off x="548640" y="502920"/>
+            <a:ext cx="128016" cy="566928"/>
+          </a:xfrm>
+          <a:prstGeom prst="roundRect">
+            <a:avLst/>
+          </a:prstGeom>
+          <a:solidFill>
+            <a:srgbClr val="FF8C42"/>
+          </a:solidFill>
+          <a:ln>
+            <a:noFill/>
+          </a:ln>
+          <a:effectLst/>
+        </p:spPr>
+        <p:style>
+          <a:lnRef idx="1">
+            <a:schemeClr val="accent1"/>
+          </a:lnRef>
+          <a:fillRef idx="3">
+            <a:schemeClr val="accent1"/>
+          </a:fillRef>
+          <a:effectRef idx="2">
+            <a:schemeClr val="accent1"/>
+          </a:effectRef>
+          <a:fontRef idx="minor">
+            <a:schemeClr val="lt1"/>
+          </a:fontRef>
+        </p:style>
+        <p:txBody>
+          <a:bodyPr rtlCol="0" anchor="ctr"/>
+          <a:lstStyle/>
+          <a:p>
+            <a:pPr algn="ctr"/>
+          </a:p>
+        </p:txBody>
+      </p:sp>
+      <p:sp>
+        <p:nvSpPr>
+          <p:cNvPr id="3" name="TextBox 2"/>
+          <p:cNvSpPr txBox="1"/>
+          <p:nvPr/>
+        </p:nvSpPr>
+        <p:spPr>
+          <a:xfrm>
+            <a:off x="868680" y="457200"/>
+            <a:ext cx="10789920" cy="822960"/>
+          </a:xfrm>
+          <a:prstGeom prst="rect">
+            <a:avLst/>
+          </a:prstGeom>
+          <a:noFill/>
+        </p:spPr>
+        <p:txBody>
+          <a:bodyPr wrap="square">
+            <a:spAutoFit/>
+          </a:bodyPr>
+          <a:lstStyle/>
+          <a:p>
+            <a:pPr algn="l">
+              <a:lnSpc>
+                <a:spcPct val="125000"/>
+              </a:lnSpc>
+            </a:pPr>
+            <a:r>
+              <a:rPr sz="4000" b="1">
+                <a:solidFill>
+                  <a:srgbClr val="122A51"/>
+                </a:solidFill>
+                <a:latin typeface="微软雅黑"/>
+                <a:ea typeface="微软雅黑"/>
+                <a:cs typeface="微软雅黑"/>
+              </a:rPr>
               <a:t>附录 · 最常被问的四个问题</a:t>
             </a:r>
           </a:p>
@@ -8101,7 +10446,7 @@
       </p:sp>
       <p:pic>
         <p:nvPicPr>
-          <p:cNvPr id="12" name="Picture 11" descr="06-网格员工作台.png"/>
+          <p:cNvPr id="12" name="Picture 11" descr="13-网格员端-工单管理.png"/>
           <p:cNvPicPr>
             <a:picLocks noChangeAspect="1"/>
           </p:cNvPicPr>
@@ -8244,7 +10589,7 @@
                 <a:ea typeface="微软雅黑"/>
                 <a:cs typeface="微软雅黑"/>
               </a:rPr>
-              <a:t>2 / 11</a:t>
+              <a:t>2 / 14</a:t>
             </a:r>
           </a:p>
         </p:txBody>
@@ -9528,7 +11873,7 @@
                 <a:ea typeface="微软雅黑"/>
                 <a:cs typeface="微软雅黑"/>
               </a:rPr>
-              <a:t>3 / 11</a:t>
+              <a:t>3 / 14</a:t>
             </a:r>
           </a:p>
         </p:txBody>
@@ -11047,7 +13392,7 @@
                 <a:ea typeface="微软雅黑"/>
                 <a:cs typeface="微软雅黑"/>
               </a:rPr>
-              <a:t>4 / 11</a:t>
+              <a:t>4 / 14</a:t>
             </a:r>
           </a:p>
         </p:txBody>
@@ -11557,7 +13902,7 @@
                 <a:ea typeface="微软雅黑"/>
                 <a:cs typeface="微软雅黑"/>
               </a:rPr>
-              <a:t>5 / 11</a:t>
+              <a:t>5 / 14</a:t>
             </a:r>
           </a:p>
         </p:txBody>
@@ -11660,7 +14005,7 @@
                 <a:ea typeface="微软雅黑"/>
                 <a:cs typeface="微软雅黑"/>
               </a:rPr>
-              <a:t>老人端是重做的，不是放大的</a:t>
+              <a:t>居民端：报修，一句话提交</a:t>
             </a:r>
           </a:p>
         </p:txBody>
@@ -11673,8 +14018,8 @@
         </p:nvSpPr>
         <p:spPr>
           <a:xfrm>
-            <a:off x="868680" y="1645920"/>
-            <a:ext cx="5120640" cy="2926080"/>
+            <a:off x="868680" y="1828800"/>
+            <a:ext cx="4846320" cy="2377440"/>
           </a:xfrm>
           <a:prstGeom prst="rect">
             <a:avLst/>
@@ -11693,7 +14038,7 @@
               </a:lnSpc>
             </a:pPr>
             <a:r>
-              <a:rPr sz="2600" b="0">
+              <a:rPr sz="2400" b="0">
                 <a:solidFill>
                   <a:srgbClr val="1B2233"/>
                 </a:solidFill>
@@ -11701,7 +14046,7 @@
                 <a:ea typeface="微软雅黑"/>
                 <a:cs typeface="微软雅黑"/>
               </a:rPr>
-              <a:t>大字大按钮，免登录就能进</a:t>
+              <a:t>不用选分类、不用挑部门</a:t>
             </a:r>
           </a:p>
           <a:p>
@@ -11711,7 +14056,7 @@
               </a:lnSpc>
             </a:pPr>
             <a:r>
-              <a:rPr sz="2600" b="0">
+              <a:rPr sz="2400" b="0">
                 <a:solidFill>
                   <a:srgbClr val="1B2233"/>
                 </a:solidFill>
@@ -11719,7 +14064,7 @@
                 <a:ea typeface="微软雅黑"/>
                 <a:cs typeface="微软雅黑"/>
               </a:rPr>
-              <a:t>语音报修；用药提醒点一下「我已吃」</a:t>
+              <a:t>一句话说清哪儿坏了</a:t>
             </a:r>
           </a:p>
           <a:p>
@@ -11729,7 +14074,7 @@
               </a:lnSpc>
             </a:pPr>
             <a:r>
-              <a:rPr sz="2600" b="0">
+              <a:rPr sz="2400" b="0">
                 <a:solidFill>
                   <a:srgbClr val="1B2233"/>
                 </a:solidFill>
@@ -11737,7 +14082,7 @@
                 <a:ea typeface="微软雅黑"/>
                 <a:cs typeface="微软雅黑"/>
               </a:rPr>
-              <a:t>长按 3 秒才求助，还要再确认一次</a:t>
+              <a:t>进度看得见：上报 → 派单 → 办结</a:t>
             </a:r>
           </a:p>
         </p:txBody>
@@ -11750,8 +14095,8 @@
         </p:nvSpPr>
         <p:spPr>
           <a:xfrm>
-            <a:off x="868680" y="4754880"/>
-            <a:ext cx="5120640" cy="1097280"/>
+            <a:off x="868680" y="4480560"/>
+            <a:ext cx="4846320" cy="1097280"/>
           </a:xfrm>
           <a:prstGeom prst="rect">
             <a:avLst/>
@@ -11770,7 +14115,7 @@
               </a:lnSpc>
             </a:pPr>
             <a:r>
-              <a:rPr sz="2200" b="1">
+              <a:rPr sz="2000" b="1">
                 <a:solidFill>
                   <a:srgbClr val="FF8C42"/>
                 </a:solidFill>
@@ -11778,14 +14123,14 @@
                 <a:ea typeface="微软雅黑"/>
                 <a:cs typeface="微软雅黑"/>
               </a:rPr>
-              <a:t>我怕老人放兜里，误触。</a:t>
+              <a:t>安全隐患自动升级为紧急通知</a:t>
             </a:r>
           </a:p>
         </p:txBody>
       </p:sp>
       <p:pic>
         <p:nvPicPr>
-          <p:cNvPr id="6" name="Picture 5" descr="07-老年端大字首页.png"/>
+          <p:cNvPr id="6" name="Picture 5" descr="10-提交报修表单.png"/>
           <p:cNvPicPr>
             <a:picLocks noChangeAspect="1"/>
           </p:cNvPicPr>
@@ -11799,17 +14144,58 @@
         </p:blipFill>
         <p:spPr>
           <a:xfrm>
-            <a:off x="6492240" y="1554480"/>
-            <a:ext cx="1943642" cy="4206240"/>
+            <a:off x="6035040" y="1554480"/>
+            <a:ext cx="3017520" cy="1885950"/>
           </a:xfrm>
           <a:prstGeom prst="rect">
             <a:avLst/>
           </a:prstGeom>
         </p:spPr>
       </p:pic>
+      <p:sp>
+        <p:nvSpPr>
+          <p:cNvPr id="7" name="TextBox 6"/>
+          <p:cNvSpPr txBox="1"/>
+          <p:nvPr/>
+        </p:nvSpPr>
+        <p:spPr>
+          <a:xfrm>
+            <a:off x="6035040" y="3493008"/>
+            <a:ext cx="3017520" cy="365760"/>
+          </a:xfrm>
+          <a:prstGeom prst="rect">
+            <a:avLst/>
+          </a:prstGeom>
+          <a:noFill/>
+        </p:spPr>
+        <p:txBody>
+          <a:bodyPr wrap="square">
+            <a:spAutoFit/>
+          </a:bodyPr>
+          <a:lstStyle/>
+          <a:p>
+            <a:pPr algn="l">
+              <a:lnSpc>
+                <a:spcPct val="125000"/>
+              </a:lnSpc>
+            </a:pPr>
+            <a:r>
+              <a:rPr sz="1700" b="1">
+                <a:solidFill>
+                  <a:srgbClr val="122A51"/>
+                </a:solidFill>
+                <a:latin typeface="微软雅黑"/>
+                <a:ea typeface="微软雅黑"/>
+                <a:cs typeface="微软雅黑"/>
+              </a:rPr>
+              <a:t>① 一句话提交</a:t>
+            </a:r>
+          </a:p>
+        </p:txBody>
+      </p:sp>
       <p:pic>
         <p:nvPicPr>
-          <p:cNvPr id="7" name="Picture 6" descr="08-老年端长按求助确认框.png"/>
+          <p:cNvPr id="8" name="Picture 7" descr="09-报修列表与状态.png"/>
           <p:cNvPicPr>
             <a:picLocks noChangeAspect="1"/>
           </p:cNvPicPr>
@@ -11823,8 +14209,8 @@
         </p:blipFill>
         <p:spPr>
           <a:xfrm>
-            <a:off x="9052560" y="1554480"/>
-            <a:ext cx="1943642" cy="4206240"/>
+            <a:off x="6035040" y="3977639"/>
+            <a:ext cx="3017520" cy="1885950"/>
           </a:xfrm>
           <a:prstGeom prst="rect">
             <a:avLst/>
@@ -11833,7 +14219,48 @@
       </p:pic>
       <p:sp>
         <p:nvSpPr>
-          <p:cNvPr id="8" name="Rectangle 7"/>
+          <p:cNvPr id="9" name="TextBox 8"/>
+          <p:cNvSpPr txBox="1"/>
+          <p:nvPr/>
+        </p:nvSpPr>
+        <p:spPr>
+          <a:xfrm>
+            <a:off x="6035040" y="5916168"/>
+            <a:ext cx="3017520" cy="365760"/>
+          </a:xfrm>
+          <a:prstGeom prst="rect">
+            <a:avLst/>
+          </a:prstGeom>
+          <a:noFill/>
+        </p:spPr>
+        <p:txBody>
+          <a:bodyPr wrap="square">
+            <a:spAutoFit/>
+          </a:bodyPr>
+          <a:lstStyle/>
+          <a:p>
+            <a:pPr algn="l">
+              <a:lnSpc>
+                <a:spcPct val="125000"/>
+              </a:lnSpc>
+            </a:pPr>
+            <a:r>
+              <a:rPr sz="1700" b="1">
+                <a:solidFill>
+                  <a:srgbClr val="122A51"/>
+                </a:solidFill>
+                <a:latin typeface="微软雅黑"/>
+                <a:ea typeface="微软雅黑"/>
+                <a:cs typeface="微软雅黑"/>
+              </a:rPr>
+              <a:t>② 进度一目了然</a:t>
+            </a:r>
+          </a:p>
+        </p:txBody>
+      </p:sp>
+      <p:sp>
+        <p:nvSpPr>
+          <p:cNvPr id="10" name="Rectangle 9"/>
           <p:cNvSpPr/>
           <p:nvPr/>
         </p:nvSpPr>
@@ -11877,7 +14304,7 @@
       </p:sp>
       <p:sp>
         <p:nvSpPr>
-          <p:cNvPr id="9" name="TextBox 8"/>
+          <p:cNvPr id="11" name="TextBox 10"/>
           <p:cNvSpPr txBox="1"/>
           <p:nvPr/>
         </p:nvSpPr>
@@ -11918,7 +14345,7 @@
       </p:sp>
       <p:sp>
         <p:nvSpPr>
-          <p:cNvPr id="10" name="TextBox 9"/>
+          <p:cNvPr id="12" name="TextBox 11"/>
           <p:cNvSpPr txBox="1"/>
           <p:nvPr/>
         </p:nvSpPr>
@@ -11952,7 +14379,7 @@
                 <a:ea typeface="微软雅黑"/>
                 <a:cs typeface="微软雅黑"/>
               </a:rPr>
-              <a:t>6 / 11</a:t>
+              <a:t>6 / 14</a:t>
             </a:r>
           </a:p>
         </p:txBody>
@@ -12055,14 +14482,14 @@
                 <a:ea typeface="微软雅黑"/>
                 <a:cs typeface="微软雅黑"/>
               </a:rPr>
-              <a:t>五步走完一套流程</a:t>
+              <a:t>居民端：问政策、议事情</a:t>
             </a:r>
           </a:p>
         </p:txBody>
       </p:sp>
       <p:pic>
         <p:nvPicPr>
-          <p:cNvPr id="4" name="Picture 3" descr="10-提交报修表单.png"/>
+          <p:cNvPr id="4" name="Picture 3" descr="03-政策问答带依据与属地.png"/>
           <p:cNvPicPr>
             <a:picLocks noChangeAspect="1"/>
           </p:cNvPicPr>
@@ -12076,8 +14503,8 @@
         </p:blipFill>
         <p:spPr>
           <a:xfrm>
-            <a:off x="658368" y="2017395"/>
-            <a:ext cx="2103120" cy="1314450"/>
+            <a:off x="868680" y="1645920"/>
+            <a:ext cx="3291840" cy="2057400"/>
           </a:xfrm>
           <a:prstGeom prst="rect">
             <a:avLst/>
@@ -12086,58 +14513,14 @@
       </p:pic>
       <p:sp>
         <p:nvSpPr>
-          <p:cNvPr id="5" name="Rounded Rectangle 4"/>
-          <p:cNvSpPr/>
-          <p:nvPr/>
-        </p:nvSpPr>
-        <p:spPr>
-          <a:xfrm>
-            <a:off x="658368" y="3977639"/>
-            <a:ext cx="2103120" cy="1325880"/>
-          </a:xfrm>
-          <a:prstGeom prst="roundRect">
-            <a:avLst/>
-          </a:prstGeom>
-          <a:solidFill>
-            <a:srgbClr val="F2F5FB"/>
-          </a:solidFill>
-          <a:ln>
-            <a:noFill/>
-          </a:ln>
-          <a:effectLst/>
-        </p:spPr>
-        <p:style>
-          <a:lnRef idx="1">
-            <a:schemeClr val="accent1"/>
-          </a:lnRef>
-          <a:fillRef idx="3">
-            <a:schemeClr val="accent1"/>
-          </a:fillRef>
-          <a:effectRef idx="2">
-            <a:schemeClr val="accent1"/>
-          </a:effectRef>
-          <a:fontRef idx="minor">
-            <a:schemeClr val="lt1"/>
-          </a:fontRef>
-        </p:style>
-        <p:txBody>
-          <a:bodyPr rtlCol="0" anchor="ctr"/>
-          <a:lstStyle/>
-          <a:p>
-            <a:pPr algn="ctr"/>
-          </a:p>
-        </p:txBody>
-      </p:sp>
-      <p:sp>
-        <p:nvSpPr>
-          <p:cNvPr id="6" name="TextBox 5"/>
+          <p:cNvPr id="5" name="TextBox 4"/>
           <p:cNvSpPr txBox="1"/>
           <p:nvPr/>
         </p:nvSpPr>
         <p:spPr>
           <a:xfrm>
-            <a:off x="658368" y="4078224"/>
-            <a:ext cx="2103120" cy="457200"/>
+            <a:off x="868680" y="3858768"/>
+            <a:ext cx="3291840" cy="640080"/>
           </a:xfrm>
           <a:prstGeom prst="rect">
             <a:avLst/>
@@ -12150,53 +14533,12 @@
           </a:bodyPr>
           <a:lstStyle/>
           <a:p>
-            <a:pPr algn="ctr">
+            <a:pPr algn="l">
               <a:lnSpc>
                 <a:spcPct val="125000"/>
               </a:lnSpc>
             </a:pPr>
             <a:r>
-              <a:rPr sz="2000" b="1">
-                <a:solidFill>
-                  <a:srgbClr val="122A51"/>
-                </a:solidFill>
-                <a:latin typeface="微软雅黑"/>
-                <a:ea typeface="微软雅黑"/>
-                <a:cs typeface="微软雅黑"/>
-              </a:rPr>
-              <a:t>① 报修</a:t>
-            </a:r>
-          </a:p>
-        </p:txBody>
-      </p:sp>
-      <p:sp>
-        <p:nvSpPr>
-          <p:cNvPr id="7" name="TextBox 6"/>
-          <p:cNvSpPr txBox="1"/>
-          <p:nvPr/>
-        </p:nvSpPr>
-        <p:spPr>
-          <a:xfrm>
-            <a:off x="658368" y="4572000"/>
-            <a:ext cx="2103120" cy="640080"/>
-          </a:xfrm>
-          <a:prstGeom prst="rect">
-            <a:avLst/>
-          </a:prstGeom>
-          <a:noFill/>
-        </p:spPr>
-        <p:txBody>
-          <a:bodyPr wrap="square">
-            <a:spAutoFit/>
-          </a:bodyPr>
-          <a:lstStyle/>
-          <a:p>
-            <a:pPr algn="ctr">
-              <a:lnSpc>
-                <a:spcPct val="125000"/>
-              </a:lnSpc>
-            </a:pPr>
-            <a:r>
               <a:rPr sz="1600" b="0">
                 <a:solidFill>
                   <a:srgbClr val="6B7485"/>
@@ -12205,14 +14547,14 @@
                 <a:ea typeface="微软雅黑"/>
                 <a:cs typeface="微软雅黑"/>
               </a:rPr>
-              <a:t>一句话提交</a:t>
+              <a:t>政策问答：依据 + 适用地区</a:t>
             </a:r>
           </a:p>
         </p:txBody>
       </p:sp>
       <p:pic>
         <p:nvPicPr>
-          <p:cNvPr id="8" name="Picture 7" descr="03-政策问答带依据与属地.png"/>
+          <p:cNvPr id="6" name="Picture 5" descr="11-居民端-邻里议事.png"/>
           <p:cNvPicPr>
             <a:picLocks noChangeAspect="1"/>
           </p:cNvPicPr>
@@ -12226,8 +14568,8 @@
         </p:blipFill>
         <p:spPr>
           <a:xfrm>
-            <a:off x="2907791" y="2017395"/>
-            <a:ext cx="2103120" cy="1314450"/>
+            <a:off x="4434840" y="1645920"/>
+            <a:ext cx="3291840" cy="2057400"/>
           </a:xfrm>
           <a:prstGeom prst="rect">
             <a:avLst/>
@@ -12236,58 +14578,14 @@
       </p:pic>
       <p:sp>
         <p:nvSpPr>
-          <p:cNvPr id="9" name="Rounded Rectangle 8"/>
-          <p:cNvSpPr/>
-          <p:nvPr/>
-        </p:nvSpPr>
-        <p:spPr>
-          <a:xfrm>
-            <a:off x="2907791" y="3977639"/>
-            <a:ext cx="2103120" cy="1325880"/>
-          </a:xfrm>
-          <a:prstGeom prst="roundRect">
-            <a:avLst/>
-          </a:prstGeom>
-          <a:solidFill>
-            <a:srgbClr val="F2F5FB"/>
-          </a:solidFill>
-          <a:ln>
-            <a:noFill/>
-          </a:ln>
-          <a:effectLst/>
-        </p:spPr>
-        <p:style>
-          <a:lnRef idx="1">
-            <a:schemeClr val="accent1"/>
-          </a:lnRef>
-          <a:fillRef idx="3">
-            <a:schemeClr val="accent1"/>
-          </a:fillRef>
-          <a:effectRef idx="2">
-            <a:schemeClr val="accent1"/>
-          </a:effectRef>
-          <a:fontRef idx="minor">
-            <a:schemeClr val="lt1"/>
-          </a:fontRef>
-        </p:style>
-        <p:txBody>
-          <a:bodyPr rtlCol="0" anchor="ctr"/>
-          <a:lstStyle/>
-          <a:p>
-            <a:pPr algn="ctr"/>
-          </a:p>
-        </p:txBody>
-      </p:sp>
-      <p:sp>
-        <p:nvSpPr>
-          <p:cNvPr id="10" name="TextBox 9"/>
+          <p:cNvPr id="7" name="TextBox 6"/>
           <p:cNvSpPr txBox="1"/>
           <p:nvPr/>
         </p:nvSpPr>
         <p:spPr>
           <a:xfrm>
-            <a:off x="2907791" y="4078224"/>
-            <a:ext cx="2103120" cy="457200"/>
+            <a:off x="4434840" y="3858768"/>
+            <a:ext cx="3291840" cy="640080"/>
           </a:xfrm>
           <a:prstGeom prst="rect">
             <a:avLst/>
@@ -12300,53 +14598,12 @@
           </a:bodyPr>
           <a:lstStyle/>
           <a:p>
-            <a:pPr algn="ctr">
+            <a:pPr algn="l">
               <a:lnSpc>
                 <a:spcPct val="125000"/>
               </a:lnSpc>
             </a:pPr>
             <a:r>
-              <a:rPr sz="2000" b="1">
-                <a:solidFill>
-                  <a:srgbClr val="122A51"/>
-                </a:solidFill>
-                <a:latin typeface="微软雅黑"/>
-                <a:ea typeface="微软雅黑"/>
-                <a:cs typeface="微软雅黑"/>
-              </a:rPr>
-              <a:t>② 政策问答</a:t>
-            </a:r>
-          </a:p>
-        </p:txBody>
-      </p:sp>
-      <p:sp>
-        <p:nvSpPr>
-          <p:cNvPr id="11" name="TextBox 10"/>
-          <p:cNvSpPr txBox="1"/>
-          <p:nvPr/>
-        </p:nvSpPr>
-        <p:spPr>
-          <a:xfrm>
-            <a:off x="2907791" y="4572000"/>
-            <a:ext cx="2103120" cy="640080"/>
-          </a:xfrm>
-          <a:prstGeom prst="rect">
-            <a:avLst/>
-          </a:prstGeom>
-          <a:noFill/>
-        </p:spPr>
-        <p:txBody>
-          <a:bodyPr wrap="square">
-            <a:spAutoFit/>
-          </a:bodyPr>
-          <a:lstStyle/>
-          <a:p>
-            <a:pPr algn="ctr">
-              <a:lnSpc>
-                <a:spcPct val="125000"/>
-              </a:lnSpc>
-            </a:pPr>
-            <a:r>
               <a:rPr sz="1600" b="0">
                 <a:solidFill>
                   <a:srgbClr val="6B7485"/>
@@ -12355,14 +14612,14 @@
                 <a:ea typeface="微软雅黑"/>
                 <a:cs typeface="微软雅黑"/>
               </a:rPr>
-              <a:t>带依据与属地</a:t>
+              <a:t>邻里议事：提案与附议</a:t>
             </a:r>
           </a:p>
         </p:txBody>
       </p:sp>
       <p:pic>
         <p:nvPicPr>
-          <p:cNvPr id="12" name="Picture 11" descr="04-多智能体执行链.png"/>
+          <p:cNvPr id="8" name="Picture 7" descr="12-居民端-通知.png"/>
           <p:cNvPicPr>
             <a:picLocks noChangeAspect="1"/>
           </p:cNvPicPr>
@@ -12376,8 +14633,8 @@
         </p:blipFill>
         <p:spPr>
           <a:xfrm>
-            <a:off x="5157216" y="2017395"/>
-            <a:ext cx="2103120" cy="1314450"/>
+            <a:off x="8001000" y="1645920"/>
+            <a:ext cx="3291840" cy="2057400"/>
           </a:xfrm>
           <a:prstGeom prst="rect">
             <a:avLst/>
@@ -12386,58 +14643,14 @@
       </p:pic>
       <p:sp>
         <p:nvSpPr>
-          <p:cNvPr id="13" name="Rounded Rectangle 12"/>
-          <p:cNvSpPr/>
-          <p:nvPr/>
-        </p:nvSpPr>
-        <p:spPr>
-          <a:xfrm>
-            <a:off x="5157216" y="3977639"/>
-            <a:ext cx="2103120" cy="1325880"/>
-          </a:xfrm>
-          <a:prstGeom prst="roundRect">
-            <a:avLst/>
-          </a:prstGeom>
-          <a:solidFill>
-            <a:srgbClr val="F2F5FB"/>
-          </a:solidFill>
-          <a:ln>
-            <a:noFill/>
-          </a:ln>
-          <a:effectLst/>
-        </p:spPr>
-        <p:style>
-          <a:lnRef idx="1">
-            <a:schemeClr val="accent1"/>
-          </a:lnRef>
-          <a:fillRef idx="3">
-            <a:schemeClr val="accent1"/>
-          </a:fillRef>
-          <a:effectRef idx="2">
-            <a:schemeClr val="accent1"/>
-          </a:effectRef>
-          <a:fontRef idx="minor">
-            <a:schemeClr val="lt1"/>
-          </a:fontRef>
-        </p:style>
-        <p:txBody>
-          <a:bodyPr rtlCol="0" anchor="ctr"/>
-          <a:lstStyle/>
-          <a:p>
-            <a:pPr algn="ctr"/>
-          </a:p>
-        </p:txBody>
-      </p:sp>
-      <p:sp>
-        <p:nvSpPr>
-          <p:cNvPr id="14" name="TextBox 13"/>
+          <p:cNvPr id="9" name="TextBox 8"/>
           <p:cNvSpPr txBox="1"/>
           <p:nvPr/>
         </p:nvSpPr>
         <p:spPr>
           <a:xfrm>
-            <a:off x="5157216" y="4078224"/>
-            <a:ext cx="2103120" cy="457200"/>
+            <a:off x="8001000" y="3858768"/>
+            <a:ext cx="3291840" cy="640080"/>
           </a:xfrm>
           <a:prstGeom prst="rect">
             <a:avLst/>
@@ -12450,35 +14663,35 @@
           </a:bodyPr>
           <a:lstStyle/>
           <a:p>
-            <a:pPr algn="ctr">
+            <a:pPr algn="l">
               <a:lnSpc>
                 <a:spcPct val="125000"/>
               </a:lnSpc>
             </a:pPr>
             <a:r>
-              <a:rPr sz="2000" b="1">
-                <a:solidFill>
-                  <a:srgbClr val="122A51"/>
-                </a:solidFill>
-                <a:latin typeface="微软雅黑"/>
-                <a:ea typeface="微软雅黑"/>
-                <a:cs typeface="微软雅黑"/>
-              </a:rPr>
-              <a:t>③ 天气联动</a:t>
-            </a:r>
-          </a:p>
-        </p:txBody>
-      </p:sp>
-      <p:sp>
-        <p:nvSpPr>
-          <p:cNvPr id="15" name="TextBox 14"/>
+              <a:rPr sz="1600" b="0">
+                <a:solidFill>
+                  <a:srgbClr val="6B7485"/>
+                </a:solidFill>
+                <a:latin typeface="微软雅黑"/>
+                <a:ea typeface="微软雅黑"/>
+                <a:cs typeface="微软雅黑"/>
+              </a:rPr>
+              <a:t>通知：普通 / 紧急 / 定时</a:t>
+            </a:r>
+          </a:p>
+        </p:txBody>
+      </p:sp>
+      <p:sp>
+        <p:nvSpPr>
+          <p:cNvPr id="10" name="TextBox 9"/>
           <p:cNvSpPr txBox="1"/>
           <p:nvPr/>
         </p:nvSpPr>
         <p:spPr>
           <a:xfrm>
-            <a:off x="5157216" y="4572000"/>
-            <a:ext cx="2103120" cy="640080"/>
+            <a:off x="868680" y="4846320"/>
+            <a:ext cx="10424160" cy="1280160"/>
           </a:xfrm>
           <a:prstGeom prst="rect">
             <a:avLst/>
@@ -12491,328 +14704,46 @@
           </a:bodyPr>
           <a:lstStyle/>
           <a:p>
-            <a:pPr algn="ctr">
-              <a:lnSpc>
-                <a:spcPct val="125000"/>
-              </a:lnSpc>
-            </a:pPr>
-            <a:r>
-              <a:rPr sz="1600" b="0">
-                <a:solidFill>
-                  <a:srgbClr val="6B7485"/>
-                </a:solidFill>
-                <a:latin typeface="微软雅黑"/>
-                <a:ea typeface="微软雅黑"/>
-                <a:cs typeface="微软雅黑"/>
-              </a:rPr>
-              <a:t>看执行链</a:t>
-            </a:r>
-          </a:p>
-        </p:txBody>
-      </p:sp>
-      <p:pic>
-        <p:nvPicPr>
-          <p:cNvPr id="16" name="Picture 15" descr="08-老年端长按求助确认框.png"/>
-          <p:cNvPicPr>
-            <a:picLocks noChangeAspect="1"/>
-          </p:cNvPicPr>
-          <p:nvPr/>
-        </p:nvPicPr>
-        <p:blipFill>
-          <a:blip r:embed="rId5"/>
-          <a:stretch>
-            <a:fillRect/>
-          </a:stretch>
-        </p:blipFill>
-        <p:spPr>
-          <a:xfrm>
-            <a:off x="7961726" y="1600200"/>
-            <a:ext cx="992947" cy="2148839"/>
-          </a:xfrm>
-          <a:prstGeom prst="rect">
-            <a:avLst/>
-          </a:prstGeom>
-        </p:spPr>
-      </p:pic>
-      <p:sp>
-        <p:nvSpPr>
-          <p:cNvPr id="17" name="Rounded Rectangle 16"/>
-          <p:cNvSpPr/>
-          <p:nvPr/>
-        </p:nvSpPr>
-        <p:spPr>
-          <a:xfrm>
-            <a:off x="7406640" y="3977639"/>
-            <a:ext cx="2103120" cy="1325880"/>
-          </a:xfrm>
-          <a:prstGeom prst="roundRect">
-            <a:avLst/>
-          </a:prstGeom>
-          <a:solidFill>
-            <a:srgbClr val="F2F5FB"/>
-          </a:solidFill>
-          <a:ln>
-            <a:noFill/>
-          </a:ln>
-          <a:effectLst/>
-        </p:spPr>
-        <p:style>
-          <a:lnRef idx="1">
-            <a:schemeClr val="accent1"/>
-          </a:lnRef>
-          <a:fillRef idx="3">
-            <a:schemeClr val="accent1"/>
-          </a:fillRef>
-          <a:effectRef idx="2">
-            <a:schemeClr val="accent1"/>
-          </a:effectRef>
-          <a:fontRef idx="minor">
-            <a:schemeClr val="lt1"/>
-          </a:fontRef>
-        </p:style>
-        <p:txBody>
-          <a:bodyPr rtlCol="0" anchor="ctr"/>
-          <a:lstStyle/>
-          <a:p>
-            <a:pPr algn="ctr"/>
-          </a:p>
-        </p:txBody>
-      </p:sp>
-      <p:sp>
-        <p:nvSpPr>
-          <p:cNvPr id="18" name="TextBox 17"/>
-          <p:cNvSpPr txBox="1"/>
-          <p:nvPr/>
-        </p:nvSpPr>
-        <p:spPr>
-          <a:xfrm>
-            <a:off x="7406640" y="4078224"/>
-            <a:ext cx="2103120" cy="457200"/>
-          </a:xfrm>
-          <a:prstGeom prst="rect">
-            <a:avLst/>
-          </a:prstGeom>
-          <a:noFill/>
-        </p:spPr>
-        <p:txBody>
-          <a:bodyPr wrap="square">
-            <a:spAutoFit/>
-          </a:bodyPr>
-          <a:lstStyle/>
-          <a:p>
-            <a:pPr algn="ctr">
-              <a:lnSpc>
-                <a:spcPct val="125000"/>
-              </a:lnSpc>
-            </a:pPr>
-            <a:r>
-              <a:rPr sz="2000" b="1">
-                <a:solidFill>
-                  <a:srgbClr val="122A51"/>
-                </a:solidFill>
-                <a:latin typeface="微软雅黑"/>
-                <a:ea typeface="微软雅黑"/>
-                <a:cs typeface="微软雅黑"/>
-              </a:rPr>
-              <a:t>④ 老人端</a:t>
-            </a:r>
-          </a:p>
-        </p:txBody>
-      </p:sp>
-      <p:sp>
-        <p:nvSpPr>
-          <p:cNvPr id="19" name="TextBox 18"/>
-          <p:cNvSpPr txBox="1"/>
-          <p:nvPr/>
-        </p:nvSpPr>
-        <p:spPr>
-          <a:xfrm>
-            <a:off x="7406640" y="4572000"/>
-            <a:ext cx="2103120" cy="640080"/>
-          </a:xfrm>
-          <a:prstGeom prst="rect">
-            <a:avLst/>
-          </a:prstGeom>
-          <a:noFill/>
-        </p:spPr>
-        <p:txBody>
-          <a:bodyPr wrap="square">
-            <a:spAutoFit/>
-          </a:bodyPr>
-          <a:lstStyle/>
-          <a:p>
-            <a:pPr algn="ctr">
-              <a:lnSpc>
-                <a:spcPct val="125000"/>
-              </a:lnSpc>
-            </a:pPr>
-            <a:r>
-              <a:rPr sz="1600" b="0">
-                <a:solidFill>
-                  <a:srgbClr val="6B7485"/>
-                </a:solidFill>
-                <a:latin typeface="微软雅黑"/>
-                <a:ea typeface="微软雅黑"/>
-                <a:cs typeface="微软雅黑"/>
-              </a:rPr>
-              <a:t>长按 3 秒再确认</a:t>
-            </a:r>
-          </a:p>
-        </p:txBody>
-      </p:sp>
-      <p:pic>
-        <p:nvPicPr>
-          <p:cNvPr id="20" name="Picture 19" descr="06-网格员工作台.png"/>
-          <p:cNvPicPr>
-            <a:picLocks noChangeAspect="1"/>
-          </p:cNvPicPr>
-          <p:nvPr/>
-        </p:nvPicPr>
-        <p:blipFill>
-          <a:blip r:embed="rId6"/>
-          <a:stretch>
-            <a:fillRect/>
-          </a:stretch>
-        </p:blipFill>
-        <p:spPr>
-          <a:xfrm>
-            <a:off x="9656063" y="2017395"/>
-            <a:ext cx="2103120" cy="1314450"/>
-          </a:xfrm>
-          <a:prstGeom prst="rect">
-            <a:avLst/>
-          </a:prstGeom>
-        </p:spPr>
-      </p:pic>
-      <p:sp>
-        <p:nvSpPr>
-          <p:cNvPr id="21" name="Rounded Rectangle 20"/>
-          <p:cNvSpPr/>
-          <p:nvPr/>
-        </p:nvSpPr>
-        <p:spPr>
-          <a:xfrm>
-            <a:off x="9656063" y="3977639"/>
-            <a:ext cx="2103120" cy="1325880"/>
-          </a:xfrm>
-          <a:prstGeom prst="roundRect">
-            <a:avLst/>
-          </a:prstGeom>
-          <a:solidFill>
-            <a:srgbClr val="F2F5FB"/>
-          </a:solidFill>
-          <a:ln>
-            <a:noFill/>
-          </a:ln>
-          <a:effectLst/>
-        </p:spPr>
-        <p:style>
-          <a:lnRef idx="1">
-            <a:schemeClr val="accent1"/>
-          </a:lnRef>
-          <a:fillRef idx="3">
-            <a:schemeClr val="accent1"/>
-          </a:fillRef>
-          <a:effectRef idx="2">
-            <a:schemeClr val="accent1"/>
-          </a:effectRef>
-          <a:fontRef idx="minor">
-            <a:schemeClr val="lt1"/>
-          </a:fontRef>
-        </p:style>
-        <p:txBody>
-          <a:bodyPr rtlCol="0" anchor="ctr"/>
-          <a:lstStyle/>
-          <a:p>
-            <a:pPr algn="ctr"/>
-          </a:p>
-        </p:txBody>
-      </p:sp>
-      <p:sp>
-        <p:nvSpPr>
-          <p:cNvPr id="22" name="TextBox 21"/>
-          <p:cNvSpPr txBox="1"/>
-          <p:nvPr/>
-        </p:nvSpPr>
-        <p:spPr>
-          <a:xfrm>
-            <a:off x="9656063" y="4078224"/>
-            <a:ext cx="2103120" cy="457200"/>
-          </a:xfrm>
-          <a:prstGeom prst="rect">
-            <a:avLst/>
-          </a:prstGeom>
-          <a:noFill/>
-        </p:spPr>
-        <p:txBody>
-          <a:bodyPr wrap="square">
-            <a:spAutoFit/>
-          </a:bodyPr>
-          <a:lstStyle/>
-          <a:p>
-            <a:pPr algn="ctr">
-              <a:lnSpc>
-                <a:spcPct val="125000"/>
-              </a:lnSpc>
-            </a:pPr>
-            <a:r>
-              <a:rPr sz="2000" b="1">
-                <a:solidFill>
-                  <a:srgbClr val="122A51"/>
-                </a:solidFill>
-                <a:latin typeface="微软雅黑"/>
-                <a:ea typeface="微软雅黑"/>
-                <a:cs typeface="微软雅黑"/>
-              </a:rPr>
-              <a:t>⑤ 网格端</a:t>
-            </a:r>
-          </a:p>
-        </p:txBody>
-      </p:sp>
-      <p:sp>
-        <p:nvSpPr>
-          <p:cNvPr id="23" name="TextBox 22"/>
-          <p:cNvSpPr txBox="1"/>
-          <p:nvPr/>
-        </p:nvSpPr>
-        <p:spPr>
-          <a:xfrm>
-            <a:off x="9656063" y="4572000"/>
-            <a:ext cx="2103120" cy="640080"/>
-          </a:xfrm>
-          <a:prstGeom prst="rect">
-            <a:avLst/>
-          </a:prstGeom>
-          <a:noFill/>
-        </p:spPr>
-        <p:txBody>
-          <a:bodyPr wrap="square">
-            <a:spAutoFit/>
-          </a:bodyPr>
-          <a:lstStyle/>
-          <a:p>
-            <a:pPr algn="ctr">
-              <a:lnSpc>
-                <a:spcPct val="125000"/>
-              </a:lnSpc>
-            </a:pPr>
-            <a:r>
-              <a:rPr sz="1600" b="0">
-                <a:solidFill>
-                  <a:srgbClr val="6B7485"/>
-                </a:solidFill>
-                <a:latin typeface="微软雅黑"/>
-                <a:ea typeface="微软雅黑"/>
-                <a:cs typeface="微软雅黑"/>
-              </a:rPr>
-              <a:t>待办与处理</a:t>
-            </a:r>
-          </a:p>
-        </p:txBody>
-      </p:sp>
-      <p:sp>
-        <p:nvSpPr>
-          <p:cNvPr id="24" name="Rectangle 23"/>
+            <a:pPr algn="l">
+              <a:lnSpc>
+                <a:spcPct val="140000"/>
+              </a:lnSpc>
+            </a:pPr>
+            <a:r>
+              <a:rPr sz="2200" b="0">
+                <a:solidFill>
+                  <a:srgbClr val="1B2233"/>
+                </a:solidFill>
+                <a:latin typeface="微软雅黑"/>
+                <a:ea typeface="微软雅黑"/>
+                <a:cs typeface="微软雅黑"/>
+              </a:rPr>
+              <a:t>查不到依据就转人工，不硬答。</a:t>
+            </a:r>
+          </a:p>
+          <a:p>
+            <a:pPr algn="l">
+              <a:lnSpc>
+                <a:spcPct val="140000"/>
+              </a:lnSpc>
+            </a:pPr>
+            <a:r>
+              <a:rPr sz="2200" b="0">
+                <a:solidFill>
+                  <a:srgbClr val="1B2233"/>
+                </a:solidFill>
+                <a:latin typeface="微软雅黑"/>
+                <a:ea typeface="微软雅黑"/>
+                <a:cs typeface="微软雅黑"/>
+              </a:rPr>
+              <a:t>通知发出去有已读回执。</a:t>
+            </a:r>
+          </a:p>
+        </p:txBody>
+      </p:sp>
+      <p:sp>
+        <p:nvSpPr>
+          <p:cNvPr id="11" name="Rectangle 10"/>
           <p:cNvSpPr/>
           <p:nvPr/>
         </p:nvSpPr>
@@ -12856,7 +14787,7 @@
       </p:sp>
       <p:sp>
         <p:nvSpPr>
-          <p:cNvPr id="25" name="TextBox 24"/>
+          <p:cNvPr id="12" name="TextBox 11"/>
           <p:cNvSpPr txBox="1"/>
           <p:nvPr/>
         </p:nvSpPr>
@@ -12897,7 +14828,7 @@
       </p:sp>
       <p:sp>
         <p:nvSpPr>
-          <p:cNvPr id="26" name="TextBox 25"/>
+          <p:cNvPr id="13" name="TextBox 12"/>
           <p:cNvSpPr txBox="1"/>
           <p:nvPr/>
         </p:nvSpPr>
@@ -12931,7 +14862,7 @@
                 <a:ea typeface="微软雅黑"/>
                 <a:cs typeface="微软雅黑"/>
               </a:rPr>
-              <a:t>7 / 11</a:t>
+              <a:t>7 / 14</a:t>
             </a:r>
           </a:p>
         </p:txBody>
@@ -13034,14 +14965,14 @@
                 <a:ea typeface="微软雅黑"/>
                 <a:cs typeface="微软雅黑"/>
               </a:rPr>
-              <a:t>再看几处细节</a:t>
+              <a:t>网格员端：一个工作台</a:t>
             </a:r>
           </a:p>
         </p:txBody>
       </p:sp>
       <p:pic>
         <p:nvPicPr>
-          <p:cNvPr id="4" name="Picture 3" descr="03-政策问答带依据与属地.png"/>
+          <p:cNvPr id="4" name="Picture 3" descr="06-网格员工作台.png"/>
           <p:cNvPicPr>
             <a:picLocks noChangeAspect="1"/>
           </p:cNvPicPr>
@@ -13055,8 +14986,8 @@
         </p:blipFill>
         <p:spPr>
           <a:xfrm>
-            <a:off x="868680" y="1645920"/>
-            <a:ext cx="3291840" cy="2057400"/>
+            <a:off x="868680" y="1600200"/>
+            <a:ext cx="6492240" cy="4057650"/>
           </a:xfrm>
           <a:prstGeom prst="rect">
             <a:avLst/>
@@ -13071,8 +15002,8 @@
         </p:nvSpPr>
         <p:spPr>
           <a:xfrm>
-            <a:off x="868680" y="3886200"/>
-            <a:ext cx="3291840" cy="822960"/>
+            <a:off x="868680" y="5760720"/>
+            <a:ext cx="6492240" cy="365760"/>
           </a:xfrm>
           <a:prstGeom prst="rect">
             <a:avLst/>
@@ -13099,45 +15030,21 @@
                 <a:ea typeface="微软雅黑"/>
                 <a:cs typeface="微软雅黑"/>
               </a:rPr>
-              <a:t>政策问答：答案下方给知识库依据，并标注适用地区</a:t>
-            </a:r>
-          </a:p>
-        </p:txBody>
-      </p:sp>
-      <p:pic>
-        <p:nvPicPr>
-          <p:cNvPr id="6" name="Picture 5" descr="05-工单详情与处理留痕.png"/>
-          <p:cNvPicPr>
-            <a:picLocks noChangeAspect="1"/>
-          </p:cNvPicPr>
-          <p:nvPr/>
-        </p:nvPicPr>
-        <p:blipFill>
-          <a:blip r:embed="rId3"/>
-          <a:stretch>
-            <a:fillRect/>
-          </a:stretch>
-        </p:blipFill>
-        <p:spPr>
-          <a:xfrm>
-            <a:off x="4434840" y="1645920"/>
-            <a:ext cx="3291840" cy="2057400"/>
-          </a:xfrm>
-          <a:prstGeom prst="rect">
-            <a:avLst/>
-          </a:prstGeom>
-        </p:spPr>
-      </p:pic>
-      <p:sp>
-        <p:nvSpPr>
-          <p:cNvPr id="7" name="TextBox 6"/>
+              <a:t>待办、概览、导出在一页看完</a:t>
+            </a:r>
+          </a:p>
+        </p:txBody>
+      </p:sp>
+      <p:sp>
+        <p:nvSpPr>
+          <p:cNvPr id="6" name="TextBox 5"/>
           <p:cNvSpPr txBox="1"/>
           <p:nvPr/>
         </p:nvSpPr>
         <p:spPr>
           <a:xfrm>
-            <a:off x="4434840" y="3886200"/>
-            <a:ext cx="3291840" cy="822960"/>
+            <a:off x="7726679" y="1783080"/>
+            <a:ext cx="4023360" cy="3840480"/>
           </a:xfrm>
           <a:prstGeom prst="rect">
             <a:avLst/>
@@ -13152,91 +15059,80 @@
           <a:p>
             <a:pPr algn="l">
               <a:lnSpc>
-                <a:spcPct val="125000"/>
-              </a:lnSpc>
-            </a:pPr>
-            <a:r>
-              <a:rPr sz="1600" b="0">
-                <a:solidFill>
-                  <a:srgbClr val="6B7485"/>
-                </a:solidFill>
-                <a:latin typeface="微软雅黑"/>
-                <a:ea typeface="微软雅黑"/>
-                <a:cs typeface="微软雅黑"/>
-              </a:rPr>
-              <a:t>工单详情：谁在什么时候处理，全有留痕</a:t>
-            </a:r>
-          </a:p>
-        </p:txBody>
-      </p:sp>
-      <p:pic>
-        <p:nvPicPr>
-          <p:cNvPr id="8" name="Picture 7" descr="05-工单详情与处理留痕.png"/>
-          <p:cNvPicPr>
-            <a:picLocks noChangeAspect="1"/>
-          </p:cNvPicPr>
-          <p:nvPr/>
-        </p:nvPicPr>
-        <p:blipFill>
-          <a:blip r:embed="rId3"/>
-          <a:stretch>
-            <a:fillRect/>
-          </a:stretch>
-        </p:blipFill>
-        <p:spPr>
-          <a:xfrm>
-            <a:off x="8001000" y="1645920"/>
-            <a:ext cx="3291840" cy="2057400"/>
-          </a:xfrm>
-          <a:prstGeom prst="rect">
-            <a:avLst/>
-          </a:prstGeom>
-        </p:spPr>
-      </p:pic>
-      <p:sp>
-        <p:nvSpPr>
-          <p:cNvPr id="9" name="TextBox 8"/>
-          <p:cNvSpPr txBox="1"/>
-          <p:nvPr/>
-        </p:nvSpPr>
-        <p:spPr>
-          <a:xfrm>
-            <a:off x="8001000" y="3886200"/>
-            <a:ext cx="3291840" cy="822960"/>
-          </a:xfrm>
-          <a:prstGeom prst="rect">
-            <a:avLst/>
-          </a:prstGeom>
-          <a:noFill/>
-        </p:spPr>
-        <p:txBody>
-          <a:bodyPr wrap="square">
-            <a:spAutoFit/>
-          </a:bodyPr>
-          <a:lstStyle/>
+                <a:spcPct val="170000"/>
+              </a:lnSpc>
+            </a:pPr>
+            <a:r>
+              <a:rPr sz="2000" b="0">
+                <a:solidFill>
+                  <a:srgbClr val="1B2233"/>
+                </a:solidFill>
+                <a:latin typeface="微软雅黑"/>
+                <a:ea typeface="微软雅黑"/>
+                <a:cs typeface="微软雅黑"/>
+              </a:rPr>
+              <a:t>待办：要派的、要回访的</a:t>
+            </a:r>
+          </a:p>
           <a:p>
             <a:pPr algn="l">
               <a:lnSpc>
-                <a:spcPct val="125000"/>
-              </a:lnSpc>
-            </a:pPr>
-            <a:r>
-              <a:rPr sz="1600" b="0">
-                <a:solidFill>
-                  <a:srgbClr val="6B7485"/>
-                </a:solidFill>
-                <a:latin typeface="微软雅黑"/>
-                <a:ea typeface="微软雅黑"/>
-                <a:cs typeface="微软雅黑"/>
-              </a:rPr>
-              <a:t>居民端报修列表：状态一目了然</a:t>
-            </a:r>
-          </a:p>
-        </p:txBody>
-      </p:sp>
-      <p:sp>
-        <p:nvSpPr>
-          <p:cNvPr id="10" name="Rectangle 9"/>
+                <a:spcPct val="170000"/>
+              </a:lnSpc>
+            </a:pPr>
+            <a:r>
+              <a:rPr sz="2000" b="0">
+                <a:solidFill>
+                  <a:srgbClr val="1B2233"/>
+                </a:solidFill>
+                <a:latin typeface="微软雅黑"/>
+                <a:ea typeface="微软雅黑"/>
+                <a:cs typeface="微软雅黑"/>
+              </a:rPr>
+              <a:t>红黑榜：哪个小区问题多</a:t>
+            </a:r>
+          </a:p>
+          <a:p>
+            <a:pPr algn="l">
+              <a:lnSpc>
+                <a:spcPct val="170000"/>
+              </a:lnSpc>
+            </a:pPr>
+            <a:r>
+              <a:rPr sz="2000" b="0">
+                <a:solidFill>
+                  <a:srgbClr val="1B2233"/>
+                </a:solidFill>
+                <a:latin typeface="微软雅黑"/>
+                <a:ea typeface="微软雅黑"/>
+                <a:cs typeface="微软雅黑"/>
+              </a:rPr>
+              <a:t>导出：按条件导周报</a:t>
+            </a:r>
+          </a:p>
+          <a:p>
+            <a:pPr algn="l">
+              <a:lnSpc>
+                <a:spcPct val="170000"/>
+              </a:lnSpc>
+            </a:pPr>
+            <a:r>
+              <a:rPr sz="2000" b="0">
+                <a:solidFill>
+                  <a:srgbClr val="1B2233"/>
+                </a:solidFill>
+                <a:latin typeface="微软雅黑"/>
+                <a:ea typeface="微软雅黑"/>
+                <a:cs typeface="微软雅黑"/>
+              </a:rPr>
+              <a:t>AI 助手：大白话问数据</a:t>
+            </a:r>
+          </a:p>
+        </p:txBody>
+      </p:sp>
+      <p:sp>
+        <p:nvSpPr>
+          <p:cNvPr id="7" name="Rectangle 6"/>
           <p:cNvSpPr/>
           <p:nvPr/>
         </p:nvSpPr>
@@ -13280,7 +15176,7 @@
       </p:sp>
       <p:sp>
         <p:nvSpPr>
-          <p:cNvPr id="11" name="TextBox 10"/>
+          <p:cNvPr id="8" name="TextBox 7"/>
           <p:cNvSpPr txBox="1"/>
           <p:nvPr/>
         </p:nvSpPr>
@@ -13321,7 +15217,7 @@
       </p:sp>
       <p:sp>
         <p:nvSpPr>
-          <p:cNvPr id="12" name="TextBox 11"/>
+          <p:cNvPr id="9" name="TextBox 8"/>
           <p:cNvSpPr txBox="1"/>
           <p:nvPr/>
         </p:nvSpPr>
@@ -13355,7 +15251,7 @@
                 <a:ea typeface="微软雅黑"/>
                 <a:cs typeface="微软雅黑"/>
               </a:rPr>
-              <a:t>8 / 11</a:t>
+              <a:t>8 / 14</a:t>
             </a:r>
           </a:p>
         </p:txBody>
@@ -13458,65 +15354,69 @@
                 <a:ea typeface="微软雅黑"/>
                 <a:cs typeface="微软雅黑"/>
               </a:rPr>
-              <a:t>现在能用的功能</a:t>
-            </a:r>
-          </a:p>
-        </p:txBody>
-      </p:sp>
-      <p:sp>
-        <p:nvSpPr>
-          <p:cNvPr id="4" name="Rounded Rectangle 3"/>
-          <p:cNvSpPr/>
-          <p:nvPr/>
-        </p:nvSpPr>
-        <p:spPr>
-          <a:xfrm>
-            <a:off x="868680" y="1737360"/>
-            <a:ext cx="5120640" cy="960120"/>
-          </a:xfrm>
-          <a:prstGeom prst="roundRect">
-            <a:avLst/>
-          </a:prstGeom>
-          <a:solidFill>
-            <a:srgbClr val="F2F5FB"/>
-          </a:solidFill>
-          <a:ln>
-            <a:noFill/>
-          </a:ln>
-          <a:effectLst/>
-        </p:spPr>
-        <p:style>
-          <a:lnRef idx="1">
-            <a:schemeClr val="accent1"/>
-          </a:lnRef>
-          <a:fillRef idx="3">
-            <a:schemeClr val="accent1"/>
-          </a:fillRef>
-          <a:effectRef idx="2">
-            <a:schemeClr val="accent1"/>
-          </a:effectRef>
-          <a:fontRef idx="minor">
-            <a:schemeClr val="lt1"/>
-          </a:fontRef>
-        </p:style>
-        <p:txBody>
-          <a:bodyPr rtlCol="0" anchor="ctr"/>
-          <a:lstStyle/>
-          <a:p>
-            <a:pPr algn="ctr"/>
-          </a:p>
-        </p:txBody>
-      </p:sp>
-      <p:sp>
-        <p:nvSpPr>
-          <p:cNvPr id="5" name="TextBox 4"/>
+              <a:t>网格员端：留痕，和盯住老人</a:t>
+            </a:r>
+          </a:p>
+        </p:txBody>
+      </p:sp>
+      <p:pic>
+        <p:nvPicPr>
+          <p:cNvPr id="4" name="Picture 3" descr="09-报修列表与状态.png"/>
+          <p:cNvPicPr>
+            <a:picLocks noChangeAspect="1"/>
+          </p:cNvPicPr>
+          <p:nvPr/>
+        </p:nvPicPr>
+        <p:blipFill>
+          <a:blip r:embed="rId2"/>
+          <a:stretch>
+            <a:fillRect/>
+          </a:stretch>
+        </p:blipFill>
+        <p:spPr>
+          <a:xfrm>
+            <a:off x="868680" y="1645920"/>
+            <a:ext cx="4937760" cy="3086100"/>
+          </a:xfrm>
+          <a:prstGeom prst="rect">
+            <a:avLst/>
+          </a:prstGeom>
+        </p:spPr>
+      </p:pic>
+      <p:pic>
+        <p:nvPicPr>
+          <p:cNvPr id="5" name="Picture 4" descr="14-网格员端-老年关怀.png"/>
+          <p:cNvPicPr>
+            <a:picLocks noChangeAspect="1"/>
+          </p:cNvPicPr>
+          <p:nvPr/>
+        </p:nvPicPr>
+        <p:blipFill>
+          <a:blip r:embed="rId3"/>
+          <a:stretch>
+            <a:fillRect/>
+          </a:stretch>
+        </p:blipFill>
+        <p:spPr>
+          <a:xfrm>
+            <a:off x="6355080" y="1645920"/>
+            <a:ext cx="4937760" cy="3086100"/>
+          </a:xfrm>
+          <a:prstGeom prst="rect">
+            <a:avLst/>
+          </a:prstGeom>
+        </p:spPr>
+      </p:pic>
+      <p:sp>
+        <p:nvSpPr>
+          <p:cNvPr id="6" name="TextBox 5"/>
           <p:cNvSpPr txBox="1"/>
           <p:nvPr/>
         </p:nvSpPr>
         <p:spPr>
           <a:xfrm>
-            <a:off x="1097280" y="1847088"/>
-            <a:ext cx="1463040" cy="731520"/>
+            <a:off x="868680" y="4892040"/>
+            <a:ext cx="4937760" cy="640080"/>
           </a:xfrm>
           <a:prstGeom prst="rect">
             <a:avLst/>
@@ -13535,29 +15435,29 @@
               </a:lnSpc>
             </a:pPr>
             <a:r>
-              <a:rPr sz="2000" b="1">
-                <a:solidFill>
-                  <a:srgbClr val="122A51"/>
-                </a:solidFill>
-                <a:latin typeface="微软雅黑"/>
-                <a:ea typeface="微软雅黑"/>
-                <a:cs typeface="微软雅黑"/>
-              </a:rPr>
-              <a:t>报修</a:t>
-            </a:r>
-          </a:p>
-        </p:txBody>
-      </p:sp>
-      <p:sp>
-        <p:nvSpPr>
-          <p:cNvPr id="6" name="TextBox 5"/>
+              <a:rPr sz="1600" b="0">
+                <a:solidFill>
+                  <a:srgbClr val="6B7485"/>
+                </a:solidFill>
+                <a:latin typeface="微软雅黑"/>
+                <a:ea typeface="微软雅黑"/>
+                <a:cs typeface="微软雅黑"/>
+              </a:rPr>
+              <a:t>工单详情：谁在什么时候处理</a:t>
+            </a:r>
+          </a:p>
+        </p:txBody>
+      </p:sp>
+      <p:sp>
+        <p:nvSpPr>
+          <p:cNvPr id="7" name="TextBox 6"/>
           <p:cNvSpPr txBox="1"/>
           <p:nvPr/>
         </p:nvSpPr>
         <p:spPr>
           <a:xfrm>
-            <a:off x="2606039" y="1883664"/>
-            <a:ext cx="3200400" cy="731520"/>
+            <a:off x="6355080" y="4892040"/>
+            <a:ext cx="4937760" cy="640080"/>
           </a:xfrm>
           <a:prstGeom prst="rect">
             <a:avLst/>
@@ -13578,58 +15478,14 @@
             <a:r>
               <a:rPr sz="1600" b="0">
                 <a:solidFill>
-                  <a:srgbClr val="1B2233"/>
-                </a:solidFill>
-                <a:latin typeface="微软雅黑"/>
-                <a:ea typeface="微软雅黑"/>
-                <a:cs typeface="微软雅黑"/>
-              </a:rPr>
-              <a:t>全状态机：提交 → 审核 → 派单 → 处理 → 办结 → 回访</a:t>
-            </a:r>
-          </a:p>
-        </p:txBody>
-      </p:sp>
-      <p:sp>
-        <p:nvSpPr>
-          <p:cNvPr id="7" name="Rounded Rectangle 6"/>
-          <p:cNvSpPr/>
-          <p:nvPr/>
-        </p:nvSpPr>
-        <p:spPr>
-          <a:xfrm>
-            <a:off x="6355080" y="1737360"/>
-            <a:ext cx="5120640" cy="960120"/>
-          </a:xfrm>
-          <a:prstGeom prst="roundRect">
-            <a:avLst/>
-          </a:prstGeom>
-          <a:solidFill>
-            <a:srgbClr val="F2F5FB"/>
-          </a:solidFill>
-          <a:ln>
-            <a:noFill/>
-          </a:ln>
-          <a:effectLst/>
-        </p:spPr>
-        <p:style>
-          <a:lnRef idx="1">
-            <a:schemeClr val="accent1"/>
-          </a:lnRef>
-          <a:fillRef idx="3">
-            <a:schemeClr val="accent1"/>
-          </a:fillRef>
-          <a:effectRef idx="2">
-            <a:schemeClr val="accent1"/>
-          </a:effectRef>
-          <a:fontRef idx="minor">
-            <a:schemeClr val="lt1"/>
-          </a:fontRef>
-        </p:style>
-        <p:txBody>
-          <a:bodyPr rtlCol="0" anchor="ctr"/>
-          <a:lstStyle/>
-          <a:p>
-            <a:pPr algn="ctr"/>
+                  <a:srgbClr val="6B7485"/>
+                </a:solidFill>
+                <a:latin typeface="微软雅黑"/>
+                <a:ea typeface="微软雅黑"/>
+                <a:cs typeface="微软雅黑"/>
+              </a:rPr>
+              <a:t>老年关怀：用药与联系人要审核</a:t>
+            </a:r>
           </a:p>
         </p:txBody>
       </p:sp>
@@ -13641,8 +15497,8 @@
         </p:nvSpPr>
         <p:spPr>
           <a:xfrm>
-            <a:off x="6583680" y="1847088"/>
-            <a:ext cx="1463040" cy="731520"/>
+            <a:off x="868680" y="5623560"/>
+            <a:ext cx="10424160" cy="822960"/>
           </a:xfrm>
           <a:prstGeom prst="rect">
             <a:avLst/>
@@ -13661,819 +15517,22 @@
               </a:lnSpc>
             </a:pPr>
             <a:r>
-              <a:rPr sz="2000" b="1">
-                <a:solidFill>
-                  <a:srgbClr val="122A51"/>
-                </a:solidFill>
-                <a:latin typeface="微软雅黑"/>
-                <a:ea typeface="微软雅黑"/>
-                <a:cs typeface="微软雅黑"/>
-              </a:rPr>
-              <a:t>提案</a:t>
-            </a:r>
-          </a:p>
-        </p:txBody>
-      </p:sp>
-      <p:sp>
-        <p:nvSpPr>
-          <p:cNvPr id="9" name="TextBox 8"/>
-          <p:cNvSpPr txBox="1"/>
-          <p:nvPr/>
-        </p:nvSpPr>
-        <p:spPr>
-          <a:xfrm>
-            <a:off x="8092440" y="1883664"/>
-            <a:ext cx="3200400" cy="731520"/>
-          </a:xfrm>
-          <a:prstGeom prst="rect">
-            <a:avLst/>
-          </a:prstGeom>
-          <a:noFill/>
-        </p:spPr>
-        <p:txBody>
-          <a:bodyPr wrap="square">
-            <a:spAutoFit/>
-          </a:bodyPr>
-          <a:lstStyle/>
-          <a:p>
-            <a:pPr algn="l">
-              <a:lnSpc>
-                <a:spcPct val="125000"/>
-              </a:lnSpc>
-            </a:pPr>
-            <a:r>
-              <a:rPr sz="1600" b="0">
-                <a:solidFill>
-                  <a:srgbClr val="1B2233"/>
-                </a:solidFill>
-                <a:latin typeface="微软雅黑"/>
-                <a:ea typeface="微软雅黑"/>
-                <a:cs typeface="微软雅黑"/>
-              </a:rPr>
-              <a:t>全生命周期：提交 → 附议 → 回应 → 采纳 → 实施</a:t>
-            </a:r>
-          </a:p>
-        </p:txBody>
-      </p:sp>
-      <p:sp>
-        <p:nvSpPr>
-          <p:cNvPr id="10" name="Rounded Rectangle 9"/>
-          <p:cNvSpPr/>
-          <p:nvPr/>
-        </p:nvSpPr>
-        <p:spPr>
-          <a:xfrm>
-            <a:off x="868680" y="2880360"/>
-            <a:ext cx="5120640" cy="960120"/>
-          </a:xfrm>
-          <a:prstGeom prst="roundRect">
-            <a:avLst/>
-          </a:prstGeom>
-          <a:solidFill>
-            <a:srgbClr val="F2F5FB"/>
-          </a:solidFill>
-          <a:ln>
-            <a:noFill/>
-          </a:ln>
-          <a:effectLst/>
-        </p:spPr>
-        <p:style>
-          <a:lnRef idx="1">
-            <a:schemeClr val="accent1"/>
-          </a:lnRef>
-          <a:fillRef idx="3">
-            <a:schemeClr val="accent1"/>
-          </a:fillRef>
-          <a:effectRef idx="2">
-            <a:schemeClr val="accent1"/>
-          </a:effectRef>
-          <a:fontRef idx="minor">
-            <a:schemeClr val="lt1"/>
-          </a:fontRef>
-        </p:style>
-        <p:txBody>
-          <a:bodyPr rtlCol="0" anchor="ctr"/>
-          <a:lstStyle/>
-          <a:p>
-            <a:pPr algn="ctr"/>
-          </a:p>
-        </p:txBody>
-      </p:sp>
-      <p:sp>
-        <p:nvSpPr>
-          <p:cNvPr id="11" name="TextBox 10"/>
-          <p:cNvSpPr txBox="1"/>
-          <p:nvPr/>
-        </p:nvSpPr>
-        <p:spPr>
-          <a:xfrm>
-            <a:off x="1097280" y="2990088"/>
-            <a:ext cx="1463040" cy="731520"/>
-          </a:xfrm>
-          <a:prstGeom prst="rect">
-            <a:avLst/>
-          </a:prstGeom>
-          <a:noFill/>
-        </p:spPr>
-        <p:txBody>
-          <a:bodyPr wrap="square">
-            <a:spAutoFit/>
-          </a:bodyPr>
-          <a:lstStyle/>
-          <a:p>
-            <a:pPr algn="l">
-              <a:lnSpc>
-                <a:spcPct val="125000"/>
-              </a:lnSpc>
-            </a:pPr>
-            <a:r>
-              <a:rPr sz="2000" b="1">
-                <a:solidFill>
-                  <a:srgbClr val="122A51"/>
-                </a:solidFill>
-                <a:latin typeface="微软雅黑"/>
-                <a:ea typeface="微软雅黑"/>
-                <a:cs typeface="微软雅黑"/>
-              </a:rPr>
-              <a:t>通知</a:t>
-            </a:r>
-          </a:p>
-        </p:txBody>
-      </p:sp>
-      <p:sp>
-        <p:nvSpPr>
-          <p:cNvPr id="12" name="TextBox 11"/>
-          <p:cNvSpPr txBox="1"/>
-          <p:nvPr/>
-        </p:nvSpPr>
-        <p:spPr>
-          <a:xfrm>
-            <a:off x="2606039" y="3026664"/>
-            <a:ext cx="3200400" cy="731520"/>
-          </a:xfrm>
-          <a:prstGeom prst="rect">
-            <a:avLst/>
-          </a:prstGeom>
-          <a:noFill/>
-        </p:spPr>
-        <p:txBody>
-          <a:bodyPr wrap="square">
-            <a:spAutoFit/>
-          </a:bodyPr>
-          <a:lstStyle/>
-          <a:p>
-            <a:pPr algn="l">
-              <a:lnSpc>
-                <a:spcPct val="125000"/>
-              </a:lnSpc>
-            </a:pPr>
-            <a:r>
-              <a:rPr sz="1600" b="0">
-                <a:solidFill>
-                  <a:srgbClr val="1B2233"/>
-                </a:solidFill>
-                <a:latin typeface="微软雅黑"/>
-                <a:ea typeface="微软雅黑"/>
-                <a:cs typeface="微软雅黑"/>
-              </a:rPr>
-              <a:t>普通 / 紧急 / 定时 / 已读回执</a:t>
-            </a:r>
-          </a:p>
-        </p:txBody>
-      </p:sp>
-      <p:sp>
-        <p:nvSpPr>
-          <p:cNvPr id="13" name="Rounded Rectangle 12"/>
-          <p:cNvSpPr/>
-          <p:nvPr/>
-        </p:nvSpPr>
-        <p:spPr>
-          <a:xfrm>
-            <a:off x="6355080" y="2880360"/>
-            <a:ext cx="5120640" cy="960120"/>
-          </a:xfrm>
-          <a:prstGeom prst="roundRect">
-            <a:avLst/>
-          </a:prstGeom>
-          <a:solidFill>
-            <a:srgbClr val="F2F5FB"/>
-          </a:solidFill>
-          <a:ln>
-            <a:noFill/>
-          </a:ln>
-          <a:effectLst/>
-        </p:spPr>
-        <p:style>
-          <a:lnRef idx="1">
-            <a:schemeClr val="accent1"/>
-          </a:lnRef>
-          <a:fillRef idx="3">
-            <a:schemeClr val="accent1"/>
-          </a:fillRef>
-          <a:effectRef idx="2">
-            <a:schemeClr val="accent1"/>
-          </a:effectRef>
-          <a:fontRef idx="minor">
-            <a:schemeClr val="lt1"/>
-          </a:fontRef>
-        </p:style>
-        <p:txBody>
-          <a:bodyPr rtlCol="0" anchor="ctr"/>
-          <a:lstStyle/>
-          <a:p>
-            <a:pPr algn="ctr"/>
-          </a:p>
-        </p:txBody>
-      </p:sp>
-      <p:sp>
-        <p:nvSpPr>
-          <p:cNvPr id="14" name="TextBox 13"/>
-          <p:cNvSpPr txBox="1"/>
-          <p:nvPr/>
-        </p:nvSpPr>
-        <p:spPr>
-          <a:xfrm>
-            <a:off x="6583680" y="2990088"/>
-            <a:ext cx="1463040" cy="731520"/>
-          </a:xfrm>
-          <a:prstGeom prst="rect">
-            <a:avLst/>
-          </a:prstGeom>
-          <a:noFill/>
-        </p:spPr>
-        <p:txBody>
-          <a:bodyPr wrap="square">
-            <a:spAutoFit/>
-          </a:bodyPr>
-          <a:lstStyle/>
-          <a:p>
-            <a:pPr algn="l">
-              <a:lnSpc>
-                <a:spcPct val="125000"/>
-              </a:lnSpc>
-            </a:pPr>
-            <a:r>
-              <a:rPr sz="2000" b="1">
-                <a:solidFill>
-                  <a:srgbClr val="122A51"/>
-                </a:solidFill>
-                <a:latin typeface="微软雅黑"/>
-                <a:ea typeface="微软雅黑"/>
-                <a:cs typeface="微软雅黑"/>
-              </a:rPr>
-              <a:t>政策问答</a:t>
-            </a:r>
-          </a:p>
-        </p:txBody>
-      </p:sp>
-      <p:sp>
-        <p:nvSpPr>
-          <p:cNvPr id="15" name="TextBox 14"/>
-          <p:cNvSpPr txBox="1"/>
-          <p:nvPr/>
-        </p:nvSpPr>
-        <p:spPr>
-          <a:xfrm>
-            <a:off x="8092440" y="3026664"/>
-            <a:ext cx="3200400" cy="731520"/>
-          </a:xfrm>
-          <a:prstGeom prst="rect">
-            <a:avLst/>
-          </a:prstGeom>
-          <a:noFill/>
-        </p:spPr>
-        <p:txBody>
-          <a:bodyPr wrap="square">
-            <a:spAutoFit/>
-          </a:bodyPr>
-          <a:lstStyle/>
-          <a:p>
-            <a:pPr algn="l">
-              <a:lnSpc>
-                <a:spcPct val="125000"/>
-              </a:lnSpc>
-            </a:pPr>
-            <a:r>
-              <a:rPr sz="1600" b="0">
-                <a:solidFill>
-                  <a:srgbClr val="1B2233"/>
-                </a:solidFill>
-                <a:latin typeface="微软雅黑"/>
-                <a:ea typeface="微软雅黑"/>
-                <a:cs typeface="微软雅黑"/>
-              </a:rPr>
-              <a:t>答案带出处；检索无结果就转人工</a:t>
-            </a:r>
-          </a:p>
-        </p:txBody>
-      </p:sp>
-      <p:sp>
-        <p:nvSpPr>
-          <p:cNvPr id="16" name="Rounded Rectangle 15"/>
-          <p:cNvSpPr/>
-          <p:nvPr/>
-        </p:nvSpPr>
-        <p:spPr>
-          <a:xfrm>
-            <a:off x="868680" y="4023360"/>
-            <a:ext cx="5120640" cy="960120"/>
-          </a:xfrm>
-          <a:prstGeom prst="roundRect">
-            <a:avLst/>
-          </a:prstGeom>
-          <a:solidFill>
-            <a:srgbClr val="F2F5FB"/>
-          </a:solidFill>
-          <a:ln>
-            <a:noFill/>
-          </a:ln>
-          <a:effectLst/>
-        </p:spPr>
-        <p:style>
-          <a:lnRef idx="1">
-            <a:schemeClr val="accent1"/>
-          </a:lnRef>
-          <a:fillRef idx="3">
-            <a:schemeClr val="accent1"/>
-          </a:fillRef>
-          <a:effectRef idx="2">
-            <a:schemeClr val="accent1"/>
-          </a:effectRef>
-          <a:fontRef idx="minor">
-            <a:schemeClr val="lt1"/>
-          </a:fontRef>
-        </p:style>
-        <p:txBody>
-          <a:bodyPr rtlCol="0" anchor="ctr"/>
-          <a:lstStyle/>
-          <a:p>
-            <a:pPr algn="ctr"/>
-          </a:p>
-        </p:txBody>
-      </p:sp>
-      <p:sp>
-        <p:nvSpPr>
-          <p:cNvPr id="17" name="TextBox 16"/>
-          <p:cNvSpPr txBox="1"/>
-          <p:nvPr/>
-        </p:nvSpPr>
-        <p:spPr>
-          <a:xfrm>
-            <a:off x="1097280" y="4133088"/>
-            <a:ext cx="1463040" cy="731520"/>
-          </a:xfrm>
-          <a:prstGeom prst="rect">
-            <a:avLst/>
-          </a:prstGeom>
-          <a:noFill/>
-        </p:spPr>
-        <p:txBody>
-          <a:bodyPr wrap="square">
-            <a:spAutoFit/>
-          </a:bodyPr>
-          <a:lstStyle/>
-          <a:p>
-            <a:pPr algn="l">
-              <a:lnSpc>
-                <a:spcPct val="125000"/>
-              </a:lnSpc>
-            </a:pPr>
-            <a:r>
-              <a:rPr sz="2000" b="1">
-                <a:solidFill>
-                  <a:srgbClr val="122A51"/>
-                </a:solidFill>
-                <a:latin typeface="微软雅黑"/>
-                <a:ea typeface="微软雅黑"/>
-                <a:cs typeface="微软雅黑"/>
-              </a:rPr>
-              <a:t>健康咨询</a:t>
-            </a:r>
-          </a:p>
-        </p:txBody>
-      </p:sp>
-      <p:sp>
-        <p:nvSpPr>
-          <p:cNvPr id="18" name="TextBox 17"/>
-          <p:cNvSpPr txBox="1"/>
-          <p:nvPr/>
-        </p:nvSpPr>
-        <p:spPr>
-          <a:xfrm>
-            <a:off x="2606039" y="4169664"/>
-            <a:ext cx="3200400" cy="731520"/>
-          </a:xfrm>
-          <a:prstGeom prst="rect">
-            <a:avLst/>
-          </a:prstGeom>
-          <a:noFill/>
-        </p:spPr>
-        <p:txBody>
-          <a:bodyPr wrap="square">
-            <a:spAutoFit/>
-          </a:bodyPr>
-          <a:lstStyle/>
-          <a:p>
-            <a:pPr algn="l">
-              <a:lnSpc>
-                <a:spcPct val="125000"/>
-              </a:lnSpc>
-            </a:pPr>
-            <a:r>
-              <a:rPr sz="1600" b="0">
-                <a:solidFill>
-                  <a:srgbClr val="1B2233"/>
-                </a:solidFill>
-                <a:latin typeface="微软雅黑"/>
-                <a:ea typeface="微软雅黑"/>
-                <a:cs typeface="微软雅黑"/>
-              </a:rPr>
-              <a:t>只给建议，紧急情况转人工（不做诊断）</a:t>
-            </a:r>
-          </a:p>
-        </p:txBody>
-      </p:sp>
-      <p:sp>
-        <p:nvSpPr>
-          <p:cNvPr id="19" name="Rounded Rectangle 18"/>
-          <p:cNvSpPr/>
-          <p:nvPr/>
-        </p:nvSpPr>
-        <p:spPr>
-          <a:xfrm>
-            <a:off x="6355080" y="4023360"/>
-            <a:ext cx="5120640" cy="960120"/>
-          </a:xfrm>
-          <a:prstGeom prst="roundRect">
-            <a:avLst/>
-          </a:prstGeom>
-          <a:solidFill>
-            <a:srgbClr val="F2F5FB"/>
-          </a:solidFill>
-          <a:ln>
-            <a:noFill/>
-          </a:ln>
-          <a:effectLst/>
-        </p:spPr>
-        <p:style>
-          <a:lnRef idx="1">
-            <a:schemeClr val="accent1"/>
-          </a:lnRef>
-          <a:fillRef idx="3">
-            <a:schemeClr val="accent1"/>
-          </a:fillRef>
-          <a:effectRef idx="2">
-            <a:schemeClr val="accent1"/>
-          </a:effectRef>
-          <a:fontRef idx="minor">
-            <a:schemeClr val="lt1"/>
-          </a:fontRef>
-        </p:style>
-        <p:txBody>
-          <a:bodyPr rtlCol="0" anchor="ctr"/>
-          <a:lstStyle/>
-          <a:p>
-            <a:pPr algn="ctr"/>
-          </a:p>
-        </p:txBody>
-      </p:sp>
-      <p:sp>
-        <p:nvSpPr>
-          <p:cNvPr id="20" name="TextBox 19"/>
-          <p:cNvSpPr txBox="1"/>
-          <p:nvPr/>
-        </p:nvSpPr>
-        <p:spPr>
-          <a:xfrm>
-            <a:off x="6583680" y="4133088"/>
-            <a:ext cx="1463040" cy="731520"/>
-          </a:xfrm>
-          <a:prstGeom prst="rect">
-            <a:avLst/>
-          </a:prstGeom>
-          <a:noFill/>
-        </p:spPr>
-        <p:txBody>
-          <a:bodyPr wrap="square">
-            <a:spAutoFit/>
-          </a:bodyPr>
-          <a:lstStyle/>
-          <a:p>
-            <a:pPr algn="l">
-              <a:lnSpc>
-                <a:spcPct val="125000"/>
-              </a:lnSpc>
-            </a:pPr>
-            <a:r>
-              <a:rPr sz="2000" b="1">
-                <a:solidFill>
-                  <a:srgbClr val="122A51"/>
-                </a:solidFill>
-                <a:latin typeface="微软雅黑"/>
-                <a:ea typeface="微软雅黑"/>
-                <a:cs typeface="微软雅黑"/>
-              </a:rPr>
-              <a:t>天气联动</a:t>
-            </a:r>
-          </a:p>
-        </p:txBody>
-      </p:sp>
-      <p:sp>
-        <p:nvSpPr>
-          <p:cNvPr id="21" name="TextBox 20"/>
-          <p:cNvSpPr txBox="1"/>
-          <p:nvPr/>
-        </p:nvSpPr>
-        <p:spPr>
-          <a:xfrm>
-            <a:off x="8092440" y="4169664"/>
-            <a:ext cx="3200400" cy="731520"/>
-          </a:xfrm>
-          <a:prstGeom prst="rect">
-            <a:avLst/>
-          </a:prstGeom>
-          <a:noFill/>
-        </p:spPr>
-        <p:txBody>
-          <a:bodyPr wrap="square">
-            <a:spAutoFit/>
-          </a:bodyPr>
-          <a:lstStyle/>
-          <a:p>
-            <a:pPr algn="l">
-              <a:lnSpc>
-                <a:spcPct val="125000"/>
-              </a:lnSpc>
-            </a:pPr>
-            <a:r>
-              <a:rPr sz="1600" b="0">
-                <a:solidFill>
-                  <a:srgbClr val="1B2233"/>
-                </a:solidFill>
-                <a:latin typeface="微软雅黑"/>
-                <a:ea typeface="微软雅黑"/>
-                <a:cs typeface="微软雅黑"/>
-              </a:rPr>
-              <a:t>极端天气 → 健康防护建议 → 自动发通知</a:t>
-            </a:r>
-          </a:p>
-        </p:txBody>
-      </p:sp>
-      <p:sp>
-        <p:nvSpPr>
-          <p:cNvPr id="22" name="Rounded Rectangle 21"/>
-          <p:cNvSpPr/>
-          <p:nvPr/>
-        </p:nvSpPr>
-        <p:spPr>
-          <a:xfrm>
-            <a:off x="868680" y="5166360"/>
-            <a:ext cx="5120640" cy="960120"/>
-          </a:xfrm>
-          <a:prstGeom prst="roundRect">
-            <a:avLst/>
-          </a:prstGeom>
-          <a:solidFill>
-            <a:srgbClr val="F2F5FB"/>
-          </a:solidFill>
-          <a:ln>
-            <a:noFill/>
-          </a:ln>
-          <a:effectLst/>
-        </p:spPr>
-        <p:style>
-          <a:lnRef idx="1">
-            <a:schemeClr val="accent1"/>
-          </a:lnRef>
-          <a:fillRef idx="3">
-            <a:schemeClr val="accent1"/>
-          </a:fillRef>
-          <a:effectRef idx="2">
-            <a:schemeClr val="accent1"/>
-          </a:effectRef>
-          <a:fontRef idx="minor">
-            <a:schemeClr val="lt1"/>
-          </a:fontRef>
-        </p:style>
-        <p:txBody>
-          <a:bodyPr rtlCol="0" anchor="ctr"/>
-          <a:lstStyle/>
-          <a:p>
-            <a:pPr algn="ctr"/>
-          </a:p>
-        </p:txBody>
-      </p:sp>
-      <p:sp>
-        <p:nvSpPr>
-          <p:cNvPr id="23" name="TextBox 22"/>
-          <p:cNvSpPr txBox="1"/>
-          <p:nvPr/>
-        </p:nvSpPr>
-        <p:spPr>
-          <a:xfrm>
-            <a:off x="1097280" y="5276088"/>
-            <a:ext cx="1463040" cy="731520"/>
-          </a:xfrm>
-          <a:prstGeom prst="rect">
-            <a:avLst/>
-          </a:prstGeom>
-          <a:noFill/>
-        </p:spPr>
-        <p:txBody>
-          <a:bodyPr wrap="square">
-            <a:spAutoFit/>
-          </a:bodyPr>
-          <a:lstStyle/>
-          <a:p>
-            <a:pPr algn="l">
-              <a:lnSpc>
-                <a:spcPct val="125000"/>
-              </a:lnSpc>
-            </a:pPr>
-            <a:r>
-              <a:rPr sz="2000" b="1">
-                <a:solidFill>
-                  <a:srgbClr val="122A51"/>
-                </a:solidFill>
-                <a:latin typeface="微软雅黑"/>
-                <a:ea typeface="微软雅黑"/>
-                <a:cs typeface="微软雅黑"/>
-              </a:rPr>
-              <a:t>网格员工作台</a:t>
-            </a:r>
-          </a:p>
-        </p:txBody>
-      </p:sp>
-      <p:sp>
-        <p:nvSpPr>
-          <p:cNvPr id="24" name="TextBox 23"/>
-          <p:cNvSpPr txBox="1"/>
-          <p:nvPr/>
-        </p:nvSpPr>
-        <p:spPr>
-          <a:xfrm>
-            <a:off x="2606039" y="5312664"/>
-            <a:ext cx="3200400" cy="731520"/>
-          </a:xfrm>
-          <a:prstGeom prst="rect">
-            <a:avLst/>
-          </a:prstGeom>
-          <a:noFill/>
-        </p:spPr>
-        <p:txBody>
-          <a:bodyPr wrap="square">
-            <a:spAutoFit/>
-          </a:bodyPr>
-          <a:lstStyle/>
-          <a:p>
-            <a:pPr algn="l">
-              <a:lnSpc>
-                <a:spcPct val="125000"/>
-              </a:lnSpc>
-            </a:pPr>
-            <a:r>
-              <a:rPr sz="1600" b="0">
-                <a:solidFill>
-                  <a:srgbClr val="1B2233"/>
-                </a:solidFill>
-                <a:latin typeface="微软雅黑"/>
-                <a:ea typeface="微软雅黑"/>
-                <a:cs typeface="微软雅黑"/>
-              </a:rPr>
-              <a:t>AI 助手、待办、统计导出</a:t>
-            </a:r>
-          </a:p>
-        </p:txBody>
-      </p:sp>
-      <p:sp>
-        <p:nvSpPr>
-          <p:cNvPr id="25" name="Rounded Rectangle 24"/>
-          <p:cNvSpPr/>
-          <p:nvPr/>
-        </p:nvSpPr>
-        <p:spPr>
-          <a:xfrm>
-            <a:off x="6355080" y="5166360"/>
-            <a:ext cx="5120640" cy="960120"/>
-          </a:xfrm>
-          <a:prstGeom prst="roundRect">
-            <a:avLst/>
-          </a:prstGeom>
-          <a:solidFill>
-            <a:srgbClr val="F2F5FB"/>
-          </a:solidFill>
-          <a:ln>
-            <a:noFill/>
-          </a:ln>
-          <a:effectLst/>
-        </p:spPr>
-        <p:style>
-          <a:lnRef idx="1">
-            <a:schemeClr val="accent1"/>
-          </a:lnRef>
-          <a:fillRef idx="3">
-            <a:schemeClr val="accent1"/>
-          </a:fillRef>
-          <a:effectRef idx="2">
-            <a:schemeClr val="accent1"/>
-          </a:effectRef>
-          <a:fontRef idx="minor">
-            <a:schemeClr val="lt1"/>
-          </a:fontRef>
-        </p:style>
-        <p:txBody>
-          <a:bodyPr rtlCol="0" anchor="ctr"/>
-          <a:lstStyle/>
-          <a:p>
-            <a:pPr algn="ctr"/>
-          </a:p>
-        </p:txBody>
-      </p:sp>
-      <p:sp>
-        <p:nvSpPr>
-          <p:cNvPr id="26" name="TextBox 25"/>
-          <p:cNvSpPr txBox="1"/>
-          <p:nvPr/>
-        </p:nvSpPr>
-        <p:spPr>
-          <a:xfrm>
-            <a:off x="6583680" y="5276088"/>
-            <a:ext cx="1463040" cy="731520"/>
-          </a:xfrm>
-          <a:prstGeom prst="rect">
-            <a:avLst/>
-          </a:prstGeom>
-          <a:noFill/>
-        </p:spPr>
-        <p:txBody>
-          <a:bodyPr wrap="square">
-            <a:spAutoFit/>
-          </a:bodyPr>
-          <a:lstStyle/>
-          <a:p>
-            <a:pPr algn="l">
-              <a:lnSpc>
-                <a:spcPct val="125000"/>
-              </a:lnSpc>
-            </a:pPr>
-            <a:r>
-              <a:rPr sz="2000" b="1">
-                <a:solidFill>
-                  <a:srgbClr val="122A51"/>
-                </a:solidFill>
-                <a:latin typeface="微软雅黑"/>
-                <a:ea typeface="微软雅黑"/>
-                <a:cs typeface="微软雅黑"/>
-              </a:rPr>
-              <a:t>转人工</a:t>
-            </a:r>
-          </a:p>
-        </p:txBody>
-      </p:sp>
-      <p:sp>
-        <p:nvSpPr>
-          <p:cNvPr id="27" name="TextBox 26"/>
-          <p:cNvSpPr txBox="1"/>
-          <p:nvPr/>
-        </p:nvSpPr>
-        <p:spPr>
-          <a:xfrm>
-            <a:off x="8092440" y="5312664"/>
-            <a:ext cx="3200400" cy="731520"/>
-          </a:xfrm>
-          <a:prstGeom prst="rect">
-            <a:avLst/>
-          </a:prstGeom>
-          <a:noFill/>
-        </p:spPr>
-        <p:txBody>
-          <a:bodyPr wrap="square">
-            <a:spAutoFit/>
-          </a:bodyPr>
-          <a:lstStyle/>
-          <a:p>
-            <a:pPr algn="l">
-              <a:lnSpc>
-                <a:spcPct val="125000"/>
-              </a:lnSpc>
-            </a:pPr>
-            <a:r>
-              <a:rPr sz="1600" b="0">
-                <a:solidFill>
-                  <a:srgbClr val="1B2233"/>
-                </a:solidFill>
-                <a:latin typeface="微软雅黑"/>
-                <a:ea typeface="微软雅黑"/>
-                <a:cs typeface="微软雅黑"/>
-              </a:rPr>
-              <a:t>带「处理包」：用户信息 + 执行链 + 待确认事项</a:t>
-            </a:r>
-          </a:p>
-        </p:txBody>
-      </p:sp>
-      <p:sp>
-        <p:nvSpPr>
-          <p:cNvPr id="28" name="Rectangle 27"/>
+              <a:rPr sz="1900" b="1">
+                <a:solidFill>
+                  <a:srgbClr val="FF8C42"/>
+                </a:solidFill>
+                <a:latin typeface="微软雅黑"/>
+                <a:ea typeface="微软雅黑"/>
+                <a:cs typeface="微软雅黑"/>
+              </a:rPr>
+              <a:t>退回必须写审核意见；求助要确认响应、再结束。</a:t>
+            </a:r>
+          </a:p>
+        </p:txBody>
+      </p:sp>
+      <p:sp>
+        <p:nvSpPr>
+          <p:cNvPr id="9" name="Rectangle 8"/>
           <p:cNvSpPr/>
           <p:nvPr/>
         </p:nvSpPr>
@@ -14517,7 +15576,7 @@
       </p:sp>
       <p:sp>
         <p:nvSpPr>
-          <p:cNvPr id="29" name="TextBox 28"/>
+          <p:cNvPr id="10" name="TextBox 9"/>
           <p:cNvSpPr txBox="1"/>
           <p:nvPr/>
         </p:nvSpPr>
@@ -14558,7 +15617,7 @@
       </p:sp>
       <p:sp>
         <p:nvSpPr>
-          <p:cNvPr id="30" name="TextBox 29"/>
+          <p:cNvPr id="11" name="TextBox 10"/>
           <p:cNvSpPr txBox="1"/>
           <p:nvPr/>
         </p:nvSpPr>
@@ -14592,7 +15651,7 @@
                 <a:ea typeface="微软雅黑"/>
                 <a:cs typeface="微软雅黑"/>
               </a:rPr>
-              <a:t>9 / 11</a:t>
+              <a:t>9 / 14</a:t>
             </a:r>
           </a:p>
         </p:txBody>

--- a/docs/competition/9月22日路演-社区先知.pptx
+++ b/docs/competition/9月22日路演-社区先知.pptx
@@ -799,7 +799,7 @@
           <a:lstStyle/>
           <a:p>
             <a:r>
-              <a:t>功能全景：报修全状态机、提案全生命周期、通知四类、政策问答带出处、健康咨询不诊断并转人工、天气联动、网格员工作台的 AI 助手与导出、以及转人工的处理包（用户信息 + 执行链 + 待确认事项）。</a:t>
+              <a:t>功能按端列一遍（一列一段，手指往下扫）：居民端 14 页——报修拍照提交、能存草稿；工单详情有时间线，能撤回、能重开；邻里议事能提案、投票、公示期匿名议论；政策问答给依据和适用地区；还有健康防护、三天天气、通知、消息中心、我的、隐私政策。网格员端 9 页——工作台有待办和红黑榜下钻；工单管理能审核、派单、协商、转出，能批量操作和导出；提案管理能决定执行、转执行、延票；还有知识库维护、天气检查任务、健康内容审核、老年关怀的用药审核与 SOS 响应。老人端 8 页——语音小助手、语音报修、用药提醒、听通知、紧急联系人、报修进度、语音政策问答。最后一行跨端：转人工处理包、双层防线、规则为主，另有治理大屏与稳定性演示页。</a:t>
             </a:r>
           </a:p>
         </p:txBody>
@@ -6022,7 +6022,7 @@
                 <a:ea typeface="微软雅黑"/>
                 <a:cs typeface="微软雅黑"/>
               </a:rPr>
-              <a:t>现在能用的功能</a:t>
+              <a:t>现在能用的功能（分端）</a:t>
             </a:r>
           </a:p>
         </p:txBody>
@@ -6035,8 +6035,800 @@
         </p:nvSpPr>
         <p:spPr>
           <a:xfrm>
-            <a:off x="868680" y="1737360"/>
-            <a:ext cx="5120640" cy="960120"/>
+            <a:off x="640080" y="1481328"/>
+            <a:ext cx="3566160" cy="475488"/>
+          </a:xfrm>
+          <a:prstGeom prst="roundRect">
+            <a:avLst/>
+          </a:prstGeom>
+          <a:solidFill>
+            <a:srgbClr val="122A51"/>
+          </a:solidFill>
+          <a:ln>
+            <a:noFill/>
+          </a:ln>
+          <a:effectLst/>
+        </p:spPr>
+        <p:style>
+          <a:lnRef idx="1">
+            <a:schemeClr val="accent1"/>
+          </a:lnRef>
+          <a:fillRef idx="3">
+            <a:schemeClr val="accent1"/>
+          </a:fillRef>
+          <a:effectRef idx="2">
+            <a:schemeClr val="accent1"/>
+          </a:effectRef>
+          <a:fontRef idx="minor">
+            <a:schemeClr val="lt1"/>
+          </a:fontRef>
+        </p:style>
+        <p:txBody>
+          <a:bodyPr rtlCol="0" anchor="ctr"/>
+          <a:lstStyle/>
+          <a:p>
+            <a:pPr algn="ctr"/>
+          </a:p>
+        </p:txBody>
+      </p:sp>
+      <p:sp>
+        <p:nvSpPr>
+          <p:cNvPr id="5" name="TextBox 4"/>
+          <p:cNvSpPr txBox="1"/>
+          <p:nvPr/>
+        </p:nvSpPr>
+        <p:spPr>
+          <a:xfrm>
+            <a:off x="640080" y="1563624"/>
+            <a:ext cx="3566160" cy="365760"/>
+          </a:xfrm>
+          <a:prstGeom prst="rect">
+            <a:avLst/>
+          </a:prstGeom>
+          <a:noFill/>
+        </p:spPr>
+        <p:txBody>
+          <a:bodyPr wrap="square">
+            <a:spAutoFit/>
+          </a:bodyPr>
+          <a:lstStyle/>
+          <a:p>
+            <a:pPr algn="ctr">
+              <a:lnSpc>
+                <a:spcPct val="125000"/>
+              </a:lnSpc>
+            </a:pPr>
+            <a:r>
+              <a:rPr sz="1900" b="1">
+                <a:solidFill>
+                  <a:srgbClr val="FFFFFF"/>
+                </a:solidFill>
+                <a:latin typeface="微软雅黑"/>
+                <a:ea typeface="微软雅黑"/>
+                <a:cs typeface="微软雅黑"/>
+              </a:rPr>
+              <a:t>居民端 · 14 页</a:t>
+            </a:r>
+          </a:p>
+        </p:txBody>
+      </p:sp>
+      <p:sp>
+        <p:nvSpPr>
+          <p:cNvPr id="6" name="TextBox 5"/>
+          <p:cNvSpPr txBox="1"/>
+          <p:nvPr/>
+        </p:nvSpPr>
+        <p:spPr>
+          <a:xfrm>
+            <a:off x="731519" y="2084831"/>
+            <a:ext cx="3429000" cy="3291840"/>
+          </a:xfrm>
+          <a:prstGeom prst="rect">
+            <a:avLst/>
+          </a:prstGeom>
+          <a:noFill/>
+        </p:spPr>
+        <p:txBody>
+          <a:bodyPr wrap="square">
+            <a:spAutoFit/>
+          </a:bodyPr>
+          <a:lstStyle/>
+          <a:p>
+            <a:pPr algn="l">
+              <a:lnSpc>
+                <a:spcPct val="102000"/>
+              </a:lnSpc>
+            </a:pPr>
+            <a:r>
+              <a:rPr sz="1450" b="0">
+                <a:solidFill>
+                  <a:srgbClr val="1B2233"/>
+                </a:solidFill>
+                <a:latin typeface="微软雅黑"/>
+                <a:ea typeface="微软雅黑"/>
+                <a:cs typeface="微软雅黑"/>
+              </a:rPr>
+              <a:t>首页：天气卡 + 社区小助手</a:t>
+            </a:r>
+          </a:p>
+          <a:p>
+            <a:pPr algn="l">
+              <a:lnSpc>
+                <a:spcPct val="102000"/>
+              </a:lnSpc>
+            </a:pPr>
+            <a:r>
+              <a:rPr sz="1450" b="0">
+                <a:solidFill>
+                  <a:srgbClr val="1B2233"/>
+                </a:solidFill>
+                <a:latin typeface="微软雅黑"/>
+                <a:ea typeface="微软雅黑"/>
+                <a:cs typeface="微软雅黑"/>
+              </a:rPr>
+              <a:t>报修：拍照提交 + 草稿恢复</a:t>
+            </a:r>
+          </a:p>
+          <a:p>
+            <a:pPr algn="l">
+              <a:lnSpc>
+                <a:spcPct val="102000"/>
+              </a:lnSpc>
+            </a:pPr>
+            <a:r>
+              <a:rPr sz="1450" b="0">
+                <a:solidFill>
+                  <a:srgbClr val="1B2233"/>
+                </a:solidFill>
+                <a:latin typeface="微软雅黑"/>
+                <a:ea typeface="微软雅黑"/>
+                <a:cs typeface="微软雅黑"/>
+              </a:rPr>
+              <a:t>工单详情：时间线 + 撤回/重开</a:t>
+            </a:r>
+          </a:p>
+          <a:p>
+            <a:pPr algn="l">
+              <a:lnSpc>
+                <a:spcPct val="102000"/>
+              </a:lnSpc>
+            </a:pPr>
+            <a:r>
+              <a:rPr sz="1450" b="0">
+                <a:solidFill>
+                  <a:srgbClr val="1B2233"/>
+                </a:solidFill>
+                <a:latin typeface="微软雅黑"/>
+                <a:ea typeface="微软雅黑"/>
+                <a:cs typeface="微软雅黑"/>
+              </a:rPr>
+              <a:t>邻里议事：提案 + 投票 + 匿名议论</a:t>
+            </a:r>
+          </a:p>
+          <a:p>
+            <a:pPr algn="l">
+              <a:lnSpc>
+                <a:spcPct val="102000"/>
+              </a:lnSpc>
+            </a:pPr>
+            <a:r>
+              <a:rPr sz="1450" b="0">
+                <a:solidFill>
+                  <a:srgbClr val="1B2233"/>
+                </a:solidFill>
+                <a:latin typeface="微软雅黑"/>
+                <a:ea typeface="微软雅黑"/>
+                <a:cs typeface="微软雅黑"/>
+              </a:rPr>
+              <a:t>通知：紧急置顶 + 已读回执</a:t>
+            </a:r>
+          </a:p>
+          <a:p>
+            <a:pPr algn="l">
+              <a:lnSpc>
+                <a:spcPct val="102000"/>
+              </a:lnSpc>
+            </a:pPr>
+            <a:r>
+              <a:rPr sz="1450" b="0">
+                <a:solidFill>
+                  <a:srgbClr val="1B2233"/>
+                </a:solidFill>
+                <a:latin typeface="微软雅黑"/>
+                <a:ea typeface="微软雅黑"/>
+                <a:cs typeface="微软雅黑"/>
+              </a:rPr>
+              <a:t>政策问答：依据 + 属地 + 提问历史</a:t>
+            </a:r>
+          </a:p>
+          <a:p>
+            <a:pPr algn="l">
+              <a:lnSpc>
+                <a:spcPct val="102000"/>
+              </a:lnSpc>
+            </a:pPr>
+            <a:r>
+              <a:rPr sz="1450" b="0">
+                <a:solidFill>
+                  <a:srgbClr val="1B2233"/>
+                </a:solidFill>
+                <a:latin typeface="微软雅黑"/>
+                <a:ea typeface="微软雅黑"/>
+                <a:cs typeface="微软雅黑"/>
+              </a:rPr>
+              <a:t>健康防护：咨询 + 紧急转人工</a:t>
+            </a:r>
+          </a:p>
+          <a:p>
+            <a:pPr algn="l">
+              <a:lnSpc>
+                <a:spcPct val="102000"/>
+              </a:lnSpc>
+            </a:pPr>
+            <a:r>
+              <a:rPr sz="1450" b="0">
+                <a:solidFill>
+                  <a:srgbClr val="1B2233"/>
+                </a:solidFill>
+                <a:latin typeface="微软雅黑"/>
+                <a:ea typeface="微软雅黑"/>
+                <a:cs typeface="微软雅黑"/>
+              </a:rPr>
+              <a:t>天气：实时 + 3 天预报 + 预警</a:t>
+            </a:r>
+          </a:p>
+          <a:p>
+            <a:pPr algn="l">
+              <a:lnSpc>
+                <a:spcPct val="102000"/>
+              </a:lnSpc>
+            </a:pPr>
+            <a:r>
+              <a:rPr sz="1450" b="0">
+                <a:solidFill>
+                  <a:srgbClr val="1B2233"/>
+                </a:solidFill>
+                <a:latin typeface="微软雅黑"/>
+                <a:ea typeface="微软雅黑"/>
+                <a:cs typeface="微软雅黑"/>
+              </a:rPr>
+              <a:t>消息中心 / 我的 / 隐私政策</a:t>
+            </a:r>
+          </a:p>
+        </p:txBody>
+      </p:sp>
+      <p:sp>
+        <p:nvSpPr>
+          <p:cNvPr id="7" name="Rounded Rectangle 6"/>
+          <p:cNvSpPr/>
+          <p:nvPr/>
+        </p:nvSpPr>
+        <p:spPr>
+          <a:xfrm>
+            <a:off x="4434840" y="1481328"/>
+            <a:ext cx="3566160" cy="475488"/>
+          </a:xfrm>
+          <a:prstGeom prst="roundRect">
+            <a:avLst/>
+          </a:prstGeom>
+          <a:solidFill>
+            <a:srgbClr val="122A51"/>
+          </a:solidFill>
+          <a:ln>
+            <a:noFill/>
+          </a:ln>
+          <a:effectLst/>
+        </p:spPr>
+        <p:style>
+          <a:lnRef idx="1">
+            <a:schemeClr val="accent1"/>
+          </a:lnRef>
+          <a:fillRef idx="3">
+            <a:schemeClr val="accent1"/>
+          </a:fillRef>
+          <a:effectRef idx="2">
+            <a:schemeClr val="accent1"/>
+          </a:effectRef>
+          <a:fontRef idx="minor">
+            <a:schemeClr val="lt1"/>
+          </a:fontRef>
+        </p:style>
+        <p:txBody>
+          <a:bodyPr rtlCol="0" anchor="ctr"/>
+          <a:lstStyle/>
+          <a:p>
+            <a:pPr algn="ctr"/>
+          </a:p>
+        </p:txBody>
+      </p:sp>
+      <p:sp>
+        <p:nvSpPr>
+          <p:cNvPr id="8" name="TextBox 7"/>
+          <p:cNvSpPr txBox="1"/>
+          <p:nvPr/>
+        </p:nvSpPr>
+        <p:spPr>
+          <a:xfrm>
+            <a:off x="4434840" y="1563624"/>
+            <a:ext cx="3566160" cy="365760"/>
+          </a:xfrm>
+          <a:prstGeom prst="rect">
+            <a:avLst/>
+          </a:prstGeom>
+          <a:noFill/>
+        </p:spPr>
+        <p:txBody>
+          <a:bodyPr wrap="square">
+            <a:spAutoFit/>
+          </a:bodyPr>
+          <a:lstStyle/>
+          <a:p>
+            <a:pPr algn="ctr">
+              <a:lnSpc>
+                <a:spcPct val="125000"/>
+              </a:lnSpc>
+            </a:pPr>
+            <a:r>
+              <a:rPr sz="1900" b="1">
+                <a:solidFill>
+                  <a:srgbClr val="FFFFFF"/>
+                </a:solidFill>
+                <a:latin typeface="微软雅黑"/>
+                <a:ea typeface="微软雅黑"/>
+                <a:cs typeface="微软雅黑"/>
+              </a:rPr>
+              <a:t>网格员端 · 9 页</a:t>
+            </a:r>
+          </a:p>
+        </p:txBody>
+      </p:sp>
+      <p:sp>
+        <p:nvSpPr>
+          <p:cNvPr id="9" name="TextBox 8"/>
+          <p:cNvSpPr txBox="1"/>
+          <p:nvPr/>
+        </p:nvSpPr>
+        <p:spPr>
+          <a:xfrm>
+            <a:off x="4526280" y="2084831"/>
+            <a:ext cx="3429000" cy="3291840"/>
+          </a:xfrm>
+          <a:prstGeom prst="rect">
+            <a:avLst/>
+          </a:prstGeom>
+          <a:noFill/>
+        </p:spPr>
+        <p:txBody>
+          <a:bodyPr wrap="square">
+            <a:spAutoFit/>
+          </a:bodyPr>
+          <a:lstStyle/>
+          <a:p>
+            <a:pPr algn="l">
+              <a:lnSpc>
+                <a:spcPct val="102000"/>
+              </a:lnSpc>
+            </a:pPr>
+            <a:r>
+              <a:rPr sz="1450" b="0">
+                <a:solidFill>
+                  <a:srgbClr val="1B2233"/>
+                </a:solidFill>
+                <a:latin typeface="微软雅黑"/>
+                <a:ea typeface="微软雅黑"/>
+                <a:cs typeface="微软雅黑"/>
+              </a:rPr>
+              <a:t>工作台：待办 + 红黑榜下钻</a:t>
+            </a:r>
+          </a:p>
+          <a:p>
+            <a:pPr algn="l">
+              <a:lnSpc>
+                <a:spcPct val="102000"/>
+              </a:lnSpc>
+            </a:pPr>
+            <a:r>
+              <a:rPr sz="1450" b="0">
+                <a:solidFill>
+                  <a:srgbClr val="1B2233"/>
+                </a:solidFill>
+                <a:latin typeface="微软雅黑"/>
+                <a:ea typeface="微软雅黑"/>
+                <a:cs typeface="微软雅黑"/>
+              </a:rPr>
+              <a:t>工单管理：审核/派单/协商/转出</a:t>
+            </a:r>
+          </a:p>
+          <a:p>
+            <a:pPr algn="l">
+              <a:lnSpc>
+                <a:spcPct val="102000"/>
+              </a:lnSpc>
+            </a:pPr>
+            <a:r>
+              <a:rPr sz="1450" b="0">
+                <a:solidFill>
+                  <a:srgbClr val="1B2233"/>
+                </a:solidFill>
+                <a:latin typeface="微软雅黑"/>
+                <a:ea typeface="微软雅黑"/>
+                <a:cs typeface="微软雅黑"/>
+              </a:rPr>
+              <a:t>　+ 批量操作 + 时限 + 导出</a:t>
+            </a:r>
+          </a:p>
+          <a:p>
+            <a:pPr algn="l">
+              <a:lnSpc>
+                <a:spcPct val="102000"/>
+              </a:lnSpc>
+            </a:pPr>
+            <a:r>
+              <a:rPr sz="1450" b="0">
+                <a:solidFill>
+                  <a:srgbClr val="1B2233"/>
+                </a:solidFill>
+                <a:latin typeface="微软雅黑"/>
+                <a:ea typeface="微软雅黑"/>
+                <a:cs typeface="微软雅黑"/>
+              </a:rPr>
+              <a:t>提案管理：决定执行 + 转执行 + 延票</a:t>
+            </a:r>
+          </a:p>
+          <a:p>
+            <a:pPr algn="l">
+              <a:lnSpc>
+                <a:spcPct val="102000"/>
+              </a:lnSpc>
+            </a:pPr>
+            <a:r>
+              <a:rPr sz="1450" b="0">
+                <a:solidFill>
+                  <a:srgbClr val="1B2233"/>
+                </a:solidFill>
+                <a:latin typeface="微软雅黑"/>
+                <a:ea typeface="微软雅黑"/>
+                <a:cs typeface="微软雅黑"/>
+              </a:rPr>
+              <a:t>通知管理：紧急/定时 + 已读统计</a:t>
+            </a:r>
+          </a:p>
+          <a:p>
+            <a:pPr algn="l">
+              <a:lnSpc>
+                <a:spcPct val="102000"/>
+              </a:lnSpc>
+            </a:pPr>
+            <a:r>
+              <a:rPr sz="1450" b="0">
+                <a:solidFill>
+                  <a:srgbClr val="1B2233"/>
+                </a:solidFill>
+                <a:latin typeface="微软雅黑"/>
+                <a:ea typeface="微软雅黑"/>
+                <a:cs typeface="微软雅黑"/>
+              </a:rPr>
+              <a:t>政策问答管理：知识库维护 + 阈值</a:t>
+            </a:r>
+          </a:p>
+          <a:p>
+            <a:pPr algn="l">
+              <a:lnSpc>
+                <a:spcPct val="102000"/>
+              </a:lnSpc>
+            </a:pPr>
+            <a:r>
+              <a:rPr sz="1450" b="0">
+                <a:solidFill>
+                  <a:srgbClr val="1B2233"/>
+                </a:solidFill>
+                <a:latin typeface="微软雅黑"/>
+                <a:ea typeface="微软雅黑"/>
+                <a:cs typeface="微软雅黑"/>
+              </a:rPr>
+              <a:t>天气管理：检查任务 + 异常日志</a:t>
+            </a:r>
+          </a:p>
+          <a:p>
+            <a:pPr algn="l">
+              <a:lnSpc>
+                <a:spcPct val="102000"/>
+              </a:lnSpc>
+            </a:pPr>
+            <a:r>
+              <a:rPr sz="1450" b="0">
+                <a:solidFill>
+                  <a:srgbClr val="1B2233"/>
+                </a:solidFill>
+                <a:latin typeface="微软雅黑"/>
+                <a:ea typeface="微软雅黑"/>
+                <a:cs typeface="微软雅黑"/>
+              </a:rPr>
+              <a:t>健康管理：咨询处理 + 内容审核</a:t>
+            </a:r>
+          </a:p>
+          <a:p>
+            <a:pPr algn="l">
+              <a:lnSpc>
+                <a:spcPct val="102000"/>
+              </a:lnSpc>
+            </a:pPr>
+            <a:r>
+              <a:rPr sz="1450" b="0">
+                <a:solidFill>
+                  <a:srgbClr val="1B2233"/>
+                </a:solidFill>
+                <a:latin typeface="微软雅黑"/>
+                <a:ea typeface="微软雅黑"/>
+                <a:cs typeface="微软雅黑"/>
+              </a:rPr>
+              <a:t>老年关怀：用药/联系人审核 + SOS</a:t>
+            </a:r>
+          </a:p>
+        </p:txBody>
+      </p:sp>
+      <p:sp>
+        <p:nvSpPr>
+          <p:cNvPr id="10" name="Rounded Rectangle 9"/>
+          <p:cNvSpPr/>
+          <p:nvPr/>
+        </p:nvSpPr>
+        <p:spPr>
+          <a:xfrm>
+            <a:off x="8229600" y="1481328"/>
+            <a:ext cx="3566160" cy="475488"/>
+          </a:xfrm>
+          <a:prstGeom prst="roundRect">
+            <a:avLst/>
+          </a:prstGeom>
+          <a:solidFill>
+            <a:srgbClr val="122A51"/>
+          </a:solidFill>
+          <a:ln>
+            <a:noFill/>
+          </a:ln>
+          <a:effectLst/>
+        </p:spPr>
+        <p:style>
+          <a:lnRef idx="1">
+            <a:schemeClr val="accent1"/>
+          </a:lnRef>
+          <a:fillRef idx="3">
+            <a:schemeClr val="accent1"/>
+          </a:fillRef>
+          <a:effectRef idx="2">
+            <a:schemeClr val="accent1"/>
+          </a:effectRef>
+          <a:fontRef idx="minor">
+            <a:schemeClr val="lt1"/>
+          </a:fontRef>
+        </p:style>
+        <p:txBody>
+          <a:bodyPr rtlCol="0" anchor="ctr"/>
+          <a:lstStyle/>
+          <a:p>
+            <a:pPr algn="ctr"/>
+          </a:p>
+        </p:txBody>
+      </p:sp>
+      <p:sp>
+        <p:nvSpPr>
+          <p:cNvPr id="11" name="TextBox 10"/>
+          <p:cNvSpPr txBox="1"/>
+          <p:nvPr/>
+        </p:nvSpPr>
+        <p:spPr>
+          <a:xfrm>
+            <a:off x="8229600" y="1563624"/>
+            <a:ext cx="3566160" cy="365760"/>
+          </a:xfrm>
+          <a:prstGeom prst="rect">
+            <a:avLst/>
+          </a:prstGeom>
+          <a:noFill/>
+        </p:spPr>
+        <p:txBody>
+          <a:bodyPr wrap="square">
+            <a:spAutoFit/>
+          </a:bodyPr>
+          <a:lstStyle/>
+          <a:p>
+            <a:pPr algn="ctr">
+              <a:lnSpc>
+                <a:spcPct val="125000"/>
+              </a:lnSpc>
+            </a:pPr>
+            <a:r>
+              <a:rPr sz="1900" b="1">
+                <a:solidFill>
+                  <a:srgbClr val="FFFFFF"/>
+                </a:solidFill>
+                <a:latin typeface="微软雅黑"/>
+                <a:ea typeface="微软雅黑"/>
+                <a:cs typeface="微软雅黑"/>
+              </a:rPr>
+              <a:t>老人端 · 8 页</a:t>
+            </a:r>
+          </a:p>
+        </p:txBody>
+      </p:sp>
+      <p:sp>
+        <p:nvSpPr>
+          <p:cNvPr id="12" name="TextBox 11"/>
+          <p:cNvSpPr txBox="1"/>
+          <p:nvPr/>
+        </p:nvSpPr>
+        <p:spPr>
+          <a:xfrm>
+            <a:off x="8321040" y="2084831"/>
+            <a:ext cx="3429000" cy="2926080"/>
+          </a:xfrm>
+          <a:prstGeom prst="rect">
+            <a:avLst/>
+          </a:prstGeom>
+          <a:noFill/>
+        </p:spPr>
+        <p:txBody>
+          <a:bodyPr wrap="square">
+            <a:spAutoFit/>
+          </a:bodyPr>
+          <a:lstStyle/>
+          <a:p>
+            <a:pPr algn="l">
+              <a:lnSpc>
+                <a:spcPct val="102000"/>
+              </a:lnSpc>
+            </a:pPr>
+            <a:r>
+              <a:rPr sz="1450" b="0">
+                <a:solidFill>
+                  <a:srgbClr val="1B2233"/>
+                </a:solidFill>
+                <a:latin typeface="微软雅黑"/>
+                <a:ea typeface="微软雅黑"/>
+                <a:cs typeface="微软雅黑"/>
+              </a:rPr>
+              <a:t>首页：大字 + 六宫格 + 长按求助</a:t>
+            </a:r>
+          </a:p>
+          <a:p>
+            <a:pPr algn="l">
+              <a:lnSpc>
+                <a:spcPct val="102000"/>
+              </a:lnSpc>
+            </a:pPr>
+            <a:r>
+              <a:rPr sz="1450" b="0">
+                <a:solidFill>
+                  <a:srgbClr val="1B2233"/>
+                </a:solidFill>
+                <a:latin typeface="微软雅黑"/>
+                <a:ea typeface="微软雅黑"/>
+                <a:cs typeface="微软雅黑"/>
+              </a:rPr>
+              <a:t>小助手：按住说话 → 转写确认 → 播报</a:t>
+            </a:r>
+          </a:p>
+          <a:p>
+            <a:pPr algn="l">
+              <a:lnSpc>
+                <a:spcPct val="102000"/>
+              </a:lnSpc>
+            </a:pPr>
+            <a:r>
+              <a:rPr sz="1450" b="0">
+                <a:solidFill>
+                  <a:srgbClr val="1B2233"/>
+                </a:solidFill>
+                <a:latin typeface="微软雅黑"/>
+                <a:ea typeface="微软雅黑"/>
+                <a:cs typeface="微软雅黑"/>
+              </a:rPr>
+              <a:t>语音报修：识别 → 确认 → 提交</a:t>
+            </a:r>
+          </a:p>
+          <a:p>
+            <a:pPr algn="l">
+              <a:lnSpc>
+                <a:spcPct val="102000"/>
+              </a:lnSpc>
+            </a:pPr>
+            <a:r>
+              <a:rPr sz="1450" b="0">
+                <a:solidFill>
+                  <a:srgbClr val="1B2233"/>
+                </a:solidFill>
+                <a:latin typeface="微软雅黑"/>
+                <a:ea typeface="微软雅黑"/>
+                <a:cs typeface="微软雅黑"/>
+              </a:rPr>
+              <a:t>用药提醒：审核后播报 + 我吃了</a:t>
+            </a:r>
+          </a:p>
+          <a:p>
+            <a:pPr algn="l">
+              <a:lnSpc>
+                <a:spcPct val="102000"/>
+              </a:lnSpc>
+            </a:pPr>
+            <a:r>
+              <a:rPr sz="1450" b="0">
+                <a:solidFill>
+                  <a:srgbClr val="1B2233"/>
+                </a:solidFill>
+                <a:latin typeface="微软雅黑"/>
+                <a:ea typeface="微软雅黑"/>
+                <a:cs typeface="微软雅黑"/>
+              </a:rPr>
+              <a:t>听通知：大字 + 语音（紧急播两次）</a:t>
+            </a:r>
+          </a:p>
+          <a:p>
+            <a:pPr algn="l">
+              <a:lnSpc>
+                <a:spcPct val="102000"/>
+              </a:lnSpc>
+            </a:pPr>
+            <a:r>
+              <a:rPr sz="1450" b="0">
+                <a:solidFill>
+                  <a:srgbClr val="1B2233"/>
+                </a:solidFill>
+                <a:latin typeface="微软雅黑"/>
+                <a:ea typeface="微软雅黑"/>
+                <a:cs typeface="微软雅黑"/>
+              </a:rPr>
+              <a:t>紧急联系人：审核后可拨打 + 留痕</a:t>
+            </a:r>
+          </a:p>
+          <a:p>
+            <a:pPr algn="l">
+              <a:lnSpc>
+                <a:spcPct val="102000"/>
+              </a:lnSpc>
+            </a:pPr>
+            <a:r>
+              <a:rPr sz="1450" b="0">
+                <a:solidFill>
+                  <a:srgbClr val="1B2233"/>
+                </a:solidFill>
+                <a:latin typeface="微软雅黑"/>
+                <a:ea typeface="微软雅黑"/>
+                <a:cs typeface="微软雅黑"/>
+              </a:rPr>
+              <a:t>我的报修：进度 + 满意度反馈</a:t>
+            </a:r>
+          </a:p>
+          <a:p>
+            <a:pPr algn="l">
+              <a:lnSpc>
+                <a:spcPct val="102000"/>
+              </a:lnSpc>
+            </a:pPr>
+            <a:r>
+              <a:rPr sz="1450" b="0">
+                <a:solidFill>
+                  <a:srgbClr val="1B2233"/>
+                </a:solidFill>
+                <a:latin typeface="微软雅黑"/>
+                <a:ea typeface="微软雅黑"/>
+                <a:cs typeface="微软雅黑"/>
+              </a:rPr>
+              <a:t>政策问答：语音提问 + 转人工确认</a:t>
+            </a:r>
+          </a:p>
+        </p:txBody>
+      </p:sp>
+      <p:sp>
+        <p:nvSpPr>
+          <p:cNvPr id="13" name="Rounded Rectangle 12"/>
+          <p:cNvSpPr/>
+          <p:nvPr/>
+        </p:nvSpPr>
+        <p:spPr>
+          <a:xfrm>
+            <a:off x="640080" y="5989320"/>
+            <a:ext cx="10927080" cy="566928"/>
           </a:xfrm>
           <a:prstGeom prst="roundRect">
             <a:avLst/>
@@ -6073,14 +6865,14 @@
       </p:sp>
       <p:sp>
         <p:nvSpPr>
-          <p:cNvPr id="5" name="TextBox 4"/>
+          <p:cNvPr id="14" name="TextBox 13"/>
           <p:cNvSpPr txBox="1"/>
           <p:nvPr/>
         </p:nvSpPr>
         <p:spPr>
           <a:xfrm>
-            <a:off x="1097280" y="1847088"/>
-            <a:ext cx="1463040" cy="731520"/>
+            <a:off x="822960" y="6089904"/>
+            <a:ext cx="10607040" cy="411480"/>
           </a:xfrm>
           <a:prstGeom prst="rect">
             <a:avLst/>
@@ -6099,48 +6891,7 @@
               </a:lnSpc>
             </a:pPr>
             <a:r>
-              <a:rPr sz="2000" b="1">
-                <a:solidFill>
-                  <a:srgbClr val="122A51"/>
-                </a:solidFill>
-                <a:latin typeface="微软雅黑"/>
-                <a:ea typeface="微软雅黑"/>
-                <a:cs typeface="微软雅黑"/>
-              </a:rPr>
-              <a:t>报修</a:t>
-            </a:r>
-          </a:p>
-        </p:txBody>
-      </p:sp>
-      <p:sp>
-        <p:nvSpPr>
-          <p:cNvPr id="6" name="TextBox 5"/>
-          <p:cNvSpPr txBox="1"/>
-          <p:nvPr/>
-        </p:nvSpPr>
-        <p:spPr>
-          <a:xfrm>
-            <a:off x="2606039" y="1883664"/>
-            <a:ext cx="3200400" cy="731520"/>
-          </a:xfrm>
-          <a:prstGeom prst="rect">
-            <a:avLst/>
-          </a:prstGeom>
-          <a:noFill/>
-        </p:spPr>
-        <p:txBody>
-          <a:bodyPr wrap="square">
-            <a:spAutoFit/>
-          </a:bodyPr>
-          <a:lstStyle/>
-          <a:p>
-            <a:pPr algn="l">
-              <a:lnSpc>
-                <a:spcPct val="125000"/>
-              </a:lnSpc>
-            </a:pPr>
-            <a:r>
-              <a:rPr sz="1600" b="0">
+              <a:rPr sz="1500" b="0">
                 <a:solidFill>
                   <a:srgbClr val="1B2233"/>
                 </a:solidFill>
@@ -6148,896 +6899,14 @@
                 <a:ea typeface="微软雅黑"/>
                 <a:cs typeface="微软雅黑"/>
               </a:rPr>
-              <a:t>全状态机：提交 → 审核 → 派单 → 处理 → 办结 → 回访</a:t>
-            </a:r>
-          </a:p>
-        </p:txBody>
-      </p:sp>
-      <p:sp>
-        <p:nvSpPr>
-          <p:cNvPr id="7" name="Rounded Rectangle 6"/>
-          <p:cNvSpPr/>
-          <p:nvPr/>
-        </p:nvSpPr>
-        <p:spPr>
-          <a:xfrm>
-            <a:off x="6355080" y="1737360"/>
-            <a:ext cx="5120640" cy="960120"/>
-          </a:xfrm>
-          <a:prstGeom prst="roundRect">
-            <a:avLst/>
-          </a:prstGeom>
-          <a:solidFill>
-            <a:srgbClr val="F2F5FB"/>
-          </a:solidFill>
-          <a:ln>
-            <a:noFill/>
-          </a:ln>
-          <a:effectLst/>
-        </p:spPr>
-        <p:style>
-          <a:lnRef idx="1">
-            <a:schemeClr val="accent1"/>
-          </a:lnRef>
-          <a:fillRef idx="3">
-            <a:schemeClr val="accent1"/>
-          </a:fillRef>
-          <a:effectRef idx="2">
-            <a:schemeClr val="accent1"/>
-          </a:effectRef>
-          <a:fontRef idx="minor">
-            <a:schemeClr val="lt1"/>
-          </a:fontRef>
-        </p:style>
-        <p:txBody>
-          <a:bodyPr rtlCol="0" anchor="ctr"/>
-          <a:lstStyle/>
-          <a:p>
-            <a:pPr algn="ctr"/>
-          </a:p>
-        </p:txBody>
-      </p:sp>
-      <p:sp>
-        <p:nvSpPr>
-          <p:cNvPr id="8" name="TextBox 7"/>
-          <p:cNvSpPr txBox="1"/>
-          <p:nvPr/>
-        </p:nvSpPr>
-        <p:spPr>
-          <a:xfrm>
-            <a:off x="6583680" y="1847088"/>
-            <a:ext cx="1463040" cy="731520"/>
-          </a:xfrm>
-          <a:prstGeom prst="rect">
-            <a:avLst/>
-          </a:prstGeom>
-          <a:noFill/>
-        </p:spPr>
-        <p:txBody>
-          <a:bodyPr wrap="square">
-            <a:spAutoFit/>
-          </a:bodyPr>
-          <a:lstStyle/>
-          <a:p>
-            <a:pPr algn="l">
-              <a:lnSpc>
-                <a:spcPct val="125000"/>
-              </a:lnSpc>
-            </a:pPr>
-            <a:r>
-              <a:rPr sz="2000" b="1">
-                <a:solidFill>
-                  <a:srgbClr val="122A51"/>
-                </a:solidFill>
-                <a:latin typeface="微软雅黑"/>
-                <a:ea typeface="微软雅黑"/>
-                <a:cs typeface="微软雅黑"/>
-              </a:rPr>
-              <a:t>提案</a:t>
-            </a:r>
-          </a:p>
-        </p:txBody>
-      </p:sp>
-      <p:sp>
-        <p:nvSpPr>
-          <p:cNvPr id="9" name="TextBox 8"/>
-          <p:cNvSpPr txBox="1"/>
-          <p:nvPr/>
-        </p:nvSpPr>
-        <p:spPr>
-          <a:xfrm>
-            <a:off x="8092440" y="1883664"/>
-            <a:ext cx="3200400" cy="731520"/>
-          </a:xfrm>
-          <a:prstGeom prst="rect">
-            <a:avLst/>
-          </a:prstGeom>
-          <a:noFill/>
-        </p:spPr>
-        <p:txBody>
-          <a:bodyPr wrap="square">
-            <a:spAutoFit/>
-          </a:bodyPr>
-          <a:lstStyle/>
-          <a:p>
-            <a:pPr algn="l">
-              <a:lnSpc>
-                <a:spcPct val="125000"/>
-              </a:lnSpc>
-            </a:pPr>
-            <a:r>
-              <a:rPr sz="1600" b="0">
-                <a:solidFill>
-                  <a:srgbClr val="1B2233"/>
-                </a:solidFill>
-                <a:latin typeface="微软雅黑"/>
-                <a:ea typeface="微软雅黑"/>
-                <a:cs typeface="微软雅黑"/>
-              </a:rPr>
-              <a:t>全生命周期：提交 → 附议 → 回应 → 采纳 → 实施</a:t>
-            </a:r>
-          </a:p>
-        </p:txBody>
-      </p:sp>
-      <p:sp>
-        <p:nvSpPr>
-          <p:cNvPr id="10" name="Rounded Rectangle 9"/>
-          <p:cNvSpPr/>
-          <p:nvPr/>
-        </p:nvSpPr>
-        <p:spPr>
-          <a:xfrm>
-            <a:off x="868680" y="2880360"/>
-            <a:ext cx="5120640" cy="960120"/>
-          </a:xfrm>
-          <a:prstGeom prst="roundRect">
-            <a:avLst/>
-          </a:prstGeom>
-          <a:solidFill>
-            <a:srgbClr val="F2F5FB"/>
-          </a:solidFill>
-          <a:ln>
-            <a:noFill/>
-          </a:ln>
-          <a:effectLst/>
-        </p:spPr>
-        <p:style>
-          <a:lnRef idx="1">
-            <a:schemeClr val="accent1"/>
-          </a:lnRef>
-          <a:fillRef idx="3">
-            <a:schemeClr val="accent1"/>
-          </a:fillRef>
-          <a:effectRef idx="2">
-            <a:schemeClr val="accent1"/>
-          </a:effectRef>
-          <a:fontRef idx="minor">
-            <a:schemeClr val="lt1"/>
-          </a:fontRef>
-        </p:style>
-        <p:txBody>
-          <a:bodyPr rtlCol="0" anchor="ctr"/>
-          <a:lstStyle/>
-          <a:p>
-            <a:pPr algn="ctr"/>
-          </a:p>
-        </p:txBody>
-      </p:sp>
-      <p:sp>
-        <p:nvSpPr>
-          <p:cNvPr id="11" name="TextBox 10"/>
-          <p:cNvSpPr txBox="1"/>
-          <p:nvPr/>
-        </p:nvSpPr>
-        <p:spPr>
-          <a:xfrm>
-            <a:off x="1097280" y="2990088"/>
-            <a:ext cx="1463040" cy="731520"/>
-          </a:xfrm>
-          <a:prstGeom prst="rect">
-            <a:avLst/>
-          </a:prstGeom>
-          <a:noFill/>
-        </p:spPr>
-        <p:txBody>
-          <a:bodyPr wrap="square">
-            <a:spAutoFit/>
-          </a:bodyPr>
-          <a:lstStyle/>
-          <a:p>
-            <a:pPr algn="l">
-              <a:lnSpc>
-                <a:spcPct val="125000"/>
-              </a:lnSpc>
-            </a:pPr>
-            <a:r>
-              <a:rPr sz="2000" b="1">
-                <a:solidFill>
-                  <a:srgbClr val="122A51"/>
-                </a:solidFill>
-                <a:latin typeface="微软雅黑"/>
-                <a:ea typeface="微软雅黑"/>
-                <a:cs typeface="微软雅黑"/>
-              </a:rPr>
-              <a:t>通知</a:t>
-            </a:r>
-          </a:p>
-        </p:txBody>
-      </p:sp>
-      <p:sp>
-        <p:nvSpPr>
-          <p:cNvPr id="12" name="TextBox 11"/>
-          <p:cNvSpPr txBox="1"/>
-          <p:nvPr/>
-        </p:nvSpPr>
-        <p:spPr>
-          <a:xfrm>
-            <a:off x="2606039" y="3026664"/>
-            <a:ext cx="3200400" cy="731520"/>
-          </a:xfrm>
-          <a:prstGeom prst="rect">
-            <a:avLst/>
-          </a:prstGeom>
-          <a:noFill/>
-        </p:spPr>
-        <p:txBody>
-          <a:bodyPr wrap="square">
-            <a:spAutoFit/>
-          </a:bodyPr>
-          <a:lstStyle/>
-          <a:p>
-            <a:pPr algn="l">
-              <a:lnSpc>
-                <a:spcPct val="125000"/>
-              </a:lnSpc>
-            </a:pPr>
-            <a:r>
-              <a:rPr sz="1600" b="0">
-                <a:solidFill>
-                  <a:srgbClr val="1B2233"/>
-                </a:solidFill>
-                <a:latin typeface="微软雅黑"/>
-                <a:ea typeface="微软雅黑"/>
-                <a:cs typeface="微软雅黑"/>
-              </a:rPr>
-              <a:t>普通 / 紧急 / 定时 / 已读回执</a:t>
-            </a:r>
-          </a:p>
-        </p:txBody>
-      </p:sp>
-      <p:sp>
-        <p:nvSpPr>
-          <p:cNvPr id="13" name="Rounded Rectangle 12"/>
-          <p:cNvSpPr/>
-          <p:nvPr/>
-        </p:nvSpPr>
-        <p:spPr>
-          <a:xfrm>
-            <a:off x="6355080" y="2880360"/>
-            <a:ext cx="5120640" cy="960120"/>
-          </a:xfrm>
-          <a:prstGeom prst="roundRect">
-            <a:avLst/>
-          </a:prstGeom>
-          <a:solidFill>
-            <a:srgbClr val="F2F5FB"/>
-          </a:solidFill>
-          <a:ln>
-            <a:noFill/>
-          </a:ln>
-          <a:effectLst/>
-        </p:spPr>
-        <p:style>
-          <a:lnRef idx="1">
-            <a:schemeClr val="accent1"/>
-          </a:lnRef>
-          <a:fillRef idx="3">
-            <a:schemeClr val="accent1"/>
-          </a:fillRef>
-          <a:effectRef idx="2">
-            <a:schemeClr val="accent1"/>
-          </a:effectRef>
-          <a:fontRef idx="minor">
-            <a:schemeClr val="lt1"/>
-          </a:fontRef>
-        </p:style>
-        <p:txBody>
-          <a:bodyPr rtlCol="0" anchor="ctr"/>
-          <a:lstStyle/>
-          <a:p>
-            <a:pPr algn="ctr"/>
-          </a:p>
-        </p:txBody>
-      </p:sp>
-      <p:sp>
-        <p:nvSpPr>
-          <p:cNvPr id="14" name="TextBox 13"/>
-          <p:cNvSpPr txBox="1"/>
-          <p:nvPr/>
-        </p:nvSpPr>
-        <p:spPr>
-          <a:xfrm>
-            <a:off x="6583680" y="2990088"/>
-            <a:ext cx="1463040" cy="731520"/>
-          </a:xfrm>
-          <a:prstGeom prst="rect">
-            <a:avLst/>
-          </a:prstGeom>
-          <a:noFill/>
-        </p:spPr>
-        <p:txBody>
-          <a:bodyPr wrap="square">
-            <a:spAutoFit/>
-          </a:bodyPr>
-          <a:lstStyle/>
-          <a:p>
-            <a:pPr algn="l">
-              <a:lnSpc>
-                <a:spcPct val="125000"/>
-              </a:lnSpc>
-            </a:pPr>
-            <a:r>
-              <a:rPr sz="2000" b="1">
-                <a:solidFill>
-                  <a:srgbClr val="122A51"/>
-                </a:solidFill>
-                <a:latin typeface="微软雅黑"/>
-                <a:ea typeface="微软雅黑"/>
-                <a:cs typeface="微软雅黑"/>
-              </a:rPr>
-              <a:t>政策问答</a:t>
-            </a:r>
-          </a:p>
-        </p:txBody>
-      </p:sp>
-      <p:sp>
-        <p:nvSpPr>
-          <p:cNvPr id="15" name="TextBox 14"/>
-          <p:cNvSpPr txBox="1"/>
-          <p:nvPr/>
-        </p:nvSpPr>
-        <p:spPr>
-          <a:xfrm>
-            <a:off x="8092440" y="3026664"/>
-            <a:ext cx="3200400" cy="731520"/>
-          </a:xfrm>
-          <a:prstGeom prst="rect">
-            <a:avLst/>
-          </a:prstGeom>
-          <a:noFill/>
-        </p:spPr>
-        <p:txBody>
-          <a:bodyPr wrap="square">
-            <a:spAutoFit/>
-          </a:bodyPr>
-          <a:lstStyle/>
-          <a:p>
-            <a:pPr algn="l">
-              <a:lnSpc>
-                <a:spcPct val="125000"/>
-              </a:lnSpc>
-            </a:pPr>
-            <a:r>
-              <a:rPr sz="1600" b="0">
-                <a:solidFill>
-                  <a:srgbClr val="1B2233"/>
-                </a:solidFill>
-                <a:latin typeface="微软雅黑"/>
-                <a:ea typeface="微软雅黑"/>
-                <a:cs typeface="微软雅黑"/>
-              </a:rPr>
-              <a:t>答案带出处；检索无结果就转人工</a:t>
-            </a:r>
-          </a:p>
-        </p:txBody>
-      </p:sp>
-      <p:sp>
-        <p:nvSpPr>
-          <p:cNvPr id="16" name="Rounded Rectangle 15"/>
-          <p:cNvSpPr/>
-          <p:nvPr/>
-        </p:nvSpPr>
-        <p:spPr>
-          <a:xfrm>
-            <a:off x="868680" y="4023360"/>
-            <a:ext cx="5120640" cy="960120"/>
-          </a:xfrm>
-          <a:prstGeom prst="roundRect">
-            <a:avLst/>
-          </a:prstGeom>
-          <a:solidFill>
-            <a:srgbClr val="F2F5FB"/>
-          </a:solidFill>
-          <a:ln>
-            <a:noFill/>
-          </a:ln>
-          <a:effectLst/>
-        </p:spPr>
-        <p:style>
-          <a:lnRef idx="1">
-            <a:schemeClr val="accent1"/>
-          </a:lnRef>
-          <a:fillRef idx="3">
-            <a:schemeClr val="accent1"/>
-          </a:fillRef>
-          <a:effectRef idx="2">
-            <a:schemeClr val="accent1"/>
-          </a:effectRef>
-          <a:fontRef idx="minor">
-            <a:schemeClr val="lt1"/>
-          </a:fontRef>
-        </p:style>
-        <p:txBody>
-          <a:bodyPr rtlCol="0" anchor="ctr"/>
-          <a:lstStyle/>
-          <a:p>
-            <a:pPr algn="ctr"/>
-          </a:p>
-        </p:txBody>
-      </p:sp>
-      <p:sp>
-        <p:nvSpPr>
-          <p:cNvPr id="17" name="TextBox 16"/>
-          <p:cNvSpPr txBox="1"/>
-          <p:nvPr/>
-        </p:nvSpPr>
-        <p:spPr>
-          <a:xfrm>
-            <a:off x="1097280" y="4133088"/>
-            <a:ext cx="1463040" cy="731520"/>
-          </a:xfrm>
-          <a:prstGeom prst="rect">
-            <a:avLst/>
-          </a:prstGeom>
-          <a:noFill/>
-        </p:spPr>
-        <p:txBody>
-          <a:bodyPr wrap="square">
-            <a:spAutoFit/>
-          </a:bodyPr>
-          <a:lstStyle/>
-          <a:p>
-            <a:pPr algn="l">
-              <a:lnSpc>
-                <a:spcPct val="125000"/>
-              </a:lnSpc>
-            </a:pPr>
-            <a:r>
-              <a:rPr sz="2000" b="1">
-                <a:solidFill>
-                  <a:srgbClr val="122A51"/>
-                </a:solidFill>
-                <a:latin typeface="微软雅黑"/>
-                <a:ea typeface="微软雅黑"/>
-                <a:cs typeface="微软雅黑"/>
-              </a:rPr>
-              <a:t>健康咨询</a:t>
-            </a:r>
-          </a:p>
-        </p:txBody>
-      </p:sp>
-      <p:sp>
-        <p:nvSpPr>
-          <p:cNvPr id="18" name="TextBox 17"/>
-          <p:cNvSpPr txBox="1"/>
-          <p:nvPr/>
-        </p:nvSpPr>
-        <p:spPr>
-          <a:xfrm>
-            <a:off x="2606039" y="4169664"/>
-            <a:ext cx="3200400" cy="731520"/>
-          </a:xfrm>
-          <a:prstGeom prst="rect">
-            <a:avLst/>
-          </a:prstGeom>
-          <a:noFill/>
-        </p:spPr>
-        <p:txBody>
-          <a:bodyPr wrap="square">
-            <a:spAutoFit/>
-          </a:bodyPr>
-          <a:lstStyle/>
-          <a:p>
-            <a:pPr algn="l">
-              <a:lnSpc>
-                <a:spcPct val="125000"/>
-              </a:lnSpc>
-            </a:pPr>
-            <a:r>
-              <a:rPr sz="1600" b="0">
-                <a:solidFill>
-                  <a:srgbClr val="1B2233"/>
-                </a:solidFill>
-                <a:latin typeface="微软雅黑"/>
-                <a:ea typeface="微软雅黑"/>
-                <a:cs typeface="微软雅黑"/>
-              </a:rPr>
-              <a:t>只给建议，紧急情况转人工（不做诊断）</a:t>
-            </a:r>
-          </a:p>
-        </p:txBody>
-      </p:sp>
-      <p:sp>
-        <p:nvSpPr>
-          <p:cNvPr id="19" name="Rounded Rectangle 18"/>
-          <p:cNvSpPr/>
-          <p:nvPr/>
-        </p:nvSpPr>
-        <p:spPr>
-          <a:xfrm>
-            <a:off x="6355080" y="4023360"/>
-            <a:ext cx="5120640" cy="960120"/>
-          </a:xfrm>
-          <a:prstGeom prst="roundRect">
-            <a:avLst/>
-          </a:prstGeom>
-          <a:solidFill>
-            <a:srgbClr val="F2F5FB"/>
-          </a:solidFill>
-          <a:ln>
-            <a:noFill/>
-          </a:ln>
-          <a:effectLst/>
-        </p:spPr>
-        <p:style>
-          <a:lnRef idx="1">
-            <a:schemeClr val="accent1"/>
-          </a:lnRef>
-          <a:fillRef idx="3">
-            <a:schemeClr val="accent1"/>
-          </a:fillRef>
-          <a:effectRef idx="2">
-            <a:schemeClr val="accent1"/>
-          </a:effectRef>
-          <a:fontRef idx="minor">
-            <a:schemeClr val="lt1"/>
-          </a:fontRef>
-        </p:style>
-        <p:txBody>
-          <a:bodyPr rtlCol="0" anchor="ctr"/>
-          <a:lstStyle/>
-          <a:p>
-            <a:pPr algn="ctr"/>
-          </a:p>
-        </p:txBody>
-      </p:sp>
-      <p:sp>
-        <p:nvSpPr>
-          <p:cNvPr id="20" name="TextBox 19"/>
-          <p:cNvSpPr txBox="1"/>
-          <p:nvPr/>
-        </p:nvSpPr>
-        <p:spPr>
-          <a:xfrm>
-            <a:off x="6583680" y="4133088"/>
-            <a:ext cx="1463040" cy="731520"/>
-          </a:xfrm>
-          <a:prstGeom prst="rect">
-            <a:avLst/>
-          </a:prstGeom>
-          <a:noFill/>
-        </p:spPr>
-        <p:txBody>
-          <a:bodyPr wrap="square">
-            <a:spAutoFit/>
-          </a:bodyPr>
-          <a:lstStyle/>
-          <a:p>
-            <a:pPr algn="l">
-              <a:lnSpc>
-                <a:spcPct val="125000"/>
-              </a:lnSpc>
-            </a:pPr>
-            <a:r>
-              <a:rPr sz="2000" b="1">
-                <a:solidFill>
-                  <a:srgbClr val="122A51"/>
-                </a:solidFill>
-                <a:latin typeface="微软雅黑"/>
-                <a:ea typeface="微软雅黑"/>
-                <a:cs typeface="微软雅黑"/>
-              </a:rPr>
-              <a:t>天气联动</a:t>
-            </a:r>
-          </a:p>
-        </p:txBody>
-      </p:sp>
-      <p:sp>
-        <p:nvSpPr>
-          <p:cNvPr id="21" name="TextBox 20"/>
-          <p:cNvSpPr txBox="1"/>
-          <p:nvPr/>
-        </p:nvSpPr>
-        <p:spPr>
-          <a:xfrm>
-            <a:off x="8092440" y="4169664"/>
-            <a:ext cx="3200400" cy="731520"/>
-          </a:xfrm>
-          <a:prstGeom prst="rect">
-            <a:avLst/>
-          </a:prstGeom>
-          <a:noFill/>
-        </p:spPr>
-        <p:txBody>
-          <a:bodyPr wrap="square">
-            <a:spAutoFit/>
-          </a:bodyPr>
-          <a:lstStyle/>
-          <a:p>
-            <a:pPr algn="l">
-              <a:lnSpc>
-                <a:spcPct val="125000"/>
-              </a:lnSpc>
-            </a:pPr>
-            <a:r>
-              <a:rPr sz="1600" b="0">
-                <a:solidFill>
-                  <a:srgbClr val="1B2233"/>
-                </a:solidFill>
-                <a:latin typeface="微软雅黑"/>
-                <a:ea typeface="微软雅黑"/>
-                <a:cs typeface="微软雅黑"/>
-              </a:rPr>
-              <a:t>极端天气 → 健康防护建议 → 自动发通知</a:t>
-            </a:r>
-          </a:p>
-        </p:txBody>
-      </p:sp>
-      <p:sp>
-        <p:nvSpPr>
-          <p:cNvPr id="22" name="Rounded Rectangle 21"/>
-          <p:cNvSpPr/>
-          <p:nvPr/>
-        </p:nvSpPr>
-        <p:spPr>
-          <a:xfrm>
-            <a:off x="868680" y="5166360"/>
-            <a:ext cx="5120640" cy="960120"/>
-          </a:xfrm>
-          <a:prstGeom prst="roundRect">
-            <a:avLst/>
-          </a:prstGeom>
-          <a:solidFill>
-            <a:srgbClr val="F2F5FB"/>
-          </a:solidFill>
-          <a:ln>
-            <a:noFill/>
-          </a:ln>
-          <a:effectLst/>
-        </p:spPr>
-        <p:style>
-          <a:lnRef idx="1">
-            <a:schemeClr val="accent1"/>
-          </a:lnRef>
-          <a:fillRef idx="3">
-            <a:schemeClr val="accent1"/>
-          </a:fillRef>
-          <a:effectRef idx="2">
-            <a:schemeClr val="accent1"/>
-          </a:effectRef>
-          <a:fontRef idx="minor">
-            <a:schemeClr val="lt1"/>
-          </a:fontRef>
-        </p:style>
-        <p:txBody>
-          <a:bodyPr rtlCol="0" anchor="ctr"/>
-          <a:lstStyle/>
-          <a:p>
-            <a:pPr algn="ctr"/>
-          </a:p>
-        </p:txBody>
-      </p:sp>
-      <p:sp>
-        <p:nvSpPr>
-          <p:cNvPr id="23" name="TextBox 22"/>
-          <p:cNvSpPr txBox="1"/>
-          <p:nvPr/>
-        </p:nvSpPr>
-        <p:spPr>
-          <a:xfrm>
-            <a:off x="1097280" y="5276088"/>
-            <a:ext cx="1463040" cy="731520"/>
-          </a:xfrm>
-          <a:prstGeom prst="rect">
-            <a:avLst/>
-          </a:prstGeom>
-          <a:noFill/>
-        </p:spPr>
-        <p:txBody>
-          <a:bodyPr wrap="square">
-            <a:spAutoFit/>
-          </a:bodyPr>
-          <a:lstStyle/>
-          <a:p>
-            <a:pPr algn="l">
-              <a:lnSpc>
-                <a:spcPct val="125000"/>
-              </a:lnSpc>
-            </a:pPr>
-            <a:r>
-              <a:rPr sz="2000" b="1">
-                <a:solidFill>
-                  <a:srgbClr val="122A51"/>
-                </a:solidFill>
-                <a:latin typeface="微软雅黑"/>
-                <a:ea typeface="微软雅黑"/>
-                <a:cs typeface="微软雅黑"/>
-              </a:rPr>
-              <a:t>网格员工作台</a:t>
-            </a:r>
-          </a:p>
-        </p:txBody>
-      </p:sp>
-      <p:sp>
-        <p:nvSpPr>
-          <p:cNvPr id="24" name="TextBox 23"/>
-          <p:cNvSpPr txBox="1"/>
-          <p:nvPr/>
-        </p:nvSpPr>
-        <p:spPr>
-          <a:xfrm>
-            <a:off x="2606039" y="5312664"/>
-            <a:ext cx="3200400" cy="731520"/>
-          </a:xfrm>
-          <a:prstGeom prst="rect">
-            <a:avLst/>
-          </a:prstGeom>
-          <a:noFill/>
-        </p:spPr>
-        <p:txBody>
-          <a:bodyPr wrap="square">
-            <a:spAutoFit/>
-          </a:bodyPr>
-          <a:lstStyle/>
-          <a:p>
-            <a:pPr algn="l">
-              <a:lnSpc>
-                <a:spcPct val="125000"/>
-              </a:lnSpc>
-            </a:pPr>
-            <a:r>
-              <a:rPr sz="1600" b="0">
-                <a:solidFill>
-                  <a:srgbClr val="1B2233"/>
-                </a:solidFill>
-                <a:latin typeface="微软雅黑"/>
-                <a:ea typeface="微软雅黑"/>
-                <a:cs typeface="微软雅黑"/>
-              </a:rPr>
-              <a:t>AI 助手、待办、统计导出</a:t>
-            </a:r>
-          </a:p>
-        </p:txBody>
-      </p:sp>
-      <p:sp>
-        <p:nvSpPr>
-          <p:cNvPr id="25" name="Rounded Rectangle 24"/>
-          <p:cNvSpPr/>
-          <p:nvPr/>
-        </p:nvSpPr>
-        <p:spPr>
-          <a:xfrm>
-            <a:off x="6355080" y="5166360"/>
-            <a:ext cx="5120640" cy="960120"/>
-          </a:xfrm>
-          <a:prstGeom prst="roundRect">
-            <a:avLst/>
-          </a:prstGeom>
-          <a:solidFill>
-            <a:srgbClr val="F2F5FB"/>
-          </a:solidFill>
-          <a:ln>
-            <a:noFill/>
-          </a:ln>
-          <a:effectLst/>
-        </p:spPr>
-        <p:style>
-          <a:lnRef idx="1">
-            <a:schemeClr val="accent1"/>
-          </a:lnRef>
-          <a:fillRef idx="3">
-            <a:schemeClr val="accent1"/>
-          </a:fillRef>
-          <a:effectRef idx="2">
-            <a:schemeClr val="accent1"/>
-          </a:effectRef>
-          <a:fontRef idx="minor">
-            <a:schemeClr val="lt1"/>
-          </a:fontRef>
-        </p:style>
-        <p:txBody>
-          <a:bodyPr rtlCol="0" anchor="ctr"/>
-          <a:lstStyle/>
-          <a:p>
-            <a:pPr algn="ctr"/>
-          </a:p>
-        </p:txBody>
-      </p:sp>
-      <p:sp>
-        <p:nvSpPr>
-          <p:cNvPr id="26" name="TextBox 25"/>
-          <p:cNvSpPr txBox="1"/>
-          <p:nvPr/>
-        </p:nvSpPr>
-        <p:spPr>
-          <a:xfrm>
-            <a:off x="6583680" y="5276088"/>
-            <a:ext cx="1463040" cy="731520"/>
-          </a:xfrm>
-          <a:prstGeom prst="rect">
-            <a:avLst/>
-          </a:prstGeom>
-          <a:noFill/>
-        </p:spPr>
-        <p:txBody>
-          <a:bodyPr wrap="square">
-            <a:spAutoFit/>
-          </a:bodyPr>
-          <a:lstStyle/>
-          <a:p>
-            <a:pPr algn="l">
-              <a:lnSpc>
-                <a:spcPct val="125000"/>
-              </a:lnSpc>
-            </a:pPr>
-            <a:r>
-              <a:rPr sz="2000" b="1">
-                <a:solidFill>
-                  <a:srgbClr val="122A51"/>
-                </a:solidFill>
-                <a:latin typeface="微软雅黑"/>
-                <a:ea typeface="微软雅黑"/>
-                <a:cs typeface="微软雅黑"/>
-              </a:rPr>
-              <a:t>转人工</a:t>
-            </a:r>
-          </a:p>
-        </p:txBody>
-      </p:sp>
-      <p:sp>
-        <p:nvSpPr>
-          <p:cNvPr id="27" name="TextBox 26"/>
-          <p:cNvSpPr txBox="1"/>
-          <p:nvPr/>
-        </p:nvSpPr>
-        <p:spPr>
-          <a:xfrm>
-            <a:off x="8092440" y="5312664"/>
-            <a:ext cx="3200400" cy="731520"/>
-          </a:xfrm>
-          <a:prstGeom prst="rect">
-            <a:avLst/>
-          </a:prstGeom>
-          <a:noFill/>
-        </p:spPr>
-        <p:txBody>
-          <a:bodyPr wrap="square">
-            <a:spAutoFit/>
-          </a:bodyPr>
-          <a:lstStyle/>
-          <a:p>
-            <a:pPr algn="l">
-              <a:lnSpc>
-                <a:spcPct val="125000"/>
-              </a:lnSpc>
-            </a:pPr>
-            <a:r>
-              <a:rPr sz="1600" b="0">
-                <a:solidFill>
-                  <a:srgbClr val="1B2233"/>
-                </a:solidFill>
-                <a:latin typeface="微软雅黑"/>
-                <a:ea typeface="微软雅黑"/>
-                <a:cs typeface="微软雅黑"/>
-              </a:rPr>
-              <a:t>带「处理包」：用户信息 + 执行链 + 待确认事项</a:t>
-            </a:r>
-          </a:p>
-        </p:txBody>
-      </p:sp>
-      <p:sp>
-        <p:nvSpPr>
-          <p:cNvPr id="28" name="Rectangle 27"/>
+              <a:t>跨端：转人工「处理包」（AI 已整理上下文）· 双层防线（校验 + 仲裁）· 规则为主、四个开关默认关 · 治理大屏 · 稳定性演示页</a:t>
+            </a:r>
+          </a:p>
+        </p:txBody>
+      </p:sp>
+      <p:sp>
+        <p:nvSpPr>
+          <p:cNvPr id="15" name="Rectangle 14"/>
           <p:cNvSpPr/>
           <p:nvPr/>
         </p:nvSpPr>
@@ -7081,7 +6950,7 @@
       </p:sp>
       <p:sp>
         <p:nvSpPr>
-          <p:cNvPr id="29" name="TextBox 28"/>
+          <p:cNvPr id="16" name="TextBox 15"/>
           <p:cNvSpPr txBox="1"/>
           <p:nvPr/>
         </p:nvSpPr>
@@ -7122,7 +6991,7 @@
       </p:sp>
       <p:sp>
         <p:nvSpPr>
-          <p:cNvPr id="30" name="TextBox 29"/>
+          <p:cNvPr id="17" name="TextBox 16"/>
           <p:cNvSpPr txBox="1"/>
           <p:nvPr/>
         </p:nvSpPr>

--- a/docs/competition/9月22日路演-社区先知.pptx
+++ b/docs/competition/9月22日路演-社区先知.pptx
@@ -22,7 +22,6 @@
     <p:sldId id="270" r:id="rId21"/>
     <p:sldId id="271" r:id="rId22"/>
     <p:sldId id="272" r:id="rId23"/>
-    <p:sldId id="273" r:id="rId24"/>
   </p:sldIdLst>
   <p:sldSz cx="12191695" cy="6858000" type="screen4x3"/>
   <p:notesSz cx="6858000" cy="9144000"/>
@@ -519,7 +518,7 @@
           <a:lstStyle/>
           <a:p>
             <a:r>
-              <a:t>开场（25 秒，不念 PPT）：上周，我家楼下张奶奶摔了一跤。她想找人帮忙，手机却只会打给外地的儿子。等社区知道这件事，天已经黑了。——这一晚没有人做错什么，是这条路太长了。我想把它缩短成一句话，这就是社区先知。</a:t>
+              <a:t>封面（开场 25 秒 + 自我介绍 7 秒；**PPT 先别翻**）：上周，我家楼下张奶奶摔了一跤。她想找人帮忙，手机却只会打给外地的儿子。等社区知道这件事，天已经黑了。——这一晚没有人做错什么，是这条路太长了。我想把它缩短成一句话，这就是社区先知。（这时才翻到封面）各位专家好，我是步承泽，北京工商大学大二学生。这个项目，从需求、架构到开发与测试都是我一个人做的。它服务三种人：居民、网格员、老人。今天七分钟，我讲三件事：怎么做、能干什么、我卡在哪。</a:t>
             </a:r>
           </a:p>
         </p:txBody>
@@ -589,7 +588,7 @@
           <a:lstStyle/>
           <a:p>
             <a:r>
-              <a:t>网格员端（二）处理与关怀：工单管理能搜索、能导出、能批量派单、能批量关闭；审核退回必须写意见，派单必须填维修人员与电话。点开一条工单，处理过程全程留痕。老年关怀里，用药提醒和紧急联系人都要审核通过才生效；老人求助来了，要确认响应、再结束。</a:t>
+              <a:t>老人端（一）看得见按得动：不是把居民端放大，是重做的。字大、按钮大、不用登录。首页就六件事：天气、通知、报修、联系社区、联系人、用药提醒。天气和帮助都能用语音念出来。</a:t>
             </a:r>
           </a:p>
         </p:txBody>
@@ -659,7 +658,7 @@
           <a:lstStyle/>
           <a:p>
             <a:r>
-              <a:t>老人端（一）看得见按得动：不是把居民端放大，是重做的。字大、按钮大、不用登录。首页就六件事：天气、通知、报修、联系社区、联系人、用药提醒。天气和帮助都能用语音念出来。</a:t>
+              <a:t>老人端（二）不会打字也能办事：三条路——① 点现成的话（家里灯不亮了 / 医保怎么报销）；② 直接说话，语音报修；③ 吃药提醒，就两个按钮「我吃了」「10 分钟后再说」，而且用药提醒要社区审核通过才开始播报。紧急求助长按 3 秒出确认框，10 秒不点自动取消——我怕老人放兜里误触，所以防了两道。</a:t>
             </a:r>
           </a:p>
         </p:txBody>
@@ -729,7 +728,7 @@
           <a:lstStyle/>
           <a:p>
             <a:r>
-              <a:t>老人端（二）不会打字也能办事：三条路——① 点现成的话（家里灯不亮了 / 医保怎么报销）；② 直接说话，语音报修；③ 吃药提醒，就两个按钮「我吃了」「10 分钟后再说」，而且用药提醒要社区审核通过才开始播报。紧急求助长按 3 秒出确认框，10 秒不点自动取消——我怕老人放兜里误触，所以防了两道。</a:t>
+              <a:t>功能按端列一遍（一列一段，手指往下扫）：居民端 14 页——报修拍照提交、能存草稿；工单详情有时间线，能撤回、能重开；邻里议事能提案、投票、公示期匿名议论；政策问答给依据和适用地区；还有健康防护、三天天气、通知、消息中心、我的、隐私政策。网格员端 9 页——工作台有待办和红黑榜下钻；工单管理能审核、派单、协商、转出，能批量操作和导出；提案管理能决定执行、转执行、延票；还有知识库维护、天气检查任务、健康内容审核、老年关怀的用药审核与 SOS 响应。老人端 8 页——语音小助手、语音报修、用药提醒、听通知、紧急联系人、报修进度、语音政策问答。最后一行跨端：转人工处理包、双层防线、规则为主，另有治理大屏与稳定性演示页。</a:t>
             </a:r>
           </a:p>
         </p:txBody>
@@ -799,7 +798,7 @@
           <a:lstStyle/>
           <a:p>
             <a:r>
-              <a:t>功能按端列一遍（一列一段，手指往下扫）：居民端 14 页——报修拍照提交、能存草稿；工单详情有时间线，能撤回、能重开；邻里议事能提案、投票、公示期匿名议论；政策问答给依据和适用地区；还有健康防护、三天天气、通知、消息中心、我的、隐私政策。网格员端 9 页——工作台有待办和红黑榜下钻；工单管理能审核、派单、协商、转出，能批量操作和导出；提案管理能决定执行、转执行、延票；还有知识库维护、天气检查任务、健康内容审核、老年关怀的用药审核与 SOS 响应。老人端 8 页——语音小助手、语音报修、用药提醒、听通知、紧急联系人、报修进度、语音政策问答。最后一行跨端：转人工处理包、双层防线、规则为主，另有治理大屏与稳定性演示页。</a:t>
+              <a:t>几个能复算的数字：638 项测试全绿、550 并发零失败、48 条金标第一位命中 100%、ruff 0；数据库 v46、约 50 张表。都是本机自测，不是第三方测评。</a:t>
             </a:r>
           </a:p>
         </p:txBody>
@@ -869,7 +868,7 @@
           <a:lstStyle/>
           <a:p>
             <a:r>
-              <a:t>几个能复算的数字：638 项测试全绿、550 并发零失败、48 条金标第一位命中 100%、ruff 0；数据库 v46、约 50 张表。都是本机自测，不是第三方测评。</a:t>
+              <a:t>它现在的位置：工程原型，没在真实街道试点，没有运营数据，商业模式在探索。今天不是来要投资，是来请教三个问题：多智能体的自动边界怎么划、第一个试点社区怎么谈、没有历史数据怎么冷启动。这三个问题我回去改。</a:t>
             </a:r>
           </a:p>
         </p:txBody>
@@ -939,7 +938,7 @@
           <a:lstStyle/>
           <a:p>
             <a:r>
-              <a:t>它现在的位置：工程原型，没在真实街道试点，没有运营数据，商业模式在探索。今天不是来要投资，是来请教三个问题：多智能体的自动边界怎么划、第一个试点社区怎么谈、没有历史数据怎么冷启动。张奶奶那条路，现在是一句话。</a:t>
+              <a:t>结尾（10 秒）：停一下，看着台下说「张奶奶那条路，现在是一句话」，再说「谢谢各位」。说完就停，不要补话。</a:t>
             </a:r>
           </a:p>
         </p:txBody>
@@ -1009,7 +1008,7 @@
           <a:lstStyle/>
           <a:p>
             <a:r>
-              <a:t>备用页：被追问「为什么不全用大模型」时翻到这页。</a:t>
+              <a:t>附录：若对方想知道怎么在电脑上看实物，翻到这页。</a:t>
             </a:r>
           </a:p>
         </p:txBody>
@@ -1079,77 +1078,7 @@
           <a:lstStyle/>
           <a:p>
             <a:r>
-              <a:t>备用页：被追问「会不会编造、数据安全吗」时翻到这页。</a:t>
-            </a:r>
-          </a:p>
-        </p:txBody>
-      </p:sp>
-      <p:sp>
-        <p:nvSpPr>
-          <p:cNvPr id="4" name="Slide Number Placeholder 3"/>
-          <p:cNvSpPr>
-            <a:spLocks noGrp="1"/>
-          </p:cNvSpPr>
-          <p:nvPr>
-            <p:ph type="sldNum" idx="5" sz="quarter"/>
-          </p:nvPr>
-        </p:nvSpPr>
-        <p:spPr/>
-      </p:sp>
-    </p:spTree>
-  </p:cSld>
-  <p:clrMapOvr>
-    <a:masterClrMapping/>
-  </p:clrMapOvr>
-</p:notes>
-</file>
-
-<file path=ppt/notesSlides/notesSlide18.xml><?xml version="1.0" encoding="utf-8"?>
-<p:notes xmlns:a="http://schemas.openxmlformats.org/drawingml/2006/main" xmlns:p="http://schemas.openxmlformats.org/presentationml/2006/main" xmlns:r="http://schemas.openxmlformats.org/officeDocument/2006/relationships">
-  <p:cSld>
-    <p:spTree>
-      <p:nvGrpSpPr>
-        <p:cNvPr id="1" name=""/>
-        <p:cNvGrpSpPr/>
-        <p:nvPr/>
-      </p:nvGrpSpPr>
-      <p:grpSpPr>
-        <a:xfrm>
-          <a:off x="0" y="0"/>
-          <a:ext cx="0" cy="0"/>
-          <a:chOff x="0" y="0"/>
-          <a:chExt cx="0" cy="0"/>
-        </a:xfrm>
-      </p:grpSpPr>
-      <p:sp>
-        <p:nvSpPr>
-          <p:cNvPr id="2" name="Slide Image Placeholder 1"/>
-          <p:cNvSpPr>
-            <a:spLocks noGrp="1"/>
-          </p:cNvSpPr>
-          <p:nvPr>
-            <p:ph type="sldImg" idx="2"/>
-          </p:nvPr>
-        </p:nvSpPr>
-        <p:spPr/>
-      </p:sp>
-      <p:sp>
-        <p:nvSpPr>
-          <p:cNvPr id="3" name="Notes Placeholder 2"/>
-          <p:cNvSpPr>
-            <a:spLocks noGrp="1"/>
-          </p:cNvSpPr>
-          <p:nvPr>
-            <p:ph type="body" idx="3" sz="quarter"/>
-          </p:nvPr>
-        </p:nvSpPr>
-        <p:spPr/>
-        <p:txBody>
-          <a:bodyPr/>
-          <a:lstStyle/>
-          <a:p>
-            <a:r>
-              <a:t>附录：若对方想知道怎么在电脑上看实物，翻到这页。</a:t>
+              <a:t>附录：四个最常被问的问题与诚实回答，独立阅读时直接看这页。</a:t>
             </a:r>
           </a:p>
         </p:txBody>
@@ -1219,7 +1148,7 @@
           <a:lstStyle/>
           <a:p>
             <a:r>
-              <a:t>各位专家好，我是北京工商大学大二学生。这个项目我一个人做。它服务三种人：居民、网格员、老人。今天七分钟，我讲三件事：怎么做、能干什么、我卡在哪。</a:t>
+              <a:t>四个痛点：网格员一半时间在重复派单；老人不会用手机、报修太难；网上政策没出处不敢信；天气/健康/通知分属不同部门，出事没人主动联动。主动说明：还没在真实街道试点，这是下一步。</a:t>
             </a:r>
           </a:p>
         </p:txBody>
@@ -1289,7 +1218,7 @@
           <a:lstStyle/>
           <a:p>
             <a:r>
-              <a:t>四个痛点：网格员一半时间在重复派单；老人不会用手机、报修太难；网上政策没出处不敢信；天气/健康/通知分属不同部门，出事没人主动联动。主动说明：还没在真实街道试点，这是下一步。</a:t>
+              <a:t>把社区里的事拆开，交给 9 个角色。社区里其实是三种人，所以三个端我分开做。居民端 14 页：居民要的是一句话把事说清，报修、提问都在这儿。网格员端 9 页：网格员要的是待办清楚、有据可查，工单、提案、导出都在这儿。老人端 8 页：老人要的是看得见、按得动，所以大字、语音、长按求助。三拨人要的东西不一样，硬做成一个 App，谁都不好用。</a:t>
             </a:r>
           </a:p>
         </p:txBody>
@@ -1359,7 +1288,7 @@
           <a:lstStyle/>
           <a:p>
             <a:r>
-              <a:t>把社区里的事拆开，交给 9 个角色。社区里其实是三种人，所以三个端我分开做。居民端 14 页：居民要的是一句话把事说清，报修、提问都在这儿。网格员端 9 页：网格员要的是待办清楚、有据可查，工单、提案、导出都在这儿。老人端 8 页：老人要的是看得见、按得动，所以大字、语音、长按求助。三拨人要的东西不一样，硬做成一个 App，谁都不好用。</a:t>
+              <a:t>它是怎么搭起来的：三端共用一个 FastAPI 后端，中间是 9 个角色在黑板协作，最下面是本地数据库（约 50 张表、手机号加密、全流程留痕）。数据库我选了本地 SQLite，不用单独搭服务器，也就没有运维。整条链路不依赖外部服务，一台普通电脑就能跑。</a:t>
             </a:r>
           </a:p>
         </p:txBody>
@@ -1429,7 +1358,7 @@
           <a:lstStyle/>
           <a:p>
             <a:r>
-              <a:t>它是怎么搭起来的：三端共用一个 FastAPI 后端，中间是 9 个角色在黑板协作，最下面是本地数据库（约 50 张表、手机号加密、全流程留痕）。数据库我选了本地 SQLite，不用单独搭服务器，也就没有运维。整条链路不依赖外部服务，一台普通电脑就能跑。</a:t>
+              <a:t>重点页（85 秒）：9 个角色不写死流程，靠黑板 + 5 种消息真来往；每轮过校验员与仲裁器，合规审计一票否决。大模型只做意图/追问/政策生成，状态机、派单、权限、加密永远走规则；四个开关默认关。防编造三招：强制出处、回查数据库、敏感词与权限审计。实话：这是按规则分工协作，不是完全自主的大模型智能体。</a:t>
             </a:r>
           </a:p>
         </p:txBody>
@@ -1499,7 +1428,7 @@
           <a:lstStyle/>
           <a:p>
             <a:r>
-              <a:t>重点页（85 秒）：9 个角色不写死流程，靠黑板 + 5 种消息真来往；每轮过校验员与仲裁器，合规审计一票否决。大模型只做意图/追问/政策生成，状态机、派单、权限、加密永远走规则；四个开关默认关。防编造三招：强制出处、回查数据库、敏感词与权限审计。实话：这是按规则分工协作，不是完全自主的大模型智能体。</a:t>
+              <a:t>居民端（一）报修：提交不用选分类、不用挑部门，一句话说清哪儿坏了；提交后在列表里看进度（上报 → 派单 → 处理 → 办结），每一步带时间。识别到安全隐患（比如燃气味）会自动升级成紧急通知。</a:t>
             </a:r>
           </a:p>
         </p:txBody>
@@ -1569,7 +1498,7 @@
           <a:lstStyle/>
           <a:p>
             <a:r>
-              <a:t>居民端（一）报修：提交不用选分类、不用挑部门，一句话说清哪儿坏了；提交后在列表里看进度（上报 → 派单 → 处理 → 办结），每一步带时间。识别到安全隐患（比如燃气味）会自动升级成紧急通知。</a:t>
+              <a:t>居民端（二）问与议：政策问答的答案下面挂依据——哪份政策、适用哪个地区；查不到依据就转人工，不硬答。邻里议事可以提提案、邻居附议、社区回应。通知分普通/紧急/定时，发出去有已读回执。</a:t>
             </a:r>
           </a:p>
         </p:txBody>
@@ -1639,7 +1568,7 @@
           <a:lstStyle/>
           <a:p>
             <a:r>
-              <a:t>居民端（二）问与议：政策问答的答案下面挂依据——哪份政策、适用哪个地区；查不到依据就转人工，不硬答。邻里议事可以提提案、邻居附议、社区回应。通知分普通/紧急/定时，发出去有已读回执。</a:t>
+              <a:t>网格员端（一）工作台：一页看完待办（要派的、要回访的）、数据概览（红黑榜看哪个小区问题多）、导出（按条件导周报）、以及 AI 助手（用大白话问数据）。</a:t>
             </a:r>
           </a:p>
         </p:txBody>
@@ -1709,7 +1638,7 @@
           <a:lstStyle/>
           <a:p>
             <a:r>
-              <a:t>网格员端（一）工作台：一页看完待办（要派的、要回访的）、数据概览（红黑榜看哪个小区问题多）、导出（按条件导周报）、以及 AI 助手（用大白话问数据）。</a:t>
+              <a:t>网格员端（二）处理与关怀：工单管理能搜索、能导出、能批量派单、能批量关闭；审核退回必须写意见，派单必须填维修人员与电话。点开一条工单，处理过程全程留痕。老年关怀里，用药提醒和紧急联系人都要审核通过才生效；老人求助来了，要确认响应、再结束。</a:t>
             </a:r>
           </a:p>
         </p:txBody>
@@ -4910,7 +4839,7 @@
               </a:lnSpc>
             </a:pPr>
             <a:r>
-              <a:rPr sz="2200" b="0">
+              <a:rPr sz="2400" b="1">
                 <a:solidFill>
                   <a:srgbClr val="FFFFFF"/>
                 </a:solidFill>
@@ -4918,7 +4847,7 @@
                 <a:ea typeface="微软雅黑"/>
                 <a:cs typeface="微软雅黑"/>
               </a:rPr>
-              <a:t>北京工商大学 · 单人开发</a:t>
+              <a:t>步承泽 · 北京工商大学</a:t>
             </a:r>
           </a:p>
         </p:txBody>
@@ -5454,7 +5383,7 @@
                 <a:ea typeface="微软雅黑"/>
                 <a:cs typeface="微软雅黑"/>
               </a:rPr>
-              <a:t>10 / 14</a:t>
+              <a:t>10 / 15</a:t>
             </a:r>
           </a:p>
         </p:txBody>
@@ -5919,7 +5848,7 @@
                 <a:ea typeface="微软雅黑"/>
                 <a:cs typeface="微软雅黑"/>
               </a:rPr>
-              <a:t>11 / 14</a:t>
+              <a:t>11 / 15</a:t>
             </a:r>
           </a:p>
         </p:txBody>
@@ -7025,7 +6954,7 @@
                 <a:ea typeface="微软雅黑"/>
                 <a:cs typeface="微软雅黑"/>
               </a:rPr>
-              <a:t>12 / 14</a:t>
+              <a:t>12 / 15</a:t>
             </a:r>
           </a:p>
         </p:txBody>
@@ -7667,7 +7596,7 @@
                 <a:ea typeface="微软雅黑"/>
                 <a:cs typeface="微软雅黑"/>
               </a:rPr>
-              <a:t>13 / 14</a:t>
+              <a:t>13 / 15</a:t>
             </a:r>
           </a:p>
         </p:txBody>
@@ -8134,15 +8063,15 @@
               </a:lnSpc>
             </a:pPr>
             <a:r>
-              <a:rPr sz="2000" b="1">
-                <a:solidFill>
-                  <a:srgbClr val="FF8C42"/>
-                </a:solidFill>
-                <a:latin typeface="微软雅黑"/>
-                <a:ea typeface="微软雅黑"/>
-                <a:cs typeface="微软雅黑"/>
-              </a:rPr>
-              <a:t>张奶奶那条路，现在是一句话。</a:t>
+              <a:rPr sz="2000" b="0">
+                <a:solidFill>
+                  <a:srgbClr val="6B7485"/>
+                </a:solidFill>
+                <a:latin typeface="微软雅黑"/>
+                <a:ea typeface="微软雅黑"/>
+                <a:cs typeface="微软雅黑"/>
+              </a:rPr>
+              <a:t>这三个问题我回去改。</a:t>
             </a:r>
           </a:p>
         </p:txBody>
@@ -8268,7 +8197,7 @@
                 <a:ea typeface="微软雅黑"/>
                 <a:cs typeface="微软雅黑"/>
               </a:rPr>
-              <a:t>14 / 14</a:t>
+              <a:t>14 / 15</a:t>
             </a:r>
           </a:p>
         </p:txBody>
@@ -8293,20 +8222,102 @@
       <p:grpSpPr/>
       <p:sp>
         <p:nvSpPr>
-          <p:cNvPr id="2" name="Rounded Rectangle 1"/>
+          <p:cNvPr id="2" name="TextBox 1"/>
+          <p:cNvSpPr txBox="1"/>
+          <p:nvPr/>
+        </p:nvSpPr>
+        <p:spPr>
+          <a:xfrm>
+            <a:off x="868680" y="1417320"/>
+            <a:ext cx="10424160" cy="1005840"/>
+          </a:xfrm>
+          <a:prstGeom prst="rect">
+            <a:avLst/>
+          </a:prstGeom>
+          <a:noFill/>
+        </p:spPr>
+        <p:txBody>
+          <a:bodyPr wrap="square">
+            <a:spAutoFit/>
+          </a:bodyPr>
+          <a:lstStyle/>
+          <a:p>
+            <a:pPr algn="ctr">
+              <a:lnSpc>
+                <a:spcPct val="125000"/>
+              </a:lnSpc>
+            </a:pPr>
+            <a:r>
+              <a:rPr sz="4800" b="1">
+                <a:solidFill>
+                  <a:srgbClr val="122A51"/>
+                </a:solidFill>
+                <a:latin typeface="微软雅黑"/>
+                <a:ea typeface="微软雅黑"/>
+                <a:cs typeface="微软雅黑"/>
+              </a:rPr>
+              <a:t>谢谢各位</a:t>
+            </a:r>
+          </a:p>
+        </p:txBody>
+      </p:sp>
+      <p:sp>
+        <p:nvSpPr>
+          <p:cNvPr id="3" name="TextBox 2"/>
+          <p:cNvSpPr txBox="1"/>
+          <p:nvPr/>
+        </p:nvSpPr>
+        <p:spPr>
+          <a:xfrm>
+            <a:off x="868680" y="2606040"/>
+            <a:ext cx="10424160" cy="822960"/>
+          </a:xfrm>
+          <a:prstGeom prst="rect">
+            <a:avLst/>
+          </a:prstGeom>
+          <a:noFill/>
+        </p:spPr>
+        <p:txBody>
+          <a:bodyPr wrap="square">
+            <a:spAutoFit/>
+          </a:bodyPr>
+          <a:lstStyle/>
+          <a:p>
+            <a:pPr algn="ctr">
+              <a:lnSpc>
+                <a:spcPct val="125000"/>
+              </a:lnSpc>
+            </a:pPr>
+            <a:r>
+              <a:rPr sz="3000" b="1">
+                <a:solidFill>
+                  <a:srgbClr val="FF8C42"/>
+                </a:solidFill>
+                <a:latin typeface="微软雅黑"/>
+                <a:ea typeface="微软雅黑"/>
+                <a:cs typeface="微软雅黑"/>
+              </a:rPr>
+              <a:t>张奶奶那条路，现在是一句话。</a:t>
+            </a:r>
+          </a:p>
+        </p:txBody>
+      </p:sp>
+      <p:sp>
+        <p:nvSpPr>
+          <p:cNvPr id="4" name="Rounded Rectangle 3"/>
           <p:cNvSpPr/>
           <p:nvPr/>
         </p:nvSpPr>
         <p:spPr>
           <a:xfrm>
-            <a:off x="548640" y="502920"/>
-            <a:ext cx="128016" cy="566928"/>
+            <a:off x="3200400" y="3794760"/>
+            <a:ext cx="5669280" cy="1325880"/>
           </a:xfrm>
           <a:prstGeom prst="roundRect">
             <a:avLst/>
           </a:prstGeom>
           <a:solidFill>
-            <a:srgbClr val="FF8C42"/>
+            <a:srgbClr val="F2F5FB"/>
           </a:solidFill>
           <a:ln>
             <a:noFill/>
@@ -8337,14 +8348,14 @@
       </p:sp>
       <p:sp>
         <p:nvSpPr>
-          <p:cNvPr id="3" name="TextBox 2"/>
+          <p:cNvPr id="5" name="TextBox 4"/>
           <p:cNvSpPr txBox="1"/>
           <p:nvPr/>
         </p:nvSpPr>
         <p:spPr>
           <a:xfrm>
-            <a:off x="868680" y="457200"/>
-            <a:ext cx="10789920" cy="822960"/>
+            <a:off x="3429000" y="3950208"/>
+            <a:ext cx="5212080" cy="1051560"/>
           </a:xfrm>
           <a:prstGeom prst="rect">
             <a:avLst/>
@@ -8357,35 +8368,71 @@
           </a:bodyPr>
           <a:lstStyle/>
           <a:p>
-            <a:pPr algn="l">
-              <a:lnSpc>
-                <a:spcPct val="125000"/>
-              </a:lnSpc>
-            </a:pPr>
-            <a:r>
-              <a:rPr sz="4000" b="1">
-                <a:solidFill>
-                  <a:srgbClr val="122A51"/>
-                </a:solidFill>
-                <a:latin typeface="微软雅黑"/>
-                <a:ea typeface="微软雅黑"/>
-                <a:cs typeface="微软雅黑"/>
-              </a:rPr>
-              <a:t>备用：为什么规则为主、大模型为辅</a:t>
-            </a:r>
-          </a:p>
-        </p:txBody>
-      </p:sp>
-      <p:sp>
-        <p:nvSpPr>
-          <p:cNvPr id="4" name="TextBox 3"/>
+            <a:pPr algn="ctr">
+              <a:lnSpc>
+                <a:spcPct val="130000"/>
+              </a:lnSpc>
+            </a:pPr>
+            <a:r>
+              <a:rPr sz="1700" b="0">
+                <a:solidFill>
+                  <a:srgbClr val="1B2233"/>
+                </a:solidFill>
+                <a:latin typeface="微软雅黑"/>
+                <a:ea typeface="微软雅黑"/>
+                <a:cs typeface="微软雅黑"/>
+              </a:rPr>
+              <a:t>社区先知 CommunityInsight</a:t>
+            </a:r>
+          </a:p>
+          <a:p>
+            <a:pPr algn="ctr">
+              <a:lnSpc>
+                <a:spcPct val="130000"/>
+              </a:lnSpc>
+            </a:pPr>
+            <a:r>
+              <a:rPr sz="1700" b="0">
+                <a:solidFill>
+                  <a:srgbClr val="1B2233"/>
+                </a:solidFill>
+                <a:latin typeface="微软雅黑"/>
+                <a:ea typeface="微软雅黑"/>
+                <a:cs typeface="微软雅黑"/>
+              </a:rPr>
+              <a:t>基层治理 · 网格化多智能体平台</a:t>
+            </a:r>
+          </a:p>
+          <a:p>
+            <a:pPr algn="ctr">
+              <a:lnSpc>
+                <a:spcPct val="130000"/>
+              </a:lnSpc>
+            </a:pPr>
+            <a:r>
+              <a:rPr sz="1700" b="0">
+                <a:solidFill>
+                  <a:srgbClr val="1B2233"/>
+                </a:solidFill>
+                <a:latin typeface="微软雅黑"/>
+                <a:ea typeface="微软雅黑"/>
+                <a:cs typeface="微软雅黑"/>
+              </a:rPr>
+              <a:t>居民端 / 网格员端 / 老人端</a:t>
+            </a:r>
+          </a:p>
+        </p:txBody>
+      </p:sp>
+      <p:sp>
+        <p:nvSpPr>
+          <p:cNvPr id="6" name="TextBox 5"/>
           <p:cNvSpPr txBox="1"/>
           <p:nvPr/>
         </p:nvSpPr>
         <p:spPr>
           <a:xfrm>
-            <a:off x="868680" y="1828800"/>
-            <a:ext cx="10424160" cy="2743200"/>
+            <a:off x="868680" y="5440680"/>
+            <a:ext cx="10424160" cy="457200"/>
           </a:xfrm>
           <a:prstGeom prst="rect">
             <a:avLst/>
@@ -8398,89 +8445,79 @@
           </a:bodyPr>
           <a:lstStyle/>
           <a:p>
-            <a:pPr algn="l">
-              <a:lnSpc>
-                <a:spcPct val="150000"/>
-              </a:lnSpc>
-            </a:pPr>
-            <a:r>
-              <a:rPr sz="2600" b="0">
-                <a:solidFill>
-                  <a:srgbClr val="1B2233"/>
-                </a:solidFill>
-                <a:latin typeface="微软雅黑"/>
-                <a:ea typeface="微软雅黑"/>
-                <a:cs typeface="微软雅黑"/>
-              </a:rPr>
-              <a:t>接了 DeepSeek，但四个 LLM 开关默认关</a:t>
-            </a:r>
-          </a:p>
-          <a:p>
-            <a:pPr algn="l">
-              <a:lnSpc>
-                <a:spcPct val="150000"/>
-              </a:lnSpc>
-            </a:pPr>
-            <a:r>
-              <a:rPr sz="2600" b="0">
-                <a:solidFill>
-                  <a:srgbClr val="1B2233"/>
-                </a:solidFill>
-                <a:latin typeface="微软雅黑"/>
-                <a:ea typeface="微软雅黑"/>
-                <a:cs typeface="微软雅黑"/>
-              </a:rPr>
-              <a:t>意图识别 / 追问补全 / 政策生成 → 大模型</a:t>
-            </a:r>
-          </a:p>
-          <a:p>
-            <a:pPr algn="l">
-              <a:lnSpc>
-                <a:spcPct val="150000"/>
-              </a:lnSpc>
-            </a:pPr>
-            <a:r>
-              <a:rPr sz="2600" b="0">
-                <a:solidFill>
-                  <a:srgbClr val="1B2233"/>
-                </a:solidFill>
-                <a:latin typeface="微软雅黑"/>
-                <a:ea typeface="微软雅黑"/>
-                <a:cs typeface="微软雅黑"/>
-              </a:rPr>
-              <a:t>状态机 / 派单 / 权限 / 加密 → 永远走规则</a:t>
-            </a:r>
-          </a:p>
-          <a:p>
-            <a:pPr algn="l">
-              <a:lnSpc>
-                <a:spcPct val="150000"/>
-              </a:lnSpc>
-            </a:pPr>
-            <a:r>
-              <a:rPr sz="2600" b="0">
-                <a:solidFill>
-                  <a:srgbClr val="1B2233"/>
-                </a:solidFill>
-                <a:latin typeface="微软雅黑"/>
-                <a:ea typeface="微软雅黑"/>
-                <a:cs typeface="微软雅黑"/>
-              </a:rPr>
-              <a:t>每次调用 3–5 秒超时，自动回落规则</a:t>
-            </a:r>
-          </a:p>
-        </p:txBody>
-      </p:sp>
-      <p:sp>
-        <p:nvSpPr>
-          <p:cNvPr id="5" name="TextBox 4"/>
+            <a:pPr algn="ctr">
+              <a:lnSpc>
+                <a:spcPct val="125000"/>
+              </a:lnSpc>
+            </a:pPr>
+            <a:r>
+              <a:rPr sz="1600" b="0">
+                <a:solidFill>
+                  <a:srgbClr val="6B7485"/>
+                </a:solidFill>
+                <a:latin typeface="微软雅黑"/>
+                <a:ea typeface="微软雅黑"/>
+                <a:cs typeface="微软雅黑"/>
+              </a:rPr>
+              <a:t>步承泽 · 北京工商大学 · 一个人做完需求、架构、开发与测试 · 验证命令都在仓库里，欢迎现场复算</a:t>
+            </a:r>
+          </a:p>
+        </p:txBody>
+      </p:sp>
+      <p:sp>
+        <p:nvSpPr>
+          <p:cNvPr id="7" name="Rectangle 6"/>
+          <p:cNvSpPr/>
+          <p:nvPr/>
+        </p:nvSpPr>
+        <p:spPr>
+          <a:xfrm>
+            <a:off x="548640" y="6510528"/>
+            <a:ext cx="10881360" cy="9525"/>
+          </a:xfrm>
+          <a:prstGeom prst="rect">
+            <a:avLst/>
+          </a:prstGeom>
+          <a:solidFill>
+            <a:srgbClr val="DDE3EE"/>
+          </a:solidFill>
+          <a:ln>
+            <a:noFill/>
+          </a:ln>
+          <a:effectLst/>
+        </p:spPr>
+        <p:style>
+          <a:lnRef idx="1">
+            <a:schemeClr val="accent1"/>
+          </a:lnRef>
+          <a:fillRef idx="3">
+            <a:schemeClr val="accent1"/>
+          </a:fillRef>
+          <a:effectRef idx="2">
+            <a:schemeClr val="accent1"/>
+          </a:effectRef>
+          <a:fontRef idx="minor">
+            <a:schemeClr val="lt1"/>
+          </a:fontRef>
+        </p:style>
+        <p:txBody>
+          <a:bodyPr rtlCol="0" anchor="ctr"/>
+          <a:lstStyle/>
+          <a:p>
+            <a:pPr algn="ctr"/>
+          </a:p>
+        </p:txBody>
+      </p:sp>
+      <p:sp>
+        <p:nvSpPr>
+          <p:cNvPr id="8" name="TextBox 7"/>
           <p:cNvSpPr txBox="1"/>
           <p:nvPr/>
         </p:nvSpPr>
         <p:spPr>
           <a:xfrm>
-            <a:off x="868680" y="5760720"/>
-            <a:ext cx="10424160" cy="548640"/>
+            <a:off x="548640" y="6547104"/>
+            <a:ext cx="7315200" cy="274320"/>
           </a:xfrm>
           <a:prstGeom prst="rect">
             <a:avLst/>
@@ -8499,7 +8536,7 @@
               </a:lnSpc>
             </a:pPr>
             <a:r>
-              <a:rPr sz="2000" b="0">
+              <a:rPr sz="1200" b="0">
                 <a:solidFill>
                   <a:srgbClr val="6B7485"/>
                 </a:solidFill>
@@ -8507,7 +8544,48 @@
                 <a:ea typeface="微软雅黑"/>
                 <a:cs typeface="微软雅黑"/>
               </a:rPr>
-              <a:t>省成本，也保稳定。</a:t>
+              <a:t>社区先知 CommunityInsight</a:t>
+            </a:r>
+          </a:p>
+        </p:txBody>
+      </p:sp>
+      <p:sp>
+        <p:nvSpPr>
+          <p:cNvPr id="9" name="TextBox 8"/>
+          <p:cNvSpPr txBox="1"/>
+          <p:nvPr/>
+        </p:nvSpPr>
+        <p:spPr>
+          <a:xfrm>
+            <a:off x="10058400" y="6547104"/>
+            <a:ext cx="1371600" cy="274320"/>
+          </a:xfrm>
+          <a:prstGeom prst="rect">
+            <a:avLst/>
+          </a:prstGeom>
+          <a:noFill/>
+        </p:spPr>
+        <p:txBody>
+          <a:bodyPr wrap="square">
+            <a:spAutoFit/>
+          </a:bodyPr>
+          <a:lstStyle/>
+          <a:p>
+            <a:pPr algn="r">
+              <a:lnSpc>
+                <a:spcPct val="125000"/>
+              </a:lnSpc>
+            </a:pPr>
+            <a:r>
+              <a:rPr sz="1200" b="0">
+                <a:solidFill>
+                  <a:srgbClr val="6B7485"/>
+                </a:solidFill>
+                <a:latin typeface="微软雅黑"/>
+                <a:ea typeface="微软雅黑"/>
+                <a:cs typeface="微软雅黑"/>
+              </a:rPr>
+              <a:t>15 / 15</a:t>
             </a:r>
           </a:p>
         </p:txBody>
@@ -8610,7 +8688,7 @@
                 <a:ea typeface="微软雅黑"/>
                 <a:cs typeface="微软雅黑"/>
               </a:rPr>
-              <a:t>备用：防编造与数据安全</a:t>
+              <a:t>附录 · 如需看实物</a:t>
             </a:r>
           </a:p>
         </p:txBody>
@@ -8623,8 +8701,8 @@
         </p:nvSpPr>
         <p:spPr>
           <a:xfrm>
-            <a:off x="868680" y="1828800"/>
-            <a:ext cx="10424160" cy="3108960"/>
+            <a:off x="868680" y="1737360"/>
+            <a:ext cx="10424160" cy="2377440"/>
           </a:xfrm>
           <a:prstGeom prst="rect">
             <a:avLst/>
@@ -8651,7 +8729,7 @@
                 <a:ea typeface="微软雅黑"/>
                 <a:cs typeface="微软雅黑"/>
               </a:rPr>
-              <a:t>政策回答强制挂知识库出处，回答完回查数据库</a:t>
+              <a:t>1) 双击项目文件夹里的「启动演示」</a:t>
             </a:r>
           </a:p>
           <a:p>
@@ -8669,7 +8747,7 @@
                 <a:ea typeface="微软雅黑"/>
                 <a:cs typeface="微软雅黑"/>
               </a:rPr>
-              <a:t>敏感词 + 权限再审计一道；查不到就转人工</a:t>
+              <a:t>2) 等它提示「服务已就绪」（首次约 10–20 秒，会自动建好数据库）</a:t>
             </a:r>
           </a:p>
           <a:p>
@@ -8687,17 +8765,84 @@
                 <a:ea typeface="微软雅黑"/>
                 <a:cs typeface="微软雅黑"/>
               </a:rPr>
-              <a:t>手机号 AES-256-GCM 加密存储，展示导出脱敏</a:t>
-            </a:r>
-          </a:p>
+              <a:t>3) 浏览器会自动打开登录页</a:t>
+            </a:r>
+          </a:p>
+        </p:txBody>
+      </p:sp>
+      <p:sp>
+        <p:nvSpPr>
+          <p:cNvPr id="5" name="Rounded Rectangle 4"/>
+          <p:cNvSpPr/>
+          <p:nvPr/>
+        </p:nvSpPr>
+        <p:spPr>
+          <a:xfrm>
+            <a:off x="868680" y="4023360"/>
+            <a:ext cx="10424160" cy="1737360"/>
+          </a:xfrm>
+          <a:prstGeom prst="roundRect">
+            <a:avLst/>
+          </a:prstGeom>
+          <a:solidFill>
+            <a:srgbClr val="F2F5FB"/>
+          </a:solidFill>
+          <a:ln>
+            <a:noFill/>
+          </a:ln>
+          <a:effectLst/>
+        </p:spPr>
+        <p:style>
+          <a:lnRef idx="1">
+            <a:schemeClr val="accent1"/>
+          </a:lnRef>
+          <a:fillRef idx="3">
+            <a:schemeClr val="accent1"/>
+          </a:fillRef>
+          <a:effectRef idx="2">
+            <a:schemeClr val="accent1"/>
+          </a:effectRef>
+          <a:fontRef idx="minor">
+            <a:schemeClr val="lt1"/>
+          </a:fontRef>
+        </p:style>
+        <p:txBody>
+          <a:bodyPr rtlCol="0" anchor="ctr"/>
+          <a:lstStyle/>
+          <a:p>
+            <a:pPr algn="ctr"/>
+          </a:p>
+        </p:txBody>
+      </p:sp>
+      <p:sp>
+        <p:nvSpPr>
+          <p:cNvPr id="6" name="TextBox 5"/>
+          <p:cNvSpPr txBox="1"/>
+          <p:nvPr/>
+        </p:nvSpPr>
+        <p:spPr>
+          <a:xfrm>
+            <a:off x="1143000" y="4206240"/>
+            <a:ext cx="9875520" cy="1463040"/>
+          </a:xfrm>
+          <a:prstGeom prst="rect">
+            <a:avLst/>
+          </a:prstGeom>
+          <a:noFill/>
+        </p:spPr>
+        <p:txBody>
+          <a:bodyPr wrap="square">
+            <a:spAutoFit/>
+          </a:bodyPr>
+          <a:lstStyle/>
           <a:p>
             <a:pPr algn="l">
               <a:lnSpc>
-                <a:spcPct val="150000"/>
-              </a:lnSpc>
-            </a:pPr>
-            <a:r>
-              <a:rPr sz="2600" b="0">
+                <a:spcPct val="135000"/>
+              </a:lnSpc>
+            </a:pPr>
+            <a:r>
+              <a:rPr sz="1900" b="0">
                 <a:solidFill>
                   <a:srgbClr val="1B2233"/>
                 </a:solidFill>
@@ -8705,7 +8850,169 @@
                 <a:ea typeface="微软雅黑"/>
                 <a:cs typeface="微软雅黑"/>
               </a:rPr>
-              <a:t>SQL 参数化；合规审计员有一票否决</a:t>
+              <a:t>演示账号：居民点「居民」免密 · 老年点「老年」免密 · 网格员 demo_grid / demo123</a:t>
+            </a:r>
+          </a:p>
+          <a:p>
+            <a:pPr algn="l">
+              <a:lnSpc>
+                <a:spcPct val="135000"/>
+              </a:lnSpc>
+            </a:pPr>
+            <a:r>
+              <a:rPr sz="1900" b="0">
+                <a:solidFill>
+                  <a:srgbClr val="1B2233"/>
+                </a:solidFill>
+                <a:latin typeface="微软雅黑"/>
+                <a:ea typeface="微软雅黑"/>
+                <a:cs typeface="微软雅黑"/>
+              </a:rPr>
+              <a:t>环境：Windows + Python 3.10 以上；首次启动会自动装依赖</a:t>
+            </a:r>
+          </a:p>
+          <a:p>
+            <a:pPr algn="l">
+              <a:lnSpc>
+                <a:spcPct val="135000"/>
+              </a:lnSpc>
+            </a:pPr>
+            <a:r>
+              <a:rPr sz="1900" b="0">
+                <a:solidFill>
+                  <a:srgbClr val="1B2233"/>
+                </a:solidFill>
+                <a:latin typeface="微软雅黑"/>
+                <a:ea typeface="微软雅黑"/>
+                <a:cs typeface="微软雅黑"/>
+              </a:rPr>
+              <a:t>没有网络也能用：大模型与天气会自动回到规则与本地数据</a:t>
+            </a:r>
+          </a:p>
+        </p:txBody>
+      </p:sp>
+      <p:sp>
+        <p:nvSpPr>
+          <p:cNvPr id="7" name="Rectangle 6"/>
+          <p:cNvSpPr/>
+          <p:nvPr/>
+        </p:nvSpPr>
+        <p:spPr>
+          <a:xfrm>
+            <a:off x="548640" y="6510528"/>
+            <a:ext cx="10881360" cy="9525"/>
+          </a:xfrm>
+          <a:prstGeom prst="rect">
+            <a:avLst/>
+          </a:prstGeom>
+          <a:solidFill>
+            <a:srgbClr val="DDE3EE"/>
+          </a:solidFill>
+          <a:ln>
+            <a:noFill/>
+          </a:ln>
+          <a:effectLst/>
+        </p:spPr>
+        <p:style>
+          <a:lnRef idx="1">
+            <a:schemeClr val="accent1"/>
+          </a:lnRef>
+          <a:fillRef idx="3">
+            <a:schemeClr val="accent1"/>
+          </a:fillRef>
+          <a:effectRef idx="2">
+            <a:schemeClr val="accent1"/>
+          </a:effectRef>
+          <a:fontRef idx="minor">
+            <a:schemeClr val="lt1"/>
+          </a:fontRef>
+        </p:style>
+        <p:txBody>
+          <a:bodyPr rtlCol="0" anchor="ctr"/>
+          <a:lstStyle/>
+          <a:p>
+            <a:pPr algn="ctr"/>
+          </a:p>
+        </p:txBody>
+      </p:sp>
+      <p:sp>
+        <p:nvSpPr>
+          <p:cNvPr id="8" name="TextBox 7"/>
+          <p:cNvSpPr txBox="1"/>
+          <p:nvPr/>
+        </p:nvSpPr>
+        <p:spPr>
+          <a:xfrm>
+            <a:off x="548640" y="6547104"/>
+            <a:ext cx="7315200" cy="274320"/>
+          </a:xfrm>
+          <a:prstGeom prst="rect">
+            <a:avLst/>
+          </a:prstGeom>
+          <a:noFill/>
+        </p:spPr>
+        <p:txBody>
+          <a:bodyPr wrap="square">
+            <a:spAutoFit/>
+          </a:bodyPr>
+          <a:lstStyle/>
+          <a:p>
+            <a:pPr algn="l">
+              <a:lnSpc>
+                <a:spcPct val="125000"/>
+              </a:lnSpc>
+            </a:pPr>
+            <a:r>
+              <a:rPr sz="1200" b="0">
+                <a:solidFill>
+                  <a:srgbClr val="6B7485"/>
+                </a:solidFill>
+                <a:latin typeface="微软雅黑"/>
+                <a:ea typeface="微软雅黑"/>
+                <a:cs typeface="微软雅黑"/>
+              </a:rPr>
+              <a:t>社区先知 CommunityInsight</a:t>
+            </a:r>
+          </a:p>
+        </p:txBody>
+      </p:sp>
+      <p:sp>
+        <p:nvSpPr>
+          <p:cNvPr id="9" name="TextBox 8"/>
+          <p:cNvSpPr txBox="1"/>
+          <p:nvPr/>
+        </p:nvSpPr>
+        <p:spPr>
+          <a:xfrm>
+            <a:off x="10058400" y="6547104"/>
+            <a:ext cx="1371600" cy="274320"/>
+          </a:xfrm>
+          <a:prstGeom prst="rect">
+            <a:avLst/>
+          </a:prstGeom>
+          <a:noFill/>
+        </p:spPr>
+        <p:txBody>
+          <a:bodyPr wrap="square">
+            <a:spAutoFit/>
+          </a:bodyPr>
+          <a:lstStyle/>
+          <a:p>
+            <a:pPr algn="r">
+              <a:lnSpc>
+                <a:spcPct val="125000"/>
+              </a:lnSpc>
+            </a:pPr>
+            <a:r>
+              <a:rPr sz="1200" b="0">
+                <a:solidFill>
+                  <a:srgbClr val="6B7485"/>
+                </a:solidFill>
+                <a:latin typeface="微软雅黑"/>
+                <a:ea typeface="微软雅黑"/>
+                <a:cs typeface="微软雅黑"/>
+              </a:rPr>
+              <a:t>附录</a:t>
             </a:r>
           </a:p>
         </p:txBody>
@@ -8808,433 +9115,6 @@
                 <a:ea typeface="微软雅黑"/>
                 <a:cs typeface="微软雅黑"/>
               </a:rPr>
-              <a:t>附录 · 如需看实物</a:t>
-            </a:r>
-          </a:p>
-        </p:txBody>
-      </p:sp>
-      <p:sp>
-        <p:nvSpPr>
-          <p:cNvPr id="4" name="TextBox 3"/>
-          <p:cNvSpPr txBox="1"/>
-          <p:nvPr/>
-        </p:nvSpPr>
-        <p:spPr>
-          <a:xfrm>
-            <a:off x="868680" y="1737360"/>
-            <a:ext cx="10424160" cy="2377440"/>
-          </a:xfrm>
-          <a:prstGeom prst="rect">
-            <a:avLst/>
-          </a:prstGeom>
-          <a:noFill/>
-        </p:spPr>
-        <p:txBody>
-          <a:bodyPr wrap="square">
-            <a:spAutoFit/>
-          </a:bodyPr>
-          <a:lstStyle/>
-          <a:p>
-            <a:pPr algn="l">
-              <a:lnSpc>
-                <a:spcPct val="150000"/>
-              </a:lnSpc>
-            </a:pPr>
-            <a:r>
-              <a:rPr sz="2600" b="0">
-                <a:solidFill>
-                  <a:srgbClr val="1B2233"/>
-                </a:solidFill>
-                <a:latin typeface="微软雅黑"/>
-                <a:ea typeface="微软雅黑"/>
-                <a:cs typeface="微软雅黑"/>
-              </a:rPr>
-              <a:t>1) 双击项目文件夹里的「启动演示」</a:t>
-            </a:r>
-          </a:p>
-          <a:p>
-            <a:pPr algn="l">
-              <a:lnSpc>
-                <a:spcPct val="150000"/>
-              </a:lnSpc>
-            </a:pPr>
-            <a:r>
-              <a:rPr sz="2600" b="0">
-                <a:solidFill>
-                  <a:srgbClr val="1B2233"/>
-                </a:solidFill>
-                <a:latin typeface="微软雅黑"/>
-                <a:ea typeface="微软雅黑"/>
-                <a:cs typeface="微软雅黑"/>
-              </a:rPr>
-              <a:t>2) 等它提示「服务已就绪」（首次约 10–20 秒，会自动建好数据库）</a:t>
-            </a:r>
-          </a:p>
-          <a:p>
-            <a:pPr algn="l">
-              <a:lnSpc>
-                <a:spcPct val="150000"/>
-              </a:lnSpc>
-            </a:pPr>
-            <a:r>
-              <a:rPr sz="2600" b="0">
-                <a:solidFill>
-                  <a:srgbClr val="1B2233"/>
-                </a:solidFill>
-                <a:latin typeface="微软雅黑"/>
-                <a:ea typeface="微软雅黑"/>
-                <a:cs typeface="微软雅黑"/>
-              </a:rPr>
-              <a:t>3) 浏览器会自动打开登录页</a:t>
-            </a:r>
-          </a:p>
-        </p:txBody>
-      </p:sp>
-      <p:sp>
-        <p:nvSpPr>
-          <p:cNvPr id="5" name="Rounded Rectangle 4"/>
-          <p:cNvSpPr/>
-          <p:nvPr/>
-        </p:nvSpPr>
-        <p:spPr>
-          <a:xfrm>
-            <a:off x="868680" y="4023360"/>
-            <a:ext cx="10424160" cy="1737360"/>
-          </a:xfrm>
-          <a:prstGeom prst="roundRect">
-            <a:avLst/>
-          </a:prstGeom>
-          <a:solidFill>
-            <a:srgbClr val="F2F5FB"/>
-          </a:solidFill>
-          <a:ln>
-            <a:noFill/>
-          </a:ln>
-          <a:effectLst/>
-        </p:spPr>
-        <p:style>
-          <a:lnRef idx="1">
-            <a:schemeClr val="accent1"/>
-          </a:lnRef>
-          <a:fillRef idx="3">
-            <a:schemeClr val="accent1"/>
-          </a:fillRef>
-          <a:effectRef idx="2">
-            <a:schemeClr val="accent1"/>
-          </a:effectRef>
-          <a:fontRef idx="minor">
-            <a:schemeClr val="lt1"/>
-          </a:fontRef>
-        </p:style>
-        <p:txBody>
-          <a:bodyPr rtlCol="0" anchor="ctr"/>
-          <a:lstStyle/>
-          <a:p>
-            <a:pPr algn="ctr"/>
-          </a:p>
-        </p:txBody>
-      </p:sp>
-      <p:sp>
-        <p:nvSpPr>
-          <p:cNvPr id="6" name="TextBox 5"/>
-          <p:cNvSpPr txBox="1"/>
-          <p:nvPr/>
-        </p:nvSpPr>
-        <p:spPr>
-          <a:xfrm>
-            <a:off x="1143000" y="4206240"/>
-            <a:ext cx="9875520" cy="1463040"/>
-          </a:xfrm>
-          <a:prstGeom prst="rect">
-            <a:avLst/>
-          </a:prstGeom>
-          <a:noFill/>
-        </p:spPr>
-        <p:txBody>
-          <a:bodyPr wrap="square">
-            <a:spAutoFit/>
-          </a:bodyPr>
-          <a:lstStyle/>
-          <a:p>
-            <a:pPr algn="l">
-              <a:lnSpc>
-                <a:spcPct val="135000"/>
-              </a:lnSpc>
-            </a:pPr>
-            <a:r>
-              <a:rPr sz="1900" b="0">
-                <a:solidFill>
-                  <a:srgbClr val="1B2233"/>
-                </a:solidFill>
-                <a:latin typeface="微软雅黑"/>
-                <a:ea typeface="微软雅黑"/>
-                <a:cs typeface="微软雅黑"/>
-              </a:rPr>
-              <a:t>演示账号：居民点「居民」免密 · 老年点「老年」免密 · 网格员 demo_grid / demo123</a:t>
-            </a:r>
-          </a:p>
-          <a:p>
-            <a:pPr algn="l">
-              <a:lnSpc>
-                <a:spcPct val="135000"/>
-              </a:lnSpc>
-            </a:pPr>
-            <a:r>
-              <a:rPr sz="1900" b="0">
-                <a:solidFill>
-                  <a:srgbClr val="1B2233"/>
-                </a:solidFill>
-                <a:latin typeface="微软雅黑"/>
-                <a:ea typeface="微软雅黑"/>
-                <a:cs typeface="微软雅黑"/>
-              </a:rPr>
-              <a:t>环境：Windows + Python 3.10 以上；首次启动会自动装依赖</a:t>
-            </a:r>
-          </a:p>
-          <a:p>
-            <a:pPr algn="l">
-              <a:lnSpc>
-                <a:spcPct val="135000"/>
-              </a:lnSpc>
-            </a:pPr>
-            <a:r>
-              <a:rPr sz="1900" b="0">
-                <a:solidFill>
-                  <a:srgbClr val="1B2233"/>
-                </a:solidFill>
-                <a:latin typeface="微软雅黑"/>
-                <a:ea typeface="微软雅黑"/>
-                <a:cs typeface="微软雅黑"/>
-              </a:rPr>
-              <a:t>没有网络也能用：大模型与天气会自动回到规则与本地数据</a:t>
-            </a:r>
-          </a:p>
-        </p:txBody>
-      </p:sp>
-      <p:sp>
-        <p:nvSpPr>
-          <p:cNvPr id="7" name="Rectangle 6"/>
-          <p:cNvSpPr/>
-          <p:nvPr/>
-        </p:nvSpPr>
-        <p:spPr>
-          <a:xfrm>
-            <a:off x="548640" y="6510528"/>
-            <a:ext cx="10881360" cy="9525"/>
-          </a:xfrm>
-          <a:prstGeom prst="rect">
-            <a:avLst/>
-          </a:prstGeom>
-          <a:solidFill>
-            <a:srgbClr val="DDE3EE"/>
-          </a:solidFill>
-          <a:ln>
-            <a:noFill/>
-          </a:ln>
-          <a:effectLst/>
-        </p:spPr>
-        <p:style>
-          <a:lnRef idx="1">
-            <a:schemeClr val="accent1"/>
-          </a:lnRef>
-          <a:fillRef idx="3">
-            <a:schemeClr val="accent1"/>
-          </a:fillRef>
-          <a:effectRef idx="2">
-            <a:schemeClr val="accent1"/>
-          </a:effectRef>
-          <a:fontRef idx="minor">
-            <a:schemeClr val="lt1"/>
-          </a:fontRef>
-        </p:style>
-        <p:txBody>
-          <a:bodyPr rtlCol="0" anchor="ctr"/>
-          <a:lstStyle/>
-          <a:p>
-            <a:pPr algn="ctr"/>
-          </a:p>
-        </p:txBody>
-      </p:sp>
-      <p:sp>
-        <p:nvSpPr>
-          <p:cNvPr id="8" name="TextBox 7"/>
-          <p:cNvSpPr txBox="1"/>
-          <p:nvPr/>
-        </p:nvSpPr>
-        <p:spPr>
-          <a:xfrm>
-            <a:off x="548640" y="6547104"/>
-            <a:ext cx="7315200" cy="274320"/>
-          </a:xfrm>
-          <a:prstGeom prst="rect">
-            <a:avLst/>
-          </a:prstGeom>
-          <a:noFill/>
-        </p:spPr>
-        <p:txBody>
-          <a:bodyPr wrap="square">
-            <a:spAutoFit/>
-          </a:bodyPr>
-          <a:lstStyle/>
-          <a:p>
-            <a:pPr algn="l">
-              <a:lnSpc>
-                <a:spcPct val="125000"/>
-              </a:lnSpc>
-            </a:pPr>
-            <a:r>
-              <a:rPr sz="1200" b="0">
-                <a:solidFill>
-                  <a:srgbClr val="6B7485"/>
-                </a:solidFill>
-                <a:latin typeface="微软雅黑"/>
-                <a:ea typeface="微软雅黑"/>
-                <a:cs typeface="微软雅黑"/>
-              </a:rPr>
-              <a:t>社区先知 CommunityInsight</a:t>
-            </a:r>
-          </a:p>
-        </p:txBody>
-      </p:sp>
-      <p:sp>
-        <p:nvSpPr>
-          <p:cNvPr id="9" name="TextBox 8"/>
-          <p:cNvSpPr txBox="1"/>
-          <p:nvPr/>
-        </p:nvSpPr>
-        <p:spPr>
-          <a:xfrm>
-            <a:off x="10058400" y="6547104"/>
-            <a:ext cx="1371600" cy="274320"/>
-          </a:xfrm>
-          <a:prstGeom prst="rect">
-            <a:avLst/>
-          </a:prstGeom>
-          <a:noFill/>
-        </p:spPr>
-        <p:txBody>
-          <a:bodyPr wrap="square">
-            <a:spAutoFit/>
-          </a:bodyPr>
-          <a:lstStyle/>
-          <a:p>
-            <a:pPr algn="r">
-              <a:lnSpc>
-                <a:spcPct val="125000"/>
-              </a:lnSpc>
-            </a:pPr>
-            <a:r>
-              <a:rPr sz="1200" b="0">
-                <a:solidFill>
-                  <a:srgbClr val="6B7485"/>
-                </a:solidFill>
-                <a:latin typeface="微软雅黑"/>
-                <a:ea typeface="微软雅黑"/>
-                <a:cs typeface="微软雅黑"/>
-              </a:rPr>
-              <a:t>附录</a:t>
-            </a:r>
-          </a:p>
-        </p:txBody>
-      </p:sp>
-    </p:spTree>
-  </p:cSld>
-  <p:clrMapOvr>
-    <a:masterClrMapping/>
-  </p:clrMapOvr>
-</p:sld>
-</file>
-
-<file path=ppt/slides/slide18.xml><?xml version="1.0" encoding="utf-8"?>
-<p:sld xmlns:a="http://schemas.openxmlformats.org/drawingml/2006/main" xmlns:p="http://schemas.openxmlformats.org/presentationml/2006/main" xmlns:r="http://schemas.openxmlformats.org/officeDocument/2006/relationships">
-  <p:cSld>
-    <p:spTree>
-      <p:nvGrpSpPr>
-        <p:cNvPr id="1" name=""/>
-        <p:cNvGrpSpPr/>
-        <p:nvPr/>
-      </p:nvGrpSpPr>
-      <p:grpSpPr/>
-      <p:sp>
-        <p:nvSpPr>
-          <p:cNvPr id="2" name="Rounded Rectangle 1"/>
-          <p:cNvSpPr/>
-          <p:nvPr/>
-        </p:nvSpPr>
-        <p:spPr>
-          <a:xfrm>
-            <a:off x="548640" y="502920"/>
-            <a:ext cx="128016" cy="566928"/>
-          </a:xfrm>
-          <a:prstGeom prst="roundRect">
-            <a:avLst/>
-          </a:prstGeom>
-          <a:solidFill>
-            <a:srgbClr val="FF8C42"/>
-          </a:solidFill>
-          <a:ln>
-            <a:noFill/>
-          </a:ln>
-          <a:effectLst/>
-        </p:spPr>
-        <p:style>
-          <a:lnRef idx="1">
-            <a:schemeClr val="accent1"/>
-          </a:lnRef>
-          <a:fillRef idx="3">
-            <a:schemeClr val="accent1"/>
-          </a:fillRef>
-          <a:effectRef idx="2">
-            <a:schemeClr val="accent1"/>
-          </a:effectRef>
-          <a:fontRef idx="minor">
-            <a:schemeClr val="lt1"/>
-          </a:fontRef>
-        </p:style>
-        <p:txBody>
-          <a:bodyPr rtlCol="0" anchor="ctr"/>
-          <a:lstStyle/>
-          <a:p>
-            <a:pPr algn="ctr"/>
-          </a:p>
-        </p:txBody>
-      </p:sp>
-      <p:sp>
-        <p:nvSpPr>
-          <p:cNvPr id="3" name="TextBox 2"/>
-          <p:cNvSpPr txBox="1"/>
-          <p:nvPr/>
-        </p:nvSpPr>
-        <p:spPr>
-          <a:xfrm>
-            <a:off x="868680" y="457200"/>
-            <a:ext cx="10789920" cy="822960"/>
-          </a:xfrm>
-          <a:prstGeom prst="rect">
-            <a:avLst/>
-          </a:prstGeom>
-          <a:noFill/>
-        </p:spPr>
-        <p:txBody>
-          <a:bodyPr wrap="square">
-            <a:spAutoFit/>
-          </a:bodyPr>
-          <a:lstStyle/>
-          <a:p>
-            <a:pPr algn="l">
-              <a:lnSpc>
-                <a:spcPct val="125000"/>
-              </a:lnSpc>
-            </a:pPr>
-            <a:r>
-              <a:rPr sz="4000" b="1">
-                <a:solidFill>
-                  <a:srgbClr val="122A51"/>
-                </a:solidFill>
-                <a:latin typeface="微软雅黑"/>
-                <a:ea typeface="微软雅黑"/>
-                <a:cs typeface="微软雅黑"/>
-              </a:rPr>
               <a:t>附录 · 最常被问的四个问题</a:t>
             </a:r>
           </a:p>
@@ -10458,7 +10338,7 @@
                 <a:ea typeface="微软雅黑"/>
                 <a:cs typeface="微软雅黑"/>
               </a:rPr>
-              <a:t>2 / 14</a:t>
+              <a:t>2 / 15</a:t>
             </a:r>
           </a:p>
         </p:txBody>
@@ -11742,7 +11622,7 @@
                 <a:ea typeface="微软雅黑"/>
                 <a:cs typeface="微软雅黑"/>
               </a:rPr>
-              <a:t>3 / 14</a:t>
+              <a:t>3 / 15</a:t>
             </a:r>
           </a:p>
         </p:txBody>
@@ -13261,7 +13141,7 @@
                 <a:ea typeface="微软雅黑"/>
                 <a:cs typeface="微软雅黑"/>
               </a:rPr>
-              <a:t>4 / 14</a:t>
+              <a:t>4 / 15</a:t>
             </a:r>
           </a:p>
         </p:txBody>
@@ -13771,7 +13651,7 @@
                 <a:ea typeface="微软雅黑"/>
                 <a:cs typeface="微软雅黑"/>
               </a:rPr>
-              <a:t>5 / 14</a:t>
+              <a:t>5 / 15</a:t>
             </a:r>
           </a:p>
         </p:txBody>
@@ -14248,7 +14128,7 @@
                 <a:ea typeface="微软雅黑"/>
                 <a:cs typeface="微软雅黑"/>
               </a:rPr>
-              <a:t>6 / 14</a:t>
+              <a:t>6 / 15</a:t>
             </a:r>
           </a:p>
         </p:txBody>
@@ -14731,7 +14611,7 @@
                 <a:ea typeface="微软雅黑"/>
                 <a:cs typeface="微软雅黑"/>
               </a:rPr>
-              <a:t>7 / 14</a:t>
+              <a:t>7 / 15</a:t>
             </a:r>
           </a:p>
         </p:txBody>
@@ -15120,7 +15000,7 @@
                 <a:ea typeface="微软雅黑"/>
                 <a:cs typeface="微软雅黑"/>
               </a:rPr>
-              <a:t>8 / 14</a:t>
+              <a:t>8 / 15</a:t>
             </a:r>
           </a:p>
         </p:txBody>
@@ -15520,7 +15400,7 @@
                 <a:ea typeface="微软雅黑"/>
                 <a:cs typeface="微软雅黑"/>
               </a:rPr>
-              <a:t>9 / 14</a:t>
+              <a:t>9 / 15</a:t>
             </a:r>
           </a:p>
         </p:txBody>

--- a/docs/competition/9月22日路演-社区先知.pptx
+++ b/docs/competition/9月22日路演-社区先知.pptx
@@ -938,7 +938,7 @@
           <a:lstStyle/>
           <a:p>
             <a:r>
-              <a:t>结尾（10 秒）：停一下，看着台下说「张奶奶那条路，现在是一句话」，再说「谢谢各位」。说完就停，不要补话。</a:t>
+              <a:t>结尾（10 秒）：停一下，看着台下说「张奶奶那条路，现在是一句话」，再说「谢谢各位」。说完就停，不要补话。（屏幕上只有「谢谢各位」，这句话是**说出来的**。）</a:t>
             </a:r>
           </a:p>
         </p:txBody>
@@ -8228,8 +8228,8 @@
         </p:nvSpPr>
         <p:spPr>
           <a:xfrm>
-            <a:off x="868680" y="1417320"/>
-            <a:ext cx="10424160" cy="1005840"/>
+            <a:off x="868680" y="1691640"/>
+            <a:ext cx="10424160" cy="1188720"/>
           </a:xfrm>
           <a:prstGeom prst="rect">
             <a:avLst/>
@@ -8248,7 +8248,7 @@
               </a:lnSpc>
             </a:pPr>
             <a:r>
-              <a:rPr sz="4800" b="1">
+              <a:rPr sz="5400" b="1">
                 <a:solidFill>
                   <a:srgbClr val="122A51"/>
                 </a:solidFill>
@@ -8263,55 +8263,14 @@
       </p:sp>
       <p:sp>
         <p:nvSpPr>
-          <p:cNvPr id="3" name="TextBox 2"/>
-          <p:cNvSpPr txBox="1"/>
-          <p:nvPr/>
-        </p:nvSpPr>
-        <p:spPr>
-          <a:xfrm>
-            <a:off x="868680" y="2606040"/>
-            <a:ext cx="10424160" cy="822960"/>
-          </a:xfrm>
-          <a:prstGeom prst="rect">
-            <a:avLst/>
-          </a:prstGeom>
-          <a:noFill/>
-        </p:spPr>
-        <p:txBody>
-          <a:bodyPr wrap="square">
-            <a:spAutoFit/>
-          </a:bodyPr>
-          <a:lstStyle/>
-          <a:p>
-            <a:pPr algn="ctr">
-              <a:lnSpc>
-                <a:spcPct val="125000"/>
-              </a:lnSpc>
-            </a:pPr>
-            <a:r>
-              <a:rPr sz="3000" b="1">
-                <a:solidFill>
-                  <a:srgbClr val="FF8C42"/>
-                </a:solidFill>
-                <a:latin typeface="微软雅黑"/>
-                <a:ea typeface="微软雅黑"/>
-                <a:cs typeface="微软雅黑"/>
-              </a:rPr>
-              <a:t>张奶奶那条路，现在是一句话。</a:t>
-            </a:r>
-          </a:p>
-        </p:txBody>
-      </p:sp>
-      <p:sp>
-        <p:nvSpPr>
-          <p:cNvPr id="4" name="Rounded Rectangle 3"/>
+          <p:cNvPr id="3" name="Rounded Rectangle 2"/>
           <p:cNvSpPr/>
           <p:nvPr/>
         </p:nvSpPr>
         <p:spPr>
           <a:xfrm>
-            <a:off x="3200400" y="3794760"/>
-            <a:ext cx="5669280" cy="1325880"/>
+            <a:off x="2926080" y="3246120"/>
+            <a:ext cx="6217920" cy="1691640"/>
           </a:xfrm>
           <a:prstGeom prst="roundRect">
             <a:avLst/>
@@ -8348,14 +8307,14 @@
       </p:sp>
       <p:sp>
         <p:nvSpPr>
-          <p:cNvPr id="5" name="TextBox 4"/>
+          <p:cNvPr id="4" name="TextBox 3"/>
           <p:cNvSpPr txBox="1"/>
           <p:nvPr/>
         </p:nvSpPr>
         <p:spPr>
           <a:xfrm>
-            <a:off x="3429000" y="3950208"/>
-            <a:ext cx="5212080" cy="1051560"/>
+            <a:off x="3154680" y="3474720"/>
+            <a:ext cx="5760720" cy="1280160"/>
           </a:xfrm>
           <a:prstGeom prst="rect">
             <a:avLst/>
@@ -8370,11 +8329,11 @@
           <a:p>
             <a:pPr algn="ctr">
               <a:lnSpc>
-                <a:spcPct val="130000"/>
-              </a:lnSpc>
-            </a:pPr>
-            <a:r>
-              <a:rPr sz="1700" b="0">
+                <a:spcPct val="135000"/>
+              </a:lnSpc>
+            </a:pPr>
+            <a:r>
+              <a:rPr sz="1900" b="0">
                 <a:solidFill>
                   <a:srgbClr val="1B2233"/>
                 </a:solidFill>
@@ -8388,11 +8347,11 @@
           <a:p>
             <a:pPr algn="ctr">
               <a:lnSpc>
-                <a:spcPct val="130000"/>
-              </a:lnSpc>
-            </a:pPr>
-            <a:r>
-              <a:rPr sz="1700" b="0">
+                <a:spcPct val="135000"/>
+              </a:lnSpc>
+            </a:pPr>
+            <a:r>
+              <a:rPr sz="1900" b="0">
                 <a:solidFill>
                   <a:srgbClr val="1B2233"/>
                 </a:solidFill>
@@ -8406,11 +8365,11 @@
           <a:p>
             <a:pPr algn="ctr">
               <a:lnSpc>
-                <a:spcPct val="130000"/>
-              </a:lnSpc>
-            </a:pPr>
-            <a:r>
-              <a:rPr sz="1700" b="0">
+                <a:spcPct val="135000"/>
+              </a:lnSpc>
+            </a:pPr>
+            <a:r>
+              <a:rPr sz="1900" b="0">
                 <a:solidFill>
                   <a:srgbClr val="1B2233"/>
                 </a:solidFill>
@@ -8425,13 +8384,13 @@
       </p:sp>
       <p:sp>
         <p:nvSpPr>
-          <p:cNvPr id="6" name="TextBox 5"/>
+          <p:cNvPr id="5" name="TextBox 4"/>
           <p:cNvSpPr txBox="1"/>
           <p:nvPr/>
         </p:nvSpPr>
         <p:spPr>
           <a:xfrm>
-            <a:off x="868680" y="5440680"/>
+            <a:off x="868680" y="5257800"/>
             <a:ext cx="10424160" cy="457200"/>
           </a:xfrm>
           <a:prstGeom prst="rect">
@@ -8451,6 +8410,47 @@
               </a:lnSpc>
             </a:pPr>
             <a:r>
+              <a:rPr sz="1800" b="0">
+                <a:solidFill>
+                  <a:srgbClr val="1B2233"/>
+                </a:solidFill>
+                <a:latin typeface="微软雅黑"/>
+                <a:ea typeface="微软雅黑"/>
+                <a:cs typeface="微软雅黑"/>
+              </a:rPr>
+              <a:t>步承泽 · 北京工商大学 · 一个人做完需求、架构、开发与测试</a:t>
+            </a:r>
+          </a:p>
+        </p:txBody>
+      </p:sp>
+      <p:sp>
+        <p:nvSpPr>
+          <p:cNvPr id="6" name="TextBox 5"/>
+          <p:cNvSpPr txBox="1"/>
+          <p:nvPr/>
+        </p:nvSpPr>
+        <p:spPr>
+          <a:xfrm>
+            <a:off x="868680" y="5760720"/>
+            <a:ext cx="10424160" cy="457200"/>
+          </a:xfrm>
+          <a:prstGeom prst="rect">
+            <a:avLst/>
+          </a:prstGeom>
+          <a:noFill/>
+        </p:spPr>
+        <p:txBody>
+          <a:bodyPr wrap="square">
+            <a:spAutoFit/>
+          </a:bodyPr>
+          <a:lstStyle/>
+          <a:p>
+            <a:pPr algn="ctr">
+              <a:lnSpc>
+                <a:spcPct val="125000"/>
+              </a:lnSpc>
+            </a:pPr>
+            <a:r>
               <a:rPr sz="1600" b="0">
                 <a:solidFill>
                   <a:srgbClr val="6B7485"/>
@@ -8459,7 +8459,7 @@
                 <a:ea typeface="微软雅黑"/>
                 <a:cs typeface="微软雅黑"/>
               </a:rPr>
-              <a:t>步承泽 · 北京工商大学 · 一个人做完需求、架构、开发与测试 · 验证命令都在仓库里，欢迎现场复算</a:t>
+              <a:t>全部验证命令都在仓库里，欢迎现场复算</a:t>
             </a:r>
           </a:p>
         </p:txBody>

--- a/docs/competition/9月22日路演-社区先知.pptx
+++ b/docs/competition/9月22日路演-社区先知.pptx
@@ -1428,7 +1428,7 @@
           <a:lstStyle/>
           <a:p>
             <a:r>
-              <a:t>居民端（一）报修：提交不用选分类、不用挑部门，一句话说清哪儿坏了；提交后在列表里看进度（上报 → 派单 → 处理 → 办结），每一步带时间。识别到安全隐患（比如燃气味）会自动升级成紧急通知。</a:t>
+              <a:t>居民端（一）报修：说一句「我家厨房水管漏水了」，它只追问关键项，然后把报修单整理好（问题 / 分类 / 紧急程度），**要居民自己点「确认提交」才真的提交——我不让它自己提交**。也支持手动填表提交。识别到安全隐患（比如燃气味）会自动升级成紧急通知。</a:t>
             </a:r>
           </a:p>
         </p:txBody>
@@ -1638,7 +1638,7 @@
           <a:lstStyle/>
           <a:p>
             <a:r>
-              <a:t>网格员端（二）处理与关怀：工单管理能搜索、能导出、能批量派单、能批量关闭；审核退回必须写意见，派单必须填维修人员与电话。点开一条工单，处理过程全程留痕。老年关怀里，用药提醒和紧急联系人都要审核通过才生效；老人求助来了，要确认响应、再结束。</a:t>
+              <a:t>网格员端（二）处理与关怀：工单管理能搜索、能导出、能批量派单、能批量关闭；**点开一行工单，审核 / 派单 / 处理都在这里做**，退回必须写意见，派单必须填维修人员与电话；每一步都有留痕，事后能复盘。老年关怀里，用药提醒和紧急联系人都要审核通过才生效；老人求助来了，要确认响应、再结束。</a:t>
             </a:r>
           </a:p>
         </p:txBody>
@@ -13754,7 +13754,7 @@
                 <a:ea typeface="微软雅黑"/>
                 <a:cs typeface="微软雅黑"/>
               </a:rPr>
-              <a:t>居民端：报修，一句话提交</a:t>
+              <a:t>居民端：报修，一句话就能说清</a:t>
             </a:r>
           </a:p>
         </p:txBody>
@@ -13767,8 +13767,8 @@
         </p:nvSpPr>
         <p:spPr>
           <a:xfrm>
-            <a:off x="868680" y="1828800"/>
-            <a:ext cx="4846320" cy="2377440"/>
+            <a:off x="868680" y="1572768"/>
+            <a:ext cx="10424160" cy="1097280"/>
           </a:xfrm>
           <a:prstGeom prst="rect">
             <a:avLst/>
@@ -13783,11 +13783,11 @@
           <a:p>
             <a:pPr algn="l">
               <a:lnSpc>
-                <a:spcPct val="150000"/>
-              </a:lnSpc>
-            </a:pPr>
-            <a:r>
-              <a:rPr sz="2400" b="0">
+                <a:spcPct val="125000"/>
+              </a:lnSpc>
+            </a:pPr>
+            <a:r>
+              <a:rPr sz="2200" b="0">
                 <a:solidFill>
                   <a:srgbClr val="1B2233"/>
                 </a:solidFill>
@@ -13795,17 +13795,17 @@
                 <a:ea typeface="微软雅黑"/>
                 <a:cs typeface="微软雅黑"/>
               </a:rPr>
-              <a:t>不用选分类、不用挑部门</a:t>
+              <a:t>说一句「我家厨房水管漏水了」，它整理成报修单；</a:t>
             </a:r>
           </a:p>
           <a:p>
             <a:pPr algn="l">
               <a:lnSpc>
-                <a:spcPct val="150000"/>
-              </a:lnSpc>
-            </a:pPr>
-            <a:r>
-              <a:rPr sz="2400" b="0">
+                <a:spcPct val="125000"/>
+              </a:lnSpc>
+            </a:pPr>
+            <a:r>
+              <a:rPr sz="2200" b="0">
                 <a:solidFill>
                   <a:srgbClr val="1B2233"/>
                 </a:solidFill>
@@ -13813,73 +13813,14 @@
                 <a:ea typeface="微软雅黑"/>
                 <a:cs typeface="微软雅黑"/>
               </a:rPr>
-              <a:t>一句话说清哪儿坏了</a:t>
-            </a:r>
-          </a:p>
-          <a:p>
-            <a:pPr algn="l">
-              <a:lnSpc>
-                <a:spcPct val="150000"/>
-              </a:lnSpc>
-            </a:pPr>
-            <a:r>
-              <a:rPr sz="2400" b="0">
-                <a:solidFill>
-                  <a:srgbClr val="1B2233"/>
-                </a:solidFill>
-                <a:latin typeface="微软雅黑"/>
-                <a:ea typeface="微软雅黑"/>
-                <a:cs typeface="微软雅黑"/>
-              </a:rPr>
-              <a:t>进度看得见：上报 → 派单 → 办结</a:t>
-            </a:r>
-          </a:p>
-        </p:txBody>
-      </p:sp>
-      <p:sp>
-        <p:nvSpPr>
-          <p:cNvPr id="5" name="TextBox 4"/>
-          <p:cNvSpPr txBox="1"/>
-          <p:nvPr/>
-        </p:nvSpPr>
-        <p:spPr>
-          <a:xfrm>
-            <a:off x="868680" y="4480560"/>
-            <a:ext cx="4846320" cy="1097280"/>
-          </a:xfrm>
-          <a:prstGeom prst="rect">
-            <a:avLst/>
-          </a:prstGeom>
-          <a:noFill/>
-        </p:spPr>
-        <p:txBody>
-          <a:bodyPr wrap="square">
-            <a:spAutoFit/>
-          </a:bodyPr>
-          <a:lstStyle/>
-          <a:p>
-            <a:pPr algn="l">
-              <a:lnSpc>
-                <a:spcPct val="125000"/>
-              </a:lnSpc>
-            </a:pPr>
-            <a:r>
-              <a:rPr sz="2000" b="1">
-                <a:solidFill>
-                  <a:srgbClr val="FF8C42"/>
-                </a:solidFill>
-                <a:latin typeface="微软雅黑"/>
-                <a:ea typeface="微软雅黑"/>
-                <a:cs typeface="微软雅黑"/>
-              </a:rPr>
-              <a:t>安全隐患自动升级为紧急通知</a:t>
+              <a:t>要我自己点「确认提交」才提交——我不让它自己提交。</a:t>
             </a:r>
           </a:p>
         </p:txBody>
       </p:sp>
       <p:pic>
         <p:nvPicPr>
-          <p:cNvPr id="6" name="Picture 5" descr="10-提交报修表单.png"/>
+          <p:cNvPr id="5" name="Picture 4" descr="18-居民端-一句话报修.png"/>
           <p:cNvPicPr>
             <a:picLocks noChangeAspect="1"/>
           </p:cNvPicPr>
@@ -13893,8 +13834,8 @@
         </p:blipFill>
         <p:spPr>
           <a:xfrm>
-            <a:off x="6035040" y="1554480"/>
-            <a:ext cx="3017520" cy="1885950"/>
+            <a:off x="868680" y="2834640"/>
+            <a:ext cx="3291840" cy="2057400"/>
           </a:xfrm>
           <a:prstGeom prst="rect">
             <a:avLst/>
@@ -13903,14 +13844,14 @@
       </p:pic>
       <p:sp>
         <p:nvSpPr>
-          <p:cNvPr id="7" name="TextBox 6"/>
+          <p:cNvPr id="6" name="TextBox 5"/>
           <p:cNvSpPr txBox="1"/>
           <p:nvPr/>
         </p:nvSpPr>
         <p:spPr>
           <a:xfrm>
-            <a:off x="6035040" y="3493008"/>
-            <a:ext cx="3017520" cy="365760"/>
+            <a:off x="868680" y="4983480"/>
+            <a:ext cx="3291840" cy="731520"/>
           </a:xfrm>
           <a:prstGeom prst="rect">
             <a:avLst/>
@@ -13929,22 +13870,22 @@
               </a:lnSpc>
             </a:pPr>
             <a:r>
-              <a:rPr sz="1700" b="1">
-                <a:solidFill>
-                  <a:srgbClr val="122A51"/>
-                </a:solidFill>
-                <a:latin typeface="微软雅黑"/>
-                <a:ea typeface="微软雅黑"/>
-                <a:cs typeface="微软雅黑"/>
-              </a:rPr>
-              <a:t>① 一句话提交</a:t>
+              <a:rPr sz="1500" b="0">
+                <a:solidFill>
+                  <a:srgbClr val="6B7485"/>
+                </a:solidFill>
+                <a:latin typeface="微软雅黑"/>
+                <a:ea typeface="微软雅黑"/>
+                <a:cs typeface="微软雅黑"/>
+              </a:rPr>
+              <a:t>① 一句话，AI 理出问题/分类/紧急程度</a:t>
             </a:r>
           </a:p>
         </p:txBody>
       </p:sp>
       <p:pic>
         <p:nvPicPr>
-          <p:cNvPr id="8" name="Picture 7" descr="09-报修列表与状态.png"/>
+          <p:cNvPr id="7" name="Picture 6" descr="19-居民端-报修已生成.png"/>
           <p:cNvPicPr>
             <a:picLocks noChangeAspect="1"/>
           </p:cNvPicPr>
@@ -13958,8 +13899,8 @@
         </p:blipFill>
         <p:spPr>
           <a:xfrm>
-            <a:off x="6035040" y="3977639"/>
-            <a:ext cx="3017520" cy="1885950"/>
+            <a:off x="4434840" y="2834640"/>
+            <a:ext cx="3291840" cy="2057400"/>
           </a:xfrm>
           <a:prstGeom prst="rect">
             <a:avLst/>
@@ -13968,14 +13909,14 @@
       </p:pic>
       <p:sp>
         <p:nvSpPr>
-          <p:cNvPr id="9" name="TextBox 8"/>
+          <p:cNvPr id="8" name="TextBox 7"/>
           <p:cNvSpPr txBox="1"/>
           <p:nvPr/>
         </p:nvSpPr>
         <p:spPr>
           <a:xfrm>
-            <a:off x="6035040" y="5916168"/>
-            <a:ext cx="3017520" cy="365760"/>
+            <a:off x="4434840" y="4983480"/>
+            <a:ext cx="3291840" cy="731520"/>
           </a:xfrm>
           <a:prstGeom prst="rect">
             <a:avLst/>
@@ -13994,22 +13935,128 @@
               </a:lnSpc>
             </a:pPr>
             <a:r>
-              <a:rPr sz="1700" b="1">
-                <a:solidFill>
-                  <a:srgbClr val="122A51"/>
-                </a:solidFill>
-                <a:latin typeface="微软雅黑"/>
-                <a:ea typeface="微软雅黑"/>
-                <a:cs typeface="微软雅黑"/>
-              </a:rPr>
-              <a:t>② 进度一目了然</a:t>
-            </a:r>
-          </a:p>
-        </p:txBody>
-      </p:sp>
-      <p:sp>
-        <p:nvSpPr>
-          <p:cNvPr id="10" name="Rectangle 9"/>
+              <a:rPr sz="1500" b="0">
+                <a:solidFill>
+                  <a:srgbClr val="6B7485"/>
+                </a:solidFill>
+                <a:latin typeface="微软雅黑"/>
+                <a:ea typeface="微软雅黑"/>
+                <a:cs typeface="微软雅黑"/>
+              </a:rPr>
+              <a:t>② 我确认后，工单才生成</a:t>
+            </a:r>
+          </a:p>
+        </p:txBody>
+      </p:sp>
+      <p:pic>
+        <p:nvPicPr>
+          <p:cNvPr id="9" name="Picture 8" descr="10-提交报修表单.png"/>
+          <p:cNvPicPr>
+            <a:picLocks noChangeAspect="1"/>
+          </p:cNvPicPr>
+          <p:nvPr/>
+        </p:nvPicPr>
+        <p:blipFill>
+          <a:blip r:embed="rId4"/>
+          <a:stretch>
+            <a:fillRect/>
+          </a:stretch>
+        </p:blipFill>
+        <p:spPr>
+          <a:xfrm>
+            <a:off x="8001000" y="2834640"/>
+            <a:ext cx="3291840" cy="2057400"/>
+          </a:xfrm>
+          <a:prstGeom prst="rect">
+            <a:avLst/>
+          </a:prstGeom>
+        </p:spPr>
+      </p:pic>
+      <p:sp>
+        <p:nvSpPr>
+          <p:cNvPr id="10" name="TextBox 9"/>
+          <p:cNvSpPr txBox="1"/>
+          <p:nvPr/>
+        </p:nvSpPr>
+        <p:spPr>
+          <a:xfrm>
+            <a:off x="8001000" y="4983480"/>
+            <a:ext cx="3291840" cy="731520"/>
+          </a:xfrm>
+          <a:prstGeom prst="rect">
+            <a:avLst/>
+          </a:prstGeom>
+          <a:noFill/>
+        </p:spPr>
+        <p:txBody>
+          <a:bodyPr wrap="square">
+            <a:spAutoFit/>
+          </a:bodyPr>
+          <a:lstStyle/>
+          <a:p>
+            <a:pPr algn="l">
+              <a:lnSpc>
+                <a:spcPct val="125000"/>
+              </a:lnSpc>
+            </a:pPr>
+            <a:r>
+              <a:rPr sz="1500" b="0">
+                <a:solidFill>
+                  <a:srgbClr val="6B7485"/>
+                </a:solidFill>
+                <a:latin typeface="微软雅黑"/>
+                <a:ea typeface="微软雅黑"/>
+                <a:cs typeface="微软雅黑"/>
+              </a:rPr>
+              <a:t>③ 也可以手动填表提交</a:t>
+            </a:r>
+          </a:p>
+        </p:txBody>
+      </p:sp>
+      <p:sp>
+        <p:nvSpPr>
+          <p:cNvPr id="11" name="TextBox 10"/>
+          <p:cNvSpPr txBox="1"/>
+          <p:nvPr/>
+        </p:nvSpPr>
+        <p:spPr>
+          <a:xfrm>
+            <a:off x="868680" y="5806440"/>
+            <a:ext cx="10424160" cy="457200"/>
+          </a:xfrm>
+          <a:prstGeom prst="rect">
+            <a:avLst/>
+          </a:prstGeom>
+          <a:noFill/>
+        </p:spPr>
+        <p:txBody>
+          <a:bodyPr wrap="square">
+            <a:spAutoFit/>
+          </a:bodyPr>
+          <a:lstStyle/>
+          <a:p>
+            <a:pPr algn="l">
+              <a:lnSpc>
+                <a:spcPct val="125000"/>
+              </a:lnSpc>
+            </a:pPr>
+            <a:r>
+              <a:rPr sz="1800" b="1">
+                <a:solidFill>
+                  <a:srgbClr val="FF8C42"/>
+                </a:solidFill>
+                <a:latin typeface="微软雅黑"/>
+                <a:ea typeface="微软雅黑"/>
+                <a:cs typeface="微软雅黑"/>
+              </a:rPr>
+              <a:t>识别到安全隐患，自动升级成紧急通知</a:t>
+            </a:r>
+          </a:p>
+        </p:txBody>
+      </p:sp>
+      <p:sp>
+        <p:nvSpPr>
+          <p:cNvPr id="12" name="Rectangle 11"/>
           <p:cNvSpPr/>
           <p:nvPr/>
         </p:nvSpPr>
@@ -14053,7 +14100,7 @@
       </p:sp>
       <p:sp>
         <p:nvSpPr>
-          <p:cNvPr id="11" name="TextBox 10"/>
+          <p:cNvPr id="13" name="TextBox 12"/>
           <p:cNvSpPr txBox="1"/>
           <p:nvPr/>
         </p:nvSpPr>
@@ -14094,7 +14141,7 @@
       </p:sp>
       <p:sp>
         <p:nvSpPr>
-          <p:cNvPr id="12" name="TextBox 11"/>
+          <p:cNvPr id="14" name="TextBox 13"/>
           <p:cNvSpPr txBox="1"/>
           <p:nvPr/>
         </p:nvSpPr>
@@ -15110,7 +15157,7 @@
       </p:sp>
       <p:pic>
         <p:nvPicPr>
-          <p:cNvPr id="4" name="Picture 3" descr="09-报修列表与状态.png"/>
+          <p:cNvPr id="4" name="Picture 3" descr="17-网格员端-工单处理.png"/>
           <p:cNvPicPr>
             <a:picLocks noChangeAspect="1"/>
           </p:cNvPicPr>
@@ -15192,7 +15239,7 @@
                 <a:ea typeface="微软雅黑"/>
                 <a:cs typeface="微软雅黑"/>
               </a:rPr>
-              <a:t>工单详情：谁在什么时候处理</a:t>
+              <a:t>工单处理：审核 / 派单 / 处理都在这</a:t>
             </a:r>
           </a:p>
         </p:txBody>
